--- a/blocks/B_robot_build/M07_physics_modeling/M07_Gazebo용_물리_요소_추가.pptx
+++ b/blocks/B_robot_build/M07_physics_modeling/M07_Gazebo용_물리_요소_추가.pptx
@@ -41,6 +41,9 @@
     <p:sldId id="289" r:id="rId41"/>
     <p:sldId id="290" r:id="rId42"/>
     <p:sldId id="291" r:id="rId43"/>
+    <p:sldId id="292" r:id="rId44"/>
+    <p:sldId id="293" r:id="rId45"/>
+    <p:sldId id="294" r:id="rId46"/>
   </p:sldIdLst>
   <p:sldSz cx="12191999" cy="6858000" type="screen4x3"/>
   <p:notesSz cx="6858000" cy="9144000"/>
@@ -627,7 +630,7 @@
           <a:lstStyle/>
           <a:p>
             <a:r>
-              <a:t>[설명] ~/agv_ws/src/agv_gazebo/models/agv/model.sdf의 전체 파일을 2/21 구간으로 작성한다.</a:t>
+              <a:t>[설명] ~/agv_ws/src/agv_gazebo/models/agv/model.sdf의 전체 파일을 2/24 구간으로 작성한다.</a:t>
             </a:r>
           </a:p>
           <a:p>
@@ -717,7 +720,7 @@
           <a:lstStyle/>
           <a:p>
             <a:r>
-              <a:t>[설명] ~/agv_ws/src/agv_gazebo/models/agv/model.sdf의 전체 파일을 3/21 구간으로 작성한다.</a:t>
+              <a:t>[설명] ~/agv_ws/src/agv_gazebo/models/agv/model.sdf의 전체 파일을 3/24 구간으로 작성한다.</a:t>
             </a:r>
           </a:p>
           <a:p>
@@ -807,7 +810,7 @@
           <a:lstStyle/>
           <a:p>
             <a:r>
-              <a:t>[설명] ~/agv_ws/src/agv_gazebo/models/agv/model.sdf의 전체 파일을 4/21 구간으로 작성한다.</a:t>
+              <a:t>[설명] ~/agv_ws/src/agv_gazebo/models/agv/model.sdf의 전체 파일을 4/24 구간으로 작성한다.</a:t>
             </a:r>
           </a:p>
           <a:p>
@@ -897,7 +900,7 @@
           <a:lstStyle/>
           <a:p>
             <a:r>
-              <a:t>[설명] ~/agv_ws/src/agv_gazebo/models/agv/model.sdf의 전체 파일을 5/21 구간으로 작성한다.</a:t>
+              <a:t>[설명] ~/agv_ws/src/agv_gazebo/models/agv/model.sdf의 전체 파일을 5/24 구간으로 작성한다.</a:t>
             </a:r>
           </a:p>
           <a:p>
@@ -987,7 +990,7 @@
           <a:lstStyle/>
           <a:p>
             <a:r>
-              <a:t>[설명] ~/agv_ws/src/agv_gazebo/models/agv/model.sdf의 전체 파일을 6/21 구간으로 작성한다.</a:t>
+              <a:t>[설명] ~/agv_ws/src/agv_gazebo/models/agv/model.sdf의 전체 파일을 6/24 구간으로 작성한다.</a:t>
             </a:r>
           </a:p>
           <a:p>
@@ -1077,7 +1080,7 @@
           <a:lstStyle/>
           <a:p>
             <a:r>
-              <a:t>[설명] ~/agv_ws/src/agv_gazebo/models/agv/model.sdf의 전체 파일을 7/21 구간으로 작성한다.</a:t>
+              <a:t>[설명] ~/agv_ws/src/agv_gazebo/models/agv/model.sdf의 전체 파일을 7/24 구간으로 작성한다.</a:t>
             </a:r>
           </a:p>
           <a:p>
@@ -1167,7 +1170,7 @@
           <a:lstStyle/>
           <a:p>
             <a:r>
-              <a:t>[설명] ~/agv_ws/src/agv_gazebo/models/agv/model.sdf의 전체 파일을 8/21 구간으로 작성한다.</a:t>
+              <a:t>[설명] ~/agv_ws/src/agv_gazebo/models/agv/model.sdf의 전체 파일을 8/24 구간으로 작성한다.</a:t>
             </a:r>
           </a:p>
           <a:p>
@@ -1257,7 +1260,7 @@
           <a:lstStyle/>
           <a:p>
             <a:r>
-              <a:t>[설명] ~/agv_ws/src/agv_gazebo/models/agv/model.sdf의 전체 파일을 9/21 구간으로 작성한다.</a:t>
+              <a:t>[설명] ~/agv_ws/src/agv_gazebo/models/agv/model.sdf의 전체 파일을 9/24 구간으로 작성한다.</a:t>
             </a:r>
           </a:p>
           <a:p>
@@ -1347,7 +1350,7 @@
           <a:lstStyle/>
           <a:p>
             <a:r>
-              <a:t>[설명] ~/agv_ws/src/agv_gazebo/models/agv/model.sdf의 전체 파일을 10/21 구간으로 작성한다.</a:t>
+              <a:t>[설명] ~/agv_ws/src/agv_gazebo/models/agv/model.sdf의 전체 파일을 10/24 구간으로 작성한다.</a:t>
             </a:r>
           </a:p>
           <a:p>
@@ -1437,7 +1440,7 @@
           <a:lstStyle/>
           <a:p>
             <a:r>
-              <a:t>[설명] ~/agv_ws/src/agv_gazebo/models/agv/model.sdf의 전체 파일을 11/21 구간으로 작성한다.</a:t>
+              <a:t>[설명] ~/agv_ws/src/agv_gazebo/models/agv/model.sdf의 전체 파일을 11/24 구간으로 작성한다.</a:t>
             </a:r>
           </a:p>
           <a:p>
@@ -1617,7 +1620,7 @@
           <a:lstStyle/>
           <a:p>
             <a:r>
-              <a:t>[설명] ~/agv_ws/src/agv_gazebo/models/agv/model.sdf의 전체 파일을 12/21 구간으로 작성한다.</a:t>
+              <a:t>[설명] ~/agv_ws/src/agv_gazebo/models/agv/model.sdf의 전체 파일을 12/24 구간으로 작성한다.</a:t>
             </a:r>
           </a:p>
           <a:p>
@@ -1707,7 +1710,7 @@
           <a:lstStyle/>
           <a:p>
             <a:r>
-              <a:t>[설명] ~/agv_ws/src/agv_gazebo/models/agv/model.sdf의 전체 파일을 13/21 구간으로 작성한다.</a:t>
+              <a:t>[설명] ~/agv_ws/src/agv_gazebo/models/agv/model.sdf의 전체 파일을 13/24 구간으로 작성한다.</a:t>
             </a:r>
           </a:p>
           <a:p>
@@ -1797,7 +1800,7 @@
           <a:lstStyle/>
           <a:p>
             <a:r>
-              <a:t>[설명] ~/agv_ws/src/agv_gazebo/models/agv/model.sdf의 전체 파일을 14/21 구간으로 작성한다.</a:t>
+              <a:t>[설명] ~/agv_ws/src/agv_gazebo/models/agv/model.sdf의 전체 파일을 14/24 구간으로 작성한다.</a:t>
             </a:r>
           </a:p>
           <a:p>
@@ -1887,7 +1890,7 @@
           <a:lstStyle/>
           <a:p>
             <a:r>
-              <a:t>[설명] ~/agv_ws/src/agv_gazebo/models/agv/model.sdf의 전체 파일을 15/21 구간으로 작성한다.</a:t>
+              <a:t>[설명] ~/agv_ws/src/agv_gazebo/models/agv/model.sdf의 전체 파일을 15/24 구간으로 작성한다.</a:t>
             </a:r>
           </a:p>
           <a:p>
@@ -1977,7 +1980,7 @@
           <a:lstStyle/>
           <a:p>
             <a:r>
-              <a:t>[설명] ~/agv_ws/src/agv_gazebo/models/agv/model.sdf의 전체 파일을 16/21 구간으로 작성한다.</a:t>
+              <a:t>[설명] ~/agv_ws/src/agv_gazebo/models/agv/model.sdf의 전체 파일을 16/24 구간으로 작성한다.</a:t>
             </a:r>
           </a:p>
           <a:p>
@@ -2067,7 +2070,7 @@
           <a:lstStyle/>
           <a:p>
             <a:r>
-              <a:t>[설명] ~/agv_ws/src/agv_gazebo/models/agv/model.sdf의 전체 파일을 17/21 구간으로 작성한다.</a:t>
+              <a:t>[설명] ~/agv_ws/src/agv_gazebo/models/agv/model.sdf의 전체 파일을 17/24 구간으로 작성한다.</a:t>
             </a:r>
           </a:p>
           <a:p>
@@ -2157,7 +2160,7 @@
           <a:lstStyle/>
           <a:p>
             <a:r>
-              <a:t>[설명] ~/agv_ws/src/agv_gazebo/models/agv/model.sdf의 전체 파일을 18/21 구간으로 작성한다.</a:t>
+              <a:t>[설명] ~/agv_ws/src/agv_gazebo/models/agv/model.sdf의 전체 파일을 18/24 구간으로 작성한다.</a:t>
             </a:r>
           </a:p>
           <a:p>
@@ -2247,7 +2250,7 @@
           <a:lstStyle/>
           <a:p>
             <a:r>
-              <a:t>[설명] ~/agv_ws/src/agv_gazebo/models/agv/model.sdf의 전체 파일을 19/21 구간으로 작성한다.</a:t>
+              <a:t>[설명] ~/agv_ws/src/agv_gazebo/models/agv/model.sdf의 전체 파일을 19/24 구간으로 작성한다.</a:t>
             </a:r>
           </a:p>
           <a:p>
@@ -2337,7 +2340,7 @@
           <a:lstStyle/>
           <a:p>
             <a:r>
-              <a:t>[설명] ~/agv_ws/src/agv_gazebo/models/agv/model.sdf의 전체 파일을 20/21 구간으로 작성한다.</a:t>
+              <a:t>[설명] ~/agv_ws/src/agv_gazebo/models/agv/model.sdf의 전체 파일을 20/24 구간으로 작성한다.</a:t>
             </a:r>
           </a:p>
           <a:p>
@@ -2427,7 +2430,7 @@
           <a:lstStyle/>
           <a:p>
             <a:r>
-              <a:t>[설명] ~/agv_ws/src/agv_gazebo/models/agv/model.sdf의 전체 파일을 21/21 구간으로 작성한다.</a:t>
+              <a:t>[설명] ~/agv_ws/src/agv_gazebo/models/agv/model.sdf의 전체 파일을 21/24 구간으로 작성한다.</a:t>
             </a:r>
           </a:p>
           <a:p>
@@ -2607,22 +2610,17 @@
           <a:lstStyle/>
           <a:p>
             <a:r>
-              <a:t>[설명] build/source/run을 생략 없이 실행한다.</a:t>
-            </a:r>
-          </a:p>
-          <a:p>
-            <a:r>
-              <a:t>[실행] cd ~/agv_ws &amp;&amp; source install/setup.bash</a:t>
-            </a:r>
-          </a:p>
-          <a:p>
-            <a:r>
-              <a:t>ros2 launch agv_gazebo gazebo.launch.py</a:t>
-            </a:r>
-          </a:p>
-          <a:p>
-            <a:r>
-              <a:t>[확인] AGV가 바닥에 안정적으로 놓이고 바퀴 접촉·충돌 파라미터가 모델에 존재한다.</a:t>
+              <a:t>[설명] ~/agv_ws/src/agv_gazebo/models/agv/model.sdf의 전체 파일을 22/24 구간으로 작성한다.</a:t>
+            </a:r>
+          </a:p>
+          <a:p>
+            <a:r>
+              <a:t>[실행] nano ~/agv_ws/src/agv_gazebo/models/agv/model.sdf</a:t>
+            </a:r>
+          </a:p>
+          <a:p>
+            <a:r>
+              <a:t>[확인] 코드를 저장하고 다음 코드 슬라이드 또는 build 단계로 이동한다.</a:t>
             </a:r>
           </a:p>
           <a:p>
@@ -2632,7 +2630,7 @@
           </a:p>
           <a:p>
             <a:r>
-              <a:t>[오류] 오류가 나면 현재 폴더, source, 파일 경로를 먼저 확인한다.</a:t>
+              <a:t>[오류] 들여쓰기·XML 태그·따옴표가 슬라이드와 정확히 같은지 확인한다.</a:t>
             </a:r>
           </a:p>
         </p:txBody>
@@ -2702,17 +2700,17 @@
           <a:lstStyle/>
           <a:p>
             <a:r>
-              <a:t>[설명] 실제 Ubuntu/ROS 2 환경에서 생성한 검증 화면이다.</a:t>
-            </a:r>
-          </a:p>
-          <a:p>
-            <a:r>
-              <a:t>[실행] 슬라이드의 명령 또는 파일 작성 단계를 진행한다.</a:t>
-            </a:r>
-          </a:p>
-          <a:p>
-            <a:r>
-              <a:t>[확인] 캡처의 명령과 다음 슬라이드의 검증 명령을 비교한다.</a:t>
+              <a:t>[설명] ~/agv_ws/src/agv_gazebo/models/agv/model.sdf의 전체 파일을 23/24 구간으로 작성한다.</a:t>
+            </a:r>
+          </a:p>
+          <a:p>
+            <a:r>
+              <a:t>[실행] nano ~/agv_ws/src/agv_gazebo/models/agv/model.sdf</a:t>
+            </a:r>
+          </a:p>
+          <a:p>
+            <a:r>
+              <a:t>[확인] 코드를 저장하고 다음 코드 슬라이드 또는 build 단계로 이동한다.</a:t>
             </a:r>
           </a:p>
           <a:p>
@@ -2722,7 +2720,7 @@
           </a:p>
           <a:p>
             <a:r>
-              <a:t>[오류] 오류가 나면 현재 폴더, source, 파일 경로를 먼저 확인한다.</a:t>
+              <a:t>[오류] 들여쓰기·XML 태그·따옴표가 슬라이드와 정확히 같은지 확인한다.</a:t>
             </a:r>
           </a:p>
         </p:txBody>
@@ -2792,17 +2790,17 @@
           <a:lstStyle/>
           <a:p>
             <a:r>
-              <a:t>[설명] 검증 명령은 GUI 결과와 별도로 실행해 재현 가능한 완료 기준을 만든다.</a:t>
-            </a:r>
-          </a:p>
-          <a:p>
-            <a:r>
-              <a:t>[실행] gz sdf -k ~/agv_ws/src/agv_gazebo/models/agv/model.sdf</a:t>
-            </a:r>
-          </a:p>
-          <a:p>
-            <a:r>
-              <a:t>[확인] AGV가 바닥에 안정적으로 놓이고 바퀴 접촉·충돌 파라미터가 모델에 존재한다.</a:t>
+              <a:t>[설명] ~/agv_ws/src/agv_gazebo/models/agv/model.sdf의 전체 파일을 24/24 구간으로 작성한다.</a:t>
+            </a:r>
+          </a:p>
+          <a:p>
+            <a:r>
+              <a:t>[실행] nano ~/agv_ws/src/agv_gazebo/models/agv/model.sdf</a:t>
+            </a:r>
+          </a:p>
+          <a:p>
+            <a:r>
+              <a:t>[확인] 코드를 저장하고 다음 코드 슬라이드 또는 build 단계로 이동한다.</a:t>
             </a:r>
           </a:p>
           <a:p>
@@ -2812,7 +2810,7 @@
           </a:p>
           <a:p>
             <a:r>
-              <a:t>[오류] 오류가 나면 현재 폴더, source, 파일 경로를 먼저 확인한다.</a:t>
+              <a:t>[오류] 들여쓰기·XML 태그·따옴표가 슬라이드와 정확히 같은지 확인한다.</a:t>
             </a:r>
           </a:p>
         </p:txBody>
@@ -2882,17 +2880,22 @@
           <a:lstStyle/>
           <a:p>
             <a:r>
-              <a:t>[설명] 오류를 대신 해결하지 말고 증상부터 우선 확인 순서대로 교육생이 실행하게 한다.</a:t>
-            </a:r>
-          </a:p>
-          <a:p>
-            <a:r>
-              <a:t>[실행] 슬라이드의 명령 또는 파일 작성 단계를 진행한다.</a:t>
-            </a:r>
-          </a:p>
-          <a:p>
-            <a:r>
-              <a:t>[확인] 수정 뒤 첫 검증 명령을 다시 실행한다.</a:t>
+              <a:t>[설명] build/source/run을 생략 없이 실행한다.</a:t>
+            </a:r>
+          </a:p>
+          <a:p>
+            <a:r>
+              <a:t>[실행] cd ~/agv_ws &amp;&amp; source install/setup.bash</a:t>
+            </a:r>
+          </a:p>
+          <a:p>
+            <a:r>
+              <a:t>ros2 launch agv_gazebo gazebo.launch.py</a:t>
+            </a:r>
+          </a:p>
+          <a:p>
+            <a:r>
+              <a:t>[확인] AGV가 바닥에 안정적으로 놓이고 바퀴 접촉·충돌 파라미터가 모델에 존재한다.</a:t>
             </a:r>
           </a:p>
           <a:p>
@@ -2902,7 +2905,7 @@
           </a:p>
           <a:p>
             <a:r>
-              <a:t>[오류] 슬라이드의 두 대표 오류를 먼저 사용한다.</a:t>
+              <a:t>[오류] 오류가 나면 현재 폴더, source, 파일 경로를 먼저 확인한다.</a:t>
             </a:r>
           </a:p>
         </p:txBody>
@@ -2972,7 +2975,7 @@
           <a:lstStyle/>
           <a:p>
             <a:r>
-              <a:t>[설명] 교육생이 직접 한 값만 바꿔 원인과 결과를 연결하게 한다.</a:t>
+              <a:t>[설명] 실제 Ubuntu/ROS 2 환경에서 생성한 검증 화면이다.</a:t>
             </a:r>
           </a:p>
           <a:p>
@@ -2982,7 +2985,7 @@
           </a:p>
           <a:p>
             <a:r>
-              <a:t>[확인] 원래 값과 변경 값을 모두 기록한다.</a:t>
+              <a:t>[확인] 캡처의 명령과 다음 슬라이드의 검증 명령을 비교한다.</a:t>
             </a:r>
           </a:p>
           <a:p>
@@ -3062,17 +3065,17 @@
           <a:lstStyle/>
           <a:p>
             <a:r>
-              <a:t>[설명] 교육생이 Complete·캡처·로그를 저장했는지 확인하고 다음 모듈의 시작 상태를 읽는다.</a:t>
-            </a:r>
-          </a:p>
-          <a:p>
-            <a:r>
-              <a:t>[실행] 슬라이드의 명령 또는 파일 작성 단계를 진행한다.</a:t>
-            </a:r>
-          </a:p>
-          <a:p>
-            <a:r>
-              <a:t>[확인] M08 World/Spawn 시작 조건을 말할 수 있다.</a:t>
+              <a:t>[설명] 검증 명령은 GUI 결과와 별도로 실행해 재현 가능한 완료 기준을 만든다.</a:t>
+            </a:r>
+          </a:p>
+          <a:p>
+            <a:r>
+              <a:t>[실행] gz sdf -k ~/agv_ws/src/agv_gazebo/models/agv/model.sdf</a:t>
+            </a:r>
+          </a:p>
+          <a:p>
+            <a:r>
+              <a:t>[확인] AGV가 바닥에 안정적으로 놓이고 바퀴 접촉·충돌 파라미터가 모델에 존재한다.</a:t>
             </a:r>
           </a:p>
           <a:p>
@@ -3152,6 +3155,276 @@
           <a:lstStyle/>
           <a:p>
             <a:r>
+              <a:t>[설명] 오류를 대신 해결하지 말고 증상부터 우선 확인 순서대로 교육생이 실행하게 한다.</a:t>
+            </a:r>
+          </a:p>
+          <a:p>
+            <a:r>
+              <a:t>[실행] 슬라이드의 명령 또는 파일 작성 단계를 진행한다.</a:t>
+            </a:r>
+          </a:p>
+          <a:p>
+            <a:r>
+              <a:t>[확인] 수정 뒤 첫 검증 명령을 다시 실행한다.</a:t>
+            </a:r>
+          </a:p>
+          <a:p>
+            <a:r>
+              <a:t>[멈춤] 교육생이 현재 체크포인트를 통과할 때까지 기다린다.</a:t>
+            </a:r>
+          </a:p>
+          <a:p>
+            <a:r>
+              <a:t>[오류] 슬라이드의 두 대표 오류를 먼저 사용한다.</a:t>
+            </a:r>
+          </a:p>
+        </p:txBody>
+      </p:sp>
+      <p:sp>
+        <p:nvSpPr>
+          <p:cNvPr id="4" name="Slide Number Placeholder 3"/>
+          <p:cNvSpPr>
+            <a:spLocks noGrp="1"/>
+          </p:cNvSpPr>
+          <p:nvPr>
+            <p:ph type="sldNum" idx="5" sz="quarter"/>
+          </p:nvPr>
+        </p:nvSpPr>
+        <p:spPr/>
+      </p:sp>
+    </p:spTree>
+  </p:cSld>
+  <p:clrMapOvr>
+    <a:masterClrMapping/>
+  </p:clrMapOvr>
+</p:notes>
+</file>
+
+<file path=ppt/notesSlides/notesSlide37.xml><?xml version="1.0" encoding="utf-8"?>
+<p:notes xmlns:a="http://schemas.openxmlformats.org/drawingml/2006/main" xmlns:p="http://schemas.openxmlformats.org/presentationml/2006/main" xmlns:r="http://schemas.openxmlformats.org/officeDocument/2006/relationships">
+  <p:cSld>
+    <p:spTree>
+      <p:nvGrpSpPr>
+        <p:cNvPr id="1" name=""/>
+        <p:cNvGrpSpPr/>
+        <p:nvPr/>
+      </p:nvGrpSpPr>
+      <p:grpSpPr>
+        <a:xfrm>
+          <a:off x="0" y="0"/>
+          <a:ext cx="0" cy="0"/>
+          <a:chOff x="0" y="0"/>
+          <a:chExt cx="0" cy="0"/>
+        </a:xfrm>
+      </p:grpSpPr>
+      <p:sp>
+        <p:nvSpPr>
+          <p:cNvPr id="2" name="Slide Image Placeholder 1"/>
+          <p:cNvSpPr>
+            <a:spLocks noGrp="1"/>
+          </p:cNvSpPr>
+          <p:nvPr>
+            <p:ph type="sldImg" idx="2"/>
+          </p:nvPr>
+        </p:nvSpPr>
+        <p:spPr/>
+      </p:sp>
+      <p:sp>
+        <p:nvSpPr>
+          <p:cNvPr id="3" name="Notes Placeholder 2"/>
+          <p:cNvSpPr>
+            <a:spLocks noGrp="1"/>
+          </p:cNvSpPr>
+          <p:nvPr>
+            <p:ph type="body" idx="3" sz="quarter"/>
+          </p:nvPr>
+        </p:nvSpPr>
+        <p:spPr/>
+        <p:txBody>
+          <a:bodyPr/>
+          <a:lstStyle/>
+          <a:p>
+            <a:r>
+              <a:t>[설명] 교육생이 직접 한 값만 바꿔 원인과 결과를 연결하게 한다.</a:t>
+            </a:r>
+          </a:p>
+          <a:p>
+            <a:r>
+              <a:t>[실행] 슬라이드의 명령 또는 파일 작성 단계를 진행한다.</a:t>
+            </a:r>
+          </a:p>
+          <a:p>
+            <a:r>
+              <a:t>[확인] 원래 값과 변경 값을 모두 기록한다.</a:t>
+            </a:r>
+          </a:p>
+          <a:p>
+            <a:r>
+              <a:t>[멈춤] 교육생이 현재 체크포인트를 통과할 때까지 기다린다.</a:t>
+            </a:r>
+          </a:p>
+          <a:p>
+            <a:r>
+              <a:t>[오류] 오류가 나면 현재 폴더, source, 파일 경로를 먼저 확인한다.</a:t>
+            </a:r>
+          </a:p>
+        </p:txBody>
+      </p:sp>
+      <p:sp>
+        <p:nvSpPr>
+          <p:cNvPr id="4" name="Slide Number Placeholder 3"/>
+          <p:cNvSpPr>
+            <a:spLocks noGrp="1"/>
+          </p:cNvSpPr>
+          <p:nvPr>
+            <p:ph type="sldNum" idx="5" sz="quarter"/>
+          </p:nvPr>
+        </p:nvSpPr>
+        <p:spPr/>
+      </p:sp>
+    </p:spTree>
+  </p:cSld>
+  <p:clrMapOvr>
+    <a:masterClrMapping/>
+  </p:clrMapOvr>
+</p:notes>
+</file>
+
+<file path=ppt/notesSlides/notesSlide38.xml><?xml version="1.0" encoding="utf-8"?>
+<p:notes xmlns:a="http://schemas.openxmlformats.org/drawingml/2006/main" xmlns:p="http://schemas.openxmlformats.org/presentationml/2006/main" xmlns:r="http://schemas.openxmlformats.org/officeDocument/2006/relationships">
+  <p:cSld>
+    <p:spTree>
+      <p:nvGrpSpPr>
+        <p:cNvPr id="1" name=""/>
+        <p:cNvGrpSpPr/>
+        <p:nvPr/>
+      </p:nvGrpSpPr>
+      <p:grpSpPr>
+        <a:xfrm>
+          <a:off x="0" y="0"/>
+          <a:ext cx="0" cy="0"/>
+          <a:chOff x="0" y="0"/>
+          <a:chExt cx="0" cy="0"/>
+        </a:xfrm>
+      </p:grpSpPr>
+      <p:sp>
+        <p:nvSpPr>
+          <p:cNvPr id="2" name="Slide Image Placeholder 1"/>
+          <p:cNvSpPr>
+            <a:spLocks noGrp="1"/>
+          </p:cNvSpPr>
+          <p:nvPr>
+            <p:ph type="sldImg" idx="2"/>
+          </p:nvPr>
+        </p:nvSpPr>
+        <p:spPr/>
+      </p:sp>
+      <p:sp>
+        <p:nvSpPr>
+          <p:cNvPr id="3" name="Notes Placeholder 2"/>
+          <p:cNvSpPr>
+            <a:spLocks noGrp="1"/>
+          </p:cNvSpPr>
+          <p:nvPr>
+            <p:ph type="body" idx="3" sz="quarter"/>
+          </p:nvPr>
+        </p:nvSpPr>
+        <p:spPr/>
+        <p:txBody>
+          <a:bodyPr/>
+          <a:lstStyle/>
+          <a:p>
+            <a:r>
+              <a:t>[설명] 교육생이 Complete·캡처·로그를 저장했는지 확인하고 다음 모듈의 시작 상태를 읽는다.</a:t>
+            </a:r>
+          </a:p>
+          <a:p>
+            <a:r>
+              <a:t>[실행] 슬라이드의 명령 또는 파일 작성 단계를 진행한다.</a:t>
+            </a:r>
+          </a:p>
+          <a:p>
+            <a:r>
+              <a:t>[확인] M08 World/Spawn 시작 조건을 말할 수 있다.</a:t>
+            </a:r>
+          </a:p>
+          <a:p>
+            <a:r>
+              <a:t>[멈춤] 교육생이 현재 체크포인트를 통과할 때까지 기다린다.</a:t>
+            </a:r>
+          </a:p>
+          <a:p>
+            <a:r>
+              <a:t>[오류] 오류가 나면 현재 폴더, source, 파일 경로를 먼저 확인한다.</a:t>
+            </a:r>
+          </a:p>
+        </p:txBody>
+      </p:sp>
+      <p:sp>
+        <p:nvSpPr>
+          <p:cNvPr id="4" name="Slide Number Placeholder 3"/>
+          <p:cNvSpPr>
+            <a:spLocks noGrp="1"/>
+          </p:cNvSpPr>
+          <p:nvPr>
+            <p:ph type="sldNum" idx="5" sz="quarter"/>
+          </p:nvPr>
+        </p:nvSpPr>
+        <p:spPr/>
+      </p:sp>
+    </p:spTree>
+  </p:cSld>
+  <p:clrMapOvr>
+    <a:masterClrMapping/>
+  </p:clrMapOvr>
+</p:notes>
+</file>
+
+<file path=ppt/notesSlides/notesSlide39.xml><?xml version="1.0" encoding="utf-8"?>
+<p:notes xmlns:a="http://schemas.openxmlformats.org/drawingml/2006/main" xmlns:p="http://schemas.openxmlformats.org/presentationml/2006/main" xmlns:r="http://schemas.openxmlformats.org/officeDocument/2006/relationships">
+  <p:cSld>
+    <p:spTree>
+      <p:nvGrpSpPr>
+        <p:cNvPr id="1" name=""/>
+        <p:cNvGrpSpPr/>
+        <p:nvPr/>
+      </p:nvGrpSpPr>
+      <p:grpSpPr>
+        <a:xfrm>
+          <a:off x="0" y="0"/>
+          <a:ext cx="0" cy="0"/>
+          <a:chOff x="0" y="0"/>
+          <a:chExt cx="0" cy="0"/>
+        </a:xfrm>
+      </p:grpSpPr>
+      <p:sp>
+        <p:nvSpPr>
+          <p:cNvPr id="2" name="Slide Image Placeholder 1"/>
+          <p:cNvSpPr>
+            <a:spLocks noGrp="1"/>
+          </p:cNvSpPr>
+          <p:nvPr>
+            <p:ph type="sldImg" idx="2"/>
+          </p:nvPr>
+        </p:nvSpPr>
+        <p:spPr/>
+      </p:sp>
+      <p:sp>
+        <p:nvSpPr>
+          <p:cNvPr id="3" name="Notes Placeholder 2"/>
+          <p:cNvSpPr>
+            <a:spLocks noGrp="1"/>
+          </p:cNvSpPr>
+          <p:nvPr>
+            <p:ph type="body" idx="3" sz="quarter"/>
+          </p:nvPr>
+        </p:nvSpPr>
+        <p:spPr/>
+        <p:txBody>
+          <a:bodyPr/>
+          <a:lstStyle/>
+          <a:p>
+            <a:r>
               <a:t>[설명] 공식 문서는 버전 차이와 확장 학습을 확인할 때 사용한다.</a:t>
             </a:r>
           </a:p>
@@ -3697,7 +3970,7 @@
           <a:lstStyle/>
           <a:p>
             <a:r>
-              <a:t>[설명] ~/agv_ws/src/agv_gazebo/models/agv/model.sdf의 전체 파일을 1/21 구간으로 작성한다.</a:t>
+              <a:t>[설명] ~/agv_ws/src/agv_gazebo/models/agv/model.sdf의 전체 파일을 1/24 구간으로 작성한다.</a:t>
             </a:r>
           </a:p>
           <a:p>
@@ -7090,7 +7363,7 @@
               </a:defRPr>
             </a:pPr>
             <a:r>
-              <a:t>파일을 계속 작성하고 저장한다 (2/21)</a:t>
+              <a:t>파일을 계속 작성하고 저장한다 (2/24)</a:t>
             </a:r>
           </a:p>
         </p:txBody>
@@ -7265,7 +7538,7 @@
               </a:defRPr>
             </a:pPr>
             <a:r>
-              <a:t>현재 단계 4/24    |    현재 폴더 ~/agv_ws    |    현재 터미널</a:t>
+              <a:t>현재 단계 4/27    |    현재 폴더 ~/agv_ws    |    현재 터미널</a:t>
             </a:r>
           </a:p>
         </p:txBody>
@@ -7278,8 +7551,8 @@
         </p:nvSpPr>
         <p:spPr>
           <a:xfrm>
-            <a:off x="658368" y="1682496"/>
-            <a:ext cx="10972800" cy="347472"/>
+            <a:off x="658368" y="1627632"/>
+            <a:ext cx="10972800" cy="256032"/>
           </a:xfrm>
           <a:prstGeom prst="rect">
             <a:avLst/>
@@ -7296,7 +7569,7 @@
               <a:spcAft>
                 <a:spcPts val="0"/>
               </a:spcAft>
-              <a:defRPr sz="1700" b="1">
+              <a:defRPr sz="1500" b="1">
                 <a:solidFill>
                   <a:srgbClr val="122C4E"/>
                 </a:solidFill>
@@ -7317,8 +7590,8 @@
         </p:nvSpPr>
         <p:spPr>
           <a:xfrm>
-            <a:off x="658368" y="2103120"/>
-            <a:ext cx="10972800" cy="493776"/>
+            <a:off x="658368" y="1956816"/>
+            <a:ext cx="10972800" cy="603504"/>
           </a:xfrm>
           <a:prstGeom prst="rect">
             <a:avLst/>
@@ -7362,7 +7635,11 @@
               </a:defRPr>
             </a:pPr>
             <a:r>
-              <a:t>파일 생성/열기: mkdir -p ~/agv_ws/src/agv_gazebo/models/agv    &amp;&amp;    nano ~/agv_ws/src/agv_gazebo/models/agv/model.sdf</a:t>
+              <a:t>파일 생성: mkdir -p ~/agv_ws/src/agv_gazebo/models/agv</a:t>
+            </a:r>
+            <a:br/>
+            <a:r>
+              <a:t>파일 열기: nano ~/agv_ws/src/agv_gazebo/models/agv/model.sdf</a:t>
             </a:r>
           </a:p>
         </p:txBody>
@@ -7375,8 +7652,8 @@
         </p:nvSpPr>
         <p:spPr>
           <a:xfrm>
-            <a:off x="658368" y="2761488"/>
-            <a:ext cx="10972800" cy="3383280"/>
+            <a:off x="658368" y="2706624"/>
+            <a:ext cx="10972800" cy="3364992"/>
           </a:xfrm>
           <a:prstGeom prst="rect">
             <a:avLst/>
@@ -7420,6 +7697,14 @@
               </a:defRPr>
             </a:pPr>
             <a:r>
+              <a:t>      </a:t>
+            </a:r>
+            <a:br/>
+            <a:r>
+              <a:t>      &lt;inertial&gt;</a:t>
+            </a:r>
+            <a:br/>
+            <a:r>
               <a:t>        &lt;mass&gt;12.0&lt;/mass&gt;</a:t>
             </a:r>
             <a:br/>
@@ -7457,22 +7742,6 @@
             <a:br/>
             <a:r>
               <a:t>      &lt;visual name="body"&gt;</a:t>
-            </a:r>
-            <a:br/>
-            <a:r>
-              <a:t>        &lt;geometry&gt;</a:t>
-            </a:r>
-            <a:br/>
-            <a:r>
-              <a:t>          &lt;box&gt;</a:t>
-            </a:r>
-            <a:br/>
-            <a:r>
-              <a:t>            &lt;size&gt;0.60 0.42 0.16&lt;/size&gt;</a:t>
-            </a:r>
-            <a:br/>
-            <a:r>
-              <a:t>          &lt;/box&gt;</a:t>
             </a:r>
           </a:p>
         </p:txBody>
@@ -7485,7 +7754,7 @@
         </p:nvSpPr>
         <p:spPr>
           <a:xfrm>
-            <a:off x="749808" y="6199632"/>
+            <a:off x="749808" y="6181344"/>
             <a:ext cx="10789920" cy="201168"/>
           </a:xfrm>
           <a:prstGeom prst="rect">
@@ -7511,7 +7780,7 @@
               </a:defRPr>
             </a:pPr>
             <a:r>
-              <a:t>파일 전체 2/21 · 이 슬라이드 다음에 같은 파일의 나머지 줄이 이어집니다.</a:t>
+              <a:t>파일 전체 2/24 · 이 슬라이드 다음에 같은 파일의 나머지 줄이 이어집니다.</a:t>
             </a:r>
           </a:p>
         </p:txBody>
@@ -7568,7 +7837,7 @@
               </a:defRPr>
             </a:pPr>
             <a:r>
-              <a:t>파일을 계속 작성하고 저장한다 (3/21)</a:t>
+              <a:t>파일을 계속 작성하고 저장한다 (3/24)</a:t>
             </a:r>
           </a:p>
         </p:txBody>
@@ -7743,7 +8012,7 @@
               </a:defRPr>
             </a:pPr>
             <a:r>
-              <a:t>현재 단계 5/24    |    현재 폴더 ~/agv_ws    |    현재 터미널</a:t>
+              <a:t>현재 단계 5/27    |    현재 폴더 ~/agv_ws    |    현재 터미널</a:t>
             </a:r>
           </a:p>
         </p:txBody>
@@ -7756,8 +8025,8 @@
         </p:nvSpPr>
         <p:spPr>
           <a:xfrm>
-            <a:off x="658368" y="1682496"/>
-            <a:ext cx="10972800" cy="347472"/>
+            <a:off x="658368" y="1627632"/>
+            <a:ext cx="10972800" cy="256032"/>
           </a:xfrm>
           <a:prstGeom prst="rect">
             <a:avLst/>
@@ -7774,7 +8043,7 @@
               <a:spcAft>
                 <a:spcPts val="0"/>
               </a:spcAft>
-              <a:defRPr sz="1700" b="1">
+              <a:defRPr sz="1500" b="1">
                 <a:solidFill>
                   <a:srgbClr val="122C4E"/>
                 </a:solidFill>
@@ -7795,8 +8064,8 @@
         </p:nvSpPr>
         <p:spPr>
           <a:xfrm>
-            <a:off x="658368" y="2103120"/>
-            <a:ext cx="10972800" cy="493776"/>
+            <a:off x="658368" y="1956816"/>
+            <a:ext cx="10972800" cy="603504"/>
           </a:xfrm>
           <a:prstGeom prst="rect">
             <a:avLst/>
@@ -7840,7 +8109,11 @@
               </a:defRPr>
             </a:pPr>
             <a:r>
-              <a:t>파일 생성/열기: mkdir -p ~/agv_ws/src/agv_gazebo/models/agv    &amp;&amp;    nano ~/agv_ws/src/agv_gazebo/models/agv/model.sdf</a:t>
+              <a:t>파일 생성: mkdir -p ~/agv_ws/src/agv_gazebo/models/agv</a:t>
+            </a:r>
+            <a:br/>
+            <a:r>
+              <a:t>파일 열기: nano ~/agv_ws/src/agv_gazebo/models/agv/model.sdf</a:t>
             </a:r>
           </a:p>
         </p:txBody>
@@ -7853,8 +8126,8 @@
         </p:nvSpPr>
         <p:spPr>
           <a:xfrm>
-            <a:off x="658368" y="2761488"/>
-            <a:ext cx="10972800" cy="3383280"/>
+            <a:off x="658368" y="2706624"/>
+            <a:ext cx="10972800" cy="3364992"/>
           </a:xfrm>
           <a:prstGeom prst="rect">
             <a:avLst/>
@@ -7898,6 +8171,22 @@
               </a:defRPr>
             </a:pPr>
             <a:r>
+              <a:t>        &lt;geometry&gt;</a:t>
+            </a:r>
+            <a:br/>
+            <a:r>
+              <a:t>          &lt;box&gt;</a:t>
+            </a:r>
+            <a:br/>
+            <a:r>
+              <a:t>            &lt;size&gt;0.60 0.42 0.16&lt;/size&gt;</a:t>
+            </a:r>
+            <a:br/>
+            <a:r>
+              <a:t>          &lt;/box&gt;</a:t>
+            </a:r>
+            <a:br/>
+            <a:r>
               <a:t>        &lt;/geometry&gt;</a:t>
             </a:r>
             <a:br/>
@@ -7927,30 +8216,6 @@
             <a:br/>
             <a:r>
               <a:t>      &lt;collision name="body_collision"&gt;</a:t>
-            </a:r>
-            <a:br/>
-            <a:r>
-              <a:t>        &lt;geometry&gt;</a:t>
-            </a:r>
-            <a:br/>
-            <a:r>
-              <a:t>          &lt;box&gt;</a:t>
-            </a:r>
-            <a:br/>
-            <a:r>
-              <a:t>            &lt;size&gt;0.60 0.42 0.16&lt;/size&gt;</a:t>
-            </a:r>
-            <a:br/>
-            <a:r>
-              <a:t>          &lt;/box&gt;</a:t>
-            </a:r>
-            <a:br/>
-            <a:r>
-              <a:t>        &lt;/geometry&gt;</a:t>
-            </a:r>
-            <a:br/>
-            <a:r>
-              <a:t>      &lt;/collision&gt;</a:t>
             </a:r>
           </a:p>
         </p:txBody>
@@ -7963,7 +8228,7 @@
         </p:nvSpPr>
         <p:spPr>
           <a:xfrm>
-            <a:off x="749808" y="6199632"/>
+            <a:off x="749808" y="6181344"/>
             <a:ext cx="10789920" cy="201168"/>
           </a:xfrm>
           <a:prstGeom prst="rect">
@@ -7989,7 +8254,7 @@
               </a:defRPr>
             </a:pPr>
             <a:r>
-              <a:t>파일 전체 3/21 · 이 슬라이드 다음에 같은 파일의 나머지 줄이 이어집니다.</a:t>
+              <a:t>파일 전체 3/24 · 이 슬라이드 다음에 같은 파일의 나머지 줄이 이어집니다.</a:t>
             </a:r>
           </a:p>
         </p:txBody>
@@ -8046,7 +8311,7 @@
               </a:defRPr>
             </a:pPr>
             <a:r>
-              <a:t>파일을 계속 작성하고 저장한다 (4/21)</a:t>
+              <a:t>파일을 계속 작성하고 저장한다 (4/24)</a:t>
             </a:r>
           </a:p>
         </p:txBody>
@@ -8221,7 +8486,7 @@
               </a:defRPr>
             </a:pPr>
             <a:r>
-              <a:t>현재 단계 6/24    |    현재 폴더 ~/agv_ws    |    현재 터미널</a:t>
+              <a:t>현재 단계 6/27    |    현재 폴더 ~/agv_ws    |    현재 터미널</a:t>
             </a:r>
           </a:p>
         </p:txBody>
@@ -8234,8 +8499,8 @@
         </p:nvSpPr>
         <p:spPr>
           <a:xfrm>
-            <a:off x="658368" y="1682496"/>
-            <a:ext cx="10972800" cy="347472"/>
+            <a:off x="658368" y="1627632"/>
+            <a:ext cx="10972800" cy="256032"/>
           </a:xfrm>
           <a:prstGeom prst="rect">
             <a:avLst/>
@@ -8252,7 +8517,7 @@
               <a:spcAft>
                 <a:spcPts val="0"/>
               </a:spcAft>
-              <a:defRPr sz="1700" b="1">
+              <a:defRPr sz="1500" b="1">
                 <a:solidFill>
                   <a:srgbClr val="122C4E"/>
                 </a:solidFill>
@@ -8273,8 +8538,8 @@
         </p:nvSpPr>
         <p:spPr>
           <a:xfrm>
-            <a:off x="658368" y="2103120"/>
-            <a:ext cx="10972800" cy="493776"/>
+            <a:off x="658368" y="1956816"/>
+            <a:ext cx="10972800" cy="603504"/>
           </a:xfrm>
           <a:prstGeom prst="rect">
             <a:avLst/>
@@ -8318,7 +8583,11 @@
               </a:defRPr>
             </a:pPr>
             <a:r>
-              <a:t>파일 생성/열기: mkdir -p ~/agv_ws/src/agv_gazebo/models/agv    &amp;&amp;    nano ~/agv_ws/src/agv_gazebo/models/agv/model.sdf</a:t>
+              <a:t>파일 생성: mkdir -p ~/agv_ws/src/agv_gazebo/models/agv</a:t>
+            </a:r>
+            <a:br/>
+            <a:r>
+              <a:t>파일 열기: nano ~/agv_ws/src/agv_gazebo/models/agv/model.sdf</a:t>
             </a:r>
           </a:p>
         </p:txBody>
@@ -8331,8 +8600,8 @@
         </p:nvSpPr>
         <p:spPr>
           <a:xfrm>
-            <a:off x="658368" y="2761488"/>
-            <a:ext cx="10972800" cy="3383280"/>
+            <a:off x="658368" y="2706624"/>
+            <a:ext cx="10972800" cy="3364992"/>
           </a:xfrm>
           <a:prstGeom prst="rect">
             <a:avLst/>
@@ -8376,6 +8645,30 @@
               </a:defRPr>
             </a:pPr>
             <a:r>
+              <a:t>        &lt;geometry&gt;</a:t>
+            </a:r>
+            <a:br/>
+            <a:r>
+              <a:t>          &lt;box&gt;</a:t>
+            </a:r>
+            <a:br/>
+            <a:r>
+              <a:t>            &lt;size&gt;0.60 0.42 0.16&lt;/size&gt;</a:t>
+            </a:r>
+            <a:br/>
+            <a:r>
+              <a:t>          &lt;/box&gt;</a:t>
+            </a:r>
+            <a:br/>
+            <a:r>
+              <a:t>        &lt;/geometry&gt;</a:t>
+            </a:r>
+            <a:br/>
+            <a:r>
+              <a:t>      &lt;/collision&gt;</a:t>
+            </a:r>
+            <a:br/>
+            <a:r>
               <a:t>      </a:t>
             </a:r>
             <a:br/>
@@ -8397,38 +8690,6 @@
             <a:br/>
             <a:r>
               <a:t>        &lt;update_rate&gt;100&lt;/update_rate&gt;</a:t>
-            </a:r>
-            <a:br/>
-            <a:r>
-              <a:t>        &lt;imu&gt;</a:t>
-            </a:r>
-            <a:br/>
-            <a:r>
-              <a:t>          &lt;angular_velocity&gt;</a:t>
-            </a:r>
-            <a:br/>
-            <a:r>
-              <a:t>            &lt;x&gt;</a:t>
-            </a:r>
-            <a:br/>
-            <a:r>
-              <a:t>              &lt;noise type="gaussian"&gt;</a:t>
-            </a:r>
-            <a:br/>
-            <a:r>
-              <a:t>                &lt;mean&gt;0&lt;/mean&gt;</a:t>
-            </a:r>
-            <a:br/>
-            <a:r>
-              <a:t>                &lt;stddev&gt;0.001&lt;/stddev&gt;</a:t>
-            </a:r>
-            <a:br/>
-            <a:r>
-              <a:t>              &lt;/noise&gt;</a:t>
-            </a:r>
-            <a:br/>
-            <a:r>
-              <a:t>            &lt;/x&gt;</a:t>
             </a:r>
           </a:p>
         </p:txBody>
@@ -8441,7 +8702,7 @@
         </p:nvSpPr>
         <p:spPr>
           <a:xfrm>
-            <a:off x="749808" y="6199632"/>
+            <a:off x="749808" y="6181344"/>
             <a:ext cx="10789920" cy="201168"/>
           </a:xfrm>
           <a:prstGeom prst="rect">
@@ -8467,7 +8728,7 @@
               </a:defRPr>
             </a:pPr>
             <a:r>
-              <a:t>파일 전체 4/21 · 이 슬라이드 다음에 같은 파일의 나머지 줄이 이어집니다.</a:t>
+              <a:t>파일 전체 4/24 · 이 슬라이드 다음에 같은 파일의 나머지 줄이 이어집니다.</a:t>
             </a:r>
           </a:p>
         </p:txBody>
@@ -8524,7 +8785,7 @@
               </a:defRPr>
             </a:pPr>
             <a:r>
-              <a:t>파일을 계속 작성하고 저장한다 (5/21)</a:t>
+              <a:t>파일을 계속 작성하고 저장한다 (5/24)</a:t>
             </a:r>
           </a:p>
         </p:txBody>
@@ -8699,7 +8960,7 @@
               </a:defRPr>
             </a:pPr>
             <a:r>
-              <a:t>현재 단계 7/24    |    현재 폴더 ~/agv_ws    |    현재 터미널</a:t>
+              <a:t>현재 단계 7/27    |    현재 폴더 ~/agv_ws    |    현재 터미널</a:t>
             </a:r>
           </a:p>
         </p:txBody>
@@ -8712,8 +8973,8 @@
         </p:nvSpPr>
         <p:spPr>
           <a:xfrm>
-            <a:off x="658368" y="1682496"/>
-            <a:ext cx="10972800" cy="347472"/>
+            <a:off x="658368" y="1627632"/>
+            <a:ext cx="10972800" cy="256032"/>
           </a:xfrm>
           <a:prstGeom prst="rect">
             <a:avLst/>
@@ -8730,7 +8991,7 @@
               <a:spcAft>
                 <a:spcPts val="0"/>
               </a:spcAft>
-              <a:defRPr sz="1700" b="1">
+              <a:defRPr sz="1500" b="1">
                 <a:solidFill>
                   <a:srgbClr val="122C4E"/>
                 </a:solidFill>
@@ -8751,8 +9012,8 @@
         </p:nvSpPr>
         <p:spPr>
           <a:xfrm>
-            <a:off x="658368" y="2103120"/>
-            <a:ext cx="10972800" cy="493776"/>
+            <a:off x="658368" y="1956816"/>
+            <a:ext cx="10972800" cy="603504"/>
           </a:xfrm>
           <a:prstGeom prst="rect">
             <a:avLst/>
@@ -8796,7 +9057,11 @@
               </a:defRPr>
             </a:pPr>
             <a:r>
-              <a:t>파일 생성/열기: mkdir -p ~/agv_ws/src/agv_gazebo/models/agv    &amp;&amp;    nano ~/agv_ws/src/agv_gazebo/models/agv/model.sdf</a:t>
+              <a:t>파일 생성: mkdir -p ~/agv_ws/src/agv_gazebo/models/agv</a:t>
+            </a:r>
+            <a:br/>
+            <a:r>
+              <a:t>파일 열기: nano ~/agv_ws/src/agv_gazebo/models/agv/model.sdf</a:t>
             </a:r>
           </a:p>
         </p:txBody>
@@ -8809,8 +9074,8 @@
         </p:nvSpPr>
         <p:spPr>
           <a:xfrm>
-            <a:off x="658368" y="2761488"/>
-            <a:ext cx="10972800" cy="3383280"/>
+            <a:off x="658368" y="2706624"/>
+            <a:ext cx="10972800" cy="3364992"/>
           </a:xfrm>
           <a:prstGeom prst="rect">
             <a:avLst/>
@@ -8854,6 +9119,38 @@
               </a:defRPr>
             </a:pPr>
             <a:r>
+              <a:t>        &lt;imu&gt;</a:t>
+            </a:r>
+            <a:br/>
+            <a:r>
+              <a:t>          &lt;angular_velocity&gt;</a:t>
+            </a:r>
+            <a:br/>
+            <a:r>
+              <a:t>            &lt;x&gt;</a:t>
+            </a:r>
+            <a:br/>
+            <a:r>
+              <a:t>              &lt;noise type="gaussian"&gt;</a:t>
+            </a:r>
+            <a:br/>
+            <a:r>
+              <a:t>                &lt;mean&gt;0&lt;/mean&gt;</a:t>
+            </a:r>
+            <a:br/>
+            <a:r>
+              <a:t>                &lt;stddev&gt;0.001&lt;/stddev&gt;</a:t>
+            </a:r>
+            <a:br/>
+            <a:r>
+              <a:t>              &lt;/noise&gt;</a:t>
+            </a:r>
+            <a:br/>
+            <a:r>
+              <a:t>            &lt;/x&gt;</a:t>
+            </a:r>
+            <a:br/>
+            <a:r>
               <a:t>          &lt;/angular_velocity&gt;</a:t>
             </a:r>
             <a:br/>
@@ -8867,46 +9164,6 @@
             <a:br/>
             <a:r>
               <a:t>      </a:t>
-            </a:r>
-            <a:br/>
-            <a:r>
-              <a:t>    </a:t>
-            </a:r>
-            <a:br/>
-            <a:r>
-              <a:t>    &lt;/link&gt;</a:t>
-            </a:r>
-            <a:br/>
-            <a:r>
-              <a:t>    </a:t>
-            </a:r>
-            <a:br/>
-            <a:r>
-              <a:t>    </a:t>
-            </a:r>
-            <a:br/>
-            <a:r>
-              <a:t>    &lt;link name="left_wheel_link"&gt;</a:t>
-            </a:r>
-            <a:br/>
-            <a:r>
-              <a:t>      &lt;pose relative_to="base_link"&gt;0 0.19 -0.08 1.5708 0 0&lt;/pose&gt;</a:t>
-            </a:r>
-            <a:br/>
-            <a:r>
-              <a:t>      &lt;inertial&gt;</a:t>
-            </a:r>
-            <a:br/>
-            <a:r>
-              <a:t>        &lt;mass&gt;0.6&lt;/mass&gt;</a:t>
-            </a:r>
-            <a:br/>
-            <a:r>
-              <a:t>        &lt;inertia&gt;</a:t>
-            </a:r>
-            <a:br/>
-            <a:r>
-              <a:t>          &lt;ixx&gt;0.002&lt;/ixx&gt;</a:t>
             </a:r>
           </a:p>
         </p:txBody>
@@ -8919,7 +9176,7 @@
         </p:nvSpPr>
         <p:spPr>
           <a:xfrm>
-            <a:off x="749808" y="6199632"/>
+            <a:off x="749808" y="6181344"/>
             <a:ext cx="10789920" cy="201168"/>
           </a:xfrm>
           <a:prstGeom prst="rect">
@@ -8945,7 +9202,7 @@
               </a:defRPr>
             </a:pPr>
             <a:r>
-              <a:t>파일 전체 5/21 · 이 슬라이드 다음에 같은 파일의 나머지 줄이 이어집니다.</a:t>
+              <a:t>파일 전체 5/24 · 이 슬라이드 다음에 같은 파일의 나머지 줄이 이어집니다.</a:t>
             </a:r>
           </a:p>
         </p:txBody>
@@ -9002,7 +9259,7 @@
               </a:defRPr>
             </a:pPr>
             <a:r>
-              <a:t>파일을 계속 작성하고 저장한다 (6/21)</a:t>
+              <a:t>파일을 계속 작성하고 저장한다 (6/24)</a:t>
             </a:r>
           </a:p>
         </p:txBody>
@@ -9177,7 +9434,7 @@
               </a:defRPr>
             </a:pPr>
             <a:r>
-              <a:t>현재 단계 8/24    |    현재 폴더 ~/agv_ws    |    현재 터미널</a:t>
+              <a:t>현재 단계 8/27    |    현재 폴더 ~/agv_ws    |    현재 터미널</a:t>
             </a:r>
           </a:p>
         </p:txBody>
@@ -9190,8 +9447,8 @@
         </p:nvSpPr>
         <p:spPr>
           <a:xfrm>
-            <a:off x="658368" y="1682496"/>
-            <a:ext cx="10972800" cy="347472"/>
+            <a:off x="658368" y="1627632"/>
+            <a:ext cx="10972800" cy="256032"/>
           </a:xfrm>
           <a:prstGeom prst="rect">
             <a:avLst/>
@@ -9208,7 +9465,7 @@
               <a:spcAft>
                 <a:spcPts val="0"/>
               </a:spcAft>
-              <a:defRPr sz="1700" b="1">
+              <a:defRPr sz="1500" b="1">
                 <a:solidFill>
                   <a:srgbClr val="122C4E"/>
                 </a:solidFill>
@@ -9229,8 +9486,8 @@
         </p:nvSpPr>
         <p:spPr>
           <a:xfrm>
-            <a:off x="658368" y="2103120"/>
-            <a:ext cx="10972800" cy="493776"/>
+            <a:off x="658368" y="1956816"/>
+            <a:ext cx="10972800" cy="603504"/>
           </a:xfrm>
           <a:prstGeom prst="rect">
             <a:avLst/>
@@ -9274,7 +9531,11 @@
               </a:defRPr>
             </a:pPr>
             <a:r>
-              <a:t>파일 생성/열기: mkdir -p ~/agv_ws/src/agv_gazebo/models/agv    &amp;&amp;    nano ~/agv_ws/src/agv_gazebo/models/agv/model.sdf</a:t>
+              <a:t>파일 생성: mkdir -p ~/agv_ws/src/agv_gazebo/models/agv</a:t>
+            </a:r>
+            <a:br/>
+            <a:r>
+              <a:t>파일 열기: nano ~/agv_ws/src/agv_gazebo/models/agv/model.sdf</a:t>
             </a:r>
           </a:p>
         </p:txBody>
@@ -9287,8 +9548,8 @@
         </p:nvSpPr>
         <p:spPr>
           <a:xfrm>
-            <a:off x="658368" y="2761488"/>
-            <a:ext cx="10972800" cy="3383280"/>
+            <a:off x="658368" y="2706624"/>
+            <a:ext cx="10972800" cy="3364992"/>
           </a:xfrm>
           <a:prstGeom prst="rect">
             <a:avLst/>
@@ -9332,59 +9593,51 @@
               </a:defRPr>
             </a:pPr>
             <a:r>
+              <a:t>    </a:t>
+            </a:r>
+            <a:br/>
+            <a:r>
+              <a:t>    &lt;/link&gt;</a:t>
+            </a:r>
+            <a:br/>
+            <a:r>
+              <a:t>    </a:t>
+            </a:r>
+            <a:br/>
+            <a:r>
+              <a:t>    </a:t>
+            </a:r>
+            <a:br/>
+            <a:r>
+              <a:t>    &lt;link name="left_wheel_link"&gt;</a:t>
+            </a:r>
+            <a:br/>
+            <a:r>
+              <a:t>      &lt;pose relative_to="base_link"&gt;0 0.19 -0.08 1.5708 0 0&lt;/pose&gt;</a:t>
+            </a:r>
+            <a:br/>
+            <a:r>
+              <a:t>      &lt;inertial&gt;</a:t>
+            </a:r>
+            <a:br/>
+            <a:r>
+              <a:t>        &lt;mass&gt;0.6&lt;/mass&gt;</a:t>
+            </a:r>
+            <a:br/>
+            <a:r>
+              <a:t>        &lt;inertia&gt;</a:t>
+            </a:r>
+            <a:br/>
+            <a:r>
+              <a:t>          &lt;ixx&gt;0.002&lt;/ixx&gt;</a:t>
+            </a:r>
+            <a:br/>
+            <a:r>
               <a:t>          &lt;iyy&gt;0.002&lt;/iyy&gt;</a:t>
             </a:r>
             <a:br/>
             <a:r>
               <a:t>          &lt;izz&gt;0.001&lt;/izz&gt;</a:t>
-            </a:r>
-            <a:br/>
-            <a:r>
-              <a:t>        &lt;/inertia&gt;</a:t>
-            </a:r>
-            <a:br/>
-            <a:r>
-              <a:t>      &lt;/inertial&gt;</a:t>
-            </a:r>
-            <a:br/>
-            <a:r>
-              <a:t>      &lt;visual name="wheel"&gt;</a:t>
-            </a:r>
-            <a:br/>
-            <a:r>
-              <a:t>        &lt;geometry&gt;</a:t>
-            </a:r>
-            <a:br/>
-            <a:r>
-              <a:t>          &lt;cylinder&gt;</a:t>
-            </a:r>
-            <a:br/>
-            <a:r>
-              <a:t>            &lt;radius&gt;0.08&lt;/radius&gt;</a:t>
-            </a:r>
-            <a:br/>
-            <a:r>
-              <a:t>            &lt;length&gt;0.05&lt;/length&gt;</a:t>
-            </a:r>
-            <a:br/>
-            <a:r>
-              <a:t>          &lt;/cylinder&gt;</a:t>
-            </a:r>
-            <a:br/>
-            <a:r>
-              <a:t>        &lt;/geometry&gt;</a:t>
-            </a:r>
-            <a:br/>
-            <a:r>
-              <a:t>      &lt;/visual&gt;</a:t>
-            </a:r>
-            <a:br/>
-            <a:r>
-              <a:t>      &lt;collision name="wheel_collision"&gt;</a:t>
-            </a:r>
-            <a:br/>
-            <a:r>
-              <a:t>        &lt;geometry&gt;</a:t>
             </a:r>
           </a:p>
         </p:txBody>
@@ -9397,7 +9650,7 @@
         </p:nvSpPr>
         <p:spPr>
           <a:xfrm>
-            <a:off x="749808" y="6199632"/>
+            <a:off x="749808" y="6181344"/>
             <a:ext cx="10789920" cy="201168"/>
           </a:xfrm>
           <a:prstGeom prst="rect">
@@ -9423,7 +9676,7 @@
               </a:defRPr>
             </a:pPr>
             <a:r>
-              <a:t>파일 전체 6/21 · 이 슬라이드 다음에 같은 파일의 나머지 줄이 이어집니다.</a:t>
+              <a:t>파일 전체 6/24 · 이 슬라이드 다음에 같은 파일의 나머지 줄이 이어집니다.</a:t>
             </a:r>
           </a:p>
         </p:txBody>
@@ -9480,7 +9733,7 @@
               </a:defRPr>
             </a:pPr>
             <a:r>
-              <a:t>파일을 계속 작성하고 저장한다 (7/21)</a:t>
+              <a:t>파일을 계속 작성하고 저장한다 (7/24)</a:t>
             </a:r>
           </a:p>
         </p:txBody>
@@ -9655,7 +9908,7 @@
               </a:defRPr>
             </a:pPr>
             <a:r>
-              <a:t>현재 단계 9/24    |    현재 폴더 ~/agv_ws    |    현재 터미널</a:t>
+              <a:t>현재 단계 9/27    |    현재 폴더 ~/agv_ws    |    현재 터미널</a:t>
             </a:r>
           </a:p>
         </p:txBody>
@@ -9668,8 +9921,8 @@
         </p:nvSpPr>
         <p:spPr>
           <a:xfrm>
-            <a:off x="658368" y="1682496"/>
-            <a:ext cx="10972800" cy="347472"/>
+            <a:off x="658368" y="1627632"/>
+            <a:ext cx="10972800" cy="256032"/>
           </a:xfrm>
           <a:prstGeom prst="rect">
             <a:avLst/>
@@ -9686,7 +9939,7 @@
               <a:spcAft>
                 <a:spcPts val="0"/>
               </a:spcAft>
-              <a:defRPr sz="1700" b="1">
+              <a:defRPr sz="1500" b="1">
                 <a:solidFill>
                   <a:srgbClr val="122C4E"/>
                 </a:solidFill>
@@ -9707,8 +9960,8 @@
         </p:nvSpPr>
         <p:spPr>
           <a:xfrm>
-            <a:off x="658368" y="2103120"/>
-            <a:ext cx="10972800" cy="493776"/>
+            <a:off x="658368" y="1956816"/>
+            <a:ext cx="10972800" cy="603504"/>
           </a:xfrm>
           <a:prstGeom prst="rect">
             <a:avLst/>
@@ -9752,7 +10005,11 @@
               </a:defRPr>
             </a:pPr>
             <a:r>
-              <a:t>파일 생성/열기: mkdir -p ~/agv_ws/src/agv_gazebo/models/agv    &amp;&amp;    nano ~/agv_ws/src/agv_gazebo/models/agv/model.sdf</a:t>
+              <a:t>파일 생성: mkdir -p ~/agv_ws/src/agv_gazebo/models/agv</a:t>
+            </a:r>
+            <a:br/>
+            <a:r>
+              <a:t>파일 열기: nano ~/agv_ws/src/agv_gazebo/models/agv/model.sdf</a:t>
             </a:r>
           </a:p>
         </p:txBody>
@@ -9765,8 +10022,8 @@
         </p:nvSpPr>
         <p:spPr>
           <a:xfrm>
-            <a:off x="658368" y="2761488"/>
-            <a:ext cx="10972800" cy="3383280"/>
+            <a:off x="658368" y="2706624"/>
+            <a:ext cx="10972800" cy="3364992"/>
           </a:xfrm>
           <a:prstGeom prst="rect">
             <a:avLst/>
@@ -9810,6 +10067,22 @@
               </a:defRPr>
             </a:pPr>
             <a:r>
+              <a:t>        &lt;/inertia&gt;</a:t>
+            </a:r>
+            <a:br/>
+            <a:r>
+              <a:t>      &lt;/inertial&gt;</a:t>
+            </a:r>
+            <a:br/>
+            <a:r>
+              <a:t>      &lt;visual name="wheel"&gt;</a:t>
+            </a:r>
+            <a:br/>
+            <a:r>
+              <a:t>        &lt;geometry&gt;</a:t>
+            </a:r>
+            <a:br/>
+            <a:r>
               <a:t>          &lt;cylinder&gt;</a:t>
             </a:r>
             <a:br/>
@@ -9830,39 +10103,15 @@
             </a:r>
             <a:br/>
             <a:r>
-              <a:t>        &lt;surface&gt;</a:t>
-            </a:r>
-            <a:br/>
-            <a:r>
-              <a:t>          &lt;friction&gt;</a:t>
-            </a:r>
-            <a:br/>
-            <a:r>
-              <a:t>            &lt;ode&gt;</a:t>
-            </a:r>
-            <a:br/>
-            <a:r>
-              <a:t>              &lt;mu&gt;1.0&lt;/mu&gt;</a:t>
-            </a:r>
-            <a:br/>
-            <a:r>
-              <a:t>              &lt;mu2&gt;1.0&lt;/mu2&gt;</a:t>
-            </a:r>
-            <a:br/>
-            <a:r>
-              <a:t>            &lt;/ode&gt;</a:t>
-            </a:r>
-            <a:br/>
-            <a:r>
-              <a:t>          &lt;/friction&gt;</a:t>
-            </a:r>
-            <a:br/>
-            <a:r>
-              <a:t>        &lt;/surface&gt;</a:t>
-            </a:r>
-            <a:br/>
-            <a:r>
-              <a:t>      &lt;/collision&gt;</a:t>
+              <a:t>      &lt;/visual&gt;</a:t>
+            </a:r>
+            <a:br/>
+            <a:r>
+              <a:t>      &lt;collision name="wheel_collision"&gt;</a:t>
+            </a:r>
+            <a:br/>
+            <a:r>
+              <a:t>        &lt;geometry&gt;</a:t>
             </a:r>
           </a:p>
         </p:txBody>
@@ -9875,7 +10124,7 @@
         </p:nvSpPr>
         <p:spPr>
           <a:xfrm>
-            <a:off x="749808" y="6199632"/>
+            <a:off x="749808" y="6181344"/>
             <a:ext cx="10789920" cy="201168"/>
           </a:xfrm>
           <a:prstGeom prst="rect">
@@ -9901,7 +10150,7 @@
               </a:defRPr>
             </a:pPr>
             <a:r>
-              <a:t>파일 전체 7/21 · 이 슬라이드 다음에 같은 파일의 나머지 줄이 이어집니다.</a:t>
+              <a:t>파일 전체 7/24 · 이 슬라이드 다음에 같은 파일의 나머지 줄이 이어집니다.</a:t>
             </a:r>
           </a:p>
         </p:txBody>
@@ -9958,7 +10207,7 @@
               </a:defRPr>
             </a:pPr>
             <a:r>
-              <a:t>파일을 계속 작성하고 저장한다 (8/21)</a:t>
+              <a:t>파일을 계속 작성하고 저장한다 (8/24)</a:t>
             </a:r>
           </a:p>
         </p:txBody>
@@ -10133,7 +10382,7 @@
               </a:defRPr>
             </a:pPr>
             <a:r>
-              <a:t>현재 단계 10/24    |    현재 폴더 ~/agv_ws    |    현재 터미널</a:t>
+              <a:t>현재 단계 10/27    |    현재 폴더 ~/agv_ws    |    현재 터미널</a:t>
             </a:r>
           </a:p>
         </p:txBody>
@@ -10146,8 +10395,8 @@
         </p:nvSpPr>
         <p:spPr>
           <a:xfrm>
-            <a:off x="658368" y="1682496"/>
-            <a:ext cx="10972800" cy="347472"/>
+            <a:off x="658368" y="1627632"/>
+            <a:ext cx="10972800" cy="256032"/>
           </a:xfrm>
           <a:prstGeom prst="rect">
             <a:avLst/>
@@ -10164,7 +10413,7 @@
               <a:spcAft>
                 <a:spcPts val="0"/>
               </a:spcAft>
-              <a:defRPr sz="1700" b="1">
+              <a:defRPr sz="1500" b="1">
                 <a:solidFill>
                   <a:srgbClr val="122C4E"/>
                 </a:solidFill>
@@ -10185,8 +10434,8 @@
         </p:nvSpPr>
         <p:spPr>
           <a:xfrm>
-            <a:off x="658368" y="2103120"/>
-            <a:ext cx="10972800" cy="493776"/>
+            <a:off x="658368" y="1956816"/>
+            <a:ext cx="10972800" cy="603504"/>
           </a:xfrm>
           <a:prstGeom prst="rect">
             <a:avLst/>
@@ -10230,7 +10479,11 @@
               </a:defRPr>
             </a:pPr>
             <a:r>
-              <a:t>파일 생성/열기: mkdir -p ~/agv_ws/src/agv_gazebo/models/agv    &amp;&amp;    nano ~/agv_ws/src/agv_gazebo/models/agv/model.sdf</a:t>
+              <a:t>파일 생성: mkdir -p ~/agv_ws/src/agv_gazebo/models/agv</a:t>
+            </a:r>
+            <a:br/>
+            <a:r>
+              <a:t>파일 열기: nano ~/agv_ws/src/agv_gazebo/models/agv/model.sdf</a:t>
             </a:r>
           </a:p>
         </p:txBody>
@@ -10243,8 +10496,8 @@
         </p:nvSpPr>
         <p:spPr>
           <a:xfrm>
-            <a:off x="658368" y="2761488"/>
-            <a:ext cx="10972800" cy="3383280"/>
+            <a:off x="658368" y="2706624"/>
+            <a:ext cx="10972800" cy="3364992"/>
           </a:xfrm>
           <a:prstGeom prst="rect">
             <a:avLst/>
@@ -10288,59 +10541,51 @@
               </a:defRPr>
             </a:pPr>
             <a:r>
-              <a:t>    &lt;/link&gt;</a:t>
-            </a:r>
-            <a:br/>
-            <a:r>
-              <a:t>    </a:t>
-            </a:r>
-            <a:br/>
-            <a:r>
-              <a:t>    </a:t>
-            </a:r>
-            <a:br/>
-            <a:r>
-              <a:t>    &lt;link name="right_wheel_link"&gt;</a:t>
-            </a:r>
-            <a:br/>
-            <a:r>
-              <a:t>      &lt;pose relative_to="base_link"&gt;0 -0.19 -0.08 1.5708 0 0&lt;/pose&gt;</a:t>
-            </a:r>
-            <a:br/>
-            <a:r>
-              <a:t>      &lt;inertial&gt;</a:t>
-            </a:r>
-            <a:br/>
-            <a:r>
-              <a:t>        &lt;mass&gt;0.6&lt;/mass&gt;</a:t>
-            </a:r>
-            <a:br/>
-            <a:r>
-              <a:t>        &lt;inertia&gt;</a:t>
-            </a:r>
-            <a:br/>
-            <a:r>
-              <a:t>          &lt;ixx&gt;0.002&lt;/ixx&gt;</a:t>
-            </a:r>
-            <a:br/>
-            <a:r>
-              <a:t>          &lt;iyy&gt;0.002&lt;/iyy&gt;</a:t>
-            </a:r>
-            <a:br/>
-            <a:r>
-              <a:t>          &lt;izz&gt;0.001&lt;/izz&gt;</a:t>
-            </a:r>
-            <a:br/>
-            <a:r>
-              <a:t>        &lt;/inertia&gt;</a:t>
-            </a:r>
-            <a:br/>
-            <a:r>
-              <a:t>      &lt;/inertial&gt;</a:t>
-            </a:r>
-            <a:br/>
-            <a:r>
-              <a:t>      &lt;visual name="wheel"&gt;</a:t>
+              <a:t>          &lt;cylinder&gt;</a:t>
+            </a:r>
+            <a:br/>
+            <a:r>
+              <a:t>            &lt;radius&gt;0.08&lt;/radius&gt;</a:t>
+            </a:r>
+            <a:br/>
+            <a:r>
+              <a:t>            &lt;length&gt;0.05&lt;/length&gt;</a:t>
+            </a:r>
+            <a:br/>
+            <a:r>
+              <a:t>          &lt;/cylinder&gt;</a:t>
+            </a:r>
+            <a:br/>
+            <a:r>
+              <a:t>        &lt;/geometry&gt;</a:t>
+            </a:r>
+            <a:br/>
+            <a:r>
+              <a:t>        &lt;surface&gt;</a:t>
+            </a:r>
+            <a:br/>
+            <a:r>
+              <a:t>          &lt;friction&gt;</a:t>
+            </a:r>
+            <a:br/>
+            <a:r>
+              <a:t>            &lt;ode&gt;</a:t>
+            </a:r>
+            <a:br/>
+            <a:r>
+              <a:t>              &lt;mu&gt;1.0&lt;/mu&gt;</a:t>
+            </a:r>
+            <a:br/>
+            <a:r>
+              <a:t>              &lt;mu2&gt;1.0&lt;/mu2&gt;</a:t>
+            </a:r>
+            <a:br/>
+            <a:r>
+              <a:t>            &lt;/ode&gt;</a:t>
+            </a:r>
+            <a:br/>
+            <a:r>
+              <a:t>          &lt;/friction&gt;</a:t>
             </a:r>
           </a:p>
         </p:txBody>
@@ -10353,7 +10598,7 @@
         </p:nvSpPr>
         <p:spPr>
           <a:xfrm>
-            <a:off x="749808" y="6199632"/>
+            <a:off x="749808" y="6181344"/>
             <a:ext cx="10789920" cy="201168"/>
           </a:xfrm>
           <a:prstGeom prst="rect">
@@ -10379,7 +10624,7 @@
               </a:defRPr>
             </a:pPr>
             <a:r>
-              <a:t>파일 전체 8/21 · 이 슬라이드 다음에 같은 파일의 나머지 줄이 이어집니다.</a:t>
+              <a:t>파일 전체 8/24 · 이 슬라이드 다음에 같은 파일의 나머지 줄이 이어집니다.</a:t>
             </a:r>
           </a:p>
         </p:txBody>
@@ -10436,7 +10681,7 @@
               </a:defRPr>
             </a:pPr>
             <a:r>
-              <a:t>파일을 계속 작성하고 저장한다 (9/21)</a:t>
+              <a:t>파일을 계속 작성하고 저장한다 (9/24)</a:t>
             </a:r>
           </a:p>
         </p:txBody>
@@ -10611,7 +10856,7 @@
               </a:defRPr>
             </a:pPr>
             <a:r>
-              <a:t>현재 단계 11/24    |    현재 폴더 ~/agv_ws    |    현재 터미널</a:t>
+              <a:t>현재 단계 11/27    |    현재 폴더 ~/agv_ws    |    현재 터미널</a:t>
             </a:r>
           </a:p>
         </p:txBody>
@@ -10624,8 +10869,8 @@
         </p:nvSpPr>
         <p:spPr>
           <a:xfrm>
-            <a:off x="658368" y="1682496"/>
-            <a:ext cx="10972800" cy="347472"/>
+            <a:off x="658368" y="1627632"/>
+            <a:ext cx="10972800" cy="256032"/>
           </a:xfrm>
           <a:prstGeom prst="rect">
             <a:avLst/>
@@ -10642,7 +10887,7 @@
               <a:spcAft>
                 <a:spcPts val="0"/>
               </a:spcAft>
-              <a:defRPr sz="1700" b="1">
+              <a:defRPr sz="1500" b="1">
                 <a:solidFill>
                   <a:srgbClr val="122C4E"/>
                 </a:solidFill>
@@ -10663,8 +10908,8 @@
         </p:nvSpPr>
         <p:spPr>
           <a:xfrm>
-            <a:off x="658368" y="2103120"/>
-            <a:ext cx="10972800" cy="493776"/>
+            <a:off x="658368" y="1956816"/>
+            <a:ext cx="10972800" cy="603504"/>
           </a:xfrm>
           <a:prstGeom prst="rect">
             <a:avLst/>
@@ -10708,7 +10953,11 @@
               </a:defRPr>
             </a:pPr>
             <a:r>
-              <a:t>파일 생성/열기: mkdir -p ~/agv_ws/src/agv_gazebo/models/agv    &amp;&amp;    nano ~/agv_ws/src/agv_gazebo/models/agv/model.sdf</a:t>
+              <a:t>파일 생성: mkdir -p ~/agv_ws/src/agv_gazebo/models/agv</a:t>
+            </a:r>
+            <a:br/>
+            <a:r>
+              <a:t>파일 열기: nano ~/agv_ws/src/agv_gazebo/models/agv/model.sdf</a:t>
             </a:r>
           </a:p>
         </p:txBody>
@@ -10721,8 +10970,8 @@
         </p:nvSpPr>
         <p:spPr>
           <a:xfrm>
-            <a:off x="658368" y="2761488"/>
-            <a:ext cx="10972800" cy="3383280"/>
+            <a:off x="658368" y="2706624"/>
+            <a:ext cx="10972800" cy="3364992"/>
           </a:xfrm>
           <a:prstGeom prst="rect">
             <a:avLst/>
@@ -10766,59 +11015,51 @@
               </a:defRPr>
             </a:pPr>
             <a:r>
-              <a:t>        &lt;geometry&gt;</a:t>
-            </a:r>
-            <a:br/>
-            <a:r>
-              <a:t>          &lt;cylinder&gt;</a:t>
-            </a:r>
-            <a:br/>
-            <a:r>
-              <a:t>            &lt;radius&gt;0.08&lt;/radius&gt;</a:t>
-            </a:r>
-            <a:br/>
-            <a:r>
-              <a:t>            &lt;length&gt;0.05&lt;/length&gt;</a:t>
-            </a:r>
-            <a:br/>
-            <a:r>
-              <a:t>          &lt;/cylinder&gt;</a:t>
-            </a:r>
-            <a:br/>
-            <a:r>
-              <a:t>        &lt;/geometry&gt;</a:t>
-            </a:r>
-            <a:br/>
-            <a:r>
-              <a:t>      &lt;/visual&gt;</a:t>
-            </a:r>
-            <a:br/>
-            <a:r>
-              <a:t>      &lt;collision name="wheel_collision"&gt;</a:t>
-            </a:r>
-            <a:br/>
-            <a:r>
-              <a:t>        &lt;geometry&gt;</a:t>
-            </a:r>
-            <a:br/>
-            <a:r>
-              <a:t>          &lt;cylinder&gt;</a:t>
-            </a:r>
-            <a:br/>
-            <a:r>
-              <a:t>            &lt;radius&gt;0.08&lt;/radius&gt;</a:t>
-            </a:r>
-            <a:br/>
-            <a:r>
-              <a:t>            &lt;length&gt;0.05&lt;/length&gt;</a:t>
-            </a:r>
-            <a:br/>
-            <a:r>
-              <a:t>          &lt;/cylinder&gt;</a:t>
-            </a:r>
-            <a:br/>
-            <a:r>
-              <a:t>        &lt;/geometry&gt;</a:t>
+              <a:t>        &lt;/surface&gt;</a:t>
+            </a:r>
+            <a:br/>
+            <a:r>
+              <a:t>      &lt;/collision&gt;</a:t>
+            </a:r>
+            <a:br/>
+            <a:r>
+              <a:t>    &lt;/link&gt;</a:t>
+            </a:r>
+            <a:br/>
+            <a:r>
+              <a:t>    </a:t>
+            </a:r>
+            <a:br/>
+            <a:r>
+              <a:t>    </a:t>
+            </a:r>
+            <a:br/>
+            <a:r>
+              <a:t>    &lt;link name="right_wheel_link"&gt;</a:t>
+            </a:r>
+            <a:br/>
+            <a:r>
+              <a:t>      &lt;pose relative_to="base_link"&gt;0 -0.19 -0.08 1.5708 0 0&lt;/pose&gt;</a:t>
+            </a:r>
+            <a:br/>
+            <a:r>
+              <a:t>      &lt;inertial&gt;</a:t>
+            </a:r>
+            <a:br/>
+            <a:r>
+              <a:t>        &lt;mass&gt;0.6&lt;/mass&gt;</a:t>
+            </a:r>
+            <a:br/>
+            <a:r>
+              <a:t>        &lt;inertia&gt;</a:t>
+            </a:r>
+            <a:br/>
+            <a:r>
+              <a:t>          &lt;ixx&gt;0.002&lt;/ixx&gt;</a:t>
+            </a:r>
+            <a:br/>
+            <a:r>
+              <a:t>          &lt;iyy&gt;0.002&lt;/iyy&gt;</a:t>
             </a:r>
           </a:p>
         </p:txBody>
@@ -10831,7 +11072,7 @@
         </p:nvSpPr>
         <p:spPr>
           <a:xfrm>
-            <a:off x="749808" y="6199632"/>
+            <a:off x="749808" y="6181344"/>
             <a:ext cx="10789920" cy="201168"/>
           </a:xfrm>
           <a:prstGeom prst="rect">
@@ -10857,7 +11098,7 @@
               </a:defRPr>
             </a:pPr>
             <a:r>
-              <a:t>파일 전체 9/21 · 이 슬라이드 다음에 같은 파일의 나머지 줄이 이어집니다.</a:t>
+              <a:t>파일 전체 9/24 · 이 슬라이드 다음에 같은 파일의 나머지 줄이 이어집니다.</a:t>
             </a:r>
           </a:p>
         </p:txBody>
@@ -10914,7 +11155,7 @@
               </a:defRPr>
             </a:pPr>
             <a:r>
-              <a:t>파일을 계속 작성하고 저장한다 (10/21)</a:t>
+              <a:t>파일을 계속 작성하고 저장한다 (10/24)</a:t>
             </a:r>
           </a:p>
         </p:txBody>
@@ -11089,7 +11330,7 @@
               </a:defRPr>
             </a:pPr>
             <a:r>
-              <a:t>현재 단계 12/24    |    현재 폴더 ~/agv_ws    |    현재 터미널</a:t>
+              <a:t>현재 단계 12/27    |    현재 폴더 ~/agv_ws    |    현재 터미널</a:t>
             </a:r>
           </a:p>
         </p:txBody>
@@ -11102,8 +11343,8 @@
         </p:nvSpPr>
         <p:spPr>
           <a:xfrm>
-            <a:off x="658368" y="1682496"/>
-            <a:ext cx="10972800" cy="347472"/>
+            <a:off x="658368" y="1627632"/>
+            <a:ext cx="10972800" cy="256032"/>
           </a:xfrm>
           <a:prstGeom prst="rect">
             <a:avLst/>
@@ -11120,7 +11361,7 @@
               <a:spcAft>
                 <a:spcPts val="0"/>
               </a:spcAft>
-              <a:defRPr sz="1700" b="1">
+              <a:defRPr sz="1500" b="1">
                 <a:solidFill>
                   <a:srgbClr val="122C4E"/>
                 </a:solidFill>
@@ -11141,8 +11382,8 @@
         </p:nvSpPr>
         <p:spPr>
           <a:xfrm>
-            <a:off x="658368" y="2103120"/>
-            <a:ext cx="10972800" cy="493776"/>
+            <a:off x="658368" y="1956816"/>
+            <a:ext cx="10972800" cy="603504"/>
           </a:xfrm>
           <a:prstGeom prst="rect">
             <a:avLst/>
@@ -11186,7 +11427,11 @@
               </a:defRPr>
             </a:pPr>
             <a:r>
-              <a:t>파일 생성/열기: mkdir -p ~/agv_ws/src/agv_gazebo/models/agv    &amp;&amp;    nano ~/agv_ws/src/agv_gazebo/models/agv/model.sdf</a:t>
+              <a:t>파일 생성: mkdir -p ~/agv_ws/src/agv_gazebo/models/agv</a:t>
+            </a:r>
+            <a:br/>
+            <a:r>
+              <a:t>파일 열기: nano ~/agv_ws/src/agv_gazebo/models/agv/model.sdf</a:t>
             </a:r>
           </a:p>
         </p:txBody>
@@ -11199,8 +11444,8 @@
         </p:nvSpPr>
         <p:spPr>
           <a:xfrm>
-            <a:off x="658368" y="2761488"/>
-            <a:ext cx="10972800" cy="3383280"/>
+            <a:off x="658368" y="2706624"/>
+            <a:ext cx="10972800" cy="3364992"/>
           </a:xfrm>
           <a:prstGeom prst="rect">
             <a:avLst/>
@@ -11244,59 +11489,51 @@
               </a:defRPr>
             </a:pPr>
             <a:r>
-              <a:t>        &lt;surface&gt;</a:t>
-            </a:r>
-            <a:br/>
-            <a:r>
-              <a:t>          &lt;friction&gt;</a:t>
-            </a:r>
-            <a:br/>
-            <a:r>
-              <a:t>            &lt;ode&gt;</a:t>
-            </a:r>
-            <a:br/>
-            <a:r>
-              <a:t>              &lt;mu&gt;1.0&lt;/mu&gt;</a:t>
-            </a:r>
-            <a:br/>
-            <a:r>
-              <a:t>              &lt;mu2&gt;1.0&lt;/mu2&gt;</a:t>
-            </a:r>
-            <a:br/>
-            <a:r>
-              <a:t>            &lt;/ode&gt;</a:t>
-            </a:r>
-            <a:br/>
-            <a:r>
-              <a:t>          &lt;/friction&gt;</a:t>
-            </a:r>
-            <a:br/>
-            <a:r>
-              <a:t>        &lt;/surface&gt;</a:t>
-            </a:r>
-            <a:br/>
-            <a:r>
-              <a:t>      &lt;/collision&gt;</a:t>
-            </a:r>
-            <a:br/>
-            <a:r>
-              <a:t>    &lt;/link&gt;</a:t>
-            </a:r>
-            <a:br/>
-            <a:r>
-              <a:t>    </a:t>
-            </a:r>
-            <a:br/>
-            <a:r>
-              <a:t>    </a:t>
-            </a:r>
-            <a:br/>
-            <a:r>
-              <a:t>    &lt;joint name="left_wheel_joint" type="revolute"&gt;</a:t>
-            </a:r>
-            <a:br/>
-            <a:r>
-              <a:t>      &lt;parent&gt;base_link&lt;/parent&gt;</a:t>
+              <a:t>          &lt;izz&gt;0.001&lt;/izz&gt;</a:t>
+            </a:r>
+            <a:br/>
+            <a:r>
+              <a:t>        &lt;/inertia&gt;</a:t>
+            </a:r>
+            <a:br/>
+            <a:r>
+              <a:t>      &lt;/inertial&gt;</a:t>
+            </a:r>
+            <a:br/>
+            <a:r>
+              <a:t>      &lt;visual name="wheel"&gt;</a:t>
+            </a:r>
+            <a:br/>
+            <a:r>
+              <a:t>        &lt;geometry&gt;</a:t>
+            </a:r>
+            <a:br/>
+            <a:r>
+              <a:t>          &lt;cylinder&gt;</a:t>
+            </a:r>
+            <a:br/>
+            <a:r>
+              <a:t>            &lt;radius&gt;0.08&lt;/radius&gt;</a:t>
+            </a:r>
+            <a:br/>
+            <a:r>
+              <a:t>            &lt;length&gt;0.05&lt;/length&gt;</a:t>
+            </a:r>
+            <a:br/>
+            <a:r>
+              <a:t>          &lt;/cylinder&gt;</a:t>
+            </a:r>
+            <a:br/>
+            <a:r>
+              <a:t>        &lt;/geometry&gt;</a:t>
+            </a:r>
+            <a:br/>
+            <a:r>
+              <a:t>      &lt;/visual&gt;</a:t>
+            </a:r>
+            <a:br/>
+            <a:r>
+              <a:t>      &lt;collision name="wheel_collision"&gt;</a:t>
             </a:r>
           </a:p>
         </p:txBody>
@@ -11309,7 +11546,7 @@
         </p:nvSpPr>
         <p:spPr>
           <a:xfrm>
-            <a:off x="749808" y="6199632"/>
+            <a:off x="749808" y="6181344"/>
             <a:ext cx="10789920" cy="201168"/>
           </a:xfrm>
           <a:prstGeom prst="rect">
@@ -11335,7 +11572,7 @@
               </a:defRPr>
             </a:pPr>
             <a:r>
-              <a:t>파일 전체 10/21 · 이 슬라이드 다음에 같은 파일의 나머지 줄이 이어집니다.</a:t>
+              <a:t>파일 전체 10/24 · 이 슬라이드 다음에 같은 파일의 나머지 줄이 이어집니다.</a:t>
             </a:r>
           </a:p>
         </p:txBody>
@@ -11392,7 +11629,7 @@
               </a:defRPr>
             </a:pPr>
             <a:r>
-              <a:t>파일을 계속 작성하고 저장한다 (11/21)</a:t>
+              <a:t>파일을 계속 작성하고 저장한다 (11/24)</a:t>
             </a:r>
           </a:p>
         </p:txBody>
@@ -11567,7 +11804,7 @@
               </a:defRPr>
             </a:pPr>
             <a:r>
-              <a:t>현재 단계 13/24    |    현재 폴더 ~/agv_ws    |    현재 터미널</a:t>
+              <a:t>현재 단계 13/27    |    현재 폴더 ~/agv_ws    |    현재 터미널</a:t>
             </a:r>
           </a:p>
         </p:txBody>
@@ -11580,8 +11817,8 @@
         </p:nvSpPr>
         <p:spPr>
           <a:xfrm>
-            <a:off x="658368" y="1682496"/>
-            <a:ext cx="10972800" cy="347472"/>
+            <a:off x="658368" y="1627632"/>
+            <a:ext cx="10972800" cy="256032"/>
           </a:xfrm>
           <a:prstGeom prst="rect">
             <a:avLst/>
@@ -11598,7 +11835,7 @@
               <a:spcAft>
                 <a:spcPts val="0"/>
               </a:spcAft>
-              <a:defRPr sz="1700" b="1">
+              <a:defRPr sz="1500" b="1">
                 <a:solidFill>
                   <a:srgbClr val="122C4E"/>
                 </a:solidFill>
@@ -11619,8 +11856,8 @@
         </p:nvSpPr>
         <p:spPr>
           <a:xfrm>
-            <a:off x="658368" y="2103120"/>
-            <a:ext cx="10972800" cy="493776"/>
+            <a:off x="658368" y="1956816"/>
+            <a:ext cx="10972800" cy="603504"/>
           </a:xfrm>
           <a:prstGeom prst="rect">
             <a:avLst/>
@@ -11664,7 +11901,11 @@
               </a:defRPr>
             </a:pPr>
             <a:r>
-              <a:t>파일 생성/열기: mkdir -p ~/agv_ws/src/agv_gazebo/models/agv    &amp;&amp;    nano ~/agv_ws/src/agv_gazebo/models/agv/model.sdf</a:t>
+              <a:t>파일 생성: mkdir -p ~/agv_ws/src/agv_gazebo/models/agv</a:t>
+            </a:r>
+            <a:br/>
+            <a:r>
+              <a:t>파일 열기: nano ~/agv_ws/src/agv_gazebo/models/agv/model.sdf</a:t>
             </a:r>
           </a:p>
         </p:txBody>
@@ -11677,8 +11918,8 @@
         </p:nvSpPr>
         <p:spPr>
           <a:xfrm>
-            <a:off x="658368" y="2761488"/>
-            <a:ext cx="10972800" cy="3383280"/>
+            <a:off x="658368" y="2706624"/>
+            <a:ext cx="10972800" cy="3364992"/>
           </a:xfrm>
           <a:prstGeom prst="rect">
             <a:avLst/>
@@ -11722,59 +11963,51 @@
               </a:defRPr>
             </a:pPr>
             <a:r>
-              <a:t>      &lt;child&gt;left_wheel_link&lt;/child&gt;</a:t>
-            </a:r>
-            <a:br/>
-            <a:r>
-              <a:t>      &lt;axis&gt;</a:t>
-            </a:r>
-            <a:br/>
-            <a:r>
-              <a:t>        &lt;xyz&gt;0 1 0&lt;/xyz&gt;</a:t>
-            </a:r>
-            <a:br/>
-            <a:r>
-              <a:t>        &lt;limit&gt;</a:t>
-            </a:r>
-            <a:br/>
-            <a:r>
-              <a:t>          &lt;lower&gt;-1e16&lt;/lower&gt;</a:t>
-            </a:r>
-            <a:br/>
-            <a:r>
-              <a:t>          &lt;upper&gt;1e16&lt;/upper&gt;</a:t>
-            </a:r>
-            <a:br/>
-            <a:r>
-              <a:t>        &lt;/limit&gt;</a:t>
-            </a:r>
-            <a:br/>
-            <a:r>
-              <a:t>      &lt;/axis&gt;</a:t>
-            </a:r>
-            <a:br/>
-            <a:r>
-              <a:t>    &lt;/joint&gt;</a:t>
-            </a:r>
-            <a:br/>
-            <a:r>
-              <a:t>    </a:t>
-            </a:r>
-            <a:br/>
-            <a:r>
-              <a:t>    </a:t>
-            </a:r>
-            <a:br/>
-            <a:r>
-              <a:t>    &lt;joint name="right_wheel_joint" type="revolute"&gt;</a:t>
-            </a:r>
-            <a:br/>
-            <a:r>
-              <a:t>      &lt;parent&gt;base_link&lt;/parent&gt;</a:t>
-            </a:r>
-            <a:br/>
-            <a:r>
-              <a:t>      &lt;child&gt;right_wheel_link&lt;/child&gt;</a:t>
+              <a:t>        &lt;geometry&gt;</a:t>
+            </a:r>
+            <a:br/>
+            <a:r>
+              <a:t>          &lt;cylinder&gt;</a:t>
+            </a:r>
+            <a:br/>
+            <a:r>
+              <a:t>            &lt;radius&gt;0.08&lt;/radius&gt;</a:t>
+            </a:r>
+            <a:br/>
+            <a:r>
+              <a:t>            &lt;length&gt;0.05&lt;/length&gt;</a:t>
+            </a:r>
+            <a:br/>
+            <a:r>
+              <a:t>          &lt;/cylinder&gt;</a:t>
+            </a:r>
+            <a:br/>
+            <a:r>
+              <a:t>        &lt;/geometry&gt;</a:t>
+            </a:r>
+            <a:br/>
+            <a:r>
+              <a:t>        &lt;surface&gt;</a:t>
+            </a:r>
+            <a:br/>
+            <a:r>
+              <a:t>          &lt;friction&gt;</a:t>
+            </a:r>
+            <a:br/>
+            <a:r>
+              <a:t>            &lt;ode&gt;</a:t>
+            </a:r>
+            <a:br/>
+            <a:r>
+              <a:t>              &lt;mu&gt;1.0&lt;/mu&gt;</a:t>
+            </a:r>
+            <a:br/>
+            <a:r>
+              <a:t>              &lt;mu2&gt;1.0&lt;/mu2&gt;</a:t>
+            </a:r>
+            <a:br/>
+            <a:r>
+              <a:t>            &lt;/ode&gt;</a:t>
             </a:r>
           </a:p>
         </p:txBody>
@@ -11787,7 +12020,7 @@
         </p:nvSpPr>
         <p:spPr>
           <a:xfrm>
-            <a:off x="749808" y="6199632"/>
+            <a:off x="749808" y="6181344"/>
             <a:ext cx="10789920" cy="201168"/>
           </a:xfrm>
           <a:prstGeom prst="rect">
@@ -11813,7 +12046,7 @@
               </a:defRPr>
             </a:pPr>
             <a:r>
-              <a:t>파일 전체 11/21 · 이 슬라이드 다음에 같은 파일의 나머지 줄이 이어집니다.</a:t>
+              <a:t>파일 전체 11/24 · 이 슬라이드 다음에 같은 파일의 나머지 줄이 이어집니다.</a:t>
             </a:r>
           </a:p>
         </p:txBody>
@@ -12331,7 +12564,7 @@
               </a:defRPr>
             </a:pPr>
             <a:r>
-              <a:t>파일을 계속 작성하고 저장한다 (12/21)</a:t>
+              <a:t>파일을 계속 작성하고 저장한다 (12/24)</a:t>
             </a:r>
           </a:p>
         </p:txBody>
@@ -12506,7 +12739,7 @@
               </a:defRPr>
             </a:pPr>
             <a:r>
-              <a:t>현재 단계 14/24    |    현재 폴더 ~/agv_ws    |    현재 터미널</a:t>
+              <a:t>현재 단계 14/27    |    현재 폴더 ~/agv_ws    |    현재 터미널</a:t>
             </a:r>
           </a:p>
         </p:txBody>
@@ -12519,8 +12752,8 @@
         </p:nvSpPr>
         <p:spPr>
           <a:xfrm>
-            <a:off x="658368" y="1682496"/>
-            <a:ext cx="10972800" cy="347472"/>
+            <a:off x="658368" y="1627632"/>
+            <a:ext cx="10972800" cy="256032"/>
           </a:xfrm>
           <a:prstGeom prst="rect">
             <a:avLst/>
@@ -12537,7 +12770,7 @@
               <a:spcAft>
                 <a:spcPts val="0"/>
               </a:spcAft>
-              <a:defRPr sz="1700" b="1">
+              <a:defRPr sz="1500" b="1">
                 <a:solidFill>
                   <a:srgbClr val="122C4E"/>
                 </a:solidFill>
@@ -12558,8 +12791,8 @@
         </p:nvSpPr>
         <p:spPr>
           <a:xfrm>
-            <a:off x="658368" y="2103120"/>
-            <a:ext cx="10972800" cy="493776"/>
+            <a:off x="658368" y="1956816"/>
+            <a:ext cx="10972800" cy="603504"/>
           </a:xfrm>
           <a:prstGeom prst="rect">
             <a:avLst/>
@@ -12603,7 +12836,11 @@
               </a:defRPr>
             </a:pPr>
             <a:r>
-              <a:t>파일 생성/열기: mkdir -p ~/agv_ws/src/agv_gazebo/models/agv    &amp;&amp;    nano ~/agv_ws/src/agv_gazebo/models/agv/model.sdf</a:t>
+              <a:t>파일 생성: mkdir -p ~/agv_ws/src/agv_gazebo/models/agv</a:t>
+            </a:r>
+            <a:br/>
+            <a:r>
+              <a:t>파일 열기: nano ~/agv_ws/src/agv_gazebo/models/agv/model.sdf</a:t>
             </a:r>
           </a:p>
         </p:txBody>
@@ -12616,8 +12853,8 @@
         </p:nvSpPr>
         <p:spPr>
           <a:xfrm>
-            <a:off x="658368" y="2761488"/>
-            <a:ext cx="10972800" cy="3383280"/>
+            <a:off x="658368" y="2706624"/>
+            <a:ext cx="10972800" cy="3364992"/>
           </a:xfrm>
           <a:prstGeom prst="rect">
             <a:avLst/>
@@ -12661,6 +12898,42 @@
               </a:defRPr>
             </a:pPr>
             <a:r>
+              <a:t>          &lt;/friction&gt;</a:t>
+            </a:r>
+            <a:br/>
+            <a:r>
+              <a:t>        &lt;/surface&gt;</a:t>
+            </a:r>
+            <a:br/>
+            <a:r>
+              <a:t>      &lt;/collision&gt;</a:t>
+            </a:r>
+            <a:br/>
+            <a:r>
+              <a:t>    &lt;/link&gt;</a:t>
+            </a:r>
+            <a:br/>
+            <a:r>
+              <a:t>    </a:t>
+            </a:r>
+            <a:br/>
+            <a:r>
+              <a:t>    </a:t>
+            </a:r>
+            <a:br/>
+            <a:r>
+              <a:t>    &lt;joint name="left_wheel_joint" type="revolute"&gt;</a:t>
+            </a:r>
+            <a:br/>
+            <a:r>
+              <a:t>      &lt;parent&gt;base_link&lt;/parent&gt;</a:t>
+            </a:r>
+            <a:br/>
+            <a:r>
+              <a:t>      &lt;child&gt;left_wheel_link&lt;/child&gt;</a:t>
+            </a:r>
+            <a:br/>
+            <a:r>
               <a:t>      &lt;axis&gt;</a:t>
             </a:r>
             <a:br/>
@@ -12670,50 +12943,6 @@
             <a:br/>
             <a:r>
               <a:t>        &lt;limit&gt;</a:t>
-            </a:r>
-            <a:br/>
-            <a:r>
-              <a:t>          &lt;lower&gt;-1e16&lt;/lower&gt;</a:t>
-            </a:r>
-            <a:br/>
-            <a:r>
-              <a:t>          &lt;upper&gt;1e16&lt;/upper&gt;</a:t>
-            </a:r>
-            <a:br/>
-            <a:r>
-              <a:t>        &lt;/limit&gt;</a:t>
-            </a:r>
-            <a:br/>
-            <a:r>
-              <a:t>      &lt;/axis&gt;</a:t>
-            </a:r>
-            <a:br/>
-            <a:r>
-              <a:t>    &lt;/joint&gt;</a:t>
-            </a:r>
-            <a:br/>
-            <a:r>
-              <a:t>    </a:t>
-            </a:r>
-            <a:br/>
-            <a:r>
-              <a:t>    </a:t>
-            </a:r>
-            <a:br/>
-            <a:r>
-              <a:t>    &lt;link name="caster_link"&gt;</a:t>
-            </a:r>
-            <a:br/>
-            <a:r>
-              <a:t>      &lt;pose relative_to="base_link"&gt;-0.24 0 -0.12 0 0 0&lt;/pose&gt;</a:t>
-            </a:r>
-            <a:br/>
-            <a:r>
-              <a:t>      &lt;inertial&gt;</a:t>
-            </a:r>
-            <a:br/>
-            <a:r>
-              <a:t>        &lt;mass&gt;0.15&lt;/mass&gt;</a:t>
             </a:r>
           </a:p>
         </p:txBody>
@@ -12726,7 +12955,7 @@
         </p:nvSpPr>
         <p:spPr>
           <a:xfrm>
-            <a:off x="749808" y="6199632"/>
+            <a:off x="749808" y="6181344"/>
             <a:ext cx="10789920" cy="201168"/>
           </a:xfrm>
           <a:prstGeom prst="rect">
@@ -12752,7 +12981,7 @@
               </a:defRPr>
             </a:pPr>
             <a:r>
-              <a:t>파일 전체 12/21 · 이 슬라이드 다음에 같은 파일의 나머지 줄이 이어집니다.</a:t>
+              <a:t>파일 전체 12/24 · 이 슬라이드 다음에 같은 파일의 나머지 줄이 이어집니다.</a:t>
             </a:r>
           </a:p>
         </p:txBody>
@@ -12809,7 +13038,7 @@
               </a:defRPr>
             </a:pPr>
             <a:r>
-              <a:t>파일을 계속 작성하고 저장한다 (13/21)</a:t>
+              <a:t>파일을 계속 작성하고 저장한다 (13/24)</a:t>
             </a:r>
           </a:p>
         </p:txBody>
@@ -12984,7 +13213,7 @@
               </a:defRPr>
             </a:pPr>
             <a:r>
-              <a:t>현재 단계 15/24    |    현재 폴더 ~/agv_ws    |    현재 터미널</a:t>
+              <a:t>현재 단계 15/27    |    현재 폴더 ~/agv_ws    |    현재 터미널</a:t>
             </a:r>
           </a:p>
         </p:txBody>
@@ -12997,8 +13226,8 @@
         </p:nvSpPr>
         <p:spPr>
           <a:xfrm>
-            <a:off x="658368" y="1682496"/>
-            <a:ext cx="10972800" cy="347472"/>
+            <a:off x="658368" y="1627632"/>
+            <a:ext cx="10972800" cy="256032"/>
           </a:xfrm>
           <a:prstGeom prst="rect">
             <a:avLst/>
@@ -13015,7 +13244,7 @@
               <a:spcAft>
                 <a:spcPts val="0"/>
               </a:spcAft>
-              <a:defRPr sz="1700" b="1">
+              <a:defRPr sz="1500" b="1">
                 <a:solidFill>
                   <a:srgbClr val="122C4E"/>
                 </a:solidFill>
@@ -13036,8 +13265,8 @@
         </p:nvSpPr>
         <p:spPr>
           <a:xfrm>
-            <a:off x="658368" y="2103120"/>
-            <a:ext cx="10972800" cy="493776"/>
+            <a:off x="658368" y="1956816"/>
+            <a:ext cx="10972800" cy="603504"/>
           </a:xfrm>
           <a:prstGeom prst="rect">
             <a:avLst/>
@@ -13081,7 +13310,11 @@
               </a:defRPr>
             </a:pPr>
             <a:r>
-              <a:t>파일 생성/열기: mkdir -p ~/agv_ws/src/agv_gazebo/models/agv    &amp;&amp;    nano ~/agv_ws/src/agv_gazebo/models/agv/model.sdf</a:t>
+              <a:t>파일 생성: mkdir -p ~/agv_ws/src/agv_gazebo/models/agv</a:t>
+            </a:r>
+            <a:br/>
+            <a:r>
+              <a:t>파일 열기: nano ~/agv_ws/src/agv_gazebo/models/agv/model.sdf</a:t>
             </a:r>
           </a:p>
         </p:txBody>
@@ -13094,8 +13327,8 @@
         </p:nvSpPr>
         <p:spPr>
           <a:xfrm>
-            <a:off x="658368" y="2761488"/>
-            <a:ext cx="10972800" cy="3383280"/>
+            <a:off x="658368" y="2706624"/>
+            <a:ext cx="10972800" cy="3364992"/>
           </a:xfrm>
           <a:prstGeom prst="rect">
             <a:avLst/>
@@ -13139,59 +13372,51 @@
               </a:defRPr>
             </a:pPr>
             <a:r>
-              <a:t>        &lt;inertia&gt;</a:t>
-            </a:r>
-            <a:br/>
-            <a:r>
-              <a:t>          &lt;ixx&gt;0.0001&lt;/ixx&gt;</a:t>
-            </a:r>
-            <a:br/>
-            <a:r>
-              <a:t>          &lt;iyy&gt;0.0001&lt;/iyy&gt;</a:t>
-            </a:r>
-            <a:br/>
-            <a:r>
-              <a:t>          &lt;izz&gt;0.0001&lt;/izz&gt;</a:t>
-            </a:r>
-            <a:br/>
-            <a:r>
-              <a:t>        &lt;/inertia&gt;</a:t>
-            </a:r>
-            <a:br/>
-            <a:r>
-              <a:t>      &lt;/inertial&gt;</a:t>
-            </a:r>
-            <a:br/>
-            <a:r>
-              <a:t>      &lt;visual name="caster"&gt;</a:t>
-            </a:r>
-            <a:br/>
-            <a:r>
-              <a:t>        &lt;geometry&gt;</a:t>
-            </a:r>
-            <a:br/>
-            <a:r>
-              <a:t>          &lt;sphere&gt;</a:t>
-            </a:r>
-            <a:br/>
-            <a:r>
-              <a:t>            &lt;radius&gt;0.04&lt;/radius&gt;</a:t>
-            </a:r>
-            <a:br/>
-            <a:r>
-              <a:t>          &lt;/sphere&gt;</a:t>
-            </a:r>
-            <a:br/>
-            <a:r>
-              <a:t>        &lt;/geometry&gt;</a:t>
-            </a:r>
-            <a:br/>
-            <a:r>
-              <a:t>      &lt;/visual&gt;</a:t>
-            </a:r>
-            <a:br/>
-            <a:r>
-              <a:t>      &lt;collision name="caster_collision"&gt;</a:t>
+              <a:t>          &lt;lower&gt;-1e16&lt;/lower&gt;</a:t>
+            </a:r>
+            <a:br/>
+            <a:r>
+              <a:t>          &lt;upper&gt;1e16&lt;/upper&gt;</a:t>
+            </a:r>
+            <a:br/>
+            <a:r>
+              <a:t>        &lt;/limit&gt;</a:t>
+            </a:r>
+            <a:br/>
+            <a:r>
+              <a:t>      &lt;/axis&gt;</a:t>
+            </a:r>
+            <a:br/>
+            <a:r>
+              <a:t>    &lt;/joint&gt;</a:t>
+            </a:r>
+            <a:br/>
+            <a:r>
+              <a:t>    </a:t>
+            </a:r>
+            <a:br/>
+            <a:r>
+              <a:t>    </a:t>
+            </a:r>
+            <a:br/>
+            <a:r>
+              <a:t>    &lt;joint name="right_wheel_joint" type="revolute"&gt;</a:t>
+            </a:r>
+            <a:br/>
+            <a:r>
+              <a:t>      &lt;parent&gt;base_link&lt;/parent&gt;</a:t>
+            </a:r>
+            <a:br/>
+            <a:r>
+              <a:t>      &lt;child&gt;right_wheel_link&lt;/child&gt;</a:t>
+            </a:r>
+            <a:br/>
+            <a:r>
+              <a:t>      &lt;axis&gt;</a:t>
+            </a:r>
+            <a:br/>
+            <a:r>
+              <a:t>        &lt;xyz&gt;0 1 0&lt;/xyz&gt;</a:t>
             </a:r>
           </a:p>
         </p:txBody>
@@ -13204,7 +13429,7 @@
         </p:nvSpPr>
         <p:spPr>
           <a:xfrm>
-            <a:off x="749808" y="6199632"/>
+            <a:off x="749808" y="6181344"/>
             <a:ext cx="10789920" cy="201168"/>
           </a:xfrm>
           <a:prstGeom prst="rect">
@@ -13230,7 +13455,7 @@
               </a:defRPr>
             </a:pPr>
             <a:r>
-              <a:t>파일 전체 13/21 · 이 슬라이드 다음에 같은 파일의 나머지 줄이 이어집니다.</a:t>
+              <a:t>파일 전체 13/24 · 이 슬라이드 다음에 같은 파일의 나머지 줄이 이어집니다.</a:t>
             </a:r>
           </a:p>
         </p:txBody>
@@ -13287,7 +13512,7 @@
               </a:defRPr>
             </a:pPr>
             <a:r>
-              <a:t>파일을 계속 작성하고 저장한다 (14/21)</a:t>
+              <a:t>파일을 계속 작성하고 저장한다 (14/24)</a:t>
             </a:r>
           </a:p>
         </p:txBody>
@@ -13462,7 +13687,7 @@
               </a:defRPr>
             </a:pPr>
             <a:r>
-              <a:t>현재 단계 16/24    |    현재 폴더 ~/agv_ws    |    현재 터미널</a:t>
+              <a:t>현재 단계 16/27    |    현재 폴더 ~/agv_ws    |    현재 터미널</a:t>
             </a:r>
           </a:p>
         </p:txBody>
@@ -13475,8 +13700,8 @@
         </p:nvSpPr>
         <p:spPr>
           <a:xfrm>
-            <a:off x="658368" y="1682496"/>
-            <a:ext cx="10972800" cy="347472"/>
+            <a:off x="658368" y="1627632"/>
+            <a:ext cx="10972800" cy="256032"/>
           </a:xfrm>
           <a:prstGeom prst="rect">
             <a:avLst/>
@@ -13493,7 +13718,7 @@
               <a:spcAft>
                 <a:spcPts val="0"/>
               </a:spcAft>
-              <a:defRPr sz="1700" b="1">
+              <a:defRPr sz="1500" b="1">
                 <a:solidFill>
                   <a:srgbClr val="122C4E"/>
                 </a:solidFill>
@@ -13514,8 +13739,8 @@
         </p:nvSpPr>
         <p:spPr>
           <a:xfrm>
-            <a:off x="658368" y="2103120"/>
-            <a:ext cx="10972800" cy="493776"/>
+            <a:off x="658368" y="1956816"/>
+            <a:ext cx="10972800" cy="603504"/>
           </a:xfrm>
           <a:prstGeom prst="rect">
             <a:avLst/>
@@ -13559,7 +13784,11 @@
               </a:defRPr>
             </a:pPr>
             <a:r>
-              <a:t>파일 생성/열기: mkdir -p ~/agv_ws/src/agv_gazebo/models/agv    &amp;&amp;    nano ~/agv_ws/src/agv_gazebo/models/agv/model.sdf</a:t>
+              <a:t>파일 생성: mkdir -p ~/agv_ws/src/agv_gazebo/models/agv</a:t>
+            </a:r>
+            <a:br/>
+            <a:r>
+              <a:t>파일 열기: nano ~/agv_ws/src/agv_gazebo/models/agv/model.sdf</a:t>
             </a:r>
           </a:p>
         </p:txBody>
@@ -13572,8 +13801,8 @@
         </p:nvSpPr>
         <p:spPr>
           <a:xfrm>
-            <a:off x="658368" y="2761488"/>
-            <a:ext cx="10972800" cy="3383280"/>
+            <a:off x="658368" y="2706624"/>
+            <a:ext cx="10972800" cy="3364992"/>
           </a:xfrm>
           <a:prstGeom prst="rect">
             <a:avLst/>
@@ -13617,31 +13846,27 @@
               </a:defRPr>
             </a:pPr>
             <a:r>
-              <a:t>        &lt;geometry&gt;</a:t>
-            </a:r>
-            <a:br/>
-            <a:r>
-              <a:t>          &lt;sphere&gt;</a:t>
-            </a:r>
-            <a:br/>
-            <a:r>
-              <a:t>            &lt;radius&gt;0.04&lt;/radius&gt;</a:t>
-            </a:r>
-            <a:br/>
-            <a:r>
-              <a:t>          &lt;/sphere&gt;</a:t>
-            </a:r>
-            <a:br/>
-            <a:r>
-              <a:t>        &lt;/geometry&gt;</a:t>
-            </a:r>
-            <a:br/>
-            <a:r>
-              <a:t>      &lt;/collision&gt;</a:t>
-            </a:r>
-            <a:br/>
-            <a:r>
-              <a:t>    &lt;/link&gt;</a:t>
+              <a:t>        &lt;limit&gt;</a:t>
+            </a:r>
+            <a:br/>
+            <a:r>
+              <a:t>          &lt;lower&gt;-1e16&lt;/lower&gt;</a:t>
+            </a:r>
+            <a:br/>
+            <a:r>
+              <a:t>          &lt;upper&gt;1e16&lt;/upper&gt;</a:t>
+            </a:r>
+            <a:br/>
+            <a:r>
+              <a:t>        &lt;/limit&gt;</a:t>
+            </a:r>
+            <a:br/>
+            <a:r>
+              <a:t>      &lt;/axis&gt;</a:t>
+            </a:r>
+            <a:br/>
+            <a:r>
+              <a:t>    &lt;/joint&gt;</a:t>
             </a:r>
             <a:br/>
             <a:r>
@@ -13653,23 +13878,19 @@
             </a:r>
             <a:br/>
             <a:r>
-              <a:t>    &lt;joint name="caster_joint" type="fixed"&gt;</a:t>
-            </a:r>
-            <a:br/>
-            <a:r>
-              <a:t>      &lt;parent&gt;base_link&lt;/parent&gt;</a:t>
-            </a:r>
-            <a:br/>
-            <a:r>
-              <a:t>      &lt;child&gt;caster_link&lt;/child&gt;</a:t>
-            </a:r>
-            <a:br/>
-            <a:r>
-              <a:t>    &lt;/joint&gt;</a:t>
-            </a:r>
-            <a:br/>
-            <a:r>
-              <a:t>    </a:t>
+              <a:t>    &lt;link name="caster_link"&gt;</a:t>
+            </a:r>
+            <a:br/>
+            <a:r>
+              <a:t>      &lt;pose relative_to="base_link"&gt;-0.24 0 -0.12 0 0 0&lt;/pose&gt;</a:t>
+            </a:r>
+            <a:br/>
+            <a:r>
+              <a:t>      &lt;inertial&gt;</a:t>
+            </a:r>
+            <a:br/>
+            <a:r>
+              <a:t>        &lt;mass&gt;0.15&lt;/mass&gt;</a:t>
             </a:r>
           </a:p>
         </p:txBody>
@@ -13682,7 +13903,7 @@
         </p:nvSpPr>
         <p:spPr>
           <a:xfrm>
-            <a:off x="749808" y="6199632"/>
+            <a:off x="749808" y="6181344"/>
             <a:ext cx="10789920" cy="201168"/>
           </a:xfrm>
           <a:prstGeom prst="rect">
@@ -13708,7 +13929,7 @@
               </a:defRPr>
             </a:pPr>
             <a:r>
-              <a:t>파일 전체 14/21 · 이 슬라이드 다음에 같은 파일의 나머지 줄이 이어집니다.</a:t>
+              <a:t>파일 전체 14/24 · 이 슬라이드 다음에 같은 파일의 나머지 줄이 이어집니다.</a:t>
             </a:r>
           </a:p>
         </p:txBody>
@@ -13765,7 +13986,7 @@
               </a:defRPr>
             </a:pPr>
             <a:r>
-              <a:t>파일을 계속 작성하고 저장한다 (15/21)</a:t>
+              <a:t>파일을 계속 작성하고 저장한다 (15/24)</a:t>
             </a:r>
           </a:p>
         </p:txBody>
@@ -13940,7 +14161,7 @@
               </a:defRPr>
             </a:pPr>
             <a:r>
-              <a:t>현재 단계 17/24    |    현재 폴더 ~/agv_ws    |    현재 터미널</a:t>
+              <a:t>현재 단계 17/27    |    현재 폴더 ~/agv_ws    |    현재 터미널</a:t>
             </a:r>
           </a:p>
         </p:txBody>
@@ -13953,8 +14174,8 @@
         </p:nvSpPr>
         <p:spPr>
           <a:xfrm>
-            <a:off x="658368" y="1682496"/>
-            <a:ext cx="10972800" cy="347472"/>
+            <a:off x="658368" y="1627632"/>
+            <a:ext cx="10972800" cy="256032"/>
           </a:xfrm>
           <a:prstGeom prst="rect">
             <a:avLst/>
@@ -13971,7 +14192,7 @@
               <a:spcAft>
                 <a:spcPts val="0"/>
               </a:spcAft>
-              <a:defRPr sz="1700" b="1">
+              <a:defRPr sz="1500" b="1">
                 <a:solidFill>
                   <a:srgbClr val="122C4E"/>
                 </a:solidFill>
@@ -13992,8 +14213,8 @@
         </p:nvSpPr>
         <p:spPr>
           <a:xfrm>
-            <a:off x="658368" y="2103120"/>
-            <a:ext cx="10972800" cy="493776"/>
+            <a:off x="658368" y="1956816"/>
+            <a:ext cx="10972800" cy="603504"/>
           </a:xfrm>
           <a:prstGeom prst="rect">
             <a:avLst/>
@@ -14037,7 +14258,11 @@
               </a:defRPr>
             </a:pPr>
             <a:r>
-              <a:t>파일 생성/열기: mkdir -p ~/agv_ws/src/agv_gazebo/models/agv    &amp;&amp;    nano ~/agv_ws/src/agv_gazebo/models/agv/model.sdf</a:t>
+              <a:t>파일 생성: mkdir -p ~/agv_ws/src/agv_gazebo/models/agv</a:t>
+            </a:r>
+            <a:br/>
+            <a:r>
+              <a:t>파일 열기: nano ~/agv_ws/src/agv_gazebo/models/agv/model.sdf</a:t>
             </a:r>
           </a:p>
         </p:txBody>
@@ -14050,8 +14275,8 @@
         </p:nvSpPr>
         <p:spPr>
           <a:xfrm>
-            <a:off x="658368" y="2761488"/>
-            <a:ext cx="10972800" cy="3383280"/>
+            <a:off x="658368" y="2706624"/>
+            <a:ext cx="10972800" cy="3364992"/>
           </a:xfrm>
           <a:prstGeom prst="rect">
             <a:avLst/>
@@ -14095,19 +14320,31 @@
               </a:defRPr>
             </a:pPr>
             <a:r>
-              <a:t>    </a:t>
-            </a:r>
-            <a:br/>
-            <a:r>
-              <a:t>    &lt;link name="lidar_link"&gt;</a:t>
-            </a:r>
-            <a:br/>
-            <a:r>
-              <a:t>      &lt;pose relative_to="base_link"&gt;0.12 0 0.13 0 0 0&lt;/pose&gt;</a:t>
-            </a:r>
-            <a:br/>
-            <a:r>
-              <a:t>      &lt;visual name="housing"&gt;</a:t>
+              <a:t>        &lt;inertia&gt;</a:t>
+            </a:r>
+            <a:br/>
+            <a:r>
+              <a:t>          &lt;ixx&gt;0.0001&lt;/ixx&gt;</a:t>
+            </a:r>
+            <a:br/>
+            <a:r>
+              <a:t>          &lt;iyy&gt;0.0001&lt;/iyy&gt;</a:t>
+            </a:r>
+            <a:br/>
+            <a:r>
+              <a:t>          &lt;izz&gt;0.0001&lt;/izz&gt;</a:t>
+            </a:r>
+            <a:br/>
+            <a:r>
+              <a:t>        &lt;/inertia&gt;</a:t>
+            </a:r>
+            <a:br/>
+            <a:r>
+              <a:t>      &lt;/inertial&gt;</a:t>
+            </a:r>
+            <a:br/>
+            <a:r>
+              <a:t>      &lt;visual name="caster"&gt;</a:t>
             </a:r>
             <a:br/>
             <a:r>
@@ -14115,39 +14352,19 @@
             </a:r>
             <a:br/>
             <a:r>
-              <a:t>          &lt;cylinder&gt;</a:t>
-            </a:r>
-            <a:br/>
-            <a:r>
-              <a:t>            &lt;radius&gt;0.045&lt;/radius&gt;</a:t>
-            </a:r>
-            <a:br/>
-            <a:r>
-              <a:t>            &lt;length&gt;0.05&lt;/length&gt;</a:t>
-            </a:r>
-            <a:br/>
-            <a:r>
-              <a:t>          &lt;/cylinder&gt;</a:t>
+              <a:t>          &lt;sphere&gt;</a:t>
+            </a:r>
+            <a:br/>
+            <a:r>
+              <a:t>            &lt;radius&gt;0.04&lt;/radius&gt;</a:t>
+            </a:r>
+            <a:br/>
+            <a:r>
+              <a:t>          &lt;/sphere&gt;</a:t>
             </a:r>
             <a:br/>
             <a:r>
               <a:t>        &lt;/geometry&gt;</a:t>
-            </a:r>
-            <a:br/>
-            <a:r>
-              <a:t>      &lt;/visual&gt;</a:t>
-            </a:r>
-            <a:br/>
-            <a:r>
-              <a:t>      &lt;sensor name="lidar" type="gpu_lidar"&gt;</a:t>
-            </a:r>
-            <a:br/>
-            <a:r>
-              <a:t>        &lt;topic&gt;/scan&lt;/topic&gt;</a:t>
-            </a:r>
-            <a:br/>
-            <a:r>
-              <a:t>        &lt;always_on&gt;true&lt;/always_on&gt;</a:t>
             </a:r>
           </a:p>
         </p:txBody>
@@ -14160,7 +14377,7 @@
         </p:nvSpPr>
         <p:spPr>
           <a:xfrm>
-            <a:off x="749808" y="6199632"/>
+            <a:off x="749808" y="6181344"/>
             <a:ext cx="10789920" cy="201168"/>
           </a:xfrm>
           <a:prstGeom prst="rect">
@@ -14186,7 +14403,7 @@
               </a:defRPr>
             </a:pPr>
             <a:r>
-              <a:t>파일 전체 15/21 · 이 슬라이드 다음에 같은 파일의 나머지 줄이 이어집니다.</a:t>
+              <a:t>파일 전체 15/24 · 이 슬라이드 다음에 같은 파일의 나머지 줄이 이어집니다.</a:t>
             </a:r>
           </a:p>
         </p:txBody>
@@ -14243,7 +14460,7 @@
               </a:defRPr>
             </a:pPr>
             <a:r>
-              <a:t>파일을 계속 작성하고 저장한다 (16/21)</a:t>
+              <a:t>파일을 계속 작성하고 저장한다 (16/24)</a:t>
             </a:r>
           </a:p>
         </p:txBody>
@@ -14418,7 +14635,7 @@
               </a:defRPr>
             </a:pPr>
             <a:r>
-              <a:t>현재 단계 18/24    |    현재 폴더 ~/agv_ws    |    현재 터미널</a:t>
+              <a:t>현재 단계 18/27    |    현재 폴더 ~/agv_ws    |    현재 터미널</a:t>
             </a:r>
           </a:p>
         </p:txBody>
@@ -14431,8 +14648,8 @@
         </p:nvSpPr>
         <p:spPr>
           <a:xfrm>
-            <a:off x="658368" y="1682496"/>
-            <a:ext cx="10972800" cy="347472"/>
+            <a:off x="658368" y="1627632"/>
+            <a:ext cx="10972800" cy="256032"/>
           </a:xfrm>
           <a:prstGeom prst="rect">
             <a:avLst/>
@@ -14449,7 +14666,7 @@
               <a:spcAft>
                 <a:spcPts val="0"/>
               </a:spcAft>
-              <a:defRPr sz="1700" b="1">
+              <a:defRPr sz="1500" b="1">
                 <a:solidFill>
                   <a:srgbClr val="122C4E"/>
                 </a:solidFill>
@@ -14470,8 +14687,8 @@
         </p:nvSpPr>
         <p:spPr>
           <a:xfrm>
-            <a:off x="658368" y="2103120"/>
-            <a:ext cx="10972800" cy="493776"/>
+            <a:off x="658368" y="1956816"/>
+            <a:ext cx="10972800" cy="603504"/>
           </a:xfrm>
           <a:prstGeom prst="rect">
             <a:avLst/>
@@ -14515,7 +14732,11 @@
               </a:defRPr>
             </a:pPr>
             <a:r>
-              <a:t>파일 생성/열기: mkdir -p ~/agv_ws/src/agv_gazebo/models/agv    &amp;&amp;    nano ~/agv_ws/src/agv_gazebo/models/agv/model.sdf</a:t>
+              <a:t>파일 생성: mkdir -p ~/agv_ws/src/agv_gazebo/models/agv</a:t>
+            </a:r>
+            <a:br/>
+            <a:r>
+              <a:t>파일 열기: nano ~/agv_ws/src/agv_gazebo/models/agv/model.sdf</a:t>
             </a:r>
           </a:p>
         </p:txBody>
@@ -14528,8 +14749,8 @@
         </p:nvSpPr>
         <p:spPr>
           <a:xfrm>
-            <a:off x="658368" y="2761488"/>
-            <a:ext cx="10972800" cy="3383280"/>
+            <a:off x="658368" y="2706624"/>
+            <a:ext cx="10972800" cy="3364992"/>
           </a:xfrm>
           <a:prstGeom prst="rect">
             <a:avLst/>
@@ -14573,59 +14794,51 @@
               </a:defRPr>
             </a:pPr>
             <a:r>
-              <a:t>        &lt;update_rate&gt;10&lt;/update_rate&gt;</a:t>
-            </a:r>
-            <a:br/>
-            <a:r>
-              <a:t>        &lt;visualize&gt;false&lt;/visualize&gt;</a:t>
-            </a:r>
-            <a:br/>
-            <a:r>
-              <a:t>        &lt;lidar&gt;</a:t>
-            </a:r>
-            <a:br/>
-            <a:r>
-              <a:t>          &lt;scan&gt;</a:t>
-            </a:r>
-            <a:br/>
-            <a:r>
-              <a:t>            &lt;horizontal&gt;</a:t>
-            </a:r>
-            <a:br/>
-            <a:r>
-              <a:t>              &lt;samples&gt;720&lt;/samples&gt;</a:t>
-            </a:r>
-            <a:br/>
-            <a:r>
-              <a:t>              &lt;resolution&gt;1&lt;/resolution&gt;</a:t>
-            </a:r>
-            <a:br/>
-            <a:r>
-              <a:t>              &lt;min_angle&gt;-3.14159&lt;/min_angle&gt;</a:t>
-            </a:r>
-            <a:br/>
-            <a:r>
-              <a:t>              &lt;max_angle&gt;3.14159&lt;/max_angle&gt;</a:t>
-            </a:r>
-            <a:br/>
-            <a:r>
-              <a:t>            &lt;/horizontal&gt;</a:t>
-            </a:r>
-            <a:br/>
-            <a:r>
-              <a:t>          &lt;/scan&gt;</a:t>
-            </a:r>
-            <a:br/>
-            <a:r>
-              <a:t>          &lt;range&gt;</a:t>
-            </a:r>
-            <a:br/>
-            <a:r>
-              <a:t>            &lt;min&gt;0.12&lt;/min&gt;</a:t>
-            </a:r>
-            <a:br/>
-            <a:r>
-              <a:t>            &lt;max&gt;12.0&lt;/max&gt;</a:t>
+              <a:t>      &lt;/visual&gt;</a:t>
+            </a:r>
+            <a:br/>
+            <a:r>
+              <a:t>      &lt;collision name="caster_collision"&gt;</a:t>
+            </a:r>
+            <a:br/>
+            <a:r>
+              <a:t>        &lt;geometry&gt;</a:t>
+            </a:r>
+            <a:br/>
+            <a:r>
+              <a:t>          &lt;sphere&gt;</a:t>
+            </a:r>
+            <a:br/>
+            <a:r>
+              <a:t>            &lt;radius&gt;0.04&lt;/radius&gt;</a:t>
+            </a:r>
+            <a:br/>
+            <a:r>
+              <a:t>          &lt;/sphere&gt;</a:t>
+            </a:r>
+            <a:br/>
+            <a:r>
+              <a:t>        &lt;/geometry&gt;</a:t>
+            </a:r>
+            <a:br/>
+            <a:r>
+              <a:t>      &lt;/collision&gt;</a:t>
+            </a:r>
+            <a:br/>
+            <a:r>
+              <a:t>    &lt;/link&gt;</a:t>
+            </a:r>
+            <a:br/>
+            <a:r>
+              <a:t>    </a:t>
+            </a:r>
+            <a:br/>
+            <a:r>
+              <a:t>    </a:t>
+            </a:r>
+            <a:br/>
+            <a:r>
+              <a:t>    &lt;joint name="caster_joint" type="fixed"&gt;</a:t>
             </a:r>
           </a:p>
         </p:txBody>
@@ -14638,7 +14851,7 @@
         </p:nvSpPr>
         <p:spPr>
           <a:xfrm>
-            <a:off x="749808" y="6199632"/>
+            <a:off x="749808" y="6181344"/>
             <a:ext cx="10789920" cy="201168"/>
           </a:xfrm>
           <a:prstGeom prst="rect">
@@ -14664,7 +14877,7 @@
               </a:defRPr>
             </a:pPr>
             <a:r>
-              <a:t>파일 전체 16/21 · 이 슬라이드 다음에 같은 파일의 나머지 줄이 이어집니다.</a:t>
+              <a:t>파일 전체 16/24 · 이 슬라이드 다음에 같은 파일의 나머지 줄이 이어집니다.</a:t>
             </a:r>
           </a:p>
         </p:txBody>
@@ -14721,7 +14934,7 @@
               </a:defRPr>
             </a:pPr>
             <a:r>
-              <a:t>파일을 계속 작성하고 저장한다 (17/21)</a:t>
+              <a:t>파일을 계속 작성하고 저장한다 (17/24)</a:t>
             </a:r>
           </a:p>
         </p:txBody>
@@ -14896,7 +15109,7 @@
               </a:defRPr>
             </a:pPr>
             <a:r>
-              <a:t>현재 단계 19/24    |    현재 폴더 ~/agv_ws    |    현재 터미널</a:t>
+              <a:t>현재 단계 19/27    |    현재 폴더 ~/agv_ws    |    현재 터미널</a:t>
             </a:r>
           </a:p>
         </p:txBody>
@@ -14909,8 +15122,8 @@
         </p:nvSpPr>
         <p:spPr>
           <a:xfrm>
-            <a:off x="658368" y="1682496"/>
-            <a:ext cx="10972800" cy="347472"/>
+            <a:off x="658368" y="1627632"/>
+            <a:ext cx="10972800" cy="256032"/>
           </a:xfrm>
           <a:prstGeom prst="rect">
             <a:avLst/>
@@ -14927,7 +15140,7 @@
               <a:spcAft>
                 <a:spcPts val="0"/>
               </a:spcAft>
-              <a:defRPr sz="1700" b="1">
+              <a:defRPr sz="1500" b="1">
                 <a:solidFill>
                   <a:srgbClr val="122C4E"/>
                 </a:solidFill>
@@ -14948,8 +15161,8 @@
         </p:nvSpPr>
         <p:spPr>
           <a:xfrm>
-            <a:off x="658368" y="2103120"/>
-            <a:ext cx="10972800" cy="493776"/>
+            <a:off x="658368" y="1956816"/>
+            <a:ext cx="10972800" cy="603504"/>
           </a:xfrm>
           <a:prstGeom prst="rect">
             <a:avLst/>
@@ -14993,7 +15206,11 @@
               </a:defRPr>
             </a:pPr>
             <a:r>
-              <a:t>파일 생성/열기: mkdir -p ~/agv_ws/src/agv_gazebo/models/agv    &amp;&amp;    nano ~/agv_ws/src/agv_gazebo/models/agv/model.sdf</a:t>
+              <a:t>파일 생성: mkdir -p ~/agv_ws/src/agv_gazebo/models/agv</a:t>
+            </a:r>
+            <a:br/>
+            <a:r>
+              <a:t>파일 열기: nano ~/agv_ws/src/agv_gazebo/models/agv/model.sdf</a:t>
             </a:r>
           </a:p>
         </p:txBody>
@@ -15006,8 +15223,8 @@
         </p:nvSpPr>
         <p:spPr>
           <a:xfrm>
-            <a:off x="658368" y="2761488"/>
-            <a:ext cx="10972800" cy="3383280"/>
+            <a:off x="658368" y="2706624"/>
+            <a:ext cx="10972800" cy="3364992"/>
           </a:xfrm>
           <a:prstGeom prst="rect">
             <a:avLst/>
@@ -15051,23 +15268,15 @@
               </a:defRPr>
             </a:pPr>
             <a:r>
-              <a:t>            &lt;resolution&gt;0.01&lt;/resolution&gt;</a:t>
-            </a:r>
-            <a:br/>
-            <a:r>
-              <a:t>          &lt;/range&gt;</a:t>
-            </a:r>
-            <a:br/>
-            <a:r>
-              <a:t>        &lt;/lidar&gt;</a:t>
-            </a:r>
-            <a:br/>
-            <a:r>
-              <a:t>      &lt;/sensor&gt;</a:t>
-            </a:r>
-            <a:br/>
-            <a:r>
-              <a:t>    &lt;/link&gt;</a:t>
+              <a:t>      &lt;parent&gt;base_link&lt;/parent&gt;</a:t>
+            </a:r>
+            <a:br/>
+            <a:r>
+              <a:t>      &lt;child&gt;caster_link&lt;/child&gt;</a:t>
+            </a:r>
+            <a:br/>
+            <a:r>
+              <a:t>    &lt;/joint&gt;</a:t>
             </a:r>
             <a:br/>
             <a:r>
@@ -15079,31 +15288,31 @@
             </a:r>
             <a:br/>
             <a:r>
-              <a:t>    &lt;joint name="lidar_joint" type="fixed"&gt;</a:t>
-            </a:r>
-            <a:br/>
-            <a:r>
-              <a:t>      &lt;parent&gt;base_link&lt;/parent&gt;</a:t>
-            </a:r>
-            <a:br/>
-            <a:r>
-              <a:t>      &lt;child&gt;lidar_link&lt;/child&gt;</a:t>
-            </a:r>
-            <a:br/>
-            <a:r>
-              <a:t>    &lt;/joint&gt;</a:t>
-            </a:r>
-            <a:br/>
-            <a:r>
-              <a:t>    </a:t>
-            </a:r>
-            <a:br/>
-            <a:r>
-              <a:t>    </a:t>
-            </a:r>
-            <a:br/>
-            <a:r>
-              <a:t>    &lt;link name="camera_link"&gt;</a:t>
+              <a:t>    &lt;link name="lidar_link"&gt;</a:t>
+            </a:r>
+            <a:br/>
+            <a:r>
+              <a:t>      &lt;pose relative_to="base_link"&gt;0.12 0 0.13 0 0 0&lt;/pose&gt;</a:t>
+            </a:r>
+            <a:br/>
+            <a:r>
+              <a:t>      &lt;visual name="housing"&gt;</a:t>
+            </a:r>
+            <a:br/>
+            <a:r>
+              <a:t>        &lt;geometry&gt;</a:t>
+            </a:r>
+            <a:br/>
+            <a:r>
+              <a:t>          &lt;cylinder&gt;</a:t>
+            </a:r>
+            <a:br/>
+            <a:r>
+              <a:t>            &lt;radius&gt;0.045&lt;/radius&gt;</a:t>
+            </a:r>
+            <a:br/>
+            <a:r>
+              <a:t>            &lt;length&gt;0.05&lt;/length&gt;</a:t>
             </a:r>
           </a:p>
         </p:txBody>
@@ -15116,7 +15325,7 @@
         </p:nvSpPr>
         <p:spPr>
           <a:xfrm>
-            <a:off x="749808" y="6199632"/>
+            <a:off x="749808" y="6181344"/>
             <a:ext cx="10789920" cy="201168"/>
           </a:xfrm>
           <a:prstGeom prst="rect">
@@ -15142,7 +15351,7 @@
               </a:defRPr>
             </a:pPr>
             <a:r>
-              <a:t>파일 전체 17/21 · 이 슬라이드 다음에 같은 파일의 나머지 줄이 이어집니다.</a:t>
+              <a:t>파일 전체 17/24 · 이 슬라이드 다음에 같은 파일의 나머지 줄이 이어집니다.</a:t>
             </a:r>
           </a:p>
         </p:txBody>
@@ -15199,7 +15408,7 @@
               </a:defRPr>
             </a:pPr>
             <a:r>
-              <a:t>파일을 계속 작성하고 저장한다 (18/21)</a:t>
+              <a:t>파일을 계속 작성하고 저장한다 (18/24)</a:t>
             </a:r>
           </a:p>
         </p:txBody>
@@ -15374,7 +15583,7 @@
               </a:defRPr>
             </a:pPr>
             <a:r>
-              <a:t>현재 단계 20/24    |    현재 폴더 ~/agv_ws    |    현재 터미널</a:t>
+              <a:t>현재 단계 20/27    |    현재 폴더 ~/agv_ws    |    현재 터미널</a:t>
             </a:r>
           </a:p>
         </p:txBody>
@@ -15387,8 +15596,8 @@
         </p:nvSpPr>
         <p:spPr>
           <a:xfrm>
-            <a:off x="658368" y="1682496"/>
-            <a:ext cx="10972800" cy="347472"/>
+            <a:off x="658368" y="1627632"/>
+            <a:ext cx="10972800" cy="256032"/>
           </a:xfrm>
           <a:prstGeom prst="rect">
             <a:avLst/>
@@ -15405,7 +15614,7 @@
               <a:spcAft>
                 <a:spcPts val="0"/>
               </a:spcAft>
-              <a:defRPr sz="1700" b="1">
+              <a:defRPr sz="1500" b="1">
                 <a:solidFill>
                   <a:srgbClr val="122C4E"/>
                 </a:solidFill>
@@ -15426,8 +15635,8 @@
         </p:nvSpPr>
         <p:spPr>
           <a:xfrm>
-            <a:off x="658368" y="2103120"/>
-            <a:ext cx="10972800" cy="493776"/>
+            <a:off x="658368" y="1956816"/>
+            <a:ext cx="10972800" cy="603504"/>
           </a:xfrm>
           <a:prstGeom prst="rect">
             <a:avLst/>
@@ -15471,7 +15680,11 @@
               </a:defRPr>
             </a:pPr>
             <a:r>
-              <a:t>파일 생성/열기: mkdir -p ~/agv_ws/src/agv_gazebo/models/agv    &amp;&amp;    nano ~/agv_ws/src/agv_gazebo/models/agv/model.sdf</a:t>
+              <a:t>파일 생성: mkdir -p ~/agv_ws/src/agv_gazebo/models/agv</a:t>
+            </a:r>
+            <a:br/>
+            <a:r>
+              <a:t>파일 열기: nano ~/agv_ws/src/agv_gazebo/models/agv/model.sdf</a:t>
             </a:r>
           </a:p>
         </p:txBody>
@@ -15484,8 +15697,8 @@
         </p:nvSpPr>
         <p:spPr>
           <a:xfrm>
-            <a:off x="658368" y="2761488"/>
-            <a:ext cx="10972800" cy="3383280"/>
+            <a:off x="658368" y="2706624"/>
+            <a:ext cx="10972800" cy="3364992"/>
           </a:xfrm>
           <a:prstGeom prst="rect">
             <a:avLst/>
@@ -15529,27 +15742,7 @@
               </a:defRPr>
             </a:pPr>
             <a:r>
-              <a:t>      &lt;pose relative_to="base_link"&gt;0.30 0 0.10 0 0 0&lt;/pose&gt;</a:t>
-            </a:r>
-            <a:br/>
-            <a:r>
-              <a:t>      &lt;visual name="housing"&gt;</a:t>
-            </a:r>
-            <a:br/>
-            <a:r>
-              <a:t>        &lt;geometry&gt;</a:t>
-            </a:r>
-            <a:br/>
-            <a:r>
-              <a:t>          &lt;box&gt;</a:t>
-            </a:r>
-            <a:br/>
-            <a:r>
-              <a:t>            &lt;size&gt;0.05 0.08 0.05&lt;/size&gt;</a:t>
-            </a:r>
-            <a:br/>
-            <a:r>
-              <a:t>          &lt;/box&gt;</a:t>
+              <a:t>          &lt;/cylinder&gt;</a:t>
             </a:r>
             <a:br/>
             <a:r>
@@ -15561,11 +15754,11 @@
             </a:r>
             <a:br/>
             <a:r>
-              <a:t>      &lt;sensor name="camera" type="camera"&gt;</a:t>
-            </a:r>
-            <a:br/>
-            <a:r>
-              <a:t>        &lt;topic&gt;/camera/image_raw&lt;/topic&gt;</a:t>
+              <a:t>      &lt;sensor name="lidar" type="gpu_lidar"&gt;</a:t>
+            </a:r>
+            <a:br/>
+            <a:r>
+              <a:t>        &lt;topic&gt;/scan&lt;/topic&gt;</a:t>
             </a:r>
             <a:br/>
             <a:r>
@@ -15573,15 +15766,27 @@
             </a:r>
             <a:br/>
             <a:r>
-              <a:t>        &lt;update_rate&gt;15&lt;/update_rate&gt;</a:t>
-            </a:r>
-            <a:br/>
-            <a:r>
-              <a:t>        &lt;camera&gt;</a:t>
-            </a:r>
-            <a:br/>
-            <a:r>
-              <a:t>          &lt;horizontal_fov&gt;1.047&lt;/horizontal_fov&gt;</a:t>
+              <a:t>        &lt;update_rate&gt;10&lt;/update_rate&gt;</a:t>
+            </a:r>
+            <a:br/>
+            <a:r>
+              <a:t>        &lt;visualize&gt;false&lt;/visualize&gt;</a:t>
+            </a:r>
+            <a:br/>
+            <a:r>
+              <a:t>        &lt;lidar&gt;</a:t>
+            </a:r>
+            <a:br/>
+            <a:r>
+              <a:t>          &lt;scan&gt;</a:t>
+            </a:r>
+            <a:br/>
+            <a:r>
+              <a:t>            &lt;horizontal&gt;</a:t>
+            </a:r>
+            <a:br/>
+            <a:r>
+              <a:t>              &lt;samples&gt;720&lt;/samples&gt;</a:t>
             </a:r>
           </a:p>
         </p:txBody>
@@ -15594,7 +15799,7 @@
         </p:nvSpPr>
         <p:spPr>
           <a:xfrm>
-            <a:off x="749808" y="6199632"/>
+            <a:off x="749808" y="6181344"/>
             <a:ext cx="10789920" cy="201168"/>
           </a:xfrm>
           <a:prstGeom prst="rect">
@@ -15620,7 +15825,7 @@
               </a:defRPr>
             </a:pPr>
             <a:r>
-              <a:t>파일 전체 18/21 · 이 슬라이드 다음에 같은 파일의 나머지 줄이 이어집니다.</a:t>
+              <a:t>파일 전체 18/24 · 이 슬라이드 다음에 같은 파일의 나머지 줄이 이어집니다.</a:t>
             </a:r>
           </a:p>
         </p:txBody>
@@ -15677,7 +15882,7 @@
               </a:defRPr>
             </a:pPr>
             <a:r>
-              <a:t>파일을 계속 작성하고 저장한다 (19/21)</a:t>
+              <a:t>파일을 계속 작성하고 저장한다 (19/24)</a:t>
             </a:r>
           </a:p>
         </p:txBody>
@@ -15852,7 +16057,7 @@
               </a:defRPr>
             </a:pPr>
             <a:r>
-              <a:t>현재 단계 21/24    |    현재 폴더 ~/agv_ws    |    현재 터미널</a:t>
+              <a:t>현재 단계 21/27    |    현재 폴더 ~/agv_ws    |    현재 터미널</a:t>
             </a:r>
           </a:p>
         </p:txBody>
@@ -15865,8 +16070,8 @@
         </p:nvSpPr>
         <p:spPr>
           <a:xfrm>
-            <a:off x="658368" y="1682496"/>
-            <a:ext cx="10972800" cy="347472"/>
+            <a:off x="658368" y="1627632"/>
+            <a:ext cx="10972800" cy="256032"/>
           </a:xfrm>
           <a:prstGeom prst="rect">
             <a:avLst/>
@@ -15883,7 +16088,7 @@
               <a:spcAft>
                 <a:spcPts val="0"/>
               </a:spcAft>
-              <a:defRPr sz="1700" b="1">
+              <a:defRPr sz="1500" b="1">
                 <a:solidFill>
                   <a:srgbClr val="122C4E"/>
                 </a:solidFill>
@@ -15904,8 +16109,8 @@
         </p:nvSpPr>
         <p:spPr>
           <a:xfrm>
-            <a:off x="658368" y="2103120"/>
-            <a:ext cx="10972800" cy="493776"/>
+            <a:off x="658368" y="1956816"/>
+            <a:ext cx="10972800" cy="603504"/>
           </a:xfrm>
           <a:prstGeom prst="rect">
             <a:avLst/>
@@ -15949,7 +16154,11 @@
               </a:defRPr>
             </a:pPr>
             <a:r>
-              <a:t>파일 생성/열기: mkdir -p ~/agv_ws/src/agv_gazebo/models/agv    &amp;&amp;    nano ~/agv_ws/src/agv_gazebo/models/agv/model.sdf</a:t>
+              <a:t>파일 생성: mkdir -p ~/agv_ws/src/agv_gazebo/models/agv</a:t>
+            </a:r>
+            <a:br/>
+            <a:r>
+              <a:t>파일 열기: nano ~/agv_ws/src/agv_gazebo/models/agv/model.sdf</a:t>
             </a:r>
           </a:p>
         </p:txBody>
@@ -15962,8 +16171,8 @@
         </p:nvSpPr>
         <p:spPr>
           <a:xfrm>
-            <a:off x="658368" y="2761488"/>
-            <a:ext cx="10972800" cy="3383280"/>
+            <a:off x="658368" y="2706624"/>
+            <a:ext cx="10972800" cy="3364992"/>
           </a:xfrm>
           <a:prstGeom prst="rect">
             <a:avLst/>
@@ -16007,59 +16216,51 @@
               </a:defRPr>
             </a:pPr>
             <a:r>
-              <a:t>          &lt;image&gt;</a:t>
-            </a:r>
-            <a:br/>
-            <a:r>
-              <a:t>            &lt;width&gt;640&lt;/width&gt;</a:t>
-            </a:r>
-            <a:br/>
-            <a:r>
-              <a:t>            &lt;height&gt;480&lt;/height&gt;</a:t>
-            </a:r>
-            <a:br/>
-            <a:r>
-              <a:t>            &lt;format&gt;R8G8B8&lt;/format&gt;</a:t>
-            </a:r>
-            <a:br/>
-            <a:r>
-              <a:t>          &lt;/image&gt;</a:t>
-            </a:r>
-            <a:br/>
-            <a:r>
-              <a:t>          &lt;clip&gt;</a:t>
-            </a:r>
-            <a:br/>
-            <a:r>
-              <a:t>            &lt;near&gt;0.1&lt;/near&gt;</a:t>
-            </a:r>
-            <a:br/>
-            <a:r>
-              <a:t>            &lt;far&gt;20&lt;/far&gt;</a:t>
-            </a:r>
-            <a:br/>
-            <a:r>
-              <a:t>          &lt;/clip&gt;</a:t>
-            </a:r>
-            <a:br/>
-            <a:r>
-              <a:t>        &lt;/camera&gt;</a:t>
+              <a:t>              &lt;resolution&gt;1&lt;/resolution&gt;</a:t>
+            </a:r>
+            <a:br/>
+            <a:r>
+              <a:t>              &lt;min_angle&gt;-3.14159&lt;/min_angle&gt;</a:t>
+            </a:r>
+            <a:br/>
+            <a:r>
+              <a:t>              &lt;max_angle&gt;3.14159&lt;/max_angle&gt;</a:t>
+            </a:r>
+            <a:br/>
+            <a:r>
+              <a:t>            &lt;/horizontal&gt;</a:t>
+            </a:r>
+            <a:br/>
+            <a:r>
+              <a:t>          &lt;/scan&gt;</a:t>
+            </a:r>
+            <a:br/>
+            <a:r>
+              <a:t>          &lt;range&gt;</a:t>
+            </a:r>
+            <a:br/>
+            <a:r>
+              <a:t>            &lt;min&gt;0.12&lt;/min&gt;</a:t>
+            </a:r>
+            <a:br/>
+            <a:r>
+              <a:t>            &lt;max&gt;12.0&lt;/max&gt;</a:t>
+            </a:r>
+            <a:br/>
+            <a:r>
+              <a:t>            &lt;resolution&gt;0.01&lt;/resolution&gt;</a:t>
+            </a:r>
+            <a:br/>
+            <a:r>
+              <a:t>          &lt;/range&gt;</a:t>
+            </a:r>
+            <a:br/>
+            <a:r>
+              <a:t>        &lt;/lidar&gt;</a:t>
             </a:r>
             <a:br/>
             <a:r>
               <a:t>      &lt;/sensor&gt;</a:t>
-            </a:r>
-            <a:br/>
-            <a:r>
-              <a:t>    &lt;/link&gt;</a:t>
-            </a:r>
-            <a:br/>
-            <a:r>
-              <a:t>    </a:t>
-            </a:r>
-            <a:br/>
-            <a:r>
-              <a:t>    </a:t>
             </a:r>
           </a:p>
         </p:txBody>
@@ -16072,7 +16273,7 @@
         </p:nvSpPr>
         <p:spPr>
           <a:xfrm>
-            <a:off x="749808" y="6199632"/>
+            <a:off x="749808" y="6181344"/>
             <a:ext cx="10789920" cy="201168"/>
           </a:xfrm>
           <a:prstGeom prst="rect">
@@ -16098,7 +16299,7 @@
               </a:defRPr>
             </a:pPr>
             <a:r>
-              <a:t>파일 전체 19/21 · 이 슬라이드 다음에 같은 파일의 나머지 줄이 이어집니다.</a:t>
+              <a:t>파일 전체 19/24 · 이 슬라이드 다음에 같은 파일의 나머지 줄이 이어집니다.</a:t>
             </a:r>
           </a:p>
         </p:txBody>
@@ -16155,7 +16356,7 @@
               </a:defRPr>
             </a:pPr>
             <a:r>
-              <a:t>파일을 계속 작성하고 저장한다 (20/21)</a:t>
+              <a:t>파일을 계속 작성하고 저장한다 (20/24)</a:t>
             </a:r>
           </a:p>
         </p:txBody>
@@ -16330,7 +16531,7 @@
               </a:defRPr>
             </a:pPr>
             <a:r>
-              <a:t>현재 단계 22/24    |    현재 폴더 ~/agv_ws    |    현재 터미널</a:t>
+              <a:t>현재 단계 22/27    |    현재 폴더 ~/agv_ws    |    현재 터미널</a:t>
             </a:r>
           </a:p>
         </p:txBody>
@@ -16343,8 +16544,8 @@
         </p:nvSpPr>
         <p:spPr>
           <a:xfrm>
-            <a:off x="658368" y="1682496"/>
-            <a:ext cx="10972800" cy="347472"/>
+            <a:off x="658368" y="1627632"/>
+            <a:ext cx="10972800" cy="256032"/>
           </a:xfrm>
           <a:prstGeom prst="rect">
             <a:avLst/>
@@ -16361,7 +16562,7 @@
               <a:spcAft>
                 <a:spcPts val="0"/>
               </a:spcAft>
-              <a:defRPr sz="1700" b="1">
+              <a:defRPr sz="1500" b="1">
                 <a:solidFill>
                   <a:srgbClr val="122C4E"/>
                 </a:solidFill>
@@ -16382,8 +16583,8 @@
         </p:nvSpPr>
         <p:spPr>
           <a:xfrm>
-            <a:off x="658368" y="2103120"/>
-            <a:ext cx="10972800" cy="493776"/>
+            <a:off x="658368" y="1956816"/>
+            <a:ext cx="10972800" cy="603504"/>
           </a:xfrm>
           <a:prstGeom prst="rect">
             <a:avLst/>
@@ -16427,7 +16628,11 @@
               </a:defRPr>
             </a:pPr>
             <a:r>
-              <a:t>파일 생성/열기: mkdir -p ~/agv_ws/src/agv_gazebo/models/agv    &amp;&amp;    nano ~/agv_ws/src/agv_gazebo/models/agv/model.sdf</a:t>
+              <a:t>파일 생성: mkdir -p ~/agv_ws/src/agv_gazebo/models/agv</a:t>
+            </a:r>
+            <a:br/>
+            <a:r>
+              <a:t>파일 열기: nano ~/agv_ws/src/agv_gazebo/models/agv/model.sdf</a:t>
             </a:r>
           </a:p>
         </p:txBody>
@@ -16440,8 +16645,8 @@
         </p:nvSpPr>
         <p:spPr>
           <a:xfrm>
-            <a:off x="658368" y="2761488"/>
-            <a:ext cx="10972800" cy="3383280"/>
+            <a:off x="658368" y="2706624"/>
+            <a:ext cx="10972800" cy="3364992"/>
           </a:xfrm>
           <a:prstGeom prst="rect">
             <a:avLst/>
@@ -16485,7 +16690,19 @@
               </a:defRPr>
             </a:pPr>
             <a:r>
-              <a:t>    &lt;joint name="camera_joint" type="fixed"&gt;</a:t>
+              <a:t>    &lt;/link&gt;</a:t>
+            </a:r>
+            <a:br/>
+            <a:r>
+              <a:t>    </a:t>
+            </a:r>
+            <a:br/>
+            <a:r>
+              <a:t>    </a:t>
+            </a:r>
+            <a:br/>
+            <a:r>
+              <a:t>    &lt;joint name="lidar_joint" type="fixed"&gt;</a:t>
             </a:r>
             <a:br/>
             <a:r>
@@ -16493,7 +16710,7 @@
             </a:r>
             <a:br/>
             <a:r>
-              <a:t>      &lt;child&gt;camera_link&lt;/child&gt;</a:t>
+              <a:t>      &lt;child&gt;lidar_link&lt;/child&gt;</a:t>
             </a:r>
             <a:br/>
             <a:r>
@@ -16509,35 +16726,15 @@
             </a:r>
             <a:br/>
             <a:r>
-              <a:t>    &lt;plugin filename="gz-sim-diff-drive-system" name="gz::sim::systems::DiffDrive"&gt;</a:t>
-            </a:r>
-            <a:br/>
-            <a:r>
-              <a:t>      &lt;left_joint&gt;left_wheel_joint&lt;/left_joint&gt;</a:t>
-            </a:r>
-            <a:br/>
-            <a:r>
-              <a:t>      &lt;right_joint&gt;right_wheel_joint&lt;/right_joint&gt;</a:t>
-            </a:r>
-            <a:br/>
-            <a:r>
-              <a:t>      &lt;wheel_separation&gt;0.38&lt;/wheel_separation&gt;</a:t>
-            </a:r>
-            <a:br/>
-            <a:r>
-              <a:t>      &lt;wheel_radius&gt;0.08&lt;/wheel_radius&gt;</a:t>
-            </a:r>
-            <a:br/>
-            <a:r>
-              <a:t>      &lt;topic&gt;/cmd_vel&lt;/topic&gt;</a:t>
-            </a:r>
-            <a:br/>
-            <a:r>
-              <a:t>      &lt;odom_topic&gt;/odom&lt;/odom_topic&gt;</a:t>
-            </a:r>
-            <a:br/>
-            <a:r>
-              <a:t>      &lt;frame_id&gt;odom&lt;/frame_id&gt;</a:t>
+              <a:t>    &lt;link name="camera_link"&gt;</a:t>
+            </a:r>
+            <a:br/>
+            <a:r>
+              <a:t>      &lt;pose relative_to="base_link"&gt;0.30 0 0.10 0 0 0&lt;/pose&gt;</a:t>
+            </a:r>
+            <a:br/>
+            <a:r>
+              <a:t>      &lt;visual name="housing"&gt;</a:t>
             </a:r>
           </a:p>
         </p:txBody>
@@ -16550,7 +16747,7 @@
         </p:nvSpPr>
         <p:spPr>
           <a:xfrm>
-            <a:off x="749808" y="6199632"/>
+            <a:off x="749808" y="6181344"/>
             <a:ext cx="10789920" cy="201168"/>
           </a:xfrm>
           <a:prstGeom prst="rect">
@@ -16576,7 +16773,7 @@
               </a:defRPr>
             </a:pPr>
             <a:r>
-              <a:t>파일 전체 20/21 · 이 슬라이드 다음에 같은 파일의 나머지 줄이 이어집니다.</a:t>
+              <a:t>파일 전체 20/24 · 이 슬라이드 다음에 같은 파일의 나머지 줄이 이어집니다.</a:t>
             </a:r>
           </a:p>
         </p:txBody>
@@ -16633,7 +16830,7 @@
               </a:defRPr>
             </a:pPr>
             <a:r>
-              <a:t>파일을 계속 작성하고 저장한다 (21/21)</a:t>
+              <a:t>파일을 계속 작성하고 저장한다 (21/24)</a:t>
             </a:r>
           </a:p>
         </p:txBody>
@@ -16808,7 +17005,7 @@
               </a:defRPr>
             </a:pPr>
             <a:r>
-              <a:t>현재 단계 23/24    |    현재 폴더 ~/agv_ws    |    현재 터미널</a:t>
+              <a:t>현재 단계 23/27    |    현재 폴더 ~/agv_ws    |    현재 터미널</a:t>
             </a:r>
           </a:p>
         </p:txBody>
@@ -16821,8 +17018,8 @@
         </p:nvSpPr>
         <p:spPr>
           <a:xfrm>
-            <a:off x="658368" y="1682496"/>
-            <a:ext cx="10972800" cy="347472"/>
+            <a:off x="658368" y="1627632"/>
+            <a:ext cx="10972800" cy="256032"/>
           </a:xfrm>
           <a:prstGeom prst="rect">
             <a:avLst/>
@@ -16839,7 +17036,7 @@
               <a:spcAft>
                 <a:spcPts val="0"/>
               </a:spcAft>
-              <a:defRPr sz="1700" b="1">
+              <a:defRPr sz="1500" b="1">
                 <a:solidFill>
                   <a:srgbClr val="122C4E"/>
                 </a:solidFill>
@@ -16860,8 +17057,8 @@
         </p:nvSpPr>
         <p:spPr>
           <a:xfrm>
-            <a:off x="658368" y="2103120"/>
-            <a:ext cx="10972800" cy="493776"/>
+            <a:off x="658368" y="1956816"/>
+            <a:ext cx="10972800" cy="603504"/>
           </a:xfrm>
           <a:prstGeom prst="rect">
             <a:avLst/>
@@ -16905,7 +17102,11 @@
               </a:defRPr>
             </a:pPr>
             <a:r>
-              <a:t>파일 생성/열기: mkdir -p ~/agv_ws/src/agv_gazebo/models/agv    &amp;&amp;    nano ~/agv_ws/src/agv_gazebo/models/agv/model.sdf</a:t>
+              <a:t>파일 생성: mkdir -p ~/agv_ws/src/agv_gazebo/models/agv</a:t>
+            </a:r>
+            <a:br/>
+            <a:r>
+              <a:t>파일 열기: nano ~/agv_ws/src/agv_gazebo/models/agv/model.sdf</a:t>
             </a:r>
           </a:p>
         </p:txBody>
@@ -16918,8 +17119,8 @@
         </p:nvSpPr>
         <p:spPr>
           <a:xfrm>
-            <a:off x="658368" y="2761488"/>
-            <a:ext cx="10972800" cy="3383280"/>
+            <a:off x="658368" y="2706624"/>
+            <a:ext cx="10972800" cy="3364992"/>
           </a:xfrm>
           <a:prstGeom prst="rect">
             <a:avLst/>
@@ -16963,32 +17164,51 @@
               </a:defRPr>
             </a:pPr>
             <a:r>
-              <a:t>      &lt;child_frame_id&gt;base_link&lt;/child_frame_id&gt;</a:t>
-            </a:r>
-            <a:br/>
-            <a:r>
-              <a:t>    &lt;/plugin&gt;</a:t>
-            </a:r>
-            <a:br/>
-            <a:r>
-              <a:t>    </a:t>
-            </a:r>
-            <a:br/>
-            <a:r>
-              <a:t>  </a:t>
-            </a:r>
-            <a:br/>
-            <a:r>
-              <a:t>  &lt;/model&gt;</a:t>
-            </a:r>
-            <a:br/>
-            <a:r>
-              <a:t>  </a:t>
-            </a:r>
-            <a:br/>
-            <a:br/>
-            <a:r>
-              <a:t>&lt;/sdf&gt;</a:t>
+              <a:t>        &lt;geometry&gt;</a:t>
+            </a:r>
+            <a:br/>
+            <a:r>
+              <a:t>          &lt;box&gt;</a:t>
+            </a:r>
+            <a:br/>
+            <a:r>
+              <a:t>            &lt;size&gt;0.05 0.08 0.05&lt;/size&gt;</a:t>
+            </a:r>
+            <a:br/>
+            <a:r>
+              <a:t>          &lt;/box&gt;</a:t>
+            </a:r>
+            <a:br/>
+            <a:r>
+              <a:t>        &lt;/geometry&gt;</a:t>
+            </a:r>
+            <a:br/>
+            <a:r>
+              <a:t>      &lt;/visual&gt;</a:t>
+            </a:r>
+            <a:br/>
+            <a:r>
+              <a:t>      &lt;sensor name="camera" type="camera"&gt;</a:t>
+            </a:r>
+            <a:br/>
+            <a:r>
+              <a:t>        &lt;topic&gt;/camera/image_raw&lt;/topic&gt;</a:t>
+            </a:r>
+            <a:br/>
+            <a:r>
+              <a:t>        &lt;always_on&gt;true&lt;/always_on&gt;</a:t>
+            </a:r>
+            <a:br/>
+            <a:r>
+              <a:t>        &lt;update_rate&gt;15&lt;/update_rate&gt;</a:t>
+            </a:r>
+            <a:br/>
+            <a:r>
+              <a:t>        &lt;camera&gt;</a:t>
+            </a:r>
+            <a:br/>
+            <a:r>
+              <a:t>          &lt;horizontal_fov&gt;1.047&lt;/horizontal_fov&gt;</a:t>
             </a:r>
           </a:p>
         </p:txBody>
@@ -17001,7 +17221,7 @@
         </p:nvSpPr>
         <p:spPr>
           <a:xfrm>
-            <a:off x="749808" y="6199632"/>
+            <a:off x="749808" y="6181344"/>
             <a:ext cx="10789920" cy="201168"/>
           </a:xfrm>
           <a:prstGeom prst="rect">
@@ -17027,7 +17247,7 @@
               </a:defRPr>
             </a:pPr>
             <a:r>
-              <a:t>파일 전체 21/21 · 이 슬라이드 다음에 같은 파일의 나머지 줄이 이어집니다.</a:t>
+              <a:t>파일 전체 21/24 · 이 슬라이드 다음에 같은 파일의 나머지 줄이 이어집니다.</a:t>
             </a:r>
           </a:p>
         </p:txBody>
@@ -17503,7 +17723,7 @@
               </a:defRPr>
             </a:pPr>
             <a:r>
-              <a:t>build → source → run 순서로 실행한다</a:t>
+              <a:t>파일을 계속 작성하고 저장한다 (22/24)</a:t>
             </a:r>
           </a:p>
         </p:txBody>
@@ -17542,7 +17762,7 @@
               </a:defRPr>
             </a:pPr>
             <a:r>
-              <a:t>새 파일 또는 수정 파일은 build와 source 뒤에만 실행 이름·설정에 반영됩니다.</a:t>
+              <a:t>~/agv_ws/src/agv_gazebo/models/agv/model.sdf</a:t>
             </a:r>
           </a:p>
         </p:txBody>
@@ -17678,23 +17898,124 @@
               </a:defRPr>
             </a:pPr>
             <a:r>
-              <a:t>현재 단계 실행    |    현재 폴더 ~/agv_ws    |    현재 터미널</a:t>
-            </a:r>
-          </a:p>
-        </p:txBody>
-      </p:sp>
-      <p:sp>
-        <p:nvSpPr>
-          <p:cNvPr id="7" name="Rounded Rectangle 6"/>
+              <a:t>현재 단계 24/27    |    현재 폴더 ~/agv_ws    |    현재 터미널</a:t>
+            </a:r>
+          </a:p>
+        </p:txBody>
+      </p:sp>
+      <p:sp>
+        <p:nvSpPr>
+          <p:cNvPr id="7" name="TextBox 6"/>
+          <p:cNvSpPr txBox="1"/>
+          <p:nvPr/>
+        </p:nvSpPr>
+        <p:spPr>
+          <a:xfrm>
+            <a:off x="658368" y="1627632"/>
+            <a:ext cx="10972800" cy="256032"/>
+          </a:xfrm>
+          <a:prstGeom prst="rect">
+            <a:avLst/>
+          </a:prstGeom>
+          <a:noFill/>
+        </p:spPr>
+        <p:txBody>
+          <a:bodyPr wrap="square" lIns="73152" rIns="73152" tIns="36576" bIns="36576">
+            <a:spAutoFit/>
+          </a:bodyPr>
+          <a:lstStyle/>
+          <a:p>
+            <a:pPr algn="l">
+              <a:spcAft>
+                <a:spcPts val="0"/>
+              </a:spcAft>
+              <a:defRPr sz="1500" b="1">
+                <a:solidFill>
+                  <a:srgbClr val="122C4E"/>
+                </a:solidFill>
+                <a:latin typeface="Noto Sans CJK KR"/>
+              </a:defRPr>
+            </a:pPr>
+            <a:r>
+              <a:t>이번 단계: 파일의 전체 내용을 중간 생략 없이 작성합니다. 아래 줄 범위를 끝까지 입력하세요.</a:t>
+            </a:r>
+          </a:p>
+        </p:txBody>
+      </p:sp>
+      <p:sp>
+        <p:nvSpPr>
+          <p:cNvPr id="8" name="Rectangle 7"/>
           <p:cNvSpPr/>
           <p:nvPr/>
         </p:nvSpPr>
         <p:spPr>
           <a:xfrm>
-            <a:off x="658368" y="1700784"/>
-            <a:ext cx="10972800" cy="3182112"/>
-          </a:xfrm>
-          <a:prstGeom prst="roundRect">
+            <a:off x="658368" y="1956816"/>
+            <a:ext cx="10972800" cy="603504"/>
+          </a:xfrm>
+          <a:prstGeom prst="rect">
+            <a:avLst/>
+          </a:prstGeom>
+          <a:solidFill>
+            <a:srgbClr val="F4F7FB"/>
+          </a:solidFill>
+          <a:ln>
+            <a:solidFill>
+              <a:srgbClr val="F4F7FB"/>
+            </a:solidFill>
+          </a:ln>
+        </p:spPr>
+        <p:style>
+          <a:lnRef idx="1">
+            <a:schemeClr val="accent1"/>
+          </a:lnRef>
+          <a:fillRef idx="3">
+            <a:schemeClr val="accent1"/>
+          </a:fillRef>
+          <a:effectRef idx="2">
+            <a:schemeClr val="accent1"/>
+          </a:effectRef>
+          <a:fontRef idx="minor">
+            <a:schemeClr val="lt1"/>
+          </a:fontRef>
+        </p:style>
+        <p:txBody>
+          <a:bodyPr rtlCol="0" anchor="ctr" wrap="square" lIns="73152" rIns="73152" tIns="36576" bIns="36576"/>
+          <a:lstStyle/>
+          <a:p>
+            <a:pPr algn="l">
+              <a:spcAft>
+                <a:spcPts val="0"/>
+              </a:spcAft>
+              <a:defRPr sz="1400" b="0">
+                <a:solidFill>
+                  <a:srgbClr val="122C4E"/>
+                </a:solidFill>
+                <a:latin typeface="DejaVu Sans Mono"/>
+              </a:defRPr>
+            </a:pPr>
+            <a:r>
+              <a:t>파일 생성: mkdir -p ~/agv_ws/src/agv_gazebo/models/agv</a:t>
+            </a:r>
+            <a:br/>
+            <a:r>
+              <a:t>파일 열기: nano ~/agv_ws/src/agv_gazebo/models/agv/model.sdf</a:t>
+            </a:r>
+          </a:p>
+        </p:txBody>
+      </p:sp>
+      <p:sp>
+        <p:nvSpPr>
+          <p:cNvPr id="9" name="Rectangle 8"/>
+          <p:cNvSpPr/>
+          <p:nvPr/>
+        </p:nvSpPr>
+        <p:spPr>
+          <a:xfrm>
+            <a:off x="658368" y="2706624"/>
+            <a:ext cx="10972800" cy="3364992"/>
+          </a:xfrm>
+          <a:prstGeom prst="rect">
             <a:avLst/>
           </a:prstGeom>
           <a:solidFill>
@@ -17721,14 +18042,14 @@
           </a:fontRef>
         </p:style>
         <p:txBody>
-          <a:bodyPr rtlCol="0" anchor="ctr" wrap="square" lIns="73152" rIns="73152" tIns="36576" bIns="36576"/>
-          <a:lstStyle/>
-          <a:p>
-            <a:pPr algn="l">
-              <a:spcAft>
-                <a:spcPts val="0"/>
-              </a:spcAft>
-              <a:defRPr sz="1600" b="0">
+          <a:bodyPr rtlCol="0" anchor="ctr" wrap="square" lIns="164592" rIns="164592" tIns="109728" bIns="36576"/>
+          <a:lstStyle/>
+          <a:p>
+            <a:pPr algn="l">
+              <a:spcAft>
+                <a:spcPts val="0"/>
+              </a:spcAft>
+              <a:defRPr sz="1400" b="0">
                 <a:solidFill>
                   <a:srgbClr val="FFFFFF"/>
                 </a:solidFill>
@@ -17736,25 +18057,65 @@
               </a:defRPr>
             </a:pPr>
             <a:r>
-              <a:t>cd ~/agv_ws &amp;&amp; source install/setup.bash</a:t>
-            </a:r>
-            <a:br/>
-            <a:r>
-              <a:t>ros2 launch agv_gazebo gazebo.launch.py</a:t>
-            </a:r>
-          </a:p>
-        </p:txBody>
-      </p:sp>
-      <p:sp>
-        <p:nvSpPr>
-          <p:cNvPr id="8" name="TextBox 7"/>
+              <a:t>          &lt;image&gt;</a:t>
+            </a:r>
+            <a:br/>
+            <a:r>
+              <a:t>            &lt;width&gt;640&lt;/width&gt;</a:t>
+            </a:r>
+            <a:br/>
+            <a:r>
+              <a:t>            &lt;height&gt;480&lt;/height&gt;</a:t>
+            </a:r>
+            <a:br/>
+            <a:r>
+              <a:t>            &lt;format&gt;R8G8B8&lt;/format&gt;</a:t>
+            </a:r>
+            <a:br/>
+            <a:r>
+              <a:t>          &lt;/image&gt;</a:t>
+            </a:r>
+            <a:br/>
+            <a:r>
+              <a:t>          &lt;clip&gt;</a:t>
+            </a:r>
+            <a:br/>
+            <a:r>
+              <a:t>            &lt;near&gt;0.1&lt;/near&gt;</a:t>
+            </a:r>
+            <a:br/>
+            <a:r>
+              <a:t>            &lt;far&gt;20&lt;/far&gt;</a:t>
+            </a:r>
+            <a:br/>
+            <a:r>
+              <a:t>          &lt;/clip&gt;</a:t>
+            </a:r>
+            <a:br/>
+            <a:r>
+              <a:t>        &lt;/camera&gt;</a:t>
+            </a:r>
+            <a:br/>
+            <a:r>
+              <a:t>      &lt;/sensor&gt;</a:t>
+            </a:r>
+            <a:br/>
+            <a:r>
+              <a:t>    &lt;/link&gt;</a:t>
+            </a:r>
+          </a:p>
+        </p:txBody>
+      </p:sp>
+      <p:sp>
+        <p:nvSpPr>
+          <p:cNvPr id="10" name="TextBox 9"/>
           <p:cNvSpPr txBox="1"/>
           <p:nvPr/>
         </p:nvSpPr>
         <p:spPr>
           <a:xfrm>
-            <a:off x="786384" y="5239512"/>
-            <a:ext cx="1261872" cy="237744"/>
+            <a:off x="749808" y="6181344"/>
+            <a:ext cx="10789920" cy="201168"/>
           </a:xfrm>
           <a:prstGeom prst="rect">
             <a:avLst/>
@@ -17771,54 +18132,15 @@
               <a:spcAft>
                 <a:spcPts val="0"/>
               </a:spcAft>
-              <a:defRPr sz="1800" b="1">
-                <a:solidFill>
-                  <a:srgbClr val="2A8B5A"/>
-                </a:solidFill>
-                <a:latin typeface="Noto Sans CJK KR"/>
-              </a:defRPr>
-            </a:pPr>
-            <a:r>
-              <a:t>확인 기준</a:t>
-            </a:r>
-          </a:p>
-        </p:txBody>
-      </p:sp>
-      <p:sp>
-        <p:nvSpPr>
-          <p:cNvPr id="9" name="TextBox 8"/>
-          <p:cNvSpPr txBox="1"/>
-          <p:nvPr/>
-        </p:nvSpPr>
-        <p:spPr>
-          <a:xfrm>
-            <a:off x="786384" y="5532120"/>
-            <a:ext cx="10469880" cy="420624"/>
-          </a:xfrm>
-          <a:prstGeom prst="rect">
-            <a:avLst/>
-          </a:prstGeom>
-          <a:noFill/>
-        </p:spPr>
-        <p:txBody>
-          <a:bodyPr wrap="square" lIns="73152" rIns="73152" tIns="36576" bIns="36576">
-            <a:spAutoFit/>
-          </a:bodyPr>
-          <a:lstStyle/>
-          <a:p>
-            <a:pPr algn="l">
-              <a:spcAft>
-                <a:spcPts val="0"/>
-              </a:spcAft>
-              <a:defRPr sz="1800" b="0">
-                <a:solidFill>
-                  <a:srgbClr val="122C4E"/>
-                </a:solidFill>
-                <a:latin typeface="Noto Sans CJK KR"/>
-              </a:defRPr>
-            </a:pPr>
-            <a:r>
-              <a:t>AGV가 바닥에 안정적으로 놓이고 바퀴 접촉·충돌 파라미터가 모델에 존재한다.</a:t>
+              <a:defRPr sz="1000" b="0">
+                <a:solidFill>
+                  <a:srgbClr val="5C6672"/>
+                </a:solidFill>
+                <a:latin typeface="Noto Sans CJK KR"/>
+              </a:defRPr>
+            </a:pPr>
+            <a:r>
+              <a:t>파일 전체 22/24 · 이 슬라이드 다음에 같은 파일의 나머지 줄이 이어집니다.</a:t>
             </a:r>
           </a:p>
         </p:txBody>
@@ -17875,7 +18197,7 @@
               </a:defRPr>
             </a:pPr>
             <a:r>
-              <a:t>정상 결과: 실제 환경에서 확인한 출력</a:t>
+              <a:t>파일을 계속 작성하고 저장한다 (23/24)</a:t>
             </a:r>
           </a:p>
         </p:txBody>
@@ -17914,7 +18236,7 @@
               </a:defRPr>
             </a:pPr>
             <a:r>
-              <a:t>실제 ROS 2 환경의 파일·패키지·구성 검증 로그</a:t>
+              <a:t>~/agv_ws/src/agv_gazebo/models/agv/model.sdf</a:t>
             </a:r>
           </a:p>
         </p:txBody>
@@ -17997,30 +18319,64 @@
           </a:p>
         </p:txBody>
       </p:sp>
-      <p:pic>
-        <p:nvPicPr>
-          <p:cNvPr id="6" name="Picture 5" descr="validation_terminal.png"/>
-          <p:cNvPicPr>
-            <a:picLocks noChangeAspect="1"/>
-          </p:cNvPicPr>
-          <p:nvPr/>
-        </p:nvPicPr>
-        <p:blipFill>
-          <a:blip r:embed="rId2"/>
-          <a:stretch>
-            <a:fillRect/>
-          </a:stretch>
-        </p:blipFill>
-        <p:spPr>
-          <a:xfrm>
-            <a:off x="2562068" y="1353312"/>
-            <a:ext cx="7064815" cy="4800600"/>
-          </a:xfrm>
-          <a:prstGeom prst="rect">
-            <a:avLst/>
-          </a:prstGeom>
-        </p:spPr>
-      </p:pic>
+      <p:sp>
+        <p:nvSpPr>
+          <p:cNvPr id="6" name="Rectangle 5"/>
+          <p:cNvSpPr/>
+          <p:nvPr/>
+        </p:nvSpPr>
+        <p:spPr>
+          <a:xfrm>
+            <a:off x="566928" y="1188720"/>
+            <a:ext cx="11064240" cy="347472"/>
+          </a:xfrm>
+          <a:prstGeom prst="rect">
+            <a:avLst/>
+          </a:prstGeom>
+          <a:solidFill>
+            <a:srgbClr val="F4F7FB"/>
+          </a:solidFill>
+          <a:ln>
+            <a:solidFill>
+              <a:srgbClr val="F4F7FB"/>
+            </a:solidFill>
+          </a:ln>
+        </p:spPr>
+        <p:style>
+          <a:lnRef idx="1">
+            <a:schemeClr val="accent1"/>
+          </a:lnRef>
+          <a:fillRef idx="3">
+            <a:schemeClr val="accent1"/>
+          </a:fillRef>
+          <a:effectRef idx="2">
+            <a:schemeClr val="accent1"/>
+          </a:effectRef>
+          <a:fontRef idx="minor">
+            <a:schemeClr val="lt1"/>
+          </a:fontRef>
+        </p:style>
+        <p:txBody>
+          <a:bodyPr rtlCol="0" anchor="ctr" wrap="square" lIns="73152" rIns="73152" tIns="36576" bIns="36576"/>
+          <a:lstStyle/>
+          <a:p>
+            <a:pPr algn="l">
+              <a:spcAft>
+                <a:spcPts val="0"/>
+              </a:spcAft>
+              <a:defRPr sz="1300" b="1">
+                <a:solidFill>
+                  <a:srgbClr val="122C4E"/>
+                </a:solidFill>
+                <a:latin typeface="Noto Sans CJK KR"/>
+              </a:defRPr>
+            </a:pPr>
+            <a:r>
+              <a:t>현재 단계 25/27    |    현재 폴더 ~/agv_ws    |    현재 터미널</a:t>
+            </a:r>
+          </a:p>
+        </p:txBody>
+      </p:sp>
       <p:sp>
         <p:nvSpPr>
           <p:cNvPr id="7" name="TextBox 6"/>
@@ -18029,8 +18385,8 @@
         </p:nvSpPr>
         <p:spPr>
           <a:xfrm>
-            <a:off x="777240" y="6217920"/>
-            <a:ext cx="10607040" cy="182880"/>
+            <a:off x="658368" y="1627632"/>
+            <a:ext cx="10972800" cy="256032"/>
           </a:xfrm>
           <a:prstGeom prst="rect">
             <a:avLst/>
@@ -18043,19 +18399,222 @@
           </a:bodyPr>
           <a:lstStyle/>
           <a:p>
-            <a:pPr algn="ctr">
-              <a:spcAft>
-                <a:spcPts val="0"/>
-              </a:spcAft>
-              <a:defRPr sz="1100" b="1">
-                <a:solidFill>
-                  <a:srgbClr val="2A8B5A"/>
-                </a:solidFill>
-                <a:latin typeface="Noto Sans CJK KR"/>
-              </a:defRPr>
-            </a:pPr>
-            <a:r>
-              <a:t>① 명령/설정  ② 정상 출력 또는 화면  ③ 다음 검증 명령으로 재확인</a:t>
+            <a:pPr algn="l">
+              <a:spcAft>
+                <a:spcPts val="0"/>
+              </a:spcAft>
+              <a:defRPr sz="1500" b="1">
+                <a:solidFill>
+                  <a:srgbClr val="122C4E"/>
+                </a:solidFill>
+                <a:latin typeface="Noto Sans CJK KR"/>
+              </a:defRPr>
+            </a:pPr>
+            <a:r>
+              <a:t>이번 단계: 파일의 전체 내용을 중간 생략 없이 작성합니다. 아래 줄 범위를 끝까지 입력하세요.</a:t>
+            </a:r>
+          </a:p>
+        </p:txBody>
+      </p:sp>
+      <p:sp>
+        <p:nvSpPr>
+          <p:cNvPr id="8" name="Rectangle 7"/>
+          <p:cNvSpPr/>
+          <p:nvPr/>
+        </p:nvSpPr>
+        <p:spPr>
+          <a:xfrm>
+            <a:off x="658368" y="1956816"/>
+            <a:ext cx="10972800" cy="603504"/>
+          </a:xfrm>
+          <a:prstGeom prst="rect">
+            <a:avLst/>
+          </a:prstGeom>
+          <a:solidFill>
+            <a:srgbClr val="F4F7FB"/>
+          </a:solidFill>
+          <a:ln>
+            <a:solidFill>
+              <a:srgbClr val="F4F7FB"/>
+            </a:solidFill>
+          </a:ln>
+        </p:spPr>
+        <p:style>
+          <a:lnRef idx="1">
+            <a:schemeClr val="accent1"/>
+          </a:lnRef>
+          <a:fillRef idx="3">
+            <a:schemeClr val="accent1"/>
+          </a:fillRef>
+          <a:effectRef idx="2">
+            <a:schemeClr val="accent1"/>
+          </a:effectRef>
+          <a:fontRef idx="minor">
+            <a:schemeClr val="lt1"/>
+          </a:fontRef>
+        </p:style>
+        <p:txBody>
+          <a:bodyPr rtlCol="0" anchor="ctr" wrap="square" lIns="73152" rIns="73152" tIns="36576" bIns="36576"/>
+          <a:lstStyle/>
+          <a:p>
+            <a:pPr algn="l">
+              <a:spcAft>
+                <a:spcPts val="0"/>
+              </a:spcAft>
+              <a:defRPr sz="1400" b="0">
+                <a:solidFill>
+                  <a:srgbClr val="122C4E"/>
+                </a:solidFill>
+                <a:latin typeface="DejaVu Sans Mono"/>
+              </a:defRPr>
+            </a:pPr>
+            <a:r>
+              <a:t>파일 생성: mkdir -p ~/agv_ws/src/agv_gazebo/models/agv</a:t>
+            </a:r>
+            <a:br/>
+            <a:r>
+              <a:t>파일 열기: nano ~/agv_ws/src/agv_gazebo/models/agv/model.sdf</a:t>
+            </a:r>
+          </a:p>
+        </p:txBody>
+      </p:sp>
+      <p:sp>
+        <p:nvSpPr>
+          <p:cNvPr id="9" name="Rectangle 8"/>
+          <p:cNvSpPr/>
+          <p:nvPr/>
+        </p:nvSpPr>
+        <p:spPr>
+          <a:xfrm>
+            <a:off x="658368" y="2706624"/>
+            <a:ext cx="10972800" cy="3364992"/>
+          </a:xfrm>
+          <a:prstGeom prst="rect">
+            <a:avLst/>
+          </a:prstGeom>
+          <a:solidFill>
+            <a:srgbClr val="1D232D"/>
+          </a:solidFill>
+          <a:ln>
+            <a:solidFill>
+              <a:srgbClr val="1D232D"/>
+            </a:solidFill>
+          </a:ln>
+        </p:spPr>
+        <p:style>
+          <a:lnRef idx="1">
+            <a:schemeClr val="accent1"/>
+          </a:lnRef>
+          <a:fillRef idx="3">
+            <a:schemeClr val="accent1"/>
+          </a:fillRef>
+          <a:effectRef idx="2">
+            <a:schemeClr val="accent1"/>
+          </a:effectRef>
+          <a:fontRef idx="minor">
+            <a:schemeClr val="lt1"/>
+          </a:fontRef>
+        </p:style>
+        <p:txBody>
+          <a:bodyPr rtlCol="0" anchor="ctr" wrap="square" lIns="164592" rIns="164592" tIns="109728" bIns="36576"/>
+          <a:lstStyle/>
+          <a:p>
+            <a:pPr algn="l">
+              <a:spcAft>
+                <a:spcPts val="0"/>
+              </a:spcAft>
+              <a:defRPr sz="1400" b="0">
+                <a:solidFill>
+                  <a:srgbClr val="FFFFFF"/>
+                </a:solidFill>
+                <a:latin typeface="DejaVu Sans Mono"/>
+              </a:defRPr>
+            </a:pPr>
+            <a:r>
+              <a:t>    </a:t>
+            </a:r>
+            <a:br/>
+            <a:r>
+              <a:t>    </a:t>
+            </a:r>
+            <a:br/>
+            <a:r>
+              <a:t>    &lt;joint name="camera_joint" type="fixed"&gt;</a:t>
+            </a:r>
+            <a:br/>
+            <a:r>
+              <a:t>      &lt;parent&gt;base_link&lt;/parent&gt;</a:t>
+            </a:r>
+            <a:br/>
+            <a:r>
+              <a:t>      &lt;child&gt;camera_link&lt;/child&gt;</a:t>
+            </a:r>
+            <a:br/>
+            <a:r>
+              <a:t>    &lt;/joint&gt;</a:t>
+            </a:r>
+            <a:br/>
+            <a:r>
+              <a:t>    </a:t>
+            </a:r>
+            <a:br/>
+            <a:r>
+              <a:t>    </a:t>
+            </a:r>
+            <a:br/>
+            <a:r>
+              <a:t>    &lt;plugin filename="gz-sim-diff-drive-system" name="gz::sim::systems::DiffDrive"&gt;</a:t>
+            </a:r>
+            <a:br/>
+            <a:r>
+              <a:t>      &lt;left_joint&gt;left_wheel_joint&lt;/left_joint&gt;</a:t>
+            </a:r>
+            <a:br/>
+            <a:r>
+              <a:t>      &lt;right_joint&gt;right_wheel_joint&lt;/right_joint&gt;</a:t>
+            </a:r>
+            <a:br/>
+            <a:r>
+              <a:t>      &lt;wheel_separation&gt;0.38&lt;/wheel_separation&gt;</a:t>
+            </a:r>
+          </a:p>
+        </p:txBody>
+      </p:sp>
+      <p:sp>
+        <p:nvSpPr>
+          <p:cNvPr id="10" name="TextBox 9"/>
+          <p:cNvSpPr txBox="1"/>
+          <p:nvPr/>
+        </p:nvSpPr>
+        <p:spPr>
+          <a:xfrm>
+            <a:off x="749808" y="6181344"/>
+            <a:ext cx="10789920" cy="201168"/>
+          </a:xfrm>
+          <a:prstGeom prst="rect">
+            <a:avLst/>
+          </a:prstGeom>
+          <a:noFill/>
+        </p:spPr>
+        <p:txBody>
+          <a:bodyPr wrap="square" lIns="73152" rIns="73152" tIns="36576" bIns="36576">
+            <a:spAutoFit/>
+          </a:bodyPr>
+          <a:lstStyle/>
+          <a:p>
+            <a:pPr algn="l">
+              <a:spcAft>
+                <a:spcPts val="0"/>
+              </a:spcAft>
+              <a:defRPr sz="1000" b="0">
+                <a:solidFill>
+                  <a:srgbClr val="5C6672"/>
+                </a:solidFill>
+                <a:latin typeface="Noto Sans CJK KR"/>
+              </a:defRPr>
+            </a:pPr>
+            <a:r>
+              <a:t>파일 전체 23/24 · 이 슬라이드 다음에 같은 파일의 나머지 줄이 이어집니다.</a:t>
             </a:r>
           </a:p>
         </p:txBody>
@@ -18112,7 +18671,7 @@
               </a:defRPr>
             </a:pPr>
             <a:r>
-              <a:t>객관적 검증 명령으로 완료를 확인한다</a:t>
+              <a:t>파일을 계속 작성하고 저장한다 (24/24)</a:t>
             </a:r>
           </a:p>
         </p:txBody>
@@ -18151,7 +18710,7 @@
               </a:defRPr>
             </a:pPr>
             <a:r>
-              <a:t>화면만 보지 말고 topic·frame·파일·parameter를 다시 확인합니다.</a:t>
+              <a:t>~/agv_ws/src/agv_gazebo/models/agv/model.sdf</a:t>
             </a:r>
           </a:p>
         </p:txBody>
@@ -18287,23 +18846,124 @@
               </a:defRPr>
             </a:pPr>
             <a:r>
-              <a:t>현재 단계 검증    |    현재 폴더 ~/agv_ws    |    현재 터미널</a:t>
-            </a:r>
-          </a:p>
-        </p:txBody>
-      </p:sp>
-      <p:sp>
-        <p:nvSpPr>
-          <p:cNvPr id="7" name="Rounded Rectangle 6"/>
+              <a:t>현재 단계 26/27    |    현재 폴더 ~/agv_ws    |    현재 터미널</a:t>
+            </a:r>
+          </a:p>
+        </p:txBody>
+      </p:sp>
+      <p:sp>
+        <p:nvSpPr>
+          <p:cNvPr id="7" name="TextBox 6"/>
+          <p:cNvSpPr txBox="1"/>
+          <p:nvPr/>
+        </p:nvSpPr>
+        <p:spPr>
+          <a:xfrm>
+            <a:off x="658368" y="1627632"/>
+            <a:ext cx="10972800" cy="256032"/>
+          </a:xfrm>
+          <a:prstGeom prst="rect">
+            <a:avLst/>
+          </a:prstGeom>
+          <a:noFill/>
+        </p:spPr>
+        <p:txBody>
+          <a:bodyPr wrap="square" lIns="73152" rIns="73152" tIns="36576" bIns="36576">
+            <a:spAutoFit/>
+          </a:bodyPr>
+          <a:lstStyle/>
+          <a:p>
+            <a:pPr algn="l">
+              <a:spcAft>
+                <a:spcPts val="0"/>
+              </a:spcAft>
+              <a:defRPr sz="1500" b="1">
+                <a:solidFill>
+                  <a:srgbClr val="122C4E"/>
+                </a:solidFill>
+                <a:latin typeface="Noto Sans CJK KR"/>
+              </a:defRPr>
+            </a:pPr>
+            <a:r>
+              <a:t>이번 단계: 파일의 전체 내용을 중간 생략 없이 작성합니다. 아래 줄 범위를 끝까지 입력하세요.</a:t>
+            </a:r>
+          </a:p>
+        </p:txBody>
+      </p:sp>
+      <p:sp>
+        <p:nvSpPr>
+          <p:cNvPr id="8" name="Rectangle 7"/>
           <p:cNvSpPr/>
           <p:nvPr/>
         </p:nvSpPr>
         <p:spPr>
           <a:xfrm>
-            <a:off x="658368" y="1755648"/>
-            <a:ext cx="10972800" cy="2148840"/>
-          </a:xfrm>
-          <a:prstGeom prst="roundRect">
+            <a:off x="658368" y="1956816"/>
+            <a:ext cx="10972800" cy="603504"/>
+          </a:xfrm>
+          <a:prstGeom prst="rect">
+            <a:avLst/>
+          </a:prstGeom>
+          <a:solidFill>
+            <a:srgbClr val="F4F7FB"/>
+          </a:solidFill>
+          <a:ln>
+            <a:solidFill>
+              <a:srgbClr val="F4F7FB"/>
+            </a:solidFill>
+          </a:ln>
+        </p:spPr>
+        <p:style>
+          <a:lnRef idx="1">
+            <a:schemeClr val="accent1"/>
+          </a:lnRef>
+          <a:fillRef idx="3">
+            <a:schemeClr val="accent1"/>
+          </a:fillRef>
+          <a:effectRef idx="2">
+            <a:schemeClr val="accent1"/>
+          </a:effectRef>
+          <a:fontRef idx="minor">
+            <a:schemeClr val="lt1"/>
+          </a:fontRef>
+        </p:style>
+        <p:txBody>
+          <a:bodyPr rtlCol="0" anchor="ctr" wrap="square" lIns="73152" rIns="73152" tIns="36576" bIns="36576"/>
+          <a:lstStyle/>
+          <a:p>
+            <a:pPr algn="l">
+              <a:spcAft>
+                <a:spcPts val="0"/>
+              </a:spcAft>
+              <a:defRPr sz="1400" b="0">
+                <a:solidFill>
+                  <a:srgbClr val="122C4E"/>
+                </a:solidFill>
+                <a:latin typeface="DejaVu Sans Mono"/>
+              </a:defRPr>
+            </a:pPr>
+            <a:r>
+              <a:t>파일 생성: mkdir -p ~/agv_ws/src/agv_gazebo/models/agv</a:t>
+            </a:r>
+            <a:br/>
+            <a:r>
+              <a:t>파일 열기: nano ~/agv_ws/src/agv_gazebo/models/agv/model.sdf</a:t>
+            </a:r>
+          </a:p>
+        </p:txBody>
+      </p:sp>
+      <p:sp>
+        <p:nvSpPr>
+          <p:cNvPr id="9" name="Rectangle 8"/>
+          <p:cNvSpPr/>
+          <p:nvPr/>
+        </p:nvSpPr>
+        <p:spPr>
+          <a:xfrm>
+            <a:off x="658368" y="2706624"/>
+            <a:ext cx="10972800" cy="3364992"/>
+          </a:xfrm>
+          <a:prstGeom prst="rect">
             <a:avLst/>
           </a:prstGeom>
           <a:solidFill>
@@ -18330,14 +18990,14 @@
           </a:fontRef>
         </p:style>
         <p:txBody>
-          <a:bodyPr rtlCol="0" anchor="ctr" wrap="square" lIns="73152" rIns="73152" tIns="36576" bIns="36576"/>
-          <a:lstStyle/>
-          <a:p>
-            <a:pPr algn="l">
-              <a:spcAft>
-                <a:spcPts val="0"/>
-              </a:spcAft>
-              <a:defRPr sz="1600" b="0">
+          <a:bodyPr rtlCol="0" anchor="ctr" wrap="square" lIns="164592" rIns="164592" tIns="109728" bIns="36576"/>
+          <a:lstStyle/>
+          <a:p>
+            <a:pPr algn="l">
+              <a:spcAft>
+                <a:spcPts val="0"/>
+              </a:spcAft>
+              <a:defRPr sz="1400" b="0">
                 <a:solidFill>
                   <a:srgbClr val="FFFFFF"/>
                 </a:solidFill>
@@ -18345,91 +19005,62 @@
               </a:defRPr>
             </a:pPr>
             <a:r>
-              <a:t>gz sdf -k ~/agv_ws/src/agv_gazebo/models/agv/model.sdf</a:t>
-            </a:r>
-          </a:p>
-        </p:txBody>
-      </p:sp>
-      <p:sp>
-        <p:nvSpPr>
-          <p:cNvPr id="8" name="Rounded Rectangle 7"/>
-          <p:cNvSpPr/>
-          <p:nvPr/>
-        </p:nvSpPr>
-        <p:spPr>
-          <a:xfrm>
-            <a:off x="658368" y="4206240"/>
-            <a:ext cx="10972800" cy="1554480"/>
-          </a:xfrm>
-          <a:prstGeom prst="roundRect">
-            <a:avLst/>
-          </a:prstGeom>
-          <a:solidFill>
-            <a:srgbClr val="F4F7FB"/>
-          </a:solidFill>
-          <a:ln>
-            <a:solidFill>
-              <a:srgbClr val="D1DFD5"/>
-            </a:solidFill>
-          </a:ln>
-        </p:spPr>
-        <p:style>
-          <a:lnRef idx="1">
-            <a:schemeClr val="accent1"/>
-          </a:lnRef>
-          <a:fillRef idx="3">
-            <a:schemeClr val="accent1"/>
-          </a:fillRef>
-          <a:effectRef idx="2">
-            <a:schemeClr val="accent1"/>
-          </a:effectRef>
-          <a:fontRef idx="minor">
-            <a:schemeClr val="lt1"/>
-          </a:fontRef>
-        </p:style>
-        <p:txBody>
-          <a:bodyPr rtlCol="0" anchor="ctr" wrap="square" lIns="73152" rIns="73152" tIns="36576" bIns="36576"/>
-          <a:lstStyle/>
-          <a:p>
-            <a:pPr algn="l">
-              <a:spcAft>
-                <a:spcPts val="0"/>
-              </a:spcAft>
-              <a:defRPr sz="1800" b="1">
-                <a:solidFill>
-                  <a:srgbClr val="2A8B5A"/>
-                </a:solidFill>
-                <a:latin typeface="Noto Sans CJK KR"/>
-              </a:defRPr>
-            </a:pPr>
-            <a:r>
-              <a:t>완료 체크</a:t>
-            </a:r>
-            <a:br/>
-            <a:r>
-              <a:t>□ 명령이 오류 없이 실행된다.</a:t>
-            </a:r>
-            <a:br/>
-            <a:r>
-              <a:t>□ 기대한 파일·topic·frame·parameter 이름이 보인다.</a:t>
-            </a:r>
-            <a:br/>
-            <a:r>
-              <a:t>□ 값의 단위와 방향을 한 문장으로 설명할 수 있다.</a:t>
-            </a:r>
-          </a:p>
-        </p:txBody>
-      </p:sp>
-      <p:sp>
-        <p:nvSpPr>
-          <p:cNvPr id="9" name="TextBox 8"/>
+              <a:t>      &lt;wheel_radius&gt;0.08&lt;/wheel_radius&gt;</a:t>
+            </a:r>
+            <a:br/>
+            <a:r>
+              <a:t>      &lt;topic&gt;/cmd_vel&lt;/topic&gt;</a:t>
+            </a:r>
+            <a:br/>
+            <a:r>
+              <a:t>      &lt;odom_topic&gt;/odom&lt;/odom_topic&gt;</a:t>
+            </a:r>
+            <a:br/>
+            <a:r>
+              <a:t>      &lt;frame_id&gt;odom&lt;/frame_id&gt;</a:t>
+            </a:r>
+            <a:br/>
+            <a:r>
+              <a:t>      &lt;child_frame_id&gt;base_link&lt;/child_frame_id&gt;</a:t>
+            </a:r>
+            <a:br/>
+            <a:r>
+              <a:t>    &lt;/plugin&gt;</a:t>
+            </a:r>
+            <a:br/>
+            <a:r>
+              <a:t>    </a:t>
+            </a:r>
+            <a:br/>
+            <a:r>
+              <a:t>  </a:t>
+            </a:r>
+            <a:br/>
+            <a:r>
+              <a:t>  &lt;/model&gt;</a:t>
+            </a:r>
+            <a:br/>
+            <a:r>
+              <a:t>  </a:t>
+            </a:r>
+            <a:br/>
+            <a:br/>
+            <a:r>
+              <a:t>&lt;/sdf&gt;</a:t>
+            </a:r>
+          </a:p>
+        </p:txBody>
+      </p:sp>
+      <p:sp>
+        <p:nvSpPr>
+          <p:cNvPr id="10" name="TextBox 9"/>
           <p:cNvSpPr txBox="1"/>
           <p:nvPr/>
         </p:nvSpPr>
         <p:spPr>
           <a:xfrm>
-            <a:off x="731520" y="5989320"/>
-            <a:ext cx="10789920" cy="237744"/>
+            <a:off x="749808" y="6181344"/>
+            <a:ext cx="10789920" cy="201168"/>
           </a:xfrm>
           <a:prstGeom prst="rect">
             <a:avLst/>
@@ -18446,15 +19077,15 @@
               <a:spcAft>
                 <a:spcPts val="0"/>
               </a:spcAft>
-              <a:defRPr sz="1500" b="1">
-                <a:solidFill>
-                  <a:srgbClr val="122C4E"/>
-                </a:solidFill>
-                <a:latin typeface="Noto Sans CJK KR"/>
-              </a:defRPr>
-            </a:pPr>
-            <a:r>
-              <a:t>완료 조건: AGV가 바닥에 안정적으로 놓이고 바퀴 접촉·충돌 파라미터가 모델에 존재한다.</a:t>
+              <a:defRPr sz="1000" b="0">
+                <a:solidFill>
+                  <a:srgbClr val="5C6672"/>
+                </a:solidFill>
+                <a:latin typeface="Noto Sans CJK KR"/>
+              </a:defRPr>
+            </a:pPr>
+            <a:r>
+              <a:t>파일 전체 24/24 · 이 슬라이드 다음에 같은 파일의 나머지 줄이 이어집니다.</a:t>
             </a:r>
           </a:p>
         </p:txBody>
@@ -18511,7 +19142,7 @@
               </a:defRPr>
             </a:pPr>
             <a:r>
-              <a:t>막히면: 증상 → 우선 확인 → 재검증</a:t>
+              <a:t>build → source → run 순서로 실행한다</a:t>
             </a:r>
           </a:p>
         </p:txBody>
@@ -18550,7 +19181,7 @@
               </a:defRPr>
             </a:pPr>
             <a:r>
-              <a:t>오류 메시지를 숨기지 않고 같은 순서로 점검합니다.</a:t>
+              <a:t>새 파일 또는 수정 파일은 build와 source 뒤에만 실행 이름·설정에 반영됩니다.</a:t>
             </a:r>
           </a:p>
         </p:txBody>
@@ -18686,7 +19317,7 @@
               </a:defRPr>
             </a:pPr>
             <a:r>
-              <a:t>현재 단계 오류 대응    |    현재 폴더 ~/agv_ws    |    현재 터미널</a:t>
+              <a:t>현재 단계 실행    |    현재 폴더 ~/agv_ws    |    현재 터미널</a:t>
             </a:r>
           </a:p>
         </p:txBody>
@@ -18699,18 +19330,18 @@
         </p:nvSpPr>
         <p:spPr>
           <a:xfrm>
-            <a:off x="694944" y="1755648"/>
-            <a:ext cx="10972800" cy="1115568"/>
+            <a:off x="658368" y="1700784"/>
+            <a:ext cx="10972800" cy="3182112"/>
           </a:xfrm>
           <a:prstGeom prst="roundRect">
             <a:avLst/>
           </a:prstGeom>
           <a:solidFill>
-            <a:srgbClr val="FFF7F4"/>
+            <a:srgbClr val="1D232D"/>
           </a:solidFill>
           <a:ln>
             <a:solidFill>
-              <a:srgbClr val="EDBEB4"/>
+              <a:srgbClr val="1D232D"/>
             </a:solidFill>
           </a:ln>
         </p:spPr>
@@ -18729,10 +19360,27 @@
           </a:fontRef>
         </p:style>
         <p:txBody>
-          <a:bodyPr rtlCol="0" anchor="ctr"/>
-          <a:lstStyle/>
-          <a:p>
-            <a:pPr algn="ctr"/>
+          <a:bodyPr rtlCol="0" anchor="ctr" wrap="square" lIns="73152" rIns="73152" tIns="36576" bIns="36576"/>
+          <a:lstStyle/>
+          <a:p>
+            <a:pPr algn="l">
+              <a:spcAft>
+                <a:spcPts val="0"/>
+              </a:spcAft>
+              <a:defRPr sz="1600" b="0">
+                <a:solidFill>
+                  <a:srgbClr val="FFFFFF"/>
+                </a:solidFill>
+                <a:latin typeface="DejaVu Sans Mono"/>
+              </a:defRPr>
+            </a:pPr>
+            <a:r>
+              <a:t>cd ~/agv_ws &amp;&amp; source install/setup.bash</a:t>
+            </a:r>
+            <a:br/>
+            <a:r>
+              <a:t>ros2 launch agv_gazebo gazebo.launch.py</a:t>
+            </a:r>
           </a:p>
         </p:txBody>
       </p:sp>
@@ -18744,8 +19392,8 @@
         </p:nvSpPr>
         <p:spPr>
           <a:xfrm>
-            <a:off x="896112" y="1901952"/>
-            <a:ext cx="2926080" cy="274320"/>
+            <a:off x="786384" y="5239512"/>
+            <a:ext cx="1261872" cy="237744"/>
           </a:xfrm>
           <a:prstGeom prst="rect">
             <a:avLst/>
@@ -18764,13 +19412,13 @@
               </a:spcAft>
               <a:defRPr sz="1800" b="1">
                 <a:solidFill>
-                  <a:srgbClr val="BE3B3B"/>
-                </a:solidFill>
-                <a:latin typeface="Noto Sans CJK KR"/>
-              </a:defRPr>
-            </a:pPr>
-            <a:r>
-              <a:t>증상 1: spawn 직후 떨리거나 날아감</a:t>
+                  <a:srgbClr val="2A8B5A"/>
+                </a:solidFill>
+                <a:latin typeface="Noto Sans CJK KR"/>
+              </a:defRPr>
+            </a:pPr>
+            <a:r>
+              <a:t>확인 기준</a:t>
             </a:r>
           </a:p>
         </p:txBody>
@@ -18783,8 +19431,8 @@
         </p:nvSpPr>
         <p:spPr>
           <a:xfrm>
-            <a:off x="3794760" y="1883664"/>
-            <a:ext cx="7543800" cy="621792"/>
+            <a:off x="786384" y="5532120"/>
+            <a:ext cx="10469880" cy="420624"/>
           </a:xfrm>
           <a:prstGeom prst="rect">
             <a:avLst/>
@@ -18801,7 +19449,7 @@
               <a:spcAft>
                 <a:spcPts val="0"/>
               </a:spcAft>
-              <a:defRPr sz="1600" b="0">
+              <a:defRPr sz="1800" b="0">
                 <a:solidFill>
                   <a:srgbClr val="122C4E"/>
                 </a:solidFill>
@@ -18809,177 +19457,7 @@
               </a:defRPr>
             </a:pPr>
             <a:r>
-              <a:t>우선 확인: inertia·collision overlap·너무 작은 mass를 확인한다.</a:t>
-            </a:r>
-            <a:br/>
-            <a:r>
-              <a:t>수정 후: gz sdf -k ~/agv_ws/src/agv_gazebo/models/agv/model.sdf</a:t>
-            </a:r>
-          </a:p>
-        </p:txBody>
-      </p:sp>
-      <p:sp>
-        <p:nvSpPr>
-          <p:cNvPr id="10" name="Rounded Rectangle 9"/>
-          <p:cNvSpPr/>
-          <p:nvPr/>
-        </p:nvSpPr>
-        <p:spPr>
-          <a:xfrm>
-            <a:off x="694944" y="3172968"/>
-            <a:ext cx="10972800" cy="1115568"/>
-          </a:xfrm>
-          <a:prstGeom prst="roundRect">
-            <a:avLst/>
-          </a:prstGeom>
-          <a:solidFill>
-            <a:srgbClr val="FFF7F4"/>
-          </a:solidFill>
-          <a:ln>
-            <a:solidFill>
-              <a:srgbClr val="EDBEB4"/>
-            </a:solidFill>
-          </a:ln>
-        </p:spPr>
-        <p:style>
-          <a:lnRef idx="1">
-            <a:schemeClr val="accent1"/>
-          </a:lnRef>
-          <a:fillRef idx="3">
-            <a:schemeClr val="accent1"/>
-          </a:fillRef>
-          <a:effectRef idx="2">
-            <a:schemeClr val="accent1"/>
-          </a:effectRef>
-          <a:fontRef idx="minor">
-            <a:schemeClr val="lt1"/>
-          </a:fontRef>
-        </p:style>
-        <p:txBody>
-          <a:bodyPr rtlCol="0" anchor="ctr"/>
-          <a:lstStyle/>
-          <a:p>
-            <a:pPr algn="ctr"/>
-          </a:p>
-        </p:txBody>
-      </p:sp>
-      <p:sp>
-        <p:nvSpPr>
-          <p:cNvPr id="11" name="TextBox 10"/>
-          <p:cNvSpPr txBox="1"/>
-          <p:nvPr/>
-        </p:nvSpPr>
-        <p:spPr>
-          <a:xfrm>
-            <a:off x="896112" y="3319272"/>
-            <a:ext cx="2926080" cy="274320"/>
-          </a:xfrm>
-          <a:prstGeom prst="rect">
-            <a:avLst/>
-          </a:prstGeom>
-          <a:noFill/>
-        </p:spPr>
-        <p:txBody>
-          <a:bodyPr wrap="square" lIns="73152" rIns="73152" tIns="36576" bIns="36576">
-            <a:spAutoFit/>
-          </a:bodyPr>
-          <a:lstStyle/>
-          <a:p>
-            <a:pPr algn="l">
-              <a:spcAft>
-                <a:spcPts val="0"/>
-              </a:spcAft>
-              <a:defRPr sz="1800" b="1">
-                <a:solidFill>
-                  <a:srgbClr val="BE3B3B"/>
-                </a:solidFill>
-                <a:latin typeface="Noto Sans CJK KR"/>
-              </a:defRPr>
-            </a:pPr>
-            <a:r>
-              <a:t>증상 2: 바퀴가 헛돎</a:t>
-            </a:r>
-          </a:p>
-        </p:txBody>
-      </p:sp>
-      <p:sp>
-        <p:nvSpPr>
-          <p:cNvPr id="12" name="TextBox 11"/>
-          <p:cNvSpPr txBox="1"/>
-          <p:nvPr/>
-        </p:nvSpPr>
-        <p:spPr>
-          <a:xfrm>
-            <a:off x="3794760" y="3300984"/>
-            <a:ext cx="7543800" cy="621792"/>
-          </a:xfrm>
-          <a:prstGeom prst="rect">
-            <a:avLst/>
-          </a:prstGeom>
-          <a:noFill/>
-        </p:spPr>
-        <p:txBody>
-          <a:bodyPr wrap="square" lIns="73152" rIns="73152" tIns="36576" bIns="36576">
-            <a:spAutoFit/>
-          </a:bodyPr>
-          <a:lstStyle/>
-          <a:p>
-            <a:pPr algn="l">
-              <a:spcAft>
-                <a:spcPts val="0"/>
-              </a:spcAft>
-              <a:defRPr sz="1600" b="0">
-                <a:solidFill>
-                  <a:srgbClr val="122C4E"/>
-                </a:solidFill>
-                <a:latin typeface="Noto Sans CJK KR"/>
-              </a:defRPr>
-            </a:pPr>
-            <a:r>
-              <a:t>우선 확인: friction·contact·joint axis·wheel radius를 확인한다.</a:t>
-            </a:r>
-            <a:br/>
-            <a:r>
-              <a:t>수정 후: gz sdf -k ~/agv_ws/src/agv_gazebo/models/agv/model.sdf</a:t>
-            </a:r>
-          </a:p>
-        </p:txBody>
-      </p:sp>
-      <p:sp>
-        <p:nvSpPr>
-          <p:cNvPr id="13" name="TextBox 12"/>
-          <p:cNvSpPr txBox="1"/>
-          <p:nvPr/>
-        </p:nvSpPr>
-        <p:spPr>
-          <a:xfrm>
-            <a:off x="822960" y="5102352"/>
-            <a:ext cx="10607040" cy="402336"/>
-          </a:xfrm>
-          <a:prstGeom prst="rect">
-            <a:avLst/>
-          </a:prstGeom>
-          <a:noFill/>
-        </p:spPr>
-        <p:txBody>
-          <a:bodyPr wrap="square" lIns="73152" rIns="73152" tIns="36576" bIns="36576">
-            <a:spAutoFit/>
-          </a:bodyPr>
-          <a:lstStyle/>
-          <a:p>
-            <a:pPr algn="ctr">
-              <a:spcAft>
-                <a:spcPts val="0"/>
-              </a:spcAft>
-              <a:defRPr sz="1800" b="1">
-                <a:solidFill>
-                  <a:srgbClr val="DB7E22"/>
-                </a:solidFill>
-                <a:latin typeface="Noto Sans CJK KR"/>
-              </a:defRPr>
-            </a:pPr>
-            <a:r>
-              <a:t>공통 순서: ① 현재 폴더 ② source ③ 파일 경로 ④ 이름/타입/단위 ⑤ build·source 후 재실행</a:t>
+              <a:t>AGV가 바닥에 안정적으로 놓이고 바퀴 접촉·충돌 파라미터가 모델에 존재한다.</a:t>
             </a:r>
           </a:p>
         </p:txBody>
@@ -19036,7 +19514,7 @@
               </a:defRPr>
             </a:pPr>
             <a:r>
-              <a:t>미니 실습: 값 하나를 바꾸고 결과를 비교한다</a:t>
+              <a:t>정상 결과: 실제 환경에서 확인한 출력</a:t>
             </a:r>
           </a:p>
         </p:txBody>
@@ -19075,7 +19553,7 @@
               </a:defRPr>
             </a:pPr>
             <a:r>
-              <a:t>정상 결과를 만든 뒤에는 한 번에 하나의 값만 바꿉니다.</a:t>
+              <a:t>실제 ROS 2 환경의 파일·패키지·구성 검증 로그</a:t>
             </a:r>
           </a:p>
         </p:txBody>
@@ -19158,132 +19636,40 @@
           </a:p>
         </p:txBody>
       </p:sp>
-      <p:sp>
-        <p:nvSpPr>
-          <p:cNvPr id="6" name="Rectangle 5"/>
-          <p:cNvSpPr/>
-          <p:nvPr/>
-        </p:nvSpPr>
-        <p:spPr>
-          <a:xfrm>
-            <a:off x="566928" y="1188720"/>
-            <a:ext cx="11064240" cy="347472"/>
-          </a:xfrm>
-          <a:prstGeom prst="rect">
-            <a:avLst/>
-          </a:prstGeom>
-          <a:solidFill>
-            <a:srgbClr val="F4F7FB"/>
-          </a:solidFill>
-          <a:ln>
-            <a:solidFill>
-              <a:srgbClr val="F4F7FB"/>
-            </a:solidFill>
-          </a:ln>
-        </p:spPr>
-        <p:style>
-          <a:lnRef idx="1">
-            <a:schemeClr val="accent1"/>
-          </a:lnRef>
-          <a:fillRef idx="3">
-            <a:schemeClr val="accent1"/>
-          </a:fillRef>
-          <a:effectRef idx="2">
-            <a:schemeClr val="accent1"/>
-          </a:effectRef>
-          <a:fontRef idx="minor">
-            <a:schemeClr val="lt1"/>
-          </a:fontRef>
-        </p:style>
-        <p:txBody>
-          <a:bodyPr rtlCol="0" anchor="ctr" wrap="square" lIns="73152" rIns="73152" tIns="36576" bIns="36576"/>
-          <a:lstStyle/>
-          <a:p>
-            <a:pPr algn="l">
-              <a:spcAft>
-                <a:spcPts val="0"/>
-              </a:spcAft>
-              <a:defRPr sz="1300" b="1">
-                <a:solidFill>
-                  <a:srgbClr val="122C4E"/>
-                </a:solidFill>
-                <a:latin typeface="Noto Sans CJK KR"/>
-              </a:defRPr>
-            </a:pPr>
-            <a:r>
-              <a:t>현재 단계 미니 실습    |    현재 폴더 ~/agv_ws    |    현재 터미널</a:t>
-            </a:r>
-          </a:p>
-        </p:txBody>
-      </p:sp>
-      <p:sp>
-        <p:nvSpPr>
-          <p:cNvPr id="7" name="Rounded Rectangle 6"/>
-          <p:cNvSpPr/>
-          <p:nvPr/>
-        </p:nvSpPr>
-        <p:spPr>
-          <a:xfrm>
-            <a:off x="749808" y="1874519"/>
-            <a:ext cx="10652760" cy="1993392"/>
-          </a:xfrm>
-          <a:prstGeom prst="roundRect">
-            <a:avLst/>
-          </a:prstGeom>
-          <a:solidFill>
-            <a:srgbClr val="FFF8EB"/>
-          </a:solidFill>
-          <a:ln>
-            <a:solidFill>
-              <a:srgbClr val="ECC680"/>
-            </a:solidFill>
-          </a:ln>
-        </p:spPr>
-        <p:style>
-          <a:lnRef idx="1">
-            <a:schemeClr val="accent1"/>
-          </a:lnRef>
-          <a:fillRef idx="3">
-            <a:schemeClr val="accent1"/>
-          </a:fillRef>
-          <a:effectRef idx="2">
-            <a:schemeClr val="accent1"/>
-          </a:effectRef>
-          <a:fontRef idx="minor">
-            <a:schemeClr val="lt1"/>
-          </a:fontRef>
-        </p:style>
-        <p:txBody>
-          <a:bodyPr rtlCol="0" anchor="ctr" wrap="square" lIns="73152" rIns="73152" tIns="36576" bIns="36576"/>
-          <a:lstStyle/>
-          <a:p>
-            <a:pPr algn="ctr">
-              <a:spcAft>
-                <a:spcPts val="0"/>
-              </a:spcAft>
-              <a:defRPr sz="2300" b="1">
-                <a:solidFill>
-                  <a:srgbClr val="122C4E"/>
-                </a:solidFill>
-                <a:latin typeface="Noto Sans CJK KR"/>
-              </a:defRPr>
-            </a:pPr>
-            <a:r>
-              <a:t>wheel friction mu를 1.0에서 0.3으로만 바꾼 뒤 직진 시 미끄럼 변화를 기록한다.</a:t>
-            </a:r>
-          </a:p>
-        </p:txBody>
-      </p:sp>
-      <p:sp>
-        <p:nvSpPr>
-          <p:cNvPr id="8" name="TextBox 7"/>
+      <p:pic>
+        <p:nvPicPr>
+          <p:cNvPr id="6" name="Picture 5" descr="validation_terminal.png"/>
+          <p:cNvPicPr>
+            <a:picLocks noChangeAspect="1"/>
+          </p:cNvPicPr>
+          <p:nvPr/>
+        </p:nvPicPr>
+        <p:blipFill>
+          <a:blip r:embed="rId2"/>
+          <a:stretch>
+            <a:fillRect/>
+          </a:stretch>
+        </p:blipFill>
+        <p:spPr>
+          <a:xfrm>
+            <a:off x="2562068" y="1353312"/>
+            <a:ext cx="7064815" cy="4800600"/>
+          </a:xfrm>
+          <a:prstGeom prst="rect">
+            <a:avLst/>
+          </a:prstGeom>
+        </p:spPr>
+      </p:pic>
+      <p:sp>
+        <p:nvSpPr>
+          <p:cNvPr id="7" name="TextBox 6"/>
           <p:cNvSpPr txBox="1"/>
           <p:nvPr/>
         </p:nvSpPr>
         <p:spPr>
           <a:xfrm>
-            <a:off x="877824" y="4590288"/>
-            <a:ext cx="10241280" cy="594360"/>
+            <a:off x="777240" y="6217920"/>
+            <a:ext cx="10607040" cy="182880"/>
           </a:xfrm>
           <a:prstGeom prst="rect">
             <a:avLst/>
@@ -19300,15 +19686,15 @@
               <a:spcAft>
                 <a:spcPts val="0"/>
               </a:spcAft>
-              <a:defRPr sz="1900" b="1">
-                <a:solidFill>
-                  <a:srgbClr val="DB7E22"/>
-                </a:solidFill>
-                <a:latin typeface="Noto Sans CJK KR"/>
-              </a:defRPr>
-            </a:pPr>
-            <a:r>
-              <a:t>기록할 것: 바꾼 값(단위) · 기대한 변화 · 실제 출력/화면 · 원래 값으로 되돌린 결과</a:t>
+              <a:defRPr sz="1100" b="1">
+                <a:solidFill>
+                  <a:srgbClr val="2A8B5A"/>
+                </a:solidFill>
+                <a:latin typeface="Noto Sans CJK KR"/>
+              </a:defRPr>
+            </a:pPr>
+            <a:r>
+              <a:t>① 명령/설정  ② 정상 출력 또는 화면  ③ 다음 검증 명령으로 재확인</a:t>
             </a:r>
           </a:p>
         </p:txBody>
@@ -19365,7 +19751,7 @@
               </a:defRPr>
             </a:pPr>
             <a:r>
-              <a:t>체크포인트를 저장하고 다음 모듈로 넘긴다</a:t>
+              <a:t>객관적 검증 명령으로 완료를 확인한다</a:t>
             </a:r>
           </a:p>
         </p:txBody>
@@ -19404,7 +19790,7 @@
               </a:defRPr>
             </a:pPr>
             <a:r>
-              <a:t>현재 Complete는 다음 Starter의 기준선입니다.</a:t>
+              <a:t>화면만 보지 말고 topic·frame·파일·parameter를 다시 확인합니다.</a:t>
             </a:r>
           </a:p>
         </p:txBody>
@@ -19540,7 +19926,7 @@
               </a:defRPr>
             </a:pPr>
             <a:r>
-              <a:t>현재 단계 체크포인트    |    현재 폴더 ~/agv_ws    |    현재 터미널</a:t>
+              <a:t>현재 단계 검증    |    현재 폴더 ~/agv_ws    |    현재 터미널</a:t>
             </a:r>
           </a:p>
         </p:txBody>
@@ -19553,8 +19939,66 @@
         </p:nvSpPr>
         <p:spPr>
           <a:xfrm>
-            <a:off x="685800" y="1737360"/>
-            <a:ext cx="10972800" cy="3611880"/>
+            <a:off x="658368" y="1755648"/>
+            <a:ext cx="10972800" cy="2148840"/>
+          </a:xfrm>
+          <a:prstGeom prst="roundRect">
+            <a:avLst/>
+          </a:prstGeom>
+          <a:solidFill>
+            <a:srgbClr val="1D232D"/>
+          </a:solidFill>
+          <a:ln>
+            <a:solidFill>
+              <a:srgbClr val="1D232D"/>
+            </a:solidFill>
+          </a:ln>
+        </p:spPr>
+        <p:style>
+          <a:lnRef idx="1">
+            <a:schemeClr val="accent1"/>
+          </a:lnRef>
+          <a:fillRef idx="3">
+            <a:schemeClr val="accent1"/>
+          </a:fillRef>
+          <a:effectRef idx="2">
+            <a:schemeClr val="accent1"/>
+          </a:effectRef>
+          <a:fontRef idx="minor">
+            <a:schemeClr val="lt1"/>
+          </a:fontRef>
+        </p:style>
+        <p:txBody>
+          <a:bodyPr rtlCol="0" anchor="ctr" wrap="square" lIns="73152" rIns="73152" tIns="36576" bIns="36576"/>
+          <a:lstStyle/>
+          <a:p>
+            <a:pPr algn="l">
+              <a:spcAft>
+                <a:spcPts val="0"/>
+              </a:spcAft>
+              <a:defRPr sz="1600" b="0">
+                <a:solidFill>
+                  <a:srgbClr val="FFFFFF"/>
+                </a:solidFill>
+                <a:latin typeface="DejaVu Sans Mono"/>
+              </a:defRPr>
+            </a:pPr>
+            <a:r>
+              <a:t>gz sdf -k ~/agv_ws/src/agv_gazebo/models/agv/model.sdf</a:t>
+            </a:r>
+          </a:p>
+        </p:txBody>
+      </p:sp>
+      <p:sp>
+        <p:nvSpPr>
+          <p:cNvPr id="8" name="Rounded Rectangle 7"/>
+          <p:cNvSpPr/>
+          <p:nvPr/>
+        </p:nvSpPr>
+        <p:spPr>
+          <a:xfrm>
+            <a:off x="658368" y="4206240"/>
+            <a:ext cx="10972800" cy="1554480"/>
           </a:xfrm>
           <a:prstGeom prst="roundRect">
             <a:avLst/>
@@ -19564,7 +20008,7 @@
           </a:solidFill>
           <a:ln>
             <a:solidFill>
-              <a:srgbClr val="D2DCE8"/>
+              <a:srgbClr val="D1DFD5"/>
             </a:solidFill>
           </a:ln>
         </p:spPr>
@@ -19583,112 +20027,34 @@
           </a:fontRef>
         </p:style>
         <p:txBody>
-          <a:bodyPr rtlCol="0" anchor="ctr"/>
-          <a:lstStyle/>
-          <a:p>
-            <a:pPr algn="ctr"/>
-          </a:p>
-        </p:txBody>
-      </p:sp>
-      <p:sp>
-        <p:nvSpPr>
-          <p:cNvPr id="8" name="TextBox 7"/>
-          <p:cNvSpPr txBox="1"/>
-          <p:nvPr/>
-        </p:nvSpPr>
-        <p:spPr>
-          <a:xfrm>
-            <a:off x="896112" y="1993392"/>
-            <a:ext cx="10332720" cy="2971800"/>
-          </a:xfrm>
-          <a:prstGeom prst="rect">
-            <a:avLst/>
-          </a:prstGeom>
-          <a:noFill/>
-        </p:spPr>
-        <p:txBody>
-          <a:bodyPr wrap="square" lIns="109728" rIns="109728">
-            <a:spAutoFit/>
-          </a:bodyPr>
-          <a:lstStyle/>
-          <a:p>
-            <a:pPr>
-              <a:spcAft>
-                <a:spcPts val="800"/>
-              </a:spcAft>
-              <a:defRPr sz="1800">
-                <a:solidFill>
-                  <a:srgbClr val="122C4E"/>
-                </a:solidFill>
-                <a:latin typeface="Noto Sans CJK KR"/>
-              </a:defRPr>
-            </a:pPr>
-            <a:r>
-              <a:t>• □ 완료 화면: AGV가 바닥에 안정적으로 놓이고 바퀴 접촉·충돌 파라미터가 모델에 존재한다.</a:t>
-            </a:r>
-          </a:p>
-          <a:p>
-            <a:pPr>
-              <a:spcAft>
-                <a:spcPts val="800"/>
-              </a:spcAft>
-              <a:defRPr sz="1800">
-                <a:solidFill>
-                  <a:srgbClr val="122C4E"/>
-                </a:solidFill>
-                <a:latin typeface="Noto Sans CJK KR"/>
-              </a:defRPr>
-            </a:pPr>
-            <a:r>
-              <a:t>• □ Complete 파일: blocks/B_robot_build/M07_physics_modeling/complete/</a:t>
-            </a:r>
-          </a:p>
-          <a:p>
-            <a:pPr>
-              <a:spcAft>
-                <a:spcPts val="800"/>
-              </a:spcAft>
-              <a:defRPr sz="1800">
-                <a:solidFill>
-                  <a:srgbClr val="122C4E"/>
-                </a:solidFill>
-                <a:latin typeface="Noto Sans CJK KR"/>
-              </a:defRPr>
-            </a:pPr>
-            <a:r>
-              <a:t>• □ 정상 로그·캡처: logs/validation.log, screenshots/validation_terminal.png</a:t>
-            </a:r>
-          </a:p>
-          <a:p>
-            <a:pPr>
-              <a:spcAft>
-                <a:spcPts val="800"/>
-              </a:spcAft>
-              <a:defRPr sz="1800">
-                <a:solidFill>
-                  <a:srgbClr val="122C4E"/>
-                </a:solidFill>
-                <a:latin typeface="Noto Sans CJK KR"/>
-              </a:defRPr>
-            </a:pPr>
-            <a:r>
-              <a:t>• □ 버전 식별: CHECKSUM_or_TAG.txt의 SHA-256 manifest</a:t>
-            </a:r>
-          </a:p>
-          <a:p>
-            <a:pPr>
-              <a:spcAft>
-                <a:spcPts val="800"/>
-              </a:spcAft>
-              <a:defRPr sz="1800">
-                <a:solidFill>
-                  <a:srgbClr val="122C4E"/>
-                </a:solidFill>
-                <a:latin typeface="Noto Sans CJK KR"/>
-              </a:defRPr>
-            </a:pPr>
-            <a:r>
-              <a:t>• □ 다음 시작 조건: M08 World/Spawn</a:t>
+          <a:bodyPr rtlCol="0" anchor="ctr" wrap="square" lIns="73152" rIns="73152" tIns="36576" bIns="36576"/>
+          <a:lstStyle/>
+          <a:p>
+            <a:pPr algn="l">
+              <a:spcAft>
+                <a:spcPts val="0"/>
+              </a:spcAft>
+              <a:defRPr sz="1800" b="1">
+                <a:solidFill>
+                  <a:srgbClr val="2A8B5A"/>
+                </a:solidFill>
+                <a:latin typeface="Noto Sans CJK KR"/>
+              </a:defRPr>
+            </a:pPr>
+            <a:r>
+              <a:t>완료 체크</a:t>
+            </a:r>
+            <a:br/>
+            <a:r>
+              <a:t>□ 명령이 오류 없이 실행된다.</a:t>
+            </a:r>
+            <a:br/>
+            <a:r>
+              <a:t>□ 기대한 파일·topic·frame·parameter 이름이 보인다.</a:t>
+            </a:r>
+            <a:br/>
+            <a:r>
+              <a:t>□ 값의 단위와 방향을 한 문장으로 설명할 수 있다.</a:t>
             </a:r>
           </a:p>
         </p:txBody>
@@ -19701,8 +20067,8 @@
         </p:nvSpPr>
         <p:spPr>
           <a:xfrm>
-            <a:off x="868680" y="5596128"/>
-            <a:ext cx="10515600" cy="338328"/>
+            <a:off x="731520" y="5989320"/>
+            <a:ext cx="10789920" cy="237744"/>
           </a:xfrm>
           <a:prstGeom prst="rect">
             <a:avLst/>
@@ -19715,19 +20081,19 @@
           </a:bodyPr>
           <a:lstStyle/>
           <a:p>
-            <a:pPr algn="ctr">
-              <a:spcAft>
-                <a:spcPts val="0"/>
-              </a:spcAft>
-              <a:defRPr sz="1700" b="1">
-                <a:solidFill>
-                  <a:srgbClr val="2A8B5A"/>
-                </a:solidFill>
-                <a:latin typeface="Noto Sans CJK KR"/>
-              </a:defRPr>
-            </a:pPr>
-            <a:r>
-              <a:t>다음 모듈을 시작하기 전, 이 슬라이드의 Complete와 다음 모듈의 Starter를 비교합니다.</a:t>
+            <a:pPr algn="l">
+              <a:spcAft>
+                <a:spcPts val="0"/>
+              </a:spcAft>
+              <a:defRPr sz="1500" b="1">
+                <a:solidFill>
+                  <a:srgbClr val="122C4E"/>
+                </a:solidFill>
+                <a:latin typeface="Noto Sans CJK KR"/>
+              </a:defRPr>
+            </a:pPr>
+            <a:r>
+              <a:t>완료 조건: AGV가 바닥에 안정적으로 놓이고 바퀴 접촉·충돌 파라미터가 모델에 존재한다.</a:t>
             </a:r>
           </a:p>
         </p:txBody>
@@ -19784,6 +20150,1279 @@
               </a:defRPr>
             </a:pPr>
             <a:r>
+              <a:t>막히면: 증상 → 우선 확인 → 재검증</a:t>
+            </a:r>
+          </a:p>
+        </p:txBody>
+      </p:sp>
+      <p:sp>
+        <p:nvSpPr>
+          <p:cNvPr id="3" name="TextBox 2"/>
+          <p:cNvSpPr txBox="1"/>
+          <p:nvPr/>
+        </p:nvSpPr>
+        <p:spPr>
+          <a:xfrm>
+            <a:off x="603504" y="859536"/>
+            <a:ext cx="10698480" cy="292608"/>
+          </a:xfrm>
+          <a:prstGeom prst="rect">
+            <a:avLst/>
+          </a:prstGeom>
+          <a:noFill/>
+        </p:spPr>
+        <p:txBody>
+          <a:bodyPr wrap="square" lIns="73152" rIns="73152" tIns="36576" bIns="36576">
+            <a:spAutoFit/>
+          </a:bodyPr>
+          <a:lstStyle/>
+          <a:p>
+            <a:pPr algn="l">
+              <a:spcAft>
+                <a:spcPts val="0"/>
+              </a:spcAft>
+              <a:defRPr sz="1700" b="0">
+                <a:solidFill>
+                  <a:srgbClr val="5C6672"/>
+                </a:solidFill>
+                <a:latin typeface="Noto Sans CJK KR"/>
+              </a:defRPr>
+            </a:pPr>
+            <a:r>
+              <a:t>오류 메시지를 숨기지 않고 같은 순서로 점검합니다.</a:t>
+            </a:r>
+          </a:p>
+        </p:txBody>
+      </p:sp>
+      <p:sp>
+        <p:nvSpPr>
+          <p:cNvPr id="4" name="TextBox 3"/>
+          <p:cNvSpPr txBox="1"/>
+          <p:nvPr/>
+        </p:nvSpPr>
+        <p:spPr>
+          <a:xfrm>
+            <a:off x="530352" y="6510528"/>
+            <a:ext cx="7772400" cy="201168"/>
+          </a:xfrm>
+          <a:prstGeom prst="rect">
+            <a:avLst/>
+          </a:prstGeom>
+          <a:noFill/>
+        </p:spPr>
+        <p:txBody>
+          <a:bodyPr wrap="square" lIns="73152" rIns="73152" tIns="36576" bIns="36576">
+            <a:spAutoFit/>
+          </a:bodyPr>
+          <a:lstStyle/>
+          <a:p>
+            <a:pPr algn="l">
+              <a:spcAft>
+                <a:spcPts val="0"/>
+              </a:spcAft>
+              <a:defRPr sz="1000" b="0">
+                <a:solidFill>
+                  <a:srgbClr val="5C6672"/>
+                </a:solidFill>
+                <a:latin typeface="Noto Sans CJK KR"/>
+              </a:defRPr>
+            </a:pPr>
+            <a:r>
+              <a:t>ROS 2 Jazzy · Gazebo Harmonic · M07 · 따라 하기형 AGV 실습</a:t>
+            </a:r>
+          </a:p>
+        </p:txBody>
+      </p:sp>
+      <p:sp>
+        <p:nvSpPr>
+          <p:cNvPr id="5" name="TextBox 4"/>
+          <p:cNvSpPr txBox="1"/>
+          <p:nvPr/>
+        </p:nvSpPr>
+        <p:spPr>
+          <a:xfrm>
+            <a:off x="9144000" y="6510528"/>
+            <a:ext cx="2468880" cy="201168"/>
+          </a:xfrm>
+          <a:prstGeom prst="rect">
+            <a:avLst/>
+          </a:prstGeom>
+          <a:noFill/>
+        </p:spPr>
+        <p:txBody>
+          <a:bodyPr wrap="square" lIns="73152" rIns="73152" tIns="36576" bIns="36576">
+            <a:spAutoFit/>
+          </a:bodyPr>
+          <a:lstStyle/>
+          <a:p>
+            <a:pPr algn="r">
+              <a:spcAft>
+                <a:spcPts val="0"/>
+              </a:spcAft>
+              <a:defRPr sz="1000" b="0">
+                <a:solidFill>
+                  <a:srgbClr val="5C6672"/>
+                </a:solidFill>
+                <a:latin typeface="Noto Sans CJK KR"/>
+              </a:defRPr>
+            </a:pPr>
+            <a:r>
+              <a:t>명령·파일 경로는 슬라이드에서 복사 가능</a:t>
+            </a:r>
+          </a:p>
+        </p:txBody>
+      </p:sp>
+      <p:sp>
+        <p:nvSpPr>
+          <p:cNvPr id="6" name="Rectangle 5"/>
+          <p:cNvSpPr/>
+          <p:nvPr/>
+        </p:nvSpPr>
+        <p:spPr>
+          <a:xfrm>
+            <a:off x="566928" y="1188720"/>
+            <a:ext cx="11064240" cy="347472"/>
+          </a:xfrm>
+          <a:prstGeom prst="rect">
+            <a:avLst/>
+          </a:prstGeom>
+          <a:solidFill>
+            <a:srgbClr val="F4F7FB"/>
+          </a:solidFill>
+          <a:ln>
+            <a:solidFill>
+              <a:srgbClr val="F4F7FB"/>
+            </a:solidFill>
+          </a:ln>
+        </p:spPr>
+        <p:style>
+          <a:lnRef idx="1">
+            <a:schemeClr val="accent1"/>
+          </a:lnRef>
+          <a:fillRef idx="3">
+            <a:schemeClr val="accent1"/>
+          </a:fillRef>
+          <a:effectRef idx="2">
+            <a:schemeClr val="accent1"/>
+          </a:effectRef>
+          <a:fontRef idx="minor">
+            <a:schemeClr val="lt1"/>
+          </a:fontRef>
+        </p:style>
+        <p:txBody>
+          <a:bodyPr rtlCol="0" anchor="ctr" wrap="square" lIns="73152" rIns="73152" tIns="36576" bIns="36576"/>
+          <a:lstStyle/>
+          <a:p>
+            <a:pPr algn="l">
+              <a:spcAft>
+                <a:spcPts val="0"/>
+              </a:spcAft>
+              <a:defRPr sz="1300" b="1">
+                <a:solidFill>
+                  <a:srgbClr val="122C4E"/>
+                </a:solidFill>
+                <a:latin typeface="Noto Sans CJK KR"/>
+              </a:defRPr>
+            </a:pPr>
+            <a:r>
+              <a:t>현재 단계 오류 대응    |    현재 폴더 ~/agv_ws    |    현재 터미널</a:t>
+            </a:r>
+          </a:p>
+        </p:txBody>
+      </p:sp>
+      <p:sp>
+        <p:nvSpPr>
+          <p:cNvPr id="7" name="Rounded Rectangle 6"/>
+          <p:cNvSpPr/>
+          <p:nvPr/>
+        </p:nvSpPr>
+        <p:spPr>
+          <a:xfrm>
+            <a:off x="694944" y="1755648"/>
+            <a:ext cx="10972800" cy="1115568"/>
+          </a:xfrm>
+          <a:prstGeom prst="roundRect">
+            <a:avLst/>
+          </a:prstGeom>
+          <a:solidFill>
+            <a:srgbClr val="FFF7F4"/>
+          </a:solidFill>
+          <a:ln>
+            <a:solidFill>
+              <a:srgbClr val="EDBEB4"/>
+            </a:solidFill>
+          </a:ln>
+        </p:spPr>
+        <p:style>
+          <a:lnRef idx="1">
+            <a:schemeClr val="accent1"/>
+          </a:lnRef>
+          <a:fillRef idx="3">
+            <a:schemeClr val="accent1"/>
+          </a:fillRef>
+          <a:effectRef idx="2">
+            <a:schemeClr val="accent1"/>
+          </a:effectRef>
+          <a:fontRef idx="minor">
+            <a:schemeClr val="lt1"/>
+          </a:fontRef>
+        </p:style>
+        <p:txBody>
+          <a:bodyPr rtlCol="0" anchor="ctr"/>
+          <a:lstStyle/>
+          <a:p>
+            <a:pPr algn="ctr"/>
+          </a:p>
+        </p:txBody>
+      </p:sp>
+      <p:sp>
+        <p:nvSpPr>
+          <p:cNvPr id="8" name="TextBox 7"/>
+          <p:cNvSpPr txBox="1"/>
+          <p:nvPr/>
+        </p:nvSpPr>
+        <p:spPr>
+          <a:xfrm>
+            <a:off x="896112" y="1901952"/>
+            <a:ext cx="2926080" cy="274320"/>
+          </a:xfrm>
+          <a:prstGeom prst="rect">
+            <a:avLst/>
+          </a:prstGeom>
+          <a:noFill/>
+        </p:spPr>
+        <p:txBody>
+          <a:bodyPr wrap="square" lIns="73152" rIns="73152" tIns="36576" bIns="36576">
+            <a:spAutoFit/>
+          </a:bodyPr>
+          <a:lstStyle/>
+          <a:p>
+            <a:pPr algn="l">
+              <a:spcAft>
+                <a:spcPts val="0"/>
+              </a:spcAft>
+              <a:defRPr sz="1800" b="1">
+                <a:solidFill>
+                  <a:srgbClr val="BE3B3B"/>
+                </a:solidFill>
+                <a:latin typeface="Noto Sans CJK KR"/>
+              </a:defRPr>
+            </a:pPr>
+            <a:r>
+              <a:t>증상 1: spawn 직후 떨리거나 날아감</a:t>
+            </a:r>
+          </a:p>
+        </p:txBody>
+      </p:sp>
+      <p:sp>
+        <p:nvSpPr>
+          <p:cNvPr id="9" name="TextBox 8"/>
+          <p:cNvSpPr txBox="1"/>
+          <p:nvPr/>
+        </p:nvSpPr>
+        <p:spPr>
+          <a:xfrm>
+            <a:off x="3794760" y="1883664"/>
+            <a:ext cx="7543800" cy="621792"/>
+          </a:xfrm>
+          <a:prstGeom prst="rect">
+            <a:avLst/>
+          </a:prstGeom>
+          <a:noFill/>
+        </p:spPr>
+        <p:txBody>
+          <a:bodyPr wrap="square" lIns="73152" rIns="73152" tIns="36576" bIns="36576">
+            <a:spAutoFit/>
+          </a:bodyPr>
+          <a:lstStyle/>
+          <a:p>
+            <a:pPr algn="l">
+              <a:spcAft>
+                <a:spcPts val="0"/>
+              </a:spcAft>
+              <a:defRPr sz="1600" b="0">
+                <a:solidFill>
+                  <a:srgbClr val="122C4E"/>
+                </a:solidFill>
+                <a:latin typeface="Noto Sans CJK KR"/>
+              </a:defRPr>
+            </a:pPr>
+            <a:r>
+              <a:t>우선 확인: inertia·collision overlap·너무 작은 mass를 확인한다.</a:t>
+            </a:r>
+            <a:br/>
+            <a:r>
+              <a:t>수정 후: gz sdf -k ~/agv_ws/src/agv_gazebo/models/agv/model.sdf</a:t>
+            </a:r>
+          </a:p>
+        </p:txBody>
+      </p:sp>
+      <p:sp>
+        <p:nvSpPr>
+          <p:cNvPr id="10" name="Rounded Rectangle 9"/>
+          <p:cNvSpPr/>
+          <p:nvPr/>
+        </p:nvSpPr>
+        <p:spPr>
+          <a:xfrm>
+            <a:off x="694944" y="3172968"/>
+            <a:ext cx="10972800" cy="1115568"/>
+          </a:xfrm>
+          <a:prstGeom prst="roundRect">
+            <a:avLst/>
+          </a:prstGeom>
+          <a:solidFill>
+            <a:srgbClr val="FFF7F4"/>
+          </a:solidFill>
+          <a:ln>
+            <a:solidFill>
+              <a:srgbClr val="EDBEB4"/>
+            </a:solidFill>
+          </a:ln>
+        </p:spPr>
+        <p:style>
+          <a:lnRef idx="1">
+            <a:schemeClr val="accent1"/>
+          </a:lnRef>
+          <a:fillRef idx="3">
+            <a:schemeClr val="accent1"/>
+          </a:fillRef>
+          <a:effectRef idx="2">
+            <a:schemeClr val="accent1"/>
+          </a:effectRef>
+          <a:fontRef idx="minor">
+            <a:schemeClr val="lt1"/>
+          </a:fontRef>
+        </p:style>
+        <p:txBody>
+          <a:bodyPr rtlCol="0" anchor="ctr"/>
+          <a:lstStyle/>
+          <a:p>
+            <a:pPr algn="ctr"/>
+          </a:p>
+        </p:txBody>
+      </p:sp>
+      <p:sp>
+        <p:nvSpPr>
+          <p:cNvPr id="11" name="TextBox 10"/>
+          <p:cNvSpPr txBox="1"/>
+          <p:nvPr/>
+        </p:nvSpPr>
+        <p:spPr>
+          <a:xfrm>
+            <a:off x="896112" y="3319272"/>
+            <a:ext cx="2926080" cy="274320"/>
+          </a:xfrm>
+          <a:prstGeom prst="rect">
+            <a:avLst/>
+          </a:prstGeom>
+          <a:noFill/>
+        </p:spPr>
+        <p:txBody>
+          <a:bodyPr wrap="square" lIns="73152" rIns="73152" tIns="36576" bIns="36576">
+            <a:spAutoFit/>
+          </a:bodyPr>
+          <a:lstStyle/>
+          <a:p>
+            <a:pPr algn="l">
+              <a:spcAft>
+                <a:spcPts val="0"/>
+              </a:spcAft>
+              <a:defRPr sz="1800" b="1">
+                <a:solidFill>
+                  <a:srgbClr val="BE3B3B"/>
+                </a:solidFill>
+                <a:latin typeface="Noto Sans CJK KR"/>
+              </a:defRPr>
+            </a:pPr>
+            <a:r>
+              <a:t>증상 2: 바퀴가 헛돎</a:t>
+            </a:r>
+          </a:p>
+        </p:txBody>
+      </p:sp>
+      <p:sp>
+        <p:nvSpPr>
+          <p:cNvPr id="12" name="TextBox 11"/>
+          <p:cNvSpPr txBox="1"/>
+          <p:nvPr/>
+        </p:nvSpPr>
+        <p:spPr>
+          <a:xfrm>
+            <a:off x="3794760" y="3300984"/>
+            <a:ext cx="7543800" cy="621792"/>
+          </a:xfrm>
+          <a:prstGeom prst="rect">
+            <a:avLst/>
+          </a:prstGeom>
+          <a:noFill/>
+        </p:spPr>
+        <p:txBody>
+          <a:bodyPr wrap="square" lIns="73152" rIns="73152" tIns="36576" bIns="36576">
+            <a:spAutoFit/>
+          </a:bodyPr>
+          <a:lstStyle/>
+          <a:p>
+            <a:pPr algn="l">
+              <a:spcAft>
+                <a:spcPts val="0"/>
+              </a:spcAft>
+              <a:defRPr sz="1600" b="0">
+                <a:solidFill>
+                  <a:srgbClr val="122C4E"/>
+                </a:solidFill>
+                <a:latin typeface="Noto Sans CJK KR"/>
+              </a:defRPr>
+            </a:pPr>
+            <a:r>
+              <a:t>우선 확인: friction·contact·joint axis·wheel radius를 확인한다.</a:t>
+            </a:r>
+            <a:br/>
+            <a:r>
+              <a:t>수정 후: gz sdf -k ~/agv_ws/src/agv_gazebo/models/agv/model.sdf</a:t>
+            </a:r>
+          </a:p>
+        </p:txBody>
+      </p:sp>
+      <p:sp>
+        <p:nvSpPr>
+          <p:cNvPr id="13" name="TextBox 12"/>
+          <p:cNvSpPr txBox="1"/>
+          <p:nvPr/>
+        </p:nvSpPr>
+        <p:spPr>
+          <a:xfrm>
+            <a:off x="822960" y="5102352"/>
+            <a:ext cx="10607040" cy="402336"/>
+          </a:xfrm>
+          <a:prstGeom prst="rect">
+            <a:avLst/>
+          </a:prstGeom>
+          <a:noFill/>
+        </p:spPr>
+        <p:txBody>
+          <a:bodyPr wrap="square" lIns="73152" rIns="73152" tIns="36576" bIns="36576">
+            <a:spAutoFit/>
+          </a:bodyPr>
+          <a:lstStyle/>
+          <a:p>
+            <a:pPr algn="ctr">
+              <a:spcAft>
+                <a:spcPts val="0"/>
+              </a:spcAft>
+              <a:defRPr sz="1800" b="1">
+                <a:solidFill>
+                  <a:srgbClr val="DB7E22"/>
+                </a:solidFill>
+                <a:latin typeface="Noto Sans CJK KR"/>
+              </a:defRPr>
+            </a:pPr>
+            <a:r>
+              <a:t>공통 순서: ① 현재 폴더 ② source ③ 파일 경로 ④ 이름/타입/단위 ⑤ build·source 후 재실행</a:t>
+            </a:r>
+          </a:p>
+        </p:txBody>
+      </p:sp>
+    </p:spTree>
+  </p:cSld>
+  <p:clrMapOvr>
+    <a:masterClrMapping/>
+  </p:clrMapOvr>
+</p:sld>
+</file>
+
+<file path=ppt/slides/slide37.xml><?xml version="1.0" encoding="utf-8"?>
+<p:sld xmlns:a="http://schemas.openxmlformats.org/drawingml/2006/main" xmlns:p="http://schemas.openxmlformats.org/presentationml/2006/main" xmlns:r="http://schemas.openxmlformats.org/officeDocument/2006/relationships">
+  <p:cSld>
+    <p:spTree>
+      <p:nvGrpSpPr>
+        <p:cNvPr id="1" name=""/>
+        <p:cNvGrpSpPr/>
+        <p:nvPr/>
+      </p:nvGrpSpPr>
+      <p:grpSpPr/>
+      <p:sp>
+        <p:nvSpPr>
+          <p:cNvPr id="2" name="TextBox 1"/>
+          <p:cNvSpPr txBox="1"/>
+          <p:nvPr/>
+        </p:nvSpPr>
+        <p:spPr>
+          <a:xfrm>
+            <a:off x="566928" y="347472"/>
+            <a:ext cx="10881360" cy="438912"/>
+          </a:xfrm>
+          <a:prstGeom prst="rect">
+            <a:avLst/>
+          </a:prstGeom>
+          <a:noFill/>
+        </p:spPr>
+        <p:txBody>
+          <a:bodyPr wrap="square" lIns="73152" rIns="73152" tIns="36576" bIns="36576">
+            <a:spAutoFit/>
+          </a:bodyPr>
+          <a:lstStyle/>
+          <a:p>
+            <a:pPr algn="l">
+              <a:spcAft>
+                <a:spcPts val="0"/>
+              </a:spcAft>
+              <a:defRPr sz="3200" b="1">
+                <a:solidFill>
+                  <a:srgbClr val="122C4E"/>
+                </a:solidFill>
+                <a:latin typeface="Noto Sans CJK KR"/>
+              </a:defRPr>
+            </a:pPr>
+            <a:r>
+              <a:t>미니 실습: 값 하나를 바꾸고 결과를 비교한다</a:t>
+            </a:r>
+          </a:p>
+        </p:txBody>
+      </p:sp>
+      <p:sp>
+        <p:nvSpPr>
+          <p:cNvPr id="3" name="TextBox 2"/>
+          <p:cNvSpPr txBox="1"/>
+          <p:nvPr/>
+        </p:nvSpPr>
+        <p:spPr>
+          <a:xfrm>
+            <a:off x="603504" y="859536"/>
+            <a:ext cx="10698480" cy="292608"/>
+          </a:xfrm>
+          <a:prstGeom prst="rect">
+            <a:avLst/>
+          </a:prstGeom>
+          <a:noFill/>
+        </p:spPr>
+        <p:txBody>
+          <a:bodyPr wrap="square" lIns="73152" rIns="73152" tIns="36576" bIns="36576">
+            <a:spAutoFit/>
+          </a:bodyPr>
+          <a:lstStyle/>
+          <a:p>
+            <a:pPr algn="l">
+              <a:spcAft>
+                <a:spcPts val="0"/>
+              </a:spcAft>
+              <a:defRPr sz="1700" b="0">
+                <a:solidFill>
+                  <a:srgbClr val="5C6672"/>
+                </a:solidFill>
+                <a:latin typeface="Noto Sans CJK KR"/>
+              </a:defRPr>
+            </a:pPr>
+            <a:r>
+              <a:t>정상 결과를 만든 뒤에는 한 번에 하나의 값만 바꿉니다.</a:t>
+            </a:r>
+          </a:p>
+        </p:txBody>
+      </p:sp>
+      <p:sp>
+        <p:nvSpPr>
+          <p:cNvPr id="4" name="TextBox 3"/>
+          <p:cNvSpPr txBox="1"/>
+          <p:nvPr/>
+        </p:nvSpPr>
+        <p:spPr>
+          <a:xfrm>
+            <a:off x="530352" y="6510528"/>
+            <a:ext cx="7772400" cy="201168"/>
+          </a:xfrm>
+          <a:prstGeom prst="rect">
+            <a:avLst/>
+          </a:prstGeom>
+          <a:noFill/>
+        </p:spPr>
+        <p:txBody>
+          <a:bodyPr wrap="square" lIns="73152" rIns="73152" tIns="36576" bIns="36576">
+            <a:spAutoFit/>
+          </a:bodyPr>
+          <a:lstStyle/>
+          <a:p>
+            <a:pPr algn="l">
+              <a:spcAft>
+                <a:spcPts val="0"/>
+              </a:spcAft>
+              <a:defRPr sz="1000" b="0">
+                <a:solidFill>
+                  <a:srgbClr val="5C6672"/>
+                </a:solidFill>
+                <a:latin typeface="Noto Sans CJK KR"/>
+              </a:defRPr>
+            </a:pPr>
+            <a:r>
+              <a:t>ROS 2 Jazzy · Gazebo Harmonic · M07 · 따라 하기형 AGV 실습</a:t>
+            </a:r>
+          </a:p>
+        </p:txBody>
+      </p:sp>
+      <p:sp>
+        <p:nvSpPr>
+          <p:cNvPr id="5" name="TextBox 4"/>
+          <p:cNvSpPr txBox="1"/>
+          <p:nvPr/>
+        </p:nvSpPr>
+        <p:spPr>
+          <a:xfrm>
+            <a:off x="9144000" y="6510528"/>
+            <a:ext cx="2468880" cy="201168"/>
+          </a:xfrm>
+          <a:prstGeom prst="rect">
+            <a:avLst/>
+          </a:prstGeom>
+          <a:noFill/>
+        </p:spPr>
+        <p:txBody>
+          <a:bodyPr wrap="square" lIns="73152" rIns="73152" tIns="36576" bIns="36576">
+            <a:spAutoFit/>
+          </a:bodyPr>
+          <a:lstStyle/>
+          <a:p>
+            <a:pPr algn="r">
+              <a:spcAft>
+                <a:spcPts val="0"/>
+              </a:spcAft>
+              <a:defRPr sz="1000" b="0">
+                <a:solidFill>
+                  <a:srgbClr val="5C6672"/>
+                </a:solidFill>
+                <a:latin typeface="Noto Sans CJK KR"/>
+              </a:defRPr>
+            </a:pPr>
+            <a:r>
+              <a:t>명령·파일 경로는 슬라이드에서 복사 가능</a:t>
+            </a:r>
+          </a:p>
+        </p:txBody>
+      </p:sp>
+      <p:sp>
+        <p:nvSpPr>
+          <p:cNvPr id="6" name="Rectangle 5"/>
+          <p:cNvSpPr/>
+          <p:nvPr/>
+        </p:nvSpPr>
+        <p:spPr>
+          <a:xfrm>
+            <a:off x="566928" y="1188720"/>
+            <a:ext cx="11064240" cy="347472"/>
+          </a:xfrm>
+          <a:prstGeom prst="rect">
+            <a:avLst/>
+          </a:prstGeom>
+          <a:solidFill>
+            <a:srgbClr val="F4F7FB"/>
+          </a:solidFill>
+          <a:ln>
+            <a:solidFill>
+              <a:srgbClr val="F4F7FB"/>
+            </a:solidFill>
+          </a:ln>
+        </p:spPr>
+        <p:style>
+          <a:lnRef idx="1">
+            <a:schemeClr val="accent1"/>
+          </a:lnRef>
+          <a:fillRef idx="3">
+            <a:schemeClr val="accent1"/>
+          </a:fillRef>
+          <a:effectRef idx="2">
+            <a:schemeClr val="accent1"/>
+          </a:effectRef>
+          <a:fontRef idx="minor">
+            <a:schemeClr val="lt1"/>
+          </a:fontRef>
+        </p:style>
+        <p:txBody>
+          <a:bodyPr rtlCol="0" anchor="ctr" wrap="square" lIns="73152" rIns="73152" tIns="36576" bIns="36576"/>
+          <a:lstStyle/>
+          <a:p>
+            <a:pPr algn="l">
+              <a:spcAft>
+                <a:spcPts val="0"/>
+              </a:spcAft>
+              <a:defRPr sz="1300" b="1">
+                <a:solidFill>
+                  <a:srgbClr val="122C4E"/>
+                </a:solidFill>
+                <a:latin typeface="Noto Sans CJK KR"/>
+              </a:defRPr>
+            </a:pPr>
+            <a:r>
+              <a:t>현재 단계 미니 실습    |    현재 폴더 ~/agv_ws    |    현재 터미널</a:t>
+            </a:r>
+          </a:p>
+        </p:txBody>
+      </p:sp>
+      <p:sp>
+        <p:nvSpPr>
+          <p:cNvPr id="7" name="Rounded Rectangle 6"/>
+          <p:cNvSpPr/>
+          <p:nvPr/>
+        </p:nvSpPr>
+        <p:spPr>
+          <a:xfrm>
+            <a:off x="749808" y="1874519"/>
+            <a:ext cx="10652760" cy="1993392"/>
+          </a:xfrm>
+          <a:prstGeom prst="roundRect">
+            <a:avLst/>
+          </a:prstGeom>
+          <a:solidFill>
+            <a:srgbClr val="FFF8EB"/>
+          </a:solidFill>
+          <a:ln>
+            <a:solidFill>
+              <a:srgbClr val="ECC680"/>
+            </a:solidFill>
+          </a:ln>
+        </p:spPr>
+        <p:style>
+          <a:lnRef idx="1">
+            <a:schemeClr val="accent1"/>
+          </a:lnRef>
+          <a:fillRef idx="3">
+            <a:schemeClr val="accent1"/>
+          </a:fillRef>
+          <a:effectRef idx="2">
+            <a:schemeClr val="accent1"/>
+          </a:effectRef>
+          <a:fontRef idx="minor">
+            <a:schemeClr val="lt1"/>
+          </a:fontRef>
+        </p:style>
+        <p:txBody>
+          <a:bodyPr rtlCol="0" anchor="ctr" wrap="square" lIns="73152" rIns="73152" tIns="36576" bIns="36576"/>
+          <a:lstStyle/>
+          <a:p>
+            <a:pPr algn="ctr">
+              <a:spcAft>
+                <a:spcPts val="0"/>
+              </a:spcAft>
+              <a:defRPr sz="2300" b="1">
+                <a:solidFill>
+                  <a:srgbClr val="122C4E"/>
+                </a:solidFill>
+                <a:latin typeface="Noto Sans CJK KR"/>
+              </a:defRPr>
+            </a:pPr>
+            <a:r>
+              <a:t>wheel friction mu를 1.0에서 0.3으로만 바꾼 뒤 직진 시 미끄럼 변화를 기록한다.</a:t>
+            </a:r>
+          </a:p>
+        </p:txBody>
+      </p:sp>
+      <p:sp>
+        <p:nvSpPr>
+          <p:cNvPr id="8" name="TextBox 7"/>
+          <p:cNvSpPr txBox="1"/>
+          <p:nvPr/>
+        </p:nvSpPr>
+        <p:spPr>
+          <a:xfrm>
+            <a:off x="877824" y="4590288"/>
+            <a:ext cx="10241280" cy="594360"/>
+          </a:xfrm>
+          <a:prstGeom prst="rect">
+            <a:avLst/>
+          </a:prstGeom>
+          <a:noFill/>
+        </p:spPr>
+        <p:txBody>
+          <a:bodyPr wrap="square" lIns="73152" rIns="73152" tIns="36576" bIns="36576">
+            <a:spAutoFit/>
+          </a:bodyPr>
+          <a:lstStyle/>
+          <a:p>
+            <a:pPr algn="ctr">
+              <a:spcAft>
+                <a:spcPts val="0"/>
+              </a:spcAft>
+              <a:defRPr sz="1900" b="1">
+                <a:solidFill>
+                  <a:srgbClr val="DB7E22"/>
+                </a:solidFill>
+                <a:latin typeface="Noto Sans CJK KR"/>
+              </a:defRPr>
+            </a:pPr>
+            <a:r>
+              <a:t>기록할 것: 바꾼 값(단위) · 기대한 변화 · 실제 출력/화면 · 원래 값으로 되돌린 결과</a:t>
+            </a:r>
+          </a:p>
+        </p:txBody>
+      </p:sp>
+    </p:spTree>
+  </p:cSld>
+  <p:clrMapOvr>
+    <a:masterClrMapping/>
+  </p:clrMapOvr>
+</p:sld>
+</file>
+
+<file path=ppt/slides/slide38.xml><?xml version="1.0" encoding="utf-8"?>
+<p:sld xmlns:a="http://schemas.openxmlformats.org/drawingml/2006/main" xmlns:p="http://schemas.openxmlformats.org/presentationml/2006/main" xmlns:r="http://schemas.openxmlformats.org/officeDocument/2006/relationships">
+  <p:cSld>
+    <p:spTree>
+      <p:nvGrpSpPr>
+        <p:cNvPr id="1" name=""/>
+        <p:cNvGrpSpPr/>
+        <p:nvPr/>
+      </p:nvGrpSpPr>
+      <p:grpSpPr/>
+      <p:sp>
+        <p:nvSpPr>
+          <p:cNvPr id="2" name="TextBox 1"/>
+          <p:cNvSpPr txBox="1"/>
+          <p:nvPr/>
+        </p:nvSpPr>
+        <p:spPr>
+          <a:xfrm>
+            <a:off x="566928" y="347472"/>
+            <a:ext cx="10881360" cy="438912"/>
+          </a:xfrm>
+          <a:prstGeom prst="rect">
+            <a:avLst/>
+          </a:prstGeom>
+          <a:noFill/>
+        </p:spPr>
+        <p:txBody>
+          <a:bodyPr wrap="square" lIns="73152" rIns="73152" tIns="36576" bIns="36576">
+            <a:spAutoFit/>
+          </a:bodyPr>
+          <a:lstStyle/>
+          <a:p>
+            <a:pPr algn="l">
+              <a:spcAft>
+                <a:spcPts val="0"/>
+              </a:spcAft>
+              <a:defRPr sz="3200" b="1">
+                <a:solidFill>
+                  <a:srgbClr val="122C4E"/>
+                </a:solidFill>
+                <a:latin typeface="Noto Sans CJK KR"/>
+              </a:defRPr>
+            </a:pPr>
+            <a:r>
+              <a:t>체크포인트를 저장하고 다음 모듈로 넘긴다</a:t>
+            </a:r>
+          </a:p>
+        </p:txBody>
+      </p:sp>
+      <p:sp>
+        <p:nvSpPr>
+          <p:cNvPr id="3" name="TextBox 2"/>
+          <p:cNvSpPr txBox="1"/>
+          <p:nvPr/>
+        </p:nvSpPr>
+        <p:spPr>
+          <a:xfrm>
+            <a:off x="603504" y="859536"/>
+            <a:ext cx="10698480" cy="292608"/>
+          </a:xfrm>
+          <a:prstGeom prst="rect">
+            <a:avLst/>
+          </a:prstGeom>
+          <a:noFill/>
+        </p:spPr>
+        <p:txBody>
+          <a:bodyPr wrap="square" lIns="73152" rIns="73152" tIns="36576" bIns="36576">
+            <a:spAutoFit/>
+          </a:bodyPr>
+          <a:lstStyle/>
+          <a:p>
+            <a:pPr algn="l">
+              <a:spcAft>
+                <a:spcPts val="0"/>
+              </a:spcAft>
+              <a:defRPr sz="1700" b="0">
+                <a:solidFill>
+                  <a:srgbClr val="5C6672"/>
+                </a:solidFill>
+                <a:latin typeface="Noto Sans CJK KR"/>
+              </a:defRPr>
+            </a:pPr>
+            <a:r>
+              <a:t>현재 Complete는 다음 Starter의 기준선입니다.</a:t>
+            </a:r>
+          </a:p>
+        </p:txBody>
+      </p:sp>
+      <p:sp>
+        <p:nvSpPr>
+          <p:cNvPr id="4" name="TextBox 3"/>
+          <p:cNvSpPr txBox="1"/>
+          <p:nvPr/>
+        </p:nvSpPr>
+        <p:spPr>
+          <a:xfrm>
+            <a:off x="530352" y="6510528"/>
+            <a:ext cx="7772400" cy="201168"/>
+          </a:xfrm>
+          <a:prstGeom prst="rect">
+            <a:avLst/>
+          </a:prstGeom>
+          <a:noFill/>
+        </p:spPr>
+        <p:txBody>
+          <a:bodyPr wrap="square" lIns="73152" rIns="73152" tIns="36576" bIns="36576">
+            <a:spAutoFit/>
+          </a:bodyPr>
+          <a:lstStyle/>
+          <a:p>
+            <a:pPr algn="l">
+              <a:spcAft>
+                <a:spcPts val="0"/>
+              </a:spcAft>
+              <a:defRPr sz="1000" b="0">
+                <a:solidFill>
+                  <a:srgbClr val="5C6672"/>
+                </a:solidFill>
+                <a:latin typeface="Noto Sans CJK KR"/>
+              </a:defRPr>
+            </a:pPr>
+            <a:r>
+              <a:t>ROS 2 Jazzy · Gazebo Harmonic · M07 · 따라 하기형 AGV 실습</a:t>
+            </a:r>
+          </a:p>
+        </p:txBody>
+      </p:sp>
+      <p:sp>
+        <p:nvSpPr>
+          <p:cNvPr id="5" name="TextBox 4"/>
+          <p:cNvSpPr txBox="1"/>
+          <p:nvPr/>
+        </p:nvSpPr>
+        <p:spPr>
+          <a:xfrm>
+            <a:off x="9144000" y="6510528"/>
+            <a:ext cx="2468880" cy="201168"/>
+          </a:xfrm>
+          <a:prstGeom prst="rect">
+            <a:avLst/>
+          </a:prstGeom>
+          <a:noFill/>
+        </p:spPr>
+        <p:txBody>
+          <a:bodyPr wrap="square" lIns="73152" rIns="73152" tIns="36576" bIns="36576">
+            <a:spAutoFit/>
+          </a:bodyPr>
+          <a:lstStyle/>
+          <a:p>
+            <a:pPr algn="r">
+              <a:spcAft>
+                <a:spcPts val="0"/>
+              </a:spcAft>
+              <a:defRPr sz="1000" b="0">
+                <a:solidFill>
+                  <a:srgbClr val="5C6672"/>
+                </a:solidFill>
+                <a:latin typeface="Noto Sans CJK KR"/>
+              </a:defRPr>
+            </a:pPr>
+            <a:r>
+              <a:t>명령·파일 경로는 슬라이드에서 복사 가능</a:t>
+            </a:r>
+          </a:p>
+        </p:txBody>
+      </p:sp>
+      <p:sp>
+        <p:nvSpPr>
+          <p:cNvPr id="6" name="Rectangle 5"/>
+          <p:cNvSpPr/>
+          <p:nvPr/>
+        </p:nvSpPr>
+        <p:spPr>
+          <a:xfrm>
+            <a:off x="566928" y="1188720"/>
+            <a:ext cx="11064240" cy="347472"/>
+          </a:xfrm>
+          <a:prstGeom prst="rect">
+            <a:avLst/>
+          </a:prstGeom>
+          <a:solidFill>
+            <a:srgbClr val="F4F7FB"/>
+          </a:solidFill>
+          <a:ln>
+            <a:solidFill>
+              <a:srgbClr val="F4F7FB"/>
+            </a:solidFill>
+          </a:ln>
+        </p:spPr>
+        <p:style>
+          <a:lnRef idx="1">
+            <a:schemeClr val="accent1"/>
+          </a:lnRef>
+          <a:fillRef idx="3">
+            <a:schemeClr val="accent1"/>
+          </a:fillRef>
+          <a:effectRef idx="2">
+            <a:schemeClr val="accent1"/>
+          </a:effectRef>
+          <a:fontRef idx="minor">
+            <a:schemeClr val="lt1"/>
+          </a:fontRef>
+        </p:style>
+        <p:txBody>
+          <a:bodyPr rtlCol="0" anchor="ctr" wrap="square" lIns="73152" rIns="73152" tIns="36576" bIns="36576"/>
+          <a:lstStyle/>
+          <a:p>
+            <a:pPr algn="l">
+              <a:spcAft>
+                <a:spcPts val="0"/>
+              </a:spcAft>
+              <a:defRPr sz="1300" b="1">
+                <a:solidFill>
+                  <a:srgbClr val="122C4E"/>
+                </a:solidFill>
+                <a:latin typeface="Noto Sans CJK KR"/>
+              </a:defRPr>
+            </a:pPr>
+            <a:r>
+              <a:t>현재 단계 체크포인트    |    현재 폴더 ~/agv_ws    |    현재 터미널</a:t>
+            </a:r>
+          </a:p>
+        </p:txBody>
+      </p:sp>
+      <p:sp>
+        <p:nvSpPr>
+          <p:cNvPr id="7" name="Rounded Rectangle 6"/>
+          <p:cNvSpPr/>
+          <p:nvPr/>
+        </p:nvSpPr>
+        <p:spPr>
+          <a:xfrm>
+            <a:off x="685800" y="1737360"/>
+            <a:ext cx="10972800" cy="3611880"/>
+          </a:xfrm>
+          <a:prstGeom prst="roundRect">
+            <a:avLst/>
+          </a:prstGeom>
+          <a:solidFill>
+            <a:srgbClr val="F4F7FB"/>
+          </a:solidFill>
+          <a:ln>
+            <a:solidFill>
+              <a:srgbClr val="D2DCE8"/>
+            </a:solidFill>
+          </a:ln>
+        </p:spPr>
+        <p:style>
+          <a:lnRef idx="1">
+            <a:schemeClr val="accent1"/>
+          </a:lnRef>
+          <a:fillRef idx="3">
+            <a:schemeClr val="accent1"/>
+          </a:fillRef>
+          <a:effectRef idx="2">
+            <a:schemeClr val="accent1"/>
+          </a:effectRef>
+          <a:fontRef idx="minor">
+            <a:schemeClr val="lt1"/>
+          </a:fontRef>
+        </p:style>
+        <p:txBody>
+          <a:bodyPr rtlCol="0" anchor="ctr"/>
+          <a:lstStyle/>
+          <a:p>
+            <a:pPr algn="ctr"/>
+          </a:p>
+        </p:txBody>
+      </p:sp>
+      <p:sp>
+        <p:nvSpPr>
+          <p:cNvPr id="8" name="TextBox 7"/>
+          <p:cNvSpPr txBox="1"/>
+          <p:nvPr/>
+        </p:nvSpPr>
+        <p:spPr>
+          <a:xfrm>
+            <a:off x="896112" y="1993392"/>
+            <a:ext cx="10332720" cy="2971800"/>
+          </a:xfrm>
+          <a:prstGeom prst="rect">
+            <a:avLst/>
+          </a:prstGeom>
+          <a:noFill/>
+        </p:spPr>
+        <p:txBody>
+          <a:bodyPr wrap="square" lIns="109728" rIns="109728">
+            <a:spAutoFit/>
+          </a:bodyPr>
+          <a:lstStyle/>
+          <a:p>
+            <a:pPr>
+              <a:spcAft>
+                <a:spcPts val="800"/>
+              </a:spcAft>
+              <a:defRPr sz="1800">
+                <a:solidFill>
+                  <a:srgbClr val="122C4E"/>
+                </a:solidFill>
+                <a:latin typeface="Noto Sans CJK KR"/>
+              </a:defRPr>
+            </a:pPr>
+            <a:r>
+              <a:t>• □ 완료 화면: AGV가 바닥에 안정적으로 놓이고 바퀴 접촉·충돌 파라미터가 모델에 존재한다.</a:t>
+            </a:r>
+          </a:p>
+          <a:p>
+            <a:pPr>
+              <a:spcAft>
+                <a:spcPts val="800"/>
+              </a:spcAft>
+              <a:defRPr sz="1800">
+                <a:solidFill>
+                  <a:srgbClr val="122C4E"/>
+                </a:solidFill>
+                <a:latin typeface="Noto Sans CJK KR"/>
+              </a:defRPr>
+            </a:pPr>
+            <a:r>
+              <a:t>• □ Complete 파일: blocks/B_robot_build/M07_physics_modeling/complete/</a:t>
+            </a:r>
+          </a:p>
+          <a:p>
+            <a:pPr>
+              <a:spcAft>
+                <a:spcPts val="800"/>
+              </a:spcAft>
+              <a:defRPr sz="1800">
+                <a:solidFill>
+                  <a:srgbClr val="122C4E"/>
+                </a:solidFill>
+                <a:latin typeface="Noto Sans CJK KR"/>
+              </a:defRPr>
+            </a:pPr>
+            <a:r>
+              <a:t>• □ 정상 로그·캡처: logs/validation.log, screenshots/validation_terminal.png</a:t>
+            </a:r>
+          </a:p>
+          <a:p>
+            <a:pPr>
+              <a:spcAft>
+                <a:spcPts val="800"/>
+              </a:spcAft>
+              <a:defRPr sz="1800">
+                <a:solidFill>
+                  <a:srgbClr val="122C4E"/>
+                </a:solidFill>
+                <a:latin typeface="Noto Sans CJK KR"/>
+              </a:defRPr>
+            </a:pPr>
+            <a:r>
+              <a:t>• □ 버전 식별: CHECKSUM_or_TAG.txt의 SHA-256 manifest</a:t>
+            </a:r>
+          </a:p>
+          <a:p>
+            <a:pPr>
+              <a:spcAft>
+                <a:spcPts val="800"/>
+              </a:spcAft>
+              <a:defRPr sz="1800">
+                <a:solidFill>
+                  <a:srgbClr val="122C4E"/>
+                </a:solidFill>
+                <a:latin typeface="Noto Sans CJK KR"/>
+              </a:defRPr>
+            </a:pPr>
+            <a:r>
+              <a:t>• □ 다음 시작 조건: M08 World/Spawn</a:t>
+            </a:r>
+          </a:p>
+        </p:txBody>
+      </p:sp>
+      <p:sp>
+        <p:nvSpPr>
+          <p:cNvPr id="9" name="TextBox 8"/>
+          <p:cNvSpPr txBox="1"/>
+          <p:nvPr/>
+        </p:nvSpPr>
+        <p:spPr>
+          <a:xfrm>
+            <a:off x="868680" y="5596128"/>
+            <a:ext cx="10515600" cy="338328"/>
+          </a:xfrm>
+          <a:prstGeom prst="rect">
+            <a:avLst/>
+          </a:prstGeom>
+          <a:noFill/>
+        </p:spPr>
+        <p:txBody>
+          <a:bodyPr wrap="square" lIns="73152" rIns="73152" tIns="36576" bIns="36576">
+            <a:spAutoFit/>
+          </a:bodyPr>
+          <a:lstStyle/>
+          <a:p>
+            <a:pPr algn="ctr">
+              <a:spcAft>
+                <a:spcPts val="0"/>
+              </a:spcAft>
+              <a:defRPr sz="1700" b="1">
+                <a:solidFill>
+                  <a:srgbClr val="2A8B5A"/>
+                </a:solidFill>
+                <a:latin typeface="Noto Sans CJK KR"/>
+              </a:defRPr>
+            </a:pPr>
+            <a:r>
+              <a:t>다음 모듈을 시작하기 전, 이 슬라이드의 Complete와 다음 모듈의 Starter를 비교합니다.</a:t>
+            </a:r>
+          </a:p>
+        </p:txBody>
+      </p:sp>
+    </p:spTree>
+  </p:cSld>
+  <p:clrMapOvr>
+    <a:masterClrMapping/>
+  </p:clrMapOvr>
+</p:sld>
+</file>
+
+<file path=ppt/slides/slide39.xml><?xml version="1.0" encoding="utf-8"?>
+<p:sld xmlns:a="http://schemas.openxmlformats.org/drawingml/2006/main" xmlns:p="http://schemas.openxmlformats.org/presentationml/2006/main" xmlns:r="http://schemas.openxmlformats.org/officeDocument/2006/relationships">
+  <p:cSld>
+    <p:spTree>
+      <p:nvGrpSpPr>
+        <p:cNvPr id="1" name=""/>
+        <p:cNvGrpSpPr/>
+        <p:nvPr/>
+      </p:nvGrpSpPr>
+      <p:grpSpPr/>
+      <p:sp>
+        <p:nvSpPr>
+          <p:cNvPr id="2" name="TextBox 1"/>
+          <p:cNvSpPr txBox="1"/>
+          <p:nvPr/>
+        </p:nvSpPr>
+        <p:spPr>
+          <a:xfrm>
+            <a:off x="566928" y="347472"/>
+            <a:ext cx="10881360" cy="438912"/>
+          </a:xfrm>
+          <a:prstGeom prst="rect">
+            <a:avLst/>
+          </a:prstGeom>
+          <a:noFill/>
+        </p:spPr>
+        <p:txBody>
+          <a:bodyPr wrap="square" lIns="73152" rIns="73152" tIns="36576" bIns="36576">
+            <a:spAutoFit/>
+          </a:bodyPr>
+          <a:lstStyle/>
+          <a:p>
+            <a:pPr algn="l">
+              <a:spcAft>
+                <a:spcPts val="0"/>
+              </a:spcAft>
+              <a:defRPr sz="3200" b="1">
+                <a:solidFill>
+                  <a:srgbClr val="122C4E"/>
+                </a:solidFill>
+                <a:latin typeface="Noto Sans CJK KR"/>
+              </a:defRPr>
+            </a:pPr>
+            <a:r>
               <a:t>공식 참고 자료</a:t>
             </a:r>
           </a:p>
@@ -19959,7 +21598,7 @@
         </p:nvSpPr>
         <p:spPr>
           <a:xfrm>
-            <a:off x="914400" y="1810512"/>
+            <a:off x="914400" y="1773936"/>
             <a:ext cx="3840480" cy="256032"/>
           </a:xfrm>
           <a:prstGeom prst="rect">
@@ -19998,8 +21637,8 @@
         </p:nvSpPr>
         <p:spPr>
           <a:xfrm>
-            <a:off x="914400" y="2121408"/>
-            <a:ext cx="9966960" cy="256032"/>
+            <a:off x="914400" y="2048255"/>
+            <a:ext cx="9966960" cy="475488"/>
           </a:xfrm>
           <a:prstGeom prst="rect">
             <a:avLst/>
@@ -20016,7 +21655,7 @@
               <a:spcAft>
                 <a:spcPts val="0"/>
               </a:spcAft>
-              <a:defRPr sz="1200" b="0">
+              <a:defRPr sz="1000" b="0">
                 <a:solidFill>
                   <a:srgbClr val="225B9B"/>
                 </a:solidFill>
@@ -20037,7 +21676,7 @@
         </p:nvSpPr>
         <p:spPr>
           <a:xfrm>
-            <a:off x="914400" y="2816352"/>
+            <a:off x="914400" y="2852928"/>
             <a:ext cx="3840480" cy="256032"/>
           </a:xfrm>
           <a:prstGeom prst="rect">
@@ -20077,7 +21716,7 @@
         <p:spPr>
           <a:xfrm>
             <a:off x="914400" y="3127248"/>
-            <a:ext cx="9966960" cy="256032"/>
+            <a:ext cx="9966960" cy="475488"/>
           </a:xfrm>
           <a:prstGeom prst="rect">
             <a:avLst/>
@@ -20094,7 +21733,7 @@
               <a:spcAft>
                 <a:spcPts val="0"/>
               </a:spcAft>
-              <a:defRPr sz="1200" b="0">
+              <a:defRPr sz="1000" b="0">
                 <a:solidFill>
                   <a:srgbClr val="225B9B"/>
                 </a:solidFill>
@@ -20115,7 +21754,7 @@
         </p:nvSpPr>
         <p:spPr>
           <a:xfrm>
-            <a:off x="914400" y="3822191"/>
+            <a:off x="914400" y="3931920"/>
             <a:ext cx="3840480" cy="256032"/>
           </a:xfrm>
           <a:prstGeom prst="rect">
@@ -20154,8 +21793,8 @@
         </p:nvSpPr>
         <p:spPr>
           <a:xfrm>
-            <a:off x="914400" y="4133087"/>
-            <a:ext cx="9966960" cy="256032"/>
+            <a:off x="914400" y="4206240"/>
+            <a:ext cx="9966960" cy="475488"/>
           </a:xfrm>
           <a:prstGeom prst="rect">
             <a:avLst/>
@@ -20172,7 +21811,7 @@
               <a:spcAft>
                 <a:spcPts val="0"/>
               </a:spcAft>
-              <a:defRPr sz="1200" b="0">
+              <a:defRPr sz="1000" b="0">
                 <a:solidFill>
                   <a:srgbClr val="225B9B"/>
                 </a:solidFill>
@@ -20193,7 +21832,7 @@
         </p:nvSpPr>
         <p:spPr>
           <a:xfrm>
-            <a:off x="914400" y="4828032"/>
+            <a:off x="914400" y="5010912"/>
             <a:ext cx="3840480" cy="256032"/>
           </a:xfrm>
           <a:prstGeom prst="rect">
@@ -20232,8 +21871,8 @@
         </p:nvSpPr>
         <p:spPr>
           <a:xfrm>
-            <a:off x="914400" y="5138928"/>
-            <a:ext cx="9966960" cy="256032"/>
+            <a:off x="914400" y="5285232"/>
+            <a:ext cx="9966960" cy="475488"/>
           </a:xfrm>
           <a:prstGeom prst="rect">
             <a:avLst/>
@@ -20250,7 +21889,7 @@
               <a:spcAft>
                 <a:spcPts val="0"/>
               </a:spcAft>
-              <a:defRPr sz="1200" b="0">
+              <a:defRPr sz="1000" b="0">
                 <a:solidFill>
                   <a:srgbClr val="225B9B"/>
                 </a:solidFill>
@@ -22385,7 +24024,7 @@
               </a:defRPr>
             </a:pPr>
             <a:r>
-              <a:t>파일을 새로 만들고 저장한다 (1/21)</a:t>
+              <a:t>파일을 새로 만들고 저장한다 (1/24)</a:t>
             </a:r>
           </a:p>
         </p:txBody>
@@ -22560,7 +24199,7 @@
               </a:defRPr>
             </a:pPr>
             <a:r>
-              <a:t>현재 단계 3/24    |    현재 폴더 ~/agv_ws    |    현재 터미널</a:t>
+              <a:t>현재 단계 3/27    |    현재 폴더 ~/agv_ws    |    현재 터미널</a:t>
             </a:r>
           </a:p>
         </p:txBody>
@@ -22573,8 +24212,8 @@
         </p:nvSpPr>
         <p:spPr>
           <a:xfrm>
-            <a:off x="658368" y="1682496"/>
-            <a:ext cx="10972800" cy="347472"/>
+            <a:off x="658368" y="1627632"/>
+            <a:ext cx="10972800" cy="256032"/>
           </a:xfrm>
           <a:prstGeom prst="rect">
             <a:avLst/>
@@ -22591,7 +24230,7 @@
               <a:spcAft>
                 <a:spcPts val="0"/>
               </a:spcAft>
-              <a:defRPr sz="1700" b="1">
+              <a:defRPr sz="1500" b="1">
                 <a:solidFill>
                   <a:srgbClr val="122C4E"/>
                 </a:solidFill>
@@ -22612,8 +24251,8 @@
         </p:nvSpPr>
         <p:spPr>
           <a:xfrm>
-            <a:off x="658368" y="2103120"/>
-            <a:ext cx="10972800" cy="493776"/>
+            <a:off x="658368" y="1956816"/>
+            <a:ext cx="10972800" cy="603504"/>
           </a:xfrm>
           <a:prstGeom prst="rect">
             <a:avLst/>
@@ -22657,7 +24296,11 @@
               </a:defRPr>
             </a:pPr>
             <a:r>
-              <a:t>파일 생성/열기: mkdir -p ~/agv_ws/src/agv_gazebo/models/agv    &amp;&amp;    nano ~/agv_ws/src/agv_gazebo/models/agv/model.sdf</a:t>
+              <a:t>파일 생성: mkdir -p ~/agv_ws/src/agv_gazebo/models/agv</a:t>
+            </a:r>
+            <a:br/>
+            <a:r>
+              <a:t>파일 열기: nano ~/agv_ws/src/agv_gazebo/models/agv/model.sdf</a:t>
             </a:r>
           </a:p>
         </p:txBody>
@@ -22670,8 +24313,8 @@
         </p:nvSpPr>
         <p:spPr>
           <a:xfrm>
-            <a:off x="658368" y="2761488"/>
-            <a:ext cx="10972800" cy="3383280"/>
+            <a:off x="658368" y="2706624"/>
+            <a:ext cx="10972800" cy="3364992"/>
           </a:xfrm>
           <a:prstGeom prst="rect">
             <a:avLst/>
@@ -22761,14 +24404,6 @@
             <a:r>
               <a:t>      </a:t>
             </a:r>
-            <a:br/>
-            <a:r>
-              <a:t>      </a:t>
-            </a:r>
-            <a:br/>
-            <a:r>
-              <a:t>      &lt;inertial&gt;</a:t>
-            </a:r>
           </a:p>
         </p:txBody>
       </p:sp>
@@ -22780,7 +24415,7 @@
         </p:nvSpPr>
         <p:spPr>
           <a:xfrm>
-            <a:off x="749808" y="6199632"/>
+            <a:off x="749808" y="6181344"/>
             <a:ext cx="10789920" cy="201168"/>
           </a:xfrm>
           <a:prstGeom prst="rect">
@@ -22806,7 +24441,7 @@
               </a:defRPr>
             </a:pPr>
             <a:r>
-              <a:t>파일 전체 1/21 · 이 슬라이드 다음에 같은 파일의 나머지 줄이 이어집니다.</a:t>
+              <a:t>파일 전체 1/24 · 이 슬라이드 다음에 같은 파일의 나머지 줄이 이어집니다.</a:t>
             </a:r>
           </a:p>
         </p:txBody>

--- a/blocks/B_robot_build/M07_physics_modeling/M07_Gazebo용_물리_요소_추가.pptx
+++ b/blocks/B_robot_build/M07_physics_modeling/M07_Gazebo용_물리_요소_추가.pptx
@@ -31,6 +31,9 @@
     <p:sldId id="279" r:id="rId31"/>
     <p:sldId id="280" r:id="rId32"/>
     <p:sldId id="281" r:id="rId33"/>
+    <p:sldId id="282" r:id="rId34"/>
+    <p:sldId id="283" r:id="rId35"/>
+    <p:sldId id="284" r:id="rId36"/>
   </p:sldIdLst>
   <p:sldSz cx="12191999" cy="6858000" type="screen4x3"/>
   <p:notesSz cx="6858000" cy="9144000"/>
@@ -617,17 +620,17 @@
           <a:lstStyle/>
           <a:p>
             <a:r>
-              <a:t>[설명] ~/ros2_curri/agv_ws/src/agv_description/curriculum_stages/M07/model.sdf의 전체 파일을 2/11 구간으로 작성한다.</a:t>
-            </a:r>
-          </a:p>
-          <a:p>
-            <a:r>
-              <a:t>[실행] nano ~/ros2_curri/agv_ws/src/agv_description/curriculum_stages/M07/model.sdf</a:t>
-            </a:r>
-          </a:p>
-          <a:p>
-            <a:r>
-              <a:t>[확인] 코드를 저장하고 다음 코드 슬라이드 또는 build 단계로 이동한다.</a:t>
+              <a:t>[설명] 증상 원인을 찾으려면 mass→inertia→collision→friction 순서를 지킨다.</a:t>
+            </a:r>
+          </a:p>
+          <a:p>
+            <a:r>
+              <a:t>[실행] rg -n '&lt;mass&gt;|&lt;inertia&gt;|&lt;collision&gt;|&lt;friction&gt;' src/agv_description/curriculum_stages/M07/model.sdf</a:t>
+            </a:r>
+          </a:p>
+          <a:p>
+            <a:r>
+              <a:t>[확인] 명령 출력에서 슬라이드의 확인 항목을 찾는다.</a:t>
             </a:r>
           </a:p>
           <a:p>
@@ -637,7 +640,7 @@
           </a:p>
           <a:p>
             <a:r>
-              <a:t>[오류] 들여쓰기·XML 태그·따옴표가 슬라이드와 정확히 같은지 확인한다.</a:t>
+              <a:t>[오류] 오류가 나면 현재 폴더, source, 파일 경로를 먼저 확인한다.</a:t>
             </a:r>
           </a:p>
         </p:txBody>
@@ -707,7 +710,7 @@
           <a:lstStyle/>
           <a:p>
             <a:r>
-              <a:t>[설명] ~/ros2_curri/agv_ws/src/agv_description/curriculum_stages/M07/model.sdf의 전체 파일을 3/11 구간으로 작성한다.</a:t>
+              <a:t>[설명] ~/ros2_curri/agv_ws/src/agv_description/curriculum_stages/M07/model.sdf의 전체 파일을 1/11 구간으로 작성한다.</a:t>
             </a:r>
           </a:p>
           <a:p>
@@ -797,7 +800,7 @@
           <a:lstStyle/>
           <a:p>
             <a:r>
-              <a:t>[설명] ~/ros2_curri/agv_ws/src/agv_description/curriculum_stages/M07/model.sdf의 전체 파일을 4/11 구간으로 작성한다.</a:t>
+              <a:t>[설명] ~/ros2_curri/agv_ws/src/agv_description/curriculum_stages/M07/model.sdf의 전체 파일을 2/11 구간으로 작성한다.</a:t>
             </a:r>
           </a:p>
           <a:p>
@@ -887,7 +890,7 @@
           <a:lstStyle/>
           <a:p>
             <a:r>
-              <a:t>[설명] ~/ros2_curri/agv_ws/src/agv_description/curriculum_stages/M07/model.sdf의 전체 파일을 5/11 구간으로 작성한다.</a:t>
+              <a:t>[설명] ~/ros2_curri/agv_ws/src/agv_description/curriculum_stages/M07/model.sdf의 전체 파일을 3/11 구간으로 작성한다.</a:t>
             </a:r>
           </a:p>
           <a:p>
@@ -977,7 +980,7 @@
           <a:lstStyle/>
           <a:p>
             <a:r>
-              <a:t>[설명] ~/ros2_curri/agv_ws/src/agv_description/curriculum_stages/M07/model.sdf의 전체 파일을 6/11 구간으로 작성한다.</a:t>
+              <a:t>[설명] ~/ros2_curri/agv_ws/src/agv_description/curriculum_stages/M07/model.sdf의 전체 파일을 4/11 구간으로 작성한다.</a:t>
             </a:r>
           </a:p>
           <a:p>
@@ -1067,7 +1070,7 @@
           <a:lstStyle/>
           <a:p>
             <a:r>
-              <a:t>[설명] ~/ros2_curri/agv_ws/src/agv_description/curriculum_stages/M07/model.sdf의 전체 파일을 7/11 구간으로 작성한다.</a:t>
+              <a:t>[설명] ~/ros2_curri/agv_ws/src/agv_description/curriculum_stages/M07/model.sdf의 전체 파일을 5/11 구간으로 작성한다.</a:t>
             </a:r>
           </a:p>
           <a:p>
@@ -1157,7 +1160,7 @@
           <a:lstStyle/>
           <a:p>
             <a:r>
-              <a:t>[설명] ~/ros2_curri/agv_ws/src/agv_description/curriculum_stages/M07/model.sdf의 전체 파일을 8/11 구간으로 작성한다.</a:t>
+              <a:t>[설명] ~/ros2_curri/agv_ws/src/agv_description/curriculum_stages/M07/model.sdf의 전체 파일을 6/11 구간으로 작성한다.</a:t>
             </a:r>
           </a:p>
           <a:p>
@@ -1247,7 +1250,7 @@
           <a:lstStyle/>
           <a:p>
             <a:r>
-              <a:t>[설명] ~/ros2_curri/agv_ws/src/agv_description/curriculum_stages/M07/model.sdf의 전체 파일을 9/11 구간으로 작성한다.</a:t>
+              <a:t>[설명] ~/ros2_curri/agv_ws/src/agv_description/curriculum_stages/M07/model.sdf의 전체 파일을 7/11 구간으로 작성한다.</a:t>
             </a:r>
           </a:p>
           <a:p>
@@ -1337,7 +1340,7 @@
           <a:lstStyle/>
           <a:p>
             <a:r>
-              <a:t>[설명] ~/ros2_curri/agv_ws/src/agv_description/curriculum_stages/M07/model.sdf의 전체 파일을 10/11 구간으로 작성한다.</a:t>
+              <a:t>[설명] ~/ros2_curri/agv_ws/src/agv_description/curriculum_stages/M07/model.sdf의 전체 파일을 8/11 구간으로 작성한다.</a:t>
             </a:r>
           </a:p>
           <a:p>
@@ -1427,7 +1430,7 @@
           <a:lstStyle/>
           <a:p>
             <a:r>
-              <a:t>[설명] ~/ros2_curri/agv_ws/src/agv_description/curriculum_stages/M07/model.sdf의 전체 파일을 11/11 구간으로 작성한다.</a:t>
+              <a:t>[설명] ~/ros2_curri/agv_ws/src/agv_description/curriculum_stages/M07/model.sdf의 전체 파일을 9/11 구간으로 작성한다.</a:t>
             </a:r>
           </a:p>
           <a:p>
@@ -1607,22 +1610,17 @@
           <a:lstStyle/>
           <a:p>
             <a:r>
-              <a:t>[설명] build/source/run을 생략 없이 실행한다.</a:t>
-            </a:r>
-          </a:p>
-          <a:p>
-            <a:r>
-              <a:t>[실행] cd ~/ros2_curri/agv_ws</a:t>
-            </a:r>
-          </a:p>
-          <a:p>
-            <a:r>
-              <a:t>gz sdf -k src/agv_description/curriculum_stages/M07/model.sdf</a:t>
-            </a:r>
-          </a:p>
-          <a:p>
-            <a:r>
-              <a:t>[확인] AGV가 바닥에 안정적으로 놓이고 바퀴 접촉·충돌 파라미터가 모델에 존재한다.</a:t>
+              <a:t>[설명] ~/ros2_curri/agv_ws/src/agv_description/curriculum_stages/M07/model.sdf의 전체 파일을 10/11 구간으로 작성한다.</a:t>
+            </a:r>
+          </a:p>
+          <a:p>
+            <a:r>
+              <a:t>[실행] nano ~/ros2_curri/agv_ws/src/agv_description/curriculum_stages/M07/model.sdf</a:t>
+            </a:r>
+          </a:p>
+          <a:p>
+            <a:r>
+              <a:t>[확인] 코드를 저장하고 다음 코드 슬라이드 또는 build 단계로 이동한다.</a:t>
             </a:r>
           </a:p>
           <a:p>
@@ -1632,7 +1630,7 @@
           </a:p>
           <a:p>
             <a:r>
-              <a:t>[오류] 오류가 나면 현재 폴더, source, 파일 경로를 먼저 확인한다.</a:t>
+              <a:t>[오류] 들여쓰기·XML 태그·따옴표가 슬라이드와 정확히 같은지 확인한다.</a:t>
             </a:r>
           </a:p>
         </p:txBody>
@@ -1702,17 +1700,17 @@
           <a:lstStyle/>
           <a:p>
             <a:r>
-              <a:t>[설명] 실제 Ubuntu/ROS 2 환경에서 생성한 검증 화면이다.</a:t>
-            </a:r>
-          </a:p>
-          <a:p>
-            <a:r>
-              <a:t>[실행] 슬라이드의 명령 또는 파일 작성 단계를 진행한다.</a:t>
-            </a:r>
-          </a:p>
-          <a:p>
-            <a:r>
-              <a:t>[확인] 캡처의 명령과 다음 슬라이드의 검증 명령을 비교한다.</a:t>
+              <a:t>[설명] ~/ros2_curri/agv_ws/src/agv_description/curriculum_stages/M07/model.sdf의 전체 파일을 11/11 구간으로 작성한다.</a:t>
+            </a:r>
+          </a:p>
+          <a:p>
+            <a:r>
+              <a:t>[실행] nano ~/ros2_curri/agv_ws/src/agv_description/curriculum_stages/M07/model.sdf</a:t>
+            </a:r>
+          </a:p>
+          <a:p>
+            <a:r>
+              <a:t>[확인] 코드를 저장하고 다음 코드 슬라이드 또는 build 단계로 이동한다.</a:t>
             </a:r>
           </a:p>
           <a:p>
@@ -1722,7 +1720,7 @@
           </a:p>
           <a:p>
             <a:r>
-              <a:t>[오류] 오류가 나면 현재 폴더, source, 파일 경로를 먼저 확인한다.</a:t>
+              <a:t>[오류] 들여쓰기·XML 태그·따옴표가 슬라이드와 정확히 같은지 확인한다.</a:t>
             </a:r>
           </a:p>
         </p:txBody>
@@ -1792,17 +1790,17 @@
           <a:lstStyle/>
           <a:p>
             <a:r>
-              <a:t>[설명] 검증 명령은 GUI 결과와 별도로 실행해 재현 가능한 완료 기준을 만든다.</a:t>
-            </a:r>
-          </a:p>
-          <a:p>
-            <a:r>
-              <a:t>[실행] gz sdf -k ~/ros2_curri/agv_ws/src/agv_description/curriculum_stages/M07/model.sdf</a:t>
-            </a:r>
-          </a:p>
-          <a:p>
-            <a:r>
-              <a:t>rg -n '&lt;sensor|DiffDrive' ~/ros2_curri/agv_ws/src/agv_description/curriculum_stages/M07/model.sdf</a:t>
+              <a:t>[설명] build/source/run을 생략 없이 실행한다.</a:t>
+            </a:r>
+          </a:p>
+          <a:p>
+            <a:r>
+              <a:t>[실행] cd ~/ros2_curri/agv_ws</a:t>
+            </a:r>
+          </a:p>
+          <a:p>
+            <a:r>
+              <a:t>gz sdf -k src/agv_description/curriculum_stages/M07/model.sdf</a:t>
             </a:r>
           </a:p>
           <a:p>
@@ -1887,7 +1885,7 @@
           <a:lstStyle/>
           <a:p>
             <a:r>
-              <a:t>[설명] 오류를 대신 해결하지 말고 증상부터 우선 확인 순서대로 교육생이 실행하게 한다.</a:t>
+              <a:t>[설명] 실제 Ubuntu/ROS 2 환경에서 생성한 검증 화면이다.</a:t>
             </a:r>
           </a:p>
           <a:p>
@@ -1897,7 +1895,7 @@
           </a:p>
           <a:p>
             <a:r>
-              <a:t>[확인] 수정 뒤 첫 검증 명령을 다시 실행한다.</a:t>
+              <a:t>[확인] ① 명령/설정  ② 정상 출력 또는 화면  ③ 다음 검증 명령으로 재확인</a:t>
             </a:r>
           </a:p>
           <a:p>
@@ -1907,7 +1905,7 @@
           </a:p>
           <a:p>
             <a:r>
-              <a:t>[오류] 슬라이드의 두 대표 오류를 먼저 사용한다.</a:t>
+              <a:t>[오류] 오류가 나면 현재 폴더, source, 파일 경로를 먼저 확인한다.</a:t>
             </a:r>
           </a:p>
         </p:txBody>
@@ -1977,7 +1975,7 @@
           <a:lstStyle/>
           <a:p>
             <a:r>
-              <a:t>[설명] 교육생이 직접 한 값만 바꿔 원인과 결과를 연결하게 한다.</a:t>
+              <a:t>[설명] 실제 Ubuntu/ROS 2 환경에서 생성한 검증 화면이다.</a:t>
             </a:r>
           </a:p>
           <a:p>
@@ -1987,7 +1985,7 @@
           </a:p>
           <a:p>
             <a:r>
-              <a:t>[확인] 원래 값과 변경 값을 모두 기록한다.</a:t>
+              <a:t>[확인] Valid 다음에 visual/collision과 mass/friction이 서로 다른 책임임을 읽습니다.</a:t>
             </a:r>
           </a:p>
           <a:p>
@@ -2067,17 +2065,22 @@
           <a:lstStyle/>
           <a:p>
             <a:r>
-              <a:t>[설명] 교육생이 Complete·캡처·로그를 저장했는지 확인하고 다음 모듈의 시작 상태를 읽는다.</a:t>
-            </a:r>
-          </a:p>
-          <a:p>
-            <a:r>
-              <a:t>[실행] 슬라이드의 명령 또는 파일 작성 단계를 진행한다.</a:t>
-            </a:r>
-          </a:p>
-          <a:p>
-            <a:r>
-              <a:t>[확인] M08 World/Spawn 시작 조건을 말할 수 있다.</a:t>
+              <a:t>[설명] 검증 명령은 GUI 결과와 별도로 실행해 재현 가능한 완료 기준을 만든다.</a:t>
+            </a:r>
+          </a:p>
+          <a:p>
+            <a:r>
+              <a:t>[실행] gz sdf -k ~/ros2_curri/agv_ws/src/agv_description/curriculum_stages/M07/model.sdf</a:t>
+            </a:r>
+          </a:p>
+          <a:p>
+            <a:r>
+              <a:t>rg -n '&lt;sensor|DiffDrive' ~/ros2_curri/agv_ws/src/agv_description/curriculum_stages/M07/model.sdf</a:t>
+            </a:r>
+          </a:p>
+          <a:p>
+            <a:r>
+              <a:t>[확인] AGV가 바닥에 안정적으로 놓이고 바퀴 접촉·충돌 파라미터가 모델에 존재한다.</a:t>
             </a:r>
           </a:p>
           <a:p>
@@ -2157,6 +2160,276 @@
           <a:lstStyle/>
           <a:p>
             <a:r>
+              <a:t>[설명] 오류를 대신 해결하지 말고 증상부터 우선 확인 순서대로 교육생이 실행하게 한다.</a:t>
+            </a:r>
+          </a:p>
+          <a:p>
+            <a:r>
+              <a:t>[실행] 슬라이드의 명령 또는 파일 작성 단계를 진행한다.</a:t>
+            </a:r>
+          </a:p>
+          <a:p>
+            <a:r>
+              <a:t>[확인] 수정 뒤 첫 검증 명령을 다시 실행한다.</a:t>
+            </a:r>
+          </a:p>
+          <a:p>
+            <a:r>
+              <a:t>[멈춤] 교육생이 현재 체크포인트를 통과할 때까지 기다린다.</a:t>
+            </a:r>
+          </a:p>
+          <a:p>
+            <a:r>
+              <a:t>[오류] 슬라이드의 두 대표 오류를 먼저 사용한다.</a:t>
+            </a:r>
+          </a:p>
+        </p:txBody>
+      </p:sp>
+      <p:sp>
+        <p:nvSpPr>
+          <p:cNvPr id="4" name="Slide Number Placeholder 3"/>
+          <p:cNvSpPr>
+            <a:spLocks noGrp="1"/>
+          </p:cNvSpPr>
+          <p:nvPr>
+            <p:ph type="sldNum" idx="5" sz="quarter"/>
+          </p:nvPr>
+        </p:nvSpPr>
+        <p:spPr/>
+      </p:sp>
+    </p:spTree>
+  </p:cSld>
+  <p:clrMapOvr>
+    <a:masterClrMapping/>
+  </p:clrMapOvr>
+</p:notes>
+</file>
+
+<file path=ppt/notesSlides/notesSlide27.xml><?xml version="1.0" encoding="utf-8"?>
+<p:notes xmlns:a="http://schemas.openxmlformats.org/drawingml/2006/main" xmlns:p="http://schemas.openxmlformats.org/presentationml/2006/main" xmlns:r="http://schemas.openxmlformats.org/officeDocument/2006/relationships">
+  <p:cSld>
+    <p:spTree>
+      <p:nvGrpSpPr>
+        <p:cNvPr id="1" name=""/>
+        <p:cNvGrpSpPr/>
+        <p:nvPr/>
+      </p:nvGrpSpPr>
+      <p:grpSpPr>
+        <a:xfrm>
+          <a:off x="0" y="0"/>
+          <a:ext cx="0" cy="0"/>
+          <a:chOff x="0" y="0"/>
+          <a:chExt cx="0" cy="0"/>
+        </a:xfrm>
+      </p:grpSpPr>
+      <p:sp>
+        <p:nvSpPr>
+          <p:cNvPr id="2" name="Slide Image Placeholder 1"/>
+          <p:cNvSpPr>
+            <a:spLocks noGrp="1"/>
+          </p:cNvSpPr>
+          <p:nvPr>
+            <p:ph type="sldImg" idx="2"/>
+          </p:nvPr>
+        </p:nvSpPr>
+        <p:spPr/>
+      </p:sp>
+      <p:sp>
+        <p:nvSpPr>
+          <p:cNvPr id="3" name="Notes Placeholder 2"/>
+          <p:cNvSpPr>
+            <a:spLocks noGrp="1"/>
+          </p:cNvSpPr>
+          <p:nvPr>
+            <p:ph type="body" idx="3" sz="quarter"/>
+          </p:nvPr>
+        </p:nvSpPr>
+        <p:spPr/>
+        <p:txBody>
+          <a:bodyPr/>
+          <a:lstStyle/>
+          <a:p>
+            <a:r>
+              <a:t>[설명] 교육생이 직접 한 값만 바꿔 원인과 결과를 연결하게 한다.</a:t>
+            </a:r>
+          </a:p>
+          <a:p>
+            <a:r>
+              <a:t>[실행] 슬라이드의 명령 또는 파일 작성 단계를 진행한다.</a:t>
+            </a:r>
+          </a:p>
+          <a:p>
+            <a:r>
+              <a:t>[확인] 원래 값과 변경 값을 모두 기록한다.</a:t>
+            </a:r>
+          </a:p>
+          <a:p>
+            <a:r>
+              <a:t>[멈춤] 교육생이 현재 체크포인트를 통과할 때까지 기다린다.</a:t>
+            </a:r>
+          </a:p>
+          <a:p>
+            <a:r>
+              <a:t>[오류] 오류가 나면 현재 폴더, source, 파일 경로를 먼저 확인한다.</a:t>
+            </a:r>
+          </a:p>
+        </p:txBody>
+      </p:sp>
+      <p:sp>
+        <p:nvSpPr>
+          <p:cNvPr id="4" name="Slide Number Placeholder 3"/>
+          <p:cNvSpPr>
+            <a:spLocks noGrp="1"/>
+          </p:cNvSpPr>
+          <p:nvPr>
+            <p:ph type="sldNum" idx="5" sz="quarter"/>
+          </p:nvPr>
+        </p:nvSpPr>
+        <p:spPr/>
+      </p:sp>
+    </p:spTree>
+  </p:cSld>
+  <p:clrMapOvr>
+    <a:masterClrMapping/>
+  </p:clrMapOvr>
+</p:notes>
+</file>
+
+<file path=ppt/notesSlides/notesSlide28.xml><?xml version="1.0" encoding="utf-8"?>
+<p:notes xmlns:a="http://schemas.openxmlformats.org/drawingml/2006/main" xmlns:p="http://schemas.openxmlformats.org/presentationml/2006/main" xmlns:r="http://schemas.openxmlformats.org/officeDocument/2006/relationships">
+  <p:cSld>
+    <p:spTree>
+      <p:nvGrpSpPr>
+        <p:cNvPr id="1" name=""/>
+        <p:cNvGrpSpPr/>
+        <p:nvPr/>
+      </p:nvGrpSpPr>
+      <p:grpSpPr>
+        <a:xfrm>
+          <a:off x="0" y="0"/>
+          <a:ext cx="0" cy="0"/>
+          <a:chOff x="0" y="0"/>
+          <a:chExt cx="0" cy="0"/>
+        </a:xfrm>
+      </p:grpSpPr>
+      <p:sp>
+        <p:nvSpPr>
+          <p:cNvPr id="2" name="Slide Image Placeholder 1"/>
+          <p:cNvSpPr>
+            <a:spLocks noGrp="1"/>
+          </p:cNvSpPr>
+          <p:nvPr>
+            <p:ph type="sldImg" idx="2"/>
+          </p:nvPr>
+        </p:nvSpPr>
+        <p:spPr/>
+      </p:sp>
+      <p:sp>
+        <p:nvSpPr>
+          <p:cNvPr id="3" name="Notes Placeholder 2"/>
+          <p:cNvSpPr>
+            <a:spLocks noGrp="1"/>
+          </p:cNvSpPr>
+          <p:nvPr>
+            <p:ph type="body" idx="3" sz="quarter"/>
+          </p:nvPr>
+        </p:nvSpPr>
+        <p:spPr/>
+        <p:txBody>
+          <a:bodyPr/>
+          <a:lstStyle/>
+          <a:p>
+            <a:r>
+              <a:t>[설명] 교육생이 Complete·캡처·로그를 저장했는지 확인하고 다음 모듈의 시작 상태를 읽는다.</a:t>
+            </a:r>
+          </a:p>
+          <a:p>
+            <a:r>
+              <a:t>[실행] 슬라이드의 명령 또는 파일 작성 단계를 진행한다.</a:t>
+            </a:r>
+          </a:p>
+          <a:p>
+            <a:r>
+              <a:t>[확인] M08 World/Spawn 시작 조건을 말할 수 있다.</a:t>
+            </a:r>
+          </a:p>
+          <a:p>
+            <a:r>
+              <a:t>[멈춤] 교육생이 현재 체크포인트를 통과할 때까지 기다린다.</a:t>
+            </a:r>
+          </a:p>
+          <a:p>
+            <a:r>
+              <a:t>[오류] 오류가 나면 현재 폴더, source, 파일 경로를 먼저 확인한다.</a:t>
+            </a:r>
+          </a:p>
+        </p:txBody>
+      </p:sp>
+      <p:sp>
+        <p:nvSpPr>
+          <p:cNvPr id="4" name="Slide Number Placeholder 3"/>
+          <p:cNvSpPr>
+            <a:spLocks noGrp="1"/>
+          </p:cNvSpPr>
+          <p:nvPr>
+            <p:ph type="sldNum" idx="5" sz="quarter"/>
+          </p:nvPr>
+        </p:nvSpPr>
+        <p:spPr/>
+      </p:sp>
+    </p:spTree>
+  </p:cSld>
+  <p:clrMapOvr>
+    <a:masterClrMapping/>
+  </p:clrMapOvr>
+</p:notes>
+</file>
+
+<file path=ppt/notesSlides/notesSlide29.xml><?xml version="1.0" encoding="utf-8"?>
+<p:notes xmlns:a="http://schemas.openxmlformats.org/drawingml/2006/main" xmlns:p="http://schemas.openxmlformats.org/presentationml/2006/main" xmlns:r="http://schemas.openxmlformats.org/officeDocument/2006/relationships">
+  <p:cSld>
+    <p:spTree>
+      <p:nvGrpSpPr>
+        <p:cNvPr id="1" name=""/>
+        <p:cNvGrpSpPr/>
+        <p:nvPr/>
+      </p:nvGrpSpPr>
+      <p:grpSpPr>
+        <a:xfrm>
+          <a:off x="0" y="0"/>
+          <a:ext cx="0" cy="0"/>
+          <a:chOff x="0" y="0"/>
+          <a:chExt cx="0" cy="0"/>
+        </a:xfrm>
+      </p:grpSpPr>
+      <p:sp>
+        <p:nvSpPr>
+          <p:cNvPr id="2" name="Slide Image Placeholder 1"/>
+          <p:cNvSpPr>
+            <a:spLocks noGrp="1"/>
+          </p:cNvSpPr>
+          <p:nvPr>
+            <p:ph type="sldImg" idx="2"/>
+          </p:nvPr>
+        </p:nvSpPr>
+        <p:spPr/>
+      </p:sp>
+      <p:sp>
+        <p:nvSpPr>
+          <p:cNvPr id="3" name="Notes Placeholder 2"/>
+          <p:cNvSpPr>
+            <a:spLocks noGrp="1"/>
+          </p:cNvSpPr>
+          <p:nvPr>
+            <p:ph type="body" idx="3" sz="quarter"/>
+          </p:nvPr>
+        </p:nvSpPr>
+        <p:spPr/>
+        <p:txBody>
+          <a:bodyPr/>
+          <a:lstStyle/>
+          <a:p>
+            <a:r>
               <a:t>[설명] 공식 문서는 버전 차이와 확장 학습을 확인할 때 사용한다.</a:t>
             </a:r>
           </a:p>
@@ -2607,22 +2880,17 @@
           <a:lstStyle/>
           <a:p>
             <a:r>
-              <a:t>[설명] M07에는 visual·collision·inertial·friction만 있으며 sensor와 drive plugin은 아직 없다.</a:t>
-            </a:r>
-          </a:p>
-          <a:p>
-            <a:r>
-              <a:t>[실행] cd ~/ros2_curri/agv_ws</a:t>
-            </a:r>
-          </a:p>
-          <a:p>
-            <a:r>
-              <a:t>gz sdf -k src/agv_description/curriculum_stages/M07/model.sdf</a:t>
-            </a:r>
-          </a:p>
-          <a:p>
-            <a:r>
-              <a:t>[확인] 명령 출력에서 슬라이드의 확인 항목을 찾는다.</a:t>
+              <a:t>[설명] 파일을 코드 문법보다 먼저 역할·사용법·확인 화면으로 설명한다.</a:t>
+            </a:r>
+          </a:p>
+          <a:p>
+            <a:r>
+              <a:t>[실행] 슬라이드의 명령 또는 파일 작성 단계를 진행한다.</a:t>
+            </a:r>
+          </a:p>
+          <a:p>
+            <a:r>
+              <a:t>[확인] 교육생이 각 파일의 산출물과 확인 위치를 말할 수 있다.</a:t>
             </a:r>
           </a:p>
           <a:p>
@@ -2702,17 +2970,17 @@
           <a:lstStyle/>
           <a:p>
             <a:r>
-              <a:t>[설명] 증상 원인을 찾으려면 mass→inertia→collision→friction 순서를 지킨다.</a:t>
-            </a:r>
-          </a:p>
-          <a:p>
-            <a:r>
-              <a:t>[실행] rg -n '&lt;mass&gt;|&lt;inertia&gt;|&lt;collision&gt;|&lt;friction&gt;' src/agv_description/curriculum_stages/M07/model.sdf</a:t>
-            </a:r>
-          </a:p>
-          <a:p>
-            <a:r>
-              <a:t>[확인] 명령 출력에서 슬라이드의 확인 항목을 찾는다.</a:t>
+              <a:t>[설명] SDF 물리 모델은 화면에 보이는 모양과 실제 접촉 계산을 서로 다른 태그로 관리합니다.</a:t>
+            </a:r>
+          </a:p>
+          <a:p>
+            <a:r>
+              <a:t>[실행] 슬라이드의 명령 또는 파일 작성 단계를 진행한다.</a:t>
+            </a:r>
+          </a:p>
+          <a:p>
+            <a:r>
+              <a:t>[확인] Valid 뒤 Gazebo에서 떠오름·떨림·미끄럼이 없는지 관찰합니다.</a:t>
             </a:r>
           </a:p>
           <a:p>
@@ -2792,17 +3060,22 @@
           <a:lstStyle/>
           <a:p>
             <a:r>
-              <a:t>[설명] ~/ros2_curri/agv_ws/src/agv_description/curriculum_stages/M07/model.sdf의 전체 파일을 1/11 구간으로 작성한다.</a:t>
-            </a:r>
-          </a:p>
-          <a:p>
-            <a:r>
-              <a:t>[실행] nano ~/ros2_curri/agv_ws/src/agv_description/curriculum_stages/M07/model.sdf</a:t>
-            </a:r>
-          </a:p>
-          <a:p>
-            <a:r>
-              <a:t>[확인] 코드를 저장하고 다음 코드 슬라이드 또는 build 단계로 이동한다.</a:t>
+              <a:t>[설명] M07에는 visual·collision·inertial·friction만 있으며 sensor와 drive plugin은 아직 없다.</a:t>
+            </a:r>
+          </a:p>
+          <a:p>
+            <a:r>
+              <a:t>[실행] cd ~/ros2_curri/agv_ws</a:t>
+            </a:r>
+          </a:p>
+          <a:p>
+            <a:r>
+              <a:t>gz sdf -k src/agv_description/curriculum_stages/M07/model.sdf</a:t>
+            </a:r>
+          </a:p>
+          <a:p>
+            <a:r>
+              <a:t>[확인] 명령 출력에서 슬라이드의 확인 항목을 찾는다.</a:t>
             </a:r>
           </a:p>
           <a:p>
@@ -2812,7 +3085,7 @@
           </a:p>
           <a:p>
             <a:r>
-              <a:t>[오류] 들여쓰기·XML 태그·따옴표가 슬라이드와 정확히 같은지 확인한다.</a:t>
+              <a:t>[오류] 오류가 나면 현재 폴더, source, 파일 경로를 먼저 확인한다.</a:t>
             </a:r>
           </a:p>
         </p:txBody>
@@ -6185,7 +6458,7 @@
               </a:defRPr>
             </a:pPr>
             <a:r>
-              <a:t>파일을 계속 작성하고 저장한다 (2/11)</a:t>
+              <a:t>값을 한 번에 하나씩 바꾼다</a:t>
             </a:r>
           </a:p>
         </p:txBody>
@@ -6224,7 +6497,7 @@
               </a:defRPr>
             </a:pPr>
             <a:r>
-              <a:t>~/ros2_curri/agv_ws/src/agv_description/curriculum_stages/M07/model.sdf</a:t>
+              <a:t>한 장에는 한 행동만 수행합니다.</a:t>
             </a:r>
           </a:p>
         </p:txBody>
@@ -6360,7 +6633,7 @@
               </a:defRPr>
             </a:pPr>
             <a:r>
-              <a:t>현재 단계 4/14    |    현재 폴더 ~/ros2_curri/agv_ws    |    현재 터미널</a:t>
+              <a:t>현재 단계 2/2    |    현재 폴더 ~/ros2_curri/agv_ws    |    현재 터미널</a:t>
             </a:r>
           </a:p>
         </p:txBody>
@@ -6373,8 +6646,8 @@
         </p:nvSpPr>
         <p:spPr>
           <a:xfrm>
-            <a:off x="658368" y="1627632"/>
-            <a:ext cx="10972800" cy="256032"/>
+            <a:off x="676656" y="1764792"/>
+            <a:ext cx="1828800" cy="347472"/>
           </a:xfrm>
           <a:prstGeom prst="rect">
             <a:avLst/>
@@ -6391,7 +6664,46 @@
               <a:spcAft>
                 <a:spcPts val="0"/>
               </a:spcAft>
-              <a:defRPr sz="1500" b="1">
+              <a:defRPr sz="1800" b="1">
+                <a:solidFill>
+                  <a:srgbClr val="225B9B"/>
+                </a:solidFill>
+                <a:latin typeface="Noto Sans CJK KR"/>
+              </a:defRPr>
+            </a:pPr>
+            <a:r>
+              <a:t>왜 하는가</a:t>
+            </a:r>
+          </a:p>
+        </p:txBody>
+      </p:sp>
+      <p:sp>
+        <p:nvSpPr>
+          <p:cNvPr id="8" name="TextBox 7"/>
+          <p:cNvSpPr txBox="1"/>
+          <p:nvPr/>
+        </p:nvSpPr>
+        <p:spPr>
+          <a:xfrm>
+            <a:off x="676656" y="2103120"/>
+            <a:ext cx="10789920" cy="512064"/>
+          </a:xfrm>
+          <a:prstGeom prst="rect">
+            <a:avLst/>
+          </a:prstGeom>
+          <a:noFill/>
+        </p:spPr>
+        <p:txBody>
+          <a:bodyPr wrap="square" lIns="73152" rIns="73152" tIns="36576" bIns="36576">
+            <a:spAutoFit/>
+          </a:bodyPr>
+          <a:lstStyle/>
+          <a:p>
+            <a:pPr algn="l">
+              <a:spcAft>
+                <a:spcPts val="0"/>
+              </a:spcAft>
+              <a:defRPr sz="2000" b="0">
                 <a:solidFill>
                   <a:srgbClr val="122C4E"/>
                 </a:solidFill>
@@ -6399,85 +6711,23 @@
               </a:defRPr>
             </a:pPr>
             <a:r>
-              <a:t>이번 단계: 파일의 전체 내용을 중간 생략 없이 작성합니다. 아래 줄 범위를 끝까지 입력하세요.</a:t>
-            </a:r>
-          </a:p>
-        </p:txBody>
-      </p:sp>
-      <p:sp>
-        <p:nvSpPr>
-          <p:cNvPr id="8" name="Rectangle 7"/>
+              <a:t>증상 원인을 찾으려면 mass→inertia→collision→friction 순서를 지킨다.</a:t>
+            </a:r>
+          </a:p>
+        </p:txBody>
+      </p:sp>
+      <p:sp>
+        <p:nvSpPr>
+          <p:cNvPr id="9" name="Rounded Rectangle 8"/>
           <p:cNvSpPr/>
           <p:nvPr/>
         </p:nvSpPr>
         <p:spPr>
           <a:xfrm>
-            <a:off x="658368" y="1956816"/>
-            <a:ext cx="10972800" cy="603504"/>
-          </a:xfrm>
-          <a:prstGeom prst="rect">
-            <a:avLst/>
-          </a:prstGeom>
-          <a:solidFill>
-            <a:srgbClr val="F4F7FB"/>
-          </a:solidFill>
-          <a:ln>
-            <a:solidFill>
-              <a:srgbClr val="F4F7FB"/>
-            </a:solidFill>
-          </a:ln>
-        </p:spPr>
-        <p:style>
-          <a:lnRef idx="1">
-            <a:schemeClr val="accent1"/>
-          </a:lnRef>
-          <a:fillRef idx="3">
-            <a:schemeClr val="accent1"/>
-          </a:fillRef>
-          <a:effectRef idx="2">
-            <a:schemeClr val="accent1"/>
-          </a:effectRef>
-          <a:fontRef idx="minor">
-            <a:schemeClr val="lt1"/>
-          </a:fontRef>
-        </p:style>
-        <p:txBody>
-          <a:bodyPr rtlCol="0" anchor="ctr" wrap="square" lIns="73152" rIns="73152" tIns="36576" bIns="36576"/>
-          <a:lstStyle/>
-          <a:p>
-            <a:pPr algn="l">
-              <a:spcAft>
-                <a:spcPts val="0"/>
-              </a:spcAft>
-              <a:defRPr sz="1400" b="0">
-                <a:solidFill>
-                  <a:srgbClr val="122C4E"/>
-                </a:solidFill>
-                <a:latin typeface="DejaVu Sans Mono"/>
-              </a:defRPr>
-            </a:pPr>
-            <a:r>
-              <a:t>파일 생성: mkdir -p ~/ros2_curri/agv_ws/src/agv_description/curriculum_stages/M07</a:t>
-            </a:r>
-            <a:br/>
-            <a:r>
-              <a:t>파일 열기: nano ~/ros2_curri/agv_ws/src/agv_description/curriculum_stages/M07/model.sdf</a:t>
-            </a:r>
-          </a:p>
-        </p:txBody>
-      </p:sp>
-      <p:sp>
-        <p:nvSpPr>
-          <p:cNvPr id="9" name="Rectangle 8"/>
-          <p:cNvSpPr/>
-          <p:nvPr/>
-        </p:nvSpPr>
-        <p:spPr>
-          <a:xfrm>
-            <a:off x="658368" y="2706624"/>
-            <a:ext cx="10972800" cy="3364992"/>
-          </a:xfrm>
-          <a:prstGeom prst="rect">
+            <a:off x="676656" y="2871216"/>
+            <a:ext cx="10835640" cy="2331720"/>
+          </a:xfrm>
+          <a:prstGeom prst="roundRect">
             <a:avLst/>
           </a:prstGeom>
           <a:solidFill>
@@ -6504,14 +6754,14 @@
           </a:fontRef>
         </p:style>
         <p:txBody>
-          <a:bodyPr rtlCol="0" anchor="ctr" wrap="square" lIns="164592" rIns="164592" tIns="109728" bIns="36576"/>
+          <a:bodyPr rtlCol="0" anchor="ctr" wrap="square" lIns="73152" rIns="73152" tIns="36576" bIns="36576"/>
           <a:lstStyle/>
           <a:p>
             <a:pPr algn="l">
               <a:spcAft>
                 <a:spcPts val="0"/>
               </a:spcAft>
-              <a:defRPr sz="1400" b="0">
+              <a:defRPr sz="1600" b="0">
                 <a:solidFill>
                   <a:srgbClr val="FFFFFF"/>
                 </a:solidFill>
@@ -6519,51 +6769,7 @@
               </a:defRPr>
             </a:pPr>
             <a:r>
-              <a:t>      &lt;/inertial&gt;</a:t>
-            </a:r>
-            <a:br/>
-            <a:r>
-              <a:t>      &lt;visual name="body"&gt;</a:t>
-            </a:r>
-            <a:br/>
-            <a:r>
-              <a:t>        &lt;geometry&gt;</a:t>
-            </a:r>
-            <a:br/>
-            <a:r>
-              <a:t>          &lt;box&gt;</a:t>
-            </a:r>
-            <a:br/>
-            <a:r>
-              <a:t>            &lt;size&gt;0.60 0.42 0.16&lt;/size&gt;</a:t>
-            </a:r>
-            <a:br/>
-            <a:r>
-              <a:t>          &lt;/box&gt;</a:t>
-            </a:r>
-            <a:br/>
-            <a:r>
-              <a:t>        &lt;/geometry&gt;</a:t>
-            </a:r>
-            <a:br/>
-            <a:r>
-              <a:t>      &lt;/visual&gt;</a:t>
-            </a:r>
-            <a:br/>
-            <a:r>
-              <a:t>      &lt;collision name="body_collision"&gt;</a:t>
-            </a:r>
-            <a:br/>
-            <a:r>
-              <a:t>        &lt;geometry&gt;</a:t>
-            </a:r>
-            <a:br/>
-            <a:r>
-              <a:t>          &lt;box&gt;</a:t>
-            </a:r>
-            <a:br/>
-            <a:r>
-              <a:t>            &lt;size&gt;0.60 0.42 0.16&lt;/size&gt;</a:t>
+              <a:t>rg -n '&lt;mass&gt;|&lt;inertia&gt;|&lt;collision&gt;|&lt;friction&gt;' src/agv_description/curriculum_stages/M07/model.sdf</a:t>
             </a:r>
           </a:p>
         </p:txBody>
@@ -6576,8 +6782,8 @@
         </p:nvSpPr>
         <p:spPr>
           <a:xfrm>
-            <a:off x="749808" y="6181344"/>
-            <a:ext cx="10789920" cy="201168"/>
+            <a:off x="768096" y="5468112"/>
+            <a:ext cx="1143000" cy="256032"/>
           </a:xfrm>
           <a:prstGeom prst="rect">
             <a:avLst/>
@@ -6594,15 +6800,54 @@
               <a:spcAft>
                 <a:spcPts val="0"/>
               </a:spcAft>
-              <a:defRPr sz="1000" b="0">
-                <a:solidFill>
-                  <a:srgbClr val="5C6672"/>
-                </a:solidFill>
-                <a:latin typeface="Noto Sans CJK KR"/>
-              </a:defRPr>
-            </a:pPr>
-            <a:r>
-              <a:t>파일 전체 2/11 · 이 슬라이드 다음에 같은 파일의 나머지 줄이 이어집니다.</a:t>
+              <a:defRPr sz="1800" b="1">
+                <a:solidFill>
+                  <a:srgbClr val="2A8B5A"/>
+                </a:solidFill>
+                <a:latin typeface="Noto Sans CJK KR"/>
+              </a:defRPr>
+            </a:pPr>
+            <a:r>
+              <a:t>확인</a:t>
+            </a:r>
+          </a:p>
+        </p:txBody>
+      </p:sp>
+      <p:sp>
+        <p:nvSpPr>
+          <p:cNvPr id="11" name="TextBox 10"/>
+          <p:cNvSpPr txBox="1"/>
+          <p:nvPr/>
+        </p:nvSpPr>
+        <p:spPr>
+          <a:xfrm>
+            <a:off x="768096" y="5742432"/>
+            <a:ext cx="10561320" cy="347472"/>
+          </a:xfrm>
+          <a:prstGeom prst="rect">
+            <a:avLst/>
+          </a:prstGeom>
+          <a:noFill/>
+        </p:spPr>
+        <p:txBody>
+          <a:bodyPr wrap="square" lIns="73152" rIns="73152" tIns="36576" bIns="36576">
+            <a:spAutoFit/>
+          </a:bodyPr>
+          <a:lstStyle/>
+          <a:p>
+            <a:pPr algn="l">
+              <a:spcAft>
+                <a:spcPts val="0"/>
+              </a:spcAft>
+              <a:defRPr sz="1800" b="0">
+                <a:solidFill>
+                  <a:srgbClr val="122C4E"/>
+                </a:solidFill>
+                <a:latin typeface="Noto Sans CJK KR"/>
+              </a:defRPr>
+            </a:pPr>
+            <a:r>
+              <a:t>명령의 출력에서 topic·frame·파일 이름 또는 성공 메시지를 찾으면 이 단계가 완료됩니다.</a:t>
             </a:r>
           </a:p>
         </p:txBody>
@@ -6659,7 +6904,7 @@
               </a:defRPr>
             </a:pPr>
             <a:r>
-              <a:t>파일을 계속 작성하고 저장한다 (3/11)</a:t>
+              <a:t>파일을 새로 만들고 저장한다 (1/11)</a:t>
             </a:r>
           </a:p>
         </p:txBody>
@@ -6834,7 +7079,7 @@
               </a:defRPr>
             </a:pPr>
             <a:r>
-              <a:t>현재 단계 5/14    |    현재 폴더 ~/ros2_curri/agv_ws    |    현재 터미널</a:t>
+              <a:t>현재 단계 3/14    |    현재 폴더 ~/ros2_curri/agv_ws    |    현재 터미널</a:t>
             </a:r>
           </a:p>
         </p:txBody>
@@ -6993,51 +7238,51 @@
               </a:defRPr>
             </a:pPr>
             <a:r>
-              <a:t>          &lt;/box&gt;</a:t>
+              <a:t>&lt;?xml version="1.0" ?&gt;</a:t>
             </a:r>
             <a:br/>
             <a:r>
-              <a:t>        &lt;/geometry&gt;</a:t>
+              <a:t>&lt;sdf version="1.10"&gt;</a:t>
             </a:r>
             <a:br/>
             <a:r>
-              <a:t>      &lt;/collision&gt;</a:t>
+              <a:t>  &lt;model name="agv"&gt;</a:t>
             </a:r>
             <a:br/>
             <a:r>
-              <a:t>    &lt;/link&gt;</a:t>
+              <a:t>    &lt;link name="base_link"&gt;</a:t>
             </a:r>
             <a:br/>
             <a:r>
-              <a:t>    &lt;link name="left_wheel_link"&gt;</a:t>
+              <a:t>      &lt;pose&gt;0 0 0.16 0 0 0&lt;/pose&gt;</a:t>
             </a:r>
             <a:br/>
             <a:r>
-              <a:t>      &lt;pose relative_to="base_link"&gt;0 0.19 -0.08 1.5708 0 0&lt;/pose&gt;</a:t>
+              <a:t>      &lt;inertial&gt;</a:t>
             </a:r>
             <a:br/>
             <a:r>
-              <a:t>      &lt;inertial&gt;</a:t>
+              <a:t>        &lt;mass&gt;12.0&lt;/mass&gt;</a:t>
             </a:r>
             <a:br/>
             <a:r>
-              <a:t>        &lt;mass&gt;0.6&lt;/mass&gt;</a:t>
+              <a:t>        &lt;inertia&gt;</a:t>
             </a:r>
             <a:br/>
             <a:r>
-              <a:t>        &lt;inertia&gt;</a:t>
+              <a:t>          &lt;ixx&gt;0.20&lt;/ixx&gt;</a:t>
             </a:r>
             <a:br/>
             <a:r>
-              <a:t>          &lt;ixx&gt;0.002&lt;/ixx&gt;</a:t>
+              <a:t>          &lt;iyy&gt;0.40&lt;/iyy&gt;</a:t>
             </a:r>
             <a:br/>
             <a:r>
-              <a:t>          &lt;iyy&gt;0.002&lt;/iyy&gt;</a:t>
+              <a:t>          &lt;izz&gt;0.50&lt;/izz&gt;</a:t>
             </a:r>
             <a:br/>
             <a:r>
-              <a:t>          &lt;izz&gt;0.001&lt;/izz&gt;</a:t>
+              <a:t>        &lt;/inertia&gt;</a:t>
             </a:r>
           </a:p>
         </p:txBody>
@@ -7076,7 +7321,7 @@
               </a:defRPr>
             </a:pPr>
             <a:r>
-              <a:t>파일 전체 3/11 · 이 슬라이드 다음에 같은 파일의 나머지 줄이 이어집니다.</a:t>
+              <a:t>파일 전체 1/11 · 이 슬라이드 다음에 같은 파일의 나머지 줄이 이어집니다.</a:t>
             </a:r>
           </a:p>
         </p:txBody>
@@ -7133,7 +7378,7 @@
               </a:defRPr>
             </a:pPr>
             <a:r>
-              <a:t>파일을 계속 작성하고 저장한다 (4/11)</a:t>
+              <a:t>파일을 계속 작성하고 저장한다 (2/11)</a:t>
             </a:r>
           </a:p>
         </p:txBody>
@@ -7308,7 +7553,7 @@
               </a:defRPr>
             </a:pPr>
             <a:r>
-              <a:t>현재 단계 6/14    |    현재 폴더 ~/ros2_curri/agv_ws    |    현재 터미널</a:t>
+              <a:t>현재 단계 4/14    |    현재 폴더 ~/ros2_curri/agv_ws    |    현재 터미널</a:t>
             </a:r>
           </a:p>
         </p:txBody>
@@ -7467,51 +7712,51 @@
               </a:defRPr>
             </a:pPr>
             <a:r>
-              <a:t>        &lt;/inertia&gt;</a:t>
+              <a:t>      &lt;/inertial&gt;</a:t>
             </a:r>
             <a:br/>
             <a:r>
-              <a:t>      &lt;/inertial&gt;</a:t>
+              <a:t>      &lt;visual name="body"&gt;</a:t>
             </a:r>
             <a:br/>
             <a:r>
-              <a:t>      &lt;visual name="wheel"&gt;</a:t>
+              <a:t>        &lt;geometry&gt;</a:t>
             </a:r>
             <a:br/>
             <a:r>
+              <a:t>          &lt;box&gt;</a:t>
+            </a:r>
+            <a:br/>
+            <a:r>
+              <a:t>            &lt;size&gt;0.60 0.42 0.16&lt;/size&gt;</a:t>
+            </a:r>
+            <a:br/>
+            <a:r>
+              <a:t>          &lt;/box&gt;</a:t>
+            </a:r>
+            <a:br/>
+            <a:r>
+              <a:t>        &lt;/geometry&gt;</a:t>
+            </a:r>
+            <a:br/>
+            <a:r>
+              <a:t>      &lt;/visual&gt;</a:t>
+            </a:r>
+            <a:br/>
+            <a:r>
+              <a:t>      &lt;collision name="body_collision"&gt;</a:t>
+            </a:r>
+            <a:br/>
+            <a:r>
               <a:t>        &lt;geometry&gt;</a:t>
             </a:r>
             <a:br/>
             <a:r>
-              <a:t>          &lt;cylinder&gt;</a:t>
+              <a:t>          &lt;box&gt;</a:t>
             </a:r>
             <a:br/>
             <a:r>
-              <a:t>            &lt;radius&gt;0.08&lt;/radius&gt;</a:t>
-            </a:r>
-            <a:br/>
-            <a:r>
-              <a:t>            &lt;length&gt;0.05&lt;/length&gt;</a:t>
-            </a:r>
-            <a:br/>
-            <a:r>
-              <a:t>          &lt;/cylinder&gt;</a:t>
-            </a:r>
-            <a:br/>
-            <a:r>
-              <a:t>        &lt;/geometry&gt;</a:t>
-            </a:r>
-            <a:br/>
-            <a:r>
-              <a:t>      &lt;/visual&gt;</a:t>
-            </a:r>
-            <a:br/>
-            <a:r>
-              <a:t>      &lt;collision name="wheel_collision"&gt;</a:t>
-            </a:r>
-            <a:br/>
-            <a:r>
-              <a:t>        &lt;geometry&gt;</a:t>
+              <a:t>            &lt;size&gt;0.60 0.42 0.16&lt;/size&gt;</a:t>
             </a:r>
           </a:p>
         </p:txBody>
@@ -7550,7 +7795,7 @@
               </a:defRPr>
             </a:pPr>
             <a:r>
-              <a:t>파일 전체 4/11 · 이 슬라이드 다음에 같은 파일의 나머지 줄이 이어집니다.</a:t>
+              <a:t>파일 전체 2/11 · 이 슬라이드 다음에 같은 파일의 나머지 줄이 이어집니다.</a:t>
             </a:r>
           </a:p>
         </p:txBody>
@@ -7607,7 +7852,7 @@
               </a:defRPr>
             </a:pPr>
             <a:r>
-              <a:t>파일을 계속 작성하고 저장한다 (5/11)</a:t>
+              <a:t>파일을 계속 작성하고 저장한다 (3/11)</a:t>
             </a:r>
           </a:p>
         </p:txBody>
@@ -7782,7 +8027,7 @@
               </a:defRPr>
             </a:pPr>
             <a:r>
-              <a:t>현재 단계 7/14    |    현재 폴더 ~/ros2_curri/agv_ws    |    현재 터미널</a:t>
+              <a:t>현재 단계 5/14    |    현재 폴더 ~/ros2_curri/agv_ws    |    현재 터미널</a:t>
             </a:r>
           </a:p>
         </p:txBody>
@@ -7941,51 +8186,51 @@
               </a:defRPr>
             </a:pPr>
             <a:r>
-              <a:t>          &lt;cylinder&gt;</a:t>
+              <a:t>          &lt;/box&gt;</a:t>
             </a:r>
             <a:br/>
             <a:r>
-              <a:t>            &lt;radius&gt;0.08&lt;/radius&gt;</a:t>
+              <a:t>        &lt;/geometry&gt;</a:t>
             </a:r>
             <a:br/>
             <a:r>
-              <a:t>            &lt;length&gt;0.05&lt;/length&gt;</a:t>
+              <a:t>      &lt;/collision&gt;</a:t>
             </a:r>
             <a:br/>
             <a:r>
-              <a:t>          &lt;/cylinder&gt;</a:t>
+              <a:t>    &lt;/link&gt;</a:t>
             </a:r>
             <a:br/>
             <a:r>
-              <a:t>        &lt;/geometry&gt;</a:t>
+              <a:t>    &lt;link name="left_wheel_link"&gt;</a:t>
             </a:r>
             <a:br/>
             <a:r>
-              <a:t>        &lt;surface&gt;</a:t>
+              <a:t>      &lt;pose relative_to="base_link"&gt;0 0.19 -0.08 1.5708 0 0&lt;/pose&gt;</a:t>
             </a:r>
             <a:br/>
             <a:r>
-              <a:t>          &lt;friction&gt;</a:t>
+              <a:t>      &lt;inertial&gt;</a:t>
             </a:r>
             <a:br/>
             <a:r>
-              <a:t>            &lt;ode&gt;</a:t>
+              <a:t>        &lt;mass&gt;0.6&lt;/mass&gt;</a:t>
             </a:r>
             <a:br/>
             <a:r>
-              <a:t>              &lt;mu&gt;1.0&lt;/mu&gt;</a:t>
+              <a:t>        &lt;inertia&gt;</a:t>
             </a:r>
             <a:br/>
             <a:r>
-              <a:t>              &lt;mu2&gt;1.0&lt;/mu2&gt;</a:t>
+              <a:t>          &lt;ixx&gt;0.002&lt;/ixx&gt;</a:t>
             </a:r>
             <a:br/>
             <a:r>
-              <a:t>            &lt;/ode&gt;</a:t>
+              <a:t>          &lt;iyy&gt;0.002&lt;/iyy&gt;</a:t>
             </a:r>
             <a:br/>
             <a:r>
-              <a:t>          &lt;/friction&gt;</a:t>
+              <a:t>          &lt;izz&gt;0.001&lt;/izz&gt;</a:t>
             </a:r>
           </a:p>
         </p:txBody>
@@ -8024,7 +8269,7 @@
               </a:defRPr>
             </a:pPr>
             <a:r>
-              <a:t>파일 전체 5/11 · 이 슬라이드 다음에 같은 파일의 나머지 줄이 이어집니다.</a:t>
+              <a:t>파일 전체 3/11 · 이 슬라이드 다음에 같은 파일의 나머지 줄이 이어집니다.</a:t>
             </a:r>
           </a:p>
         </p:txBody>
@@ -8081,7 +8326,7 @@
               </a:defRPr>
             </a:pPr>
             <a:r>
-              <a:t>파일을 계속 작성하고 저장한다 (6/11)</a:t>
+              <a:t>파일을 계속 작성하고 저장한다 (4/11)</a:t>
             </a:r>
           </a:p>
         </p:txBody>
@@ -8256,7 +8501,7 @@
               </a:defRPr>
             </a:pPr>
             <a:r>
-              <a:t>현재 단계 8/14    |    현재 폴더 ~/ros2_curri/agv_ws    |    현재 터미널</a:t>
+              <a:t>현재 단계 6/14    |    현재 폴더 ~/ros2_curri/agv_ws    |    현재 터미널</a:t>
             </a:r>
           </a:p>
         </p:txBody>
@@ -8415,51 +8660,51 @@
               </a:defRPr>
             </a:pPr>
             <a:r>
-              <a:t>        &lt;/surface&gt;</a:t>
+              <a:t>        &lt;/inertia&gt;</a:t>
             </a:r>
             <a:br/>
             <a:r>
-              <a:t>      &lt;/collision&gt;</a:t>
+              <a:t>      &lt;/inertial&gt;</a:t>
             </a:r>
             <a:br/>
             <a:r>
-              <a:t>    &lt;/link&gt;</a:t>
+              <a:t>      &lt;visual name="wheel"&gt;</a:t>
             </a:r>
             <a:br/>
             <a:r>
-              <a:t>    &lt;link name="right_wheel_link"&gt;</a:t>
+              <a:t>        &lt;geometry&gt;</a:t>
             </a:r>
             <a:br/>
             <a:r>
-              <a:t>      &lt;pose relative_to="base_link"&gt;0 -0.19 -0.08 1.5708 0 0&lt;/pose&gt;</a:t>
+              <a:t>          &lt;cylinder&gt;</a:t>
             </a:r>
             <a:br/>
             <a:r>
-              <a:t>      &lt;inertial&gt;</a:t>
+              <a:t>            &lt;radius&gt;0.08&lt;/radius&gt;</a:t>
             </a:r>
             <a:br/>
             <a:r>
-              <a:t>        &lt;mass&gt;0.6&lt;/mass&gt;</a:t>
+              <a:t>            &lt;length&gt;0.05&lt;/length&gt;</a:t>
             </a:r>
             <a:br/>
             <a:r>
-              <a:t>        &lt;inertia&gt;</a:t>
+              <a:t>          &lt;/cylinder&gt;</a:t>
             </a:r>
             <a:br/>
             <a:r>
-              <a:t>          &lt;ixx&gt;0.002&lt;/ixx&gt;</a:t>
+              <a:t>        &lt;/geometry&gt;</a:t>
             </a:r>
             <a:br/>
             <a:r>
-              <a:t>          &lt;iyy&gt;0.002&lt;/iyy&gt;</a:t>
+              <a:t>      &lt;/visual&gt;</a:t>
             </a:r>
             <a:br/>
             <a:r>
-              <a:t>          &lt;izz&gt;0.001&lt;/izz&gt;</a:t>
+              <a:t>      &lt;collision name="wheel_collision"&gt;</a:t>
             </a:r>
             <a:br/>
             <a:r>
-              <a:t>        &lt;/inertia&gt;</a:t>
+              <a:t>        &lt;geometry&gt;</a:t>
             </a:r>
           </a:p>
         </p:txBody>
@@ -8498,7 +8743,7 @@
               </a:defRPr>
             </a:pPr>
             <a:r>
-              <a:t>파일 전체 6/11 · 이 슬라이드 다음에 같은 파일의 나머지 줄이 이어집니다.</a:t>
+              <a:t>파일 전체 4/11 · 이 슬라이드 다음에 같은 파일의 나머지 줄이 이어집니다.</a:t>
             </a:r>
           </a:p>
         </p:txBody>
@@ -8555,7 +8800,7 @@
               </a:defRPr>
             </a:pPr>
             <a:r>
-              <a:t>파일을 계속 작성하고 저장한다 (7/11)</a:t>
+              <a:t>파일을 계속 작성하고 저장한다 (5/11)</a:t>
             </a:r>
           </a:p>
         </p:txBody>
@@ -8730,7 +8975,7 @@
               </a:defRPr>
             </a:pPr>
             <a:r>
-              <a:t>현재 단계 9/14    |    현재 폴더 ~/ros2_curri/agv_ws    |    현재 터미널</a:t>
+              <a:t>현재 단계 7/14    |    현재 폴더 ~/ros2_curri/agv_ws    |    현재 터미널</a:t>
             </a:r>
           </a:p>
         </p:txBody>
@@ -8889,51 +9134,51 @@
               </a:defRPr>
             </a:pPr>
             <a:r>
-              <a:t>      &lt;/inertial&gt;</a:t>
+              <a:t>          &lt;cylinder&gt;</a:t>
             </a:r>
             <a:br/>
             <a:r>
-              <a:t>      &lt;visual name="wheel"&gt;</a:t>
+              <a:t>            &lt;radius&gt;0.08&lt;/radius&gt;</a:t>
             </a:r>
             <a:br/>
             <a:r>
-              <a:t>        &lt;geometry&gt;</a:t>
+              <a:t>            &lt;length&gt;0.05&lt;/length&gt;</a:t>
             </a:r>
             <a:br/>
             <a:r>
-              <a:t>          &lt;cylinder&gt;</a:t>
+              <a:t>          &lt;/cylinder&gt;</a:t>
             </a:r>
             <a:br/>
             <a:r>
-              <a:t>            &lt;radius&gt;0.08&lt;/radius&gt;</a:t>
+              <a:t>        &lt;/geometry&gt;</a:t>
             </a:r>
             <a:br/>
             <a:r>
-              <a:t>            &lt;length&gt;0.05&lt;/length&gt;</a:t>
+              <a:t>        &lt;surface&gt;</a:t>
             </a:r>
             <a:br/>
             <a:r>
-              <a:t>          &lt;/cylinder&gt;</a:t>
+              <a:t>          &lt;friction&gt;</a:t>
             </a:r>
             <a:br/>
             <a:r>
-              <a:t>        &lt;/geometry&gt;</a:t>
+              <a:t>            &lt;ode&gt;</a:t>
             </a:r>
             <a:br/>
             <a:r>
-              <a:t>      &lt;/visual&gt;</a:t>
+              <a:t>              &lt;mu&gt;1.0&lt;/mu&gt;</a:t>
             </a:r>
             <a:br/>
             <a:r>
-              <a:t>      &lt;collision name="wheel_collision"&gt;</a:t>
+              <a:t>              &lt;mu2&gt;1.0&lt;/mu2&gt;</a:t>
             </a:r>
             <a:br/>
             <a:r>
-              <a:t>        &lt;geometry&gt;</a:t>
+              <a:t>            &lt;/ode&gt;</a:t>
             </a:r>
             <a:br/>
             <a:r>
-              <a:t>          &lt;cylinder&gt;</a:t>
+              <a:t>          &lt;/friction&gt;</a:t>
             </a:r>
           </a:p>
         </p:txBody>
@@ -8972,7 +9217,7 @@
               </a:defRPr>
             </a:pPr>
             <a:r>
-              <a:t>파일 전체 7/11 · 이 슬라이드 다음에 같은 파일의 나머지 줄이 이어집니다.</a:t>
+              <a:t>파일 전체 5/11 · 이 슬라이드 다음에 같은 파일의 나머지 줄이 이어집니다.</a:t>
             </a:r>
           </a:p>
         </p:txBody>
@@ -9029,7 +9274,7 @@
               </a:defRPr>
             </a:pPr>
             <a:r>
-              <a:t>파일을 계속 작성하고 저장한다 (8/11)</a:t>
+              <a:t>파일을 계속 작성하고 저장한다 (6/11)</a:t>
             </a:r>
           </a:p>
         </p:txBody>
@@ -9204,7 +9449,7 @@
               </a:defRPr>
             </a:pPr>
             <a:r>
-              <a:t>현재 단계 10/14    |    현재 폴더 ~/ros2_curri/agv_ws    |    현재 터미널</a:t>
+              <a:t>현재 단계 8/14    |    현재 폴더 ~/ros2_curri/agv_ws    |    현재 터미널</a:t>
             </a:r>
           </a:p>
         </p:txBody>
@@ -9363,51 +9608,51 @@
               </a:defRPr>
             </a:pPr>
             <a:r>
-              <a:t>            &lt;radius&gt;0.08&lt;/radius&gt;</a:t>
+              <a:t>        &lt;/surface&gt;</a:t>
             </a:r>
             <a:br/>
             <a:r>
-              <a:t>            &lt;length&gt;0.05&lt;/length&gt;</a:t>
+              <a:t>      &lt;/collision&gt;</a:t>
             </a:r>
             <a:br/>
             <a:r>
-              <a:t>          &lt;/cylinder&gt;</a:t>
+              <a:t>    &lt;/link&gt;</a:t>
             </a:r>
             <a:br/>
             <a:r>
-              <a:t>        &lt;/geometry&gt;</a:t>
+              <a:t>    &lt;link name="right_wheel_link"&gt;</a:t>
             </a:r>
             <a:br/>
             <a:r>
-              <a:t>        &lt;surface&gt;</a:t>
+              <a:t>      &lt;pose relative_to="base_link"&gt;0 -0.19 -0.08 1.5708 0 0&lt;/pose&gt;</a:t>
             </a:r>
             <a:br/>
             <a:r>
-              <a:t>          &lt;friction&gt;</a:t>
+              <a:t>      &lt;inertial&gt;</a:t>
             </a:r>
             <a:br/>
             <a:r>
-              <a:t>            &lt;ode&gt;</a:t>
+              <a:t>        &lt;mass&gt;0.6&lt;/mass&gt;</a:t>
             </a:r>
             <a:br/>
             <a:r>
-              <a:t>              &lt;mu&gt;1.0&lt;/mu&gt;</a:t>
+              <a:t>        &lt;inertia&gt;</a:t>
             </a:r>
             <a:br/>
             <a:r>
-              <a:t>              &lt;mu2&gt;1.0&lt;/mu2&gt;</a:t>
+              <a:t>          &lt;ixx&gt;0.002&lt;/ixx&gt;</a:t>
             </a:r>
             <a:br/>
             <a:r>
-              <a:t>            &lt;/ode&gt;</a:t>
+              <a:t>          &lt;iyy&gt;0.002&lt;/iyy&gt;</a:t>
             </a:r>
             <a:br/>
             <a:r>
-              <a:t>          &lt;/friction&gt;</a:t>
+              <a:t>          &lt;izz&gt;0.001&lt;/izz&gt;</a:t>
             </a:r>
             <a:br/>
             <a:r>
-              <a:t>        &lt;/surface&gt;</a:t>
+              <a:t>        &lt;/inertia&gt;</a:t>
             </a:r>
           </a:p>
         </p:txBody>
@@ -9446,7 +9691,7 @@
               </a:defRPr>
             </a:pPr>
             <a:r>
-              <a:t>파일 전체 8/11 · 이 슬라이드 다음에 같은 파일의 나머지 줄이 이어집니다.</a:t>
+              <a:t>파일 전체 6/11 · 이 슬라이드 다음에 같은 파일의 나머지 줄이 이어집니다.</a:t>
             </a:r>
           </a:p>
         </p:txBody>
@@ -9503,7 +9748,7 @@
               </a:defRPr>
             </a:pPr>
             <a:r>
-              <a:t>파일을 계속 작성하고 저장한다 (9/11)</a:t>
+              <a:t>파일을 계속 작성하고 저장한다 (7/11)</a:t>
             </a:r>
           </a:p>
         </p:txBody>
@@ -9678,7 +9923,7 @@
               </a:defRPr>
             </a:pPr>
             <a:r>
-              <a:t>현재 단계 11/14    |    현재 폴더 ~/ros2_curri/agv_ws    |    현재 터미널</a:t>
+              <a:t>현재 단계 9/14    |    현재 폴더 ~/ros2_curri/agv_ws    |    현재 터미널</a:t>
             </a:r>
           </a:p>
         </p:txBody>
@@ -9837,51 +10082,51 @@
               </a:defRPr>
             </a:pPr>
             <a:r>
-              <a:t>      &lt;/collision&gt;</a:t>
+              <a:t>      &lt;/inertial&gt;</a:t>
             </a:r>
             <a:br/>
             <a:r>
-              <a:t>    &lt;/link&gt;</a:t>
+              <a:t>      &lt;visual name="wheel"&gt;</a:t>
             </a:r>
             <a:br/>
             <a:r>
-              <a:t>    &lt;joint name="left_wheel_joint" type="revolute"&gt;</a:t>
+              <a:t>        &lt;geometry&gt;</a:t>
             </a:r>
             <a:br/>
             <a:r>
-              <a:t>      &lt;parent&gt;base_link&lt;/parent&gt;</a:t>
+              <a:t>          &lt;cylinder&gt;</a:t>
             </a:r>
             <a:br/>
             <a:r>
-              <a:t>      &lt;child&gt;left_wheel_link&lt;/child&gt;</a:t>
+              <a:t>            &lt;radius&gt;0.08&lt;/radius&gt;</a:t>
             </a:r>
             <a:br/>
             <a:r>
-              <a:t>      &lt;axis&gt;</a:t>
+              <a:t>            &lt;length&gt;0.05&lt;/length&gt;</a:t>
             </a:r>
             <a:br/>
             <a:r>
-              <a:t>        &lt;xyz&gt;0 1 0&lt;/xyz&gt;</a:t>
+              <a:t>          &lt;/cylinder&gt;</a:t>
             </a:r>
             <a:br/>
             <a:r>
-              <a:t>        &lt;limit&gt;</a:t>
+              <a:t>        &lt;/geometry&gt;</a:t>
             </a:r>
             <a:br/>
             <a:r>
-              <a:t>          &lt;lower&gt;-1e16&lt;/lower&gt;</a:t>
+              <a:t>      &lt;/visual&gt;</a:t>
             </a:r>
             <a:br/>
             <a:r>
-              <a:t>          &lt;upper&gt;1e16&lt;/upper&gt;</a:t>
+              <a:t>      &lt;collision name="wheel_collision"&gt;</a:t>
             </a:r>
             <a:br/>
             <a:r>
-              <a:t>        &lt;/limit&gt;</a:t>
+              <a:t>        &lt;geometry&gt;</a:t>
             </a:r>
             <a:br/>
             <a:r>
-              <a:t>      &lt;/axis&gt;</a:t>
+              <a:t>          &lt;cylinder&gt;</a:t>
             </a:r>
           </a:p>
         </p:txBody>
@@ -9920,7 +10165,7 @@
               </a:defRPr>
             </a:pPr>
             <a:r>
-              <a:t>파일 전체 9/11 · 이 슬라이드 다음에 같은 파일의 나머지 줄이 이어집니다.</a:t>
+              <a:t>파일 전체 7/11 · 이 슬라이드 다음에 같은 파일의 나머지 줄이 이어집니다.</a:t>
             </a:r>
           </a:p>
         </p:txBody>
@@ -9977,7 +10222,7 @@
               </a:defRPr>
             </a:pPr>
             <a:r>
-              <a:t>파일을 계속 작성하고 저장한다 (10/11)</a:t>
+              <a:t>파일을 계속 작성하고 저장한다 (8/11)</a:t>
             </a:r>
           </a:p>
         </p:txBody>
@@ -10152,7 +10397,7 @@
               </a:defRPr>
             </a:pPr>
             <a:r>
-              <a:t>현재 단계 12/14    |    현재 폴더 ~/ros2_curri/agv_ws    |    현재 터미널</a:t>
+              <a:t>현재 단계 10/14    |    현재 폴더 ~/ros2_curri/agv_ws    |    현재 터미널</a:t>
             </a:r>
           </a:p>
         </p:txBody>
@@ -10311,51 +10556,51 @@
               </a:defRPr>
             </a:pPr>
             <a:r>
-              <a:t>    &lt;/joint&gt;</a:t>
+              <a:t>            &lt;radius&gt;0.08&lt;/radius&gt;</a:t>
             </a:r>
             <a:br/>
             <a:r>
-              <a:t>    &lt;joint name="right_wheel_joint" type="revolute"&gt;</a:t>
+              <a:t>            &lt;length&gt;0.05&lt;/length&gt;</a:t>
             </a:r>
             <a:br/>
             <a:r>
-              <a:t>      &lt;parent&gt;base_link&lt;/parent&gt;</a:t>
+              <a:t>          &lt;/cylinder&gt;</a:t>
             </a:r>
             <a:br/>
             <a:r>
-              <a:t>      &lt;child&gt;right_wheel_link&lt;/child&gt;</a:t>
+              <a:t>        &lt;/geometry&gt;</a:t>
             </a:r>
             <a:br/>
             <a:r>
-              <a:t>      &lt;axis&gt;</a:t>
+              <a:t>        &lt;surface&gt;</a:t>
             </a:r>
             <a:br/>
             <a:r>
-              <a:t>        &lt;xyz&gt;0 1 0&lt;/xyz&gt;</a:t>
+              <a:t>          &lt;friction&gt;</a:t>
             </a:r>
             <a:br/>
             <a:r>
-              <a:t>        &lt;limit&gt;</a:t>
+              <a:t>            &lt;ode&gt;</a:t>
             </a:r>
             <a:br/>
             <a:r>
-              <a:t>          &lt;lower&gt;-1e16&lt;/lower&gt;</a:t>
+              <a:t>              &lt;mu&gt;1.0&lt;/mu&gt;</a:t>
             </a:r>
             <a:br/>
             <a:r>
-              <a:t>          &lt;upper&gt;1e16&lt;/upper&gt;</a:t>
+              <a:t>              &lt;mu2&gt;1.0&lt;/mu2&gt;</a:t>
             </a:r>
             <a:br/>
             <a:r>
-              <a:t>        &lt;/limit&gt;</a:t>
+              <a:t>            &lt;/ode&gt;</a:t>
             </a:r>
             <a:br/>
             <a:r>
-              <a:t>      &lt;/axis&gt;</a:t>
+              <a:t>          &lt;/friction&gt;</a:t>
             </a:r>
             <a:br/>
             <a:r>
-              <a:t>    &lt;/joint&gt;</a:t>
+              <a:t>        &lt;/surface&gt;</a:t>
             </a:r>
           </a:p>
         </p:txBody>
@@ -10394,7 +10639,7 @@
               </a:defRPr>
             </a:pPr>
             <a:r>
-              <a:t>파일 전체 10/11 · 이 슬라이드 다음에 같은 파일의 나머지 줄이 이어집니다.</a:t>
+              <a:t>파일 전체 8/11 · 이 슬라이드 다음에 같은 파일의 나머지 줄이 이어집니다.</a:t>
             </a:r>
           </a:p>
         </p:txBody>
@@ -10451,7 +10696,7 @@
               </a:defRPr>
             </a:pPr>
             <a:r>
-              <a:t>파일을 계속 작성하고 저장한다 (11/11)</a:t>
+              <a:t>파일을 계속 작성하고 저장한다 (9/11)</a:t>
             </a:r>
           </a:p>
         </p:txBody>
@@ -10626,7 +10871,7 @@
               </a:defRPr>
             </a:pPr>
             <a:r>
-              <a:t>현재 단계 13/14    |    현재 폴더 ~/ros2_curri/agv_ws    |    현재 터미널</a:t>
+              <a:t>현재 단계 11/14    |    현재 폴더 ~/ros2_curri/agv_ws    |    현재 터미널</a:t>
             </a:r>
           </a:p>
         </p:txBody>
@@ -10785,11 +11030,51 @@
               </a:defRPr>
             </a:pPr>
             <a:r>
-              <a:t>  &lt;/model&gt;</a:t>
+              <a:t>      &lt;/collision&gt;</a:t>
             </a:r>
             <a:br/>
             <a:r>
-              <a:t>&lt;/sdf&gt;</a:t>
+              <a:t>    &lt;/link&gt;</a:t>
+            </a:r>
+            <a:br/>
+            <a:r>
+              <a:t>    &lt;joint name="left_wheel_joint" type="revolute"&gt;</a:t>
+            </a:r>
+            <a:br/>
+            <a:r>
+              <a:t>      &lt;parent&gt;base_link&lt;/parent&gt;</a:t>
+            </a:r>
+            <a:br/>
+            <a:r>
+              <a:t>      &lt;child&gt;left_wheel_link&lt;/child&gt;</a:t>
+            </a:r>
+            <a:br/>
+            <a:r>
+              <a:t>      &lt;axis&gt;</a:t>
+            </a:r>
+            <a:br/>
+            <a:r>
+              <a:t>        &lt;xyz&gt;0 1 0&lt;/xyz&gt;</a:t>
+            </a:r>
+            <a:br/>
+            <a:r>
+              <a:t>        &lt;limit&gt;</a:t>
+            </a:r>
+            <a:br/>
+            <a:r>
+              <a:t>          &lt;lower&gt;-1e16&lt;/lower&gt;</a:t>
+            </a:r>
+            <a:br/>
+            <a:r>
+              <a:t>          &lt;upper&gt;1e16&lt;/upper&gt;</a:t>
+            </a:r>
+            <a:br/>
+            <a:r>
+              <a:t>        &lt;/limit&gt;</a:t>
+            </a:r>
+            <a:br/>
+            <a:r>
+              <a:t>      &lt;/axis&gt;</a:t>
             </a:r>
           </a:p>
         </p:txBody>
@@ -10828,7 +11113,7 @@
               </a:defRPr>
             </a:pPr>
             <a:r>
-              <a:t>파일 전체 11/11 · 이 슬라이드 다음에 같은 파일의 나머지 줄이 이어집니다.</a:t>
+              <a:t>파일 전체 9/11 · 이 슬라이드 다음에 같은 파일의 나머지 줄이 이어집니다.</a:t>
             </a:r>
           </a:p>
         </p:txBody>
@@ -11346,7 +11631,7 @@
               </a:defRPr>
             </a:pPr>
             <a:r>
-              <a:t>build → source → run 순서로 실행한다</a:t>
+              <a:t>파일을 계속 작성하고 저장한다 (10/11)</a:t>
             </a:r>
           </a:p>
         </p:txBody>
@@ -11385,7 +11670,7 @@
               </a:defRPr>
             </a:pPr>
             <a:r>
-              <a:t>새 파일 또는 수정 파일은 build와 source 뒤에만 실행 이름·설정에 반영됩니다.</a:t>
+              <a:t>~/ros2_curri/agv_ws/src/agv_description/curriculum_stages/M07/model.sdf</a:t>
             </a:r>
           </a:p>
         </p:txBody>
@@ -11521,23 +11806,124 @@
               </a:defRPr>
             </a:pPr>
             <a:r>
-              <a:t>현재 단계 실행    |    현재 폴더 ~/ros2_curri/agv_ws    |    현재 터미널</a:t>
-            </a:r>
-          </a:p>
-        </p:txBody>
-      </p:sp>
-      <p:sp>
-        <p:nvSpPr>
-          <p:cNvPr id="7" name="Rounded Rectangle 6"/>
+              <a:t>현재 단계 12/14    |    현재 폴더 ~/ros2_curri/agv_ws    |    현재 터미널</a:t>
+            </a:r>
+          </a:p>
+        </p:txBody>
+      </p:sp>
+      <p:sp>
+        <p:nvSpPr>
+          <p:cNvPr id="7" name="TextBox 6"/>
+          <p:cNvSpPr txBox="1"/>
+          <p:nvPr/>
+        </p:nvSpPr>
+        <p:spPr>
+          <a:xfrm>
+            <a:off x="658368" y="1627632"/>
+            <a:ext cx="10972800" cy="256032"/>
+          </a:xfrm>
+          <a:prstGeom prst="rect">
+            <a:avLst/>
+          </a:prstGeom>
+          <a:noFill/>
+        </p:spPr>
+        <p:txBody>
+          <a:bodyPr wrap="square" lIns="73152" rIns="73152" tIns="36576" bIns="36576">
+            <a:spAutoFit/>
+          </a:bodyPr>
+          <a:lstStyle/>
+          <a:p>
+            <a:pPr algn="l">
+              <a:spcAft>
+                <a:spcPts val="0"/>
+              </a:spcAft>
+              <a:defRPr sz="1500" b="1">
+                <a:solidFill>
+                  <a:srgbClr val="122C4E"/>
+                </a:solidFill>
+                <a:latin typeface="Noto Sans CJK KR"/>
+              </a:defRPr>
+            </a:pPr>
+            <a:r>
+              <a:t>이번 단계: 파일의 전체 내용을 중간 생략 없이 작성합니다. 아래 줄 범위를 끝까지 입력하세요.</a:t>
+            </a:r>
+          </a:p>
+        </p:txBody>
+      </p:sp>
+      <p:sp>
+        <p:nvSpPr>
+          <p:cNvPr id="8" name="Rectangle 7"/>
           <p:cNvSpPr/>
           <p:nvPr/>
         </p:nvSpPr>
         <p:spPr>
           <a:xfrm>
-            <a:off x="658368" y="1700784"/>
-            <a:ext cx="10972800" cy="3182112"/>
-          </a:xfrm>
-          <a:prstGeom prst="roundRect">
+            <a:off x="658368" y="1956816"/>
+            <a:ext cx="10972800" cy="603504"/>
+          </a:xfrm>
+          <a:prstGeom prst="rect">
+            <a:avLst/>
+          </a:prstGeom>
+          <a:solidFill>
+            <a:srgbClr val="F4F7FB"/>
+          </a:solidFill>
+          <a:ln>
+            <a:solidFill>
+              <a:srgbClr val="F4F7FB"/>
+            </a:solidFill>
+          </a:ln>
+        </p:spPr>
+        <p:style>
+          <a:lnRef idx="1">
+            <a:schemeClr val="accent1"/>
+          </a:lnRef>
+          <a:fillRef idx="3">
+            <a:schemeClr val="accent1"/>
+          </a:fillRef>
+          <a:effectRef idx="2">
+            <a:schemeClr val="accent1"/>
+          </a:effectRef>
+          <a:fontRef idx="minor">
+            <a:schemeClr val="lt1"/>
+          </a:fontRef>
+        </p:style>
+        <p:txBody>
+          <a:bodyPr rtlCol="0" anchor="ctr" wrap="square" lIns="73152" rIns="73152" tIns="36576" bIns="36576"/>
+          <a:lstStyle/>
+          <a:p>
+            <a:pPr algn="l">
+              <a:spcAft>
+                <a:spcPts val="0"/>
+              </a:spcAft>
+              <a:defRPr sz="1400" b="0">
+                <a:solidFill>
+                  <a:srgbClr val="122C4E"/>
+                </a:solidFill>
+                <a:latin typeface="DejaVu Sans Mono"/>
+              </a:defRPr>
+            </a:pPr>
+            <a:r>
+              <a:t>파일 생성: mkdir -p ~/ros2_curri/agv_ws/src/agv_description/curriculum_stages/M07</a:t>
+            </a:r>
+            <a:br/>
+            <a:r>
+              <a:t>파일 열기: nano ~/ros2_curri/agv_ws/src/agv_description/curriculum_stages/M07/model.sdf</a:t>
+            </a:r>
+          </a:p>
+        </p:txBody>
+      </p:sp>
+      <p:sp>
+        <p:nvSpPr>
+          <p:cNvPr id="9" name="Rectangle 8"/>
+          <p:cNvSpPr/>
+          <p:nvPr/>
+        </p:nvSpPr>
+        <p:spPr>
+          <a:xfrm>
+            <a:off x="658368" y="2706624"/>
+            <a:ext cx="10972800" cy="3364992"/>
+          </a:xfrm>
+          <a:prstGeom prst="rect">
             <a:avLst/>
           </a:prstGeom>
           <a:solidFill>
@@ -11564,14 +11950,14 @@
           </a:fontRef>
         </p:style>
         <p:txBody>
-          <a:bodyPr rtlCol="0" anchor="ctr" wrap="square" lIns="73152" rIns="73152" tIns="36576" bIns="36576"/>
+          <a:bodyPr rtlCol="0" anchor="ctr" wrap="square" lIns="164592" rIns="164592" tIns="109728" bIns="36576"/>
           <a:lstStyle/>
           <a:p>
             <a:pPr algn="l">
               <a:spcAft>
                 <a:spcPts val="0"/>
               </a:spcAft>
-              <a:defRPr sz="1600" b="0">
+              <a:defRPr sz="1400" b="0">
                 <a:solidFill>
                   <a:srgbClr val="FFFFFF"/>
                 </a:solidFill>
@@ -11579,25 +11965,65 @@
               </a:defRPr>
             </a:pPr>
             <a:r>
-              <a:t>cd ~/ros2_curri/agv_ws</a:t>
+              <a:t>    &lt;/joint&gt;</a:t>
             </a:r>
             <a:br/>
             <a:r>
-              <a:t>gz sdf -k src/agv_description/curriculum_stages/M07/model.sdf</a:t>
-            </a:r>
-          </a:p>
-        </p:txBody>
-      </p:sp>
-      <p:sp>
-        <p:nvSpPr>
-          <p:cNvPr id="8" name="TextBox 7"/>
+              <a:t>    &lt;joint name="right_wheel_joint" type="revolute"&gt;</a:t>
+            </a:r>
+            <a:br/>
+            <a:r>
+              <a:t>      &lt;parent&gt;base_link&lt;/parent&gt;</a:t>
+            </a:r>
+            <a:br/>
+            <a:r>
+              <a:t>      &lt;child&gt;right_wheel_link&lt;/child&gt;</a:t>
+            </a:r>
+            <a:br/>
+            <a:r>
+              <a:t>      &lt;axis&gt;</a:t>
+            </a:r>
+            <a:br/>
+            <a:r>
+              <a:t>        &lt;xyz&gt;0 1 0&lt;/xyz&gt;</a:t>
+            </a:r>
+            <a:br/>
+            <a:r>
+              <a:t>        &lt;limit&gt;</a:t>
+            </a:r>
+            <a:br/>
+            <a:r>
+              <a:t>          &lt;lower&gt;-1e16&lt;/lower&gt;</a:t>
+            </a:r>
+            <a:br/>
+            <a:r>
+              <a:t>          &lt;upper&gt;1e16&lt;/upper&gt;</a:t>
+            </a:r>
+            <a:br/>
+            <a:r>
+              <a:t>        &lt;/limit&gt;</a:t>
+            </a:r>
+            <a:br/>
+            <a:r>
+              <a:t>      &lt;/axis&gt;</a:t>
+            </a:r>
+            <a:br/>
+            <a:r>
+              <a:t>    &lt;/joint&gt;</a:t>
+            </a:r>
+          </a:p>
+        </p:txBody>
+      </p:sp>
+      <p:sp>
+        <p:nvSpPr>
+          <p:cNvPr id="10" name="TextBox 9"/>
           <p:cNvSpPr txBox="1"/>
           <p:nvPr/>
         </p:nvSpPr>
         <p:spPr>
           <a:xfrm>
-            <a:off x="786384" y="5239512"/>
-            <a:ext cx="1261872" cy="237744"/>
+            <a:off x="749808" y="6181344"/>
+            <a:ext cx="10789920" cy="201168"/>
           </a:xfrm>
           <a:prstGeom prst="rect">
             <a:avLst/>
@@ -11614,54 +12040,15 @@
               <a:spcAft>
                 <a:spcPts val="0"/>
               </a:spcAft>
-              <a:defRPr sz="1800" b="1">
-                <a:solidFill>
-                  <a:srgbClr val="2A8B5A"/>
-                </a:solidFill>
-                <a:latin typeface="Noto Sans CJK KR"/>
-              </a:defRPr>
-            </a:pPr>
-            <a:r>
-              <a:t>확인 기준</a:t>
-            </a:r>
-          </a:p>
-        </p:txBody>
-      </p:sp>
-      <p:sp>
-        <p:nvSpPr>
-          <p:cNvPr id="9" name="TextBox 8"/>
-          <p:cNvSpPr txBox="1"/>
-          <p:nvPr/>
-        </p:nvSpPr>
-        <p:spPr>
-          <a:xfrm>
-            <a:off x="786384" y="5532120"/>
-            <a:ext cx="10469880" cy="420624"/>
-          </a:xfrm>
-          <a:prstGeom prst="rect">
-            <a:avLst/>
-          </a:prstGeom>
-          <a:noFill/>
-        </p:spPr>
-        <p:txBody>
-          <a:bodyPr wrap="square" lIns="73152" rIns="73152" tIns="36576" bIns="36576">
-            <a:spAutoFit/>
-          </a:bodyPr>
-          <a:lstStyle/>
-          <a:p>
-            <a:pPr algn="l">
-              <a:spcAft>
-                <a:spcPts val="0"/>
-              </a:spcAft>
-              <a:defRPr sz="1800" b="0">
-                <a:solidFill>
-                  <a:srgbClr val="122C4E"/>
-                </a:solidFill>
-                <a:latin typeface="Noto Sans CJK KR"/>
-              </a:defRPr>
-            </a:pPr>
-            <a:r>
-              <a:t>AGV가 바닥에 안정적으로 놓이고 바퀴 접촉·충돌 파라미터가 모델에 존재한다.</a:t>
+              <a:defRPr sz="1000" b="0">
+                <a:solidFill>
+                  <a:srgbClr val="5C6672"/>
+                </a:solidFill>
+                <a:latin typeface="Noto Sans CJK KR"/>
+              </a:defRPr>
+            </a:pPr>
+            <a:r>
+              <a:t>파일 전체 10/11 · 이 슬라이드 다음에 같은 파일의 나머지 줄이 이어집니다.</a:t>
             </a:r>
           </a:p>
         </p:txBody>
@@ -11718,7 +12105,7 @@
               </a:defRPr>
             </a:pPr>
             <a:r>
-              <a:t>정상 결과: 실제 환경에서 확인한 출력</a:t>
+              <a:t>파일을 계속 작성하고 저장한다 (11/11)</a:t>
             </a:r>
           </a:p>
         </p:txBody>
@@ -11757,7 +12144,7 @@
               </a:defRPr>
             </a:pPr>
             <a:r>
-              <a:t>실제 ROS 2 환경의 파일·패키지·구성 검증 로그</a:t>
+              <a:t>~/ros2_curri/agv_ws/src/agv_description/curriculum_stages/M07/model.sdf</a:t>
             </a:r>
           </a:p>
         </p:txBody>
@@ -11840,30 +12227,64 @@
           </a:p>
         </p:txBody>
       </p:sp>
-      <p:pic>
-        <p:nvPicPr>
-          <p:cNvPr id="6" name="Picture 5" descr="validation_terminal.png"/>
-          <p:cNvPicPr>
-            <a:picLocks noChangeAspect="1"/>
-          </p:cNvPicPr>
-          <p:nvPr/>
-        </p:nvPicPr>
-        <p:blipFill>
-          <a:blip r:embed="rId2"/>
-          <a:stretch>
-            <a:fillRect/>
-          </a:stretch>
-        </p:blipFill>
-        <p:spPr>
-          <a:xfrm>
-            <a:off x="1934865" y="1353312"/>
-            <a:ext cx="8319221" cy="4800600"/>
-          </a:xfrm>
-          <a:prstGeom prst="rect">
-            <a:avLst/>
-          </a:prstGeom>
-        </p:spPr>
-      </p:pic>
+      <p:sp>
+        <p:nvSpPr>
+          <p:cNvPr id="6" name="Rectangle 5"/>
+          <p:cNvSpPr/>
+          <p:nvPr/>
+        </p:nvSpPr>
+        <p:spPr>
+          <a:xfrm>
+            <a:off x="566928" y="1188720"/>
+            <a:ext cx="11064240" cy="347472"/>
+          </a:xfrm>
+          <a:prstGeom prst="rect">
+            <a:avLst/>
+          </a:prstGeom>
+          <a:solidFill>
+            <a:srgbClr val="F4F7FB"/>
+          </a:solidFill>
+          <a:ln>
+            <a:solidFill>
+              <a:srgbClr val="F4F7FB"/>
+            </a:solidFill>
+          </a:ln>
+        </p:spPr>
+        <p:style>
+          <a:lnRef idx="1">
+            <a:schemeClr val="accent1"/>
+          </a:lnRef>
+          <a:fillRef idx="3">
+            <a:schemeClr val="accent1"/>
+          </a:fillRef>
+          <a:effectRef idx="2">
+            <a:schemeClr val="accent1"/>
+          </a:effectRef>
+          <a:fontRef idx="minor">
+            <a:schemeClr val="lt1"/>
+          </a:fontRef>
+        </p:style>
+        <p:txBody>
+          <a:bodyPr rtlCol="0" anchor="ctr" wrap="square" lIns="73152" rIns="73152" tIns="36576" bIns="36576"/>
+          <a:lstStyle/>
+          <a:p>
+            <a:pPr algn="l">
+              <a:spcAft>
+                <a:spcPts val="0"/>
+              </a:spcAft>
+              <a:defRPr sz="1300" b="1">
+                <a:solidFill>
+                  <a:srgbClr val="122C4E"/>
+                </a:solidFill>
+                <a:latin typeface="Noto Sans CJK KR"/>
+              </a:defRPr>
+            </a:pPr>
+            <a:r>
+              <a:t>현재 단계 13/14    |    현재 폴더 ~/ros2_curri/agv_ws    |    현재 터미널</a:t>
+            </a:r>
+          </a:p>
+        </p:txBody>
+      </p:sp>
       <p:sp>
         <p:nvSpPr>
           <p:cNvPr id="7" name="TextBox 6"/>
@@ -11872,8 +12293,8 @@
         </p:nvSpPr>
         <p:spPr>
           <a:xfrm>
-            <a:off x="777240" y="6217920"/>
-            <a:ext cx="10607040" cy="182880"/>
+            <a:off x="658368" y="1627632"/>
+            <a:ext cx="10972800" cy="256032"/>
           </a:xfrm>
           <a:prstGeom prst="rect">
             <a:avLst/>
@@ -11886,19 +12307,182 @@
           </a:bodyPr>
           <a:lstStyle/>
           <a:p>
-            <a:pPr algn="ctr">
-              <a:spcAft>
-                <a:spcPts val="0"/>
-              </a:spcAft>
-              <a:defRPr sz="1100" b="1">
-                <a:solidFill>
-                  <a:srgbClr val="2A8B5A"/>
-                </a:solidFill>
-                <a:latin typeface="Noto Sans CJK KR"/>
-              </a:defRPr>
-            </a:pPr>
-            <a:r>
-              <a:t>① 명령/설정  ② 정상 출력 또는 화면  ③ 다음 검증 명령으로 재확인</a:t>
+            <a:pPr algn="l">
+              <a:spcAft>
+                <a:spcPts val="0"/>
+              </a:spcAft>
+              <a:defRPr sz="1500" b="1">
+                <a:solidFill>
+                  <a:srgbClr val="122C4E"/>
+                </a:solidFill>
+                <a:latin typeface="Noto Sans CJK KR"/>
+              </a:defRPr>
+            </a:pPr>
+            <a:r>
+              <a:t>이번 단계: 파일의 전체 내용을 중간 생략 없이 작성합니다. 아래 줄 범위를 끝까지 입력하세요.</a:t>
+            </a:r>
+          </a:p>
+        </p:txBody>
+      </p:sp>
+      <p:sp>
+        <p:nvSpPr>
+          <p:cNvPr id="8" name="Rectangle 7"/>
+          <p:cNvSpPr/>
+          <p:nvPr/>
+        </p:nvSpPr>
+        <p:spPr>
+          <a:xfrm>
+            <a:off x="658368" y="1956816"/>
+            <a:ext cx="10972800" cy="603504"/>
+          </a:xfrm>
+          <a:prstGeom prst="rect">
+            <a:avLst/>
+          </a:prstGeom>
+          <a:solidFill>
+            <a:srgbClr val="F4F7FB"/>
+          </a:solidFill>
+          <a:ln>
+            <a:solidFill>
+              <a:srgbClr val="F4F7FB"/>
+            </a:solidFill>
+          </a:ln>
+        </p:spPr>
+        <p:style>
+          <a:lnRef idx="1">
+            <a:schemeClr val="accent1"/>
+          </a:lnRef>
+          <a:fillRef idx="3">
+            <a:schemeClr val="accent1"/>
+          </a:fillRef>
+          <a:effectRef idx="2">
+            <a:schemeClr val="accent1"/>
+          </a:effectRef>
+          <a:fontRef idx="minor">
+            <a:schemeClr val="lt1"/>
+          </a:fontRef>
+        </p:style>
+        <p:txBody>
+          <a:bodyPr rtlCol="0" anchor="ctr" wrap="square" lIns="73152" rIns="73152" tIns="36576" bIns="36576"/>
+          <a:lstStyle/>
+          <a:p>
+            <a:pPr algn="l">
+              <a:spcAft>
+                <a:spcPts val="0"/>
+              </a:spcAft>
+              <a:defRPr sz="1400" b="0">
+                <a:solidFill>
+                  <a:srgbClr val="122C4E"/>
+                </a:solidFill>
+                <a:latin typeface="DejaVu Sans Mono"/>
+              </a:defRPr>
+            </a:pPr>
+            <a:r>
+              <a:t>파일 생성: mkdir -p ~/ros2_curri/agv_ws/src/agv_description/curriculum_stages/M07</a:t>
+            </a:r>
+            <a:br/>
+            <a:r>
+              <a:t>파일 열기: nano ~/ros2_curri/agv_ws/src/agv_description/curriculum_stages/M07/model.sdf</a:t>
+            </a:r>
+          </a:p>
+        </p:txBody>
+      </p:sp>
+      <p:sp>
+        <p:nvSpPr>
+          <p:cNvPr id="9" name="Rectangle 8"/>
+          <p:cNvSpPr/>
+          <p:nvPr/>
+        </p:nvSpPr>
+        <p:spPr>
+          <a:xfrm>
+            <a:off x="658368" y="2706624"/>
+            <a:ext cx="10972800" cy="3364992"/>
+          </a:xfrm>
+          <a:prstGeom prst="rect">
+            <a:avLst/>
+          </a:prstGeom>
+          <a:solidFill>
+            <a:srgbClr val="1D232D"/>
+          </a:solidFill>
+          <a:ln>
+            <a:solidFill>
+              <a:srgbClr val="1D232D"/>
+            </a:solidFill>
+          </a:ln>
+        </p:spPr>
+        <p:style>
+          <a:lnRef idx="1">
+            <a:schemeClr val="accent1"/>
+          </a:lnRef>
+          <a:fillRef idx="3">
+            <a:schemeClr val="accent1"/>
+          </a:fillRef>
+          <a:effectRef idx="2">
+            <a:schemeClr val="accent1"/>
+          </a:effectRef>
+          <a:fontRef idx="minor">
+            <a:schemeClr val="lt1"/>
+          </a:fontRef>
+        </p:style>
+        <p:txBody>
+          <a:bodyPr rtlCol="0" anchor="ctr" wrap="square" lIns="164592" rIns="164592" tIns="109728" bIns="36576"/>
+          <a:lstStyle/>
+          <a:p>
+            <a:pPr algn="l">
+              <a:spcAft>
+                <a:spcPts val="0"/>
+              </a:spcAft>
+              <a:defRPr sz="1400" b="0">
+                <a:solidFill>
+                  <a:srgbClr val="FFFFFF"/>
+                </a:solidFill>
+                <a:latin typeface="DejaVu Sans Mono"/>
+              </a:defRPr>
+            </a:pPr>
+            <a:r>
+              <a:t>  &lt;/model&gt;</a:t>
+            </a:r>
+            <a:br/>
+            <a:r>
+              <a:t>&lt;/sdf&gt;</a:t>
+            </a:r>
+          </a:p>
+        </p:txBody>
+      </p:sp>
+      <p:sp>
+        <p:nvSpPr>
+          <p:cNvPr id="10" name="TextBox 9"/>
+          <p:cNvSpPr txBox="1"/>
+          <p:nvPr/>
+        </p:nvSpPr>
+        <p:spPr>
+          <a:xfrm>
+            <a:off x="749808" y="6181344"/>
+            <a:ext cx="10789920" cy="201168"/>
+          </a:xfrm>
+          <a:prstGeom prst="rect">
+            <a:avLst/>
+          </a:prstGeom>
+          <a:noFill/>
+        </p:spPr>
+        <p:txBody>
+          <a:bodyPr wrap="square" lIns="73152" rIns="73152" tIns="36576" bIns="36576">
+            <a:spAutoFit/>
+          </a:bodyPr>
+          <a:lstStyle/>
+          <a:p>
+            <a:pPr algn="l">
+              <a:spcAft>
+                <a:spcPts val="0"/>
+              </a:spcAft>
+              <a:defRPr sz="1000" b="0">
+                <a:solidFill>
+                  <a:srgbClr val="5C6672"/>
+                </a:solidFill>
+                <a:latin typeface="Noto Sans CJK KR"/>
+              </a:defRPr>
+            </a:pPr>
+            <a:r>
+              <a:t>파일 전체 11/11 · 이 슬라이드 다음에 같은 파일의 나머지 줄이 이어집니다.</a:t>
             </a:r>
           </a:p>
         </p:txBody>
@@ -11955,7 +12539,7 @@
               </a:defRPr>
             </a:pPr>
             <a:r>
-              <a:t>객관적 검증 명령으로 완료를 확인한다</a:t>
+              <a:t>build → source → run 순서로 실행한다</a:t>
             </a:r>
           </a:p>
         </p:txBody>
@@ -11994,7 +12578,7 @@
               </a:defRPr>
             </a:pPr>
             <a:r>
-              <a:t>화면만 보지 말고 topic·frame·파일·parameter를 다시 확인합니다.</a:t>
+              <a:t>새 파일 또는 수정 파일은 build와 source 뒤에만 실행 이름·설정에 반영됩니다.</a:t>
             </a:r>
           </a:p>
         </p:txBody>
@@ -12130,7 +12714,7 @@
               </a:defRPr>
             </a:pPr>
             <a:r>
-              <a:t>현재 단계 검증    |    현재 폴더 ~/ros2_curri/agv_ws    |    현재 터미널</a:t>
+              <a:t>현재 단계 실행    |    현재 폴더 ~/ros2_curri/agv_ws    |    현재 터미널</a:t>
             </a:r>
           </a:p>
         </p:txBody>
@@ -12143,8 +12727,8 @@
         </p:nvSpPr>
         <p:spPr>
           <a:xfrm>
-            <a:off x="658368" y="1755648"/>
-            <a:ext cx="10972800" cy="2148840"/>
+            <a:off x="658368" y="1700784"/>
+            <a:ext cx="10972800" cy="3182112"/>
           </a:xfrm>
           <a:prstGeom prst="roundRect">
             <a:avLst/>
@@ -12188,95 +12772,25 @@
               </a:defRPr>
             </a:pPr>
             <a:r>
-              <a:t>gz sdf -k ~/ros2_curri/agv_ws/src/agv_description/curriculum_stages/M07/model.sdf</a:t>
+              <a:t>cd ~/ros2_curri/agv_ws</a:t>
             </a:r>
             <a:br/>
             <a:r>
-              <a:t>rg -n '&lt;sensor|DiffDrive' ~/ros2_curri/agv_ws/src/agv_description/curriculum_stages/M07/model.sdf</a:t>
-            </a:r>
-          </a:p>
-        </p:txBody>
-      </p:sp>
-      <p:sp>
-        <p:nvSpPr>
-          <p:cNvPr id="8" name="Rounded Rectangle 7"/>
-          <p:cNvSpPr/>
-          <p:nvPr/>
-        </p:nvSpPr>
-        <p:spPr>
-          <a:xfrm>
-            <a:off x="658368" y="4206240"/>
-            <a:ext cx="10972800" cy="1554480"/>
-          </a:xfrm>
-          <a:prstGeom prst="roundRect">
-            <a:avLst/>
-          </a:prstGeom>
-          <a:solidFill>
-            <a:srgbClr val="F4F7FB"/>
-          </a:solidFill>
-          <a:ln>
-            <a:solidFill>
-              <a:srgbClr val="D1DFD5"/>
-            </a:solidFill>
-          </a:ln>
-        </p:spPr>
-        <p:style>
-          <a:lnRef idx="1">
-            <a:schemeClr val="accent1"/>
-          </a:lnRef>
-          <a:fillRef idx="3">
-            <a:schemeClr val="accent1"/>
-          </a:fillRef>
-          <a:effectRef idx="2">
-            <a:schemeClr val="accent1"/>
-          </a:effectRef>
-          <a:fontRef idx="minor">
-            <a:schemeClr val="lt1"/>
-          </a:fontRef>
-        </p:style>
-        <p:txBody>
-          <a:bodyPr rtlCol="0" anchor="ctr" wrap="square" lIns="73152" rIns="73152" tIns="36576" bIns="36576"/>
-          <a:lstStyle/>
-          <a:p>
-            <a:pPr algn="l">
-              <a:spcAft>
-                <a:spcPts val="0"/>
-              </a:spcAft>
-              <a:defRPr sz="1800" b="1">
-                <a:solidFill>
-                  <a:srgbClr val="2A8B5A"/>
-                </a:solidFill>
-                <a:latin typeface="Noto Sans CJK KR"/>
-              </a:defRPr>
-            </a:pPr>
-            <a:r>
-              <a:t>완료 체크</a:t>
-            </a:r>
-            <a:br/>
-            <a:r>
-              <a:t>□ 명령이 오류 없이 실행된다.</a:t>
-            </a:r>
-            <a:br/>
-            <a:r>
-              <a:t>□ 기대한 파일·topic·frame·parameter 이름이 보인다.</a:t>
-            </a:r>
-            <a:br/>
-            <a:r>
-              <a:t>□ 값의 단위와 방향을 한 문장으로 설명할 수 있다.</a:t>
-            </a:r>
-          </a:p>
-        </p:txBody>
-      </p:sp>
-      <p:sp>
-        <p:nvSpPr>
-          <p:cNvPr id="9" name="TextBox 8"/>
+              <a:t>gz sdf -k src/agv_description/curriculum_stages/M07/model.sdf</a:t>
+            </a:r>
+          </a:p>
+        </p:txBody>
+      </p:sp>
+      <p:sp>
+        <p:nvSpPr>
+          <p:cNvPr id="8" name="TextBox 7"/>
           <p:cNvSpPr txBox="1"/>
           <p:nvPr/>
         </p:nvSpPr>
         <p:spPr>
           <a:xfrm>
-            <a:off x="731520" y="5989320"/>
-            <a:ext cx="10789920" cy="237744"/>
+            <a:off x="786384" y="5239512"/>
+            <a:ext cx="1261872" cy="237744"/>
           </a:xfrm>
           <a:prstGeom prst="rect">
             <a:avLst/>
@@ -12293,7 +12807,46 @@
               <a:spcAft>
                 <a:spcPts val="0"/>
               </a:spcAft>
-              <a:defRPr sz="1500" b="1">
+              <a:defRPr sz="1800" b="1">
+                <a:solidFill>
+                  <a:srgbClr val="2A8B5A"/>
+                </a:solidFill>
+                <a:latin typeface="Noto Sans CJK KR"/>
+              </a:defRPr>
+            </a:pPr>
+            <a:r>
+              <a:t>확인 기준</a:t>
+            </a:r>
+          </a:p>
+        </p:txBody>
+      </p:sp>
+      <p:sp>
+        <p:nvSpPr>
+          <p:cNvPr id="9" name="TextBox 8"/>
+          <p:cNvSpPr txBox="1"/>
+          <p:nvPr/>
+        </p:nvSpPr>
+        <p:spPr>
+          <a:xfrm>
+            <a:off x="786384" y="5532120"/>
+            <a:ext cx="10469880" cy="420624"/>
+          </a:xfrm>
+          <a:prstGeom prst="rect">
+            <a:avLst/>
+          </a:prstGeom>
+          <a:noFill/>
+        </p:spPr>
+        <p:txBody>
+          <a:bodyPr wrap="square" lIns="73152" rIns="73152" tIns="36576" bIns="36576">
+            <a:spAutoFit/>
+          </a:bodyPr>
+          <a:lstStyle/>
+          <a:p>
+            <a:pPr algn="l">
+              <a:spcAft>
+                <a:spcPts val="0"/>
+              </a:spcAft>
+              <a:defRPr sz="1800" b="0">
                 <a:solidFill>
                   <a:srgbClr val="122C4E"/>
                 </a:solidFill>
@@ -12301,7 +12854,7 @@
               </a:defRPr>
             </a:pPr>
             <a:r>
-              <a:t>완료 조건: AGV가 바닥에 안정적으로 놓이고 바퀴 접촉·충돌 파라미터가 모델에 존재한다.</a:t>
+              <a:t>AGV가 바닥에 안정적으로 놓이고 바퀴 접촉·충돌 파라미터가 모델에 존재한다.</a:t>
             </a:r>
           </a:p>
         </p:txBody>
@@ -12358,7 +12911,7 @@
               </a:defRPr>
             </a:pPr>
             <a:r>
-              <a:t>막히면: 증상 → 우선 확인 → 재검증</a:t>
+              <a:t>정상 결과: 실제 환경에서 확인한 출력</a:t>
             </a:r>
           </a:p>
         </p:txBody>
@@ -12397,7 +12950,7 @@
               </a:defRPr>
             </a:pPr>
             <a:r>
-              <a:t>오류 메시지를 숨기지 않고 같은 순서로 점검합니다.</a:t>
+              <a:t>실제 ROS 2 환경의 파일·패키지·구성 검증 로그</a:t>
             </a:r>
           </a:p>
         </p:txBody>
@@ -12480,119 +13033,40 @@
           </a:p>
         </p:txBody>
       </p:sp>
-      <p:sp>
-        <p:nvSpPr>
-          <p:cNvPr id="6" name="Rectangle 5"/>
-          <p:cNvSpPr/>
-          <p:nvPr/>
-        </p:nvSpPr>
-        <p:spPr>
-          <a:xfrm>
-            <a:off x="566928" y="1188720"/>
-            <a:ext cx="11064240" cy="347472"/>
-          </a:xfrm>
-          <a:prstGeom prst="rect">
-            <a:avLst/>
-          </a:prstGeom>
-          <a:solidFill>
-            <a:srgbClr val="F4F7FB"/>
-          </a:solidFill>
-          <a:ln>
-            <a:solidFill>
-              <a:srgbClr val="F4F7FB"/>
-            </a:solidFill>
-          </a:ln>
-        </p:spPr>
-        <p:style>
-          <a:lnRef idx="1">
-            <a:schemeClr val="accent1"/>
-          </a:lnRef>
-          <a:fillRef idx="3">
-            <a:schemeClr val="accent1"/>
-          </a:fillRef>
-          <a:effectRef idx="2">
-            <a:schemeClr val="accent1"/>
-          </a:effectRef>
-          <a:fontRef idx="minor">
-            <a:schemeClr val="lt1"/>
-          </a:fontRef>
-        </p:style>
-        <p:txBody>
-          <a:bodyPr rtlCol="0" anchor="ctr" wrap="square" lIns="73152" rIns="73152" tIns="36576" bIns="36576"/>
-          <a:lstStyle/>
-          <a:p>
-            <a:pPr algn="l">
-              <a:spcAft>
-                <a:spcPts val="0"/>
-              </a:spcAft>
-              <a:defRPr sz="1300" b="1">
-                <a:solidFill>
-                  <a:srgbClr val="122C4E"/>
-                </a:solidFill>
-                <a:latin typeface="Noto Sans CJK KR"/>
-              </a:defRPr>
-            </a:pPr>
-            <a:r>
-              <a:t>현재 단계 오류 대응    |    현재 폴더 ~/ros2_curri/agv_ws    |    현재 터미널</a:t>
-            </a:r>
-          </a:p>
-        </p:txBody>
-      </p:sp>
-      <p:sp>
-        <p:nvSpPr>
-          <p:cNvPr id="7" name="Rounded Rectangle 6"/>
-          <p:cNvSpPr/>
-          <p:nvPr/>
-        </p:nvSpPr>
-        <p:spPr>
-          <a:xfrm>
-            <a:off x="694944" y="1755648"/>
-            <a:ext cx="10972800" cy="1115568"/>
-          </a:xfrm>
-          <a:prstGeom prst="roundRect">
-            <a:avLst/>
-          </a:prstGeom>
-          <a:solidFill>
-            <a:srgbClr val="FFF7F4"/>
-          </a:solidFill>
-          <a:ln>
-            <a:solidFill>
-              <a:srgbClr val="EDBEB4"/>
-            </a:solidFill>
-          </a:ln>
-        </p:spPr>
-        <p:style>
-          <a:lnRef idx="1">
-            <a:schemeClr val="accent1"/>
-          </a:lnRef>
-          <a:fillRef idx="3">
-            <a:schemeClr val="accent1"/>
-          </a:fillRef>
-          <a:effectRef idx="2">
-            <a:schemeClr val="accent1"/>
-          </a:effectRef>
-          <a:fontRef idx="minor">
-            <a:schemeClr val="lt1"/>
-          </a:fontRef>
-        </p:style>
-        <p:txBody>
-          <a:bodyPr rtlCol="0" anchor="ctr"/>
-          <a:lstStyle/>
-          <a:p>
-            <a:pPr algn="ctr"/>
-          </a:p>
-        </p:txBody>
-      </p:sp>
-      <p:sp>
-        <p:nvSpPr>
-          <p:cNvPr id="8" name="TextBox 7"/>
+      <p:pic>
+        <p:nvPicPr>
+          <p:cNvPr id="6" name="Picture 5" descr="validation_terminal.png"/>
+          <p:cNvPicPr>
+            <a:picLocks noChangeAspect="1"/>
+          </p:cNvPicPr>
+          <p:nvPr/>
+        </p:nvPicPr>
+        <p:blipFill>
+          <a:blip r:embed="rId2"/>
+          <a:stretch>
+            <a:fillRect/>
+          </a:stretch>
+        </p:blipFill>
+        <p:spPr>
+          <a:xfrm>
+            <a:off x="1934865" y="1353312"/>
+            <a:ext cx="8319221" cy="4800600"/>
+          </a:xfrm>
+          <a:prstGeom prst="rect">
+            <a:avLst/>
+          </a:prstGeom>
+        </p:spPr>
+      </p:pic>
+      <p:sp>
+        <p:nvSpPr>
+          <p:cNvPr id="7" name="TextBox 6"/>
           <p:cNvSpPr txBox="1"/>
           <p:nvPr/>
         </p:nvSpPr>
         <p:spPr>
           <a:xfrm>
-            <a:off x="896112" y="1901952"/>
-            <a:ext cx="2926080" cy="274320"/>
+            <a:off x="777240" y="6144768"/>
+            <a:ext cx="10607040" cy="310896"/>
           </a:xfrm>
           <a:prstGeom prst="rect">
             <a:avLst/>
@@ -12605,228 +13079,19 @@
           </a:bodyPr>
           <a:lstStyle/>
           <a:p>
-            <a:pPr algn="l">
-              <a:spcAft>
-                <a:spcPts val="0"/>
-              </a:spcAft>
-              <a:defRPr sz="1800" b="1">
-                <a:solidFill>
-                  <a:srgbClr val="BE3B3B"/>
-                </a:solidFill>
-                <a:latin typeface="Noto Sans CJK KR"/>
-              </a:defRPr>
-            </a:pPr>
-            <a:r>
-              <a:t>증상 1: spawn 직후 떨리거나 날아감</a:t>
-            </a:r>
-          </a:p>
-        </p:txBody>
-      </p:sp>
-      <p:sp>
-        <p:nvSpPr>
-          <p:cNvPr id="9" name="TextBox 8"/>
-          <p:cNvSpPr txBox="1"/>
-          <p:nvPr/>
-        </p:nvSpPr>
-        <p:spPr>
-          <a:xfrm>
-            <a:off x="3794760" y="1883664"/>
-            <a:ext cx="7543800" cy="621792"/>
-          </a:xfrm>
-          <a:prstGeom prst="rect">
-            <a:avLst/>
-          </a:prstGeom>
-          <a:noFill/>
-        </p:spPr>
-        <p:txBody>
-          <a:bodyPr wrap="square" lIns="73152" rIns="73152" tIns="36576" bIns="36576">
-            <a:spAutoFit/>
-          </a:bodyPr>
-          <a:lstStyle/>
-          <a:p>
-            <a:pPr algn="l">
-              <a:spcAft>
-                <a:spcPts val="0"/>
-              </a:spcAft>
-              <a:defRPr sz="1600" b="0">
-                <a:solidFill>
-                  <a:srgbClr val="122C4E"/>
-                </a:solidFill>
-                <a:latin typeface="Noto Sans CJK KR"/>
-              </a:defRPr>
-            </a:pPr>
-            <a:r>
-              <a:t>우선 확인: inertia·collision overlap·너무 작은 mass를 확인한다.</a:t>
-            </a:r>
-            <a:br/>
-            <a:r>
-              <a:t>수정 후: gz sdf -k ~/ros2_curri/agv_ws/src/agv_description/curriculum_stages/M07/model.sdf</a:t>
-            </a:r>
-          </a:p>
-        </p:txBody>
-      </p:sp>
-      <p:sp>
-        <p:nvSpPr>
-          <p:cNvPr id="10" name="Rounded Rectangle 9"/>
-          <p:cNvSpPr/>
-          <p:nvPr/>
-        </p:nvSpPr>
-        <p:spPr>
-          <a:xfrm>
-            <a:off x="694944" y="3172968"/>
-            <a:ext cx="10972800" cy="1115568"/>
-          </a:xfrm>
-          <a:prstGeom prst="roundRect">
-            <a:avLst/>
-          </a:prstGeom>
-          <a:solidFill>
-            <a:srgbClr val="FFF7F4"/>
-          </a:solidFill>
-          <a:ln>
-            <a:solidFill>
-              <a:srgbClr val="EDBEB4"/>
-            </a:solidFill>
-          </a:ln>
-        </p:spPr>
-        <p:style>
-          <a:lnRef idx="1">
-            <a:schemeClr val="accent1"/>
-          </a:lnRef>
-          <a:fillRef idx="3">
-            <a:schemeClr val="accent1"/>
-          </a:fillRef>
-          <a:effectRef idx="2">
-            <a:schemeClr val="accent1"/>
-          </a:effectRef>
-          <a:fontRef idx="minor">
-            <a:schemeClr val="lt1"/>
-          </a:fontRef>
-        </p:style>
-        <p:txBody>
-          <a:bodyPr rtlCol="0" anchor="ctr"/>
-          <a:lstStyle/>
-          <a:p>
-            <a:pPr algn="ctr"/>
-          </a:p>
-        </p:txBody>
-      </p:sp>
-      <p:sp>
-        <p:nvSpPr>
-          <p:cNvPr id="11" name="TextBox 10"/>
-          <p:cNvSpPr txBox="1"/>
-          <p:nvPr/>
-        </p:nvSpPr>
-        <p:spPr>
-          <a:xfrm>
-            <a:off x="896112" y="3319272"/>
-            <a:ext cx="2926080" cy="274320"/>
-          </a:xfrm>
-          <a:prstGeom prst="rect">
-            <a:avLst/>
-          </a:prstGeom>
-          <a:noFill/>
-        </p:spPr>
-        <p:txBody>
-          <a:bodyPr wrap="square" lIns="73152" rIns="73152" tIns="36576" bIns="36576">
-            <a:spAutoFit/>
-          </a:bodyPr>
-          <a:lstStyle/>
-          <a:p>
-            <a:pPr algn="l">
-              <a:spcAft>
-                <a:spcPts val="0"/>
-              </a:spcAft>
-              <a:defRPr sz="1800" b="1">
-                <a:solidFill>
-                  <a:srgbClr val="BE3B3B"/>
-                </a:solidFill>
-                <a:latin typeface="Noto Sans CJK KR"/>
-              </a:defRPr>
-            </a:pPr>
-            <a:r>
-              <a:t>증상 2: 바퀴가 헛돎</a:t>
-            </a:r>
-          </a:p>
-        </p:txBody>
-      </p:sp>
-      <p:sp>
-        <p:nvSpPr>
-          <p:cNvPr id="12" name="TextBox 11"/>
-          <p:cNvSpPr txBox="1"/>
-          <p:nvPr/>
-        </p:nvSpPr>
-        <p:spPr>
-          <a:xfrm>
-            <a:off x="3794760" y="3300984"/>
-            <a:ext cx="7543800" cy="621792"/>
-          </a:xfrm>
-          <a:prstGeom prst="rect">
-            <a:avLst/>
-          </a:prstGeom>
-          <a:noFill/>
-        </p:spPr>
-        <p:txBody>
-          <a:bodyPr wrap="square" lIns="73152" rIns="73152" tIns="36576" bIns="36576">
-            <a:spAutoFit/>
-          </a:bodyPr>
-          <a:lstStyle/>
-          <a:p>
-            <a:pPr algn="l">
-              <a:spcAft>
-                <a:spcPts val="0"/>
-              </a:spcAft>
-              <a:defRPr sz="1600" b="0">
-                <a:solidFill>
-                  <a:srgbClr val="122C4E"/>
-                </a:solidFill>
-                <a:latin typeface="Noto Sans CJK KR"/>
-              </a:defRPr>
-            </a:pPr>
-            <a:r>
-              <a:t>우선 확인: friction·contact·joint axis·wheel radius를 확인한다.</a:t>
-            </a:r>
-            <a:br/>
-            <a:r>
-              <a:t>수정 후: gz sdf -k ~/ros2_curri/agv_ws/src/agv_description/curriculum_stages/M07/model.sdf</a:t>
-            </a:r>
-          </a:p>
-        </p:txBody>
-      </p:sp>
-      <p:sp>
-        <p:nvSpPr>
-          <p:cNvPr id="13" name="TextBox 12"/>
-          <p:cNvSpPr txBox="1"/>
-          <p:nvPr/>
-        </p:nvSpPr>
-        <p:spPr>
-          <a:xfrm>
-            <a:off x="822960" y="5102352"/>
-            <a:ext cx="10607040" cy="402336"/>
-          </a:xfrm>
-          <a:prstGeom prst="rect">
-            <a:avLst/>
-          </a:prstGeom>
-          <a:noFill/>
-        </p:spPr>
-        <p:txBody>
-          <a:bodyPr wrap="square" lIns="73152" rIns="73152" tIns="36576" bIns="36576">
-            <a:spAutoFit/>
-          </a:bodyPr>
-          <a:lstStyle/>
-          <a:p>
             <a:pPr algn="ctr">
               <a:spcAft>
                 <a:spcPts val="0"/>
               </a:spcAft>
-              <a:defRPr sz="1800" b="1">
-                <a:solidFill>
-                  <a:srgbClr val="DB7E22"/>
-                </a:solidFill>
-                <a:latin typeface="Noto Sans CJK KR"/>
-              </a:defRPr>
-            </a:pPr>
-            <a:r>
-              <a:t>공통 순서: ① 현재 폴더 ② source ③ 파일 경로 ④ 이름/타입/단위 ⑤ build·source 후 재실행</a:t>
+              <a:defRPr sz="1100" b="1">
+                <a:solidFill>
+                  <a:srgbClr val="2A8B5A"/>
+                </a:solidFill>
+                <a:latin typeface="Noto Sans CJK KR"/>
+              </a:defRPr>
+            </a:pPr>
+            <a:r>
+              <a:t>화면에서 확인: ① 명령/설정  ② 정상 출력 또는 화면  ③ 다음 검증 명령으로 재확인</a:t>
             </a:r>
           </a:p>
         </p:txBody>
@@ -12883,7 +13148,7 @@
               </a:defRPr>
             </a:pPr>
             <a:r>
-              <a:t>미니 실습: 값 하나를 바꾸고 결과를 비교한다</a:t>
+              <a:t>정상 결과: 실제 환경에서 확인한 출력</a:t>
             </a:r>
           </a:p>
         </p:txBody>
@@ -12922,7 +13187,7 @@
               </a:defRPr>
             </a:pPr>
             <a:r>
-              <a:t>정상 결과를 만든 뒤에는 한 번에 하나의 값만 바꿉니다.</a:t>
+              <a:t>실제 terminal: SDF Valid 검사와 visual·collision·mass·friction 태그</a:t>
             </a:r>
           </a:p>
         </p:txBody>
@@ -13005,132 +13270,40 @@
           </a:p>
         </p:txBody>
       </p:sp>
-      <p:sp>
-        <p:nvSpPr>
-          <p:cNvPr id="6" name="Rectangle 5"/>
-          <p:cNvSpPr/>
-          <p:nvPr/>
-        </p:nvSpPr>
-        <p:spPr>
-          <a:xfrm>
-            <a:off x="566928" y="1188720"/>
-            <a:ext cx="11064240" cy="347472"/>
-          </a:xfrm>
-          <a:prstGeom prst="rect">
-            <a:avLst/>
-          </a:prstGeom>
-          <a:solidFill>
-            <a:srgbClr val="F4F7FB"/>
-          </a:solidFill>
-          <a:ln>
-            <a:solidFill>
-              <a:srgbClr val="F4F7FB"/>
-            </a:solidFill>
-          </a:ln>
-        </p:spPr>
-        <p:style>
-          <a:lnRef idx="1">
-            <a:schemeClr val="accent1"/>
-          </a:lnRef>
-          <a:fillRef idx="3">
-            <a:schemeClr val="accent1"/>
-          </a:fillRef>
-          <a:effectRef idx="2">
-            <a:schemeClr val="accent1"/>
-          </a:effectRef>
-          <a:fontRef idx="minor">
-            <a:schemeClr val="lt1"/>
-          </a:fontRef>
-        </p:style>
-        <p:txBody>
-          <a:bodyPr rtlCol="0" anchor="ctr" wrap="square" lIns="73152" rIns="73152" tIns="36576" bIns="36576"/>
-          <a:lstStyle/>
-          <a:p>
-            <a:pPr algn="l">
-              <a:spcAft>
-                <a:spcPts val="0"/>
-              </a:spcAft>
-              <a:defRPr sz="1300" b="1">
-                <a:solidFill>
-                  <a:srgbClr val="122C4E"/>
-                </a:solidFill>
-                <a:latin typeface="Noto Sans CJK KR"/>
-              </a:defRPr>
-            </a:pPr>
-            <a:r>
-              <a:t>현재 단계 미니 실습    |    현재 폴더 ~/ros2_curri/agv_ws    |    현재 터미널</a:t>
-            </a:r>
-          </a:p>
-        </p:txBody>
-      </p:sp>
-      <p:sp>
-        <p:nvSpPr>
-          <p:cNvPr id="7" name="Rounded Rectangle 6"/>
-          <p:cNvSpPr/>
-          <p:nvPr/>
-        </p:nvSpPr>
-        <p:spPr>
-          <a:xfrm>
-            <a:off x="749808" y="1874519"/>
-            <a:ext cx="10652760" cy="1993392"/>
-          </a:xfrm>
-          <a:prstGeom prst="roundRect">
-            <a:avLst/>
-          </a:prstGeom>
-          <a:solidFill>
-            <a:srgbClr val="FFF8EB"/>
-          </a:solidFill>
-          <a:ln>
-            <a:solidFill>
-              <a:srgbClr val="ECC680"/>
-            </a:solidFill>
-          </a:ln>
-        </p:spPr>
-        <p:style>
-          <a:lnRef idx="1">
-            <a:schemeClr val="accent1"/>
-          </a:lnRef>
-          <a:fillRef idx="3">
-            <a:schemeClr val="accent1"/>
-          </a:fillRef>
-          <a:effectRef idx="2">
-            <a:schemeClr val="accent1"/>
-          </a:effectRef>
-          <a:fontRef idx="minor">
-            <a:schemeClr val="lt1"/>
-          </a:fontRef>
-        </p:style>
-        <p:txBody>
-          <a:bodyPr rtlCol="0" anchor="ctr" wrap="square" lIns="73152" rIns="73152" tIns="36576" bIns="36576"/>
-          <a:lstStyle/>
-          <a:p>
-            <a:pPr algn="ctr">
-              <a:spcAft>
-                <a:spcPts val="0"/>
-              </a:spcAft>
-              <a:defRPr sz="2300" b="1">
-                <a:solidFill>
-                  <a:srgbClr val="122C4E"/>
-                </a:solidFill>
-                <a:latin typeface="Noto Sans CJK KR"/>
-              </a:defRPr>
-            </a:pPr>
-            <a:r>
-              <a:t>wheel friction mu를 1.0에서 0.3으로만 바꾼 뒤 직진 시 미끄럼 변화를 기록한다.</a:t>
-            </a:r>
-          </a:p>
-        </p:txBody>
-      </p:sp>
-      <p:sp>
-        <p:nvSpPr>
-          <p:cNvPr id="8" name="TextBox 7"/>
+      <p:pic>
+        <p:nvPicPr>
+          <p:cNvPr id="6" name="Picture 5" descr="04_m07_sdf_terminal_actual.png"/>
+          <p:cNvPicPr>
+            <a:picLocks noChangeAspect="1"/>
+          </p:cNvPicPr>
+          <p:nvPr/>
+        </p:nvPicPr>
+        <p:blipFill>
+          <a:blip r:embed="rId2"/>
+          <a:stretch>
+            <a:fillRect/>
+          </a:stretch>
+        </p:blipFill>
+        <p:spPr>
+          <a:xfrm>
+            <a:off x="2789770" y="1353312"/>
+            <a:ext cx="6609411" cy="4800600"/>
+          </a:xfrm>
+          <a:prstGeom prst="rect">
+            <a:avLst/>
+          </a:prstGeom>
+        </p:spPr>
+      </p:pic>
+      <p:sp>
+        <p:nvSpPr>
+          <p:cNvPr id="7" name="TextBox 6"/>
           <p:cNvSpPr txBox="1"/>
           <p:nvPr/>
         </p:nvSpPr>
         <p:spPr>
           <a:xfrm>
-            <a:off x="877824" y="4590288"/>
-            <a:ext cx="10241280" cy="594360"/>
+            <a:off x="777240" y="6144768"/>
+            <a:ext cx="10607040" cy="310896"/>
           </a:xfrm>
           <a:prstGeom prst="rect">
             <a:avLst/>
@@ -13147,15 +13320,15 @@
               <a:spcAft>
                 <a:spcPts val="0"/>
               </a:spcAft>
-              <a:defRPr sz="1900" b="1">
-                <a:solidFill>
-                  <a:srgbClr val="DB7E22"/>
-                </a:solidFill>
-                <a:latin typeface="Noto Sans CJK KR"/>
-              </a:defRPr>
-            </a:pPr>
-            <a:r>
-              <a:t>기록할 것: 바꾼 값(단위) · 기대한 변화 · 실제 출력/화면 · 원래 값으로 되돌린 결과</a:t>
+              <a:defRPr sz="1100" b="1">
+                <a:solidFill>
+                  <a:srgbClr val="2A8B5A"/>
+                </a:solidFill>
+                <a:latin typeface="Noto Sans CJK KR"/>
+              </a:defRPr>
+            </a:pPr>
+            <a:r>
+              <a:t>화면에서 확인: Valid 다음에 visual/collision과 mass/friction이 서로 다른 책임임을 읽습니다.</a:t>
             </a:r>
           </a:p>
         </p:txBody>
@@ -13212,7 +13385,7 @@
               </a:defRPr>
             </a:pPr>
             <a:r>
-              <a:t>체크포인트를 저장하고 다음 모듈로 넘긴다</a:t>
+              <a:t>객관적 검증 명령으로 완료를 확인한다</a:t>
             </a:r>
           </a:p>
         </p:txBody>
@@ -13251,7 +13424,7 @@
               </a:defRPr>
             </a:pPr>
             <a:r>
-              <a:t>현재 Complete는 다음 Starter의 기준선입니다.</a:t>
+              <a:t>화면만 보지 말고 topic·frame·파일·parameter를 다시 확인합니다.</a:t>
             </a:r>
           </a:p>
         </p:txBody>
@@ -13387,7 +13560,7 @@
               </a:defRPr>
             </a:pPr>
             <a:r>
-              <a:t>현재 단계 체크포인트    |    현재 폴더 ~/ros2_curri/agv_ws    |    현재 터미널</a:t>
+              <a:t>현재 단계 검증    |    현재 폴더 ~/ros2_curri/agv_ws    |    현재 터미널</a:t>
             </a:r>
           </a:p>
         </p:txBody>
@@ -13400,8 +13573,70 @@
         </p:nvSpPr>
         <p:spPr>
           <a:xfrm>
-            <a:off x="685800" y="1737360"/>
-            <a:ext cx="10972800" cy="3611880"/>
+            <a:off x="658368" y="1755648"/>
+            <a:ext cx="10972800" cy="2148840"/>
+          </a:xfrm>
+          <a:prstGeom prst="roundRect">
+            <a:avLst/>
+          </a:prstGeom>
+          <a:solidFill>
+            <a:srgbClr val="1D232D"/>
+          </a:solidFill>
+          <a:ln>
+            <a:solidFill>
+              <a:srgbClr val="1D232D"/>
+            </a:solidFill>
+          </a:ln>
+        </p:spPr>
+        <p:style>
+          <a:lnRef idx="1">
+            <a:schemeClr val="accent1"/>
+          </a:lnRef>
+          <a:fillRef idx="3">
+            <a:schemeClr val="accent1"/>
+          </a:fillRef>
+          <a:effectRef idx="2">
+            <a:schemeClr val="accent1"/>
+          </a:effectRef>
+          <a:fontRef idx="minor">
+            <a:schemeClr val="lt1"/>
+          </a:fontRef>
+        </p:style>
+        <p:txBody>
+          <a:bodyPr rtlCol="0" anchor="ctr" wrap="square" lIns="73152" rIns="73152" tIns="36576" bIns="36576"/>
+          <a:lstStyle/>
+          <a:p>
+            <a:pPr algn="l">
+              <a:spcAft>
+                <a:spcPts val="0"/>
+              </a:spcAft>
+              <a:defRPr sz="1600" b="0">
+                <a:solidFill>
+                  <a:srgbClr val="FFFFFF"/>
+                </a:solidFill>
+                <a:latin typeface="DejaVu Sans Mono"/>
+              </a:defRPr>
+            </a:pPr>
+            <a:r>
+              <a:t>gz sdf -k ~/ros2_curri/agv_ws/src/agv_description/curriculum_stages/M07/model.sdf</a:t>
+            </a:r>
+            <a:br/>
+            <a:r>
+              <a:t>rg -n '&lt;sensor|DiffDrive' ~/ros2_curri/agv_ws/src/agv_description/curriculum_stages/M07/model.sdf</a:t>
+            </a:r>
+          </a:p>
+        </p:txBody>
+      </p:sp>
+      <p:sp>
+        <p:nvSpPr>
+          <p:cNvPr id="8" name="Rounded Rectangle 7"/>
+          <p:cNvSpPr/>
+          <p:nvPr/>
+        </p:nvSpPr>
+        <p:spPr>
+          <a:xfrm>
+            <a:off x="658368" y="4206240"/>
+            <a:ext cx="10972800" cy="1554480"/>
           </a:xfrm>
           <a:prstGeom prst="roundRect">
             <a:avLst/>
@@ -13411,7 +13646,7 @@
           </a:solidFill>
           <a:ln>
             <a:solidFill>
-              <a:srgbClr val="D2DCE8"/>
+              <a:srgbClr val="D1DFD5"/>
             </a:solidFill>
           </a:ln>
         </p:spPr>
@@ -13430,112 +13665,34 @@
           </a:fontRef>
         </p:style>
         <p:txBody>
-          <a:bodyPr rtlCol="0" anchor="ctr"/>
-          <a:lstStyle/>
-          <a:p>
-            <a:pPr algn="ctr"/>
-          </a:p>
-        </p:txBody>
-      </p:sp>
-      <p:sp>
-        <p:nvSpPr>
-          <p:cNvPr id="8" name="TextBox 7"/>
-          <p:cNvSpPr txBox="1"/>
-          <p:nvPr/>
-        </p:nvSpPr>
-        <p:spPr>
-          <a:xfrm>
-            <a:off x="896112" y="1993392"/>
-            <a:ext cx="10332720" cy="2971800"/>
-          </a:xfrm>
-          <a:prstGeom prst="rect">
-            <a:avLst/>
-          </a:prstGeom>
-          <a:noFill/>
-        </p:spPr>
-        <p:txBody>
-          <a:bodyPr wrap="square" lIns="109728" rIns="109728">
-            <a:spAutoFit/>
-          </a:bodyPr>
-          <a:lstStyle/>
-          <a:p>
-            <a:pPr>
-              <a:spcAft>
-                <a:spcPts val="800"/>
-              </a:spcAft>
-              <a:defRPr sz="1800">
-                <a:solidFill>
-                  <a:srgbClr val="122C4E"/>
-                </a:solidFill>
-                <a:latin typeface="Noto Sans CJK KR"/>
-              </a:defRPr>
-            </a:pPr>
-            <a:r>
-              <a:t>• □ 완료 화면: AGV가 바닥에 안정적으로 놓이고 바퀴 접촉·충돌 파라미터가 모델에 존재한다.</a:t>
-            </a:r>
-          </a:p>
-          <a:p>
-            <a:pPr>
-              <a:spcAft>
-                <a:spcPts val="800"/>
-              </a:spcAft>
-              <a:defRPr sz="1800">
-                <a:solidFill>
-                  <a:srgbClr val="122C4E"/>
-                </a:solidFill>
-                <a:latin typeface="Noto Sans CJK KR"/>
-              </a:defRPr>
-            </a:pPr>
-            <a:r>
-              <a:t>• □ Complete 파일: blocks/B_robot_build/M07_physics_modeling/complete/</a:t>
-            </a:r>
-          </a:p>
-          <a:p>
-            <a:pPr>
-              <a:spcAft>
-                <a:spcPts val="800"/>
-              </a:spcAft>
-              <a:defRPr sz="1800">
-                <a:solidFill>
-                  <a:srgbClr val="122C4E"/>
-                </a:solidFill>
-                <a:latin typeface="Noto Sans CJK KR"/>
-              </a:defRPr>
-            </a:pPr>
-            <a:r>
-              <a:t>• □ 정상 로그·캡처: logs/validation.log, screenshots/validation_terminal.png</a:t>
-            </a:r>
-          </a:p>
-          <a:p>
-            <a:pPr>
-              <a:spcAft>
-                <a:spcPts val="800"/>
-              </a:spcAft>
-              <a:defRPr sz="1800">
-                <a:solidFill>
-                  <a:srgbClr val="122C4E"/>
-                </a:solidFill>
-                <a:latin typeface="Noto Sans CJK KR"/>
-              </a:defRPr>
-            </a:pPr>
-            <a:r>
-              <a:t>• □ 버전 식별: CHECKSUM_or_TAG.txt의 SHA-256 manifest</a:t>
-            </a:r>
-          </a:p>
-          <a:p>
-            <a:pPr>
-              <a:spcAft>
-                <a:spcPts val="800"/>
-              </a:spcAft>
-              <a:defRPr sz="1800">
-                <a:solidFill>
-                  <a:srgbClr val="122C4E"/>
-                </a:solidFill>
-                <a:latin typeface="Noto Sans CJK KR"/>
-              </a:defRPr>
-            </a:pPr>
-            <a:r>
-              <a:t>• □ 다음 시작 조건: M08 World/Spawn</a:t>
+          <a:bodyPr rtlCol="0" anchor="ctr" wrap="square" lIns="73152" rIns="73152" tIns="36576" bIns="36576"/>
+          <a:lstStyle/>
+          <a:p>
+            <a:pPr algn="l">
+              <a:spcAft>
+                <a:spcPts val="0"/>
+              </a:spcAft>
+              <a:defRPr sz="1800" b="1">
+                <a:solidFill>
+                  <a:srgbClr val="2A8B5A"/>
+                </a:solidFill>
+                <a:latin typeface="Noto Sans CJK KR"/>
+              </a:defRPr>
+            </a:pPr>
+            <a:r>
+              <a:t>완료 체크</a:t>
+            </a:r>
+            <a:br/>
+            <a:r>
+              <a:t>□ 명령이 오류 없이 실행된다.</a:t>
+            </a:r>
+            <a:br/>
+            <a:r>
+              <a:t>□ 기대한 파일·topic·frame·parameter 이름이 보인다.</a:t>
+            </a:r>
+            <a:br/>
+            <a:r>
+              <a:t>□ 값의 단위와 방향을 한 문장으로 설명할 수 있다.</a:t>
             </a:r>
           </a:p>
         </p:txBody>
@@ -13548,8 +13705,8 @@
         </p:nvSpPr>
         <p:spPr>
           <a:xfrm>
-            <a:off x="868680" y="5596128"/>
-            <a:ext cx="10515600" cy="338328"/>
+            <a:off x="731520" y="5989320"/>
+            <a:ext cx="10789920" cy="237744"/>
           </a:xfrm>
           <a:prstGeom prst="rect">
             <a:avLst/>
@@ -13562,19 +13719,19 @@
           </a:bodyPr>
           <a:lstStyle/>
           <a:p>
-            <a:pPr algn="ctr">
-              <a:spcAft>
-                <a:spcPts val="0"/>
-              </a:spcAft>
-              <a:defRPr sz="1700" b="1">
-                <a:solidFill>
-                  <a:srgbClr val="2A8B5A"/>
-                </a:solidFill>
-                <a:latin typeface="Noto Sans CJK KR"/>
-              </a:defRPr>
-            </a:pPr>
-            <a:r>
-              <a:t>다음 모듈을 시작하기 전, 이 슬라이드의 Complete와 다음 모듈의 Starter를 비교합니다.</a:t>
+            <a:pPr algn="l">
+              <a:spcAft>
+                <a:spcPts val="0"/>
+              </a:spcAft>
+              <a:defRPr sz="1500" b="1">
+                <a:solidFill>
+                  <a:srgbClr val="122C4E"/>
+                </a:solidFill>
+                <a:latin typeface="Noto Sans CJK KR"/>
+              </a:defRPr>
+            </a:pPr>
+            <a:r>
+              <a:t>완료 조건: AGV가 바닥에 안정적으로 놓이고 바퀴 접촉·충돌 파라미터가 모델에 존재한다.</a:t>
             </a:r>
           </a:p>
         </p:txBody>
@@ -13631,6 +13788,1279 @@
               </a:defRPr>
             </a:pPr>
             <a:r>
+              <a:t>막히면: 증상 → 우선 확인 → 재검증</a:t>
+            </a:r>
+          </a:p>
+        </p:txBody>
+      </p:sp>
+      <p:sp>
+        <p:nvSpPr>
+          <p:cNvPr id="3" name="TextBox 2"/>
+          <p:cNvSpPr txBox="1"/>
+          <p:nvPr/>
+        </p:nvSpPr>
+        <p:spPr>
+          <a:xfrm>
+            <a:off x="603504" y="859536"/>
+            <a:ext cx="10698480" cy="292608"/>
+          </a:xfrm>
+          <a:prstGeom prst="rect">
+            <a:avLst/>
+          </a:prstGeom>
+          <a:noFill/>
+        </p:spPr>
+        <p:txBody>
+          <a:bodyPr wrap="square" lIns="73152" rIns="73152" tIns="36576" bIns="36576">
+            <a:spAutoFit/>
+          </a:bodyPr>
+          <a:lstStyle/>
+          <a:p>
+            <a:pPr algn="l">
+              <a:spcAft>
+                <a:spcPts val="0"/>
+              </a:spcAft>
+              <a:defRPr sz="1700" b="0">
+                <a:solidFill>
+                  <a:srgbClr val="5C6672"/>
+                </a:solidFill>
+                <a:latin typeface="Noto Sans CJK KR"/>
+              </a:defRPr>
+            </a:pPr>
+            <a:r>
+              <a:t>오류 메시지를 숨기지 않고 같은 순서로 점검합니다.</a:t>
+            </a:r>
+          </a:p>
+        </p:txBody>
+      </p:sp>
+      <p:sp>
+        <p:nvSpPr>
+          <p:cNvPr id="4" name="TextBox 3"/>
+          <p:cNvSpPr txBox="1"/>
+          <p:nvPr/>
+        </p:nvSpPr>
+        <p:spPr>
+          <a:xfrm>
+            <a:off x="530352" y="6510528"/>
+            <a:ext cx="7772400" cy="201168"/>
+          </a:xfrm>
+          <a:prstGeom prst="rect">
+            <a:avLst/>
+          </a:prstGeom>
+          <a:noFill/>
+        </p:spPr>
+        <p:txBody>
+          <a:bodyPr wrap="square" lIns="73152" rIns="73152" tIns="36576" bIns="36576">
+            <a:spAutoFit/>
+          </a:bodyPr>
+          <a:lstStyle/>
+          <a:p>
+            <a:pPr algn="l">
+              <a:spcAft>
+                <a:spcPts val="0"/>
+              </a:spcAft>
+              <a:defRPr sz="1000" b="0">
+                <a:solidFill>
+                  <a:srgbClr val="5C6672"/>
+                </a:solidFill>
+                <a:latin typeface="Noto Sans CJK KR"/>
+              </a:defRPr>
+            </a:pPr>
+            <a:r>
+              <a:t>ROS 2 Jazzy · Gazebo Harmonic · M07 · 따라 하기형 AGV 실습</a:t>
+            </a:r>
+          </a:p>
+        </p:txBody>
+      </p:sp>
+      <p:sp>
+        <p:nvSpPr>
+          <p:cNvPr id="5" name="TextBox 4"/>
+          <p:cNvSpPr txBox="1"/>
+          <p:nvPr/>
+        </p:nvSpPr>
+        <p:spPr>
+          <a:xfrm>
+            <a:off x="9144000" y="6510528"/>
+            <a:ext cx="2468880" cy="201168"/>
+          </a:xfrm>
+          <a:prstGeom prst="rect">
+            <a:avLst/>
+          </a:prstGeom>
+          <a:noFill/>
+        </p:spPr>
+        <p:txBody>
+          <a:bodyPr wrap="square" lIns="73152" rIns="73152" tIns="36576" bIns="36576">
+            <a:spAutoFit/>
+          </a:bodyPr>
+          <a:lstStyle/>
+          <a:p>
+            <a:pPr algn="r">
+              <a:spcAft>
+                <a:spcPts val="0"/>
+              </a:spcAft>
+              <a:defRPr sz="1000" b="0">
+                <a:solidFill>
+                  <a:srgbClr val="5C6672"/>
+                </a:solidFill>
+                <a:latin typeface="Noto Sans CJK KR"/>
+              </a:defRPr>
+            </a:pPr>
+            <a:r>
+              <a:t>명령·파일 경로는 슬라이드에서 복사 가능</a:t>
+            </a:r>
+          </a:p>
+        </p:txBody>
+      </p:sp>
+      <p:sp>
+        <p:nvSpPr>
+          <p:cNvPr id="6" name="Rectangle 5"/>
+          <p:cNvSpPr/>
+          <p:nvPr/>
+        </p:nvSpPr>
+        <p:spPr>
+          <a:xfrm>
+            <a:off x="566928" y="1188720"/>
+            <a:ext cx="11064240" cy="347472"/>
+          </a:xfrm>
+          <a:prstGeom prst="rect">
+            <a:avLst/>
+          </a:prstGeom>
+          <a:solidFill>
+            <a:srgbClr val="F4F7FB"/>
+          </a:solidFill>
+          <a:ln>
+            <a:solidFill>
+              <a:srgbClr val="F4F7FB"/>
+            </a:solidFill>
+          </a:ln>
+        </p:spPr>
+        <p:style>
+          <a:lnRef idx="1">
+            <a:schemeClr val="accent1"/>
+          </a:lnRef>
+          <a:fillRef idx="3">
+            <a:schemeClr val="accent1"/>
+          </a:fillRef>
+          <a:effectRef idx="2">
+            <a:schemeClr val="accent1"/>
+          </a:effectRef>
+          <a:fontRef idx="minor">
+            <a:schemeClr val="lt1"/>
+          </a:fontRef>
+        </p:style>
+        <p:txBody>
+          <a:bodyPr rtlCol="0" anchor="ctr" wrap="square" lIns="73152" rIns="73152" tIns="36576" bIns="36576"/>
+          <a:lstStyle/>
+          <a:p>
+            <a:pPr algn="l">
+              <a:spcAft>
+                <a:spcPts val="0"/>
+              </a:spcAft>
+              <a:defRPr sz="1300" b="1">
+                <a:solidFill>
+                  <a:srgbClr val="122C4E"/>
+                </a:solidFill>
+                <a:latin typeface="Noto Sans CJK KR"/>
+              </a:defRPr>
+            </a:pPr>
+            <a:r>
+              <a:t>현재 단계 오류 대응    |    현재 폴더 ~/ros2_curri/agv_ws    |    현재 터미널</a:t>
+            </a:r>
+          </a:p>
+        </p:txBody>
+      </p:sp>
+      <p:sp>
+        <p:nvSpPr>
+          <p:cNvPr id="7" name="Rounded Rectangle 6"/>
+          <p:cNvSpPr/>
+          <p:nvPr/>
+        </p:nvSpPr>
+        <p:spPr>
+          <a:xfrm>
+            <a:off x="694944" y="1755648"/>
+            <a:ext cx="10972800" cy="1115568"/>
+          </a:xfrm>
+          <a:prstGeom prst="roundRect">
+            <a:avLst/>
+          </a:prstGeom>
+          <a:solidFill>
+            <a:srgbClr val="FFF7F4"/>
+          </a:solidFill>
+          <a:ln>
+            <a:solidFill>
+              <a:srgbClr val="EDBEB4"/>
+            </a:solidFill>
+          </a:ln>
+        </p:spPr>
+        <p:style>
+          <a:lnRef idx="1">
+            <a:schemeClr val="accent1"/>
+          </a:lnRef>
+          <a:fillRef idx="3">
+            <a:schemeClr val="accent1"/>
+          </a:fillRef>
+          <a:effectRef idx="2">
+            <a:schemeClr val="accent1"/>
+          </a:effectRef>
+          <a:fontRef idx="minor">
+            <a:schemeClr val="lt1"/>
+          </a:fontRef>
+        </p:style>
+        <p:txBody>
+          <a:bodyPr rtlCol="0" anchor="ctr"/>
+          <a:lstStyle/>
+          <a:p>
+            <a:pPr algn="ctr"/>
+          </a:p>
+        </p:txBody>
+      </p:sp>
+      <p:sp>
+        <p:nvSpPr>
+          <p:cNvPr id="8" name="TextBox 7"/>
+          <p:cNvSpPr txBox="1"/>
+          <p:nvPr/>
+        </p:nvSpPr>
+        <p:spPr>
+          <a:xfrm>
+            <a:off x="896112" y="1901952"/>
+            <a:ext cx="2926080" cy="274320"/>
+          </a:xfrm>
+          <a:prstGeom prst="rect">
+            <a:avLst/>
+          </a:prstGeom>
+          <a:noFill/>
+        </p:spPr>
+        <p:txBody>
+          <a:bodyPr wrap="square" lIns="73152" rIns="73152" tIns="36576" bIns="36576">
+            <a:spAutoFit/>
+          </a:bodyPr>
+          <a:lstStyle/>
+          <a:p>
+            <a:pPr algn="l">
+              <a:spcAft>
+                <a:spcPts val="0"/>
+              </a:spcAft>
+              <a:defRPr sz="1800" b="1">
+                <a:solidFill>
+                  <a:srgbClr val="BE3B3B"/>
+                </a:solidFill>
+                <a:latin typeface="Noto Sans CJK KR"/>
+              </a:defRPr>
+            </a:pPr>
+            <a:r>
+              <a:t>증상 1: spawn 직후 떨리거나 날아감</a:t>
+            </a:r>
+          </a:p>
+        </p:txBody>
+      </p:sp>
+      <p:sp>
+        <p:nvSpPr>
+          <p:cNvPr id="9" name="TextBox 8"/>
+          <p:cNvSpPr txBox="1"/>
+          <p:nvPr/>
+        </p:nvSpPr>
+        <p:spPr>
+          <a:xfrm>
+            <a:off x="3794760" y="1883664"/>
+            <a:ext cx="7543800" cy="621792"/>
+          </a:xfrm>
+          <a:prstGeom prst="rect">
+            <a:avLst/>
+          </a:prstGeom>
+          <a:noFill/>
+        </p:spPr>
+        <p:txBody>
+          <a:bodyPr wrap="square" lIns="73152" rIns="73152" tIns="36576" bIns="36576">
+            <a:spAutoFit/>
+          </a:bodyPr>
+          <a:lstStyle/>
+          <a:p>
+            <a:pPr algn="l">
+              <a:spcAft>
+                <a:spcPts val="0"/>
+              </a:spcAft>
+              <a:defRPr sz="1600" b="0">
+                <a:solidFill>
+                  <a:srgbClr val="122C4E"/>
+                </a:solidFill>
+                <a:latin typeface="Noto Sans CJK KR"/>
+              </a:defRPr>
+            </a:pPr>
+            <a:r>
+              <a:t>우선 확인: inertia·collision overlap·너무 작은 mass를 확인한다.</a:t>
+            </a:r>
+            <a:br/>
+            <a:r>
+              <a:t>수정 후: gz sdf -k ~/ros2_curri/agv_ws/src/agv_description/curriculum_stages/M07/model.sdf</a:t>
+            </a:r>
+          </a:p>
+        </p:txBody>
+      </p:sp>
+      <p:sp>
+        <p:nvSpPr>
+          <p:cNvPr id="10" name="Rounded Rectangle 9"/>
+          <p:cNvSpPr/>
+          <p:nvPr/>
+        </p:nvSpPr>
+        <p:spPr>
+          <a:xfrm>
+            <a:off x="694944" y="3172968"/>
+            <a:ext cx="10972800" cy="1115568"/>
+          </a:xfrm>
+          <a:prstGeom prst="roundRect">
+            <a:avLst/>
+          </a:prstGeom>
+          <a:solidFill>
+            <a:srgbClr val="FFF7F4"/>
+          </a:solidFill>
+          <a:ln>
+            <a:solidFill>
+              <a:srgbClr val="EDBEB4"/>
+            </a:solidFill>
+          </a:ln>
+        </p:spPr>
+        <p:style>
+          <a:lnRef idx="1">
+            <a:schemeClr val="accent1"/>
+          </a:lnRef>
+          <a:fillRef idx="3">
+            <a:schemeClr val="accent1"/>
+          </a:fillRef>
+          <a:effectRef idx="2">
+            <a:schemeClr val="accent1"/>
+          </a:effectRef>
+          <a:fontRef idx="minor">
+            <a:schemeClr val="lt1"/>
+          </a:fontRef>
+        </p:style>
+        <p:txBody>
+          <a:bodyPr rtlCol="0" anchor="ctr"/>
+          <a:lstStyle/>
+          <a:p>
+            <a:pPr algn="ctr"/>
+          </a:p>
+        </p:txBody>
+      </p:sp>
+      <p:sp>
+        <p:nvSpPr>
+          <p:cNvPr id="11" name="TextBox 10"/>
+          <p:cNvSpPr txBox="1"/>
+          <p:nvPr/>
+        </p:nvSpPr>
+        <p:spPr>
+          <a:xfrm>
+            <a:off x="896112" y="3319272"/>
+            <a:ext cx="2926080" cy="274320"/>
+          </a:xfrm>
+          <a:prstGeom prst="rect">
+            <a:avLst/>
+          </a:prstGeom>
+          <a:noFill/>
+        </p:spPr>
+        <p:txBody>
+          <a:bodyPr wrap="square" lIns="73152" rIns="73152" tIns="36576" bIns="36576">
+            <a:spAutoFit/>
+          </a:bodyPr>
+          <a:lstStyle/>
+          <a:p>
+            <a:pPr algn="l">
+              <a:spcAft>
+                <a:spcPts val="0"/>
+              </a:spcAft>
+              <a:defRPr sz="1800" b="1">
+                <a:solidFill>
+                  <a:srgbClr val="BE3B3B"/>
+                </a:solidFill>
+                <a:latin typeface="Noto Sans CJK KR"/>
+              </a:defRPr>
+            </a:pPr>
+            <a:r>
+              <a:t>증상 2: 바퀴가 헛돎</a:t>
+            </a:r>
+          </a:p>
+        </p:txBody>
+      </p:sp>
+      <p:sp>
+        <p:nvSpPr>
+          <p:cNvPr id="12" name="TextBox 11"/>
+          <p:cNvSpPr txBox="1"/>
+          <p:nvPr/>
+        </p:nvSpPr>
+        <p:spPr>
+          <a:xfrm>
+            <a:off x="3794760" y="3300984"/>
+            <a:ext cx="7543800" cy="621792"/>
+          </a:xfrm>
+          <a:prstGeom prst="rect">
+            <a:avLst/>
+          </a:prstGeom>
+          <a:noFill/>
+        </p:spPr>
+        <p:txBody>
+          <a:bodyPr wrap="square" lIns="73152" rIns="73152" tIns="36576" bIns="36576">
+            <a:spAutoFit/>
+          </a:bodyPr>
+          <a:lstStyle/>
+          <a:p>
+            <a:pPr algn="l">
+              <a:spcAft>
+                <a:spcPts val="0"/>
+              </a:spcAft>
+              <a:defRPr sz="1600" b="0">
+                <a:solidFill>
+                  <a:srgbClr val="122C4E"/>
+                </a:solidFill>
+                <a:latin typeface="Noto Sans CJK KR"/>
+              </a:defRPr>
+            </a:pPr>
+            <a:r>
+              <a:t>우선 확인: friction·contact·joint axis·wheel radius를 확인한다.</a:t>
+            </a:r>
+            <a:br/>
+            <a:r>
+              <a:t>수정 후: gz sdf -k ~/ros2_curri/agv_ws/src/agv_description/curriculum_stages/M07/model.sdf</a:t>
+            </a:r>
+          </a:p>
+        </p:txBody>
+      </p:sp>
+      <p:sp>
+        <p:nvSpPr>
+          <p:cNvPr id="13" name="TextBox 12"/>
+          <p:cNvSpPr txBox="1"/>
+          <p:nvPr/>
+        </p:nvSpPr>
+        <p:spPr>
+          <a:xfrm>
+            <a:off x="822960" y="5102352"/>
+            <a:ext cx="10607040" cy="402336"/>
+          </a:xfrm>
+          <a:prstGeom prst="rect">
+            <a:avLst/>
+          </a:prstGeom>
+          <a:noFill/>
+        </p:spPr>
+        <p:txBody>
+          <a:bodyPr wrap="square" lIns="73152" rIns="73152" tIns="36576" bIns="36576">
+            <a:spAutoFit/>
+          </a:bodyPr>
+          <a:lstStyle/>
+          <a:p>
+            <a:pPr algn="ctr">
+              <a:spcAft>
+                <a:spcPts val="0"/>
+              </a:spcAft>
+              <a:defRPr sz="1800" b="1">
+                <a:solidFill>
+                  <a:srgbClr val="DB7E22"/>
+                </a:solidFill>
+                <a:latin typeface="Noto Sans CJK KR"/>
+              </a:defRPr>
+            </a:pPr>
+            <a:r>
+              <a:t>공통 순서: ① 현재 폴더 ② source ③ 파일 경로 ④ 이름/타입/단위 ⑤ build·source 후 재실행</a:t>
+            </a:r>
+          </a:p>
+        </p:txBody>
+      </p:sp>
+    </p:spTree>
+  </p:cSld>
+  <p:clrMapOvr>
+    <a:masterClrMapping/>
+  </p:clrMapOvr>
+</p:sld>
+</file>
+
+<file path=ppt/slides/slide27.xml><?xml version="1.0" encoding="utf-8"?>
+<p:sld xmlns:a="http://schemas.openxmlformats.org/drawingml/2006/main" xmlns:p="http://schemas.openxmlformats.org/presentationml/2006/main" xmlns:r="http://schemas.openxmlformats.org/officeDocument/2006/relationships">
+  <p:cSld>
+    <p:spTree>
+      <p:nvGrpSpPr>
+        <p:cNvPr id="1" name=""/>
+        <p:cNvGrpSpPr/>
+        <p:nvPr/>
+      </p:nvGrpSpPr>
+      <p:grpSpPr/>
+      <p:sp>
+        <p:nvSpPr>
+          <p:cNvPr id="2" name="TextBox 1"/>
+          <p:cNvSpPr txBox="1"/>
+          <p:nvPr/>
+        </p:nvSpPr>
+        <p:spPr>
+          <a:xfrm>
+            <a:off x="566928" y="347472"/>
+            <a:ext cx="10881360" cy="438912"/>
+          </a:xfrm>
+          <a:prstGeom prst="rect">
+            <a:avLst/>
+          </a:prstGeom>
+          <a:noFill/>
+        </p:spPr>
+        <p:txBody>
+          <a:bodyPr wrap="square" lIns="73152" rIns="73152" tIns="36576" bIns="36576">
+            <a:spAutoFit/>
+          </a:bodyPr>
+          <a:lstStyle/>
+          <a:p>
+            <a:pPr algn="l">
+              <a:spcAft>
+                <a:spcPts val="0"/>
+              </a:spcAft>
+              <a:defRPr sz="3200" b="1">
+                <a:solidFill>
+                  <a:srgbClr val="122C4E"/>
+                </a:solidFill>
+                <a:latin typeface="Noto Sans CJK KR"/>
+              </a:defRPr>
+            </a:pPr>
+            <a:r>
+              <a:t>미니 실습: 값 하나를 바꾸고 결과를 비교한다</a:t>
+            </a:r>
+          </a:p>
+        </p:txBody>
+      </p:sp>
+      <p:sp>
+        <p:nvSpPr>
+          <p:cNvPr id="3" name="TextBox 2"/>
+          <p:cNvSpPr txBox="1"/>
+          <p:nvPr/>
+        </p:nvSpPr>
+        <p:spPr>
+          <a:xfrm>
+            <a:off x="603504" y="859536"/>
+            <a:ext cx="10698480" cy="292608"/>
+          </a:xfrm>
+          <a:prstGeom prst="rect">
+            <a:avLst/>
+          </a:prstGeom>
+          <a:noFill/>
+        </p:spPr>
+        <p:txBody>
+          <a:bodyPr wrap="square" lIns="73152" rIns="73152" tIns="36576" bIns="36576">
+            <a:spAutoFit/>
+          </a:bodyPr>
+          <a:lstStyle/>
+          <a:p>
+            <a:pPr algn="l">
+              <a:spcAft>
+                <a:spcPts val="0"/>
+              </a:spcAft>
+              <a:defRPr sz="1700" b="0">
+                <a:solidFill>
+                  <a:srgbClr val="5C6672"/>
+                </a:solidFill>
+                <a:latin typeface="Noto Sans CJK KR"/>
+              </a:defRPr>
+            </a:pPr>
+            <a:r>
+              <a:t>정상 결과를 만든 뒤에는 한 번에 하나의 값만 바꿉니다.</a:t>
+            </a:r>
+          </a:p>
+        </p:txBody>
+      </p:sp>
+      <p:sp>
+        <p:nvSpPr>
+          <p:cNvPr id="4" name="TextBox 3"/>
+          <p:cNvSpPr txBox="1"/>
+          <p:nvPr/>
+        </p:nvSpPr>
+        <p:spPr>
+          <a:xfrm>
+            <a:off x="530352" y="6510528"/>
+            <a:ext cx="7772400" cy="201168"/>
+          </a:xfrm>
+          <a:prstGeom prst="rect">
+            <a:avLst/>
+          </a:prstGeom>
+          <a:noFill/>
+        </p:spPr>
+        <p:txBody>
+          <a:bodyPr wrap="square" lIns="73152" rIns="73152" tIns="36576" bIns="36576">
+            <a:spAutoFit/>
+          </a:bodyPr>
+          <a:lstStyle/>
+          <a:p>
+            <a:pPr algn="l">
+              <a:spcAft>
+                <a:spcPts val="0"/>
+              </a:spcAft>
+              <a:defRPr sz="1000" b="0">
+                <a:solidFill>
+                  <a:srgbClr val="5C6672"/>
+                </a:solidFill>
+                <a:latin typeface="Noto Sans CJK KR"/>
+              </a:defRPr>
+            </a:pPr>
+            <a:r>
+              <a:t>ROS 2 Jazzy · Gazebo Harmonic · M07 · 따라 하기형 AGV 실습</a:t>
+            </a:r>
+          </a:p>
+        </p:txBody>
+      </p:sp>
+      <p:sp>
+        <p:nvSpPr>
+          <p:cNvPr id="5" name="TextBox 4"/>
+          <p:cNvSpPr txBox="1"/>
+          <p:nvPr/>
+        </p:nvSpPr>
+        <p:spPr>
+          <a:xfrm>
+            <a:off x="9144000" y="6510528"/>
+            <a:ext cx="2468880" cy="201168"/>
+          </a:xfrm>
+          <a:prstGeom prst="rect">
+            <a:avLst/>
+          </a:prstGeom>
+          <a:noFill/>
+        </p:spPr>
+        <p:txBody>
+          <a:bodyPr wrap="square" lIns="73152" rIns="73152" tIns="36576" bIns="36576">
+            <a:spAutoFit/>
+          </a:bodyPr>
+          <a:lstStyle/>
+          <a:p>
+            <a:pPr algn="r">
+              <a:spcAft>
+                <a:spcPts val="0"/>
+              </a:spcAft>
+              <a:defRPr sz="1000" b="0">
+                <a:solidFill>
+                  <a:srgbClr val="5C6672"/>
+                </a:solidFill>
+                <a:latin typeface="Noto Sans CJK KR"/>
+              </a:defRPr>
+            </a:pPr>
+            <a:r>
+              <a:t>명령·파일 경로는 슬라이드에서 복사 가능</a:t>
+            </a:r>
+          </a:p>
+        </p:txBody>
+      </p:sp>
+      <p:sp>
+        <p:nvSpPr>
+          <p:cNvPr id="6" name="Rectangle 5"/>
+          <p:cNvSpPr/>
+          <p:nvPr/>
+        </p:nvSpPr>
+        <p:spPr>
+          <a:xfrm>
+            <a:off x="566928" y="1188720"/>
+            <a:ext cx="11064240" cy="347472"/>
+          </a:xfrm>
+          <a:prstGeom prst="rect">
+            <a:avLst/>
+          </a:prstGeom>
+          <a:solidFill>
+            <a:srgbClr val="F4F7FB"/>
+          </a:solidFill>
+          <a:ln>
+            <a:solidFill>
+              <a:srgbClr val="F4F7FB"/>
+            </a:solidFill>
+          </a:ln>
+        </p:spPr>
+        <p:style>
+          <a:lnRef idx="1">
+            <a:schemeClr val="accent1"/>
+          </a:lnRef>
+          <a:fillRef idx="3">
+            <a:schemeClr val="accent1"/>
+          </a:fillRef>
+          <a:effectRef idx="2">
+            <a:schemeClr val="accent1"/>
+          </a:effectRef>
+          <a:fontRef idx="minor">
+            <a:schemeClr val="lt1"/>
+          </a:fontRef>
+        </p:style>
+        <p:txBody>
+          <a:bodyPr rtlCol="0" anchor="ctr" wrap="square" lIns="73152" rIns="73152" tIns="36576" bIns="36576"/>
+          <a:lstStyle/>
+          <a:p>
+            <a:pPr algn="l">
+              <a:spcAft>
+                <a:spcPts val="0"/>
+              </a:spcAft>
+              <a:defRPr sz="1300" b="1">
+                <a:solidFill>
+                  <a:srgbClr val="122C4E"/>
+                </a:solidFill>
+                <a:latin typeface="Noto Sans CJK KR"/>
+              </a:defRPr>
+            </a:pPr>
+            <a:r>
+              <a:t>현재 단계 미니 실습    |    현재 폴더 ~/ros2_curri/agv_ws    |    현재 터미널</a:t>
+            </a:r>
+          </a:p>
+        </p:txBody>
+      </p:sp>
+      <p:sp>
+        <p:nvSpPr>
+          <p:cNvPr id="7" name="Rounded Rectangle 6"/>
+          <p:cNvSpPr/>
+          <p:nvPr/>
+        </p:nvSpPr>
+        <p:spPr>
+          <a:xfrm>
+            <a:off x="749808" y="1874519"/>
+            <a:ext cx="10652760" cy="1993392"/>
+          </a:xfrm>
+          <a:prstGeom prst="roundRect">
+            <a:avLst/>
+          </a:prstGeom>
+          <a:solidFill>
+            <a:srgbClr val="FFF8EB"/>
+          </a:solidFill>
+          <a:ln>
+            <a:solidFill>
+              <a:srgbClr val="ECC680"/>
+            </a:solidFill>
+          </a:ln>
+        </p:spPr>
+        <p:style>
+          <a:lnRef idx="1">
+            <a:schemeClr val="accent1"/>
+          </a:lnRef>
+          <a:fillRef idx="3">
+            <a:schemeClr val="accent1"/>
+          </a:fillRef>
+          <a:effectRef idx="2">
+            <a:schemeClr val="accent1"/>
+          </a:effectRef>
+          <a:fontRef idx="minor">
+            <a:schemeClr val="lt1"/>
+          </a:fontRef>
+        </p:style>
+        <p:txBody>
+          <a:bodyPr rtlCol="0" anchor="ctr" wrap="square" lIns="73152" rIns="73152" tIns="36576" bIns="36576"/>
+          <a:lstStyle/>
+          <a:p>
+            <a:pPr algn="ctr">
+              <a:spcAft>
+                <a:spcPts val="0"/>
+              </a:spcAft>
+              <a:defRPr sz="2300" b="1">
+                <a:solidFill>
+                  <a:srgbClr val="122C4E"/>
+                </a:solidFill>
+                <a:latin typeface="Noto Sans CJK KR"/>
+              </a:defRPr>
+            </a:pPr>
+            <a:r>
+              <a:t>wheel friction mu를 1.0에서 0.3으로만 바꾼 뒤 직진 시 미끄럼 변화를 기록한다.</a:t>
+            </a:r>
+          </a:p>
+        </p:txBody>
+      </p:sp>
+      <p:sp>
+        <p:nvSpPr>
+          <p:cNvPr id="8" name="TextBox 7"/>
+          <p:cNvSpPr txBox="1"/>
+          <p:nvPr/>
+        </p:nvSpPr>
+        <p:spPr>
+          <a:xfrm>
+            <a:off x="877824" y="4590288"/>
+            <a:ext cx="10241280" cy="594360"/>
+          </a:xfrm>
+          <a:prstGeom prst="rect">
+            <a:avLst/>
+          </a:prstGeom>
+          <a:noFill/>
+        </p:spPr>
+        <p:txBody>
+          <a:bodyPr wrap="square" lIns="73152" rIns="73152" tIns="36576" bIns="36576">
+            <a:spAutoFit/>
+          </a:bodyPr>
+          <a:lstStyle/>
+          <a:p>
+            <a:pPr algn="ctr">
+              <a:spcAft>
+                <a:spcPts val="0"/>
+              </a:spcAft>
+              <a:defRPr sz="1900" b="1">
+                <a:solidFill>
+                  <a:srgbClr val="DB7E22"/>
+                </a:solidFill>
+                <a:latin typeface="Noto Sans CJK KR"/>
+              </a:defRPr>
+            </a:pPr>
+            <a:r>
+              <a:t>기록할 것: 바꾼 값(단위) · 기대한 변화 · 실제 출력/화면 · 원래 값으로 되돌린 결과</a:t>
+            </a:r>
+          </a:p>
+        </p:txBody>
+      </p:sp>
+    </p:spTree>
+  </p:cSld>
+  <p:clrMapOvr>
+    <a:masterClrMapping/>
+  </p:clrMapOvr>
+</p:sld>
+</file>
+
+<file path=ppt/slides/slide28.xml><?xml version="1.0" encoding="utf-8"?>
+<p:sld xmlns:a="http://schemas.openxmlformats.org/drawingml/2006/main" xmlns:p="http://schemas.openxmlformats.org/presentationml/2006/main" xmlns:r="http://schemas.openxmlformats.org/officeDocument/2006/relationships">
+  <p:cSld>
+    <p:spTree>
+      <p:nvGrpSpPr>
+        <p:cNvPr id="1" name=""/>
+        <p:cNvGrpSpPr/>
+        <p:nvPr/>
+      </p:nvGrpSpPr>
+      <p:grpSpPr/>
+      <p:sp>
+        <p:nvSpPr>
+          <p:cNvPr id="2" name="TextBox 1"/>
+          <p:cNvSpPr txBox="1"/>
+          <p:nvPr/>
+        </p:nvSpPr>
+        <p:spPr>
+          <a:xfrm>
+            <a:off x="566928" y="347472"/>
+            <a:ext cx="10881360" cy="438912"/>
+          </a:xfrm>
+          <a:prstGeom prst="rect">
+            <a:avLst/>
+          </a:prstGeom>
+          <a:noFill/>
+        </p:spPr>
+        <p:txBody>
+          <a:bodyPr wrap="square" lIns="73152" rIns="73152" tIns="36576" bIns="36576">
+            <a:spAutoFit/>
+          </a:bodyPr>
+          <a:lstStyle/>
+          <a:p>
+            <a:pPr algn="l">
+              <a:spcAft>
+                <a:spcPts val="0"/>
+              </a:spcAft>
+              <a:defRPr sz="3200" b="1">
+                <a:solidFill>
+                  <a:srgbClr val="122C4E"/>
+                </a:solidFill>
+                <a:latin typeface="Noto Sans CJK KR"/>
+              </a:defRPr>
+            </a:pPr>
+            <a:r>
+              <a:t>체크포인트를 저장하고 다음 모듈로 넘긴다</a:t>
+            </a:r>
+          </a:p>
+        </p:txBody>
+      </p:sp>
+      <p:sp>
+        <p:nvSpPr>
+          <p:cNvPr id="3" name="TextBox 2"/>
+          <p:cNvSpPr txBox="1"/>
+          <p:nvPr/>
+        </p:nvSpPr>
+        <p:spPr>
+          <a:xfrm>
+            <a:off x="603504" y="859536"/>
+            <a:ext cx="10698480" cy="292608"/>
+          </a:xfrm>
+          <a:prstGeom prst="rect">
+            <a:avLst/>
+          </a:prstGeom>
+          <a:noFill/>
+        </p:spPr>
+        <p:txBody>
+          <a:bodyPr wrap="square" lIns="73152" rIns="73152" tIns="36576" bIns="36576">
+            <a:spAutoFit/>
+          </a:bodyPr>
+          <a:lstStyle/>
+          <a:p>
+            <a:pPr algn="l">
+              <a:spcAft>
+                <a:spcPts val="0"/>
+              </a:spcAft>
+              <a:defRPr sz="1700" b="0">
+                <a:solidFill>
+                  <a:srgbClr val="5C6672"/>
+                </a:solidFill>
+                <a:latin typeface="Noto Sans CJK KR"/>
+              </a:defRPr>
+            </a:pPr>
+            <a:r>
+              <a:t>현재 Complete는 다음 Starter의 기준선입니다.</a:t>
+            </a:r>
+          </a:p>
+        </p:txBody>
+      </p:sp>
+      <p:sp>
+        <p:nvSpPr>
+          <p:cNvPr id="4" name="TextBox 3"/>
+          <p:cNvSpPr txBox="1"/>
+          <p:nvPr/>
+        </p:nvSpPr>
+        <p:spPr>
+          <a:xfrm>
+            <a:off x="530352" y="6510528"/>
+            <a:ext cx="7772400" cy="201168"/>
+          </a:xfrm>
+          <a:prstGeom prst="rect">
+            <a:avLst/>
+          </a:prstGeom>
+          <a:noFill/>
+        </p:spPr>
+        <p:txBody>
+          <a:bodyPr wrap="square" lIns="73152" rIns="73152" tIns="36576" bIns="36576">
+            <a:spAutoFit/>
+          </a:bodyPr>
+          <a:lstStyle/>
+          <a:p>
+            <a:pPr algn="l">
+              <a:spcAft>
+                <a:spcPts val="0"/>
+              </a:spcAft>
+              <a:defRPr sz="1000" b="0">
+                <a:solidFill>
+                  <a:srgbClr val="5C6672"/>
+                </a:solidFill>
+                <a:latin typeface="Noto Sans CJK KR"/>
+              </a:defRPr>
+            </a:pPr>
+            <a:r>
+              <a:t>ROS 2 Jazzy · Gazebo Harmonic · M07 · 따라 하기형 AGV 실습</a:t>
+            </a:r>
+          </a:p>
+        </p:txBody>
+      </p:sp>
+      <p:sp>
+        <p:nvSpPr>
+          <p:cNvPr id="5" name="TextBox 4"/>
+          <p:cNvSpPr txBox="1"/>
+          <p:nvPr/>
+        </p:nvSpPr>
+        <p:spPr>
+          <a:xfrm>
+            <a:off x="9144000" y="6510528"/>
+            <a:ext cx="2468880" cy="201168"/>
+          </a:xfrm>
+          <a:prstGeom prst="rect">
+            <a:avLst/>
+          </a:prstGeom>
+          <a:noFill/>
+        </p:spPr>
+        <p:txBody>
+          <a:bodyPr wrap="square" lIns="73152" rIns="73152" tIns="36576" bIns="36576">
+            <a:spAutoFit/>
+          </a:bodyPr>
+          <a:lstStyle/>
+          <a:p>
+            <a:pPr algn="r">
+              <a:spcAft>
+                <a:spcPts val="0"/>
+              </a:spcAft>
+              <a:defRPr sz="1000" b="0">
+                <a:solidFill>
+                  <a:srgbClr val="5C6672"/>
+                </a:solidFill>
+                <a:latin typeface="Noto Sans CJK KR"/>
+              </a:defRPr>
+            </a:pPr>
+            <a:r>
+              <a:t>명령·파일 경로는 슬라이드에서 복사 가능</a:t>
+            </a:r>
+          </a:p>
+        </p:txBody>
+      </p:sp>
+      <p:sp>
+        <p:nvSpPr>
+          <p:cNvPr id="6" name="Rectangle 5"/>
+          <p:cNvSpPr/>
+          <p:nvPr/>
+        </p:nvSpPr>
+        <p:spPr>
+          <a:xfrm>
+            <a:off x="566928" y="1188720"/>
+            <a:ext cx="11064240" cy="347472"/>
+          </a:xfrm>
+          <a:prstGeom prst="rect">
+            <a:avLst/>
+          </a:prstGeom>
+          <a:solidFill>
+            <a:srgbClr val="F4F7FB"/>
+          </a:solidFill>
+          <a:ln>
+            <a:solidFill>
+              <a:srgbClr val="F4F7FB"/>
+            </a:solidFill>
+          </a:ln>
+        </p:spPr>
+        <p:style>
+          <a:lnRef idx="1">
+            <a:schemeClr val="accent1"/>
+          </a:lnRef>
+          <a:fillRef idx="3">
+            <a:schemeClr val="accent1"/>
+          </a:fillRef>
+          <a:effectRef idx="2">
+            <a:schemeClr val="accent1"/>
+          </a:effectRef>
+          <a:fontRef idx="minor">
+            <a:schemeClr val="lt1"/>
+          </a:fontRef>
+        </p:style>
+        <p:txBody>
+          <a:bodyPr rtlCol="0" anchor="ctr" wrap="square" lIns="73152" rIns="73152" tIns="36576" bIns="36576"/>
+          <a:lstStyle/>
+          <a:p>
+            <a:pPr algn="l">
+              <a:spcAft>
+                <a:spcPts val="0"/>
+              </a:spcAft>
+              <a:defRPr sz="1300" b="1">
+                <a:solidFill>
+                  <a:srgbClr val="122C4E"/>
+                </a:solidFill>
+                <a:latin typeface="Noto Sans CJK KR"/>
+              </a:defRPr>
+            </a:pPr>
+            <a:r>
+              <a:t>현재 단계 체크포인트    |    현재 폴더 ~/ros2_curri/agv_ws    |    현재 터미널</a:t>
+            </a:r>
+          </a:p>
+        </p:txBody>
+      </p:sp>
+      <p:sp>
+        <p:nvSpPr>
+          <p:cNvPr id="7" name="Rounded Rectangle 6"/>
+          <p:cNvSpPr/>
+          <p:nvPr/>
+        </p:nvSpPr>
+        <p:spPr>
+          <a:xfrm>
+            <a:off x="685800" y="1737360"/>
+            <a:ext cx="10972800" cy="3611880"/>
+          </a:xfrm>
+          <a:prstGeom prst="roundRect">
+            <a:avLst/>
+          </a:prstGeom>
+          <a:solidFill>
+            <a:srgbClr val="F4F7FB"/>
+          </a:solidFill>
+          <a:ln>
+            <a:solidFill>
+              <a:srgbClr val="D2DCE8"/>
+            </a:solidFill>
+          </a:ln>
+        </p:spPr>
+        <p:style>
+          <a:lnRef idx="1">
+            <a:schemeClr val="accent1"/>
+          </a:lnRef>
+          <a:fillRef idx="3">
+            <a:schemeClr val="accent1"/>
+          </a:fillRef>
+          <a:effectRef idx="2">
+            <a:schemeClr val="accent1"/>
+          </a:effectRef>
+          <a:fontRef idx="minor">
+            <a:schemeClr val="lt1"/>
+          </a:fontRef>
+        </p:style>
+        <p:txBody>
+          <a:bodyPr rtlCol="0" anchor="ctr"/>
+          <a:lstStyle/>
+          <a:p>
+            <a:pPr algn="ctr"/>
+          </a:p>
+        </p:txBody>
+      </p:sp>
+      <p:sp>
+        <p:nvSpPr>
+          <p:cNvPr id="8" name="TextBox 7"/>
+          <p:cNvSpPr txBox="1"/>
+          <p:nvPr/>
+        </p:nvSpPr>
+        <p:spPr>
+          <a:xfrm>
+            <a:off x="896112" y="1993392"/>
+            <a:ext cx="10332720" cy="2971800"/>
+          </a:xfrm>
+          <a:prstGeom prst="rect">
+            <a:avLst/>
+          </a:prstGeom>
+          <a:noFill/>
+        </p:spPr>
+        <p:txBody>
+          <a:bodyPr wrap="square" lIns="109728" rIns="109728">
+            <a:spAutoFit/>
+          </a:bodyPr>
+          <a:lstStyle/>
+          <a:p>
+            <a:pPr>
+              <a:spcAft>
+                <a:spcPts val="800"/>
+              </a:spcAft>
+              <a:defRPr sz="1800">
+                <a:solidFill>
+                  <a:srgbClr val="122C4E"/>
+                </a:solidFill>
+                <a:latin typeface="Noto Sans CJK KR"/>
+              </a:defRPr>
+            </a:pPr>
+            <a:r>
+              <a:t>• □ 완료 화면: AGV가 바닥에 안정적으로 놓이고 바퀴 접촉·충돌 파라미터가 모델에 존재한다.</a:t>
+            </a:r>
+          </a:p>
+          <a:p>
+            <a:pPr>
+              <a:spcAft>
+                <a:spcPts val="800"/>
+              </a:spcAft>
+              <a:defRPr sz="1800">
+                <a:solidFill>
+                  <a:srgbClr val="122C4E"/>
+                </a:solidFill>
+                <a:latin typeface="Noto Sans CJK KR"/>
+              </a:defRPr>
+            </a:pPr>
+            <a:r>
+              <a:t>• □ Complete 파일: blocks/B_robot_build/M07_physics_modeling/complete/</a:t>
+            </a:r>
+          </a:p>
+          <a:p>
+            <a:pPr>
+              <a:spcAft>
+                <a:spcPts val="800"/>
+              </a:spcAft>
+              <a:defRPr sz="1800">
+                <a:solidFill>
+                  <a:srgbClr val="122C4E"/>
+                </a:solidFill>
+                <a:latin typeface="Noto Sans CJK KR"/>
+              </a:defRPr>
+            </a:pPr>
+            <a:r>
+              <a:t>• □ 정상 로그·캡처: logs/validation.log, screenshots/validation_terminal.png</a:t>
+            </a:r>
+          </a:p>
+          <a:p>
+            <a:pPr>
+              <a:spcAft>
+                <a:spcPts val="800"/>
+              </a:spcAft>
+              <a:defRPr sz="1800">
+                <a:solidFill>
+                  <a:srgbClr val="122C4E"/>
+                </a:solidFill>
+                <a:latin typeface="Noto Sans CJK KR"/>
+              </a:defRPr>
+            </a:pPr>
+            <a:r>
+              <a:t>• □ 버전 식별: CHECKSUM_or_TAG.txt의 SHA-256 manifest</a:t>
+            </a:r>
+          </a:p>
+          <a:p>
+            <a:pPr>
+              <a:spcAft>
+                <a:spcPts val="800"/>
+              </a:spcAft>
+              <a:defRPr sz="1800">
+                <a:solidFill>
+                  <a:srgbClr val="122C4E"/>
+                </a:solidFill>
+                <a:latin typeface="Noto Sans CJK KR"/>
+              </a:defRPr>
+            </a:pPr>
+            <a:r>
+              <a:t>• □ 다음 시작 조건: M08 World/Spawn</a:t>
+            </a:r>
+          </a:p>
+        </p:txBody>
+      </p:sp>
+      <p:sp>
+        <p:nvSpPr>
+          <p:cNvPr id="9" name="TextBox 8"/>
+          <p:cNvSpPr txBox="1"/>
+          <p:nvPr/>
+        </p:nvSpPr>
+        <p:spPr>
+          <a:xfrm>
+            <a:off x="868680" y="5596128"/>
+            <a:ext cx="10515600" cy="338328"/>
+          </a:xfrm>
+          <a:prstGeom prst="rect">
+            <a:avLst/>
+          </a:prstGeom>
+          <a:noFill/>
+        </p:spPr>
+        <p:txBody>
+          <a:bodyPr wrap="square" lIns="73152" rIns="73152" tIns="36576" bIns="36576">
+            <a:spAutoFit/>
+          </a:bodyPr>
+          <a:lstStyle/>
+          <a:p>
+            <a:pPr algn="ctr">
+              <a:spcAft>
+                <a:spcPts val="0"/>
+              </a:spcAft>
+              <a:defRPr sz="1700" b="1">
+                <a:solidFill>
+                  <a:srgbClr val="2A8B5A"/>
+                </a:solidFill>
+                <a:latin typeface="Noto Sans CJK KR"/>
+              </a:defRPr>
+            </a:pPr>
+            <a:r>
+              <a:t>다음 모듈을 시작하기 전, 이 슬라이드의 Complete와 다음 모듈의 Starter를 비교합니다.</a:t>
+            </a:r>
+          </a:p>
+        </p:txBody>
+      </p:sp>
+    </p:spTree>
+  </p:cSld>
+  <p:clrMapOvr>
+    <a:masterClrMapping/>
+  </p:clrMapOvr>
+</p:sld>
+</file>
+
+<file path=ppt/slides/slide29.xml><?xml version="1.0" encoding="utf-8"?>
+<p:sld xmlns:a="http://schemas.openxmlformats.org/drawingml/2006/main" xmlns:p="http://schemas.openxmlformats.org/presentationml/2006/main" xmlns:r="http://schemas.openxmlformats.org/officeDocument/2006/relationships">
+  <p:cSld>
+    <p:spTree>
+      <p:nvGrpSpPr>
+        <p:cNvPr id="1" name=""/>
+        <p:cNvGrpSpPr/>
+        <p:nvPr/>
+      </p:nvGrpSpPr>
+      <p:grpSpPr/>
+      <p:sp>
+        <p:nvSpPr>
+          <p:cNvPr id="2" name="TextBox 1"/>
+          <p:cNvSpPr txBox="1"/>
+          <p:nvPr/>
+        </p:nvSpPr>
+        <p:spPr>
+          <a:xfrm>
+            <a:off x="566928" y="347472"/>
+            <a:ext cx="10881360" cy="438912"/>
+          </a:xfrm>
+          <a:prstGeom prst="rect">
+            <a:avLst/>
+          </a:prstGeom>
+          <a:noFill/>
+        </p:spPr>
+        <p:txBody>
+          <a:bodyPr wrap="square" lIns="73152" rIns="73152" tIns="36576" bIns="36576">
+            <a:spAutoFit/>
+          </a:bodyPr>
+          <a:lstStyle/>
+          <a:p>
+            <a:pPr algn="l">
+              <a:spcAft>
+                <a:spcPts val="0"/>
+              </a:spcAft>
+              <a:defRPr sz="3200" b="1">
+                <a:solidFill>
+                  <a:srgbClr val="122C4E"/>
+                </a:solidFill>
+                <a:latin typeface="Noto Sans CJK KR"/>
+              </a:defRPr>
+            </a:pPr>
+            <a:r>
               <a:t>공식 참고 자료</a:t>
             </a:r>
           </a:p>
@@ -15755,7 +17185,7 @@
               </a:defRPr>
             </a:pPr>
             <a:r>
-              <a:t>SDF 물리 모델을 검사한다</a:t>
+              <a:t>코드/설정이 실제로 만드는 것 (1/1)</a:t>
             </a:r>
           </a:p>
         </p:txBody>
@@ -15794,7 +17224,7 @@
               </a:defRPr>
             </a:pPr>
             <a:r>
-              <a:t>한 장에는 한 행동만 수행합니다.</a:t>
+              <a:t>파일을 입력하기 전에 ‘무엇을 만들고 어디서 볼지’를 먼저 연결합니다.</a:t>
             </a:r>
           </a:p>
         </p:txBody>
@@ -15930,109 +17360,31 @@
               </a:defRPr>
             </a:pPr>
             <a:r>
-              <a:t>현재 단계 1/2    |    현재 폴더 ~/ros2_curri/agv_ws    |    현재 터미널</a:t>
-            </a:r>
-          </a:p>
-        </p:txBody>
-      </p:sp>
-      <p:sp>
-        <p:nvSpPr>
-          <p:cNvPr id="7" name="TextBox 6"/>
-          <p:cNvSpPr txBox="1"/>
-          <p:nvPr/>
-        </p:nvSpPr>
-        <p:spPr>
-          <a:xfrm>
-            <a:off x="676656" y="1764792"/>
-            <a:ext cx="1828800" cy="347472"/>
-          </a:xfrm>
-          <a:prstGeom prst="rect">
-            <a:avLst/>
-          </a:prstGeom>
-          <a:noFill/>
-        </p:spPr>
-        <p:txBody>
-          <a:bodyPr wrap="square" lIns="73152" rIns="73152" tIns="36576" bIns="36576">
-            <a:spAutoFit/>
-          </a:bodyPr>
-          <a:lstStyle/>
-          <a:p>
-            <a:pPr algn="l">
-              <a:spcAft>
-                <a:spcPts val="0"/>
-              </a:spcAft>
-              <a:defRPr sz="1800" b="1">
-                <a:solidFill>
-                  <a:srgbClr val="225B9B"/>
-                </a:solidFill>
-                <a:latin typeface="Noto Sans CJK KR"/>
-              </a:defRPr>
-            </a:pPr>
-            <a:r>
-              <a:t>왜 하는가</a:t>
-            </a:r>
-          </a:p>
-        </p:txBody>
-      </p:sp>
-      <p:sp>
-        <p:nvSpPr>
-          <p:cNvPr id="8" name="TextBox 7"/>
-          <p:cNvSpPr txBox="1"/>
-          <p:nvPr/>
-        </p:nvSpPr>
-        <p:spPr>
-          <a:xfrm>
-            <a:off x="676656" y="2103120"/>
-            <a:ext cx="10789920" cy="512064"/>
-          </a:xfrm>
-          <a:prstGeom prst="rect">
-            <a:avLst/>
-          </a:prstGeom>
-          <a:noFill/>
-        </p:spPr>
-        <p:txBody>
-          <a:bodyPr wrap="square" lIns="73152" rIns="73152" tIns="36576" bIns="36576">
-            <a:spAutoFit/>
-          </a:bodyPr>
-          <a:lstStyle/>
-          <a:p>
-            <a:pPr algn="l">
-              <a:spcAft>
-                <a:spcPts val="0"/>
-              </a:spcAft>
-              <a:defRPr sz="2000" b="0">
-                <a:solidFill>
-                  <a:srgbClr val="122C4E"/>
-                </a:solidFill>
-                <a:latin typeface="Noto Sans CJK KR"/>
-              </a:defRPr>
-            </a:pPr>
-            <a:r>
-              <a:t>M07에는 visual·collision·inertial·friction만 있으며 sensor와 drive plugin은 아직 없다.</a:t>
-            </a:r>
-          </a:p>
-        </p:txBody>
-      </p:sp>
-      <p:sp>
-        <p:nvSpPr>
-          <p:cNvPr id="9" name="Rounded Rectangle 8"/>
+              <a:t>현재 단계 파일 역할    |    현재 폴더 ~/ros2_curri/agv_ws    |    현재 터미널</a:t>
+            </a:r>
+          </a:p>
+        </p:txBody>
+      </p:sp>
+      <p:sp>
+        <p:nvSpPr>
+          <p:cNvPr id="7" name="Rounded Rectangle 6"/>
           <p:cNvSpPr/>
           <p:nvPr/>
         </p:nvSpPr>
         <p:spPr>
           <a:xfrm>
-            <a:off x="676656" y="2871216"/>
-            <a:ext cx="10835640" cy="2331720"/>
+            <a:off x="640080" y="1627632"/>
+            <a:ext cx="10972800" cy="2048256"/>
           </a:xfrm>
           <a:prstGeom prst="roundRect">
             <a:avLst/>
           </a:prstGeom>
           <a:solidFill>
-            <a:srgbClr val="1D232D"/>
+            <a:srgbClr val="F4F7FB"/>
           </a:solidFill>
           <a:ln>
             <a:solidFill>
-              <a:srgbClr val="1D232D"/>
+              <a:srgbClr val="CCDBEB"/>
             </a:solidFill>
           </a:ln>
         </p:spPr>
@@ -16051,40 +17403,23 @@
           </a:fontRef>
         </p:style>
         <p:txBody>
-          <a:bodyPr rtlCol="0" anchor="ctr" wrap="square" lIns="73152" rIns="73152" tIns="36576" bIns="36576"/>
-          <a:lstStyle/>
-          <a:p>
-            <a:pPr algn="l">
-              <a:spcAft>
-                <a:spcPts val="0"/>
-              </a:spcAft>
-              <a:defRPr sz="1600" b="0">
-                <a:solidFill>
-                  <a:srgbClr val="FFFFFF"/>
-                </a:solidFill>
-                <a:latin typeface="DejaVu Sans Mono"/>
-              </a:defRPr>
-            </a:pPr>
-            <a:r>
-              <a:t>cd ~/ros2_curri/agv_ws</a:t>
-            </a:r>
-            <a:br/>
-            <a:r>
-              <a:t>gz sdf -k src/agv_description/curriculum_stages/M07/model.sdf</a:t>
-            </a:r>
-          </a:p>
-        </p:txBody>
-      </p:sp>
-      <p:sp>
-        <p:nvSpPr>
-          <p:cNvPr id="10" name="TextBox 9"/>
+          <a:bodyPr rtlCol="0" anchor="ctr"/>
+          <a:lstStyle/>
+          <a:p>
+            <a:pPr algn="ctr"/>
+          </a:p>
+        </p:txBody>
+      </p:sp>
+      <p:sp>
+        <p:nvSpPr>
+          <p:cNvPr id="8" name="TextBox 7"/>
           <p:cNvSpPr txBox="1"/>
           <p:nvPr/>
         </p:nvSpPr>
         <p:spPr>
           <a:xfrm>
-            <a:off x="768096" y="5468112"/>
-            <a:ext cx="1143000" cy="256032"/>
+            <a:off x="850392" y="1764792"/>
+            <a:ext cx="10424160" cy="256032"/>
           </a:xfrm>
           <a:prstGeom prst="rect">
             <a:avLst/>
@@ -16101,29 +17436,29 @@
               <a:spcAft>
                 <a:spcPts val="0"/>
               </a:spcAft>
-              <a:defRPr sz="1800" b="1">
-                <a:solidFill>
-                  <a:srgbClr val="2A8B5A"/>
-                </a:solidFill>
-                <a:latin typeface="Noto Sans CJK KR"/>
-              </a:defRPr>
-            </a:pPr>
-            <a:r>
-              <a:t>확인</a:t>
-            </a:r>
-          </a:p>
-        </p:txBody>
-      </p:sp>
-      <p:sp>
-        <p:nvSpPr>
-          <p:cNvPr id="11" name="TextBox 10"/>
+              <a:defRPr sz="1300" b="1">
+                <a:solidFill>
+                  <a:srgbClr val="225B9B"/>
+                </a:solidFill>
+                <a:latin typeface="DejaVu Sans Mono"/>
+              </a:defRPr>
+            </a:pPr>
+            <a:r>
+              <a:t>~/ros2_curri/agv_ws/src/agv_description/curriculum_stages/M07/model.sdf</a:t>
+            </a:r>
+          </a:p>
+        </p:txBody>
+      </p:sp>
+      <p:sp>
+        <p:nvSpPr>
+          <p:cNvPr id="9" name="TextBox 8"/>
           <p:cNvSpPr txBox="1"/>
           <p:nvPr/>
         </p:nvSpPr>
         <p:spPr>
           <a:xfrm>
-            <a:off x="768096" y="5742432"/>
-            <a:ext cx="10561320" cy="347472"/>
+            <a:off x="868680" y="2130552"/>
+            <a:ext cx="1234440" cy="228600"/>
           </a:xfrm>
           <a:prstGeom prst="rect">
             <a:avLst/>
@@ -16140,7 +17475,46 @@
               <a:spcAft>
                 <a:spcPts val="0"/>
               </a:spcAft>
-              <a:defRPr sz="1800" b="0">
+              <a:defRPr sz="1500" b="1">
+                <a:solidFill>
+                  <a:srgbClr val="2A8B5A"/>
+                </a:solidFill>
+                <a:latin typeface="Noto Sans CJK KR"/>
+              </a:defRPr>
+            </a:pPr>
+            <a:r>
+              <a:t>만드는 것</a:t>
+            </a:r>
+          </a:p>
+        </p:txBody>
+      </p:sp>
+      <p:sp>
+        <p:nvSpPr>
+          <p:cNvPr id="10" name="TextBox 9"/>
+          <p:cNvSpPr txBox="1"/>
+          <p:nvPr/>
+        </p:nvSpPr>
+        <p:spPr>
+          <a:xfrm>
+            <a:off x="1975104" y="2112264"/>
+            <a:ext cx="9189720" cy="274320"/>
+          </a:xfrm>
+          <a:prstGeom prst="rect">
+            <a:avLst/>
+          </a:prstGeom>
+          <a:noFill/>
+        </p:spPr>
+        <p:txBody>
+          <a:bodyPr wrap="square" lIns="73152" rIns="73152" tIns="36576" bIns="36576">
+            <a:spAutoFit/>
+          </a:bodyPr>
+          <a:lstStyle/>
+          <a:p>
+            <a:pPr algn="l">
+              <a:spcAft>
+                <a:spcPts val="0"/>
+              </a:spcAft>
+              <a:defRPr sz="1500" b="0">
                 <a:solidFill>
                   <a:srgbClr val="122C4E"/>
                 </a:solidFill>
@@ -16148,7 +17522,167 @@
               </a:defRPr>
             </a:pPr>
             <a:r>
-              <a:t>명령의 출력에서 topic·frame·파일 이름 또는 성공 메시지를 찾으면 이 단계가 완료됩니다.</a:t>
+              <a:t>Gazebo가 질량·충돌·마찰을 계산할 수 있는 물리 AGV</a:t>
+            </a:r>
+          </a:p>
+        </p:txBody>
+      </p:sp>
+      <p:sp>
+        <p:nvSpPr>
+          <p:cNvPr id="11" name="TextBox 10"/>
+          <p:cNvSpPr txBox="1"/>
+          <p:nvPr/>
+        </p:nvSpPr>
+        <p:spPr>
+          <a:xfrm>
+            <a:off x="868680" y="2505456"/>
+            <a:ext cx="1234440" cy="228600"/>
+          </a:xfrm>
+          <a:prstGeom prst="rect">
+            <a:avLst/>
+          </a:prstGeom>
+          <a:noFill/>
+        </p:spPr>
+        <p:txBody>
+          <a:bodyPr wrap="square" lIns="73152" rIns="73152" tIns="36576" bIns="36576">
+            <a:spAutoFit/>
+          </a:bodyPr>
+          <a:lstStyle/>
+          <a:p>
+            <a:pPr algn="l">
+              <a:spcAft>
+                <a:spcPts val="0"/>
+              </a:spcAft>
+              <a:defRPr sz="1500" b="1">
+                <a:solidFill>
+                  <a:srgbClr val="DB7E22"/>
+                </a:solidFill>
+                <a:latin typeface="Noto Sans CJK KR"/>
+              </a:defRPr>
+            </a:pPr>
+            <a:r>
+              <a:t>코드 읽기</a:t>
+            </a:r>
+          </a:p>
+        </p:txBody>
+      </p:sp>
+      <p:sp>
+        <p:nvSpPr>
+          <p:cNvPr id="12" name="TextBox 11"/>
+          <p:cNvSpPr txBox="1"/>
+          <p:nvPr/>
+        </p:nvSpPr>
+        <p:spPr>
+          <a:xfrm>
+            <a:off x="1975104" y="2487168"/>
+            <a:ext cx="9189720" cy="301752"/>
+          </a:xfrm>
+          <a:prstGeom prst="rect">
+            <a:avLst/>
+          </a:prstGeom>
+          <a:noFill/>
+        </p:spPr>
+        <p:txBody>
+          <a:bodyPr wrap="square" lIns="73152" rIns="73152" tIns="36576" bIns="36576">
+            <a:spAutoFit/>
+          </a:bodyPr>
+          <a:lstStyle/>
+          <a:p>
+            <a:pPr algn="l">
+              <a:spcAft>
+                <a:spcPts val="0"/>
+              </a:spcAft>
+              <a:defRPr sz="1400" b="0">
+                <a:solidFill>
+                  <a:srgbClr val="122C4E"/>
+                </a:solidFill>
+                <a:latin typeface="Noto Sans CJK KR"/>
+              </a:defRPr>
+            </a:pPr>
+            <a:r>
+              <a:t>visual(보임), collision(부딪힘), inertial(무게), friction(접지)을 분리해 작성한다.</a:t>
+            </a:r>
+          </a:p>
+        </p:txBody>
+      </p:sp>
+      <p:sp>
+        <p:nvSpPr>
+          <p:cNvPr id="13" name="TextBox 12"/>
+          <p:cNvSpPr txBox="1"/>
+          <p:nvPr/>
+        </p:nvSpPr>
+        <p:spPr>
+          <a:xfrm>
+            <a:off x="868680" y="2889504"/>
+            <a:ext cx="1234440" cy="228600"/>
+          </a:xfrm>
+          <a:prstGeom prst="rect">
+            <a:avLst/>
+          </a:prstGeom>
+          <a:noFill/>
+        </p:spPr>
+        <p:txBody>
+          <a:bodyPr wrap="square" lIns="73152" rIns="73152" tIns="36576" bIns="36576">
+            <a:spAutoFit/>
+          </a:bodyPr>
+          <a:lstStyle/>
+          <a:p>
+            <a:pPr algn="l">
+              <a:spcAft>
+                <a:spcPts val="0"/>
+              </a:spcAft>
+              <a:defRPr sz="1500" b="1">
+                <a:solidFill>
+                  <a:srgbClr val="225B9B"/>
+                </a:solidFill>
+                <a:latin typeface="Noto Sans CJK KR"/>
+              </a:defRPr>
+            </a:pPr>
+            <a:r>
+              <a:t>사용/확인</a:t>
+            </a:r>
+          </a:p>
+        </p:txBody>
+      </p:sp>
+      <p:sp>
+        <p:nvSpPr>
+          <p:cNvPr id="14" name="TextBox 13"/>
+          <p:cNvSpPr txBox="1"/>
+          <p:nvPr/>
+        </p:nvSpPr>
+        <p:spPr>
+          <a:xfrm>
+            <a:off x="1975104" y="2871216"/>
+            <a:ext cx="9189720" cy="512064"/>
+          </a:xfrm>
+          <a:prstGeom prst="rect">
+            <a:avLst/>
+          </a:prstGeom>
+          <a:noFill/>
+        </p:spPr>
+        <p:txBody>
+          <a:bodyPr wrap="square" lIns="73152" rIns="73152" tIns="36576" bIns="36576">
+            <a:spAutoFit/>
+          </a:bodyPr>
+          <a:lstStyle/>
+          <a:p>
+            <a:pPr algn="l">
+              <a:spcAft>
+                <a:spcPts val="0"/>
+              </a:spcAft>
+              <a:defRPr sz="1300" b="0">
+                <a:solidFill>
+                  <a:srgbClr val="122C4E"/>
+                </a:solidFill>
+                <a:latin typeface="Noto Sans CJK KR"/>
+              </a:defRPr>
+            </a:pPr>
+            <a:r>
+              <a:t>사용: gz sdf -k로 문법을 검사하고 값 하나만 바꿔 다시 실행한다.</a:t>
+            </a:r>
+            <a:br/>
+            <a:r>
+              <a:t>화면/출력: terminal의 Valid와 물리 태그, Gazebo에서 바닥 위 안정 상태</a:t>
             </a:r>
           </a:p>
         </p:txBody>
@@ -16205,7 +17739,7 @@
               </a:defRPr>
             </a:pPr>
             <a:r>
-              <a:t>값을 한 번에 하나씩 바꾼다</a:t>
+              <a:t>코드를 ‘만드는 것 → 표시할 줄 → 바꾼 결과’로 읽는다</a:t>
             </a:r>
           </a:p>
         </p:txBody>
@@ -16244,7 +17778,7 @@
               </a:defRPr>
             </a:pPr>
             <a:r>
-              <a:t>한 장에는 한 행동만 수행합니다.</a:t>
+              <a:t>PDF 예시처럼 화면을 보기 전에 코드의 역할과 관찰 지점을 한 번 짚고 갑니다.</a:t>
             </a:r>
           </a:p>
         </p:txBody>
@@ -16380,109 +17914,31 @@
               </a:defRPr>
             </a:pPr>
             <a:r>
-              <a:t>현재 단계 2/2    |    현재 폴더 ~/ros2_curri/agv_ws    |    현재 터미널</a:t>
-            </a:r>
-          </a:p>
-        </p:txBody>
-      </p:sp>
-      <p:sp>
-        <p:nvSpPr>
-          <p:cNvPr id="7" name="TextBox 6"/>
-          <p:cNvSpPr txBox="1"/>
-          <p:nvPr/>
-        </p:nvSpPr>
-        <p:spPr>
-          <a:xfrm>
-            <a:off x="676656" y="1764792"/>
-            <a:ext cx="1828800" cy="347472"/>
-          </a:xfrm>
-          <a:prstGeom prst="rect">
-            <a:avLst/>
-          </a:prstGeom>
-          <a:noFill/>
-        </p:spPr>
-        <p:txBody>
-          <a:bodyPr wrap="square" lIns="73152" rIns="73152" tIns="36576" bIns="36576">
-            <a:spAutoFit/>
-          </a:bodyPr>
-          <a:lstStyle/>
-          <a:p>
-            <a:pPr algn="l">
-              <a:spcAft>
-                <a:spcPts val="0"/>
-              </a:spcAft>
-              <a:defRPr sz="1800" b="1">
-                <a:solidFill>
-                  <a:srgbClr val="225B9B"/>
-                </a:solidFill>
-                <a:latin typeface="Noto Sans CJK KR"/>
-              </a:defRPr>
-            </a:pPr>
-            <a:r>
-              <a:t>왜 하는가</a:t>
-            </a:r>
-          </a:p>
-        </p:txBody>
-      </p:sp>
-      <p:sp>
-        <p:nvSpPr>
-          <p:cNvPr id="8" name="TextBox 7"/>
-          <p:cNvSpPr txBox="1"/>
-          <p:nvPr/>
-        </p:nvSpPr>
-        <p:spPr>
-          <a:xfrm>
-            <a:off x="676656" y="2103120"/>
-            <a:ext cx="10789920" cy="512064"/>
-          </a:xfrm>
-          <a:prstGeom prst="rect">
-            <a:avLst/>
-          </a:prstGeom>
-          <a:noFill/>
-        </p:spPr>
-        <p:txBody>
-          <a:bodyPr wrap="square" lIns="73152" rIns="73152" tIns="36576" bIns="36576">
-            <a:spAutoFit/>
-          </a:bodyPr>
-          <a:lstStyle/>
-          <a:p>
-            <a:pPr algn="l">
-              <a:spcAft>
-                <a:spcPts val="0"/>
-              </a:spcAft>
-              <a:defRPr sz="2000" b="0">
-                <a:solidFill>
-                  <a:srgbClr val="122C4E"/>
-                </a:solidFill>
-                <a:latin typeface="Noto Sans CJK KR"/>
-              </a:defRPr>
-            </a:pPr>
-            <a:r>
-              <a:t>증상 원인을 찾으려면 mass→inertia→collision→friction 순서를 지킨다.</a:t>
-            </a:r>
-          </a:p>
-        </p:txBody>
-      </p:sp>
-      <p:sp>
-        <p:nvSpPr>
-          <p:cNvPr id="9" name="Rounded Rectangle 8"/>
+              <a:t>현재 단계 코드 해설    |    현재 폴더 ~/ros2_curri/agv_ws    |    현재 터미널</a:t>
+            </a:r>
+          </a:p>
+        </p:txBody>
+      </p:sp>
+      <p:sp>
+        <p:nvSpPr>
+          <p:cNvPr id="7" name="Rounded Rectangle 6"/>
           <p:cNvSpPr/>
           <p:nvPr/>
         </p:nvSpPr>
         <p:spPr>
           <a:xfrm>
-            <a:off x="676656" y="2871216"/>
-            <a:ext cx="10835640" cy="2331720"/>
+            <a:off x="658368" y="1664208"/>
+            <a:ext cx="5321808" cy="1764792"/>
           </a:xfrm>
           <a:prstGeom prst="roundRect">
             <a:avLst/>
           </a:prstGeom>
           <a:solidFill>
-            <a:srgbClr val="1D232D"/>
+            <a:srgbClr val="F4F7FB"/>
           </a:solidFill>
           <a:ln>
             <a:solidFill>
-              <a:srgbClr val="1D232D"/>
+              <a:srgbClr val="2A8B5A"/>
             </a:solidFill>
           </a:ln>
         </p:spPr>
@@ -16501,36 +17957,23 @@
           </a:fontRef>
         </p:style>
         <p:txBody>
-          <a:bodyPr rtlCol="0" anchor="ctr" wrap="square" lIns="73152" rIns="73152" tIns="36576" bIns="36576"/>
-          <a:lstStyle/>
-          <a:p>
-            <a:pPr algn="l">
-              <a:spcAft>
-                <a:spcPts val="0"/>
-              </a:spcAft>
-              <a:defRPr sz="1600" b="0">
-                <a:solidFill>
-                  <a:srgbClr val="FFFFFF"/>
-                </a:solidFill>
-                <a:latin typeface="DejaVu Sans Mono"/>
-              </a:defRPr>
-            </a:pPr>
-            <a:r>
-              <a:t>rg -n '&lt;mass&gt;|&lt;inertia&gt;|&lt;collision&gt;|&lt;friction&gt;' src/agv_description/curriculum_stages/M07/model.sdf</a:t>
-            </a:r>
-          </a:p>
-        </p:txBody>
-      </p:sp>
-      <p:sp>
-        <p:nvSpPr>
-          <p:cNvPr id="10" name="TextBox 9"/>
+          <a:bodyPr rtlCol="0" anchor="ctr"/>
+          <a:lstStyle/>
+          <a:p>
+            <a:pPr algn="ctr"/>
+          </a:p>
+        </p:txBody>
+      </p:sp>
+      <p:sp>
+        <p:nvSpPr>
+          <p:cNvPr id="8" name="TextBox 7"/>
           <p:cNvSpPr txBox="1"/>
           <p:nvPr/>
         </p:nvSpPr>
         <p:spPr>
           <a:xfrm>
-            <a:off x="768096" y="5468112"/>
-            <a:ext cx="1143000" cy="256032"/>
+            <a:off x="859536" y="1828800"/>
+            <a:ext cx="4892040" cy="265176"/>
           </a:xfrm>
           <a:prstGeom prst="rect">
             <a:avLst/>
@@ -16547,7 +17990,7 @@
               <a:spcAft>
                 <a:spcPts val="0"/>
               </a:spcAft>
-              <a:defRPr sz="1800" b="1">
+              <a:defRPr sz="1700" b="1">
                 <a:solidFill>
                   <a:srgbClr val="2A8B5A"/>
                 </a:solidFill>
@@ -16555,21 +17998,21 @@
               </a:defRPr>
             </a:pPr>
             <a:r>
-              <a:t>확인</a:t>
-            </a:r>
-          </a:p>
-        </p:txBody>
-      </p:sp>
-      <p:sp>
-        <p:nvSpPr>
-          <p:cNvPr id="11" name="TextBox 10"/>
+              <a:t>1. 이 파일이 만드는 것</a:t>
+            </a:r>
+          </a:p>
+        </p:txBody>
+      </p:sp>
+      <p:sp>
+        <p:nvSpPr>
+          <p:cNvPr id="9" name="TextBox 8"/>
           <p:cNvSpPr txBox="1"/>
           <p:nvPr/>
         </p:nvSpPr>
         <p:spPr>
           <a:xfrm>
-            <a:off x="768096" y="5742432"/>
-            <a:ext cx="10561320" cy="347472"/>
+            <a:off x="859536" y="2240280"/>
+            <a:ext cx="4846320" cy="941832"/>
           </a:xfrm>
           <a:prstGeom prst="rect">
             <a:avLst/>
@@ -16586,7 +18029,7 @@
               <a:spcAft>
                 <a:spcPts val="0"/>
               </a:spcAft>
-              <a:defRPr sz="1800" b="0">
+              <a:defRPr sz="1600" b="0">
                 <a:solidFill>
                   <a:srgbClr val="122C4E"/>
                 </a:solidFill>
@@ -16594,7 +18037,415 @@
               </a:defRPr>
             </a:pPr>
             <a:r>
-              <a:t>명령의 출력에서 topic·frame·파일 이름 또는 성공 메시지를 찾으면 이 단계가 완료됩니다.</a:t>
+              <a:t>SDF 물리 모델은 화면에 보이는 모양과 실제 접촉 계산을 서로 다른 태그로 관리합니다.</a:t>
+            </a:r>
+          </a:p>
+        </p:txBody>
+      </p:sp>
+      <p:sp>
+        <p:nvSpPr>
+          <p:cNvPr id="10" name="Rounded Rectangle 9"/>
+          <p:cNvSpPr/>
+          <p:nvPr/>
+        </p:nvSpPr>
+        <p:spPr>
+          <a:xfrm>
+            <a:off x="6217920" y="1664208"/>
+            <a:ext cx="5321808" cy="1764792"/>
+          </a:xfrm>
+          <a:prstGeom prst="roundRect">
+            <a:avLst/>
+          </a:prstGeom>
+          <a:solidFill>
+            <a:srgbClr val="F4F7FB"/>
+          </a:solidFill>
+          <a:ln>
+            <a:solidFill>
+              <a:srgbClr val="225B9B"/>
+            </a:solidFill>
+          </a:ln>
+        </p:spPr>
+        <p:style>
+          <a:lnRef idx="1">
+            <a:schemeClr val="accent1"/>
+          </a:lnRef>
+          <a:fillRef idx="3">
+            <a:schemeClr val="accent1"/>
+          </a:fillRef>
+          <a:effectRef idx="2">
+            <a:schemeClr val="accent1"/>
+          </a:effectRef>
+          <a:fontRef idx="minor">
+            <a:schemeClr val="lt1"/>
+          </a:fontRef>
+        </p:style>
+        <p:txBody>
+          <a:bodyPr rtlCol="0" anchor="ctr"/>
+          <a:lstStyle/>
+          <a:p>
+            <a:pPr algn="ctr"/>
+          </a:p>
+        </p:txBody>
+      </p:sp>
+      <p:sp>
+        <p:nvSpPr>
+          <p:cNvPr id="11" name="TextBox 10"/>
+          <p:cNvSpPr txBox="1"/>
+          <p:nvPr/>
+        </p:nvSpPr>
+        <p:spPr>
+          <a:xfrm>
+            <a:off x="6419088" y="1828800"/>
+            <a:ext cx="4892040" cy="265176"/>
+          </a:xfrm>
+          <a:prstGeom prst="rect">
+            <a:avLst/>
+          </a:prstGeom>
+          <a:noFill/>
+        </p:spPr>
+        <p:txBody>
+          <a:bodyPr wrap="square" lIns="73152" rIns="73152" tIns="36576" bIns="36576">
+            <a:spAutoFit/>
+          </a:bodyPr>
+          <a:lstStyle/>
+          <a:p>
+            <a:pPr algn="l">
+              <a:spcAft>
+                <a:spcPts val="0"/>
+              </a:spcAft>
+              <a:defRPr sz="1700" b="1">
+                <a:solidFill>
+                  <a:srgbClr val="225B9B"/>
+                </a:solidFill>
+                <a:latin typeface="Noto Sans CJK KR"/>
+              </a:defRPr>
+            </a:pPr>
+            <a:r>
+              <a:t>2. 먼저 찾을 코드/태그</a:t>
+            </a:r>
+          </a:p>
+        </p:txBody>
+      </p:sp>
+      <p:sp>
+        <p:nvSpPr>
+          <p:cNvPr id="12" name="TextBox 11"/>
+          <p:cNvSpPr txBox="1"/>
+          <p:nvPr/>
+        </p:nvSpPr>
+        <p:spPr>
+          <a:xfrm>
+            <a:off x="6419088" y="2240280"/>
+            <a:ext cx="4846320" cy="941832"/>
+          </a:xfrm>
+          <a:prstGeom prst="rect">
+            <a:avLst/>
+          </a:prstGeom>
+          <a:noFill/>
+        </p:spPr>
+        <p:txBody>
+          <a:bodyPr wrap="square" lIns="73152" rIns="73152" tIns="36576" bIns="36576">
+            <a:spAutoFit/>
+          </a:bodyPr>
+          <a:lstStyle/>
+          <a:p>
+            <a:pPr algn="l">
+              <a:spcAft>
+                <a:spcPts val="0"/>
+              </a:spcAft>
+              <a:defRPr sz="1600" b="0">
+                <a:solidFill>
+                  <a:srgbClr val="122C4E"/>
+                </a:solidFill>
+                <a:latin typeface="Noto Sans CJK KR"/>
+              </a:defRPr>
+            </a:pPr>
+            <a:r>
+              <a:t>&lt;visual&gt;, &lt;collision&gt;, &lt;inertial&gt;, &lt;friction&gt;</a:t>
+            </a:r>
+          </a:p>
+        </p:txBody>
+      </p:sp>
+      <p:sp>
+        <p:nvSpPr>
+          <p:cNvPr id="13" name="Rounded Rectangle 12"/>
+          <p:cNvSpPr/>
+          <p:nvPr/>
+        </p:nvSpPr>
+        <p:spPr>
+          <a:xfrm>
+            <a:off x="658368" y="3813048"/>
+            <a:ext cx="5321808" cy="1764792"/>
+          </a:xfrm>
+          <a:prstGeom prst="roundRect">
+            <a:avLst/>
+          </a:prstGeom>
+          <a:solidFill>
+            <a:srgbClr val="F4F7FB"/>
+          </a:solidFill>
+          <a:ln>
+            <a:solidFill>
+              <a:srgbClr val="DB7E22"/>
+            </a:solidFill>
+          </a:ln>
+        </p:spPr>
+        <p:style>
+          <a:lnRef idx="1">
+            <a:schemeClr val="accent1"/>
+          </a:lnRef>
+          <a:fillRef idx="3">
+            <a:schemeClr val="accent1"/>
+          </a:fillRef>
+          <a:effectRef idx="2">
+            <a:schemeClr val="accent1"/>
+          </a:effectRef>
+          <a:fontRef idx="minor">
+            <a:schemeClr val="lt1"/>
+          </a:fontRef>
+        </p:style>
+        <p:txBody>
+          <a:bodyPr rtlCol="0" anchor="ctr"/>
+          <a:lstStyle/>
+          <a:p>
+            <a:pPr algn="ctr"/>
+          </a:p>
+        </p:txBody>
+      </p:sp>
+      <p:sp>
+        <p:nvSpPr>
+          <p:cNvPr id="14" name="TextBox 13"/>
+          <p:cNvSpPr txBox="1"/>
+          <p:nvPr/>
+        </p:nvSpPr>
+        <p:spPr>
+          <a:xfrm>
+            <a:off x="859536" y="3977639"/>
+            <a:ext cx="4892040" cy="265176"/>
+          </a:xfrm>
+          <a:prstGeom prst="rect">
+            <a:avLst/>
+          </a:prstGeom>
+          <a:noFill/>
+        </p:spPr>
+        <p:txBody>
+          <a:bodyPr wrap="square" lIns="73152" rIns="73152" tIns="36576" bIns="36576">
+            <a:spAutoFit/>
+          </a:bodyPr>
+          <a:lstStyle/>
+          <a:p>
+            <a:pPr algn="l">
+              <a:spcAft>
+                <a:spcPts val="0"/>
+              </a:spcAft>
+              <a:defRPr sz="1700" b="1">
+                <a:solidFill>
+                  <a:srgbClr val="DB7E22"/>
+                </a:solidFill>
+                <a:latin typeface="Noto Sans CJK KR"/>
+              </a:defRPr>
+            </a:pPr>
+            <a:r>
+              <a:t>3. 값을 바꾸면</a:t>
+            </a:r>
+          </a:p>
+        </p:txBody>
+      </p:sp>
+      <p:sp>
+        <p:nvSpPr>
+          <p:cNvPr id="15" name="TextBox 14"/>
+          <p:cNvSpPr txBox="1"/>
+          <p:nvPr/>
+        </p:nvSpPr>
+        <p:spPr>
+          <a:xfrm>
+            <a:off x="859536" y="4389120"/>
+            <a:ext cx="4846320" cy="941832"/>
+          </a:xfrm>
+          <a:prstGeom prst="rect">
+            <a:avLst/>
+          </a:prstGeom>
+          <a:noFill/>
+        </p:spPr>
+        <p:txBody>
+          <a:bodyPr wrap="square" lIns="73152" rIns="73152" tIns="36576" bIns="36576">
+            <a:spAutoFit/>
+          </a:bodyPr>
+          <a:lstStyle/>
+          <a:p>
+            <a:pPr algn="l">
+              <a:spcAft>
+                <a:spcPts val="0"/>
+              </a:spcAft>
+              <a:defRPr sz="1600" b="0">
+                <a:solidFill>
+                  <a:srgbClr val="122C4E"/>
+                </a:solidFill>
+                <a:latin typeface="Noto Sans CJK KR"/>
+              </a:defRPr>
+            </a:pPr>
+            <a:r>
+              <a:t>visual만 바꾸면 모양만 변하고, mass/inertia/friction은 주행·접지 반응을 바꿉니다.</a:t>
+            </a:r>
+          </a:p>
+        </p:txBody>
+      </p:sp>
+      <p:sp>
+        <p:nvSpPr>
+          <p:cNvPr id="16" name="Rounded Rectangle 15"/>
+          <p:cNvSpPr/>
+          <p:nvPr/>
+        </p:nvSpPr>
+        <p:spPr>
+          <a:xfrm>
+            <a:off x="6217920" y="3813048"/>
+            <a:ext cx="5321808" cy="1764792"/>
+          </a:xfrm>
+          <a:prstGeom prst="roundRect">
+            <a:avLst/>
+          </a:prstGeom>
+          <a:solidFill>
+            <a:srgbClr val="F4F7FB"/>
+          </a:solidFill>
+          <a:ln>
+            <a:solidFill>
+              <a:srgbClr val="BE3B3B"/>
+            </a:solidFill>
+          </a:ln>
+        </p:spPr>
+        <p:style>
+          <a:lnRef idx="1">
+            <a:schemeClr val="accent1"/>
+          </a:lnRef>
+          <a:fillRef idx="3">
+            <a:schemeClr val="accent1"/>
+          </a:fillRef>
+          <a:effectRef idx="2">
+            <a:schemeClr val="accent1"/>
+          </a:effectRef>
+          <a:fontRef idx="minor">
+            <a:schemeClr val="lt1"/>
+          </a:fontRef>
+        </p:style>
+        <p:txBody>
+          <a:bodyPr rtlCol="0" anchor="ctr"/>
+          <a:lstStyle/>
+          <a:p>
+            <a:pPr algn="ctr"/>
+          </a:p>
+        </p:txBody>
+      </p:sp>
+      <p:sp>
+        <p:nvSpPr>
+          <p:cNvPr id="17" name="TextBox 16"/>
+          <p:cNvSpPr txBox="1"/>
+          <p:nvPr/>
+        </p:nvSpPr>
+        <p:spPr>
+          <a:xfrm>
+            <a:off x="6419088" y="3977639"/>
+            <a:ext cx="4892040" cy="265176"/>
+          </a:xfrm>
+          <a:prstGeom prst="rect">
+            <a:avLst/>
+          </a:prstGeom>
+          <a:noFill/>
+        </p:spPr>
+        <p:txBody>
+          <a:bodyPr wrap="square" lIns="73152" rIns="73152" tIns="36576" bIns="36576">
+            <a:spAutoFit/>
+          </a:bodyPr>
+          <a:lstStyle/>
+          <a:p>
+            <a:pPr algn="l">
+              <a:spcAft>
+                <a:spcPts val="0"/>
+              </a:spcAft>
+              <a:defRPr sz="1700" b="1">
+                <a:solidFill>
+                  <a:srgbClr val="BE3B3B"/>
+                </a:solidFill>
+                <a:latin typeface="Noto Sans CJK KR"/>
+              </a:defRPr>
+            </a:pPr>
+            <a:r>
+              <a:t>4. 실제로 보는 곳</a:t>
+            </a:r>
+          </a:p>
+        </p:txBody>
+      </p:sp>
+      <p:sp>
+        <p:nvSpPr>
+          <p:cNvPr id="18" name="TextBox 17"/>
+          <p:cNvSpPr txBox="1"/>
+          <p:nvPr/>
+        </p:nvSpPr>
+        <p:spPr>
+          <a:xfrm>
+            <a:off x="6419088" y="4389120"/>
+            <a:ext cx="4846320" cy="941832"/>
+          </a:xfrm>
+          <a:prstGeom prst="rect">
+            <a:avLst/>
+          </a:prstGeom>
+          <a:noFill/>
+        </p:spPr>
+        <p:txBody>
+          <a:bodyPr wrap="square" lIns="73152" rIns="73152" tIns="36576" bIns="36576">
+            <a:spAutoFit/>
+          </a:bodyPr>
+          <a:lstStyle/>
+          <a:p>
+            <a:pPr algn="l">
+              <a:spcAft>
+                <a:spcPts val="0"/>
+              </a:spcAft>
+              <a:defRPr sz="1600" b="0">
+                <a:solidFill>
+                  <a:srgbClr val="122C4E"/>
+                </a:solidFill>
+                <a:latin typeface="Noto Sans CJK KR"/>
+              </a:defRPr>
+            </a:pPr>
+            <a:r>
+              <a:t>Valid 뒤 Gazebo에서 떠오름·떨림·미끄럼이 없는지 관찰합니다.</a:t>
+            </a:r>
+          </a:p>
+        </p:txBody>
+      </p:sp>
+      <p:sp>
+        <p:nvSpPr>
+          <p:cNvPr id="19" name="TextBox 18"/>
+          <p:cNvSpPr txBox="1"/>
+          <p:nvPr/>
+        </p:nvSpPr>
+        <p:spPr>
+          <a:xfrm>
+            <a:off x="777240" y="6172200"/>
+            <a:ext cx="10607040" cy="201168"/>
+          </a:xfrm>
+          <a:prstGeom prst="rect">
+            <a:avLst/>
+          </a:prstGeom>
+          <a:noFill/>
+        </p:spPr>
+        <p:txBody>
+          <a:bodyPr wrap="square" lIns="73152" rIns="73152" tIns="36576" bIns="36576">
+            <a:spAutoFit/>
+          </a:bodyPr>
+          <a:lstStyle/>
+          <a:p>
+            <a:pPr algn="ctr">
+              <a:spcAft>
+                <a:spcPts val="0"/>
+              </a:spcAft>
+              <a:defRPr sz="1200" b="1">
+                <a:solidFill>
+                  <a:srgbClr val="2A8B5A"/>
+                </a:solidFill>
+                <a:latin typeface="Noto Sans CJK KR"/>
+              </a:defRPr>
+            </a:pPr>
+            <a:r>
+              <a:t>다음 코드 슬라이드에서는 위의 태그/함수를 찾아 색으로 표시하며 한 줄씩 설명합니다.</a:t>
             </a:r>
           </a:p>
         </p:txBody>
@@ -16651,7 +18502,7 @@
               </a:defRPr>
             </a:pPr>
             <a:r>
-              <a:t>파일을 새로 만들고 저장한다 (1/11)</a:t>
+              <a:t>SDF 물리 모델을 검사한다</a:t>
             </a:r>
           </a:p>
         </p:txBody>
@@ -16690,7 +18541,7 @@
               </a:defRPr>
             </a:pPr>
             <a:r>
-              <a:t>~/ros2_curri/agv_ws/src/agv_description/curriculum_stages/M07/model.sdf</a:t>
+              <a:t>한 장에는 한 행동만 수행합니다.</a:t>
             </a:r>
           </a:p>
         </p:txBody>
@@ -16826,7 +18677,7 @@
               </a:defRPr>
             </a:pPr>
             <a:r>
-              <a:t>현재 단계 3/14    |    현재 폴더 ~/ros2_curri/agv_ws    |    현재 터미널</a:t>
+              <a:t>현재 단계 1/2    |    현재 폴더 ~/ros2_curri/agv_ws    |    현재 터미널</a:t>
             </a:r>
           </a:p>
         </p:txBody>
@@ -16839,8 +18690,8 @@
         </p:nvSpPr>
         <p:spPr>
           <a:xfrm>
-            <a:off x="658368" y="1627632"/>
-            <a:ext cx="10972800" cy="256032"/>
+            <a:off x="676656" y="1764792"/>
+            <a:ext cx="1828800" cy="347472"/>
           </a:xfrm>
           <a:prstGeom prst="rect">
             <a:avLst/>
@@ -16857,7 +18708,46 @@
               <a:spcAft>
                 <a:spcPts val="0"/>
               </a:spcAft>
-              <a:defRPr sz="1500" b="1">
+              <a:defRPr sz="1800" b="1">
+                <a:solidFill>
+                  <a:srgbClr val="225B9B"/>
+                </a:solidFill>
+                <a:latin typeface="Noto Sans CJK KR"/>
+              </a:defRPr>
+            </a:pPr>
+            <a:r>
+              <a:t>왜 하는가</a:t>
+            </a:r>
+          </a:p>
+        </p:txBody>
+      </p:sp>
+      <p:sp>
+        <p:nvSpPr>
+          <p:cNvPr id="8" name="TextBox 7"/>
+          <p:cNvSpPr txBox="1"/>
+          <p:nvPr/>
+        </p:nvSpPr>
+        <p:spPr>
+          <a:xfrm>
+            <a:off x="676656" y="2103120"/>
+            <a:ext cx="10789920" cy="512064"/>
+          </a:xfrm>
+          <a:prstGeom prst="rect">
+            <a:avLst/>
+          </a:prstGeom>
+          <a:noFill/>
+        </p:spPr>
+        <p:txBody>
+          <a:bodyPr wrap="square" lIns="73152" rIns="73152" tIns="36576" bIns="36576">
+            <a:spAutoFit/>
+          </a:bodyPr>
+          <a:lstStyle/>
+          <a:p>
+            <a:pPr algn="l">
+              <a:spcAft>
+                <a:spcPts val="0"/>
+              </a:spcAft>
+              <a:defRPr sz="2000" b="0">
                 <a:solidFill>
                   <a:srgbClr val="122C4E"/>
                 </a:solidFill>
@@ -16865,85 +18755,23 @@
               </a:defRPr>
             </a:pPr>
             <a:r>
-              <a:t>이번 단계: 파일의 전체 내용을 중간 생략 없이 작성합니다. 아래 줄 범위를 끝까지 입력하세요.</a:t>
-            </a:r>
-          </a:p>
-        </p:txBody>
-      </p:sp>
-      <p:sp>
-        <p:nvSpPr>
-          <p:cNvPr id="8" name="Rectangle 7"/>
+              <a:t>M07에는 visual·collision·inertial·friction만 있으며 sensor와 drive plugin은 아직 없다.</a:t>
+            </a:r>
+          </a:p>
+        </p:txBody>
+      </p:sp>
+      <p:sp>
+        <p:nvSpPr>
+          <p:cNvPr id="9" name="Rounded Rectangle 8"/>
           <p:cNvSpPr/>
           <p:nvPr/>
         </p:nvSpPr>
         <p:spPr>
           <a:xfrm>
-            <a:off x="658368" y="1956816"/>
-            <a:ext cx="10972800" cy="603504"/>
-          </a:xfrm>
-          <a:prstGeom prst="rect">
-            <a:avLst/>
-          </a:prstGeom>
-          <a:solidFill>
-            <a:srgbClr val="F4F7FB"/>
-          </a:solidFill>
-          <a:ln>
-            <a:solidFill>
-              <a:srgbClr val="F4F7FB"/>
-            </a:solidFill>
-          </a:ln>
-        </p:spPr>
-        <p:style>
-          <a:lnRef idx="1">
-            <a:schemeClr val="accent1"/>
-          </a:lnRef>
-          <a:fillRef idx="3">
-            <a:schemeClr val="accent1"/>
-          </a:fillRef>
-          <a:effectRef idx="2">
-            <a:schemeClr val="accent1"/>
-          </a:effectRef>
-          <a:fontRef idx="minor">
-            <a:schemeClr val="lt1"/>
-          </a:fontRef>
-        </p:style>
-        <p:txBody>
-          <a:bodyPr rtlCol="0" anchor="ctr" wrap="square" lIns="73152" rIns="73152" tIns="36576" bIns="36576"/>
-          <a:lstStyle/>
-          <a:p>
-            <a:pPr algn="l">
-              <a:spcAft>
-                <a:spcPts val="0"/>
-              </a:spcAft>
-              <a:defRPr sz="1400" b="0">
-                <a:solidFill>
-                  <a:srgbClr val="122C4E"/>
-                </a:solidFill>
-                <a:latin typeface="DejaVu Sans Mono"/>
-              </a:defRPr>
-            </a:pPr>
-            <a:r>
-              <a:t>파일 생성: mkdir -p ~/ros2_curri/agv_ws/src/agv_description/curriculum_stages/M07</a:t>
-            </a:r>
-            <a:br/>
-            <a:r>
-              <a:t>파일 열기: nano ~/ros2_curri/agv_ws/src/agv_description/curriculum_stages/M07/model.sdf</a:t>
-            </a:r>
-          </a:p>
-        </p:txBody>
-      </p:sp>
-      <p:sp>
-        <p:nvSpPr>
-          <p:cNvPr id="9" name="Rectangle 8"/>
-          <p:cNvSpPr/>
-          <p:nvPr/>
-        </p:nvSpPr>
-        <p:spPr>
-          <a:xfrm>
-            <a:off x="658368" y="2706624"/>
-            <a:ext cx="10972800" cy="3364992"/>
-          </a:xfrm>
-          <a:prstGeom prst="rect">
+            <a:off x="676656" y="2871216"/>
+            <a:ext cx="10835640" cy="2331720"/>
+          </a:xfrm>
+          <a:prstGeom prst="roundRect">
             <a:avLst/>
           </a:prstGeom>
           <a:solidFill>
@@ -16970,14 +18798,14 @@
           </a:fontRef>
         </p:style>
         <p:txBody>
-          <a:bodyPr rtlCol="0" anchor="ctr" wrap="square" lIns="164592" rIns="164592" tIns="109728" bIns="36576"/>
+          <a:bodyPr rtlCol="0" anchor="ctr" wrap="square" lIns="73152" rIns="73152" tIns="36576" bIns="36576"/>
           <a:lstStyle/>
           <a:p>
             <a:pPr algn="l">
               <a:spcAft>
                 <a:spcPts val="0"/>
               </a:spcAft>
-              <a:defRPr sz="1400" b="0">
+              <a:defRPr sz="1600" b="0">
                 <a:solidFill>
                   <a:srgbClr val="FFFFFF"/>
                 </a:solidFill>
@@ -16985,51 +18813,11 @@
               </a:defRPr>
             </a:pPr>
             <a:r>
-              <a:t>&lt;?xml version="1.0" ?&gt;</a:t>
+              <a:t>cd ~/ros2_curri/agv_ws</a:t>
             </a:r>
             <a:br/>
             <a:r>
-              <a:t>&lt;sdf version="1.10"&gt;</a:t>
-            </a:r>
-            <a:br/>
-            <a:r>
-              <a:t>  &lt;model name="agv"&gt;</a:t>
-            </a:r>
-            <a:br/>
-            <a:r>
-              <a:t>    &lt;link name="base_link"&gt;</a:t>
-            </a:r>
-            <a:br/>
-            <a:r>
-              <a:t>      &lt;pose&gt;0 0 0.16 0 0 0&lt;/pose&gt;</a:t>
-            </a:r>
-            <a:br/>
-            <a:r>
-              <a:t>      &lt;inertial&gt;</a:t>
-            </a:r>
-            <a:br/>
-            <a:r>
-              <a:t>        &lt;mass&gt;12.0&lt;/mass&gt;</a:t>
-            </a:r>
-            <a:br/>
-            <a:r>
-              <a:t>        &lt;inertia&gt;</a:t>
-            </a:r>
-            <a:br/>
-            <a:r>
-              <a:t>          &lt;ixx&gt;0.20&lt;/ixx&gt;</a:t>
-            </a:r>
-            <a:br/>
-            <a:r>
-              <a:t>          &lt;iyy&gt;0.40&lt;/iyy&gt;</a:t>
-            </a:r>
-            <a:br/>
-            <a:r>
-              <a:t>          &lt;izz&gt;0.50&lt;/izz&gt;</a:t>
-            </a:r>
-            <a:br/>
-            <a:r>
-              <a:t>        &lt;/inertia&gt;</a:t>
+              <a:t>gz sdf -k src/agv_description/curriculum_stages/M07/model.sdf</a:t>
             </a:r>
           </a:p>
         </p:txBody>
@@ -17042,8 +18830,8 @@
         </p:nvSpPr>
         <p:spPr>
           <a:xfrm>
-            <a:off x="749808" y="6181344"/>
-            <a:ext cx="10789920" cy="201168"/>
+            <a:off x="768096" y="5468112"/>
+            <a:ext cx="1143000" cy="256032"/>
           </a:xfrm>
           <a:prstGeom prst="rect">
             <a:avLst/>
@@ -17060,15 +18848,54 @@
               <a:spcAft>
                 <a:spcPts val="0"/>
               </a:spcAft>
-              <a:defRPr sz="1000" b="0">
-                <a:solidFill>
-                  <a:srgbClr val="5C6672"/>
-                </a:solidFill>
-                <a:latin typeface="Noto Sans CJK KR"/>
-              </a:defRPr>
-            </a:pPr>
-            <a:r>
-              <a:t>파일 전체 1/11 · 이 슬라이드 다음에 같은 파일의 나머지 줄이 이어집니다.</a:t>
+              <a:defRPr sz="1800" b="1">
+                <a:solidFill>
+                  <a:srgbClr val="2A8B5A"/>
+                </a:solidFill>
+                <a:latin typeface="Noto Sans CJK KR"/>
+              </a:defRPr>
+            </a:pPr>
+            <a:r>
+              <a:t>확인</a:t>
+            </a:r>
+          </a:p>
+        </p:txBody>
+      </p:sp>
+      <p:sp>
+        <p:nvSpPr>
+          <p:cNvPr id="11" name="TextBox 10"/>
+          <p:cNvSpPr txBox="1"/>
+          <p:nvPr/>
+        </p:nvSpPr>
+        <p:spPr>
+          <a:xfrm>
+            <a:off x="768096" y="5742432"/>
+            <a:ext cx="10561320" cy="347472"/>
+          </a:xfrm>
+          <a:prstGeom prst="rect">
+            <a:avLst/>
+          </a:prstGeom>
+          <a:noFill/>
+        </p:spPr>
+        <p:txBody>
+          <a:bodyPr wrap="square" lIns="73152" rIns="73152" tIns="36576" bIns="36576">
+            <a:spAutoFit/>
+          </a:bodyPr>
+          <a:lstStyle/>
+          <a:p>
+            <a:pPr algn="l">
+              <a:spcAft>
+                <a:spcPts val="0"/>
+              </a:spcAft>
+              <a:defRPr sz="1800" b="0">
+                <a:solidFill>
+                  <a:srgbClr val="122C4E"/>
+                </a:solidFill>
+                <a:latin typeface="Noto Sans CJK KR"/>
+              </a:defRPr>
+            </a:pPr>
+            <a:r>
+              <a:t>명령의 출력에서 topic·frame·파일 이름 또는 성공 메시지를 찾으면 이 단계가 완료됩니다.</a:t>
             </a:r>
           </a:p>
         </p:txBody>

--- a/blocks/B_robot_build/M07_physics_modeling/M07_Gazebo용_물리_요소_추가.pptx
+++ b/blocks/B_robot_build/M07_physics_modeling/M07_Gazebo용_물리_요소_추가.pptx
@@ -37,6 +37,9 @@
     <p:sldId id="285" r:id="rId37"/>
     <p:sldId id="286" r:id="rId38"/>
     <p:sldId id="287" r:id="rId39"/>
+    <p:sldId id="288" r:id="rId40"/>
+    <p:sldId id="289" r:id="rId41"/>
+    <p:sldId id="290" r:id="rId42"/>
   </p:sldIdLst>
   <p:sldSz cx="12191999" cy="6858000" type="screen4x3"/>
   <p:notesSz cx="6858000" cy="9144000"/>
@@ -808,17 +811,17 @@
           <a:lstStyle/>
           <a:p>
             <a:r>
-              <a:t>[설명] ~/ros2_curri/my_agv_ws/src/agv_description/curriculum_stages/M07/model.sdf의 1/11 구현 블록을 직접 입력한다.</a:t>
-            </a:r>
-          </a:p>
-          <a:p>
-            <a:r>
-              <a:t>[실행] nano ~/ros2_curri/my_agv_ws/src/agv_description/curriculum_stages/M07/model.sdf</a:t>
-            </a:r>
-          </a:p>
-          <a:p>
-            <a:r>
-              <a:t>[확인] 저장 뒤 다음 구현 블록으로 이동한다.</a:t>
+              <a:t>[설명] 코드를 읽어 주는 방식으로 한 줄의 역할과 실행 효과를 연결한다.</a:t>
+            </a:r>
+          </a:p>
+          <a:p>
+            <a:r>
+              <a:t>[실행] 슬라이드의 명령 또는 파일 작성 단계를 진행한다.</a:t>
+            </a:r>
+          </a:p>
+          <a:p>
+            <a:r>
+              <a:t>[확인] 각 코드 줄의 뜻과 확인 위치를 한 문장으로 설명한다.</a:t>
             </a:r>
           </a:p>
           <a:p>
@@ -828,7 +831,7 @@
           </a:p>
           <a:p>
             <a:r>
-              <a:t>[오류] 들여쓰기·XML 태그·따옴표가 슬라이드와 정확히 같은지 확인한다.</a:t>
+              <a:t>[오류] 오류가 나면 현재 폴더, source, 파일 경로를 먼저 확인한다.</a:t>
             </a:r>
           </a:p>
         </p:txBody>
@@ -898,17 +901,17 @@
           <a:lstStyle/>
           <a:p>
             <a:r>
-              <a:t>[설명] ~/ros2_curri/my_agv_ws/src/agv_description/curriculum_stages/M07/model.sdf의 2/11 구현 블록을 직접 입력한다.</a:t>
-            </a:r>
-          </a:p>
-          <a:p>
-            <a:r>
-              <a:t>[실행] nano ~/ros2_curri/my_agv_ws/src/agv_description/curriculum_stages/M07/model.sdf</a:t>
-            </a:r>
-          </a:p>
-          <a:p>
-            <a:r>
-              <a:t>[확인] 저장 뒤 다음 구현 블록으로 이동한다.</a:t>
+              <a:t>[설명] 코드를 읽어 주는 방식으로 한 줄의 역할과 실행 효과를 연결한다.</a:t>
+            </a:r>
+          </a:p>
+          <a:p>
+            <a:r>
+              <a:t>[실행] 슬라이드의 명령 또는 파일 작성 단계를 진행한다.</a:t>
+            </a:r>
+          </a:p>
+          <a:p>
+            <a:r>
+              <a:t>[확인] 각 코드 줄의 뜻과 확인 위치를 한 문장으로 설명한다.</a:t>
             </a:r>
           </a:p>
           <a:p>
@@ -918,7 +921,7 @@
           </a:p>
           <a:p>
             <a:r>
-              <a:t>[오류] 들여쓰기·XML 태그·따옴표가 슬라이드와 정확히 같은지 확인한다.</a:t>
+              <a:t>[오류] 오류가 나면 현재 폴더, source, 파일 경로를 먼저 확인한다.</a:t>
             </a:r>
           </a:p>
         </p:txBody>
@@ -988,17 +991,17 @@
           <a:lstStyle/>
           <a:p>
             <a:r>
-              <a:t>[설명] ~/ros2_curri/my_agv_ws/src/agv_description/curriculum_stages/M07/model.sdf의 3/11 구현 블록을 직접 입력한다.</a:t>
-            </a:r>
-          </a:p>
-          <a:p>
-            <a:r>
-              <a:t>[실행] nano ~/ros2_curri/my_agv_ws/src/agv_description/curriculum_stages/M07/model.sdf</a:t>
-            </a:r>
-          </a:p>
-          <a:p>
-            <a:r>
-              <a:t>[확인] 저장 뒤 다음 구현 블록으로 이동한다.</a:t>
+              <a:t>[설명] 코드를 읽어 주는 방식으로 한 줄의 역할과 실행 효과를 연결한다.</a:t>
+            </a:r>
+          </a:p>
+          <a:p>
+            <a:r>
+              <a:t>[실행] 슬라이드의 명령 또는 파일 작성 단계를 진행한다.</a:t>
+            </a:r>
+          </a:p>
+          <a:p>
+            <a:r>
+              <a:t>[확인] 각 코드 줄의 뜻과 확인 위치를 한 문장으로 설명한다.</a:t>
             </a:r>
           </a:p>
           <a:p>
@@ -1008,7 +1011,7 @@
           </a:p>
           <a:p>
             <a:r>
-              <a:t>[오류] 들여쓰기·XML 태그·따옴표가 슬라이드와 정확히 같은지 확인한다.</a:t>
+              <a:t>[오류] 오류가 나면 현재 폴더, source, 파일 경로를 먼저 확인한다.</a:t>
             </a:r>
           </a:p>
         </p:txBody>
@@ -1078,7 +1081,7 @@
           <a:lstStyle/>
           <a:p>
             <a:r>
-              <a:t>[설명] ~/ros2_curri/my_agv_ws/src/agv_description/curriculum_stages/M07/model.sdf의 4/11 구현 블록을 직접 입력한다.</a:t>
+              <a:t>[설명] ~/ros2_curri/my_agv_ws/src/agv_description/curriculum_stages/M07/model.sdf의 1/11 구현 블록을 직접 입력한다.</a:t>
             </a:r>
           </a:p>
           <a:p>
@@ -1168,7 +1171,7 @@
           <a:lstStyle/>
           <a:p>
             <a:r>
-              <a:t>[설명] ~/ros2_curri/my_agv_ws/src/agv_description/curriculum_stages/M07/model.sdf의 5/11 구현 블록을 직접 입력한다.</a:t>
+              <a:t>[설명] ~/ros2_curri/my_agv_ws/src/agv_description/curriculum_stages/M07/model.sdf의 2/11 구현 블록을 직접 입력한다.</a:t>
             </a:r>
           </a:p>
           <a:p>
@@ -1258,7 +1261,7 @@
           <a:lstStyle/>
           <a:p>
             <a:r>
-              <a:t>[설명] ~/ros2_curri/my_agv_ws/src/agv_description/curriculum_stages/M07/model.sdf의 6/11 구현 블록을 직접 입력한다.</a:t>
+              <a:t>[설명] ~/ros2_curri/my_agv_ws/src/agv_description/curriculum_stages/M07/model.sdf의 3/11 구현 블록을 직접 입력한다.</a:t>
             </a:r>
           </a:p>
           <a:p>
@@ -1348,7 +1351,7 @@
           <a:lstStyle/>
           <a:p>
             <a:r>
-              <a:t>[설명] ~/ros2_curri/my_agv_ws/src/agv_description/curriculum_stages/M07/model.sdf의 7/11 구현 블록을 직접 입력한다.</a:t>
+              <a:t>[설명] ~/ros2_curri/my_agv_ws/src/agv_description/curriculum_stages/M07/model.sdf의 4/11 구현 블록을 직접 입력한다.</a:t>
             </a:r>
           </a:p>
           <a:p>
@@ -1438,7 +1441,7 @@
           <a:lstStyle/>
           <a:p>
             <a:r>
-              <a:t>[설명] ~/ros2_curri/my_agv_ws/src/agv_description/curriculum_stages/M07/model.sdf의 8/11 구현 블록을 직접 입력한다.</a:t>
+              <a:t>[설명] ~/ros2_curri/my_agv_ws/src/agv_description/curriculum_stages/M07/model.sdf의 5/11 구현 블록을 직접 입력한다.</a:t>
             </a:r>
           </a:p>
           <a:p>
@@ -1618,7 +1621,7 @@
           <a:lstStyle/>
           <a:p>
             <a:r>
-              <a:t>[설명] ~/ros2_curri/my_agv_ws/src/agv_description/curriculum_stages/M07/model.sdf의 9/11 구현 블록을 직접 입력한다.</a:t>
+              <a:t>[설명] ~/ros2_curri/my_agv_ws/src/agv_description/curriculum_stages/M07/model.sdf의 6/11 구현 블록을 직접 입력한다.</a:t>
             </a:r>
           </a:p>
           <a:p>
@@ -1708,7 +1711,7 @@
           <a:lstStyle/>
           <a:p>
             <a:r>
-              <a:t>[설명] ~/ros2_curri/my_agv_ws/src/agv_description/curriculum_stages/M07/model.sdf의 10/11 구현 블록을 직접 입력한다.</a:t>
+              <a:t>[설명] ~/ros2_curri/my_agv_ws/src/agv_description/curriculum_stages/M07/model.sdf의 7/11 구현 블록을 직접 입력한다.</a:t>
             </a:r>
           </a:p>
           <a:p>
@@ -1798,7 +1801,7 @@
           <a:lstStyle/>
           <a:p>
             <a:r>
-              <a:t>[설명] ~/ros2_curri/my_agv_ws/src/agv_description/curriculum_stages/M07/model.sdf의 11/11 구현 블록을 직접 입력한다.</a:t>
+              <a:t>[설명] ~/ros2_curri/my_agv_ws/src/agv_description/curriculum_stages/M07/model.sdf의 8/11 구현 블록을 직접 입력한다.</a:t>
             </a:r>
           </a:p>
           <a:p>
@@ -1888,22 +1891,17 @@
           <a:lstStyle/>
           <a:p>
             <a:r>
-              <a:t>[설명] M07에는 visual·collision·inertial·friction만 있으며 sensor와 drive plugin은 아직 없다.</a:t>
-            </a:r>
-          </a:p>
-          <a:p>
-            <a:r>
-              <a:t>[실행] cd ~/ros2_curri/my_agv_ws</a:t>
-            </a:r>
-          </a:p>
-          <a:p>
-            <a:r>
-              <a:t>gz sdf -k src/agv_description/curriculum_stages/M07/model.sdf</a:t>
-            </a:r>
-          </a:p>
-          <a:p>
-            <a:r>
-              <a:t>[확인] 명령 출력에서 슬라이드의 확인 항목을 찾는다.</a:t>
+              <a:t>[설명] ~/ros2_curri/my_agv_ws/src/agv_description/curriculum_stages/M07/model.sdf의 9/11 구현 블록을 직접 입력한다.</a:t>
+            </a:r>
+          </a:p>
+          <a:p>
+            <a:r>
+              <a:t>[실행] nano ~/ros2_curri/my_agv_ws/src/agv_description/curriculum_stages/M07/model.sdf</a:t>
+            </a:r>
+          </a:p>
+          <a:p>
+            <a:r>
+              <a:t>[확인] 저장 뒤 다음 구현 블록으로 이동한다.</a:t>
             </a:r>
           </a:p>
           <a:p>
@@ -1913,7 +1911,7 @@
           </a:p>
           <a:p>
             <a:r>
-              <a:t>[오류] 오류가 나면 현재 폴더, source, 파일 경로를 먼저 확인한다.</a:t>
+              <a:t>[오류] 들여쓰기·XML 태그·따옴표가 슬라이드와 정확히 같은지 확인한다.</a:t>
             </a:r>
           </a:p>
         </p:txBody>
@@ -1983,17 +1981,17 @@
           <a:lstStyle/>
           <a:p>
             <a:r>
-              <a:t>[설명] 증상 원인을 찾으려면 mass→inertia→collision→friction 순서를 지킨다.</a:t>
-            </a:r>
-          </a:p>
-          <a:p>
-            <a:r>
-              <a:t>[실행] rg -n '&lt;mass&gt;|&lt;inertia&gt;|&lt;collision&gt;|&lt;friction&gt;' src/agv_description/curriculum_stages/M07/model.sdf</a:t>
-            </a:r>
-          </a:p>
-          <a:p>
-            <a:r>
-              <a:t>[확인] 명령 출력에서 슬라이드의 확인 항목을 찾는다.</a:t>
+              <a:t>[설명] ~/ros2_curri/my_agv_ws/src/agv_description/curriculum_stages/M07/model.sdf의 10/11 구현 블록을 직접 입력한다.</a:t>
+            </a:r>
+          </a:p>
+          <a:p>
+            <a:r>
+              <a:t>[실행] nano ~/ros2_curri/my_agv_ws/src/agv_description/curriculum_stages/M07/model.sdf</a:t>
+            </a:r>
+          </a:p>
+          <a:p>
+            <a:r>
+              <a:t>[확인] 저장 뒤 다음 구현 블록으로 이동한다.</a:t>
             </a:r>
           </a:p>
           <a:p>
@@ -2003,7 +2001,7 @@
           </a:p>
           <a:p>
             <a:r>
-              <a:t>[오류] 오류가 나면 현재 폴더, source, 파일 경로를 먼저 확인한다.</a:t>
+              <a:t>[오류] 들여쓰기·XML 태그·따옴표가 슬라이드와 정확히 같은지 확인한다.</a:t>
             </a:r>
           </a:p>
         </p:txBody>
@@ -2073,22 +2071,17 @@
           <a:lstStyle/>
           <a:p>
             <a:r>
-              <a:t>[설명] build/source/run을 생략 없이 실행한다.</a:t>
-            </a:r>
-          </a:p>
-          <a:p>
-            <a:r>
-              <a:t>[실행] cd ~/ros2_curri/my_agv_ws</a:t>
-            </a:r>
-          </a:p>
-          <a:p>
-            <a:r>
-              <a:t>gz sdf -k src/agv_description/curriculum_stages/M07/model.sdf</a:t>
-            </a:r>
-          </a:p>
-          <a:p>
-            <a:r>
-              <a:t>[확인] AGV가 바닥에 안정적으로 놓이고 바퀴 접촉·충돌 파라미터가 모델에 존재한다.</a:t>
+              <a:t>[설명] ~/ros2_curri/my_agv_ws/src/agv_description/curriculum_stages/M07/model.sdf의 11/11 구현 블록을 직접 입력한다.</a:t>
+            </a:r>
+          </a:p>
+          <a:p>
+            <a:r>
+              <a:t>[실행] nano ~/ros2_curri/my_agv_ws/src/agv_description/curriculum_stages/M07/model.sdf</a:t>
+            </a:r>
+          </a:p>
+          <a:p>
+            <a:r>
+              <a:t>[확인] 저장 뒤 다음 구현 블록으로 이동한다.</a:t>
             </a:r>
           </a:p>
           <a:p>
@@ -2098,7 +2091,7 @@
           </a:p>
           <a:p>
             <a:r>
-              <a:t>[오류] 오류가 나면 현재 폴더, source, 파일 경로를 먼저 확인한다.</a:t>
+              <a:t>[오류] 들여쓰기·XML 태그·따옴표가 슬라이드와 정확히 같은지 확인한다.</a:t>
             </a:r>
           </a:p>
         </p:txBody>
@@ -2168,17 +2161,22 @@
           <a:lstStyle/>
           <a:p>
             <a:r>
-              <a:t>[설명] 실제 Ubuntu/ROS 2 환경에서 생성한 검증 화면이다.</a:t>
-            </a:r>
-          </a:p>
-          <a:p>
-            <a:r>
-              <a:t>[실행] 슬라이드의 명령 또는 파일 작성 단계를 진행한다.</a:t>
-            </a:r>
-          </a:p>
-          <a:p>
-            <a:r>
-              <a:t>[확인] ① 명령/설정  ② 정상 출력 또는 화면  ③ 다음 검증 명령으로 재확인</a:t>
+              <a:t>[설명] M07에는 visual·collision·inertial·friction만 있으며 sensor와 drive plugin은 아직 없다.</a:t>
+            </a:r>
+          </a:p>
+          <a:p>
+            <a:r>
+              <a:t>[실행] cd ~/ros2_curri/my_agv_ws</a:t>
+            </a:r>
+          </a:p>
+          <a:p>
+            <a:r>
+              <a:t>gz sdf -k src/agv_description/curriculum_stages/M07/model.sdf</a:t>
+            </a:r>
+          </a:p>
+          <a:p>
+            <a:r>
+              <a:t>[확인] 명령 출력에서 슬라이드의 확인 항목을 찾는다.</a:t>
             </a:r>
           </a:p>
           <a:p>
@@ -2258,22 +2256,17 @@
           <a:lstStyle/>
           <a:p>
             <a:r>
-              <a:t>[설명] 검증 명령은 GUI 결과와 별도로 실행해 재현 가능한 완료 기준을 만든다.</a:t>
-            </a:r>
-          </a:p>
-          <a:p>
-            <a:r>
-              <a:t>[실행] gz sdf -k ~/ros2_curri/my_agv_ws/src/agv_description/curriculum_stages/M07/model.sdf</a:t>
-            </a:r>
-          </a:p>
-          <a:p>
-            <a:r>
-              <a:t>rg -n '&lt;sensor|DiffDrive' ~/ros2_curri/my_agv_ws/src/agv_description/curriculum_stages/M07/model.sdf</a:t>
-            </a:r>
-          </a:p>
-          <a:p>
-            <a:r>
-              <a:t>[확인] AGV가 바닥에 안정적으로 놓이고 바퀴 접촉·충돌 파라미터가 모델에 존재한다.</a:t>
+              <a:t>[설명] 증상 원인을 찾으려면 mass→inertia→collision→friction 순서를 지킨다.</a:t>
+            </a:r>
+          </a:p>
+          <a:p>
+            <a:r>
+              <a:t>[실행] rg -n '&lt;mass&gt;|&lt;inertia&gt;|&lt;collision&gt;|&lt;friction&gt;' src/agv_description/curriculum_stages/M07/model.sdf</a:t>
+            </a:r>
+          </a:p>
+          <a:p>
+            <a:r>
+              <a:t>[확인] 명령 출력에서 슬라이드의 확인 항목을 찾는다.</a:t>
             </a:r>
           </a:p>
           <a:p>
@@ -2353,17 +2346,22 @@
           <a:lstStyle/>
           <a:p>
             <a:r>
-              <a:t>[설명] 오류를 대신 해결하지 말고 증상부터 우선 확인 순서대로 교육생이 실행하게 한다.</a:t>
-            </a:r>
-          </a:p>
-          <a:p>
-            <a:r>
-              <a:t>[실행] 슬라이드의 명령 또는 파일 작성 단계를 진행한다.</a:t>
-            </a:r>
-          </a:p>
-          <a:p>
-            <a:r>
-              <a:t>[확인] 수정 뒤 첫 검증 명령을 다시 실행한다.</a:t>
+              <a:t>[설명] build/source/run을 생략 없이 실행한다.</a:t>
+            </a:r>
+          </a:p>
+          <a:p>
+            <a:r>
+              <a:t>[실행] cd ~/ros2_curri/my_agv_ws</a:t>
+            </a:r>
+          </a:p>
+          <a:p>
+            <a:r>
+              <a:t>gz sdf -k src/agv_description/curriculum_stages/M07/model.sdf</a:t>
+            </a:r>
+          </a:p>
+          <a:p>
+            <a:r>
+              <a:t>[확인] AGV가 바닥에 안정적으로 놓이고 바퀴 접촉·충돌 파라미터가 모델에 존재한다.</a:t>
             </a:r>
           </a:p>
           <a:p>
@@ -2373,7 +2371,7 @@
           </a:p>
           <a:p>
             <a:r>
-              <a:t>[오류] 슬라이드의 두 대표 오류를 먼저 사용한다.</a:t>
+              <a:t>[오류] 오류가 나면 현재 폴더, source, 파일 경로를 먼저 확인한다.</a:t>
             </a:r>
           </a:p>
         </p:txBody>
@@ -2443,37 +2441,17 @@
           <a:lstStyle/>
           <a:p>
             <a:r>
-              <a:t>[설명] Complete는 정답 복사본이 아니라 막혔을 때 비교·복구하는 안전망이다.</a:t>
-            </a:r>
-          </a:p>
-          <a:p>
-            <a:r>
-              <a:t>[실행] cd ~/ros2_curri</a:t>
-            </a:r>
-          </a:p>
-          <a:p>
-            <a:r>
-              <a:t>diff -ru my_agv_ws/src blocks/B_robot_build/M07_physics_modeling/complete/agv_ws/src || true</a:t>
-            </a:r>
-          </a:p>
-          <a:p>
-            <a:r>
-              <a:t>cp -a my_agv_ws/src my_agv_ws/src_before_M07</a:t>
-            </a:r>
-          </a:p>
-          <a:p>
-            <a:r>
-              <a:t>cp -a blocks/B_robot_build/M07_physics_modeling/complete/agv_ws/src/. my_agv_ws/src/</a:t>
-            </a:r>
-          </a:p>
-          <a:p>
-            <a:r>
-              <a:t>cd my_agv_ws &amp;&amp; colcon build --symlink-install &amp;&amp; source install/setup.bash</a:t>
-            </a:r>
-          </a:p>
-          <a:p>
-            <a:r>
-              <a:t>[확인] diff에서 내 파일과 Complete의 차이를 설명할 수 있다.</a:t>
+              <a:t>[설명] 실제 Ubuntu/ROS 2 환경에서 생성한 검증 화면이다.</a:t>
+            </a:r>
+          </a:p>
+          <a:p>
+            <a:r>
+              <a:t>[실행] 슬라이드의 명령 또는 파일 작성 단계를 진행한다.</a:t>
+            </a:r>
+          </a:p>
+          <a:p>
+            <a:r>
+              <a:t>[확인] ① 명령/설정  ② 정상 출력 또는 화면  ③ 다음 검증 명령으로 재확인</a:t>
             </a:r>
           </a:p>
           <a:p>
@@ -2643,17 +2621,22 @@
           <a:lstStyle/>
           <a:p>
             <a:r>
-              <a:t>[설명] 교육생이 직접 한 값만 바꿔 원인과 결과를 연결하게 한다.</a:t>
-            </a:r>
-          </a:p>
-          <a:p>
-            <a:r>
-              <a:t>[실행] 슬라이드의 명령 또는 파일 작성 단계를 진행한다.</a:t>
-            </a:r>
-          </a:p>
-          <a:p>
-            <a:r>
-              <a:t>[확인] 원래 값과 변경 값을 모두 기록한다.</a:t>
+              <a:t>[설명] 검증 명령은 GUI 결과와 별도로 실행해 재현 가능한 완료 기준을 만든다.</a:t>
+            </a:r>
+          </a:p>
+          <a:p>
+            <a:r>
+              <a:t>[실행] gz sdf -k ~/ros2_curri/my_agv_ws/src/agv_description/curriculum_stages/M07/model.sdf</a:t>
+            </a:r>
+          </a:p>
+          <a:p>
+            <a:r>
+              <a:t>rg -n '&lt;sensor|DiffDrive' ~/ros2_curri/my_agv_ws/src/agv_description/curriculum_stages/M07/model.sdf</a:t>
+            </a:r>
+          </a:p>
+          <a:p>
+            <a:r>
+              <a:t>[확인] AGV가 바닥에 안정적으로 놓이고 바퀴 접촉·충돌 파라미터가 모델에 존재한다.</a:t>
             </a:r>
           </a:p>
           <a:p>
@@ -2733,7 +2716,7 @@
           <a:lstStyle/>
           <a:p>
             <a:r>
-              <a:t>[설명] 교육생이 자신의 workspace·캡처·로그를 저장했는지 확인하고 다음 모듈의 시작 상태를 읽는다.</a:t>
+              <a:t>[설명] 오류를 대신 해결하지 말고 증상부터 우선 확인 순서대로 교육생이 실행하게 한다.</a:t>
             </a:r>
           </a:p>
           <a:p>
@@ -2743,7 +2726,7 @@
           </a:p>
           <a:p>
             <a:r>
-              <a:t>[확인] M08 World/Spawn 시작 조건을 말할 수 있다.</a:t>
+              <a:t>[확인] 수정 뒤 첫 검증 명령을 다시 실행한다.</a:t>
             </a:r>
           </a:p>
           <a:p>
@@ -2753,7 +2736,7 @@
           </a:p>
           <a:p>
             <a:r>
-              <a:t>[오류] 오류가 나면 현재 폴더, source, 파일 경로를 먼저 확인한다.</a:t>
+              <a:t>[오류] 슬라이드의 두 대표 오류를 먼저 사용한다.</a:t>
             </a:r>
           </a:p>
         </p:txBody>
@@ -2779,6 +2762,296 @@
 </file>
 
 <file path=ppt/notesSlides/notesSlide32.xml><?xml version="1.0" encoding="utf-8"?>
+<p:notes xmlns:a="http://schemas.openxmlformats.org/drawingml/2006/main" xmlns:p="http://schemas.openxmlformats.org/presentationml/2006/main" xmlns:r="http://schemas.openxmlformats.org/officeDocument/2006/relationships">
+  <p:cSld>
+    <p:spTree>
+      <p:nvGrpSpPr>
+        <p:cNvPr id="1" name=""/>
+        <p:cNvGrpSpPr/>
+        <p:nvPr/>
+      </p:nvGrpSpPr>
+      <p:grpSpPr>
+        <a:xfrm>
+          <a:off x="0" y="0"/>
+          <a:ext cx="0" cy="0"/>
+          <a:chOff x="0" y="0"/>
+          <a:chExt cx="0" cy="0"/>
+        </a:xfrm>
+      </p:grpSpPr>
+      <p:sp>
+        <p:nvSpPr>
+          <p:cNvPr id="2" name="Slide Image Placeholder 1"/>
+          <p:cNvSpPr>
+            <a:spLocks noGrp="1"/>
+          </p:cNvSpPr>
+          <p:nvPr>
+            <p:ph type="sldImg" idx="2"/>
+          </p:nvPr>
+        </p:nvSpPr>
+        <p:spPr/>
+      </p:sp>
+      <p:sp>
+        <p:nvSpPr>
+          <p:cNvPr id="3" name="Notes Placeholder 2"/>
+          <p:cNvSpPr>
+            <a:spLocks noGrp="1"/>
+          </p:cNvSpPr>
+          <p:nvPr>
+            <p:ph type="body" idx="3" sz="quarter"/>
+          </p:nvPr>
+        </p:nvSpPr>
+        <p:spPr/>
+        <p:txBody>
+          <a:bodyPr/>
+          <a:lstStyle/>
+          <a:p>
+            <a:r>
+              <a:t>[설명] Complete는 정답 복사본이 아니라 막혔을 때 비교·복구하는 안전망이다.</a:t>
+            </a:r>
+          </a:p>
+          <a:p>
+            <a:r>
+              <a:t>[실행] cd ~/ros2_curri</a:t>
+            </a:r>
+          </a:p>
+          <a:p>
+            <a:r>
+              <a:t>diff -ru my_agv_ws/src blocks/B_robot_build/M07_physics_modeling/complete/agv_ws/src || true</a:t>
+            </a:r>
+          </a:p>
+          <a:p>
+            <a:r>
+              <a:t>cp -a my_agv_ws/src my_agv_ws/src_before_M07</a:t>
+            </a:r>
+          </a:p>
+          <a:p>
+            <a:r>
+              <a:t>cp -a blocks/B_robot_build/M07_physics_modeling/complete/agv_ws/src/. my_agv_ws/src/</a:t>
+            </a:r>
+          </a:p>
+          <a:p>
+            <a:r>
+              <a:t>cd my_agv_ws &amp;&amp; colcon build --symlink-install &amp;&amp; source install/setup.bash</a:t>
+            </a:r>
+          </a:p>
+          <a:p>
+            <a:r>
+              <a:t>[확인] diff에서 내 파일과 Complete의 차이를 설명할 수 있다.</a:t>
+            </a:r>
+          </a:p>
+          <a:p>
+            <a:r>
+              <a:t>[멈춤] 교육생이 현재 체크포인트를 통과할 때까지 기다린다.</a:t>
+            </a:r>
+          </a:p>
+          <a:p>
+            <a:r>
+              <a:t>[오류] 오류가 나면 현재 폴더, source, 파일 경로를 먼저 확인한다.</a:t>
+            </a:r>
+          </a:p>
+        </p:txBody>
+      </p:sp>
+      <p:sp>
+        <p:nvSpPr>
+          <p:cNvPr id="4" name="Slide Number Placeholder 3"/>
+          <p:cNvSpPr>
+            <a:spLocks noGrp="1"/>
+          </p:cNvSpPr>
+          <p:nvPr>
+            <p:ph type="sldNum" idx="5" sz="quarter"/>
+          </p:nvPr>
+        </p:nvSpPr>
+        <p:spPr/>
+      </p:sp>
+    </p:spTree>
+  </p:cSld>
+  <p:clrMapOvr>
+    <a:masterClrMapping/>
+  </p:clrMapOvr>
+</p:notes>
+</file>
+
+<file path=ppt/notesSlides/notesSlide33.xml><?xml version="1.0" encoding="utf-8"?>
+<p:notes xmlns:a="http://schemas.openxmlformats.org/drawingml/2006/main" xmlns:p="http://schemas.openxmlformats.org/presentationml/2006/main" xmlns:r="http://schemas.openxmlformats.org/officeDocument/2006/relationships">
+  <p:cSld>
+    <p:spTree>
+      <p:nvGrpSpPr>
+        <p:cNvPr id="1" name=""/>
+        <p:cNvGrpSpPr/>
+        <p:nvPr/>
+      </p:nvGrpSpPr>
+      <p:grpSpPr>
+        <a:xfrm>
+          <a:off x="0" y="0"/>
+          <a:ext cx="0" cy="0"/>
+          <a:chOff x="0" y="0"/>
+          <a:chExt cx="0" cy="0"/>
+        </a:xfrm>
+      </p:grpSpPr>
+      <p:sp>
+        <p:nvSpPr>
+          <p:cNvPr id="2" name="Slide Image Placeholder 1"/>
+          <p:cNvSpPr>
+            <a:spLocks noGrp="1"/>
+          </p:cNvSpPr>
+          <p:nvPr>
+            <p:ph type="sldImg" idx="2"/>
+          </p:nvPr>
+        </p:nvSpPr>
+        <p:spPr/>
+      </p:sp>
+      <p:sp>
+        <p:nvSpPr>
+          <p:cNvPr id="3" name="Notes Placeholder 2"/>
+          <p:cNvSpPr>
+            <a:spLocks noGrp="1"/>
+          </p:cNvSpPr>
+          <p:nvPr>
+            <p:ph type="body" idx="3" sz="quarter"/>
+          </p:nvPr>
+        </p:nvSpPr>
+        <p:spPr/>
+        <p:txBody>
+          <a:bodyPr/>
+          <a:lstStyle/>
+          <a:p>
+            <a:r>
+              <a:t>[설명] 교육생이 직접 한 값만 바꿔 원인과 결과를 연결하게 한다.</a:t>
+            </a:r>
+          </a:p>
+          <a:p>
+            <a:r>
+              <a:t>[실행] 슬라이드의 명령 또는 파일 작성 단계를 진행한다.</a:t>
+            </a:r>
+          </a:p>
+          <a:p>
+            <a:r>
+              <a:t>[확인] 원래 값과 변경 값을 모두 기록한다.</a:t>
+            </a:r>
+          </a:p>
+          <a:p>
+            <a:r>
+              <a:t>[멈춤] 교육생이 현재 체크포인트를 통과할 때까지 기다린다.</a:t>
+            </a:r>
+          </a:p>
+          <a:p>
+            <a:r>
+              <a:t>[오류] 오류가 나면 현재 폴더, source, 파일 경로를 먼저 확인한다.</a:t>
+            </a:r>
+          </a:p>
+        </p:txBody>
+      </p:sp>
+      <p:sp>
+        <p:nvSpPr>
+          <p:cNvPr id="4" name="Slide Number Placeholder 3"/>
+          <p:cNvSpPr>
+            <a:spLocks noGrp="1"/>
+          </p:cNvSpPr>
+          <p:nvPr>
+            <p:ph type="sldNum" idx="5" sz="quarter"/>
+          </p:nvPr>
+        </p:nvSpPr>
+        <p:spPr/>
+      </p:sp>
+    </p:spTree>
+  </p:cSld>
+  <p:clrMapOvr>
+    <a:masterClrMapping/>
+  </p:clrMapOvr>
+</p:notes>
+</file>
+
+<file path=ppt/notesSlides/notesSlide34.xml><?xml version="1.0" encoding="utf-8"?>
+<p:notes xmlns:a="http://schemas.openxmlformats.org/drawingml/2006/main" xmlns:p="http://schemas.openxmlformats.org/presentationml/2006/main" xmlns:r="http://schemas.openxmlformats.org/officeDocument/2006/relationships">
+  <p:cSld>
+    <p:spTree>
+      <p:nvGrpSpPr>
+        <p:cNvPr id="1" name=""/>
+        <p:cNvGrpSpPr/>
+        <p:nvPr/>
+      </p:nvGrpSpPr>
+      <p:grpSpPr>
+        <a:xfrm>
+          <a:off x="0" y="0"/>
+          <a:ext cx="0" cy="0"/>
+          <a:chOff x="0" y="0"/>
+          <a:chExt cx="0" cy="0"/>
+        </a:xfrm>
+      </p:grpSpPr>
+      <p:sp>
+        <p:nvSpPr>
+          <p:cNvPr id="2" name="Slide Image Placeholder 1"/>
+          <p:cNvSpPr>
+            <a:spLocks noGrp="1"/>
+          </p:cNvSpPr>
+          <p:nvPr>
+            <p:ph type="sldImg" idx="2"/>
+          </p:nvPr>
+        </p:nvSpPr>
+        <p:spPr/>
+      </p:sp>
+      <p:sp>
+        <p:nvSpPr>
+          <p:cNvPr id="3" name="Notes Placeholder 2"/>
+          <p:cNvSpPr>
+            <a:spLocks noGrp="1"/>
+          </p:cNvSpPr>
+          <p:nvPr>
+            <p:ph type="body" idx="3" sz="quarter"/>
+          </p:nvPr>
+        </p:nvSpPr>
+        <p:spPr/>
+        <p:txBody>
+          <a:bodyPr/>
+          <a:lstStyle/>
+          <a:p>
+            <a:r>
+              <a:t>[설명] 교육생이 자신의 workspace·캡처·로그를 저장했는지 확인하고 다음 모듈의 시작 상태를 읽는다.</a:t>
+            </a:r>
+          </a:p>
+          <a:p>
+            <a:r>
+              <a:t>[실행] 슬라이드의 명령 또는 파일 작성 단계를 진행한다.</a:t>
+            </a:r>
+          </a:p>
+          <a:p>
+            <a:r>
+              <a:t>[확인] M08 World/Spawn 시작 조건을 말할 수 있다.</a:t>
+            </a:r>
+          </a:p>
+          <a:p>
+            <a:r>
+              <a:t>[멈춤] 교육생이 현재 체크포인트를 통과할 때까지 기다린다.</a:t>
+            </a:r>
+          </a:p>
+          <a:p>
+            <a:r>
+              <a:t>[오류] 오류가 나면 현재 폴더, source, 파일 경로를 먼저 확인한다.</a:t>
+            </a:r>
+          </a:p>
+        </p:txBody>
+      </p:sp>
+      <p:sp>
+        <p:nvSpPr>
+          <p:cNvPr id="4" name="Slide Number Placeholder 3"/>
+          <p:cNvSpPr>
+            <a:spLocks noGrp="1"/>
+          </p:cNvSpPr>
+          <p:nvPr>
+            <p:ph type="sldNum" idx="5" sz="quarter"/>
+          </p:nvPr>
+        </p:nvSpPr>
+        <p:spPr/>
+      </p:sp>
+    </p:spTree>
+  </p:cSld>
+  <p:clrMapOvr>
+    <a:masterClrMapping/>
+  </p:clrMapOvr>
+</p:notes>
+</file>
+
+<file path=ppt/notesSlides/notesSlide35.xml><?xml version="1.0" encoding="utf-8"?>
 <p:notes xmlns:a="http://schemas.openxmlformats.org/drawingml/2006/main" xmlns:p="http://schemas.openxmlformats.org/presentationml/2006/main" xmlns:r="http://schemas.openxmlformats.org/officeDocument/2006/relationships">
   <p:cSld>
     <p:spTree>
@@ -8047,7 +8320,7 @@
               </a:defRPr>
             </a:pPr>
             <a:r>
-              <a:t>구현 1/1: 코드 입력 (1/11)</a:t>
+              <a:t>구현 1/1: 코드 읽기 (1/3)</a:t>
             </a:r>
           </a:p>
         </p:txBody>
@@ -8086,7 +8359,7 @@
               </a:defRPr>
             </a:pPr>
             <a:r>
-              <a:t>~/ros2_curri/my_agv_ws/src/agv_description/curriculum_stages/M07/model.sdf</a:t>
+              <a:t>짧은 실제 코드 조각을 먼저 읽고, 다음 슬라이드에서 같은 코드를 직접 입력합니다.</a:t>
             </a:r>
           </a:p>
         </p:txBody>
@@ -8222,7 +8495,7 @@
               </a:defRPr>
             </a:pPr>
             <a:r>
-              <a:t>현재 단계 파일 1/1 · 입력 1/11    |    현재 폴더 ~/ros2_curri/my_agv_ws    |    현재 터미널</a:t>
+              <a:t>현재 단계 코드 해설 1/1    |    현재 폴더 ~/ros2_curri/my_agv_ws    |    현재 터미널</a:t>
             </a:r>
           </a:p>
         </p:txBody>
@@ -8235,111 +8508,88 @@
         </p:nvSpPr>
         <p:spPr>
           <a:xfrm>
-            <a:off x="658368" y="1609344"/>
-            <a:ext cx="10972800" cy="384048"/>
-          </a:xfrm>
-          <a:prstGeom prst="rect">
-            <a:avLst/>
-          </a:prstGeom>
-          <a:noFill/>
-        </p:spPr>
-        <p:txBody>
-          <a:bodyPr wrap="square" lIns="73152" rIns="73152" tIns="36576" bIns="36576">
-            <a:spAutoFit/>
-          </a:bodyPr>
-          <a:lstStyle/>
-          <a:p>
-            <a:pPr algn="l">
-              <a:spcAft>
-                <a:spcPts val="0"/>
-              </a:spcAft>
-              <a:defRPr sz="1400" b="1">
-                <a:solidFill>
-                  <a:srgbClr val="122C4E"/>
-                </a:solidFill>
-                <a:latin typeface="Noto Sans CJK KR"/>
-              </a:defRPr>
-            </a:pPr>
-            <a:r>
-              <a:t>이 블록이 하는 일: 파일의 root와 첫 model/link를 입력합니다. 태그 여닫는 순서를 그대로 유지합니다.</a:t>
-            </a:r>
-          </a:p>
-        </p:txBody>
-      </p:sp>
-      <p:sp>
-        <p:nvSpPr>
-          <p:cNvPr id="8" name="Rectangle 7"/>
+            <a:off x="694944" y="1618488"/>
+            <a:ext cx="10789920" cy="274320"/>
+          </a:xfrm>
+          <a:prstGeom prst="rect">
+            <a:avLst/>
+          </a:prstGeom>
+          <a:noFill/>
+        </p:spPr>
+        <p:txBody>
+          <a:bodyPr wrap="square" lIns="73152" rIns="73152" tIns="36576" bIns="36576">
+            <a:spAutoFit/>
+          </a:bodyPr>
+          <a:lstStyle/>
+          <a:p>
+            <a:pPr algn="l">
+              <a:spcAft>
+                <a:spcPts val="0"/>
+              </a:spcAft>
+              <a:defRPr sz="1300" b="1">
+                <a:solidFill>
+                  <a:srgbClr val="225B9B"/>
+                </a:solidFill>
+                <a:latin typeface="DejaVu Sans Mono"/>
+              </a:defRPr>
+            </a:pPr>
+            <a:r>
+              <a:t>~/ros2_curri/my_agv_ws/src/agv_description/curriculum_stages/M07/model.sdf</a:t>
+            </a:r>
+          </a:p>
+        </p:txBody>
+      </p:sp>
+      <p:sp>
+        <p:nvSpPr>
+          <p:cNvPr id="8" name="TextBox 7"/>
+          <p:cNvSpPr txBox="1"/>
+          <p:nvPr/>
+        </p:nvSpPr>
+        <p:spPr>
+          <a:xfrm>
+            <a:off x="694944" y="1938528"/>
+            <a:ext cx="10789920" cy="274320"/>
+          </a:xfrm>
+          <a:prstGeom prst="rect">
+            <a:avLst/>
+          </a:prstGeom>
+          <a:noFill/>
+        </p:spPr>
+        <p:txBody>
+          <a:bodyPr wrap="square" lIns="73152" rIns="73152" tIns="36576" bIns="36576">
+            <a:spAutoFit/>
+          </a:bodyPr>
+          <a:lstStyle/>
+          <a:p>
+            <a:pPr algn="ctr">
+              <a:spcAft>
+                <a:spcPts val="0"/>
+              </a:spcAft>
+              <a:defRPr sz="1500" b="1">
+                <a:solidFill>
+                  <a:srgbClr val="DB7E22"/>
+                </a:solidFill>
+                <a:latin typeface="Noto Sans CJK KR"/>
+              </a:defRPr>
+            </a:pPr>
+            <a:r>
+              <a:t>말로 먼저 답해 보세요: 이 줄은 무엇을 만들고, 실행하면 어디에서 확인할 수 있을까요?</a:t>
+            </a:r>
+          </a:p>
+        </p:txBody>
+      </p:sp>
+      <p:sp>
+        <p:nvSpPr>
+          <p:cNvPr id="9" name="Rounded Rectangle 8"/>
           <p:cNvSpPr/>
           <p:nvPr/>
         </p:nvSpPr>
         <p:spPr>
           <a:xfrm>
-            <a:off x="658368" y="1956816"/>
-            <a:ext cx="10972800" cy="603504"/>
-          </a:xfrm>
-          <a:prstGeom prst="rect">
-            <a:avLst/>
-          </a:prstGeom>
-          <a:solidFill>
-            <a:srgbClr val="F4F7FB"/>
-          </a:solidFill>
-          <a:ln>
-            <a:solidFill>
-              <a:srgbClr val="F4F7FB"/>
-            </a:solidFill>
-          </a:ln>
-        </p:spPr>
-        <p:style>
-          <a:lnRef idx="1">
-            <a:schemeClr val="accent1"/>
-          </a:lnRef>
-          <a:fillRef idx="3">
-            <a:schemeClr val="accent1"/>
-          </a:fillRef>
-          <a:effectRef idx="2">
-            <a:schemeClr val="accent1"/>
-          </a:effectRef>
-          <a:fontRef idx="minor">
-            <a:schemeClr val="lt1"/>
-          </a:fontRef>
-        </p:style>
-        <p:txBody>
-          <a:bodyPr rtlCol="0" anchor="ctr" wrap="square" lIns="73152" rIns="73152" tIns="36576" bIns="36576"/>
-          <a:lstStyle/>
-          <a:p>
-            <a:pPr algn="l">
-              <a:spcAft>
-                <a:spcPts val="0"/>
-              </a:spcAft>
-              <a:defRPr sz="1300" b="0">
-                <a:solidFill>
-                  <a:srgbClr val="122C4E"/>
-                </a:solidFill>
-                <a:latin typeface="DejaVu Sans Mono"/>
-              </a:defRPr>
-            </a:pPr>
-            <a:r>
-              <a:t>현재 열린 파일: ~/ros2_curri/my_agv_ws/src/agv_description/curriculum_stages/M07/model.sdf</a:t>
-            </a:r>
-            <a:br/>
-            <a:r>
-              <a:t>아래 코드만 입력 → Ctrl+O → Enter로 저장 → 다음 블록으로 이동</a:t>
-            </a:r>
-          </a:p>
-        </p:txBody>
-      </p:sp>
-      <p:sp>
-        <p:nvSpPr>
-          <p:cNvPr id="9" name="Rectangle 8"/>
-          <p:cNvSpPr/>
-          <p:nvPr/>
-        </p:nvSpPr>
-        <p:spPr>
-          <a:xfrm>
-            <a:off x="658368" y="2706624"/>
-            <a:ext cx="10972800" cy="3364992"/>
-          </a:xfrm>
-          <a:prstGeom prst="rect">
+            <a:off x="658368" y="2359152"/>
+            <a:ext cx="4160520" cy="1417320"/>
+          </a:xfrm>
+          <a:prstGeom prst="roundRect">
             <a:avLst/>
           </a:prstGeom>
           <a:solidFill>
@@ -8366,14 +8616,14 @@
           </a:fontRef>
         </p:style>
         <p:txBody>
-          <a:bodyPr rtlCol="0" anchor="ctr" wrap="square" lIns="164592" rIns="164592" tIns="109728" bIns="36576"/>
-          <a:lstStyle/>
-          <a:p>
-            <a:pPr algn="l">
-              <a:spcAft>
-                <a:spcPts val="0"/>
-              </a:spcAft>
-              <a:defRPr sz="1400" b="0">
+          <a:bodyPr rtlCol="0" anchor="ctr" wrap="square" lIns="73152" rIns="73152" tIns="36576" bIns="36576"/>
+          <a:lstStyle/>
+          <a:p>
+            <a:pPr algn="l">
+              <a:spcAft>
+                <a:spcPts val="0"/>
+              </a:spcAft>
+              <a:defRPr sz="1300" b="0">
                 <a:solidFill>
                   <a:srgbClr val="FFFFFF"/>
                 </a:solidFill>
@@ -8381,82 +8631,420 @@
               </a:defRPr>
             </a:pPr>
             <a:r>
-              <a:t>&lt;?xml version="1.0" ?&gt;</a:t>
-            </a:r>
-            <a:br/>
-            <a:r>
-              <a:t>&lt;sdf version="1.10"&gt;</a:t>
-            </a:r>
-            <a:br/>
-            <a:r>
-              <a:t>  &lt;model name="agv"&gt;</a:t>
-            </a:r>
-            <a:br/>
-            <a:r>
-              <a:t>    &lt;link name="base_link"&gt;</a:t>
-            </a:r>
-            <a:br/>
-            <a:r>
-              <a:t>      &lt;pose&gt;0 0 0.16 0 0 0&lt;/pose&gt;</a:t>
-            </a:r>
-            <a:br/>
-            <a:r>
-              <a:t>      &lt;inertial&gt;</a:t>
-            </a:r>
-            <a:br/>
-            <a:r>
-              <a:t>        &lt;mass&gt;12.0&lt;/mass&gt;</a:t>
-            </a:r>
-            <a:br/>
-            <a:r>
-              <a:t>        &lt;inertia&gt;</a:t>
-            </a:r>
-            <a:br/>
-            <a:r>
-              <a:t>          &lt;ixx&gt;0.20&lt;/ixx&gt;</a:t>
-            </a:r>
-            <a:br/>
-            <a:r>
-              <a:t>          &lt;iyy&gt;0.40&lt;/iyy&gt;</a:t>
-            </a:r>
-            <a:br/>
-            <a:r>
-              <a:t>          &lt;izz&gt;0.50&lt;/izz&gt;</a:t>
-            </a:r>
-            <a:br/>
-            <a:r>
-              <a:t>        &lt;/inertia&gt;</a:t>
-            </a:r>
-          </a:p>
-        </p:txBody>
-      </p:sp>
-      <p:sp>
-        <p:nvSpPr>
-          <p:cNvPr id="10" name="TextBox 9"/>
-          <p:cNvSpPr txBox="1"/>
-          <p:nvPr/>
-        </p:nvSpPr>
-        <p:spPr>
-          <a:xfrm>
-            <a:off x="749808" y="6181344"/>
-            <a:ext cx="10789920" cy="201168"/>
-          </a:xfrm>
-          <a:prstGeom prst="rect">
-            <a:avLst/>
-          </a:prstGeom>
-          <a:noFill/>
-        </p:spPr>
-        <p:txBody>
-          <a:bodyPr wrap="square" lIns="73152" rIns="73152" tIns="36576" bIns="36576">
-            <a:spAutoFit/>
-          </a:bodyPr>
-          <a:lstStyle/>
-          <a:p>
-            <a:pPr algn="l">
-              <a:spcAft>
-                <a:spcPts val="0"/>
-              </a:spcAft>
-              <a:defRPr sz="1000" b="0">
+              <a:t>&lt;model name="agv"&gt;</a:t>
+            </a:r>
+          </a:p>
+        </p:txBody>
+      </p:sp>
+      <p:sp>
+        <p:nvSpPr>
+          <p:cNvPr id="10" name="Rounded Rectangle 9"/>
+          <p:cNvSpPr/>
+          <p:nvPr/>
+        </p:nvSpPr>
+        <p:spPr>
+          <a:xfrm>
+            <a:off x="5029200" y="2359152"/>
+            <a:ext cx="6537960" cy="1417320"/>
+          </a:xfrm>
+          <a:prstGeom prst="roundRect">
+            <a:avLst/>
+          </a:prstGeom>
+          <a:solidFill>
+            <a:srgbClr val="F4F7FB"/>
+          </a:solidFill>
+          <a:ln>
+            <a:solidFill>
+              <a:srgbClr val="225B9B"/>
+            </a:solidFill>
+          </a:ln>
+        </p:spPr>
+        <p:style>
+          <a:lnRef idx="1">
+            <a:schemeClr val="accent1"/>
+          </a:lnRef>
+          <a:fillRef idx="3">
+            <a:schemeClr val="accent1"/>
+          </a:fillRef>
+          <a:effectRef idx="2">
+            <a:schemeClr val="accent1"/>
+          </a:effectRef>
+          <a:fontRef idx="minor">
+            <a:schemeClr val="lt1"/>
+          </a:fontRef>
+        </p:style>
+        <p:txBody>
+          <a:bodyPr rtlCol="0" anchor="ctr"/>
+          <a:lstStyle/>
+          <a:p>
+            <a:pPr algn="ctr"/>
+          </a:p>
+        </p:txBody>
+      </p:sp>
+      <p:sp>
+        <p:nvSpPr>
+          <p:cNvPr id="11" name="TextBox 10"/>
+          <p:cNvSpPr txBox="1"/>
+          <p:nvPr/>
+        </p:nvSpPr>
+        <p:spPr>
+          <a:xfrm>
+            <a:off x="5239512" y="2468880"/>
+            <a:ext cx="594360" cy="219456"/>
+          </a:xfrm>
+          <a:prstGeom prst="rect">
+            <a:avLst/>
+          </a:prstGeom>
+          <a:noFill/>
+        </p:spPr>
+        <p:txBody>
+          <a:bodyPr wrap="square" lIns="73152" rIns="73152" tIns="36576" bIns="36576">
+            <a:spAutoFit/>
+          </a:bodyPr>
+          <a:lstStyle/>
+          <a:p>
+            <a:pPr algn="l">
+              <a:spcAft>
+                <a:spcPts val="0"/>
+              </a:spcAft>
+              <a:defRPr sz="1400" b="1">
+                <a:solidFill>
+                  <a:srgbClr val="225B9B"/>
+                </a:solidFill>
+                <a:latin typeface="Noto Sans CJK KR"/>
+              </a:defRPr>
+            </a:pPr>
+            <a:r>
+              <a:t>1.</a:t>
+            </a:r>
+          </a:p>
+        </p:txBody>
+      </p:sp>
+      <p:sp>
+        <p:nvSpPr>
+          <p:cNvPr id="12" name="TextBox 11"/>
+          <p:cNvSpPr txBox="1"/>
+          <p:nvPr/>
+        </p:nvSpPr>
+        <p:spPr>
+          <a:xfrm>
+            <a:off x="5596128" y="2450592"/>
+            <a:ext cx="5696712" cy="493776"/>
+          </a:xfrm>
+          <a:prstGeom prst="rect">
+            <a:avLst/>
+          </a:prstGeom>
+          <a:noFill/>
+        </p:spPr>
+        <p:txBody>
+          <a:bodyPr wrap="square" lIns="73152" rIns="73152" tIns="36576" bIns="36576">
+            <a:spAutoFit/>
+          </a:bodyPr>
+          <a:lstStyle/>
+          <a:p>
+            <a:pPr algn="l">
+              <a:spcAft>
+                <a:spcPts val="0"/>
+              </a:spcAft>
+              <a:defRPr sz="1300" b="0">
+                <a:solidFill>
+                  <a:srgbClr val="122C4E"/>
+                </a:solidFill>
+                <a:latin typeface="Noto Sans CJK KR"/>
+              </a:defRPr>
+            </a:pPr>
+            <a:r>
+              <a:t>뜻: 로봇 model 또는 Gazebo world의 가장 바깥 이름과 범위를 선언합니다.</a:t>
+            </a:r>
+          </a:p>
+        </p:txBody>
+      </p:sp>
+      <p:sp>
+        <p:nvSpPr>
+          <p:cNvPr id="13" name="TextBox 12"/>
+          <p:cNvSpPr txBox="1"/>
+          <p:nvPr/>
+        </p:nvSpPr>
+        <p:spPr>
+          <a:xfrm>
+            <a:off x="5596128" y="3108960"/>
+            <a:ext cx="5696712" cy="457200"/>
+          </a:xfrm>
+          <a:prstGeom prst="rect">
+            <a:avLst/>
+          </a:prstGeom>
+          <a:noFill/>
+        </p:spPr>
+        <p:txBody>
+          <a:bodyPr wrap="square" lIns="73152" rIns="73152" tIns="36576" bIns="36576">
+            <a:spAutoFit/>
+          </a:bodyPr>
+          <a:lstStyle/>
+          <a:p>
+            <a:pPr algn="l">
+              <a:spcAft>
+                <a:spcPts val="0"/>
+              </a:spcAft>
+              <a:defRPr sz="1200" b="0">
+                <a:solidFill>
+                  <a:srgbClr val="2A8B5A"/>
+                </a:solidFill>
+                <a:latin typeface="Noto Sans CJK KR"/>
+              </a:defRPr>
+            </a:pPr>
+            <a:r>
+              <a:t>실행에서: 문법 검사와 Gazebo/RViz가 이 구조부터 읽기 시작합니다.</a:t>
+            </a:r>
+          </a:p>
+        </p:txBody>
+      </p:sp>
+      <p:sp>
+        <p:nvSpPr>
+          <p:cNvPr id="14" name="Rounded Rectangle 13"/>
+          <p:cNvSpPr/>
+          <p:nvPr/>
+        </p:nvSpPr>
+        <p:spPr>
+          <a:xfrm>
+            <a:off x="658368" y="4078224"/>
+            <a:ext cx="4160520" cy="1417320"/>
+          </a:xfrm>
+          <a:prstGeom prst="roundRect">
+            <a:avLst/>
+          </a:prstGeom>
+          <a:solidFill>
+            <a:srgbClr val="1D232D"/>
+          </a:solidFill>
+          <a:ln>
+            <a:solidFill>
+              <a:srgbClr val="1D232D"/>
+            </a:solidFill>
+          </a:ln>
+        </p:spPr>
+        <p:style>
+          <a:lnRef idx="1">
+            <a:schemeClr val="accent1"/>
+          </a:lnRef>
+          <a:fillRef idx="3">
+            <a:schemeClr val="accent1"/>
+          </a:fillRef>
+          <a:effectRef idx="2">
+            <a:schemeClr val="accent1"/>
+          </a:effectRef>
+          <a:fontRef idx="minor">
+            <a:schemeClr val="lt1"/>
+          </a:fontRef>
+        </p:style>
+        <p:txBody>
+          <a:bodyPr rtlCol="0" anchor="ctr" wrap="square" lIns="73152" rIns="73152" tIns="36576" bIns="36576"/>
+          <a:lstStyle/>
+          <a:p>
+            <a:pPr algn="l">
+              <a:spcAft>
+                <a:spcPts val="0"/>
+              </a:spcAft>
+              <a:defRPr sz="1300" b="0">
+                <a:solidFill>
+                  <a:srgbClr val="FFFFFF"/>
+                </a:solidFill>
+                <a:latin typeface="DejaVu Sans Mono"/>
+              </a:defRPr>
+            </a:pPr>
+            <a:r>
+              <a:t>&lt;link name="base_link"&gt;</a:t>
+            </a:r>
+          </a:p>
+        </p:txBody>
+      </p:sp>
+      <p:sp>
+        <p:nvSpPr>
+          <p:cNvPr id="15" name="Rounded Rectangle 14"/>
+          <p:cNvSpPr/>
+          <p:nvPr/>
+        </p:nvSpPr>
+        <p:spPr>
+          <a:xfrm>
+            <a:off x="5029200" y="4078224"/>
+            <a:ext cx="6537960" cy="1417320"/>
+          </a:xfrm>
+          <a:prstGeom prst="roundRect">
+            <a:avLst/>
+          </a:prstGeom>
+          <a:solidFill>
+            <a:srgbClr val="F4F7FB"/>
+          </a:solidFill>
+          <a:ln>
+            <a:solidFill>
+              <a:srgbClr val="225B9B"/>
+            </a:solidFill>
+          </a:ln>
+        </p:spPr>
+        <p:style>
+          <a:lnRef idx="1">
+            <a:schemeClr val="accent1"/>
+          </a:lnRef>
+          <a:fillRef idx="3">
+            <a:schemeClr val="accent1"/>
+          </a:fillRef>
+          <a:effectRef idx="2">
+            <a:schemeClr val="accent1"/>
+          </a:effectRef>
+          <a:fontRef idx="minor">
+            <a:schemeClr val="lt1"/>
+          </a:fontRef>
+        </p:style>
+        <p:txBody>
+          <a:bodyPr rtlCol="0" anchor="ctr"/>
+          <a:lstStyle/>
+          <a:p>
+            <a:pPr algn="ctr"/>
+          </a:p>
+        </p:txBody>
+      </p:sp>
+      <p:sp>
+        <p:nvSpPr>
+          <p:cNvPr id="16" name="TextBox 15"/>
+          <p:cNvSpPr txBox="1"/>
+          <p:nvPr/>
+        </p:nvSpPr>
+        <p:spPr>
+          <a:xfrm>
+            <a:off x="5239512" y="4187952"/>
+            <a:ext cx="594360" cy="219456"/>
+          </a:xfrm>
+          <a:prstGeom prst="rect">
+            <a:avLst/>
+          </a:prstGeom>
+          <a:noFill/>
+        </p:spPr>
+        <p:txBody>
+          <a:bodyPr wrap="square" lIns="73152" rIns="73152" tIns="36576" bIns="36576">
+            <a:spAutoFit/>
+          </a:bodyPr>
+          <a:lstStyle/>
+          <a:p>
+            <a:pPr algn="l">
+              <a:spcAft>
+                <a:spcPts val="0"/>
+              </a:spcAft>
+              <a:defRPr sz="1400" b="1">
+                <a:solidFill>
+                  <a:srgbClr val="225B9B"/>
+                </a:solidFill>
+                <a:latin typeface="Noto Sans CJK KR"/>
+              </a:defRPr>
+            </a:pPr>
+            <a:r>
+              <a:t>2.</a:t>
+            </a:r>
+          </a:p>
+        </p:txBody>
+      </p:sp>
+      <p:sp>
+        <p:nvSpPr>
+          <p:cNvPr id="17" name="TextBox 16"/>
+          <p:cNvSpPr txBox="1"/>
+          <p:nvPr/>
+        </p:nvSpPr>
+        <p:spPr>
+          <a:xfrm>
+            <a:off x="5596128" y="4169663"/>
+            <a:ext cx="5696712" cy="493776"/>
+          </a:xfrm>
+          <a:prstGeom prst="rect">
+            <a:avLst/>
+          </a:prstGeom>
+          <a:noFill/>
+        </p:spPr>
+        <p:txBody>
+          <a:bodyPr wrap="square" lIns="73152" rIns="73152" tIns="36576" bIns="36576">
+            <a:spAutoFit/>
+          </a:bodyPr>
+          <a:lstStyle/>
+          <a:p>
+            <a:pPr algn="l">
+              <a:spcAft>
+                <a:spcPts val="0"/>
+              </a:spcAft>
+              <a:defRPr sz="1300" b="0">
+                <a:solidFill>
+                  <a:srgbClr val="122C4E"/>
+                </a:solidFill>
+                <a:latin typeface="Noto Sans CJK KR"/>
+              </a:defRPr>
+            </a:pPr>
+            <a:r>
+              <a:t>뜻: 로봇의 몸체·바퀴처럼 실제로 존재하는 하나의 부품을 선언합니다.</a:t>
+            </a:r>
+          </a:p>
+        </p:txBody>
+      </p:sp>
+      <p:sp>
+        <p:nvSpPr>
+          <p:cNvPr id="18" name="TextBox 17"/>
+          <p:cNvSpPr txBox="1"/>
+          <p:nvPr/>
+        </p:nvSpPr>
+        <p:spPr>
+          <a:xfrm>
+            <a:off x="5596128" y="4828032"/>
+            <a:ext cx="5696712" cy="457200"/>
+          </a:xfrm>
+          <a:prstGeom prst="rect">
+            <a:avLst/>
+          </a:prstGeom>
+          <a:noFill/>
+        </p:spPr>
+        <p:txBody>
+          <a:bodyPr wrap="square" lIns="73152" rIns="73152" tIns="36576" bIns="36576">
+            <a:spAutoFit/>
+          </a:bodyPr>
+          <a:lstStyle/>
+          <a:p>
+            <a:pPr algn="l">
+              <a:spcAft>
+                <a:spcPts val="0"/>
+              </a:spcAft>
+              <a:defRPr sz="1200" b="0">
+                <a:solidFill>
+                  <a:srgbClr val="2A8B5A"/>
+                </a:solidFill>
+                <a:latin typeface="Noto Sans CJK KR"/>
+              </a:defRPr>
+            </a:pPr>
+            <a:r>
+              <a:t>실행에서: RViz/Gazebo에서 이 부품이 별도 frame/물체로 보입니다.</a:t>
+            </a:r>
+          </a:p>
+        </p:txBody>
+      </p:sp>
+      <p:sp>
+        <p:nvSpPr>
+          <p:cNvPr id="19" name="TextBox 18"/>
+          <p:cNvSpPr txBox="1"/>
+          <p:nvPr/>
+        </p:nvSpPr>
+        <p:spPr>
+          <a:xfrm>
+            <a:off x="749808" y="6199632"/>
+            <a:ext cx="10698480" cy="182880"/>
+          </a:xfrm>
+          <a:prstGeom prst="rect">
+            <a:avLst/>
+          </a:prstGeom>
+          <a:noFill/>
+        </p:spPr>
+        <p:txBody>
+          <a:bodyPr wrap="square" lIns="73152" rIns="73152" tIns="36576" bIns="36576">
+            <a:spAutoFit/>
+          </a:bodyPr>
+          <a:lstStyle/>
+          <a:p>
+            <a:pPr algn="ctr">
+              <a:spcAft>
+                <a:spcPts val="0"/>
+              </a:spcAft>
+              <a:defRPr sz="1100" b="0">
                 <a:solidFill>
                   <a:srgbClr val="5C6672"/>
                 </a:solidFill>
@@ -8464,7 +9052,7 @@
               </a:defRPr>
             </a:pPr>
             <a:r>
-              <a:t>입력 1/11 · 이 파일의 다음 코드 블록이 바로 다음 슬라이드에 이어집니다.</a:t>
+              <a:t>다음 코드 입력 슬라이드에서 이 줄을 발견하면, 방금 설명한 ‘뜻’과 ‘실행에서 보이는 변화’를 다시 말해 봅니다.</a:t>
             </a:r>
           </a:p>
         </p:txBody>
@@ -8521,7 +9109,7 @@
               </a:defRPr>
             </a:pPr>
             <a:r>
-              <a:t>구현 1/1: 코드 입력 (2/11)</a:t>
+              <a:t>구현 1/1: 코드 읽기 (2/3)</a:t>
             </a:r>
           </a:p>
         </p:txBody>
@@ -8560,7 +9148,7 @@
               </a:defRPr>
             </a:pPr>
             <a:r>
-              <a:t>~/ros2_curri/my_agv_ws/src/agv_description/curriculum_stages/M07/model.sdf</a:t>
+              <a:t>짧은 실제 코드 조각을 먼저 읽고, 다음 슬라이드에서 같은 코드를 직접 입력합니다.</a:t>
             </a:r>
           </a:p>
         </p:txBody>
@@ -8696,7 +9284,7 @@
               </a:defRPr>
             </a:pPr>
             <a:r>
-              <a:t>현재 단계 파일 1/1 · 입력 2/11    |    현재 폴더 ~/ros2_curri/my_agv_ws    |    현재 터미널</a:t>
+              <a:t>현재 단계 코드 해설 1/1    |    현재 폴더 ~/ros2_curri/my_agv_ws    |    현재 터미널</a:t>
             </a:r>
           </a:p>
         </p:txBody>
@@ -8709,111 +9297,88 @@
         </p:nvSpPr>
         <p:spPr>
           <a:xfrm>
-            <a:off x="658368" y="1609344"/>
-            <a:ext cx="10972800" cy="384048"/>
-          </a:xfrm>
-          <a:prstGeom prst="rect">
-            <a:avLst/>
-          </a:prstGeom>
-          <a:noFill/>
-        </p:spPr>
-        <p:txBody>
-          <a:bodyPr wrap="square" lIns="73152" rIns="73152" tIns="36576" bIns="36576">
-            <a:spAutoFit/>
-          </a:bodyPr>
-          <a:lstStyle/>
-          <a:p>
-            <a:pPr algn="l">
-              <a:spcAft>
-                <a:spcPts val="0"/>
-              </a:spcAft>
-              <a:defRPr sz="1400" b="1">
-                <a:solidFill>
-                  <a:srgbClr val="122C4E"/>
-                </a:solidFill>
-                <a:latin typeface="Noto Sans CJK KR"/>
-              </a:defRPr>
-            </a:pPr>
-            <a:r>
-              <a:t>이 블록이 하는 일: 앞에서 만든 구조에 geometry·collision·sensor·joint를 하나씩 붙입니다.</a:t>
-            </a:r>
-          </a:p>
-        </p:txBody>
-      </p:sp>
-      <p:sp>
-        <p:nvSpPr>
-          <p:cNvPr id="8" name="Rectangle 7"/>
+            <a:off x="694944" y="1618488"/>
+            <a:ext cx="10789920" cy="274320"/>
+          </a:xfrm>
+          <a:prstGeom prst="rect">
+            <a:avLst/>
+          </a:prstGeom>
+          <a:noFill/>
+        </p:spPr>
+        <p:txBody>
+          <a:bodyPr wrap="square" lIns="73152" rIns="73152" tIns="36576" bIns="36576">
+            <a:spAutoFit/>
+          </a:bodyPr>
+          <a:lstStyle/>
+          <a:p>
+            <a:pPr algn="l">
+              <a:spcAft>
+                <a:spcPts val="0"/>
+              </a:spcAft>
+              <a:defRPr sz="1300" b="1">
+                <a:solidFill>
+                  <a:srgbClr val="225B9B"/>
+                </a:solidFill>
+                <a:latin typeface="DejaVu Sans Mono"/>
+              </a:defRPr>
+            </a:pPr>
+            <a:r>
+              <a:t>~/ros2_curri/my_agv_ws/src/agv_description/curriculum_stages/M07/model.sdf</a:t>
+            </a:r>
+          </a:p>
+        </p:txBody>
+      </p:sp>
+      <p:sp>
+        <p:nvSpPr>
+          <p:cNvPr id="8" name="TextBox 7"/>
+          <p:cNvSpPr txBox="1"/>
+          <p:nvPr/>
+        </p:nvSpPr>
+        <p:spPr>
+          <a:xfrm>
+            <a:off x="694944" y="1938528"/>
+            <a:ext cx="10789920" cy="274320"/>
+          </a:xfrm>
+          <a:prstGeom prst="rect">
+            <a:avLst/>
+          </a:prstGeom>
+          <a:noFill/>
+        </p:spPr>
+        <p:txBody>
+          <a:bodyPr wrap="square" lIns="73152" rIns="73152" tIns="36576" bIns="36576">
+            <a:spAutoFit/>
+          </a:bodyPr>
+          <a:lstStyle/>
+          <a:p>
+            <a:pPr algn="ctr">
+              <a:spcAft>
+                <a:spcPts val="0"/>
+              </a:spcAft>
+              <a:defRPr sz="1500" b="1">
+                <a:solidFill>
+                  <a:srgbClr val="DB7E22"/>
+                </a:solidFill>
+                <a:latin typeface="Noto Sans CJK KR"/>
+              </a:defRPr>
+            </a:pPr>
+            <a:r>
+              <a:t>말로 먼저 답해 보세요: 이 줄은 무엇을 만들고, 실행하면 어디에서 확인할 수 있을까요?</a:t>
+            </a:r>
+          </a:p>
+        </p:txBody>
+      </p:sp>
+      <p:sp>
+        <p:nvSpPr>
+          <p:cNvPr id="9" name="Rounded Rectangle 8"/>
           <p:cNvSpPr/>
           <p:nvPr/>
         </p:nvSpPr>
         <p:spPr>
           <a:xfrm>
-            <a:off x="658368" y="1956816"/>
-            <a:ext cx="10972800" cy="603504"/>
-          </a:xfrm>
-          <a:prstGeom prst="rect">
-            <a:avLst/>
-          </a:prstGeom>
-          <a:solidFill>
-            <a:srgbClr val="F4F7FB"/>
-          </a:solidFill>
-          <a:ln>
-            <a:solidFill>
-              <a:srgbClr val="F4F7FB"/>
-            </a:solidFill>
-          </a:ln>
-        </p:spPr>
-        <p:style>
-          <a:lnRef idx="1">
-            <a:schemeClr val="accent1"/>
-          </a:lnRef>
-          <a:fillRef idx="3">
-            <a:schemeClr val="accent1"/>
-          </a:fillRef>
-          <a:effectRef idx="2">
-            <a:schemeClr val="accent1"/>
-          </a:effectRef>
-          <a:fontRef idx="minor">
-            <a:schemeClr val="lt1"/>
-          </a:fontRef>
-        </p:style>
-        <p:txBody>
-          <a:bodyPr rtlCol="0" anchor="ctr" wrap="square" lIns="73152" rIns="73152" tIns="36576" bIns="36576"/>
-          <a:lstStyle/>
-          <a:p>
-            <a:pPr algn="l">
-              <a:spcAft>
-                <a:spcPts val="0"/>
-              </a:spcAft>
-              <a:defRPr sz="1300" b="0">
-                <a:solidFill>
-                  <a:srgbClr val="122C4E"/>
-                </a:solidFill>
-                <a:latin typeface="DejaVu Sans Mono"/>
-              </a:defRPr>
-            </a:pPr>
-            <a:r>
-              <a:t>현재 열린 파일: ~/ros2_curri/my_agv_ws/src/agv_description/curriculum_stages/M07/model.sdf</a:t>
-            </a:r>
-            <a:br/>
-            <a:r>
-              <a:t>아래 코드만 입력 → Ctrl+O → Enter로 저장 → 다음 블록으로 이동</a:t>
-            </a:r>
-          </a:p>
-        </p:txBody>
-      </p:sp>
-      <p:sp>
-        <p:nvSpPr>
-          <p:cNvPr id="9" name="Rectangle 8"/>
-          <p:cNvSpPr/>
-          <p:nvPr/>
-        </p:nvSpPr>
-        <p:spPr>
-          <a:xfrm>
-            <a:off x="658368" y="2706624"/>
-            <a:ext cx="10972800" cy="3364992"/>
-          </a:xfrm>
-          <a:prstGeom prst="rect">
+            <a:off x="658368" y="2359152"/>
+            <a:ext cx="4160520" cy="1417320"/>
+          </a:xfrm>
+          <a:prstGeom prst="roundRect">
             <a:avLst/>
           </a:prstGeom>
           <a:solidFill>
@@ -8840,14 +9405,14 @@
           </a:fontRef>
         </p:style>
         <p:txBody>
-          <a:bodyPr rtlCol="0" anchor="ctr" wrap="square" lIns="164592" rIns="164592" tIns="109728" bIns="36576"/>
-          <a:lstStyle/>
-          <a:p>
-            <a:pPr algn="l">
-              <a:spcAft>
-                <a:spcPts val="0"/>
-              </a:spcAft>
-              <a:defRPr sz="1400" b="0">
+          <a:bodyPr rtlCol="0" anchor="ctr" wrap="square" lIns="73152" rIns="73152" tIns="36576" bIns="36576"/>
+          <a:lstStyle/>
+          <a:p>
+            <a:pPr algn="l">
+              <a:spcAft>
+                <a:spcPts val="0"/>
+              </a:spcAft>
+              <a:defRPr sz="1300" b="0">
                 <a:solidFill>
                   <a:srgbClr val="FFFFFF"/>
                 </a:solidFill>
@@ -8855,82 +9420,420 @@
               </a:defRPr>
             </a:pPr>
             <a:r>
-              <a:t>      &lt;/inertial&gt;</a:t>
-            </a:r>
-            <a:br/>
-            <a:r>
-              <a:t>      &lt;visual name="body"&gt;</a:t>
-            </a:r>
-            <a:br/>
-            <a:r>
-              <a:t>        &lt;geometry&gt;</a:t>
-            </a:r>
-            <a:br/>
-            <a:r>
-              <a:t>          &lt;box&gt;</a:t>
-            </a:r>
-            <a:br/>
-            <a:r>
-              <a:t>            &lt;size&gt;0.60 0.42 0.16&lt;/size&gt;</a:t>
-            </a:r>
-            <a:br/>
-            <a:r>
-              <a:t>          &lt;/box&gt;</a:t>
-            </a:r>
-            <a:br/>
-            <a:r>
-              <a:t>        &lt;/geometry&gt;</a:t>
-            </a:r>
-            <a:br/>
-            <a:r>
-              <a:t>      &lt;/visual&gt;</a:t>
-            </a:r>
-            <a:br/>
-            <a:r>
-              <a:t>      &lt;collision name="body_collision"&gt;</a:t>
-            </a:r>
-            <a:br/>
-            <a:r>
-              <a:t>        &lt;geometry&gt;</a:t>
-            </a:r>
-            <a:br/>
-            <a:r>
-              <a:t>          &lt;box&gt;</a:t>
-            </a:r>
-            <a:br/>
-            <a:r>
-              <a:t>            &lt;size&gt;0.60 0.42 0.16&lt;/size&gt;</a:t>
-            </a:r>
-          </a:p>
-        </p:txBody>
-      </p:sp>
-      <p:sp>
-        <p:nvSpPr>
-          <p:cNvPr id="10" name="TextBox 9"/>
-          <p:cNvSpPr txBox="1"/>
-          <p:nvPr/>
-        </p:nvSpPr>
-        <p:spPr>
-          <a:xfrm>
-            <a:off x="749808" y="6181344"/>
-            <a:ext cx="10789920" cy="201168"/>
-          </a:xfrm>
-          <a:prstGeom prst="rect">
-            <a:avLst/>
-          </a:prstGeom>
-          <a:noFill/>
-        </p:spPr>
-        <p:txBody>
-          <a:bodyPr wrap="square" lIns="73152" rIns="73152" tIns="36576" bIns="36576">
-            <a:spAutoFit/>
-          </a:bodyPr>
-          <a:lstStyle/>
-          <a:p>
-            <a:pPr algn="l">
-              <a:spcAft>
-                <a:spcPts val="0"/>
-              </a:spcAft>
-              <a:defRPr sz="1000" b="0">
+              <a:t>&lt;inertial&gt;</a:t>
+            </a:r>
+          </a:p>
+        </p:txBody>
+      </p:sp>
+      <p:sp>
+        <p:nvSpPr>
+          <p:cNvPr id="10" name="Rounded Rectangle 9"/>
+          <p:cNvSpPr/>
+          <p:nvPr/>
+        </p:nvSpPr>
+        <p:spPr>
+          <a:xfrm>
+            <a:off x="5029200" y="2359152"/>
+            <a:ext cx="6537960" cy="1417320"/>
+          </a:xfrm>
+          <a:prstGeom prst="roundRect">
+            <a:avLst/>
+          </a:prstGeom>
+          <a:solidFill>
+            <a:srgbClr val="F4F7FB"/>
+          </a:solidFill>
+          <a:ln>
+            <a:solidFill>
+              <a:srgbClr val="225B9B"/>
+            </a:solidFill>
+          </a:ln>
+        </p:spPr>
+        <p:style>
+          <a:lnRef idx="1">
+            <a:schemeClr val="accent1"/>
+          </a:lnRef>
+          <a:fillRef idx="3">
+            <a:schemeClr val="accent1"/>
+          </a:fillRef>
+          <a:effectRef idx="2">
+            <a:schemeClr val="accent1"/>
+          </a:effectRef>
+          <a:fontRef idx="minor">
+            <a:schemeClr val="lt1"/>
+          </a:fontRef>
+        </p:style>
+        <p:txBody>
+          <a:bodyPr rtlCol="0" anchor="ctr"/>
+          <a:lstStyle/>
+          <a:p>
+            <a:pPr algn="ctr"/>
+          </a:p>
+        </p:txBody>
+      </p:sp>
+      <p:sp>
+        <p:nvSpPr>
+          <p:cNvPr id="11" name="TextBox 10"/>
+          <p:cNvSpPr txBox="1"/>
+          <p:nvPr/>
+        </p:nvSpPr>
+        <p:spPr>
+          <a:xfrm>
+            <a:off x="5239512" y="2468880"/>
+            <a:ext cx="594360" cy="219456"/>
+          </a:xfrm>
+          <a:prstGeom prst="rect">
+            <a:avLst/>
+          </a:prstGeom>
+          <a:noFill/>
+        </p:spPr>
+        <p:txBody>
+          <a:bodyPr wrap="square" lIns="73152" rIns="73152" tIns="36576" bIns="36576">
+            <a:spAutoFit/>
+          </a:bodyPr>
+          <a:lstStyle/>
+          <a:p>
+            <a:pPr algn="l">
+              <a:spcAft>
+                <a:spcPts val="0"/>
+              </a:spcAft>
+              <a:defRPr sz="1400" b="1">
+                <a:solidFill>
+                  <a:srgbClr val="225B9B"/>
+                </a:solidFill>
+                <a:latin typeface="Noto Sans CJK KR"/>
+              </a:defRPr>
+            </a:pPr>
+            <a:r>
+              <a:t>1.</a:t>
+            </a:r>
+          </a:p>
+        </p:txBody>
+      </p:sp>
+      <p:sp>
+        <p:nvSpPr>
+          <p:cNvPr id="12" name="TextBox 11"/>
+          <p:cNvSpPr txBox="1"/>
+          <p:nvPr/>
+        </p:nvSpPr>
+        <p:spPr>
+          <a:xfrm>
+            <a:off x="5596128" y="2450592"/>
+            <a:ext cx="5696712" cy="493776"/>
+          </a:xfrm>
+          <a:prstGeom prst="rect">
+            <a:avLst/>
+          </a:prstGeom>
+          <a:noFill/>
+        </p:spPr>
+        <p:txBody>
+          <a:bodyPr wrap="square" lIns="73152" rIns="73152" tIns="36576" bIns="36576">
+            <a:spAutoFit/>
+          </a:bodyPr>
+          <a:lstStyle/>
+          <a:p>
+            <a:pPr algn="l">
+              <a:spcAft>
+                <a:spcPts val="0"/>
+              </a:spcAft>
+              <a:defRPr sz="1300" b="0">
+                <a:solidFill>
+                  <a:srgbClr val="122C4E"/>
+                </a:solidFill>
+                <a:latin typeface="Noto Sans CJK KR"/>
+              </a:defRPr>
+            </a:pPr>
+            <a:r>
+              <a:t>뜻: 질량과 관성처럼 움직임에 직접 영향을 주는 물리값입니다.</a:t>
+            </a:r>
+          </a:p>
+        </p:txBody>
+      </p:sp>
+      <p:sp>
+        <p:nvSpPr>
+          <p:cNvPr id="13" name="TextBox 12"/>
+          <p:cNvSpPr txBox="1"/>
+          <p:nvPr/>
+        </p:nvSpPr>
+        <p:spPr>
+          <a:xfrm>
+            <a:off x="5596128" y="3108960"/>
+            <a:ext cx="5696712" cy="457200"/>
+          </a:xfrm>
+          <a:prstGeom prst="rect">
+            <a:avLst/>
+          </a:prstGeom>
+          <a:noFill/>
+        </p:spPr>
+        <p:txBody>
+          <a:bodyPr wrap="square" lIns="73152" rIns="73152" tIns="36576" bIns="36576">
+            <a:spAutoFit/>
+          </a:bodyPr>
+          <a:lstStyle/>
+          <a:p>
+            <a:pPr algn="l">
+              <a:spcAft>
+                <a:spcPts val="0"/>
+              </a:spcAft>
+              <a:defRPr sz="1200" b="0">
+                <a:solidFill>
+                  <a:srgbClr val="2A8B5A"/>
+                </a:solidFill>
+                <a:latin typeface="Noto Sans CJK KR"/>
+              </a:defRPr>
+            </a:pPr>
+            <a:r>
+              <a:t>실행에서: Gazebo에서 가속·회전·접촉 반응이 달라집니다.</a:t>
+            </a:r>
+          </a:p>
+        </p:txBody>
+      </p:sp>
+      <p:sp>
+        <p:nvSpPr>
+          <p:cNvPr id="14" name="Rounded Rectangle 13"/>
+          <p:cNvSpPr/>
+          <p:nvPr/>
+        </p:nvSpPr>
+        <p:spPr>
+          <a:xfrm>
+            <a:off x="658368" y="4078224"/>
+            <a:ext cx="4160520" cy="1417320"/>
+          </a:xfrm>
+          <a:prstGeom prst="roundRect">
+            <a:avLst/>
+          </a:prstGeom>
+          <a:solidFill>
+            <a:srgbClr val="1D232D"/>
+          </a:solidFill>
+          <a:ln>
+            <a:solidFill>
+              <a:srgbClr val="1D232D"/>
+            </a:solidFill>
+          </a:ln>
+        </p:spPr>
+        <p:style>
+          <a:lnRef idx="1">
+            <a:schemeClr val="accent1"/>
+          </a:lnRef>
+          <a:fillRef idx="3">
+            <a:schemeClr val="accent1"/>
+          </a:fillRef>
+          <a:effectRef idx="2">
+            <a:schemeClr val="accent1"/>
+          </a:effectRef>
+          <a:fontRef idx="minor">
+            <a:schemeClr val="lt1"/>
+          </a:fontRef>
+        </p:style>
+        <p:txBody>
+          <a:bodyPr rtlCol="0" anchor="ctr" wrap="square" lIns="73152" rIns="73152" tIns="36576" bIns="36576"/>
+          <a:lstStyle/>
+          <a:p>
+            <a:pPr algn="l">
+              <a:spcAft>
+                <a:spcPts val="0"/>
+              </a:spcAft>
+              <a:defRPr sz="1300" b="0">
+                <a:solidFill>
+                  <a:srgbClr val="FFFFFF"/>
+                </a:solidFill>
+                <a:latin typeface="DejaVu Sans Mono"/>
+              </a:defRPr>
+            </a:pPr>
+            <a:r>
+              <a:t>&lt;visual name="body"&gt;</a:t>
+            </a:r>
+          </a:p>
+        </p:txBody>
+      </p:sp>
+      <p:sp>
+        <p:nvSpPr>
+          <p:cNvPr id="15" name="Rounded Rectangle 14"/>
+          <p:cNvSpPr/>
+          <p:nvPr/>
+        </p:nvSpPr>
+        <p:spPr>
+          <a:xfrm>
+            <a:off x="5029200" y="4078224"/>
+            <a:ext cx="6537960" cy="1417320"/>
+          </a:xfrm>
+          <a:prstGeom prst="roundRect">
+            <a:avLst/>
+          </a:prstGeom>
+          <a:solidFill>
+            <a:srgbClr val="F4F7FB"/>
+          </a:solidFill>
+          <a:ln>
+            <a:solidFill>
+              <a:srgbClr val="225B9B"/>
+            </a:solidFill>
+          </a:ln>
+        </p:spPr>
+        <p:style>
+          <a:lnRef idx="1">
+            <a:schemeClr val="accent1"/>
+          </a:lnRef>
+          <a:fillRef idx="3">
+            <a:schemeClr val="accent1"/>
+          </a:fillRef>
+          <a:effectRef idx="2">
+            <a:schemeClr val="accent1"/>
+          </a:effectRef>
+          <a:fontRef idx="minor">
+            <a:schemeClr val="lt1"/>
+          </a:fontRef>
+        </p:style>
+        <p:txBody>
+          <a:bodyPr rtlCol="0" anchor="ctr"/>
+          <a:lstStyle/>
+          <a:p>
+            <a:pPr algn="ctr"/>
+          </a:p>
+        </p:txBody>
+      </p:sp>
+      <p:sp>
+        <p:nvSpPr>
+          <p:cNvPr id="16" name="TextBox 15"/>
+          <p:cNvSpPr txBox="1"/>
+          <p:nvPr/>
+        </p:nvSpPr>
+        <p:spPr>
+          <a:xfrm>
+            <a:off x="5239512" y="4187952"/>
+            <a:ext cx="594360" cy="219456"/>
+          </a:xfrm>
+          <a:prstGeom prst="rect">
+            <a:avLst/>
+          </a:prstGeom>
+          <a:noFill/>
+        </p:spPr>
+        <p:txBody>
+          <a:bodyPr wrap="square" lIns="73152" rIns="73152" tIns="36576" bIns="36576">
+            <a:spAutoFit/>
+          </a:bodyPr>
+          <a:lstStyle/>
+          <a:p>
+            <a:pPr algn="l">
+              <a:spcAft>
+                <a:spcPts val="0"/>
+              </a:spcAft>
+              <a:defRPr sz="1400" b="1">
+                <a:solidFill>
+                  <a:srgbClr val="225B9B"/>
+                </a:solidFill>
+                <a:latin typeface="Noto Sans CJK KR"/>
+              </a:defRPr>
+            </a:pPr>
+            <a:r>
+              <a:t>2.</a:t>
+            </a:r>
+          </a:p>
+        </p:txBody>
+      </p:sp>
+      <p:sp>
+        <p:nvSpPr>
+          <p:cNvPr id="17" name="TextBox 16"/>
+          <p:cNvSpPr txBox="1"/>
+          <p:nvPr/>
+        </p:nvSpPr>
+        <p:spPr>
+          <a:xfrm>
+            <a:off x="5596128" y="4169663"/>
+            <a:ext cx="5696712" cy="493776"/>
+          </a:xfrm>
+          <a:prstGeom prst="rect">
+            <a:avLst/>
+          </a:prstGeom>
+          <a:noFill/>
+        </p:spPr>
+        <p:txBody>
+          <a:bodyPr wrap="square" lIns="73152" rIns="73152" tIns="36576" bIns="36576">
+            <a:spAutoFit/>
+          </a:bodyPr>
+          <a:lstStyle/>
+          <a:p>
+            <a:pPr algn="l">
+              <a:spcAft>
+                <a:spcPts val="0"/>
+              </a:spcAft>
+              <a:defRPr sz="1300" b="0">
+                <a:solidFill>
+                  <a:srgbClr val="122C4E"/>
+                </a:solidFill>
+                <a:latin typeface="Noto Sans CJK KR"/>
+              </a:defRPr>
+            </a:pPr>
+            <a:r>
+              <a:t>뜻: 사람이 화면에서 보는 모양·색·mesh를 설정합니다.</a:t>
+            </a:r>
+          </a:p>
+        </p:txBody>
+      </p:sp>
+      <p:sp>
+        <p:nvSpPr>
+          <p:cNvPr id="18" name="TextBox 17"/>
+          <p:cNvSpPr txBox="1"/>
+          <p:nvPr/>
+        </p:nvSpPr>
+        <p:spPr>
+          <a:xfrm>
+            <a:off x="5596128" y="4828032"/>
+            <a:ext cx="5696712" cy="457200"/>
+          </a:xfrm>
+          <a:prstGeom prst="rect">
+            <a:avLst/>
+          </a:prstGeom>
+          <a:noFill/>
+        </p:spPr>
+        <p:txBody>
+          <a:bodyPr wrap="square" lIns="73152" rIns="73152" tIns="36576" bIns="36576">
+            <a:spAutoFit/>
+          </a:bodyPr>
+          <a:lstStyle/>
+          <a:p>
+            <a:pPr algn="l">
+              <a:spcAft>
+                <a:spcPts val="0"/>
+              </a:spcAft>
+              <a:defRPr sz="1200" b="0">
+                <a:solidFill>
+                  <a:srgbClr val="2A8B5A"/>
+                </a:solidFill>
+                <a:latin typeface="Noto Sans CJK KR"/>
+              </a:defRPr>
+            </a:pPr>
+            <a:r>
+              <a:t>실행에서: Gazebo/RViz 화면에서 해당 부품의 외형이 바뀝니다.</a:t>
+            </a:r>
+          </a:p>
+        </p:txBody>
+      </p:sp>
+      <p:sp>
+        <p:nvSpPr>
+          <p:cNvPr id="19" name="TextBox 18"/>
+          <p:cNvSpPr txBox="1"/>
+          <p:nvPr/>
+        </p:nvSpPr>
+        <p:spPr>
+          <a:xfrm>
+            <a:off x="749808" y="6199632"/>
+            <a:ext cx="10698480" cy="182880"/>
+          </a:xfrm>
+          <a:prstGeom prst="rect">
+            <a:avLst/>
+          </a:prstGeom>
+          <a:noFill/>
+        </p:spPr>
+        <p:txBody>
+          <a:bodyPr wrap="square" lIns="73152" rIns="73152" tIns="36576" bIns="36576">
+            <a:spAutoFit/>
+          </a:bodyPr>
+          <a:lstStyle/>
+          <a:p>
+            <a:pPr algn="ctr">
+              <a:spcAft>
+                <a:spcPts val="0"/>
+              </a:spcAft>
+              <a:defRPr sz="1100" b="0">
                 <a:solidFill>
                   <a:srgbClr val="5C6672"/>
                 </a:solidFill>
@@ -8938,7 +9841,7 @@
               </a:defRPr>
             </a:pPr>
             <a:r>
-              <a:t>입력 2/11 · 이 파일의 다음 코드 블록이 바로 다음 슬라이드에 이어집니다.</a:t>
+              <a:t>다음 코드 입력 슬라이드에서 이 줄을 발견하면, 방금 설명한 ‘뜻’과 ‘실행에서 보이는 변화’를 다시 말해 봅니다.</a:t>
             </a:r>
           </a:p>
         </p:txBody>
@@ -8995,7 +9898,7 @@
               </a:defRPr>
             </a:pPr>
             <a:r>
-              <a:t>구현 1/1: 코드 입력 (3/11)</a:t>
+              <a:t>구현 1/1: 코드 읽기 (3/3)</a:t>
             </a:r>
           </a:p>
         </p:txBody>
@@ -9034,7 +9937,7 @@
               </a:defRPr>
             </a:pPr>
             <a:r>
-              <a:t>~/ros2_curri/my_agv_ws/src/agv_description/curriculum_stages/M07/model.sdf</a:t>
+              <a:t>짧은 실제 코드 조각을 먼저 읽고, 다음 슬라이드에서 같은 코드를 직접 입력합니다.</a:t>
             </a:r>
           </a:p>
         </p:txBody>
@@ -9170,7 +10073,7 @@
               </a:defRPr>
             </a:pPr>
             <a:r>
-              <a:t>현재 단계 파일 1/1 · 입력 3/11    |    현재 폴더 ~/ros2_curri/my_agv_ws    |    현재 터미널</a:t>
+              <a:t>현재 단계 코드 해설 1/1    |    현재 폴더 ~/ros2_curri/my_agv_ws    |    현재 터미널</a:t>
             </a:r>
           </a:p>
         </p:txBody>
@@ -9183,111 +10086,88 @@
         </p:nvSpPr>
         <p:spPr>
           <a:xfrm>
-            <a:off x="658368" y="1609344"/>
-            <a:ext cx="10972800" cy="384048"/>
-          </a:xfrm>
-          <a:prstGeom prst="rect">
-            <a:avLst/>
-          </a:prstGeom>
-          <a:noFill/>
-        </p:spPr>
-        <p:txBody>
-          <a:bodyPr wrap="square" lIns="73152" rIns="73152" tIns="36576" bIns="36576">
-            <a:spAutoFit/>
-          </a:bodyPr>
-          <a:lstStyle/>
-          <a:p>
-            <a:pPr algn="l">
-              <a:spcAft>
-                <a:spcPts val="0"/>
-              </a:spcAft>
-              <a:defRPr sz="1400" b="1">
-                <a:solidFill>
-                  <a:srgbClr val="122C4E"/>
-                </a:solidFill>
-                <a:latin typeface="Noto Sans CJK KR"/>
-              </a:defRPr>
-            </a:pPr>
-            <a:r>
-              <a:t>이 블록이 하는 일: 앞에서 만든 구조에 geometry·collision·sensor·joint를 하나씩 붙입니다.</a:t>
-            </a:r>
-          </a:p>
-        </p:txBody>
-      </p:sp>
-      <p:sp>
-        <p:nvSpPr>
-          <p:cNvPr id="8" name="Rectangle 7"/>
+            <a:off x="694944" y="1618488"/>
+            <a:ext cx="10789920" cy="274320"/>
+          </a:xfrm>
+          <a:prstGeom prst="rect">
+            <a:avLst/>
+          </a:prstGeom>
+          <a:noFill/>
+        </p:spPr>
+        <p:txBody>
+          <a:bodyPr wrap="square" lIns="73152" rIns="73152" tIns="36576" bIns="36576">
+            <a:spAutoFit/>
+          </a:bodyPr>
+          <a:lstStyle/>
+          <a:p>
+            <a:pPr algn="l">
+              <a:spcAft>
+                <a:spcPts val="0"/>
+              </a:spcAft>
+              <a:defRPr sz="1300" b="1">
+                <a:solidFill>
+                  <a:srgbClr val="225B9B"/>
+                </a:solidFill>
+                <a:latin typeface="DejaVu Sans Mono"/>
+              </a:defRPr>
+            </a:pPr>
+            <a:r>
+              <a:t>~/ros2_curri/my_agv_ws/src/agv_description/curriculum_stages/M07/model.sdf</a:t>
+            </a:r>
+          </a:p>
+        </p:txBody>
+      </p:sp>
+      <p:sp>
+        <p:nvSpPr>
+          <p:cNvPr id="8" name="TextBox 7"/>
+          <p:cNvSpPr txBox="1"/>
+          <p:nvPr/>
+        </p:nvSpPr>
+        <p:spPr>
+          <a:xfrm>
+            <a:off x="694944" y="1938528"/>
+            <a:ext cx="10789920" cy="274320"/>
+          </a:xfrm>
+          <a:prstGeom prst="rect">
+            <a:avLst/>
+          </a:prstGeom>
+          <a:noFill/>
+        </p:spPr>
+        <p:txBody>
+          <a:bodyPr wrap="square" lIns="73152" rIns="73152" tIns="36576" bIns="36576">
+            <a:spAutoFit/>
+          </a:bodyPr>
+          <a:lstStyle/>
+          <a:p>
+            <a:pPr algn="ctr">
+              <a:spcAft>
+                <a:spcPts val="0"/>
+              </a:spcAft>
+              <a:defRPr sz="1500" b="1">
+                <a:solidFill>
+                  <a:srgbClr val="DB7E22"/>
+                </a:solidFill>
+                <a:latin typeface="Noto Sans CJK KR"/>
+              </a:defRPr>
+            </a:pPr>
+            <a:r>
+              <a:t>말로 먼저 답해 보세요: 이 줄은 무엇을 만들고, 실행하면 어디에서 확인할 수 있을까요?</a:t>
+            </a:r>
+          </a:p>
+        </p:txBody>
+      </p:sp>
+      <p:sp>
+        <p:nvSpPr>
+          <p:cNvPr id="9" name="Rounded Rectangle 8"/>
           <p:cNvSpPr/>
           <p:nvPr/>
         </p:nvSpPr>
         <p:spPr>
           <a:xfrm>
-            <a:off x="658368" y="1956816"/>
-            <a:ext cx="10972800" cy="603504"/>
-          </a:xfrm>
-          <a:prstGeom prst="rect">
-            <a:avLst/>
-          </a:prstGeom>
-          <a:solidFill>
-            <a:srgbClr val="F4F7FB"/>
-          </a:solidFill>
-          <a:ln>
-            <a:solidFill>
-              <a:srgbClr val="F4F7FB"/>
-            </a:solidFill>
-          </a:ln>
-        </p:spPr>
-        <p:style>
-          <a:lnRef idx="1">
-            <a:schemeClr val="accent1"/>
-          </a:lnRef>
-          <a:fillRef idx="3">
-            <a:schemeClr val="accent1"/>
-          </a:fillRef>
-          <a:effectRef idx="2">
-            <a:schemeClr val="accent1"/>
-          </a:effectRef>
-          <a:fontRef idx="minor">
-            <a:schemeClr val="lt1"/>
-          </a:fontRef>
-        </p:style>
-        <p:txBody>
-          <a:bodyPr rtlCol="0" anchor="ctr" wrap="square" lIns="73152" rIns="73152" tIns="36576" bIns="36576"/>
-          <a:lstStyle/>
-          <a:p>
-            <a:pPr algn="l">
-              <a:spcAft>
-                <a:spcPts val="0"/>
-              </a:spcAft>
-              <a:defRPr sz="1300" b="0">
-                <a:solidFill>
-                  <a:srgbClr val="122C4E"/>
-                </a:solidFill>
-                <a:latin typeface="DejaVu Sans Mono"/>
-              </a:defRPr>
-            </a:pPr>
-            <a:r>
-              <a:t>현재 열린 파일: ~/ros2_curri/my_agv_ws/src/agv_description/curriculum_stages/M07/model.sdf</a:t>
-            </a:r>
-            <a:br/>
-            <a:r>
-              <a:t>아래 코드만 입력 → Ctrl+O → Enter로 저장 → 다음 블록으로 이동</a:t>
-            </a:r>
-          </a:p>
-        </p:txBody>
-      </p:sp>
-      <p:sp>
-        <p:nvSpPr>
-          <p:cNvPr id="9" name="Rectangle 8"/>
-          <p:cNvSpPr/>
-          <p:nvPr/>
-        </p:nvSpPr>
-        <p:spPr>
-          <a:xfrm>
-            <a:off x="658368" y="2706624"/>
-            <a:ext cx="10972800" cy="3364992"/>
-          </a:xfrm>
-          <a:prstGeom prst="rect">
+            <a:off x="658368" y="2359152"/>
+            <a:ext cx="4160520" cy="1417320"/>
+          </a:xfrm>
+          <a:prstGeom prst="roundRect">
             <a:avLst/>
           </a:prstGeom>
           <a:solidFill>
@@ -9314,14 +10194,14 @@
           </a:fontRef>
         </p:style>
         <p:txBody>
-          <a:bodyPr rtlCol="0" anchor="ctr" wrap="square" lIns="164592" rIns="164592" tIns="109728" bIns="36576"/>
-          <a:lstStyle/>
-          <a:p>
-            <a:pPr algn="l">
-              <a:spcAft>
-                <a:spcPts val="0"/>
-              </a:spcAft>
-              <a:defRPr sz="1400" b="0">
+          <a:bodyPr rtlCol="0" anchor="ctr" wrap="square" lIns="73152" rIns="73152" tIns="36576" bIns="36576"/>
+          <a:lstStyle/>
+          <a:p>
+            <a:pPr algn="l">
+              <a:spcAft>
+                <a:spcPts val="0"/>
+              </a:spcAft>
+              <a:defRPr sz="1300" b="0">
                 <a:solidFill>
                   <a:srgbClr val="FFFFFF"/>
                 </a:solidFill>
@@ -9329,82 +10209,420 @@
               </a:defRPr>
             </a:pPr>
             <a:r>
-              <a:t>          &lt;/box&gt;</a:t>
-            </a:r>
-            <a:br/>
-            <a:r>
-              <a:t>        &lt;/geometry&gt;</a:t>
-            </a:r>
-            <a:br/>
-            <a:r>
-              <a:t>      &lt;/collision&gt;</a:t>
-            </a:r>
-            <a:br/>
-            <a:r>
-              <a:t>    &lt;/link&gt;</a:t>
-            </a:r>
-            <a:br/>
-            <a:r>
-              <a:t>    &lt;link name="left_wheel_link"&gt;</a:t>
-            </a:r>
-            <a:br/>
-            <a:r>
-              <a:t>      &lt;pose relative_to="base_link"&gt;0 0.19 -0.08 1.5708 0 0&lt;/pose&gt;</a:t>
-            </a:r>
-            <a:br/>
-            <a:r>
-              <a:t>      &lt;inertial&gt;</a:t>
-            </a:r>
-            <a:br/>
-            <a:r>
-              <a:t>        &lt;mass&gt;0.6&lt;/mass&gt;</a:t>
-            </a:r>
-            <a:br/>
-            <a:r>
-              <a:t>        &lt;inertia&gt;</a:t>
-            </a:r>
-            <a:br/>
-            <a:r>
-              <a:t>          &lt;ixx&gt;0.002&lt;/ixx&gt;</a:t>
-            </a:r>
-            <a:br/>
-            <a:r>
-              <a:t>          &lt;iyy&gt;0.002&lt;/iyy&gt;</a:t>
-            </a:r>
-            <a:br/>
-            <a:r>
-              <a:t>          &lt;izz&gt;0.001&lt;/izz&gt;</a:t>
-            </a:r>
-          </a:p>
-        </p:txBody>
-      </p:sp>
-      <p:sp>
-        <p:nvSpPr>
-          <p:cNvPr id="10" name="TextBox 9"/>
-          <p:cNvSpPr txBox="1"/>
-          <p:nvPr/>
-        </p:nvSpPr>
-        <p:spPr>
-          <a:xfrm>
-            <a:off x="749808" y="6181344"/>
-            <a:ext cx="10789920" cy="201168"/>
-          </a:xfrm>
-          <a:prstGeom prst="rect">
-            <a:avLst/>
-          </a:prstGeom>
-          <a:noFill/>
-        </p:spPr>
-        <p:txBody>
-          <a:bodyPr wrap="square" lIns="73152" rIns="73152" tIns="36576" bIns="36576">
-            <a:spAutoFit/>
-          </a:bodyPr>
-          <a:lstStyle/>
-          <a:p>
-            <a:pPr algn="l">
-              <a:spcAft>
-                <a:spcPts val="0"/>
-              </a:spcAft>
-              <a:defRPr sz="1000" b="0">
+              <a:t>&lt;collision name="body_collision"&gt;</a:t>
+            </a:r>
+          </a:p>
+        </p:txBody>
+      </p:sp>
+      <p:sp>
+        <p:nvSpPr>
+          <p:cNvPr id="10" name="Rounded Rectangle 9"/>
+          <p:cNvSpPr/>
+          <p:nvPr/>
+        </p:nvSpPr>
+        <p:spPr>
+          <a:xfrm>
+            <a:off x="5029200" y="2359152"/>
+            <a:ext cx="6537960" cy="1417320"/>
+          </a:xfrm>
+          <a:prstGeom prst="roundRect">
+            <a:avLst/>
+          </a:prstGeom>
+          <a:solidFill>
+            <a:srgbClr val="F4F7FB"/>
+          </a:solidFill>
+          <a:ln>
+            <a:solidFill>
+              <a:srgbClr val="225B9B"/>
+            </a:solidFill>
+          </a:ln>
+        </p:spPr>
+        <p:style>
+          <a:lnRef idx="1">
+            <a:schemeClr val="accent1"/>
+          </a:lnRef>
+          <a:fillRef idx="3">
+            <a:schemeClr val="accent1"/>
+          </a:fillRef>
+          <a:effectRef idx="2">
+            <a:schemeClr val="accent1"/>
+          </a:effectRef>
+          <a:fontRef idx="minor">
+            <a:schemeClr val="lt1"/>
+          </a:fontRef>
+        </p:style>
+        <p:txBody>
+          <a:bodyPr rtlCol="0" anchor="ctr"/>
+          <a:lstStyle/>
+          <a:p>
+            <a:pPr algn="ctr"/>
+          </a:p>
+        </p:txBody>
+      </p:sp>
+      <p:sp>
+        <p:nvSpPr>
+          <p:cNvPr id="11" name="TextBox 10"/>
+          <p:cNvSpPr txBox="1"/>
+          <p:nvPr/>
+        </p:nvSpPr>
+        <p:spPr>
+          <a:xfrm>
+            <a:off x="5239512" y="2468880"/>
+            <a:ext cx="594360" cy="219456"/>
+          </a:xfrm>
+          <a:prstGeom prst="rect">
+            <a:avLst/>
+          </a:prstGeom>
+          <a:noFill/>
+        </p:spPr>
+        <p:txBody>
+          <a:bodyPr wrap="square" lIns="73152" rIns="73152" tIns="36576" bIns="36576">
+            <a:spAutoFit/>
+          </a:bodyPr>
+          <a:lstStyle/>
+          <a:p>
+            <a:pPr algn="l">
+              <a:spcAft>
+                <a:spcPts val="0"/>
+              </a:spcAft>
+              <a:defRPr sz="1400" b="1">
+                <a:solidFill>
+                  <a:srgbClr val="225B9B"/>
+                </a:solidFill>
+                <a:latin typeface="Noto Sans CJK KR"/>
+              </a:defRPr>
+            </a:pPr>
+            <a:r>
+              <a:t>1.</a:t>
+            </a:r>
+          </a:p>
+        </p:txBody>
+      </p:sp>
+      <p:sp>
+        <p:nvSpPr>
+          <p:cNvPr id="12" name="TextBox 11"/>
+          <p:cNvSpPr txBox="1"/>
+          <p:nvPr/>
+        </p:nvSpPr>
+        <p:spPr>
+          <a:xfrm>
+            <a:off x="5596128" y="2450592"/>
+            <a:ext cx="5696712" cy="493776"/>
+          </a:xfrm>
+          <a:prstGeom prst="rect">
+            <a:avLst/>
+          </a:prstGeom>
+          <a:noFill/>
+        </p:spPr>
+        <p:txBody>
+          <a:bodyPr wrap="square" lIns="73152" rIns="73152" tIns="36576" bIns="36576">
+            <a:spAutoFit/>
+          </a:bodyPr>
+          <a:lstStyle/>
+          <a:p>
+            <a:pPr algn="l">
+              <a:spcAft>
+                <a:spcPts val="0"/>
+              </a:spcAft>
+              <a:defRPr sz="1300" b="0">
+                <a:solidFill>
+                  <a:srgbClr val="122C4E"/>
+                </a:solidFill>
+                <a:latin typeface="Noto Sans CJK KR"/>
+              </a:defRPr>
+            </a:pPr>
+            <a:r>
+              <a:t>뜻: 물리 엔진이 부딪힘을 계산할 모양을 설정합니다.</a:t>
+            </a:r>
+          </a:p>
+        </p:txBody>
+      </p:sp>
+      <p:sp>
+        <p:nvSpPr>
+          <p:cNvPr id="13" name="TextBox 12"/>
+          <p:cNvSpPr txBox="1"/>
+          <p:nvPr/>
+        </p:nvSpPr>
+        <p:spPr>
+          <a:xfrm>
+            <a:off x="5596128" y="3108960"/>
+            <a:ext cx="5696712" cy="457200"/>
+          </a:xfrm>
+          <a:prstGeom prst="rect">
+            <a:avLst/>
+          </a:prstGeom>
+          <a:noFill/>
+        </p:spPr>
+        <p:txBody>
+          <a:bodyPr wrap="square" lIns="73152" rIns="73152" tIns="36576" bIns="36576">
+            <a:spAutoFit/>
+          </a:bodyPr>
+          <a:lstStyle/>
+          <a:p>
+            <a:pPr algn="l">
+              <a:spcAft>
+                <a:spcPts val="0"/>
+              </a:spcAft>
+              <a:defRPr sz="1200" b="0">
+                <a:solidFill>
+                  <a:srgbClr val="2A8B5A"/>
+                </a:solidFill>
+                <a:latin typeface="Noto Sans CJK KR"/>
+              </a:defRPr>
+            </a:pPr>
+            <a:r>
+              <a:t>실행에서: 주행 중 장애물·바닥과의 접촉 결과가 이 구조를 따릅니다.</a:t>
+            </a:r>
+          </a:p>
+        </p:txBody>
+      </p:sp>
+      <p:sp>
+        <p:nvSpPr>
+          <p:cNvPr id="14" name="Rounded Rectangle 13"/>
+          <p:cNvSpPr/>
+          <p:nvPr/>
+        </p:nvSpPr>
+        <p:spPr>
+          <a:xfrm>
+            <a:off x="658368" y="4078224"/>
+            <a:ext cx="4160520" cy="1417320"/>
+          </a:xfrm>
+          <a:prstGeom prst="roundRect">
+            <a:avLst/>
+          </a:prstGeom>
+          <a:solidFill>
+            <a:srgbClr val="1D232D"/>
+          </a:solidFill>
+          <a:ln>
+            <a:solidFill>
+              <a:srgbClr val="1D232D"/>
+            </a:solidFill>
+          </a:ln>
+        </p:spPr>
+        <p:style>
+          <a:lnRef idx="1">
+            <a:schemeClr val="accent1"/>
+          </a:lnRef>
+          <a:fillRef idx="3">
+            <a:schemeClr val="accent1"/>
+          </a:fillRef>
+          <a:effectRef idx="2">
+            <a:schemeClr val="accent1"/>
+          </a:effectRef>
+          <a:fontRef idx="minor">
+            <a:schemeClr val="lt1"/>
+          </a:fontRef>
+        </p:style>
+        <p:txBody>
+          <a:bodyPr rtlCol="0" anchor="ctr" wrap="square" lIns="73152" rIns="73152" tIns="36576" bIns="36576"/>
+          <a:lstStyle/>
+          <a:p>
+            <a:pPr algn="l">
+              <a:spcAft>
+                <a:spcPts val="0"/>
+              </a:spcAft>
+              <a:defRPr sz="1300" b="0">
+                <a:solidFill>
+                  <a:srgbClr val="FFFFFF"/>
+                </a:solidFill>
+                <a:latin typeface="DejaVu Sans Mono"/>
+              </a:defRPr>
+            </a:pPr>
+            <a:r>
+              <a:t>&lt;joint name="left_wheel_joint" type="revolute"&gt;</a:t>
+            </a:r>
+          </a:p>
+        </p:txBody>
+      </p:sp>
+      <p:sp>
+        <p:nvSpPr>
+          <p:cNvPr id="15" name="Rounded Rectangle 14"/>
+          <p:cNvSpPr/>
+          <p:nvPr/>
+        </p:nvSpPr>
+        <p:spPr>
+          <a:xfrm>
+            <a:off x="5029200" y="4078224"/>
+            <a:ext cx="6537960" cy="1417320"/>
+          </a:xfrm>
+          <a:prstGeom prst="roundRect">
+            <a:avLst/>
+          </a:prstGeom>
+          <a:solidFill>
+            <a:srgbClr val="F4F7FB"/>
+          </a:solidFill>
+          <a:ln>
+            <a:solidFill>
+              <a:srgbClr val="225B9B"/>
+            </a:solidFill>
+          </a:ln>
+        </p:spPr>
+        <p:style>
+          <a:lnRef idx="1">
+            <a:schemeClr val="accent1"/>
+          </a:lnRef>
+          <a:fillRef idx="3">
+            <a:schemeClr val="accent1"/>
+          </a:fillRef>
+          <a:effectRef idx="2">
+            <a:schemeClr val="accent1"/>
+          </a:effectRef>
+          <a:fontRef idx="minor">
+            <a:schemeClr val="lt1"/>
+          </a:fontRef>
+        </p:style>
+        <p:txBody>
+          <a:bodyPr rtlCol="0" anchor="ctr"/>
+          <a:lstStyle/>
+          <a:p>
+            <a:pPr algn="ctr"/>
+          </a:p>
+        </p:txBody>
+      </p:sp>
+      <p:sp>
+        <p:nvSpPr>
+          <p:cNvPr id="16" name="TextBox 15"/>
+          <p:cNvSpPr txBox="1"/>
+          <p:nvPr/>
+        </p:nvSpPr>
+        <p:spPr>
+          <a:xfrm>
+            <a:off x="5239512" y="4187952"/>
+            <a:ext cx="594360" cy="219456"/>
+          </a:xfrm>
+          <a:prstGeom prst="rect">
+            <a:avLst/>
+          </a:prstGeom>
+          <a:noFill/>
+        </p:spPr>
+        <p:txBody>
+          <a:bodyPr wrap="square" lIns="73152" rIns="73152" tIns="36576" bIns="36576">
+            <a:spAutoFit/>
+          </a:bodyPr>
+          <a:lstStyle/>
+          <a:p>
+            <a:pPr algn="l">
+              <a:spcAft>
+                <a:spcPts val="0"/>
+              </a:spcAft>
+              <a:defRPr sz="1400" b="1">
+                <a:solidFill>
+                  <a:srgbClr val="225B9B"/>
+                </a:solidFill>
+                <a:latin typeface="Noto Sans CJK KR"/>
+              </a:defRPr>
+            </a:pPr>
+            <a:r>
+              <a:t>2.</a:t>
+            </a:r>
+          </a:p>
+        </p:txBody>
+      </p:sp>
+      <p:sp>
+        <p:nvSpPr>
+          <p:cNvPr id="17" name="TextBox 16"/>
+          <p:cNvSpPr txBox="1"/>
+          <p:nvPr/>
+        </p:nvSpPr>
+        <p:spPr>
+          <a:xfrm>
+            <a:off x="5596128" y="4169663"/>
+            <a:ext cx="5696712" cy="493776"/>
+          </a:xfrm>
+          <a:prstGeom prst="rect">
+            <a:avLst/>
+          </a:prstGeom>
+          <a:noFill/>
+        </p:spPr>
+        <p:txBody>
+          <a:bodyPr wrap="square" lIns="73152" rIns="73152" tIns="36576" bIns="36576">
+            <a:spAutoFit/>
+          </a:bodyPr>
+          <a:lstStyle/>
+          <a:p>
+            <a:pPr algn="l">
+              <a:spcAft>
+                <a:spcPts val="0"/>
+              </a:spcAft>
+              <a:defRPr sz="1300" b="0">
+                <a:solidFill>
+                  <a:srgbClr val="122C4E"/>
+                </a:solidFill>
+                <a:latin typeface="Noto Sans CJK KR"/>
+              </a:defRPr>
+            </a:pPr>
+            <a:r>
+              <a:t>뜻: 두 link를 어떤 축·방식으로 연결할지 정합니다.</a:t>
+            </a:r>
+          </a:p>
+        </p:txBody>
+      </p:sp>
+      <p:sp>
+        <p:nvSpPr>
+          <p:cNvPr id="18" name="TextBox 17"/>
+          <p:cNvSpPr txBox="1"/>
+          <p:nvPr/>
+        </p:nvSpPr>
+        <p:spPr>
+          <a:xfrm>
+            <a:off x="5596128" y="4828032"/>
+            <a:ext cx="5696712" cy="457200"/>
+          </a:xfrm>
+          <a:prstGeom prst="rect">
+            <a:avLst/>
+          </a:prstGeom>
+          <a:noFill/>
+        </p:spPr>
+        <p:txBody>
+          <a:bodyPr wrap="square" lIns="73152" rIns="73152" tIns="36576" bIns="36576">
+            <a:spAutoFit/>
+          </a:bodyPr>
+          <a:lstStyle/>
+          <a:p>
+            <a:pPr algn="l">
+              <a:spcAft>
+                <a:spcPts val="0"/>
+              </a:spcAft>
+              <a:defRPr sz="1200" b="0">
+                <a:solidFill>
+                  <a:srgbClr val="2A8B5A"/>
+                </a:solidFill>
+                <a:latin typeface="Noto Sans CJK KR"/>
+              </a:defRPr>
+            </a:pPr>
+            <a:r>
+              <a:t>실행에서: joint 이름·축이 맞아야 바퀴와 센서 frame이 기대한 위치에 있습니다.</a:t>
+            </a:r>
+          </a:p>
+        </p:txBody>
+      </p:sp>
+      <p:sp>
+        <p:nvSpPr>
+          <p:cNvPr id="19" name="TextBox 18"/>
+          <p:cNvSpPr txBox="1"/>
+          <p:nvPr/>
+        </p:nvSpPr>
+        <p:spPr>
+          <a:xfrm>
+            <a:off x="749808" y="6199632"/>
+            <a:ext cx="10698480" cy="182880"/>
+          </a:xfrm>
+          <a:prstGeom prst="rect">
+            <a:avLst/>
+          </a:prstGeom>
+          <a:noFill/>
+        </p:spPr>
+        <p:txBody>
+          <a:bodyPr wrap="square" lIns="73152" rIns="73152" tIns="36576" bIns="36576">
+            <a:spAutoFit/>
+          </a:bodyPr>
+          <a:lstStyle/>
+          <a:p>
+            <a:pPr algn="ctr">
+              <a:spcAft>
+                <a:spcPts val="0"/>
+              </a:spcAft>
+              <a:defRPr sz="1100" b="0">
                 <a:solidFill>
                   <a:srgbClr val="5C6672"/>
                 </a:solidFill>
@@ -9412,7 +10630,7 @@
               </a:defRPr>
             </a:pPr>
             <a:r>
-              <a:t>입력 3/11 · 이 파일의 다음 코드 블록이 바로 다음 슬라이드에 이어집니다.</a:t>
+              <a:t>다음 코드 입력 슬라이드에서 이 줄을 발견하면, 방금 설명한 ‘뜻’과 ‘실행에서 보이는 변화’를 다시 말해 봅니다.</a:t>
             </a:r>
           </a:p>
         </p:txBody>
@@ -9469,7 +10687,7 @@
               </a:defRPr>
             </a:pPr>
             <a:r>
-              <a:t>구현 1/1: 코드 입력 (4/11)</a:t>
+              <a:t>구현 1/1: 코드 입력 (1/11)</a:t>
             </a:r>
           </a:p>
         </p:txBody>
@@ -9644,7 +10862,7 @@
               </a:defRPr>
             </a:pPr>
             <a:r>
-              <a:t>현재 단계 파일 1/1 · 입력 4/11    |    현재 폴더 ~/ros2_curri/my_agv_ws    |    현재 터미널</a:t>
+              <a:t>현재 단계 파일 1/1 · 입력 1/11    |    현재 폴더 ~/ros2_curri/my_agv_ws    |    현재 터미널</a:t>
             </a:r>
           </a:p>
         </p:txBody>
@@ -9683,7 +10901,7 @@
               </a:defRPr>
             </a:pPr>
             <a:r>
-              <a:t>이 블록이 하는 일: 앞에서 만든 구조에 geometry·collision·sensor·joint를 하나씩 붙입니다.</a:t>
+              <a:t>이 블록이 하는 일: 파일의 root와 첫 model/link를 입력합니다. 태그 여닫는 순서를 그대로 유지합니다.</a:t>
             </a:r>
           </a:p>
         </p:txBody>
@@ -9803,51 +11021,51 @@
               </a:defRPr>
             </a:pPr>
             <a:r>
+              <a:t>&lt;?xml version="1.0" ?&gt;</a:t>
+            </a:r>
+            <a:br/>
+            <a:r>
+              <a:t>&lt;sdf version="1.10"&gt;</a:t>
+            </a:r>
+            <a:br/>
+            <a:r>
+              <a:t>  &lt;model name="agv"&gt;</a:t>
+            </a:r>
+            <a:br/>
+            <a:r>
+              <a:t>    &lt;link name="base_link"&gt;</a:t>
+            </a:r>
+            <a:br/>
+            <a:r>
+              <a:t>      &lt;pose&gt;0 0 0.16 0 0 0&lt;/pose&gt;</a:t>
+            </a:r>
+            <a:br/>
+            <a:r>
+              <a:t>      &lt;inertial&gt;</a:t>
+            </a:r>
+            <a:br/>
+            <a:r>
+              <a:t>        &lt;mass&gt;12.0&lt;/mass&gt;</a:t>
+            </a:r>
+            <a:br/>
+            <a:r>
+              <a:t>        &lt;inertia&gt;</a:t>
+            </a:r>
+            <a:br/>
+            <a:r>
+              <a:t>          &lt;ixx&gt;0.20&lt;/ixx&gt;</a:t>
+            </a:r>
+            <a:br/>
+            <a:r>
+              <a:t>          &lt;iyy&gt;0.40&lt;/iyy&gt;</a:t>
+            </a:r>
+            <a:br/>
+            <a:r>
+              <a:t>          &lt;izz&gt;0.50&lt;/izz&gt;</a:t>
+            </a:r>
+            <a:br/>
+            <a:r>
               <a:t>        &lt;/inertia&gt;</a:t>
-            </a:r>
-            <a:br/>
-            <a:r>
-              <a:t>      &lt;/inertial&gt;</a:t>
-            </a:r>
-            <a:br/>
-            <a:r>
-              <a:t>      &lt;visual name="wheel"&gt;</a:t>
-            </a:r>
-            <a:br/>
-            <a:r>
-              <a:t>        &lt;geometry&gt;</a:t>
-            </a:r>
-            <a:br/>
-            <a:r>
-              <a:t>          &lt;cylinder&gt;</a:t>
-            </a:r>
-            <a:br/>
-            <a:r>
-              <a:t>            &lt;radius&gt;0.08&lt;/radius&gt;</a:t>
-            </a:r>
-            <a:br/>
-            <a:r>
-              <a:t>            &lt;length&gt;0.05&lt;/length&gt;</a:t>
-            </a:r>
-            <a:br/>
-            <a:r>
-              <a:t>          &lt;/cylinder&gt;</a:t>
-            </a:r>
-            <a:br/>
-            <a:r>
-              <a:t>        &lt;/geometry&gt;</a:t>
-            </a:r>
-            <a:br/>
-            <a:r>
-              <a:t>      &lt;/visual&gt;</a:t>
-            </a:r>
-            <a:br/>
-            <a:r>
-              <a:t>      &lt;collision name="wheel_collision"&gt;</a:t>
-            </a:r>
-            <a:br/>
-            <a:r>
-              <a:t>        &lt;geometry&gt;</a:t>
             </a:r>
           </a:p>
         </p:txBody>
@@ -9886,7 +11104,7 @@
               </a:defRPr>
             </a:pPr>
             <a:r>
-              <a:t>입력 4/11 · 이 파일의 다음 코드 블록이 바로 다음 슬라이드에 이어집니다.</a:t>
+              <a:t>입력 1/11 · 이 파일의 다음 코드 블록이 바로 다음 슬라이드에 이어집니다.</a:t>
             </a:r>
           </a:p>
         </p:txBody>
@@ -9943,7 +11161,7 @@
               </a:defRPr>
             </a:pPr>
             <a:r>
-              <a:t>구현 1/1: 코드 입력 (5/11)</a:t>
+              <a:t>구현 1/1: 코드 입력 (2/11)</a:t>
             </a:r>
           </a:p>
         </p:txBody>
@@ -10118,7 +11336,7 @@
               </a:defRPr>
             </a:pPr>
             <a:r>
-              <a:t>현재 단계 파일 1/1 · 입력 5/11    |    현재 폴더 ~/ros2_curri/my_agv_ws    |    현재 터미널</a:t>
+              <a:t>현재 단계 파일 1/1 · 입력 2/11    |    현재 폴더 ~/ros2_curri/my_agv_ws    |    현재 터미널</a:t>
             </a:r>
           </a:p>
         </p:txBody>
@@ -10277,51 +11495,51 @@
               </a:defRPr>
             </a:pPr>
             <a:r>
-              <a:t>          &lt;cylinder&gt;</a:t>
+              <a:t>      &lt;/inertial&gt;</a:t>
             </a:r>
             <a:br/>
             <a:r>
-              <a:t>            &lt;radius&gt;0.08&lt;/radius&gt;</a:t>
+              <a:t>      &lt;visual name="body"&gt;</a:t>
             </a:r>
             <a:br/>
             <a:r>
-              <a:t>            &lt;length&gt;0.05&lt;/length&gt;</a:t>
+              <a:t>        &lt;geometry&gt;</a:t>
             </a:r>
             <a:br/>
             <a:r>
-              <a:t>          &lt;/cylinder&gt;</a:t>
+              <a:t>          &lt;box&gt;</a:t>
             </a:r>
             <a:br/>
             <a:r>
+              <a:t>            &lt;size&gt;0.60 0.42 0.16&lt;/size&gt;</a:t>
+            </a:r>
+            <a:br/>
+            <a:r>
+              <a:t>          &lt;/box&gt;</a:t>
+            </a:r>
+            <a:br/>
+            <a:r>
               <a:t>        &lt;/geometry&gt;</a:t>
             </a:r>
             <a:br/>
             <a:r>
-              <a:t>        &lt;surface&gt;</a:t>
+              <a:t>      &lt;/visual&gt;</a:t>
             </a:r>
             <a:br/>
             <a:r>
-              <a:t>          &lt;friction&gt;</a:t>
+              <a:t>      &lt;collision name="body_collision"&gt;</a:t>
             </a:r>
             <a:br/>
             <a:r>
-              <a:t>            &lt;ode&gt;</a:t>
+              <a:t>        &lt;geometry&gt;</a:t>
             </a:r>
             <a:br/>
             <a:r>
-              <a:t>              &lt;mu&gt;1.0&lt;/mu&gt;</a:t>
+              <a:t>          &lt;box&gt;</a:t>
             </a:r>
             <a:br/>
             <a:r>
-              <a:t>              &lt;mu2&gt;1.0&lt;/mu2&gt;</a:t>
-            </a:r>
-            <a:br/>
-            <a:r>
-              <a:t>            &lt;/ode&gt;</a:t>
-            </a:r>
-            <a:br/>
-            <a:r>
-              <a:t>          &lt;/friction&gt;</a:t>
+              <a:t>            &lt;size&gt;0.60 0.42 0.16&lt;/size&gt;</a:t>
             </a:r>
           </a:p>
         </p:txBody>
@@ -10360,7 +11578,7 @@
               </a:defRPr>
             </a:pPr>
             <a:r>
-              <a:t>입력 5/11 · 이 파일의 다음 코드 블록이 바로 다음 슬라이드에 이어집니다.</a:t>
+              <a:t>입력 2/11 · 이 파일의 다음 코드 블록이 바로 다음 슬라이드에 이어집니다.</a:t>
             </a:r>
           </a:p>
         </p:txBody>
@@ -10417,7 +11635,7 @@
               </a:defRPr>
             </a:pPr>
             <a:r>
-              <a:t>구현 1/1: 코드 입력 (6/11)</a:t>
+              <a:t>구현 1/1: 코드 입력 (3/11)</a:t>
             </a:r>
           </a:p>
         </p:txBody>
@@ -10592,7 +11810,7 @@
               </a:defRPr>
             </a:pPr>
             <a:r>
-              <a:t>현재 단계 파일 1/1 · 입력 6/11    |    현재 폴더 ~/ros2_curri/my_agv_ws    |    현재 터미널</a:t>
+              <a:t>현재 단계 파일 1/1 · 입력 3/11    |    현재 폴더 ~/ros2_curri/my_agv_ws    |    현재 터미널</a:t>
             </a:r>
           </a:p>
         </p:txBody>
@@ -10751,10 +11969,14 @@
               </a:defRPr>
             </a:pPr>
             <a:r>
-              <a:t>        &lt;/surface&gt;</a:t>
+              <a:t>          &lt;/box&gt;</a:t>
             </a:r>
             <a:br/>
             <a:r>
+              <a:t>        &lt;/geometry&gt;</a:t>
+            </a:r>
+            <a:br/>
+            <a:r>
               <a:t>      &lt;/collision&gt;</a:t>
             </a:r>
             <a:br/>
@@ -10763,11 +11985,11 @@
             </a:r>
             <a:br/>
             <a:r>
-              <a:t>    &lt;link name="right_wheel_link"&gt;</a:t>
+              <a:t>    &lt;link name="left_wheel_link"&gt;</a:t>
             </a:r>
             <a:br/>
             <a:r>
-              <a:t>      &lt;pose relative_to="base_link"&gt;0 -0.19 -0.08 1.5708 0 0&lt;/pose&gt;</a:t>
+              <a:t>      &lt;pose relative_to="base_link"&gt;0 0.19 -0.08 1.5708 0 0&lt;/pose&gt;</a:t>
             </a:r>
             <a:br/>
             <a:r>
@@ -10792,10 +12014,6 @@
             <a:br/>
             <a:r>
               <a:t>          &lt;izz&gt;0.001&lt;/izz&gt;</a:t>
-            </a:r>
-            <a:br/>
-            <a:r>
-              <a:t>        &lt;/inertia&gt;</a:t>
             </a:r>
           </a:p>
         </p:txBody>
@@ -10834,7 +12052,7 @@
               </a:defRPr>
             </a:pPr>
             <a:r>
-              <a:t>입력 6/11 · 이 파일의 다음 코드 블록이 바로 다음 슬라이드에 이어집니다.</a:t>
+              <a:t>입력 3/11 · 이 파일의 다음 코드 블록이 바로 다음 슬라이드에 이어집니다.</a:t>
             </a:r>
           </a:p>
         </p:txBody>
@@ -10891,7 +12109,7 @@
               </a:defRPr>
             </a:pPr>
             <a:r>
-              <a:t>구현 1/1: 코드 입력 (7/11)</a:t>
+              <a:t>구현 1/1: 코드 입력 (4/11)</a:t>
             </a:r>
           </a:p>
         </p:txBody>
@@ -11066,7 +12284,7 @@
               </a:defRPr>
             </a:pPr>
             <a:r>
-              <a:t>현재 단계 파일 1/1 · 입력 7/11    |    현재 폴더 ~/ros2_curri/my_agv_ws    |    현재 터미널</a:t>
+              <a:t>현재 단계 파일 1/1 · 입력 4/11    |    현재 폴더 ~/ros2_curri/my_agv_ws    |    현재 터미널</a:t>
             </a:r>
           </a:p>
         </p:txBody>
@@ -11225,6 +12443,10 @@
               </a:defRPr>
             </a:pPr>
             <a:r>
+              <a:t>        &lt;/inertia&gt;</a:t>
+            </a:r>
+            <a:br/>
+            <a:r>
               <a:t>      &lt;/inertial&gt;</a:t>
             </a:r>
             <a:br/>
@@ -11266,10 +12488,6 @@
             <a:br/>
             <a:r>
               <a:t>        &lt;geometry&gt;</a:t>
-            </a:r>
-            <a:br/>
-            <a:r>
-              <a:t>          &lt;cylinder&gt;</a:t>
             </a:r>
           </a:p>
         </p:txBody>
@@ -11308,7 +12526,7 @@
               </a:defRPr>
             </a:pPr>
             <a:r>
-              <a:t>입력 7/11 · 이 파일의 다음 코드 블록이 바로 다음 슬라이드에 이어집니다.</a:t>
+              <a:t>입력 4/11 · 이 파일의 다음 코드 블록이 바로 다음 슬라이드에 이어집니다.</a:t>
             </a:r>
           </a:p>
         </p:txBody>
@@ -11365,7 +12583,7 @@
               </a:defRPr>
             </a:pPr>
             <a:r>
-              <a:t>구현 1/1: 코드 입력 (8/11)</a:t>
+              <a:t>구현 1/1: 코드 입력 (5/11)</a:t>
             </a:r>
           </a:p>
         </p:txBody>
@@ -11540,7 +12758,7 @@
               </a:defRPr>
             </a:pPr>
             <a:r>
-              <a:t>현재 단계 파일 1/1 · 입력 8/11    |    현재 폴더 ~/ros2_curri/my_agv_ws    |    현재 터미널</a:t>
+              <a:t>현재 단계 파일 1/1 · 입력 5/11    |    현재 폴더 ~/ros2_curri/my_agv_ws    |    현재 터미널</a:t>
             </a:r>
           </a:p>
         </p:txBody>
@@ -11699,6 +12917,10 @@
               </a:defRPr>
             </a:pPr>
             <a:r>
+              <a:t>          &lt;cylinder&gt;</a:t>
+            </a:r>
+            <a:br/>
+            <a:r>
               <a:t>            &lt;radius&gt;0.08&lt;/radius&gt;</a:t>
             </a:r>
             <a:br/>
@@ -11740,10 +12962,6 @@
             <a:br/>
             <a:r>
               <a:t>          &lt;/friction&gt;</a:t>
-            </a:r>
-            <a:br/>
-            <a:r>
-              <a:t>        &lt;/surface&gt;</a:t>
             </a:r>
           </a:p>
         </p:txBody>
@@ -11782,7 +13000,7 @@
               </a:defRPr>
             </a:pPr>
             <a:r>
-              <a:t>입력 8/11 · 이 파일의 다음 코드 블록이 바로 다음 슬라이드에 이어집니다.</a:t>
+              <a:t>입력 5/11 · 이 파일의 다음 코드 블록이 바로 다음 슬라이드에 이어집니다.</a:t>
             </a:r>
           </a:p>
         </p:txBody>
@@ -12300,7 +13518,7 @@
               </a:defRPr>
             </a:pPr>
             <a:r>
-              <a:t>구현 1/1: 코드 입력 (9/11)</a:t>
+              <a:t>구현 1/1: 코드 입력 (6/11)</a:t>
             </a:r>
           </a:p>
         </p:txBody>
@@ -12475,7 +13693,7 @@
               </a:defRPr>
             </a:pPr>
             <a:r>
-              <a:t>현재 단계 파일 1/1 · 입력 9/11    |    현재 폴더 ~/ros2_curri/my_agv_ws    |    현재 터미널</a:t>
+              <a:t>현재 단계 파일 1/1 · 입력 6/11    |    현재 폴더 ~/ros2_curri/my_agv_ws    |    현재 터미널</a:t>
             </a:r>
           </a:p>
         </p:txBody>
@@ -12634,6 +13852,10 @@
               </a:defRPr>
             </a:pPr>
             <a:r>
+              <a:t>        &lt;/surface&gt;</a:t>
+            </a:r>
+            <a:br/>
+            <a:r>
               <a:t>      &lt;/collision&gt;</a:t>
             </a:r>
             <a:br/>
@@ -12642,43 +13864,39 @@
             </a:r>
             <a:br/>
             <a:r>
-              <a:t>    &lt;joint name="left_wheel_joint" type="revolute"&gt;</a:t>
+              <a:t>    &lt;link name="right_wheel_link"&gt;</a:t>
             </a:r>
             <a:br/>
             <a:r>
-              <a:t>      &lt;parent&gt;base_link&lt;/parent&gt;</a:t>
+              <a:t>      &lt;pose relative_to="base_link"&gt;0 -0.19 -0.08 1.5708 0 0&lt;/pose&gt;</a:t>
             </a:r>
             <a:br/>
             <a:r>
-              <a:t>      &lt;child&gt;left_wheel_link&lt;/child&gt;</a:t>
+              <a:t>      &lt;inertial&gt;</a:t>
             </a:r>
             <a:br/>
             <a:r>
-              <a:t>      &lt;axis&gt;</a:t>
+              <a:t>        &lt;mass&gt;0.6&lt;/mass&gt;</a:t>
             </a:r>
             <a:br/>
             <a:r>
-              <a:t>        &lt;xyz&gt;0 1 0&lt;/xyz&gt;</a:t>
+              <a:t>        &lt;inertia&gt;</a:t>
             </a:r>
             <a:br/>
             <a:r>
-              <a:t>        &lt;limit&gt;</a:t>
+              <a:t>          &lt;ixx&gt;0.002&lt;/ixx&gt;</a:t>
             </a:r>
             <a:br/>
             <a:r>
-              <a:t>          &lt;lower&gt;-1e16&lt;/lower&gt;</a:t>
+              <a:t>          &lt;iyy&gt;0.002&lt;/iyy&gt;</a:t>
             </a:r>
             <a:br/>
             <a:r>
-              <a:t>          &lt;upper&gt;1e16&lt;/upper&gt;</a:t>
+              <a:t>          &lt;izz&gt;0.001&lt;/izz&gt;</a:t>
             </a:r>
             <a:br/>
             <a:r>
-              <a:t>        &lt;/limit&gt;</a:t>
-            </a:r>
-            <a:br/>
-            <a:r>
-              <a:t>      &lt;/axis&gt;</a:t>
+              <a:t>        &lt;/inertia&gt;</a:t>
             </a:r>
           </a:p>
         </p:txBody>
@@ -12717,7 +13935,7 @@
               </a:defRPr>
             </a:pPr>
             <a:r>
-              <a:t>입력 9/11 · 이 파일의 다음 코드 블록이 바로 다음 슬라이드에 이어집니다.</a:t>
+              <a:t>입력 6/11 · 이 파일의 다음 코드 블록이 바로 다음 슬라이드에 이어집니다.</a:t>
             </a:r>
           </a:p>
         </p:txBody>
@@ -12774,7 +13992,7 @@
               </a:defRPr>
             </a:pPr>
             <a:r>
-              <a:t>구현 1/1: 코드 입력 (10/11)</a:t>
+              <a:t>구현 1/1: 코드 입력 (7/11)</a:t>
             </a:r>
           </a:p>
         </p:txBody>
@@ -12949,7 +14167,7 @@
               </a:defRPr>
             </a:pPr>
             <a:r>
-              <a:t>현재 단계 파일 1/1 · 입력 10/11    |    현재 폴더 ~/ros2_curri/my_agv_ws    |    현재 터미널</a:t>
+              <a:t>현재 단계 파일 1/1 · 입력 7/11    |    현재 폴더 ~/ros2_curri/my_agv_ws    |    현재 터미널</a:t>
             </a:r>
           </a:p>
         </p:txBody>
@@ -13108,51 +14326,51 @@
               </a:defRPr>
             </a:pPr>
             <a:r>
-              <a:t>    &lt;/joint&gt;</a:t>
+              <a:t>      &lt;/inertial&gt;</a:t>
             </a:r>
             <a:br/>
             <a:r>
-              <a:t>    &lt;joint name="right_wheel_joint" type="revolute"&gt;</a:t>
+              <a:t>      &lt;visual name="wheel"&gt;</a:t>
             </a:r>
             <a:br/>
             <a:r>
-              <a:t>      &lt;parent&gt;base_link&lt;/parent&gt;</a:t>
+              <a:t>        &lt;geometry&gt;</a:t>
             </a:r>
             <a:br/>
             <a:r>
-              <a:t>      &lt;child&gt;right_wheel_link&lt;/child&gt;</a:t>
+              <a:t>          &lt;cylinder&gt;</a:t>
             </a:r>
             <a:br/>
             <a:r>
-              <a:t>      &lt;axis&gt;</a:t>
+              <a:t>            &lt;radius&gt;0.08&lt;/radius&gt;</a:t>
             </a:r>
             <a:br/>
             <a:r>
-              <a:t>        &lt;xyz&gt;0 1 0&lt;/xyz&gt;</a:t>
+              <a:t>            &lt;length&gt;0.05&lt;/length&gt;</a:t>
             </a:r>
             <a:br/>
             <a:r>
-              <a:t>        &lt;limit&gt;</a:t>
+              <a:t>          &lt;/cylinder&gt;</a:t>
             </a:r>
             <a:br/>
             <a:r>
-              <a:t>          &lt;lower&gt;-1e16&lt;/lower&gt;</a:t>
+              <a:t>        &lt;/geometry&gt;</a:t>
             </a:r>
             <a:br/>
             <a:r>
-              <a:t>          &lt;upper&gt;1e16&lt;/upper&gt;</a:t>
+              <a:t>      &lt;/visual&gt;</a:t>
             </a:r>
             <a:br/>
             <a:r>
-              <a:t>        &lt;/limit&gt;</a:t>
+              <a:t>      &lt;collision name="wheel_collision"&gt;</a:t>
             </a:r>
             <a:br/>
             <a:r>
-              <a:t>      &lt;/axis&gt;</a:t>
+              <a:t>        &lt;geometry&gt;</a:t>
             </a:r>
             <a:br/>
             <a:r>
-              <a:t>    &lt;/joint&gt;</a:t>
+              <a:t>          &lt;cylinder&gt;</a:t>
             </a:r>
           </a:p>
         </p:txBody>
@@ -13191,7 +14409,7 @@
               </a:defRPr>
             </a:pPr>
             <a:r>
-              <a:t>입력 10/11 · 이 파일의 다음 코드 블록이 바로 다음 슬라이드에 이어집니다.</a:t>
+              <a:t>입력 7/11 · 이 파일의 다음 코드 블록이 바로 다음 슬라이드에 이어집니다.</a:t>
             </a:r>
           </a:p>
         </p:txBody>
@@ -13248,7 +14466,7 @@
               </a:defRPr>
             </a:pPr>
             <a:r>
-              <a:t>구현 1/1: 코드 입력 (11/11)</a:t>
+              <a:t>구현 1/1: 코드 입력 (8/11)</a:t>
             </a:r>
           </a:p>
         </p:txBody>
@@ -13423,7 +14641,7 @@
               </a:defRPr>
             </a:pPr>
             <a:r>
-              <a:t>현재 단계 파일 1/1 · 입력 11/11    |    현재 폴더 ~/ros2_curri/my_agv_ws    |    현재 터미널</a:t>
+              <a:t>현재 단계 파일 1/1 · 입력 8/11    |    현재 폴더 ~/ros2_curri/my_agv_ws    |    현재 터미널</a:t>
             </a:r>
           </a:p>
         </p:txBody>
@@ -13462,7 +14680,7 @@
               </a:defRPr>
             </a:pPr>
             <a:r>
-              <a:t>이 블록이 하는 일: 마지막 joint·sensor·plugin과 닫는 태그를 입력해 구조를 완성합니다.</a:t>
+              <a:t>이 블록이 하는 일: 앞에서 만든 구조에 geometry·collision·sensor·joint를 하나씩 붙입니다.</a:t>
             </a:r>
           </a:p>
         </p:txBody>
@@ -13582,11 +14800,51 @@
               </a:defRPr>
             </a:pPr>
             <a:r>
-              <a:t>  &lt;/model&gt;</a:t>
+              <a:t>            &lt;radius&gt;0.08&lt;/radius&gt;</a:t>
             </a:r>
             <a:br/>
             <a:r>
-              <a:t>&lt;/sdf&gt;</a:t>
+              <a:t>            &lt;length&gt;0.05&lt;/length&gt;</a:t>
+            </a:r>
+            <a:br/>
+            <a:r>
+              <a:t>          &lt;/cylinder&gt;</a:t>
+            </a:r>
+            <a:br/>
+            <a:r>
+              <a:t>        &lt;/geometry&gt;</a:t>
+            </a:r>
+            <a:br/>
+            <a:r>
+              <a:t>        &lt;surface&gt;</a:t>
+            </a:r>
+            <a:br/>
+            <a:r>
+              <a:t>          &lt;friction&gt;</a:t>
+            </a:r>
+            <a:br/>
+            <a:r>
+              <a:t>            &lt;ode&gt;</a:t>
+            </a:r>
+            <a:br/>
+            <a:r>
+              <a:t>              &lt;mu&gt;1.0&lt;/mu&gt;</a:t>
+            </a:r>
+            <a:br/>
+            <a:r>
+              <a:t>              &lt;mu2&gt;1.0&lt;/mu2&gt;</a:t>
+            </a:r>
+            <a:br/>
+            <a:r>
+              <a:t>            &lt;/ode&gt;</a:t>
+            </a:r>
+            <a:br/>
+            <a:r>
+              <a:t>          &lt;/friction&gt;</a:t>
+            </a:r>
+            <a:br/>
+            <a:r>
+              <a:t>        &lt;/surface&gt;</a:t>
             </a:r>
           </a:p>
         </p:txBody>
@@ -13625,7 +14883,7 @@
               </a:defRPr>
             </a:pPr>
             <a:r>
-              <a:t>입력 11/11 · 이 파일의 다음 코드 블록이 바로 다음 슬라이드에 이어집니다.</a:t>
+              <a:t>입력 8/11 · 이 파일의 다음 코드 블록이 바로 다음 슬라이드에 이어집니다.</a:t>
             </a:r>
           </a:p>
         </p:txBody>
@@ -13682,7 +14940,7 @@
               </a:defRPr>
             </a:pPr>
             <a:r>
-              <a:t>구현 뒤 실행 1/2: SDF 물리 모델을 검사한다</a:t>
+              <a:t>구현 1/1: 코드 입력 (9/11)</a:t>
             </a:r>
           </a:p>
         </p:txBody>
@@ -13721,7 +14979,7 @@
               </a:defRPr>
             </a:pPr>
             <a:r>
-              <a:t>방금 직접 만든 파일을 실행·검사하며 다음 파일로 넘어갈 기준을 만듭니다.</a:t>
+              <a:t>~/ros2_curri/my_agv_ws/src/agv_description/curriculum_stages/M07/model.sdf</a:t>
             </a:r>
           </a:p>
         </p:txBody>
@@ -13857,7 +15115,7 @@
               </a:defRPr>
             </a:pPr>
             <a:r>
-              <a:t>현재 단계 실행 1/2    |    현재 폴더 ~/ros2_curri/my_agv_ws    |    현재 터미널</a:t>
+              <a:t>현재 단계 파일 1/1 · 입력 9/11    |    현재 폴더 ~/ros2_curri/my_agv_ws    |    현재 터미널</a:t>
             </a:r>
           </a:p>
         </p:txBody>
@@ -13870,64 +15128,25 @@
         </p:nvSpPr>
         <p:spPr>
           <a:xfrm>
-            <a:off x="676656" y="1764792"/>
-            <a:ext cx="1828800" cy="347472"/>
-          </a:xfrm>
-          <a:prstGeom prst="rect">
-            <a:avLst/>
-          </a:prstGeom>
-          <a:noFill/>
-        </p:spPr>
-        <p:txBody>
-          <a:bodyPr wrap="square" lIns="73152" rIns="73152" tIns="36576" bIns="36576">
-            <a:spAutoFit/>
-          </a:bodyPr>
-          <a:lstStyle/>
-          <a:p>
-            <a:pPr algn="l">
-              <a:spcAft>
-                <a:spcPts val="0"/>
-              </a:spcAft>
-              <a:defRPr sz="1800" b="1">
-                <a:solidFill>
-                  <a:srgbClr val="225B9B"/>
-                </a:solidFill>
-                <a:latin typeface="Noto Sans CJK KR"/>
-              </a:defRPr>
-            </a:pPr>
-            <a:r>
-              <a:t>왜 하는가</a:t>
-            </a:r>
-          </a:p>
-        </p:txBody>
-      </p:sp>
-      <p:sp>
-        <p:nvSpPr>
-          <p:cNvPr id="8" name="TextBox 7"/>
-          <p:cNvSpPr txBox="1"/>
-          <p:nvPr/>
-        </p:nvSpPr>
-        <p:spPr>
-          <a:xfrm>
-            <a:off x="676656" y="2103120"/>
-            <a:ext cx="10789920" cy="512064"/>
-          </a:xfrm>
-          <a:prstGeom prst="rect">
-            <a:avLst/>
-          </a:prstGeom>
-          <a:noFill/>
-        </p:spPr>
-        <p:txBody>
-          <a:bodyPr wrap="square" lIns="73152" rIns="73152" tIns="36576" bIns="36576">
-            <a:spAutoFit/>
-          </a:bodyPr>
-          <a:lstStyle/>
-          <a:p>
-            <a:pPr algn="l">
-              <a:spcAft>
-                <a:spcPts val="0"/>
-              </a:spcAft>
-              <a:defRPr sz="2000" b="0">
+            <a:off x="658368" y="1609344"/>
+            <a:ext cx="10972800" cy="384048"/>
+          </a:xfrm>
+          <a:prstGeom prst="rect">
+            <a:avLst/>
+          </a:prstGeom>
+          <a:noFill/>
+        </p:spPr>
+        <p:txBody>
+          <a:bodyPr wrap="square" lIns="73152" rIns="73152" tIns="36576" bIns="36576">
+            <a:spAutoFit/>
+          </a:bodyPr>
+          <a:lstStyle/>
+          <a:p>
+            <a:pPr algn="l">
+              <a:spcAft>
+                <a:spcPts val="0"/>
+              </a:spcAft>
+              <a:defRPr sz="1400" b="1">
                 <a:solidFill>
                   <a:srgbClr val="122C4E"/>
                 </a:solidFill>
@@ -13935,23 +15154,85 @@
               </a:defRPr>
             </a:pPr>
             <a:r>
-              <a:t>M07에는 visual·collision·inertial·friction만 있으며 sensor와 drive plugin은 아직 없다.</a:t>
-            </a:r>
-          </a:p>
-        </p:txBody>
-      </p:sp>
-      <p:sp>
-        <p:nvSpPr>
-          <p:cNvPr id="9" name="Rounded Rectangle 8"/>
+              <a:t>이 블록이 하는 일: 앞에서 만든 구조에 geometry·collision·sensor·joint를 하나씩 붙입니다.</a:t>
+            </a:r>
+          </a:p>
+        </p:txBody>
+      </p:sp>
+      <p:sp>
+        <p:nvSpPr>
+          <p:cNvPr id="8" name="Rectangle 7"/>
           <p:cNvSpPr/>
           <p:nvPr/>
         </p:nvSpPr>
         <p:spPr>
           <a:xfrm>
-            <a:off x="676656" y="2871216"/>
-            <a:ext cx="10835640" cy="2331720"/>
-          </a:xfrm>
-          <a:prstGeom prst="roundRect">
+            <a:off x="658368" y="1956816"/>
+            <a:ext cx="10972800" cy="603504"/>
+          </a:xfrm>
+          <a:prstGeom prst="rect">
+            <a:avLst/>
+          </a:prstGeom>
+          <a:solidFill>
+            <a:srgbClr val="F4F7FB"/>
+          </a:solidFill>
+          <a:ln>
+            <a:solidFill>
+              <a:srgbClr val="F4F7FB"/>
+            </a:solidFill>
+          </a:ln>
+        </p:spPr>
+        <p:style>
+          <a:lnRef idx="1">
+            <a:schemeClr val="accent1"/>
+          </a:lnRef>
+          <a:fillRef idx="3">
+            <a:schemeClr val="accent1"/>
+          </a:fillRef>
+          <a:effectRef idx="2">
+            <a:schemeClr val="accent1"/>
+          </a:effectRef>
+          <a:fontRef idx="minor">
+            <a:schemeClr val="lt1"/>
+          </a:fontRef>
+        </p:style>
+        <p:txBody>
+          <a:bodyPr rtlCol="0" anchor="ctr" wrap="square" lIns="73152" rIns="73152" tIns="36576" bIns="36576"/>
+          <a:lstStyle/>
+          <a:p>
+            <a:pPr algn="l">
+              <a:spcAft>
+                <a:spcPts val="0"/>
+              </a:spcAft>
+              <a:defRPr sz="1300" b="0">
+                <a:solidFill>
+                  <a:srgbClr val="122C4E"/>
+                </a:solidFill>
+                <a:latin typeface="DejaVu Sans Mono"/>
+              </a:defRPr>
+            </a:pPr>
+            <a:r>
+              <a:t>현재 열린 파일: ~/ros2_curri/my_agv_ws/src/agv_description/curriculum_stages/M07/model.sdf</a:t>
+            </a:r>
+            <a:br/>
+            <a:r>
+              <a:t>아래 코드만 입력 → Ctrl+O → Enter로 저장 → 다음 블록으로 이동</a:t>
+            </a:r>
+          </a:p>
+        </p:txBody>
+      </p:sp>
+      <p:sp>
+        <p:nvSpPr>
+          <p:cNvPr id="9" name="Rectangle 8"/>
+          <p:cNvSpPr/>
+          <p:nvPr/>
+        </p:nvSpPr>
+        <p:spPr>
+          <a:xfrm>
+            <a:off x="658368" y="2706624"/>
+            <a:ext cx="10972800" cy="3364992"/>
+          </a:xfrm>
+          <a:prstGeom prst="rect">
             <a:avLst/>
           </a:prstGeom>
           <a:solidFill>
@@ -13978,14 +15259,14 @@
           </a:fontRef>
         </p:style>
         <p:txBody>
-          <a:bodyPr rtlCol="0" anchor="ctr" wrap="square" lIns="73152" rIns="73152" tIns="36576" bIns="36576"/>
-          <a:lstStyle/>
-          <a:p>
-            <a:pPr algn="l">
-              <a:spcAft>
-                <a:spcPts val="0"/>
-              </a:spcAft>
-              <a:defRPr sz="1600" b="0">
+          <a:bodyPr rtlCol="0" anchor="ctr" wrap="square" lIns="164592" rIns="164592" tIns="109728" bIns="36576"/>
+          <a:lstStyle/>
+          <a:p>
+            <a:pPr algn="l">
+              <a:spcAft>
+                <a:spcPts val="0"/>
+              </a:spcAft>
+              <a:defRPr sz="1400" b="0">
                 <a:solidFill>
                   <a:srgbClr val="FFFFFF"/>
                 </a:solidFill>
@@ -13993,11 +15274,51 @@
               </a:defRPr>
             </a:pPr>
             <a:r>
-              <a:t>cd ~/ros2_curri/my_agv_ws</a:t>
+              <a:t>      &lt;/collision&gt;</a:t>
             </a:r>
             <a:br/>
             <a:r>
-              <a:t>gz sdf -k src/agv_description/curriculum_stages/M07/model.sdf</a:t>
+              <a:t>    &lt;/link&gt;</a:t>
+            </a:r>
+            <a:br/>
+            <a:r>
+              <a:t>    &lt;joint name="left_wheel_joint" type="revolute"&gt;</a:t>
+            </a:r>
+            <a:br/>
+            <a:r>
+              <a:t>      &lt;parent&gt;base_link&lt;/parent&gt;</a:t>
+            </a:r>
+            <a:br/>
+            <a:r>
+              <a:t>      &lt;child&gt;left_wheel_link&lt;/child&gt;</a:t>
+            </a:r>
+            <a:br/>
+            <a:r>
+              <a:t>      &lt;axis&gt;</a:t>
+            </a:r>
+            <a:br/>
+            <a:r>
+              <a:t>        &lt;xyz&gt;0 1 0&lt;/xyz&gt;</a:t>
+            </a:r>
+            <a:br/>
+            <a:r>
+              <a:t>        &lt;limit&gt;</a:t>
+            </a:r>
+            <a:br/>
+            <a:r>
+              <a:t>          &lt;lower&gt;-1e16&lt;/lower&gt;</a:t>
+            </a:r>
+            <a:br/>
+            <a:r>
+              <a:t>          &lt;upper&gt;1e16&lt;/upper&gt;</a:t>
+            </a:r>
+            <a:br/>
+            <a:r>
+              <a:t>        &lt;/limit&gt;</a:t>
+            </a:r>
+            <a:br/>
+            <a:r>
+              <a:t>      &lt;/axis&gt;</a:t>
             </a:r>
           </a:p>
         </p:txBody>
@@ -14010,72 +15331,33 @@
         </p:nvSpPr>
         <p:spPr>
           <a:xfrm>
-            <a:off x="768096" y="5468112"/>
-            <a:ext cx="1143000" cy="256032"/>
-          </a:xfrm>
-          <a:prstGeom prst="rect">
-            <a:avLst/>
-          </a:prstGeom>
-          <a:noFill/>
-        </p:spPr>
-        <p:txBody>
-          <a:bodyPr wrap="square" lIns="73152" rIns="73152" tIns="36576" bIns="36576">
-            <a:spAutoFit/>
-          </a:bodyPr>
-          <a:lstStyle/>
-          <a:p>
-            <a:pPr algn="l">
-              <a:spcAft>
-                <a:spcPts val="0"/>
-              </a:spcAft>
-              <a:defRPr sz="1800" b="1">
-                <a:solidFill>
-                  <a:srgbClr val="2A8B5A"/>
-                </a:solidFill>
-                <a:latin typeface="Noto Sans CJK KR"/>
-              </a:defRPr>
-            </a:pPr>
-            <a:r>
-              <a:t>확인</a:t>
-            </a:r>
-          </a:p>
-        </p:txBody>
-      </p:sp>
-      <p:sp>
-        <p:nvSpPr>
-          <p:cNvPr id="11" name="TextBox 10"/>
-          <p:cNvSpPr txBox="1"/>
-          <p:nvPr/>
-        </p:nvSpPr>
-        <p:spPr>
-          <a:xfrm>
-            <a:off x="768096" y="5742432"/>
-            <a:ext cx="10561320" cy="347472"/>
-          </a:xfrm>
-          <a:prstGeom prst="rect">
-            <a:avLst/>
-          </a:prstGeom>
-          <a:noFill/>
-        </p:spPr>
-        <p:txBody>
-          <a:bodyPr wrap="square" lIns="73152" rIns="73152" tIns="36576" bIns="36576">
-            <a:spAutoFit/>
-          </a:bodyPr>
-          <a:lstStyle/>
-          <a:p>
-            <a:pPr algn="l">
-              <a:spcAft>
-                <a:spcPts val="0"/>
-              </a:spcAft>
-              <a:defRPr sz="1800" b="0">
-                <a:solidFill>
-                  <a:srgbClr val="122C4E"/>
-                </a:solidFill>
-                <a:latin typeface="Noto Sans CJK KR"/>
-              </a:defRPr>
-            </a:pPr>
-            <a:r>
-              <a:t>출력에서 topic·frame·파일 이름 또는 성공 메시지를 찾고, 맞지 않으면 다음 파일로 가지 않습니다.</a:t>
+            <a:off x="749808" y="6181344"/>
+            <a:ext cx="10789920" cy="201168"/>
+          </a:xfrm>
+          <a:prstGeom prst="rect">
+            <a:avLst/>
+          </a:prstGeom>
+          <a:noFill/>
+        </p:spPr>
+        <p:txBody>
+          <a:bodyPr wrap="square" lIns="73152" rIns="73152" tIns="36576" bIns="36576">
+            <a:spAutoFit/>
+          </a:bodyPr>
+          <a:lstStyle/>
+          <a:p>
+            <a:pPr algn="l">
+              <a:spcAft>
+                <a:spcPts val="0"/>
+              </a:spcAft>
+              <a:defRPr sz="1000" b="0">
+                <a:solidFill>
+                  <a:srgbClr val="5C6672"/>
+                </a:solidFill>
+                <a:latin typeface="Noto Sans CJK KR"/>
+              </a:defRPr>
+            </a:pPr>
+            <a:r>
+              <a:t>입력 9/11 · 이 파일의 다음 코드 블록이 바로 다음 슬라이드에 이어집니다.</a:t>
             </a:r>
           </a:p>
         </p:txBody>
@@ -14132,7 +15414,7 @@
               </a:defRPr>
             </a:pPr>
             <a:r>
-              <a:t>구현 뒤 실행 2/2: 값을 한 번에 하나씩 바꾼다</a:t>
+              <a:t>구현 1/1: 코드 입력 (10/11)</a:t>
             </a:r>
           </a:p>
         </p:txBody>
@@ -14171,7 +15453,7 @@
               </a:defRPr>
             </a:pPr>
             <a:r>
-              <a:t>방금 직접 만든 파일을 실행·검사하며 다음 파일로 넘어갈 기준을 만듭니다.</a:t>
+              <a:t>~/ros2_curri/my_agv_ws/src/agv_description/curriculum_stages/M07/model.sdf</a:t>
             </a:r>
           </a:p>
         </p:txBody>
@@ -14307,7 +15589,7 @@
               </a:defRPr>
             </a:pPr>
             <a:r>
-              <a:t>현재 단계 실행 2/2    |    현재 폴더 ~/ros2_curri/my_agv_ws    |    현재 터미널</a:t>
+              <a:t>현재 단계 파일 1/1 · 입력 10/11    |    현재 폴더 ~/ros2_curri/my_agv_ws    |    현재 터미널</a:t>
             </a:r>
           </a:p>
         </p:txBody>
@@ -14320,64 +15602,25 @@
         </p:nvSpPr>
         <p:spPr>
           <a:xfrm>
-            <a:off x="676656" y="1764792"/>
-            <a:ext cx="1828800" cy="347472"/>
-          </a:xfrm>
-          <a:prstGeom prst="rect">
-            <a:avLst/>
-          </a:prstGeom>
-          <a:noFill/>
-        </p:spPr>
-        <p:txBody>
-          <a:bodyPr wrap="square" lIns="73152" rIns="73152" tIns="36576" bIns="36576">
-            <a:spAutoFit/>
-          </a:bodyPr>
-          <a:lstStyle/>
-          <a:p>
-            <a:pPr algn="l">
-              <a:spcAft>
-                <a:spcPts val="0"/>
-              </a:spcAft>
-              <a:defRPr sz="1800" b="1">
-                <a:solidFill>
-                  <a:srgbClr val="225B9B"/>
-                </a:solidFill>
-                <a:latin typeface="Noto Sans CJK KR"/>
-              </a:defRPr>
-            </a:pPr>
-            <a:r>
-              <a:t>왜 하는가</a:t>
-            </a:r>
-          </a:p>
-        </p:txBody>
-      </p:sp>
-      <p:sp>
-        <p:nvSpPr>
-          <p:cNvPr id="8" name="TextBox 7"/>
-          <p:cNvSpPr txBox="1"/>
-          <p:nvPr/>
-        </p:nvSpPr>
-        <p:spPr>
-          <a:xfrm>
-            <a:off x="676656" y="2103120"/>
-            <a:ext cx="10789920" cy="512064"/>
-          </a:xfrm>
-          <a:prstGeom prst="rect">
-            <a:avLst/>
-          </a:prstGeom>
-          <a:noFill/>
-        </p:spPr>
-        <p:txBody>
-          <a:bodyPr wrap="square" lIns="73152" rIns="73152" tIns="36576" bIns="36576">
-            <a:spAutoFit/>
-          </a:bodyPr>
-          <a:lstStyle/>
-          <a:p>
-            <a:pPr algn="l">
-              <a:spcAft>
-                <a:spcPts val="0"/>
-              </a:spcAft>
-              <a:defRPr sz="2000" b="0">
+            <a:off x="658368" y="1609344"/>
+            <a:ext cx="10972800" cy="384048"/>
+          </a:xfrm>
+          <a:prstGeom prst="rect">
+            <a:avLst/>
+          </a:prstGeom>
+          <a:noFill/>
+        </p:spPr>
+        <p:txBody>
+          <a:bodyPr wrap="square" lIns="73152" rIns="73152" tIns="36576" bIns="36576">
+            <a:spAutoFit/>
+          </a:bodyPr>
+          <a:lstStyle/>
+          <a:p>
+            <a:pPr algn="l">
+              <a:spcAft>
+                <a:spcPts val="0"/>
+              </a:spcAft>
+              <a:defRPr sz="1400" b="1">
                 <a:solidFill>
                   <a:srgbClr val="122C4E"/>
                 </a:solidFill>
@@ -14385,23 +15628,85 @@
               </a:defRPr>
             </a:pPr>
             <a:r>
-              <a:t>증상 원인을 찾으려면 mass→inertia→collision→friction 순서를 지킨다.</a:t>
-            </a:r>
-          </a:p>
-        </p:txBody>
-      </p:sp>
-      <p:sp>
-        <p:nvSpPr>
-          <p:cNvPr id="9" name="Rounded Rectangle 8"/>
+              <a:t>이 블록이 하는 일: 앞에서 만든 구조에 geometry·collision·sensor·joint를 하나씩 붙입니다.</a:t>
+            </a:r>
+          </a:p>
+        </p:txBody>
+      </p:sp>
+      <p:sp>
+        <p:nvSpPr>
+          <p:cNvPr id="8" name="Rectangle 7"/>
           <p:cNvSpPr/>
           <p:nvPr/>
         </p:nvSpPr>
         <p:spPr>
           <a:xfrm>
-            <a:off x="676656" y="2871216"/>
-            <a:ext cx="10835640" cy="2331720"/>
-          </a:xfrm>
-          <a:prstGeom prst="roundRect">
+            <a:off x="658368" y="1956816"/>
+            <a:ext cx="10972800" cy="603504"/>
+          </a:xfrm>
+          <a:prstGeom prst="rect">
+            <a:avLst/>
+          </a:prstGeom>
+          <a:solidFill>
+            <a:srgbClr val="F4F7FB"/>
+          </a:solidFill>
+          <a:ln>
+            <a:solidFill>
+              <a:srgbClr val="F4F7FB"/>
+            </a:solidFill>
+          </a:ln>
+        </p:spPr>
+        <p:style>
+          <a:lnRef idx="1">
+            <a:schemeClr val="accent1"/>
+          </a:lnRef>
+          <a:fillRef idx="3">
+            <a:schemeClr val="accent1"/>
+          </a:fillRef>
+          <a:effectRef idx="2">
+            <a:schemeClr val="accent1"/>
+          </a:effectRef>
+          <a:fontRef idx="minor">
+            <a:schemeClr val="lt1"/>
+          </a:fontRef>
+        </p:style>
+        <p:txBody>
+          <a:bodyPr rtlCol="0" anchor="ctr" wrap="square" lIns="73152" rIns="73152" tIns="36576" bIns="36576"/>
+          <a:lstStyle/>
+          <a:p>
+            <a:pPr algn="l">
+              <a:spcAft>
+                <a:spcPts val="0"/>
+              </a:spcAft>
+              <a:defRPr sz="1300" b="0">
+                <a:solidFill>
+                  <a:srgbClr val="122C4E"/>
+                </a:solidFill>
+                <a:latin typeface="DejaVu Sans Mono"/>
+              </a:defRPr>
+            </a:pPr>
+            <a:r>
+              <a:t>현재 열린 파일: ~/ros2_curri/my_agv_ws/src/agv_description/curriculum_stages/M07/model.sdf</a:t>
+            </a:r>
+            <a:br/>
+            <a:r>
+              <a:t>아래 코드만 입력 → Ctrl+O → Enter로 저장 → 다음 블록으로 이동</a:t>
+            </a:r>
+          </a:p>
+        </p:txBody>
+      </p:sp>
+      <p:sp>
+        <p:nvSpPr>
+          <p:cNvPr id="9" name="Rectangle 8"/>
+          <p:cNvSpPr/>
+          <p:nvPr/>
+        </p:nvSpPr>
+        <p:spPr>
+          <a:xfrm>
+            <a:off x="658368" y="2706624"/>
+            <a:ext cx="10972800" cy="3364992"/>
+          </a:xfrm>
+          <a:prstGeom prst="rect">
             <a:avLst/>
           </a:prstGeom>
           <a:solidFill>
@@ -14428,14 +15733,14 @@
           </a:fontRef>
         </p:style>
         <p:txBody>
-          <a:bodyPr rtlCol="0" anchor="ctr" wrap="square" lIns="73152" rIns="73152" tIns="36576" bIns="36576"/>
-          <a:lstStyle/>
-          <a:p>
-            <a:pPr algn="l">
-              <a:spcAft>
-                <a:spcPts val="0"/>
-              </a:spcAft>
-              <a:defRPr sz="1600" b="0">
+          <a:bodyPr rtlCol="0" anchor="ctr" wrap="square" lIns="164592" rIns="164592" tIns="109728" bIns="36576"/>
+          <a:lstStyle/>
+          <a:p>
+            <a:pPr algn="l">
+              <a:spcAft>
+                <a:spcPts val="0"/>
+              </a:spcAft>
+              <a:defRPr sz="1400" b="0">
                 <a:solidFill>
                   <a:srgbClr val="FFFFFF"/>
                 </a:solidFill>
@@ -14443,7 +15748,51 @@
               </a:defRPr>
             </a:pPr>
             <a:r>
-              <a:t>rg -n '&lt;mass&gt;|&lt;inertia&gt;|&lt;collision&gt;|&lt;friction&gt;' src/agv_description/curriculum_stages/M07/model.sdf</a:t>
+              <a:t>    &lt;/joint&gt;</a:t>
+            </a:r>
+            <a:br/>
+            <a:r>
+              <a:t>    &lt;joint name="right_wheel_joint" type="revolute"&gt;</a:t>
+            </a:r>
+            <a:br/>
+            <a:r>
+              <a:t>      &lt;parent&gt;base_link&lt;/parent&gt;</a:t>
+            </a:r>
+            <a:br/>
+            <a:r>
+              <a:t>      &lt;child&gt;right_wheel_link&lt;/child&gt;</a:t>
+            </a:r>
+            <a:br/>
+            <a:r>
+              <a:t>      &lt;axis&gt;</a:t>
+            </a:r>
+            <a:br/>
+            <a:r>
+              <a:t>        &lt;xyz&gt;0 1 0&lt;/xyz&gt;</a:t>
+            </a:r>
+            <a:br/>
+            <a:r>
+              <a:t>        &lt;limit&gt;</a:t>
+            </a:r>
+            <a:br/>
+            <a:r>
+              <a:t>          &lt;lower&gt;-1e16&lt;/lower&gt;</a:t>
+            </a:r>
+            <a:br/>
+            <a:r>
+              <a:t>          &lt;upper&gt;1e16&lt;/upper&gt;</a:t>
+            </a:r>
+            <a:br/>
+            <a:r>
+              <a:t>        &lt;/limit&gt;</a:t>
+            </a:r>
+            <a:br/>
+            <a:r>
+              <a:t>      &lt;/axis&gt;</a:t>
+            </a:r>
+            <a:br/>
+            <a:r>
+              <a:t>    &lt;/joint&gt;</a:t>
             </a:r>
           </a:p>
         </p:txBody>
@@ -14456,72 +15805,33 @@
         </p:nvSpPr>
         <p:spPr>
           <a:xfrm>
-            <a:off x="768096" y="5468112"/>
-            <a:ext cx="1143000" cy="256032"/>
-          </a:xfrm>
-          <a:prstGeom prst="rect">
-            <a:avLst/>
-          </a:prstGeom>
-          <a:noFill/>
-        </p:spPr>
-        <p:txBody>
-          <a:bodyPr wrap="square" lIns="73152" rIns="73152" tIns="36576" bIns="36576">
-            <a:spAutoFit/>
-          </a:bodyPr>
-          <a:lstStyle/>
-          <a:p>
-            <a:pPr algn="l">
-              <a:spcAft>
-                <a:spcPts val="0"/>
-              </a:spcAft>
-              <a:defRPr sz="1800" b="1">
-                <a:solidFill>
-                  <a:srgbClr val="2A8B5A"/>
-                </a:solidFill>
-                <a:latin typeface="Noto Sans CJK KR"/>
-              </a:defRPr>
-            </a:pPr>
-            <a:r>
-              <a:t>확인</a:t>
-            </a:r>
-          </a:p>
-        </p:txBody>
-      </p:sp>
-      <p:sp>
-        <p:nvSpPr>
-          <p:cNvPr id="11" name="TextBox 10"/>
-          <p:cNvSpPr txBox="1"/>
-          <p:nvPr/>
-        </p:nvSpPr>
-        <p:spPr>
-          <a:xfrm>
-            <a:off x="768096" y="5742432"/>
-            <a:ext cx="10561320" cy="347472"/>
-          </a:xfrm>
-          <a:prstGeom prst="rect">
-            <a:avLst/>
-          </a:prstGeom>
-          <a:noFill/>
-        </p:spPr>
-        <p:txBody>
-          <a:bodyPr wrap="square" lIns="73152" rIns="73152" tIns="36576" bIns="36576">
-            <a:spAutoFit/>
-          </a:bodyPr>
-          <a:lstStyle/>
-          <a:p>
-            <a:pPr algn="l">
-              <a:spcAft>
-                <a:spcPts val="0"/>
-              </a:spcAft>
-              <a:defRPr sz="1800" b="0">
-                <a:solidFill>
-                  <a:srgbClr val="122C4E"/>
-                </a:solidFill>
-                <a:latin typeface="Noto Sans CJK KR"/>
-              </a:defRPr>
-            </a:pPr>
-            <a:r>
-              <a:t>출력에서 topic·frame·파일 이름 또는 성공 메시지를 찾고, 맞지 않으면 다음 파일로 가지 않습니다.</a:t>
+            <a:off x="749808" y="6181344"/>
+            <a:ext cx="10789920" cy="201168"/>
+          </a:xfrm>
+          <a:prstGeom prst="rect">
+            <a:avLst/>
+          </a:prstGeom>
+          <a:noFill/>
+        </p:spPr>
+        <p:txBody>
+          <a:bodyPr wrap="square" lIns="73152" rIns="73152" tIns="36576" bIns="36576">
+            <a:spAutoFit/>
+          </a:bodyPr>
+          <a:lstStyle/>
+          <a:p>
+            <a:pPr algn="l">
+              <a:spcAft>
+                <a:spcPts val="0"/>
+              </a:spcAft>
+              <a:defRPr sz="1000" b="0">
+                <a:solidFill>
+                  <a:srgbClr val="5C6672"/>
+                </a:solidFill>
+                <a:latin typeface="Noto Sans CJK KR"/>
+              </a:defRPr>
+            </a:pPr>
+            <a:r>
+              <a:t>입력 10/11 · 이 파일의 다음 코드 블록이 바로 다음 슬라이드에 이어집니다.</a:t>
             </a:r>
           </a:p>
         </p:txBody>
@@ -14578,7 +15888,7 @@
               </a:defRPr>
             </a:pPr>
             <a:r>
-              <a:t>build → source → run 순서로 실행한다</a:t>
+              <a:t>구현 1/1: 코드 입력 (11/11)</a:t>
             </a:r>
           </a:p>
         </p:txBody>
@@ -14617,7 +15927,7 @@
               </a:defRPr>
             </a:pPr>
             <a:r>
-              <a:t>새 파일 또는 수정 파일은 build와 source 뒤에만 실행 이름·설정에 반영됩니다.</a:t>
+              <a:t>~/ros2_curri/my_agv_ws/src/agv_description/curriculum_stages/M07/model.sdf</a:t>
             </a:r>
           </a:p>
         </p:txBody>
@@ -14753,23 +16063,124 @@
               </a:defRPr>
             </a:pPr>
             <a:r>
-              <a:t>현재 단계 실행    |    현재 폴더 ~/ros2_curri/my_agv_ws    |    현재 터미널</a:t>
-            </a:r>
-          </a:p>
-        </p:txBody>
-      </p:sp>
-      <p:sp>
-        <p:nvSpPr>
-          <p:cNvPr id="7" name="Rounded Rectangle 6"/>
+              <a:t>현재 단계 파일 1/1 · 입력 11/11    |    현재 폴더 ~/ros2_curri/my_agv_ws    |    현재 터미널</a:t>
+            </a:r>
+          </a:p>
+        </p:txBody>
+      </p:sp>
+      <p:sp>
+        <p:nvSpPr>
+          <p:cNvPr id="7" name="TextBox 6"/>
+          <p:cNvSpPr txBox="1"/>
+          <p:nvPr/>
+        </p:nvSpPr>
+        <p:spPr>
+          <a:xfrm>
+            <a:off x="658368" y="1609344"/>
+            <a:ext cx="10972800" cy="384048"/>
+          </a:xfrm>
+          <a:prstGeom prst="rect">
+            <a:avLst/>
+          </a:prstGeom>
+          <a:noFill/>
+        </p:spPr>
+        <p:txBody>
+          <a:bodyPr wrap="square" lIns="73152" rIns="73152" tIns="36576" bIns="36576">
+            <a:spAutoFit/>
+          </a:bodyPr>
+          <a:lstStyle/>
+          <a:p>
+            <a:pPr algn="l">
+              <a:spcAft>
+                <a:spcPts val="0"/>
+              </a:spcAft>
+              <a:defRPr sz="1400" b="1">
+                <a:solidFill>
+                  <a:srgbClr val="122C4E"/>
+                </a:solidFill>
+                <a:latin typeface="Noto Sans CJK KR"/>
+              </a:defRPr>
+            </a:pPr>
+            <a:r>
+              <a:t>이 블록이 하는 일: 마지막 joint·sensor·plugin과 닫는 태그를 입력해 구조를 완성합니다.</a:t>
+            </a:r>
+          </a:p>
+        </p:txBody>
+      </p:sp>
+      <p:sp>
+        <p:nvSpPr>
+          <p:cNvPr id="8" name="Rectangle 7"/>
           <p:cNvSpPr/>
           <p:nvPr/>
         </p:nvSpPr>
         <p:spPr>
           <a:xfrm>
-            <a:off x="658368" y="1700784"/>
-            <a:ext cx="10972800" cy="3182112"/>
-          </a:xfrm>
-          <a:prstGeom prst="roundRect">
+            <a:off x="658368" y="1956816"/>
+            <a:ext cx="10972800" cy="603504"/>
+          </a:xfrm>
+          <a:prstGeom prst="rect">
+            <a:avLst/>
+          </a:prstGeom>
+          <a:solidFill>
+            <a:srgbClr val="F4F7FB"/>
+          </a:solidFill>
+          <a:ln>
+            <a:solidFill>
+              <a:srgbClr val="F4F7FB"/>
+            </a:solidFill>
+          </a:ln>
+        </p:spPr>
+        <p:style>
+          <a:lnRef idx="1">
+            <a:schemeClr val="accent1"/>
+          </a:lnRef>
+          <a:fillRef idx="3">
+            <a:schemeClr val="accent1"/>
+          </a:fillRef>
+          <a:effectRef idx="2">
+            <a:schemeClr val="accent1"/>
+          </a:effectRef>
+          <a:fontRef idx="minor">
+            <a:schemeClr val="lt1"/>
+          </a:fontRef>
+        </p:style>
+        <p:txBody>
+          <a:bodyPr rtlCol="0" anchor="ctr" wrap="square" lIns="73152" rIns="73152" tIns="36576" bIns="36576"/>
+          <a:lstStyle/>
+          <a:p>
+            <a:pPr algn="l">
+              <a:spcAft>
+                <a:spcPts val="0"/>
+              </a:spcAft>
+              <a:defRPr sz="1300" b="0">
+                <a:solidFill>
+                  <a:srgbClr val="122C4E"/>
+                </a:solidFill>
+                <a:latin typeface="DejaVu Sans Mono"/>
+              </a:defRPr>
+            </a:pPr>
+            <a:r>
+              <a:t>현재 열린 파일: ~/ros2_curri/my_agv_ws/src/agv_description/curriculum_stages/M07/model.sdf</a:t>
+            </a:r>
+            <a:br/>
+            <a:r>
+              <a:t>아래 코드만 입력 → Ctrl+O → Enter로 저장 → 다음 블록으로 이동</a:t>
+            </a:r>
+          </a:p>
+        </p:txBody>
+      </p:sp>
+      <p:sp>
+        <p:nvSpPr>
+          <p:cNvPr id="9" name="Rectangle 8"/>
+          <p:cNvSpPr/>
+          <p:nvPr/>
+        </p:nvSpPr>
+        <p:spPr>
+          <a:xfrm>
+            <a:off x="658368" y="2706624"/>
+            <a:ext cx="10972800" cy="3364992"/>
+          </a:xfrm>
+          <a:prstGeom prst="rect">
             <a:avLst/>
           </a:prstGeom>
           <a:solidFill>
@@ -14796,14 +16207,14 @@
           </a:fontRef>
         </p:style>
         <p:txBody>
-          <a:bodyPr rtlCol="0" anchor="ctr" wrap="square" lIns="73152" rIns="73152" tIns="36576" bIns="36576"/>
-          <a:lstStyle/>
-          <a:p>
-            <a:pPr algn="l">
-              <a:spcAft>
-                <a:spcPts val="0"/>
-              </a:spcAft>
-              <a:defRPr sz="1600" b="0">
+          <a:bodyPr rtlCol="0" anchor="ctr" wrap="square" lIns="164592" rIns="164592" tIns="109728" bIns="36576"/>
+          <a:lstStyle/>
+          <a:p>
+            <a:pPr algn="l">
+              <a:spcAft>
+                <a:spcPts val="0"/>
+              </a:spcAft>
+              <a:defRPr sz="1400" b="0">
                 <a:solidFill>
                   <a:srgbClr val="FFFFFF"/>
                 </a:solidFill>
@@ -14811,89 +16222,50 @@
               </a:defRPr>
             </a:pPr>
             <a:r>
-              <a:t>cd ~/ros2_curri/my_agv_ws</a:t>
+              <a:t>  &lt;/model&gt;</a:t>
             </a:r>
             <a:br/>
             <a:r>
-              <a:t>gz sdf -k src/agv_description/curriculum_stages/M07/model.sdf</a:t>
-            </a:r>
-          </a:p>
-        </p:txBody>
-      </p:sp>
-      <p:sp>
-        <p:nvSpPr>
-          <p:cNvPr id="8" name="TextBox 7"/>
-          <p:cNvSpPr txBox="1"/>
-          <p:nvPr/>
-        </p:nvSpPr>
-        <p:spPr>
-          <a:xfrm>
-            <a:off x="786384" y="5239512"/>
-            <a:ext cx="1261872" cy="237744"/>
-          </a:xfrm>
-          <a:prstGeom prst="rect">
-            <a:avLst/>
-          </a:prstGeom>
-          <a:noFill/>
-        </p:spPr>
-        <p:txBody>
-          <a:bodyPr wrap="square" lIns="73152" rIns="73152" tIns="36576" bIns="36576">
-            <a:spAutoFit/>
-          </a:bodyPr>
-          <a:lstStyle/>
-          <a:p>
-            <a:pPr algn="l">
-              <a:spcAft>
-                <a:spcPts val="0"/>
-              </a:spcAft>
-              <a:defRPr sz="1800" b="1">
-                <a:solidFill>
-                  <a:srgbClr val="2A8B5A"/>
-                </a:solidFill>
-                <a:latin typeface="Noto Sans CJK KR"/>
-              </a:defRPr>
-            </a:pPr>
-            <a:r>
-              <a:t>확인 기준</a:t>
-            </a:r>
-          </a:p>
-        </p:txBody>
-      </p:sp>
-      <p:sp>
-        <p:nvSpPr>
-          <p:cNvPr id="9" name="TextBox 8"/>
-          <p:cNvSpPr txBox="1"/>
-          <p:nvPr/>
-        </p:nvSpPr>
-        <p:spPr>
-          <a:xfrm>
-            <a:off x="786384" y="5532120"/>
-            <a:ext cx="10469880" cy="420624"/>
-          </a:xfrm>
-          <a:prstGeom prst="rect">
-            <a:avLst/>
-          </a:prstGeom>
-          <a:noFill/>
-        </p:spPr>
-        <p:txBody>
-          <a:bodyPr wrap="square" lIns="73152" rIns="73152" tIns="36576" bIns="36576">
-            <a:spAutoFit/>
-          </a:bodyPr>
-          <a:lstStyle/>
-          <a:p>
-            <a:pPr algn="l">
-              <a:spcAft>
-                <a:spcPts val="0"/>
-              </a:spcAft>
-              <a:defRPr sz="1800" b="0">
-                <a:solidFill>
-                  <a:srgbClr val="122C4E"/>
-                </a:solidFill>
-                <a:latin typeface="Noto Sans CJK KR"/>
-              </a:defRPr>
-            </a:pPr>
-            <a:r>
-              <a:t>AGV가 바닥에 안정적으로 놓이고 바퀴 접촉·충돌 파라미터가 모델에 존재한다.</a:t>
+              <a:t>&lt;/sdf&gt;</a:t>
+            </a:r>
+          </a:p>
+        </p:txBody>
+      </p:sp>
+      <p:sp>
+        <p:nvSpPr>
+          <p:cNvPr id="10" name="TextBox 9"/>
+          <p:cNvSpPr txBox="1"/>
+          <p:nvPr/>
+        </p:nvSpPr>
+        <p:spPr>
+          <a:xfrm>
+            <a:off x="749808" y="6181344"/>
+            <a:ext cx="10789920" cy="201168"/>
+          </a:xfrm>
+          <a:prstGeom prst="rect">
+            <a:avLst/>
+          </a:prstGeom>
+          <a:noFill/>
+        </p:spPr>
+        <p:txBody>
+          <a:bodyPr wrap="square" lIns="73152" rIns="73152" tIns="36576" bIns="36576">
+            <a:spAutoFit/>
+          </a:bodyPr>
+          <a:lstStyle/>
+          <a:p>
+            <a:pPr algn="l">
+              <a:spcAft>
+                <a:spcPts val="0"/>
+              </a:spcAft>
+              <a:defRPr sz="1000" b="0">
+                <a:solidFill>
+                  <a:srgbClr val="5C6672"/>
+                </a:solidFill>
+                <a:latin typeface="Noto Sans CJK KR"/>
+              </a:defRPr>
+            </a:pPr>
+            <a:r>
+              <a:t>입력 11/11 · 이 파일의 다음 코드 블록이 바로 다음 슬라이드에 이어집니다.</a:t>
             </a:r>
           </a:p>
         </p:txBody>
@@ -14950,7 +16322,7 @@
               </a:defRPr>
             </a:pPr>
             <a:r>
-              <a:t>정상 결과: 실제 환경에서 확인한 출력</a:t>
+              <a:t>구현 뒤 실행 1/2: SDF 물리 모델을 검사한다</a:t>
             </a:r>
           </a:p>
         </p:txBody>
@@ -14989,7 +16361,7 @@
               </a:defRPr>
             </a:pPr>
             <a:r>
-              <a:t>실제 ROS 2 환경의 파일·패키지·구성 검증 로그</a:t>
+              <a:t>방금 직접 만든 파일을 실행·검사하며 다음 파일로 넘어갈 기준을 만듭니다.</a:t>
             </a:r>
           </a:p>
         </p:txBody>
@@ -15072,30 +16444,64 @@
           </a:p>
         </p:txBody>
       </p:sp>
-      <p:pic>
-        <p:nvPicPr>
-          <p:cNvPr id="6" name="Picture 5" descr="validation_terminal.png"/>
-          <p:cNvPicPr>
-            <a:picLocks noChangeAspect="1"/>
-          </p:cNvPicPr>
-          <p:nvPr/>
-        </p:nvPicPr>
-        <p:blipFill>
-          <a:blip r:embed="rId2"/>
-          <a:stretch>
-            <a:fillRect/>
-          </a:stretch>
-        </p:blipFill>
-        <p:spPr>
-          <a:xfrm>
-            <a:off x="1934865" y="1353312"/>
-            <a:ext cx="8319221" cy="4800600"/>
-          </a:xfrm>
-          <a:prstGeom prst="rect">
-            <a:avLst/>
-          </a:prstGeom>
-        </p:spPr>
-      </p:pic>
+      <p:sp>
+        <p:nvSpPr>
+          <p:cNvPr id="6" name="Rectangle 5"/>
+          <p:cNvSpPr/>
+          <p:nvPr/>
+        </p:nvSpPr>
+        <p:spPr>
+          <a:xfrm>
+            <a:off x="566928" y="1188720"/>
+            <a:ext cx="11064240" cy="347472"/>
+          </a:xfrm>
+          <a:prstGeom prst="rect">
+            <a:avLst/>
+          </a:prstGeom>
+          <a:solidFill>
+            <a:srgbClr val="F4F7FB"/>
+          </a:solidFill>
+          <a:ln>
+            <a:solidFill>
+              <a:srgbClr val="F4F7FB"/>
+            </a:solidFill>
+          </a:ln>
+        </p:spPr>
+        <p:style>
+          <a:lnRef idx="1">
+            <a:schemeClr val="accent1"/>
+          </a:lnRef>
+          <a:fillRef idx="3">
+            <a:schemeClr val="accent1"/>
+          </a:fillRef>
+          <a:effectRef idx="2">
+            <a:schemeClr val="accent1"/>
+          </a:effectRef>
+          <a:fontRef idx="minor">
+            <a:schemeClr val="lt1"/>
+          </a:fontRef>
+        </p:style>
+        <p:txBody>
+          <a:bodyPr rtlCol="0" anchor="ctr" wrap="square" lIns="73152" rIns="73152" tIns="36576" bIns="36576"/>
+          <a:lstStyle/>
+          <a:p>
+            <a:pPr algn="l">
+              <a:spcAft>
+                <a:spcPts val="0"/>
+              </a:spcAft>
+              <a:defRPr sz="1300" b="1">
+                <a:solidFill>
+                  <a:srgbClr val="122C4E"/>
+                </a:solidFill>
+                <a:latin typeface="Noto Sans CJK KR"/>
+              </a:defRPr>
+            </a:pPr>
+            <a:r>
+              <a:t>현재 단계 실행 1/2    |    현재 폴더 ~/ros2_curri/my_agv_ws    |    현재 터미널</a:t>
+            </a:r>
+          </a:p>
+        </p:txBody>
+      </p:sp>
       <p:sp>
         <p:nvSpPr>
           <p:cNvPr id="7" name="TextBox 6"/>
@@ -15104,25 +16510,165 @@
         </p:nvSpPr>
         <p:spPr>
           <a:xfrm>
-            <a:off x="777240" y="6144768"/>
-            <a:ext cx="10607040" cy="310896"/>
-          </a:xfrm>
-          <a:prstGeom prst="rect">
-            <a:avLst/>
-          </a:prstGeom>
-          <a:noFill/>
-        </p:spPr>
-        <p:txBody>
-          <a:bodyPr wrap="square" lIns="73152" rIns="73152" tIns="36576" bIns="36576">
-            <a:spAutoFit/>
-          </a:bodyPr>
-          <a:lstStyle/>
-          <a:p>
-            <a:pPr algn="ctr">
-              <a:spcAft>
-                <a:spcPts val="0"/>
-              </a:spcAft>
-              <a:defRPr sz="1100" b="1">
+            <a:off x="676656" y="1764792"/>
+            <a:ext cx="1828800" cy="347472"/>
+          </a:xfrm>
+          <a:prstGeom prst="rect">
+            <a:avLst/>
+          </a:prstGeom>
+          <a:noFill/>
+        </p:spPr>
+        <p:txBody>
+          <a:bodyPr wrap="square" lIns="73152" rIns="73152" tIns="36576" bIns="36576">
+            <a:spAutoFit/>
+          </a:bodyPr>
+          <a:lstStyle/>
+          <a:p>
+            <a:pPr algn="l">
+              <a:spcAft>
+                <a:spcPts val="0"/>
+              </a:spcAft>
+              <a:defRPr sz="1800" b="1">
+                <a:solidFill>
+                  <a:srgbClr val="225B9B"/>
+                </a:solidFill>
+                <a:latin typeface="Noto Sans CJK KR"/>
+              </a:defRPr>
+            </a:pPr>
+            <a:r>
+              <a:t>왜 하는가</a:t>
+            </a:r>
+          </a:p>
+        </p:txBody>
+      </p:sp>
+      <p:sp>
+        <p:nvSpPr>
+          <p:cNvPr id="8" name="TextBox 7"/>
+          <p:cNvSpPr txBox="1"/>
+          <p:nvPr/>
+        </p:nvSpPr>
+        <p:spPr>
+          <a:xfrm>
+            <a:off x="676656" y="2103120"/>
+            <a:ext cx="10789920" cy="512064"/>
+          </a:xfrm>
+          <a:prstGeom prst="rect">
+            <a:avLst/>
+          </a:prstGeom>
+          <a:noFill/>
+        </p:spPr>
+        <p:txBody>
+          <a:bodyPr wrap="square" lIns="73152" rIns="73152" tIns="36576" bIns="36576">
+            <a:spAutoFit/>
+          </a:bodyPr>
+          <a:lstStyle/>
+          <a:p>
+            <a:pPr algn="l">
+              <a:spcAft>
+                <a:spcPts val="0"/>
+              </a:spcAft>
+              <a:defRPr sz="2000" b="0">
+                <a:solidFill>
+                  <a:srgbClr val="122C4E"/>
+                </a:solidFill>
+                <a:latin typeface="Noto Sans CJK KR"/>
+              </a:defRPr>
+            </a:pPr>
+            <a:r>
+              <a:t>M07에는 visual·collision·inertial·friction만 있으며 sensor와 drive plugin은 아직 없다.</a:t>
+            </a:r>
+          </a:p>
+        </p:txBody>
+      </p:sp>
+      <p:sp>
+        <p:nvSpPr>
+          <p:cNvPr id="9" name="Rounded Rectangle 8"/>
+          <p:cNvSpPr/>
+          <p:nvPr/>
+        </p:nvSpPr>
+        <p:spPr>
+          <a:xfrm>
+            <a:off x="676656" y="2871216"/>
+            <a:ext cx="10835640" cy="2331720"/>
+          </a:xfrm>
+          <a:prstGeom prst="roundRect">
+            <a:avLst/>
+          </a:prstGeom>
+          <a:solidFill>
+            <a:srgbClr val="1D232D"/>
+          </a:solidFill>
+          <a:ln>
+            <a:solidFill>
+              <a:srgbClr val="1D232D"/>
+            </a:solidFill>
+          </a:ln>
+        </p:spPr>
+        <p:style>
+          <a:lnRef idx="1">
+            <a:schemeClr val="accent1"/>
+          </a:lnRef>
+          <a:fillRef idx="3">
+            <a:schemeClr val="accent1"/>
+          </a:fillRef>
+          <a:effectRef idx="2">
+            <a:schemeClr val="accent1"/>
+          </a:effectRef>
+          <a:fontRef idx="minor">
+            <a:schemeClr val="lt1"/>
+          </a:fontRef>
+        </p:style>
+        <p:txBody>
+          <a:bodyPr rtlCol="0" anchor="ctr" wrap="square" lIns="73152" rIns="73152" tIns="36576" bIns="36576"/>
+          <a:lstStyle/>
+          <a:p>
+            <a:pPr algn="l">
+              <a:spcAft>
+                <a:spcPts val="0"/>
+              </a:spcAft>
+              <a:defRPr sz="1600" b="0">
+                <a:solidFill>
+                  <a:srgbClr val="FFFFFF"/>
+                </a:solidFill>
+                <a:latin typeface="DejaVu Sans Mono"/>
+              </a:defRPr>
+            </a:pPr>
+            <a:r>
+              <a:t>cd ~/ros2_curri/my_agv_ws</a:t>
+            </a:r>
+            <a:br/>
+            <a:r>
+              <a:t>gz sdf -k src/agv_description/curriculum_stages/M07/model.sdf</a:t>
+            </a:r>
+          </a:p>
+        </p:txBody>
+      </p:sp>
+      <p:sp>
+        <p:nvSpPr>
+          <p:cNvPr id="10" name="TextBox 9"/>
+          <p:cNvSpPr txBox="1"/>
+          <p:nvPr/>
+        </p:nvSpPr>
+        <p:spPr>
+          <a:xfrm>
+            <a:off x="768096" y="5468112"/>
+            <a:ext cx="1143000" cy="256032"/>
+          </a:xfrm>
+          <a:prstGeom prst="rect">
+            <a:avLst/>
+          </a:prstGeom>
+          <a:noFill/>
+        </p:spPr>
+        <p:txBody>
+          <a:bodyPr wrap="square" lIns="73152" rIns="73152" tIns="36576" bIns="36576">
+            <a:spAutoFit/>
+          </a:bodyPr>
+          <a:lstStyle/>
+          <a:p>
+            <a:pPr algn="l">
+              <a:spcAft>
+                <a:spcPts val="0"/>
+              </a:spcAft>
+              <a:defRPr sz="1800" b="1">
                 <a:solidFill>
                   <a:srgbClr val="2A8B5A"/>
                 </a:solidFill>
@@ -15130,7 +16676,46 @@
               </a:defRPr>
             </a:pPr>
             <a:r>
-              <a:t>화면에서 확인: ① 명령/설정  ② 정상 출력 또는 화면  ③ 다음 검증 명령으로 재확인</a:t>
+              <a:t>확인</a:t>
+            </a:r>
+          </a:p>
+        </p:txBody>
+      </p:sp>
+      <p:sp>
+        <p:nvSpPr>
+          <p:cNvPr id="11" name="TextBox 10"/>
+          <p:cNvSpPr txBox="1"/>
+          <p:nvPr/>
+        </p:nvSpPr>
+        <p:spPr>
+          <a:xfrm>
+            <a:off x="768096" y="5742432"/>
+            <a:ext cx="10561320" cy="347472"/>
+          </a:xfrm>
+          <a:prstGeom prst="rect">
+            <a:avLst/>
+          </a:prstGeom>
+          <a:noFill/>
+        </p:spPr>
+        <p:txBody>
+          <a:bodyPr wrap="square" lIns="73152" rIns="73152" tIns="36576" bIns="36576">
+            <a:spAutoFit/>
+          </a:bodyPr>
+          <a:lstStyle/>
+          <a:p>
+            <a:pPr algn="l">
+              <a:spcAft>
+                <a:spcPts val="0"/>
+              </a:spcAft>
+              <a:defRPr sz="1800" b="0">
+                <a:solidFill>
+                  <a:srgbClr val="122C4E"/>
+                </a:solidFill>
+                <a:latin typeface="Noto Sans CJK KR"/>
+              </a:defRPr>
+            </a:pPr>
+            <a:r>
+              <a:t>출력에서 topic·frame·파일 이름 또는 성공 메시지를 찾고, 맞지 않으면 다음 파일로 가지 않습니다.</a:t>
             </a:r>
           </a:p>
         </p:txBody>
@@ -15187,7 +16772,7 @@
               </a:defRPr>
             </a:pPr>
             <a:r>
-              <a:t>객관적 검증 명령으로 완료를 확인한다</a:t>
+              <a:t>구현 뒤 실행 2/2: 값을 한 번에 하나씩 바꾼다</a:t>
             </a:r>
           </a:p>
         </p:txBody>
@@ -15226,7 +16811,7 @@
               </a:defRPr>
             </a:pPr>
             <a:r>
-              <a:t>화면만 보지 말고 topic·frame·파일·parameter를 다시 확인합니다.</a:t>
+              <a:t>방금 직접 만든 파일을 실행·검사하며 다음 파일로 넘어갈 기준을 만듭니다.</a:t>
             </a:r>
           </a:p>
         </p:txBody>
@@ -15362,21 +16947,99 @@
               </a:defRPr>
             </a:pPr>
             <a:r>
-              <a:t>현재 단계 검증    |    현재 폴더 ~/ros2_curri/my_agv_ws    |    현재 터미널</a:t>
-            </a:r>
-          </a:p>
-        </p:txBody>
-      </p:sp>
-      <p:sp>
-        <p:nvSpPr>
-          <p:cNvPr id="7" name="Rounded Rectangle 6"/>
+              <a:t>현재 단계 실행 2/2    |    현재 폴더 ~/ros2_curri/my_agv_ws    |    현재 터미널</a:t>
+            </a:r>
+          </a:p>
+        </p:txBody>
+      </p:sp>
+      <p:sp>
+        <p:nvSpPr>
+          <p:cNvPr id="7" name="TextBox 6"/>
+          <p:cNvSpPr txBox="1"/>
+          <p:nvPr/>
+        </p:nvSpPr>
+        <p:spPr>
+          <a:xfrm>
+            <a:off x="676656" y="1764792"/>
+            <a:ext cx="1828800" cy="347472"/>
+          </a:xfrm>
+          <a:prstGeom prst="rect">
+            <a:avLst/>
+          </a:prstGeom>
+          <a:noFill/>
+        </p:spPr>
+        <p:txBody>
+          <a:bodyPr wrap="square" lIns="73152" rIns="73152" tIns="36576" bIns="36576">
+            <a:spAutoFit/>
+          </a:bodyPr>
+          <a:lstStyle/>
+          <a:p>
+            <a:pPr algn="l">
+              <a:spcAft>
+                <a:spcPts val="0"/>
+              </a:spcAft>
+              <a:defRPr sz="1800" b="1">
+                <a:solidFill>
+                  <a:srgbClr val="225B9B"/>
+                </a:solidFill>
+                <a:latin typeface="Noto Sans CJK KR"/>
+              </a:defRPr>
+            </a:pPr>
+            <a:r>
+              <a:t>왜 하는가</a:t>
+            </a:r>
+          </a:p>
+        </p:txBody>
+      </p:sp>
+      <p:sp>
+        <p:nvSpPr>
+          <p:cNvPr id="8" name="TextBox 7"/>
+          <p:cNvSpPr txBox="1"/>
+          <p:nvPr/>
+        </p:nvSpPr>
+        <p:spPr>
+          <a:xfrm>
+            <a:off x="676656" y="2103120"/>
+            <a:ext cx="10789920" cy="512064"/>
+          </a:xfrm>
+          <a:prstGeom prst="rect">
+            <a:avLst/>
+          </a:prstGeom>
+          <a:noFill/>
+        </p:spPr>
+        <p:txBody>
+          <a:bodyPr wrap="square" lIns="73152" rIns="73152" tIns="36576" bIns="36576">
+            <a:spAutoFit/>
+          </a:bodyPr>
+          <a:lstStyle/>
+          <a:p>
+            <a:pPr algn="l">
+              <a:spcAft>
+                <a:spcPts val="0"/>
+              </a:spcAft>
+              <a:defRPr sz="2000" b="0">
+                <a:solidFill>
+                  <a:srgbClr val="122C4E"/>
+                </a:solidFill>
+                <a:latin typeface="Noto Sans CJK KR"/>
+              </a:defRPr>
+            </a:pPr>
+            <a:r>
+              <a:t>증상 원인을 찾으려면 mass→inertia→collision→friction 순서를 지킨다.</a:t>
+            </a:r>
+          </a:p>
+        </p:txBody>
+      </p:sp>
+      <p:sp>
+        <p:nvSpPr>
+          <p:cNvPr id="9" name="Rounded Rectangle 8"/>
           <p:cNvSpPr/>
           <p:nvPr/>
         </p:nvSpPr>
         <p:spPr>
           <a:xfrm>
-            <a:off x="658368" y="1755648"/>
-            <a:ext cx="10972800" cy="2148840"/>
+            <a:off x="676656" y="2871216"/>
+            <a:ext cx="10835640" cy="2331720"/>
           </a:xfrm>
           <a:prstGeom prst="roundRect">
             <a:avLst/>
@@ -15420,54 +17083,31 @@
               </a:defRPr>
             </a:pPr>
             <a:r>
-              <a:t>gz sdf -k ~/ros2_curri/my_agv_ws/src/agv_description/curriculum_stages/M07/model.sdf</a:t>
-            </a:r>
-            <a:br/>
-            <a:r>
-              <a:t>rg -n '&lt;sensor|DiffDrive' ~/ros2_curri/my_agv_ws/src/agv_description/curriculum_stages/M07/model.sdf</a:t>
-            </a:r>
-          </a:p>
-        </p:txBody>
-      </p:sp>
-      <p:sp>
-        <p:nvSpPr>
-          <p:cNvPr id="8" name="Rounded Rectangle 7"/>
-          <p:cNvSpPr/>
-          <p:nvPr/>
-        </p:nvSpPr>
-        <p:spPr>
-          <a:xfrm>
-            <a:off x="658368" y="4206240"/>
-            <a:ext cx="10972800" cy="1554480"/>
-          </a:xfrm>
-          <a:prstGeom prst="roundRect">
-            <a:avLst/>
-          </a:prstGeom>
-          <a:solidFill>
-            <a:srgbClr val="F4F7FB"/>
-          </a:solidFill>
-          <a:ln>
-            <a:solidFill>
-              <a:srgbClr val="D1DFD5"/>
-            </a:solidFill>
-          </a:ln>
-        </p:spPr>
-        <p:style>
-          <a:lnRef idx="1">
-            <a:schemeClr val="accent1"/>
-          </a:lnRef>
-          <a:fillRef idx="3">
-            <a:schemeClr val="accent1"/>
-          </a:fillRef>
-          <a:effectRef idx="2">
-            <a:schemeClr val="accent1"/>
-          </a:effectRef>
-          <a:fontRef idx="minor">
-            <a:schemeClr val="lt1"/>
-          </a:fontRef>
-        </p:style>
-        <p:txBody>
-          <a:bodyPr rtlCol="0" anchor="ctr" wrap="square" lIns="73152" rIns="73152" tIns="36576" bIns="36576"/>
+              <a:t>rg -n '&lt;mass&gt;|&lt;inertia&gt;|&lt;collision&gt;|&lt;friction&gt;' src/agv_description/curriculum_stages/M07/model.sdf</a:t>
+            </a:r>
+          </a:p>
+        </p:txBody>
+      </p:sp>
+      <p:sp>
+        <p:nvSpPr>
+          <p:cNvPr id="10" name="TextBox 9"/>
+          <p:cNvSpPr txBox="1"/>
+          <p:nvPr/>
+        </p:nvSpPr>
+        <p:spPr>
+          <a:xfrm>
+            <a:off x="768096" y="5468112"/>
+            <a:ext cx="1143000" cy="256032"/>
+          </a:xfrm>
+          <a:prstGeom prst="rect">
+            <a:avLst/>
+          </a:prstGeom>
+          <a:noFill/>
+        </p:spPr>
+        <p:txBody>
+          <a:bodyPr wrap="square" lIns="73152" rIns="73152" tIns="36576" bIns="36576">
+            <a:spAutoFit/>
+          </a:bodyPr>
           <a:lstStyle/>
           <a:p>
             <a:pPr algn="l">
@@ -15482,50 +17122,38 @@
               </a:defRPr>
             </a:pPr>
             <a:r>
-              <a:t>완료 체크</a:t>
-            </a:r>
-            <a:br/>
-            <a:r>
-              <a:t>□ 명령이 오류 없이 실행된다.</a:t>
-            </a:r>
-            <a:br/>
-            <a:r>
-              <a:t>□ 기대한 파일·topic·frame·parameter 이름이 보인다.</a:t>
-            </a:r>
-            <a:br/>
-            <a:r>
-              <a:t>□ 값의 단위와 방향을 한 문장으로 설명할 수 있다.</a:t>
-            </a:r>
-          </a:p>
-        </p:txBody>
-      </p:sp>
-      <p:sp>
-        <p:nvSpPr>
-          <p:cNvPr id="9" name="TextBox 8"/>
-          <p:cNvSpPr txBox="1"/>
-          <p:nvPr/>
-        </p:nvSpPr>
-        <p:spPr>
-          <a:xfrm>
-            <a:off x="731520" y="5989320"/>
-            <a:ext cx="10789920" cy="237744"/>
-          </a:xfrm>
-          <a:prstGeom prst="rect">
-            <a:avLst/>
-          </a:prstGeom>
-          <a:noFill/>
-        </p:spPr>
-        <p:txBody>
-          <a:bodyPr wrap="square" lIns="73152" rIns="73152" tIns="36576" bIns="36576">
-            <a:spAutoFit/>
-          </a:bodyPr>
-          <a:lstStyle/>
-          <a:p>
-            <a:pPr algn="l">
-              <a:spcAft>
-                <a:spcPts val="0"/>
-              </a:spcAft>
-              <a:defRPr sz="1500" b="1">
+              <a:t>확인</a:t>
+            </a:r>
+          </a:p>
+        </p:txBody>
+      </p:sp>
+      <p:sp>
+        <p:nvSpPr>
+          <p:cNvPr id="11" name="TextBox 10"/>
+          <p:cNvSpPr txBox="1"/>
+          <p:nvPr/>
+        </p:nvSpPr>
+        <p:spPr>
+          <a:xfrm>
+            <a:off x="768096" y="5742432"/>
+            <a:ext cx="10561320" cy="347472"/>
+          </a:xfrm>
+          <a:prstGeom prst="rect">
+            <a:avLst/>
+          </a:prstGeom>
+          <a:noFill/>
+        </p:spPr>
+        <p:txBody>
+          <a:bodyPr wrap="square" lIns="73152" rIns="73152" tIns="36576" bIns="36576">
+            <a:spAutoFit/>
+          </a:bodyPr>
+          <a:lstStyle/>
+          <a:p>
+            <a:pPr algn="l">
+              <a:spcAft>
+                <a:spcPts val="0"/>
+              </a:spcAft>
+              <a:defRPr sz="1800" b="0">
                 <a:solidFill>
                   <a:srgbClr val="122C4E"/>
                 </a:solidFill>
@@ -15533,7 +17161,7 @@
               </a:defRPr>
             </a:pPr>
             <a:r>
-              <a:t>완료 조건: AGV가 바닥에 안정적으로 놓이고 바퀴 접촉·충돌 파라미터가 모델에 존재한다.</a:t>
+              <a:t>출력에서 topic·frame·파일 이름 또는 성공 메시지를 찾고, 맞지 않으면 다음 파일로 가지 않습니다.</a:t>
             </a:r>
           </a:p>
         </p:txBody>
@@ -15590,7 +17218,7 @@
               </a:defRPr>
             </a:pPr>
             <a:r>
-              <a:t>막히면: 증상 → 우선 확인 → 재검증</a:t>
+              <a:t>build → source → run 순서로 실행한다</a:t>
             </a:r>
           </a:p>
         </p:txBody>
@@ -15629,7 +17257,7 @@
               </a:defRPr>
             </a:pPr>
             <a:r>
-              <a:t>오류 메시지를 숨기지 않고 같은 순서로 점검합니다.</a:t>
+              <a:t>새 파일 또는 수정 파일은 build와 source 뒤에만 실행 이름·설정에 반영됩니다.</a:t>
             </a:r>
           </a:p>
         </p:txBody>
@@ -15765,7 +17393,7 @@
               </a:defRPr>
             </a:pPr>
             <a:r>
-              <a:t>현재 단계 오류 대응    |    현재 폴더 ~/ros2_curri/my_agv_ws    |    현재 터미널</a:t>
+              <a:t>현재 단계 실행    |    현재 폴더 ~/ros2_curri/my_agv_ws    |    현재 터미널</a:t>
             </a:r>
           </a:p>
         </p:txBody>
@@ -15778,18 +17406,18 @@
         </p:nvSpPr>
         <p:spPr>
           <a:xfrm>
-            <a:off x="694944" y="1755648"/>
-            <a:ext cx="10972800" cy="1115568"/>
+            <a:off x="658368" y="1700784"/>
+            <a:ext cx="10972800" cy="3182112"/>
           </a:xfrm>
           <a:prstGeom prst="roundRect">
             <a:avLst/>
           </a:prstGeom>
           <a:solidFill>
-            <a:srgbClr val="FFF7F4"/>
+            <a:srgbClr val="1D232D"/>
           </a:solidFill>
           <a:ln>
             <a:solidFill>
-              <a:srgbClr val="EDBEB4"/>
+              <a:srgbClr val="1D232D"/>
             </a:solidFill>
           </a:ln>
         </p:spPr>
@@ -15808,10 +17436,27 @@
           </a:fontRef>
         </p:style>
         <p:txBody>
-          <a:bodyPr rtlCol="0" anchor="ctr"/>
-          <a:lstStyle/>
-          <a:p>
-            <a:pPr algn="ctr"/>
+          <a:bodyPr rtlCol="0" anchor="ctr" wrap="square" lIns="73152" rIns="73152" tIns="36576" bIns="36576"/>
+          <a:lstStyle/>
+          <a:p>
+            <a:pPr algn="l">
+              <a:spcAft>
+                <a:spcPts val="0"/>
+              </a:spcAft>
+              <a:defRPr sz="1600" b="0">
+                <a:solidFill>
+                  <a:srgbClr val="FFFFFF"/>
+                </a:solidFill>
+                <a:latin typeface="DejaVu Sans Mono"/>
+              </a:defRPr>
+            </a:pPr>
+            <a:r>
+              <a:t>cd ~/ros2_curri/my_agv_ws</a:t>
+            </a:r>
+            <a:br/>
+            <a:r>
+              <a:t>gz sdf -k src/agv_description/curriculum_stages/M07/model.sdf</a:t>
+            </a:r>
           </a:p>
         </p:txBody>
       </p:sp>
@@ -15823,8 +17468,8 @@
         </p:nvSpPr>
         <p:spPr>
           <a:xfrm>
-            <a:off x="896112" y="1901952"/>
-            <a:ext cx="2926080" cy="274320"/>
+            <a:off x="786384" y="5239512"/>
+            <a:ext cx="1261872" cy="237744"/>
           </a:xfrm>
           <a:prstGeom prst="rect">
             <a:avLst/>
@@ -15843,13 +17488,13 @@
               </a:spcAft>
               <a:defRPr sz="1800" b="1">
                 <a:solidFill>
-                  <a:srgbClr val="BE3B3B"/>
-                </a:solidFill>
-                <a:latin typeface="Noto Sans CJK KR"/>
-              </a:defRPr>
-            </a:pPr>
-            <a:r>
-              <a:t>증상 1: spawn 직후 떨리거나 날아감</a:t>
+                  <a:srgbClr val="2A8B5A"/>
+                </a:solidFill>
+                <a:latin typeface="Noto Sans CJK KR"/>
+              </a:defRPr>
+            </a:pPr>
+            <a:r>
+              <a:t>확인 기준</a:t>
             </a:r>
           </a:p>
         </p:txBody>
@@ -15862,25 +17507,25 @@
         </p:nvSpPr>
         <p:spPr>
           <a:xfrm>
-            <a:off x="3794760" y="1883664"/>
-            <a:ext cx="7543800" cy="621792"/>
-          </a:xfrm>
-          <a:prstGeom prst="rect">
-            <a:avLst/>
-          </a:prstGeom>
-          <a:noFill/>
-        </p:spPr>
-        <p:txBody>
-          <a:bodyPr wrap="square" lIns="73152" rIns="73152" tIns="36576" bIns="36576">
-            <a:spAutoFit/>
-          </a:bodyPr>
-          <a:lstStyle/>
-          <a:p>
-            <a:pPr algn="l">
-              <a:spcAft>
-                <a:spcPts val="0"/>
-              </a:spcAft>
-              <a:defRPr sz="1600" b="0">
+            <a:off x="786384" y="5532120"/>
+            <a:ext cx="10469880" cy="420624"/>
+          </a:xfrm>
+          <a:prstGeom prst="rect">
+            <a:avLst/>
+          </a:prstGeom>
+          <a:noFill/>
+        </p:spPr>
+        <p:txBody>
+          <a:bodyPr wrap="square" lIns="73152" rIns="73152" tIns="36576" bIns="36576">
+            <a:spAutoFit/>
+          </a:bodyPr>
+          <a:lstStyle/>
+          <a:p>
+            <a:pPr algn="l">
+              <a:spcAft>
+                <a:spcPts val="0"/>
+              </a:spcAft>
+              <a:defRPr sz="1800" b="0">
                 <a:solidFill>
                   <a:srgbClr val="122C4E"/>
                 </a:solidFill>
@@ -15888,177 +17533,7 @@
               </a:defRPr>
             </a:pPr>
             <a:r>
-              <a:t>우선 확인: inertia·collision overlap·너무 작은 mass를 확인한다.</a:t>
-            </a:r>
-            <a:br/>
-            <a:r>
-              <a:t>수정 후: gz sdf -k ~/ros2_curri/my_agv_ws/src/agv_description/curriculum_stages/M07/model.sdf</a:t>
-            </a:r>
-          </a:p>
-        </p:txBody>
-      </p:sp>
-      <p:sp>
-        <p:nvSpPr>
-          <p:cNvPr id="10" name="Rounded Rectangle 9"/>
-          <p:cNvSpPr/>
-          <p:nvPr/>
-        </p:nvSpPr>
-        <p:spPr>
-          <a:xfrm>
-            <a:off x="694944" y="3172968"/>
-            <a:ext cx="10972800" cy="1115568"/>
-          </a:xfrm>
-          <a:prstGeom prst="roundRect">
-            <a:avLst/>
-          </a:prstGeom>
-          <a:solidFill>
-            <a:srgbClr val="FFF7F4"/>
-          </a:solidFill>
-          <a:ln>
-            <a:solidFill>
-              <a:srgbClr val="EDBEB4"/>
-            </a:solidFill>
-          </a:ln>
-        </p:spPr>
-        <p:style>
-          <a:lnRef idx="1">
-            <a:schemeClr val="accent1"/>
-          </a:lnRef>
-          <a:fillRef idx="3">
-            <a:schemeClr val="accent1"/>
-          </a:fillRef>
-          <a:effectRef idx="2">
-            <a:schemeClr val="accent1"/>
-          </a:effectRef>
-          <a:fontRef idx="minor">
-            <a:schemeClr val="lt1"/>
-          </a:fontRef>
-        </p:style>
-        <p:txBody>
-          <a:bodyPr rtlCol="0" anchor="ctr"/>
-          <a:lstStyle/>
-          <a:p>
-            <a:pPr algn="ctr"/>
-          </a:p>
-        </p:txBody>
-      </p:sp>
-      <p:sp>
-        <p:nvSpPr>
-          <p:cNvPr id="11" name="TextBox 10"/>
-          <p:cNvSpPr txBox="1"/>
-          <p:nvPr/>
-        </p:nvSpPr>
-        <p:spPr>
-          <a:xfrm>
-            <a:off x="896112" y="3319272"/>
-            <a:ext cx="2926080" cy="274320"/>
-          </a:xfrm>
-          <a:prstGeom prst="rect">
-            <a:avLst/>
-          </a:prstGeom>
-          <a:noFill/>
-        </p:spPr>
-        <p:txBody>
-          <a:bodyPr wrap="square" lIns="73152" rIns="73152" tIns="36576" bIns="36576">
-            <a:spAutoFit/>
-          </a:bodyPr>
-          <a:lstStyle/>
-          <a:p>
-            <a:pPr algn="l">
-              <a:spcAft>
-                <a:spcPts val="0"/>
-              </a:spcAft>
-              <a:defRPr sz="1800" b="1">
-                <a:solidFill>
-                  <a:srgbClr val="BE3B3B"/>
-                </a:solidFill>
-                <a:latin typeface="Noto Sans CJK KR"/>
-              </a:defRPr>
-            </a:pPr>
-            <a:r>
-              <a:t>증상 2: 바퀴가 헛돎</a:t>
-            </a:r>
-          </a:p>
-        </p:txBody>
-      </p:sp>
-      <p:sp>
-        <p:nvSpPr>
-          <p:cNvPr id="12" name="TextBox 11"/>
-          <p:cNvSpPr txBox="1"/>
-          <p:nvPr/>
-        </p:nvSpPr>
-        <p:spPr>
-          <a:xfrm>
-            <a:off x="3794760" y="3300984"/>
-            <a:ext cx="7543800" cy="621792"/>
-          </a:xfrm>
-          <a:prstGeom prst="rect">
-            <a:avLst/>
-          </a:prstGeom>
-          <a:noFill/>
-        </p:spPr>
-        <p:txBody>
-          <a:bodyPr wrap="square" lIns="73152" rIns="73152" tIns="36576" bIns="36576">
-            <a:spAutoFit/>
-          </a:bodyPr>
-          <a:lstStyle/>
-          <a:p>
-            <a:pPr algn="l">
-              <a:spcAft>
-                <a:spcPts val="0"/>
-              </a:spcAft>
-              <a:defRPr sz="1600" b="0">
-                <a:solidFill>
-                  <a:srgbClr val="122C4E"/>
-                </a:solidFill>
-                <a:latin typeface="Noto Sans CJK KR"/>
-              </a:defRPr>
-            </a:pPr>
-            <a:r>
-              <a:t>우선 확인: friction·contact·joint axis·wheel radius를 확인한다.</a:t>
-            </a:r>
-            <a:br/>
-            <a:r>
-              <a:t>수정 후: gz sdf -k ~/ros2_curri/my_agv_ws/src/agv_description/curriculum_stages/M07/model.sdf</a:t>
-            </a:r>
-          </a:p>
-        </p:txBody>
-      </p:sp>
-      <p:sp>
-        <p:nvSpPr>
-          <p:cNvPr id="13" name="TextBox 12"/>
-          <p:cNvSpPr txBox="1"/>
-          <p:nvPr/>
-        </p:nvSpPr>
-        <p:spPr>
-          <a:xfrm>
-            <a:off x="822960" y="5102352"/>
-            <a:ext cx="10607040" cy="402336"/>
-          </a:xfrm>
-          <a:prstGeom prst="rect">
-            <a:avLst/>
-          </a:prstGeom>
-          <a:noFill/>
-        </p:spPr>
-        <p:txBody>
-          <a:bodyPr wrap="square" lIns="73152" rIns="73152" tIns="36576" bIns="36576">
-            <a:spAutoFit/>
-          </a:bodyPr>
-          <a:lstStyle/>
-          <a:p>
-            <a:pPr algn="ctr">
-              <a:spcAft>
-                <a:spcPts val="0"/>
-              </a:spcAft>
-              <a:defRPr sz="1800" b="1">
-                <a:solidFill>
-                  <a:srgbClr val="DB7E22"/>
-                </a:solidFill>
-                <a:latin typeface="Noto Sans CJK KR"/>
-              </a:defRPr>
-            </a:pPr>
-            <a:r>
-              <a:t>공통 순서: ① 현재 폴더 ② source ③ 파일 경로 ④ 이름/타입/단위 ⑤ build·source 후 재실행</a:t>
+              <a:t>AGV가 바닥에 안정적으로 놓이고 바퀴 접촉·충돌 파라미터가 모델에 존재한다.</a:t>
             </a:r>
           </a:p>
         </p:txBody>
@@ -16115,7 +17590,7 @@
               </a:defRPr>
             </a:pPr>
             <a:r>
-              <a:t>막혔을 때만: Complete를 복구용으로 사용한다</a:t>
+              <a:t>정상 결과: 실제 환경에서 확인한 출력</a:t>
             </a:r>
           </a:p>
         </p:txBody>
@@ -16154,7 +17629,7 @@
               </a:defRPr>
             </a:pPr>
             <a:r>
-              <a:t>이 슬라이드가 먼저가 아닙니다. 직접 입력·실행을 시도한 뒤에만 내 파일과 Complete를 비교합니다.</a:t>
+              <a:t>실제 ROS 2 환경의 파일·패키지·구성 검증 로그</a:t>
             </a:r>
           </a:p>
         </p:txBody>
@@ -16237,64 +17712,30 @@
           </a:p>
         </p:txBody>
       </p:sp>
-      <p:sp>
-        <p:nvSpPr>
-          <p:cNvPr id="6" name="Rectangle 5"/>
-          <p:cNvSpPr/>
-          <p:nvPr/>
-        </p:nvSpPr>
-        <p:spPr>
-          <a:xfrm>
-            <a:off x="566928" y="1188720"/>
-            <a:ext cx="11064240" cy="347472"/>
-          </a:xfrm>
-          <a:prstGeom prst="rect">
-            <a:avLst/>
-          </a:prstGeom>
-          <a:solidFill>
-            <a:srgbClr val="F4F7FB"/>
-          </a:solidFill>
-          <a:ln>
-            <a:solidFill>
-              <a:srgbClr val="F4F7FB"/>
-            </a:solidFill>
-          </a:ln>
-        </p:spPr>
-        <p:style>
-          <a:lnRef idx="1">
-            <a:schemeClr val="accent1"/>
-          </a:lnRef>
-          <a:fillRef idx="3">
-            <a:schemeClr val="accent1"/>
-          </a:fillRef>
-          <a:effectRef idx="2">
-            <a:schemeClr val="accent1"/>
-          </a:effectRef>
-          <a:fontRef idx="minor">
-            <a:schemeClr val="lt1"/>
-          </a:fontRef>
-        </p:style>
-        <p:txBody>
-          <a:bodyPr rtlCol="0" anchor="ctr" wrap="square" lIns="73152" rIns="73152" tIns="36576" bIns="36576"/>
-          <a:lstStyle/>
-          <a:p>
-            <a:pPr algn="l">
-              <a:spcAft>
-                <a:spcPts val="0"/>
-              </a:spcAft>
-              <a:defRPr sz="1300" b="1">
-                <a:solidFill>
-                  <a:srgbClr val="122C4E"/>
-                </a:solidFill>
-                <a:latin typeface="Noto Sans CJK KR"/>
-              </a:defRPr>
-            </a:pPr>
-            <a:r>
-              <a:t>현재 단계 복구용 Complete    |    현재 폴더 ~/ros2_curri    |    현재 터미널</a:t>
-            </a:r>
-          </a:p>
-        </p:txBody>
-      </p:sp>
+      <p:pic>
+        <p:nvPicPr>
+          <p:cNvPr id="6" name="Picture 5" descr="validation_terminal.png"/>
+          <p:cNvPicPr>
+            <a:picLocks noChangeAspect="1"/>
+          </p:cNvPicPr>
+          <p:nvPr/>
+        </p:nvPicPr>
+        <p:blipFill>
+          <a:blip r:embed="rId2"/>
+          <a:stretch>
+            <a:fillRect/>
+          </a:stretch>
+        </p:blipFill>
+        <p:spPr>
+          <a:xfrm>
+            <a:off x="1934865" y="1353312"/>
+            <a:ext cx="8319221" cy="4800600"/>
+          </a:xfrm>
+          <a:prstGeom prst="rect">
+            <a:avLst/>
+          </a:prstGeom>
+        </p:spPr>
+      </p:pic>
       <p:sp>
         <p:nvSpPr>
           <p:cNvPr id="7" name="TextBox 6"/>
@@ -16303,8 +17744,8 @@
         </p:nvSpPr>
         <p:spPr>
           <a:xfrm>
-            <a:off x="713232" y="1664208"/>
-            <a:ext cx="10698480" cy="402336"/>
+            <a:off x="777240" y="6144768"/>
+            <a:ext cx="10607040" cy="310896"/>
           </a:xfrm>
           <a:prstGeom prst="rect">
             <a:avLst/>
@@ -16321,120 +17762,7 @@
               <a:spcAft>
                 <a:spcPts val="0"/>
               </a:spcAft>
-              <a:defRPr sz="1800" b="1">
-                <a:solidFill>
-                  <a:srgbClr val="DB7E22"/>
-                </a:solidFill>
-                <a:latin typeface="Noto Sans CJK KR"/>
-              </a:defRPr>
-            </a:pPr>
-            <a:r>
-              <a:t>권장 순서: ① 내 오류를 확인  ② Complete와 diff  ③ 꼭 필요할 때만 backup 후 복사</a:t>
-            </a:r>
-          </a:p>
-        </p:txBody>
-      </p:sp>
-      <p:sp>
-        <p:nvSpPr>
-          <p:cNvPr id="8" name="Rounded Rectangle 7"/>
-          <p:cNvSpPr/>
-          <p:nvPr/>
-        </p:nvSpPr>
-        <p:spPr>
-          <a:xfrm>
-            <a:off x="676656" y="2423160"/>
-            <a:ext cx="10881360" cy="2606040"/>
-          </a:xfrm>
-          <a:prstGeom prst="roundRect">
-            <a:avLst/>
-          </a:prstGeom>
-          <a:solidFill>
-            <a:srgbClr val="1D232D"/>
-          </a:solidFill>
-          <a:ln>
-            <a:solidFill>
-              <a:srgbClr val="1D232D"/>
-            </a:solidFill>
-          </a:ln>
-        </p:spPr>
-        <p:style>
-          <a:lnRef idx="1">
-            <a:schemeClr val="accent1"/>
-          </a:lnRef>
-          <a:fillRef idx="3">
-            <a:schemeClr val="accent1"/>
-          </a:fillRef>
-          <a:effectRef idx="2">
-            <a:schemeClr val="accent1"/>
-          </a:effectRef>
-          <a:fontRef idx="minor">
-            <a:schemeClr val="lt1"/>
-          </a:fontRef>
-        </p:style>
-        <p:txBody>
-          <a:bodyPr rtlCol="0" anchor="ctr" wrap="square" lIns="73152" rIns="73152" tIns="36576" bIns="36576"/>
-          <a:lstStyle/>
-          <a:p>
-            <a:pPr algn="l">
-              <a:spcAft>
-                <a:spcPts val="0"/>
-              </a:spcAft>
-              <a:defRPr sz="1400" b="0">
-                <a:solidFill>
-                  <a:srgbClr val="FFFFFF"/>
-                </a:solidFill>
-                <a:latin typeface="DejaVu Sans Mono"/>
-              </a:defRPr>
-            </a:pPr>
-            <a:r>
-              <a:t>cd ~/ros2_curri</a:t>
-            </a:r>
-            <a:br/>
-            <a:r>
-              <a:t>diff -ru my_agv_ws/src blocks/B_robot_build/M07_physics_modeling/complete/agv_ws/src || true</a:t>
-            </a:r>
-            <a:br/>
-            <a:r>
-              <a:t>cp -a my_agv_ws/src my_agv_ws/src_before_M07</a:t>
-            </a:r>
-            <a:br/>
-            <a:r>
-              <a:t>cp -a blocks/B_robot_build/M07_physics_modeling/complete/agv_ws/src/. my_agv_ws/src/</a:t>
-            </a:r>
-            <a:br/>
-            <a:r>
-              <a:t>cd my_agv_ws &amp;&amp; colcon build --symlink-install &amp;&amp; source install/setup.bash</a:t>
-            </a:r>
-          </a:p>
-        </p:txBody>
-      </p:sp>
-      <p:sp>
-        <p:nvSpPr>
-          <p:cNvPr id="9" name="TextBox 8"/>
-          <p:cNvSpPr txBox="1"/>
-          <p:nvPr/>
-        </p:nvSpPr>
-        <p:spPr>
-          <a:xfrm>
-            <a:off x="786384" y="5413248"/>
-            <a:ext cx="10424160" cy="429768"/>
-          </a:xfrm>
-          <a:prstGeom prst="rect">
-            <a:avLst/>
-          </a:prstGeom>
-          <a:noFill/>
-        </p:spPr>
-        <p:txBody>
-          <a:bodyPr wrap="square" lIns="73152" rIns="73152" tIns="36576" bIns="36576">
-            <a:spAutoFit/>
-          </a:bodyPr>
-          <a:lstStyle/>
-          <a:p>
-            <a:pPr algn="ctr">
-              <a:spcAft>
-                <a:spcPts val="0"/>
-              </a:spcAft>
-              <a:defRPr sz="1700" b="1">
+              <a:defRPr sz="1100" b="1">
                 <a:solidFill>
                   <a:srgbClr val="2A8B5A"/>
                 </a:solidFill>
@@ -16442,7 +17770,7 @@
               </a:defRPr>
             </a:pPr>
             <a:r>
-              <a:t>복구 뒤에는 끝내지 말고, 내 파일과 Complete의 차이를 한 줄씩 설명한 뒤 다시 직접 입력해 봅니다.</a:t>
+              <a:t>화면에서 확인: ① 명령/설정  ② 정상 출력 또는 화면  ③ 다음 검증 명령으로 재확인</a:t>
             </a:r>
           </a:p>
         </p:txBody>
@@ -16918,7 +18246,7 @@
               </a:defRPr>
             </a:pPr>
             <a:r>
-              <a:t>미니 실습: 값 하나를 바꾸고 결과를 비교한다</a:t>
+              <a:t>객관적 검증 명령으로 완료를 확인한다</a:t>
             </a:r>
           </a:p>
         </p:txBody>
@@ -16957,7 +18285,7 @@
               </a:defRPr>
             </a:pPr>
             <a:r>
-              <a:t>정상 결과를 만든 뒤에는 한 번에 하나의 값만 바꿉니다.</a:t>
+              <a:t>화면만 보지 말고 topic·frame·파일·parameter를 다시 확인합니다.</a:t>
             </a:r>
           </a:p>
         </p:txBody>
@@ -17093,7 +18421,7 @@
               </a:defRPr>
             </a:pPr>
             <a:r>
-              <a:t>현재 단계 미니 실습    |    현재 폴더 ~/ros2_curri/my_agv_ws    |    현재 터미널</a:t>
+              <a:t>현재 단계 검증    |    현재 폴더 ~/ros2_curri/my_agv_ws    |    현재 터미널</a:t>
             </a:r>
           </a:p>
         </p:txBody>
@@ -17106,18 +18434,18 @@
         </p:nvSpPr>
         <p:spPr>
           <a:xfrm>
-            <a:off x="749808" y="1874519"/>
-            <a:ext cx="10652760" cy="1993392"/>
+            <a:off x="658368" y="1755648"/>
+            <a:ext cx="10972800" cy="2148840"/>
           </a:xfrm>
           <a:prstGeom prst="roundRect">
             <a:avLst/>
           </a:prstGeom>
           <a:solidFill>
-            <a:srgbClr val="FFF8EB"/>
+            <a:srgbClr val="1D232D"/>
           </a:solidFill>
           <a:ln>
             <a:solidFill>
-              <a:srgbClr val="ECC680"/>
+              <a:srgbClr val="1D232D"/>
             </a:solidFill>
           </a:ln>
         </p:spPr>
@@ -17139,11 +18467,124 @@
           <a:bodyPr rtlCol="0" anchor="ctr" wrap="square" lIns="73152" rIns="73152" tIns="36576" bIns="36576"/>
           <a:lstStyle/>
           <a:p>
-            <a:pPr algn="ctr">
-              <a:spcAft>
-                <a:spcPts val="0"/>
-              </a:spcAft>
-              <a:defRPr sz="2300" b="1">
+            <a:pPr algn="l">
+              <a:spcAft>
+                <a:spcPts val="0"/>
+              </a:spcAft>
+              <a:defRPr sz="1600" b="0">
+                <a:solidFill>
+                  <a:srgbClr val="FFFFFF"/>
+                </a:solidFill>
+                <a:latin typeface="DejaVu Sans Mono"/>
+              </a:defRPr>
+            </a:pPr>
+            <a:r>
+              <a:t>gz sdf -k ~/ros2_curri/my_agv_ws/src/agv_description/curriculum_stages/M07/model.sdf</a:t>
+            </a:r>
+            <a:br/>
+            <a:r>
+              <a:t>rg -n '&lt;sensor|DiffDrive' ~/ros2_curri/my_agv_ws/src/agv_description/curriculum_stages/M07/model.sdf</a:t>
+            </a:r>
+          </a:p>
+        </p:txBody>
+      </p:sp>
+      <p:sp>
+        <p:nvSpPr>
+          <p:cNvPr id="8" name="Rounded Rectangle 7"/>
+          <p:cNvSpPr/>
+          <p:nvPr/>
+        </p:nvSpPr>
+        <p:spPr>
+          <a:xfrm>
+            <a:off x="658368" y="4206240"/>
+            <a:ext cx="10972800" cy="1554480"/>
+          </a:xfrm>
+          <a:prstGeom prst="roundRect">
+            <a:avLst/>
+          </a:prstGeom>
+          <a:solidFill>
+            <a:srgbClr val="F4F7FB"/>
+          </a:solidFill>
+          <a:ln>
+            <a:solidFill>
+              <a:srgbClr val="D1DFD5"/>
+            </a:solidFill>
+          </a:ln>
+        </p:spPr>
+        <p:style>
+          <a:lnRef idx="1">
+            <a:schemeClr val="accent1"/>
+          </a:lnRef>
+          <a:fillRef idx="3">
+            <a:schemeClr val="accent1"/>
+          </a:fillRef>
+          <a:effectRef idx="2">
+            <a:schemeClr val="accent1"/>
+          </a:effectRef>
+          <a:fontRef idx="minor">
+            <a:schemeClr val="lt1"/>
+          </a:fontRef>
+        </p:style>
+        <p:txBody>
+          <a:bodyPr rtlCol="0" anchor="ctr" wrap="square" lIns="73152" rIns="73152" tIns="36576" bIns="36576"/>
+          <a:lstStyle/>
+          <a:p>
+            <a:pPr algn="l">
+              <a:spcAft>
+                <a:spcPts val="0"/>
+              </a:spcAft>
+              <a:defRPr sz="1800" b="1">
+                <a:solidFill>
+                  <a:srgbClr val="2A8B5A"/>
+                </a:solidFill>
+                <a:latin typeface="Noto Sans CJK KR"/>
+              </a:defRPr>
+            </a:pPr>
+            <a:r>
+              <a:t>완료 체크</a:t>
+            </a:r>
+            <a:br/>
+            <a:r>
+              <a:t>□ 명령이 오류 없이 실행된다.</a:t>
+            </a:r>
+            <a:br/>
+            <a:r>
+              <a:t>□ 기대한 파일·topic·frame·parameter 이름이 보인다.</a:t>
+            </a:r>
+            <a:br/>
+            <a:r>
+              <a:t>□ 값의 단위와 방향을 한 문장으로 설명할 수 있다.</a:t>
+            </a:r>
+          </a:p>
+        </p:txBody>
+      </p:sp>
+      <p:sp>
+        <p:nvSpPr>
+          <p:cNvPr id="9" name="TextBox 8"/>
+          <p:cNvSpPr txBox="1"/>
+          <p:nvPr/>
+        </p:nvSpPr>
+        <p:spPr>
+          <a:xfrm>
+            <a:off x="731520" y="5989320"/>
+            <a:ext cx="10789920" cy="237744"/>
+          </a:xfrm>
+          <a:prstGeom prst="rect">
+            <a:avLst/>
+          </a:prstGeom>
+          <a:noFill/>
+        </p:spPr>
+        <p:txBody>
+          <a:bodyPr wrap="square" lIns="73152" rIns="73152" tIns="36576" bIns="36576">
+            <a:spAutoFit/>
+          </a:bodyPr>
+          <a:lstStyle/>
+          <a:p>
+            <a:pPr algn="l">
+              <a:spcAft>
+                <a:spcPts val="0"/>
+              </a:spcAft>
+              <a:defRPr sz="1500" b="1">
                 <a:solidFill>
                   <a:srgbClr val="122C4E"/>
                 </a:solidFill>
@@ -17151,46 +18592,7 @@
               </a:defRPr>
             </a:pPr>
             <a:r>
-              <a:t>wheel friction mu를 1.0에서 0.3으로만 바꾼 뒤 직진 시 미끄럼 변화를 기록한다.</a:t>
-            </a:r>
-          </a:p>
-        </p:txBody>
-      </p:sp>
-      <p:sp>
-        <p:nvSpPr>
-          <p:cNvPr id="8" name="TextBox 7"/>
-          <p:cNvSpPr txBox="1"/>
-          <p:nvPr/>
-        </p:nvSpPr>
-        <p:spPr>
-          <a:xfrm>
-            <a:off x="877824" y="4590288"/>
-            <a:ext cx="10241280" cy="594360"/>
-          </a:xfrm>
-          <a:prstGeom prst="rect">
-            <a:avLst/>
-          </a:prstGeom>
-          <a:noFill/>
-        </p:spPr>
-        <p:txBody>
-          <a:bodyPr wrap="square" lIns="73152" rIns="73152" tIns="36576" bIns="36576">
-            <a:spAutoFit/>
-          </a:bodyPr>
-          <a:lstStyle/>
-          <a:p>
-            <a:pPr algn="ctr">
-              <a:spcAft>
-                <a:spcPts val="0"/>
-              </a:spcAft>
-              <a:defRPr sz="1900" b="1">
-                <a:solidFill>
-                  <a:srgbClr val="DB7E22"/>
-                </a:solidFill>
-                <a:latin typeface="Noto Sans CJK KR"/>
-              </a:defRPr>
-            </a:pPr>
-            <a:r>
-              <a:t>기록할 것: 바꾼 값(단위) · 기대한 변화 · 실제 출력/화면 · 원래 값으로 되돌린 결과</a:t>
+              <a:t>완료 조건: AGV가 바닥에 안정적으로 놓이고 바퀴 접촉·충돌 파라미터가 모델에 존재한다.</a:t>
             </a:r>
           </a:p>
         </p:txBody>
@@ -17247,7 +18649,7 @@
               </a:defRPr>
             </a:pPr>
             <a:r>
-              <a:t>내 프로젝트 체크포인트를 저장하고 다음 모듈로 넘긴다</a:t>
+              <a:t>막히면: 증상 → 우선 확인 → 재검증</a:t>
             </a:r>
           </a:p>
         </p:txBody>
@@ -17286,7 +18688,7 @@
               </a:defRPr>
             </a:pPr>
             <a:r>
-              <a:t>Complete는 복구용 비교 기준이고, 다음 단계는 내가 직접 만든 workspace에서 계속합니다.</a:t>
+              <a:t>오류 메시지를 숨기지 않고 같은 순서로 점검합니다.</a:t>
             </a:r>
           </a:p>
         </p:txBody>
@@ -17422,7 +18824,7 @@
               </a:defRPr>
             </a:pPr>
             <a:r>
-              <a:t>현재 단계 체크포인트    |    현재 폴더 ~/ros2_curri/my_agv_ws    |    현재 터미널</a:t>
+              <a:t>현재 단계 오류 대응    |    현재 폴더 ~/ros2_curri/my_agv_ws    |    현재 터미널</a:t>
             </a:r>
           </a:p>
         </p:txBody>
@@ -17435,18 +18837,18 @@
         </p:nvSpPr>
         <p:spPr>
           <a:xfrm>
-            <a:off x="685800" y="1737360"/>
-            <a:ext cx="10972800" cy="3611880"/>
+            <a:off x="694944" y="1755648"/>
+            <a:ext cx="10972800" cy="1115568"/>
           </a:xfrm>
           <a:prstGeom prst="roundRect">
             <a:avLst/>
           </a:prstGeom>
           <a:solidFill>
-            <a:srgbClr val="F4F7FB"/>
+            <a:srgbClr val="FFF7F4"/>
           </a:solidFill>
           <a:ln>
             <a:solidFill>
-              <a:srgbClr val="D2DCE8"/>
+              <a:srgbClr val="EDBEB4"/>
             </a:solidFill>
           </a:ln>
         </p:spPr>
@@ -17480,25 +18882,64 @@
         </p:nvSpPr>
         <p:spPr>
           <a:xfrm>
-            <a:off x="896112" y="1993392"/>
-            <a:ext cx="10332720" cy="2971800"/>
-          </a:xfrm>
-          <a:prstGeom prst="rect">
-            <a:avLst/>
-          </a:prstGeom>
-          <a:noFill/>
-        </p:spPr>
-        <p:txBody>
-          <a:bodyPr wrap="square" lIns="109728" rIns="109728">
-            <a:spAutoFit/>
-          </a:bodyPr>
-          <a:lstStyle/>
-          <a:p>
-            <a:pPr>
-              <a:spcAft>
-                <a:spcPts val="800"/>
-              </a:spcAft>
-              <a:defRPr sz="1800">
+            <a:off x="896112" y="1901952"/>
+            <a:ext cx="2926080" cy="274320"/>
+          </a:xfrm>
+          <a:prstGeom prst="rect">
+            <a:avLst/>
+          </a:prstGeom>
+          <a:noFill/>
+        </p:spPr>
+        <p:txBody>
+          <a:bodyPr wrap="square" lIns="73152" rIns="73152" tIns="36576" bIns="36576">
+            <a:spAutoFit/>
+          </a:bodyPr>
+          <a:lstStyle/>
+          <a:p>
+            <a:pPr algn="l">
+              <a:spcAft>
+                <a:spcPts val="0"/>
+              </a:spcAft>
+              <a:defRPr sz="1800" b="1">
+                <a:solidFill>
+                  <a:srgbClr val="BE3B3B"/>
+                </a:solidFill>
+                <a:latin typeface="Noto Sans CJK KR"/>
+              </a:defRPr>
+            </a:pPr>
+            <a:r>
+              <a:t>증상 1: spawn 직후 떨리거나 날아감</a:t>
+            </a:r>
+          </a:p>
+        </p:txBody>
+      </p:sp>
+      <p:sp>
+        <p:nvSpPr>
+          <p:cNvPr id="9" name="TextBox 8"/>
+          <p:cNvSpPr txBox="1"/>
+          <p:nvPr/>
+        </p:nvSpPr>
+        <p:spPr>
+          <a:xfrm>
+            <a:off x="3794760" y="1883664"/>
+            <a:ext cx="7543800" cy="621792"/>
+          </a:xfrm>
+          <a:prstGeom prst="rect">
+            <a:avLst/>
+          </a:prstGeom>
+          <a:noFill/>
+        </p:spPr>
+        <p:txBody>
+          <a:bodyPr wrap="square" lIns="73152" rIns="73152" tIns="36576" bIns="36576">
+            <a:spAutoFit/>
+          </a:bodyPr>
+          <a:lstStyle/>
+          <a:p>
+            <a:pPr algn="l">
+              <a:spcAft>
+                <a:spcPts val="0"/>
+              </a:spcAft>
+              <a:defRPr sz="1600" b="0">
                 <a:solidFill>
                   <a:srgbClr val="122C4E"/>
                 </a:solidFill>
@@ -17506,15 +18947,126 @@
               </a:defRPr>
             </a:pPr>
             <a:r>
-              <a:t>• □ 완료 화면: AGV가 바닥에 안정적으로 놓이고 바퀴 접촉·충돌 파라미터가 모델에 존재한다.</a:t>
-            </a:r>
-          </a:p>
-          <a:p>
-            <a:pPr>
-              <a:spcAft>
-                <a:spcPts val="800"/>
-              </a:spcAft>
-              <a:defRPr sz="1800">
+              <a:t>우선 확인: inertia·collision overlap·너무 작은 mass를 확인한다.</a:t>
+            </a:r>
+            <a:br/>
+            <a:r>
+              <a:t>수정 후: gz sdf -k ~/ros2_curri/my_agv_ws/src/agv_description/curriculum_stages/M07/model.sdf</a:t>
+            </a:r>
+          </a:p>
+        </p:txBody>
+      </p:sp>
+      <p:sp>
+        <p:nvSpPr>
+          <p:cNvPr id="10" name="Rounded Rectangle 9"/>
+          <p:cNvSpPr/>
+          <p:nvPr/>
+        </p:nvSpPr>
+        <p:spPr>
+          <a:xfrm>
+            <a:off x="694944" y="3172968"/>
+            <a:ext cx="10972800" cy="1115568"/>
+          </a:xfrm>
+          <a:prstGeom prst="roundRect">
+            <a:avLst/>
+          </a:prstGeom>
+          <a:solidFill>
+            <a:srgbClr val="FFF7F4"/>
+          </a:solidFill>
+          <a:ln>
+            <a:solidFill>
+              <a:srgbClr val="EDBEB4"/>
+            </a:solidFill>
+          </a:ln>
+        </p:spPr>
+        <p:style>
+          <a:lnRef idx="1">
+            <a:schemeClr val="accent1"/>
+          </a:lnRef>
+          <a:fillRef idx="3">
+            <a:schemeClr val="accent1"/>
+          </a:fillRef>
+          <a:effectRef idx="2">
+            <a:schemeClr val="accent1"/>
+          </a:effectRef>
+          <a:fontRef idx="minor">
+            <a:schemeClr val="lt1"/>
+          </a:fontRef>
+        </p:style>
+        <p:txBody>
+          <a:bodyPr rtlCol="0" anchor="ctr"/>
+          <a:lstStyle/>
+          <a:p>
+            <a:pPr algn="ctr"/>
+          </a:p>
+        </p:txBody>
+      </p:sp>
+      <p:sp>
+        <p:nvSpPr>
+          <p:cNvPr id="11" name="TextBox 10"/>
+          <p:cNvSpPr txBox="1"/>
+          <p:nvPr/>
+        </p:nvSpPr>
+        <p:spPr>
+          <a:xfrm>
+            <a:off x="896112" y="3319272"/>
+            <a:ext cx="2926080" cy="274320"/>
+          </a:xfrm>
+          <a:prstGeom prst="rect">
+            <a:avLst/>
+          </a:prstGeom>
+          <a:noFill/>
+        </p:spPr>
+        <p:txBody>
+          <a:bodyPr wrap="square" lIns="73152" rIns="73152" tIns="36576" bIns="36576">
+            <a:spAutoFit/>
+          </a:bodyPr>
+          <a:lstStyle/>
+          <a:p>
+            <a:pPr algn="l">
+              <a:spcAft>
+                <a:spcPts val="0"/>
+              </a:spcAft>
+              <a:defRPr sz="1800" b="1">
+                <a:solidFill>
+                  <a:srgbClr val="BE3B3B"/>
+                </a:solidFill>
+                <a:latin typeface="Noto Sans CJK KR"/>
+              </a:defRPr>
+            </a:pPr>
+            <a:r>
+              <a:t>증상 2: 바퀴가 헛돎</a:t>
+            </a:r>
+          </a:p>
+        </p:txBody>
+      </p:sp>
+      <p:sp>
+        <p:nvSpPr>
+          <p:cNvPr id="12" name="TextBox 11"/>
+          <p:cNvSpPr txBox="1"/>
+          <p:nvPr/>
+        </p:nvSpPr>
+        <p:spPr>
+          <a:xfrm>
+            <a:off x="3794760" y="3300984"/>
+            <a:ext cx="7543800" cy="621792"/>
+          </a:xfrm>
+          <a:prstGeom prst="rect">
+            <a:avLst/>
+          </a:prstGeom>
+          <a:noFill/>
+        </p:spPr>
+        <p:txBody>
+          <a:bodyPr wrap="square" lIns="73152" rIns="73152" tIns="36576" bIns="36576">
+            <a:spAutoFit/>
+          </a:bodyPr>
+          <a:lstStyle/>
+          <a:p>
+            <a:pPr algn="l">
+              <a:spcAft>
+                <a:spcPts val="0"/>
+              </a:spcAft>
+              <a:defRPr sz="1600" b="0">
                 <a:solidFill>
                   <a:srgbClr val="122C4E"/>
                 </a:solidFill>
@@ -17522,69 +19074,25 @@
               </a:defRPr>
             </a:pPr>
             <a:r>
-              <a:t>• □ 막혔을 때 비교할 Complete: blocks/B_robot_build/M07_physics_modeling/complete/</a:t>
-            </a:r>
-          </a:p>
-          <a:p>
-            <a:pPr>
-              <a:spcAft>
-                <a:spcPts val="800"/>
-              </a:spcAft>
-              <a:defRPr sz="1800">
-                <a:solidFill>
-                  <a:srgbClr val="122C4E"/>
-                </a:solidFill>
-                <a:latin typeface="Noto Sans CJK KR"/>
-              </a:defRPr>
-            </a:pPr>
-            <a:r>
-              <a:t>• □ 정상 로그·캡처: logs/validation.log, screenshots/validation_terminal.png</a:t>
-            </a:r>
-          </a:p>
-          <a:p>
-            <a:pPr>
-              <a:spcAft>
-                <a:spcPts val="800"/>
-              </a:spcAft>
-              <a:defRPr sz="1800">
-                <a:solidFill>
-                  <a:srgbClr val="122C4E"/>
-                </a:solidFill>
-                <a:latin typeface="Noto Sans CJK KR"/>
-              </a:defRPr>
-            </a:pPr>
-            <a:r>
-              <a:t>• □ 버전 식별: CHECKSUM_or_TAG.txt의 SHA-256 manifest</a:t>
-            </a:r>
-          </a:p>
-          <a:p>
-            <a:pPr>
-              <a:spcAft>
-                <a:spcPts val="800"/>
-              </a:spcAft>
-              <a:defRPr sz="1800">
-                <a:solidFill>
-                  <a:srgbClr val="122C4E"/>
-                </a:solidFill>
-                <a:latin typeface="Noto Sans CJK KR"/>
-              </a:defRPr>
-            </a:pPr>
-            <a:r>
-              <a:t>• □ 다음 시작 조건: M08 World/Spawn</a:t>
-            </a:r>
-          </a:p>
-        </p:txBody>
-      </p:sp>
-      <p:sp>
-        <p:nvSpPr>
-          <p:cNvPr id="9" name="TextBox 8"/>
-          <p:cNvSpPr txBox="1"/>
-          <p:nvPr/>
-        </p:nvSpPr>
-        <p:spPr>
-          <a:xfrm>
-            <a:off x="868680" y="5596128"/>
-            <a:ext cx="10515600" cy="338328"/>
+              <a:t>우선 확인: friction·contact·joint axis·wheel radius를 확인한다.</a:t>
+            </a:r>
+            <a:br/>
+            <a:r>
+              <a:t>수정 후: gz sdf -k ~/ros2_curri/my_agv_ws/src/agv_description/curriculum_stages/M07/model.sdf</a:t>
+            </a:r>
+          </a:p>
+        </p:txBody>
+      </p:sp>
+      <p:sp>
+        <p:nvSpPr>
+          <p:cNvPr id="13" name="TextBox 12"/>
+          <p:cNvSpPr txBox="1"/>
+          <p:nvPr/>
+        </p:nvSpPr>
+        <p:spPr>
+          <a:xfrm>
+            <a:off x="822960" y="5102352"/>
+            <a:ext cx="10607040" cy="402336"/>
           </a:xfrm>
           <a:prstGeom prst="rect">
             <a:avLst/>
@@ -17601,15 +19109,15 @@
               <a:spcAft>
                 <a:spcPts val="0"/>
               </a:spcAft>
-              <a:defRPr sz="1700" b="1">
-                <a:solidFill>
-                  <a:srgbClr val="2A8B5A"/>
-                </a:solidFill>
-                <a:latin typeface="Noto Sans CJK KR"/>
-              </a:defRPr>
-            </a:pPr>
-            <a:r>
-              <a:t>다음 모듈을 시작하기 전, 내 src의 변경사항을 저장하고 현재 완료 조건을 다시 확인합니다.</a:t>
+              <a:defRPr sz="1800" b="1">
+                <a:solidFill>
+                  <a:srgbClr val="DB7E22"/>
+                </a:solidFill>
+                <a:latin typeface="Noto Sans CJK KR"/>
+              </a:defRPr>
+            </a:pPr>
+            <a:r>
+              <a:t>공통 순서: ① 현재 폴더 ② source ③ 파일 경로 ④ 이름/타입/단위 ⑤ build·source 후 재실행</a:t>
             </a:r>
           </a:p>
         </p:txBody>
@@ -17623,6 +19131,1138 @@
 </file>
 
 <file path=ppt/slides/slide32.xml><?xml version="1.0" encoding="utf-8"?>
+<p:sld xmlns:a="http://schemas.openxmlformats.org/drawingml/2006/main" xmlns:p="http://schemas.openxmlformats.org/presentationml/2006/main" xmlns:r="http://schemas.openxmlformats.org/officeDocument/2006/relationships">
+  <p:cSld>
+    <p:spTree>
+      <p:nvGrpSpPr>
+        <p:cNvPr id="1" name=""/>
+        <p:cNvGrpSpPr/>
+        <p:nvPr/>
+      </p:nvGrpSpPr>
+      <p:grpSpPr/>
+      <p:sp>
+        <p:nvSpPr>
+          <p:cNvPr id="2" name="TextBox 1"/>
+          <p:cNvSpPr txBox="1"/>
+          <p:nvPr/>
+        </p:nvSpPr>
+        <p:spPr>
+          <a:xfrm>
+            <a:off x="566928" y="347472"/>
+            <a:ext cx="10881360" cy="438912"/>
+          </a:xfrm>
+          <a:prstGeom prst="rect">
+            <a:avLst/>
+          </a:prstGeom>
+          <a:noFill/>
+        </p:spPr>
+        <p:txBody>
+          <a:bodyPr wrap="square" lIns="73152" rIns="73152" tIns="36576" bIns="36576">
+            <a:spAutoFit/>
+          </a:bodyPr>
+          <a:lstStyle/>
+          <a:p>
+            <a:pPr algn="l">
+              <a:spcAft>
+                <a:spcPts val="0"/>
+              </a:spcAft>
+              <a:defRPr sz="3200" b="1">
+                <a:solidFill>
+                  <a:srgbClr val="122C4E"/>
+                </a:solidFill>
+                <a:latin typeface="Noto Sans CJK KR"/>
+              </a:defRPr>
+            </a:pPr>
+            <a:r>
+              <a:t>막혔을 때만: Complete를 복구용으로 사용한다</a:t>
+            </a:r>
+          </a:p>
+        </p:txBody>
+      </p:sp>
+      <p:sp>
+        <p:nvSpPr>
+          <p:cNvPr id="3" name="TextBox 2"/>
+          <p:cNvSpPr txBox="1"/>
+          <p:nvPr/>
+        </p:nvSpPr>
+        <p:spPr>
+          <a:xfrm>
+            <a:off x="603504" y="859536"/>
+            <a:ext cx="10698480" cy="292608"/>
+          </a:xfrm>
+          <a:prstGeom prst="rect">
+            <a:avLst/>
+          </a:prstGeom>
+          <a:noFill/>
+        </p:spPr>
+        <p:txBody>
+          <a:bodyPr wrap="square" lIns="73152" rIns="73152" tIns="36576" bIns="36576">
+            <a:spAutoFit/>
+          </a:bodyPr>
+          <a:lstStyle/>
+          <a:p>
+            <a:pPr algn="l">
+              <a:spcAft>
+                <a:spcPts val="0"/>
+              </a:spcAft>
+              <a:defRPr sz="1700" b="0">
+                <a:solidFill>
+                  <a:srgbClr val="5C6672"/>
+                </a:solidFill>
+                <a:latin typeface="Noto Sans CJK KR"/>
+              </a:defRPr>
+            </a:pPr>
+            <a:r>
+              <a:t>이 슬라이드가 먼저가 아닙니다. 직접 입력·실행을 시도한 뒤에만 내 파일과 Complete를 비교합니다.</a:t>
+            </a:r>
+          </a:p>
+        </p:txBody>
+      </p:sp>
+      <p:sp>
+        <p:nvSpPr>
+          <p:cNvPr id="4" name="TextBox 3"/>
+          <p:cNvSpPr txBox="1"/>
+          <p:nvPr/>
+        </p:nvSpPr>
+        <p:spPr>
+          <a:xfrm>
+            <a:off x="530352" y="6510528"/>
+            <a:ext cx="7772400" cy="201168"/>
+          </a:xfrm>
+          <a:prstGeom prst="rect">
+            <a:avLst/>
+          </a:prstGeom>
+          <a:noFill/>
+        </p:spPr>
+        <p:txBody>
+          <a:bodyPr wrap="square" lIns="73152" rIns="73152" tIns="36576" bIns="36576">
+            <a:spAutoFit/>
+          </a:bodyPr>
+          <a:lstStyle/>
+          <a:p>
+            <a:pPr algn="l">
+              <a:spcAft>
+                <a:spcPts val="0"/>
+              </a:spcAft>
+              <a:defRPr sz="1000" b="0">
+                <a:solidFill>
+                  <a:srgbClr val="5C6672"/>
+                </a:solidFill>
+                <a:latin typeface="Noto Sans CJK KR"/>
+              </a:defRPr>
+            </a:pPr>
+            <a:r>
+              <a:t>ROS 2 Jazzy · Gazebo Harmonic · M07 · 따라 하기형 AGV 실습</a:t>
+            </a:r>
+          </a:p>
+        </p:txBody>
+      </p:sp>
+      <p:sp>
+        <p:nvSpPr>
+          <p:cNvPr id="5" name="TextBox 4"/>
+          <p:cNvSpPr txBox="1"/>
+          <p:nvPr/>
+        </p:nvSpPr>
+        <p:spPr>
+          <a:xfrm>
+            <a:off x="9144000" y="6510528"/>
+            <a:ext cx="2468880" cy="201168"/>
+          </a:xfrm>
+          <a:prstGeom prst="rect">
+            <a:avLst/>
+          </a:prstGeom>
+          <a:noFill/>
+        </p:spPr>
+        <p:txBody>
+          <a:bodyPr wrap="square" lIns="73152" rIns="73152" tIns="36576" bIns="36576">
+            <a:spAutoFit/>
+          </a:bodyPr>
+          <a:lstStyle/>
+          <a:p>
+            <a:pPr algn="r">
+              <a:spcAft>
+                <a:spcPts val="0"/>
+              </a:spcAft>
+              <a:defRPr sz="1000" b="0">
+                <a:solidFill>
+                  <a:srgbClr val="5C6672"/>
+                </a:solidFill>
+                <a:latin typeface="Noto Sans CJK KR"/>
+              </a:defRPr>
+            </a:pPr>
+            <a:r>
+              <a:t>명령·파일 경로는 슬라이드에서 복사 가능</a:t>
+            </a:r>
+          </a:p>
+        </p:txBody>
+      </p:sp>
+      <p:sp>
+        <p:nvSpPr>
+          <p:cNvPr id="6" name="Rectangle 5"/>
+          <p:cNvSpPr/>
+          <p:nvPr/>
+        </p:nvSpPr>
+        <p:spPr>
+          <a:xfrm>
+            <a:off x="566928" y="1188720"/>
+            <a:ext cx="11064240" cy="347472"/>
+          </a:xfrm>
+          <a:prstGeom prst="rect">
+            <a:avLst/>
+          </a:prstGeom>
+          <a:solidFill>
+            <a:srgbClr val="F4F7FB"/>
+          </a:solidFill>
+          <a:ln>
+            <a:solidFill>
+              <a:srgbClr val="F4F7FB"/>
+            </a:solidFill>
+          </a:ln>
+        </p:spPr>
+        <p:style>
+          <a:lnRef idx="1">
+            <a:schemeClr val="accent1"/>
+          </a:lnRef>
+          <a:fillRef idx="3">
+            <a:schemeClr val="accent1"/>
+          </a:fillRef>
+          <a:effectRef idx="2">
+            <a:schemeClr val="accent1"/>
+          </a:effectRef>
+          <a:fontRef idx="minor">
+            <a:schemeClr val="lt1"/>
+          </a:fontRef>
+        </p:style>
+        <p:txBody>
+          <a:bodyPr rtlCol="0" anchor="ctr" wrap="square" lIns="73152" rIns="73152" tIns="36576" bIns="36576"/>
+          <a:lstStyle/>
+          <a:p>
+            <a:pPr algn="l">
+              <a:spcAft>
+                <a:spcPts val="0"/>
+              </a:spcAft>
+              <a:defRPr sz="1300" b="1">
+                <a:solidFill>
+                  <a:srgbClr val="122C4E"/>
+                </a:solidFill>
+                <a:latin typeface="Noto Sans CJK KR"/>
+              </a:defRPr>
+            </a:pPr>
+            <a:r>
+              <a:t>현재 단계 복구용 Complete    |    현재 폴더 ~/ros2_curri    |    현재 터미널</a:t>
+            </a:r>
+          </a:p>
+        </p:txBody>
+      </p:sp>
+      <p:sp>
+        <p:nvSpPr>
+          <p:cNvPr id="7" name="TextBox 6"/>
+          <p:cNvSpPr txBox="1"/>
+          <p:nvPr/>
+        </p:nvSpPr>
+        <p:spPr>
+          <a:xfrm>
+            <a:off x="713232" y="1664208"/>
+            <a:ext cx="10698480" cy="402336"/>
+          </a:xfrm>
+          <a:prstGeom prst="rect">
+            <a:avLst/>
+          </a:prstGeom>
+          <a:noFill/>
+        </p:spPr>
+        <p:txBody>
+          <a:bodyPr wrap="square" lIns="73152" rIns="73152" tIns="36576" bIns="36576">
+            <a:spAutoFit/>
+          </a:bodyPr>
+          <a:lstStyle/>
+          <a:p>
+            <a:pPr algn="ctr">
+              <a:spcAft>
+                <a:spcPts val="0"/>
+              </a:spcAft>
+              <a:defRPr sz="1800" b="1">
+                <a:solidFill>
+                  <a:srgbClr val="DB7E22"/>
+                </a:solidFill>
+                <a:latin typeface="Noto Sans CJK KR"/>
+              </a:defRPr>
+            </a:pPr>
+            <a:r>
+              <a:t>권장 순서: ① 내 오류를 확인  ② Complete와 diff  ③ 꼭 필요할 때만 backup 후 복사</a:t>
+            </a:r>
+          </a:p>
+        </p:txBody>
+      </p:sp>
+      <p:sp>
+        <p:nvSpPr>
+          <p:cNvPr id="8" name="Rounded Rectangle 7"/>
+          <p:cNvSpPr/>
+          <p:nvPr/>
+        </p:nvSpPr>
+        <p:spPr>
+          <a:xfrm>
+            <a:off x="676656" y="2423160"/>
+            <a:ext cx="10881360" cy="2606040"/>
+          </a:xfrm>
+          <a:prstGeom prst="roundRect">
+            <a:avLst/>
+          </a:prstGeom>
+          <a:solidFill>
+            <a:srgbClr val="1D232D"/>
+          </a:solidFill>
+          <a:ln>
+            <a:solidFill>
+              <a:srgbClr val="1D232D"/>
+            </a:solidFill>
+          </a:ln>
+        </p:spPr>
+        <p:style>
+          <a:lnRef idx="1">
+            <a:schemeClr val="accent1"/>
+          </a:lnRef>
+          <a:fillRef idx="3">
+            <a:schemeClr val="accent1"/>
+          </a:fillRef>
+          <a:effectRef idx="2">
+            <a:schemeClr val="accent1"/>
+          </a:effectRef>
+          <a:fontRef idx="minor">
+            <a:schemeClr val="lt1"/>
+          </a:fontRef>
+        </p:style>
+        <p:txBody>
+          <a:bodyPr rtlCol="0" anchor="ctr" wrap="square" lIns="73152" rIns="73152" tIns="36576" bIns="36576"/>
+          <a:lstStyle/>
+          <a:p>
+            <a:pPr algn="l">
+              <a:spcAft>
+                <a:spcPts val="0"/>
+              </a:spcAft>
+              <a:defRPr sz="1400" b="0">
+                <a:solidFill>
+                  <a:srgbClr val="FFFFFF"/>
+                </a:solidFill>
+                <a:latin typeface="DejaVu Sans Mono"/>
+              </a:defRPr>
+            </a:pPr>
+            <a:r>
+              <a:t>cd ~/ros2_curri</a:t>
+            </a:r>
+            <a:br/>
+            <a:r>
+              <a:t>diff -ru my_agv_ws/src blocks/B_robot_build/M07_physics_modeling/complete/agv_ws/src || true</a:t>
+            </a:r>
+            <a:br/>
+            <a:r>
+              <a:t>cp -a my_agv_ws/src my_agv_ws/src_before_M07</a:t>
+            </a:r>
+            <a:br/>
+            <a:r>
+              <a:t>cp -a blocks/B_robot_build/M07_physics_modeling/complete/agv_ws/src/. my_agv_ws/src/</a:t>
+            </a:r>
+            <a:br/>
+            <a:r>
+              <a:t>cd my_agv_ws &amp;&amp; colcon build --symlink-install &amp;&amp; source install/setup.bash</a:t>
+            </a:r>
+          </a:p>
+        </p:txBody>
+      </p:sp>
+      <p:sp>
+        <p:nvSpPr>
+          <p:cNvPr id="9" name="TextBox 8"/>
+          <p:cNvSpPr txBox="1"/>
+          <p:nvPr/>
+        </p:nvSpPr>
+        <p:spPr>
+          <a:xfrm>
+            <a:off x="786384" y="5413248"/>
+            <a:ext cx="10424160" cy="429768"/>
+          </a:xfrm>
+          <a:prstGeom prst="rect">
+            <a:avLst/>
+          </a:prstGeom>
+          <a:noFill/>
+        </p:spPr>
+        <p:txBody>
+          <a:bodyPr wrap="square" lIns="73152" rIns="73152" tIns="36576" bIns="36576">
+            <a:spAutoFit/>
+          </a:bodyPr>
+          <a:lstStyle/>
+          <a:p>
+            <a:pPr algn="ctr">
+              <a:spcAft>
+                <a:spcPts val="0"/>
+              </a:spcAft>
+              <a:defRPr sz="1700" b="1">
+                <a:solidFill>
+                  <a:srgbClr val="2A8B5A"/>
+                </a:solidFill>
+                <a:latin typeface="Noto Sans CJK KR"/>
+              </a:defRPr>
+            </a:pPr>
+            <a:r>
+              <a:t>복구 뒤에는 끝내지 말고, 내 파일과 Complete의 차이를 한 줄씩 설명한 뒤 다시 직접 입력해 봅니다.</a:t>
+            </a:r>
+          </a:p>
+        </p:txBody>
+      </p:sp>
+    </p:spTree>
+  </p:cSld>
+  <p:clrMapOvr>
+    <a:masterClrMapping/>
+  </p:clrMapOvr>
+</p:sld>
+</file>
+
+<file path=ppt/slides/slide33.xml><?xml version="1.0" encoding="utf-8"?>
+<p:sld xmlns:a="http://schemas.openxmlformats.org/drawingml/2006/main" xmlns:p="http://schemas.openxmlformats.org/presentationml/2006/main" xmlns:r="http://schemas.openxmlformats.org/officeDocument/2006/relationships">
+  <p:cSld>
+    <p:spTree>
+      <p:nvGrpSpPr>
+        <p:cNvPr id="1" name=""/>
+        <p:cNvGrpSpPr/>
+        <p:nvPr/>
+      </p:nvGrpSpPr>
+      <p:grpSpPr/>
+      <p:sp>
+        <p:nvSpPr>
+          <p:cNvPr id="2" name="TextBox 1"/>
+          <p:cNvSpPr txBox="1"/>
+          <p:nvPr/>
+        </p:nvSpPr>
+        <p:spPr>
+          <a:xfrm>
+            <a:off x="566928" y="347472"/>
+            <a:ext cx="10881360" cy="438912"/>
+          </a:xfrm>
+          <a:prstGeom prst="rect">
+            <a:avLst/>
+          </a:prstGeom>
+          <a:noFill/>
+        </p:spPr>
+        <p:txBody>
+          <a:bodyPr wrap="square" lIns="73152" rIns="73152" tIns="36576" bIns="36576">
+            <a:spAutoFit/>
+          </a:bodyPr>
+          <a:lstStyle/>
+          <a:p>
+            <a:pPr algn="l">
+              <a:spcAft>
+                <a:spcPts val="0"/>
+              </a:spcAft>
+              <a:defRPr sz="3200" b="1">
+                <a:solidFill>
+                  <a:srgbClr val="122C4E"/>
+                </a:solidFill>
+                <a:latin typeface="Noto Sans CJK KR"/>
+              </a:defRPr>
+            </a:pPr>
+            <a:r>
+              <a:t>미니 실습: 값 하나를 바꾸고 결과를 비교한다</a:t>
+            </a:r>
+          </a:p>
+        </p:txBody>
+      </p:sp>
+      <p:sp>
+        <p:nvSpPr>
+          <p:cNvPr id="3" name="TextBox 2"/>
+          <p:cNvSpPr txBox="1"/>
+          <p:nvPr/>
+        </p:nvSpPr>
+        <p:spPr>
+          <a:xfrm>
+            <a:off x="603504" y="859536"/>
+            <a:ext cx="10698480" cy="292608"/>
+          </a:xfrm>
+          <a:prstGeom prst="rect">
+            <a:avLst/>
+          </a:prstGeom>
+          <a:noFill/>
+        </p:spPr>
+        <p:txBody>
+          <a:bodyPr wrap="square" lIns="73152" rIns="73152" tIns="36576" bIns="36576">
+            <a:spAutoFit/>
+          </a:bodyPr>
+          <a:lstStyle/>
+          <a:p>
+            <a:pPr algn="l">
+              <a:spcAft>
+                <a:spcPts val="0"/>
+              </a:spcAft>
+              <a:defRPr sz="1700" b="0">
+                <a:solidFill>
+                  <a:srgbClr val="5C6672"/>
+                </a:solidFill>
+                <a:latin typeface="Noto Sans CJK KR"/>
+              </a:defRPr>
+            </a:pPr>
+            <a:r>
+              <a:t>정상 결과를 만든 뒤에는 한 번에 하나의 값만 바꿉니다.</a:t>
+            </a:r>
+          </a:p>
+        </p:txBody>
+      </p:sp>
+      <p:sp>
+        <p:nvSpPr>
+          <p:cNvPr id="4" name="TextBox 3"/>
+          <p:cNvSpPr txBox="1"/>
+          <p:nvPr/>
+        </p:nvSpPr>
+        <p:spPr>
+          <a:xfrm>
+            <a:off x="530352" y="6510528"/>
+            <a:ext cx="7772400" cy="201168"/>
+          </a:xfrm>
+          <a:prstGeom prst="rect">
+            <a:avLst/>
+          </a:prstGeom>
+          <a:noFill/>
+        </p:spPr>
+        <p:txBody>
+          <a:bodyPr wrap="square" lIns="73152" rIns="73152" tIns="36576" bIns="36576">
+            <a:spAutoFit/>
+          </a:bodyPr>
+          <a:lstStyle/>
+          <a:p>
+            <a:pPr algn="l">
+              <a:spcAft>
+                <a:spcPts val="0"/>
+              </a:spcAft>
+              <a:defRPr sz="1000" b="0">
+                <a:solidFill>
+                  <a:srgbClr val="5C6672"/>
+                </a:solidFill>
+                <a:latin typeface="Noto Sans CJK KR"/>
+              </a:defRPr>
+            </a:pPr>
+            <a:r>
+              <a:t>ROS 2 Jazzy · Gazebo Harmonic · M07 · 따라 하기형 AGV 실습</a:t>
+            </a:r>
+          </a:p>
+        </p:txBody>
+      </p:sp>
+      <p:sp>
+        <p:nvSpPr>
+          <p:cNvPr id="5" name="TextBox 4"/>
+          <p:cNvSpPr txBox="1"/>
+          <p:nvPr/>
+        </p:nvSpPr>
+        <p:spPr>
+          <a:xfrm>
+            <a:off x="9144000" y="6510528"/>
+            <a:ext cx="2468880" cy="201168"/>
+          </a:xfrm>
+          <a:prstGeom prst="rect">
+            <a:avLst/>
+          </a:prstGeom>
+          <a:noFill/>
+        </p:spPr>
+        <p:txBody>
+          <a:bodyPr wrap="square" lIns="73152" rIns="73152" tIns="36576" bIns="36576">
+            <a:spAutoFit/>
+          </a:bodyPr>
+          <a:lstStyle/>
+          <a:p>
+            <a:pPr algn="r">
+              <a:spcAft>
+                <a:spcPts val="0"/>
+              </a:spcAft>
+              <a:defRPr sz="1000" b="0">
+                <a:solidFill>
+                  <a:srgbClr val="5C6672"/>
+                </a:solidFill>
+                <a:latin typeface="Noto Sans CJK KR"/>
+              </a:defRPr>
+            </a:pPr>
+            <a:r>
+              <a:t>명령·파일 경로는 슬라이드에서 복사 가능</a:t>
+            </a:r>
+          </a:p>
+        </p:txBody>
+      </p:sp>
+      <p:sp>
+        <p:nvSpPr>
+          <p:cNvPr id="6" name="Rectangle 5"/>
+          <p:cNvSpPr/>
+          <p:nvPr/>
+        </p:nvSpPr>
+        <p:spPr>
+          <a:xfrm>
+            <a:off x="566928" y="1188720"/>
+            <a:ext cx="11064240" cy="347472"/>
+          </a:xfrm>
+          <a:prstGeom prst="rect">
+            <a:avLst/>
+          </a:prstGeom>
+          <a:solidFill>
+            <a:srgbClr val="F4F7FB"/>
+          </a:solidFill>
+          <a:ln>
+            <a:solidFill>
+              <a:srgbClr val="F4F7FB"/>
+            </a:solidFill>
+          </a:ln>
+        </p:spPr>
+        <p:style>
+          <a:lnRef idx="1">
+            <a:schemeClr val="accent1"/>
+          </a:lnRef>
+          <a:fillRef idx="3">
+            <a:schemeClr val="accent1"/>
+          </a:fillRef>
+          <a:effectRef idx="2">
+            <a:schemeClr val="accent1"/>
+          </a:effectRef>
+          <a:fontRef idx="minor">
+            <a:schemeClr val="lt1"/>
+          </a:fontRef>
+        </p:style>
+        <p:txBody>
+          <a:bodyPr rtlCol="0" anchor="ctr" wrap="square" lIns="73152" rIns="73152" tIns="36576" bIns="36576"/>
+          <a:lstStyle/>
+          <a:p>
+            <a:pPr algn="l">
+              <a:spcAft>
+                <a:spcPts val="0"/>
+              </a:spcAft>
+              <a:defRPr sz="1300" b="1">
+                <a:solidFill>
+                  <a:srgbClr val="122C4E"/>
+                </a:solidFill>
+                <a:latin typeface="Noto Sans CJK KR"/>
+              </a:defRPr>
+            </a:pPr>
+            <a:r>
+              <a:t>현재 단계 미니 실습    |    현재 폴더 ~/ros2_curri/my_agv_ws    |    현재 터미널</a:t>
+            </a:r>
+          </a:p>
+        </p:txBody>
+      </p:sp>
+      <p:sp>
+        <p:nvSpPr>
+          <p:cNvPr id="7" name="Rounded Rectangle 6"/>
+          <p:cNvSpPr/>
+          <p:nvPr/>
+        </p:nvSpPr>
+        <p:spPr>
+          <a:xfrm>
+            <a:off x="749808" y="1874519"/>
+            <a:ext cx="10652760" cy="1993392"/>
+          </a:xfrm>
+          <a:prstGeom prst="roundRect">
+            <a:avLst/>
+          </a:prstGeom>
+          <a:solidFill>
+            <a:srgbClr val="FFF8EB"/>
+          </a:solidFill>
+          <a:ln>
+            <a:solidFill>
+              <a:srgbClr val="ECC680"/>
+            </a:solidFill>
+          </a:ln>
+        </p:spPr>
+        <p:style>
+          <a:lnRef idx="1">
+            <a:schemeClr val="accent1"/>
+          </a:lnRef>
+          <a:fillRef idx="3">
+            <a:schemeClr val="accent1"/>
+          </a:fillRef>
+          <a:effectRef idx="2">
+            <a:schemeClr val="accent1"/>
+          </a:effectRef>
+          <a:fontRef idx="minor">
+            <a:schemeClr val="lt1"/>
+          </a:fontRef>
+        </p:style>
+        <p:txBody>
+          <a:bodyPr rtlCol="0" anchor="ctr" wrap="square" lIns="73152" rIns="73152" tIns="36576" bIns="36576"/>
+          <a:lstStyle/>
+          <a:p>
+            <a:pPr algn="ctr">
+              <a:spcAft>
+                <a:spcPts val="0"/>
+              </a:spcAft>
+              <a:defRPr sz="2300" b="1">
+                <a:solidFill>
+                  <a:srgbClr val="122C4E"/>
+                </a:solidFill>
+                <a:latin typeface="Noto Sans CJK KR"/>
+              </a:defRPr>
+            </a:pPr>
+            <a:r>
+              <a:t>wheel friction mu를 1.0에서 0.3으로만 바꾼 뒤 직진 시 미끄럼 변화를 기록한다.</a:t>
+            </a:r>
+          </a:p>
+        </p:txBody>
+      </p:sp>
+      <p:sp>
+        <p:nvSpPr>
+          <p:cNvPr id="8" name="TextBox 7"/>
+          <p:cNvSpPr txBox="1"/>
+          <p:nvPr/>
+        </p:nvSpPr>
+        <p:spPr>
+          <a:xfrm>
+            <a:off x="877824" y="4590288"/>
+            <a:ext cx="10241280" cy="594360"/>
+          </a:xfrm>
+          <a:prstGeom prst="rect">
+            <a:avLst/>
+          </a:prstGeom>
+          <a:noFill/>
+        </p:spPr>
+        <p:txBody>
+          <a:bodyPr wrap="square" lIns="73152" rIns="73152" tIns="36576" bIns="36576">
+            <a:spAutoFit/>
+          </a:bodyPr>
+          <a:lstStyle/>
+          <a:p>
+            <a:pPr algn="ctr">
+              <a:spcAft>
+                <a:spcPts val="0"/>
+              </a:spcAft>
+              <a:defRPr sz="1900" b="1">
+                <a:solidFill>
+                  <a:srgbClr val="DB7E22"/>
+                </a:solidFill>
+                <a:latin typeface="Noto Sans CJK KR"/>
+              </a:defRPr>
+            </a:pPr>
+            <a:r>
+              <a:t>기록할 것: 바꾼 값(단위) · 기대한 변화 · 실제 출력/화면 · 원래 값으로 되돌린 결과</a:t>
+            </a:r>
+          </a:p>
+        </p:txBody>
+      </p:sp>
+    </p:spTree>
+  </p:cSld>
+  <p:clrMapOvr>
+    <a:masterClrMapping/>
+  </p:clrMapOvr>
+</p:sld>
+</file>
+
+<file path=ppt/slides/slide34.xml><?xml version="1.0" encoding="utf-8"?>
+<p:sld xmlns:a="http://schemas.openxmlformats.org/drawingml/2006/main" xmlns:p="http://schemas.openxmlformats.org/presentationml/2006/main" xmlns:r="http://schemas.openxmlformats.org/officeDocument/2006/relationships">
+  <p:cSld>
+    <p:spTree>
+      <p:nvGrpSpPr>
+        <p:cNvPr id="1" name=""/>
+        <p:cNvGrpSpPr/>
+        <p:nvPr/>
+      </p:nvGrpSpPr>
+      <p:grpSpPr/>
+      <p:sp>
+        <p:nvSpPr>
+          <p:cNvPr id="2" name="TextBox 1"/>
+          <p:cNvSpPr txBox="1"/>
+          <p:nvPr/>
+        </p:nvSpPr>
+        <p:spPr>
+          <a:xfrm>
+            <a:off x="566928" y="347472"/>
+            <a:ext cx="10881360" cy="438912"/>
+          </a:xfrm>
+          <a:prstGeom prst="rect">
+            <a:avLst/>
+          </a:prstGeom>
+          <a:noFill/>
+        </p:spPr>
+        <p:txBody>
+          <a:bodyPr wrap="square" lIns="73152" rIns="73152" tIns="36576" bIns="36576">
+            <a:spAutoFit/>
+          </a:bodyPr>
+          <a:lstStyle/>
+          <a:p>
+            <a:pPr algn="l">
+              <a:spcAft>
+                <a:spcPts val="0"/>
+              </a:spcAft>
+              <a:defRPr sz="3200" b="1">
+                <a:solidFill>
+                  <a:srgbClr val="122C4E"/>
+                </a:solidFill>
+                <a:latin typeface="Noto Sans CJK KR"/>
+              </a:defRPr>
+            </a:pPr>
+            <a:r>
+              <a:t>내 프로젝트 체크포인트를 저장하고 다음 모듈로 넘긴다</a:t>
+            </a:r>
+          </a:p>
+        </p:txBody>
+      </p:sp>
+      <p:sp>
+        <p:nvSpPr>
+          <p:cNvPr id="3" name="TextBox 2"/>
+          <p:cNvSpPr txBox="1"/>
+          <p:nvPr/>
+        </p:nvSpPr>
+        <p:spPr>
+          <a:xfrm>
+            <a:off x="603504" y="859536"/>
+            <a:ext cx="10698480" cy="292608"/>
+          </a:xfrm>
+          <a:prstGeom prst="rect">
+            <a:avLst/>
+          </a:prstGeom>
+          <a:noFill/>
+        </p:spPr>
+        <p:txBody>
+          <a:bodyPr wrap="square" lIns="73152" rIns="73152" tIns="36576" bIns="36576">
+            <a:spAutoFit/>
+          </a:bodyPr>
+          <a:lstStyle/>
+          <a:p>
+            <a:pPr algn="l">
+              <a:spcAft>
+                <a:spcPts val="0"/>
+              </a:spcAft>
+              <a:defRPr sz="1700" b="0">
+                <a:solidFill>
+                  <a:srgbClr val="5C6672"/>
+                </a:solidFill>
+                <a:latin typeface="Noto Sans CJK KR"/>
+              </a:defRPr>
+            </a:pPr>
+            <a:r>
+              <a:t>Complete는 복구용 비교 기준이고, 다음 단계는 내가 직접 만든 workspace에서 계속합니다.</a:t>
+            </a:r>
+          </a:p>
+        </p:txBody>
+      </p:sp>
+      <p:sp>
+        <p:nvSpPr>
+          <p:cNvPr id="4" name="TextBox 3"/>
+          <p:cNvSpPr txBox="1"/>
+          <p:nvPr/>
+        </p:nvSpPr>
+        <p:spPr>
+          <a:xfrm>
+            <a:off x="530352" y="6510528"/>
+            <a:ext cx="7772400" cy="201168"/>
+          </a:xfrm>
+          <a:prstGeom prst="rect">
+            <a:avLst/>
+          </a:prstGeom>
+          <a:noFill/>
+        </p:spPr>
+        <p:txBody>
+          <a:bodyPr wrap="square" lIns="73152" rIns="73152" tIns="36576" bIns="36576">
+            <a:spAutoFit/>
+          </a:bodyPr>
+          <a:lstStyle/>
+          <a:p>
+            <a:pPr algn="l">
+              <a:spcAft>
+                <a:spcPts val="0"/>
+              </a:spcAft>
+              <a:defRPr sz="1000" b="0">
+                <a:solidFill>
+                  <a:srgbClr val="5C6672"/>
+                </a:solidFill>
+                <a:latin typeface="Noto Sans CJK KR"/>
+              </a:defRPr>
+            </a:pPr>
+            <a:r>
+              <a:t>ROS 2 Jazzy · Gazebo Harmonic · M07 · 따라 하기형 AGV 실습</a:t>
+            </a:r>
+          </a:p>
+        </p:txBody>
+      </p:sp>
+      <p:sp>
+        <p:nvSpPr>
+          <p:cNvPr id="5" name="TextBox 4"/>
+          <p:cNvSpPr txBox="1"/>
+          <p:nvPr/>
+        </p:nvSpPr>
+        <p:spPr>
+          <a:xfrm>
+            <a:off x="9144000" y="6510528"/>
+            <a:ext cx="2468880" cy="201168"/>
+          </a:xfrm>
+          <a:prstGeom prst="rect">
+            <a:avLst/>
+          </a:prstGeom>
+          <a:noFill/>
+        </p:spPr>
+        <p:txBody>
+          <a:bodyPr wrap="square" lIns="73152" rIns="73152" tIns="36576" bIns="36576">
+            <a:spAutoFit/>
+          </a:bodyPr>
+          <a:lstStyle/>
+          <a:p>
+            <a:pPr algn="r">
+              <a:spcAft>
+                <a:spcPts val="0"/>
+              </a:spcAft>
+              <a:defRPr sz="1000" b="0">
+                <a:solidFill>
+                  <a:srgbClr val="5C6672"/>
+                </a:solidFill>
+                <a:latin typeface="Noto Sans CJK KR"/>
+              </a:defRPr>
+            </a:pPr>
+            <a:r>
+              <a:t>명령·파일 경로는 슬라이드에서 복사 가능</a:t>
+            </a:r>
+          </a:p>
+        </p:txBody>
+      </p:sp>
+      <p:sp>
+        <p:nvSpPr>
+          <p:cNvPr id="6" name="Rectangle 5"/>
+          <p:cNvSpPr/>
+          <p:nvPr/>
+        </p:nvSpPr>
+        <p:spPr>
+          <a:xfrm>
+            <a:off x="566928" y="1188720"/>
+            <a:ext cx="11064240" cy="347472"/>
+          </a:xfrm>
+          <a:prstGeom prst="rect">
+            <a:avLst/>
+          </a:prstGeom>
+          <a:solidFill>
+            <a:srgbClr val="F4F7FB"/>
+          </a:solidFill>
+          <a:ln>
+            <a:solidFill>
+              <a:srgbClr val="F4F7FB"/>
+            </a:solidFill>
+          </a:ln>
+        </p:spPr>
+        <p:style>
+          <a:lnRef idx="1">
+            <a:schemeClr val="accent1"/>
+          </a:lnRef>
+          <a:fillRef idx="3">
+            <a:schemeClr val="accent1"/>
+          </a:fillRef>
+          <a:effectRef idx="2">
+            <a:schemeClr val="accent1"/>
+          </a:effectRef>
+          <a:fontRef idx="minor">
+            <a:schemeClr val="lt1"/>
+          </a:fontRef>
+        </p:style>
+        <p:txBody>
+          <a:bodyPr rtlCol="0" anchor="ctr" wrap="square" lIns="73152" rIns="73152" tIns="36576" bIns="36576"/>
+          <a:lstStyle/>
+          <a:p>
+            <a:pPr algn="l">
+              <a:spcAft>
+                <a:spcPts val="0"/>
+              </a:spcAft>
+              <a:defRPr sz="1300" b="1">
+                <a:solidFill>
+                  <a:srgbClr val="122C4E"/>
+                </a:solidFill>
+                <a:latin typeface="Noto Sans CJK KR"/>
+              </a:defRPr>
+            </a:pPr>
+            <a:r>
+              <a:t>현재 단계 체크포인트    |    현재 폴더 ~/ros2_curri/my_agv_ws    |    현재 터미널</a:t>
+            </a:r>
+          </a:p>
+        </p:txBody>
+      </p:sp>
+      <p:sp>
+        <p:nvSpPr>
+          <p:cNvPr id="7" name="Rounded Rectangle 6"/>
+          <p:cNvSpPr/>
+          <p:nvPr/>
+        </p:nvSpPr>
+        <p:spPr>
+          <a:xfrm>
+            <a:off x="685800" y="1737360"/>
+            <a:ext cx="10972800" cy="3611880"/>
+          </a:xfrm>
+          <a:prstGeom prst="roundRect">
+            <a:avLst/>
+          </a:prstGeom>
+          <a:solidFill>
+            <a:srgbClr val="F4F7FB"/>
+          </a:solidFill>
+          <a:ln>
+            <a:solidFill>
+              <a:srgbClr val="D2DCE8"/>
+            </a:solidFill>
+          </a:ln>
+        </p:spPr>
+        <p:style>
+          <a:lnRef idx="1">
+            <a:schemeClr val="accent1"/>
+          </a:lnRef>
+          <a:fillRef idx="3">
+            <a:schemeClr val="accent1"/>
+          </a:fillRef>
+          <a:effectRef idx="2">
+            <a:schemeClr val="accent1"/>
+          </a:effectRef>
+          <a:fontRef idx="minor">
+            <a:schemeClr val="lt1"/>
+          </a:fontRef>
+        </p:style>
+        <p:txBody>
+          <a:bodyPr rtlCol="0" anchor="ctr"/>
+          <a:lstStyle/>
+          <a:p>
+            <a:pPr algn="ctr"/>
+          </a:p>
+        </p:txBody>
+      </p:sp>
+      <p:sp>
+        <p:nvSpPr>
+          <p:cNvPr id="8" name="TextBox 7"/>
+          <p:cNvSpPr txBox="1"/>
+          <p:nvPr/>
+        </p:nvSpPr>
+        <p:spPr>
+          <a:xfrm>
+            <a:off x="896112" y="1993392"/>
+            <a:ext cx="10332720" cy="2971800"/>
+          </a:xfrm>
+          <a:prstGeom prst="rect">
+            <a:avLst/>
+          </a:prstGeom>
+          <a:noFill/>
+        </p:spPr>
+        <p:txBody>
+          <a:bodyPr wrap="square" lIns="109728" rIns="109728">
+            <a:spAutoFit/>
+          </a:bodyPr>
+          <a:lstStyle/>
+          <a:p>
+            <a:pPr>
+              <a:spcAft>
+                <a:spcPts val="800"/>
+              </a:spcAft>
+              <a:defRPr sz="1800">
+                <a:solidFill>
+                  <a:srgbClr val="122C4E"/>
+                </a:solidFill>
+                <a:latin typeface="Noto Sans CJK KR"/>
+              </a:defRPr>
+            </a:pPr>
+            <a:r>
+              <a:t>• □ 완료 화면: AGV가 바닥에 안정적으로 놓이고 바퀴 접촉·충돌 파라미터가 모델에 존재한다.</a:t>
+            </a:r>
+          </a:p>
+          <a:p>
+            <a:pPr>
+              <a:spcAft>
+                <a:spcPts val="800"/>
+              </a:spcAft>
+              <a:defRPr sz="1800">
+                <a:solidFill>
+                  <a:srgbClr val="122C4E"/>
+                </a:solidFill>
+                <a:latin typeface="Noto Sans CJK KR"/>
+              </a:defRPr>
+            </a:pPr>
+            <a:r>
+              <a:t>• □ 막혔을 때 비교할 Complete: blocks/B_robot_build/M07_physics_modeling/complete/</a:t>
+            </a:r>
+          </a:p>
+          <a:p>
+            <a:pPr>
+              <a:spcAft>
+                <a:spcPts val="800"/>
+              </a:spcAft>
+              <a:defRPr sz="1800">
+                <a:solidFill>
+                  <a:srgbClr val="122C4E"/>
+                </a:solidFill>
+                <a:latin typeface="Noto Sans CJK KR"/>
+              </a:defRPr>
+            </a:pPr>
+            <a:r>
+              <a:t>• □ 정상 로그·캡처: logs/validation.log, screenshots/validation_terminal.png</a:t>
+            </a:r>
+          </a:p>
+          <a:p>
+            <a:pPr>
+              <a:spcAft>
+                <a:spcPts val="800"/>
+              </a:spcAft>
+              <a:defRPr sz="1800">
+                <a:solidFill>
+                  <a:srgbClr val="122C4E"/>
+                </a:solidFill>
+                <a:latin typeface="Noto Sans CJK KR"/>
+              </a:defRPr>
+            </a:pPr>
+            <a:r>
+              <a:t>• □ 버전 식별: CHECKSUM_or_TAG.txt의 SHA-256 manifest</a:t>
+            </a:r>
+          </a:p>
+          <a:p>
+            <a:pPr>
+              <a:spcAft>
+                <a:spcPts val="800"/>
+              </a:spcAft>
+              <a:defRPr sz="1800">
+                <a:solidFill>
+                  <a:srgbClr val="122C4E"/>
+                </a:solidFill>
+                <a:latin typeface="Noto Sans CJK KR"/>
+              </a:defRPr>
+            </a:pPr>
+            <a:r>
+              <a:t>• □ 다음 시작 조건: M08 World/Spawn</a:t>
+            </a:r>
+          </a:p>
+        </p:txBody>
+      </p:sp>
+      <p:sp>
+        <p:nvSpPr>
+          <p:cNvPr id="9" name="TextBox 8"/>
+          <p:cNvSpPr txBox="1"/>
+          <p:nvPr/>
+        </p:nvSpPr>
+        <p:spPr>
+          <a:xfrm>
+            <a:off x="868680" y="5596128"/>
+            <a:ext cx="10515600" cy="338328"/>
+          </a:xfrm>
+          <a:prstGeom prst="rect">
+            <a:avLst/>
+          </a:prstGeom>
+          <a:noFill/>
+        </p:spPr>
+        <p:txBody>
+          <a:bodyPr wrap="square" lIns="73152" rIns="73152" tIns="36576" bIns="36576">
+            <a:spAutoFit/>
+          </a:bodyPr>
+          <a:lstStyle/>
+          <a:p>
+            <a:pPr algn="ctr">
+              <a:spcAft>
+                <a:spcPts val="0"/>
+              </a:spcAft>
+              <a:defRPr sz="1700" b="1">
+                <a:solidFill>
+                  <a:srgbClr val="2A8B5A"/>
+                </a:solidFill>
+                <a:latin typeface="Noto Sans CJK KR"/>
+              </a:defRPr>
+            </a:pPr>
+            <a:r>
+              <a:t>다음 모듈을 시작하기 전, 내 src의 변경사항을 저장하고 현재 완료 조건을 다시 확인합니다.</a:t>
+            </a:r>
+          </a:p>
+        </p:txBody>
+      </p:sp>
+    </p:spTree>
+  </p:cSld>
+  <p:clrMapOvr>
+    <a:masterClrMapping/>
+  </p:clrMapOvr>
+</p:sld>
+</file>
+
+<file path=ppt/slides/slide35.xml><?xml version="1.0" encoding="utf-8"?>
 <p:sld xmlns:a="http://schemas.openxmlformats.org/drawingml/2006/main" xmlns:p="http://schemas.openxmlformats.org/presentationml/2006/main" xmlns:r="http://schemas.openxmlformats.org/officeDocument/2006/relationships">
   <p:cSld>
     <p:spTree>

--- a/blocks/B_robot_build/M07_physics_modeling/M07_Gazebo용_물리_요소_추가.pptx
+++ b/blocks/B_robot_build/M07_physics_modeling/M07_Gazebo용_물리_요소_추가.pptx
@@ -6707,7 +6707,7 @@
               <a:spcAft>
                 <a:spcPts val="0"/>
               </a:spcAft>
-              <a:defRPr sz="1800" b="1">
+              <a:defRPr sz="1400" b="1">
                 <a:solidFill>
                   <a:srgbClr val="FFFFFF"/>
                 </a:solidFill>
@@ -6715,7 +6715,7 @@
               </a:defRPr>
             </a:pPr>
             <a:r>
-              <a:t>M07 · Block B · ROS 2 + Gazebo Sim AGV</a:t>
+              <a:t>ROS 2 기반 AGV End-to-End 개발 커리큘럼 · M07 · Block B</a:t>
             </a:r>
           </a:p>
         </p:txBody>
@@ -6925,7 +6925,7 @@
               <a:spcAft>
                 <a:spcPts val="0"/>
               </a:spcAft>
-              <a:defRPr sz="1000" b="0">
+              <a:defRPr sz="900" b="0">
                 <a:solidFill>
                   <a:srgbClr val="5C6672"/>
                 </a:solidFill>
@@ -6933,7 +6933,7 @@
               </a:defRPr>
             </a:pPr>
             <a:r>
-              <a:t>ROS 2 Jazzy · Gazebo Harmonic · M07 · 따라 하기형 AGV 실습</a:t>
+              <a:t>ROS 2 기반 AGV End-to-End 개발 커리큘럼 · M07 · Block B</a:t>
             </a:r>
           </a:p>
         </p:txBody>
@@ -7099,7 +7099,7 @@
               <a:spcAft>
                 <a:spcPts val="0"/>
               </a:spcAft>
-              <a:defRPr sz="1000" b="0">
+              <a:defRPr sz="900" b="0">
                 <a:solidFill>
                   <a:srgbClr val="5C6672"/>
                 </a:solidFill>
@@ -7107,7 +7107,7 @@
               </a:defRPr>
             </a:pPr>
             <a:r>
-              <a:t>ROS 2 Jazzy · Gazebo Harmonic · M07 · 따라 하기형 AGV 실습</a:t>
+              <a:t>ROS 2 기반 AGV End-to-End 개발 커리큘럼 · M07 · Block B</a:t>
             </a:r>
           </a:p>
         </p:txBody>
@@ -7862,7 +7862,7 @@
               <a:spcAft>
                 <a:spcPts val="0"/>
               </a:spcAft>
-              <a:defRPr sz="1000" b="0">
+              <a:defRPr sz="900" b="0">
                 <a:solidFill>
                   <a:srgbClr val="5C6672"/>
                 </a:solidFill>
@@ -7870,7 +7870,7 @@
               </a:defRPr>
             </a:pPr>
             <a:r>
-              <a:t>ROS 2 Jazzy · Gazebo Harmonic · M07 · 따라 하기형 AGV 실습</a:t>
+              <a:t>ROS 2 기반 AGV End-to-End 개발 커리큘럼 · M07 · Block B</a:t>
             </a:r>
           </a:p>
         </p:txBody>
@@ -8390,7 +8390,7 @@
               <a:spcAft>
                 <a:spcPts val="0"/>
               </a:spcAft>
-              <a:defRPr sz="1000" b="0">
+              <a:defRPr sz="900" b="0">
                 <a:solidFill>
                   <a:srgbClr val="5C6672"/>
                 </a:solidFill>
@@ -8398,7 +8398,7 @@
               </a:defRPr>
             </a:pPr>
             <a:r>
-              <a:t>ROS 2 Jazzy · Gazebo Harmonic · M07 · 따라 하기형 AGV 실습</a:t>
+              <a:t>ROS 2 기반 AGV End-to-End 개발 커리큘럼 · M07 · Block B</a:t>
             </a:r>
           </a:p>
         </p:txBody>
@@ -9179,7 +9179,7 @@
               <a:spcAft>
                 <a:spcPts val="0"/>
               </a:spcAft>
-              <a:defRPr sz="1000" b="0">
+              <a:defRPr sz="900" b="0">
                 <a:solidFill>
                   <a:srgbClr val="5C6672"/>
                 </a:solidFill>
@@ -9187,7 +9187,7 @@
               </a:defRPr>
             </a:pPr>
             <a:r>
-              <a:t>ROS 2 Jazzy · Gazebo Harmonic · M07 · 따라 하기형 AGV 실습</a:t>
+              <a:t>ROS 2 기반 AGV End-to-End 개발 커리큘럼 · M07 · Block B</a:t>
             </a:r>
           </a:p>
         </p:txBody>
@@ -9968,7 +9968,7 @@
               <a:spcAft>
                 <a:spcPts val="0"/>
               </a:spcAft>
-              <a:defRPr sz="1000" b="0">
+              <a:defRPr sz="900" b="0">
                 <a:solidFill>
                   <a:srgbClr val="5C6672"/>
                 </a:solidFill>
@@ -9976,7 +9976,7 @@
               </a:defRPr>
             </a:pPr>
             <a:r>
-              <a:t>ROS 2 Jazzy · Gazebo Harmonic · M07 · 따라 하기형 AGV 실습</a:t>
+              <a:t>ROS 2 기반 AGV End-to-End 개발 커리큘럼 · M07 · Block B</a:t>
             </a:r>
           </a:p>
         </p:txBody>
@@ -10757,7 +10757,7 @@
               <a:spcAft>
                 <a:spcPts val="0"/>
               </a:spcAft>
-              <a:defRPr sz="1000" b="0">
+              <a:defRPr sz="900" b="0">
                 <a:solidFill>
                   <a:srgbClr val="5C6672"/>
                 </a:solidFill>
@@ -10765,7 +10765,7 @@
               </a:defRPr>
             </a:pPr>
             <a:r>
-              <a:t>ROS 2 Jazzy · Gazebo Harmonic · M07 · 따라 하기형 AGV 실습</a:t>
+              <a:t>ROS 2 기반 AGV End-to-End 개발 커리큘럼 · M07 · Block B</a:t>
             </a:r>
           </a:p>
         </p:txBody>
@@ -11231,7 +11231,7 @@
               <a:spcAft>
                 <a:spcPts val="0"/>
               </a:spcAft>
-              <a:defRPr sz="1000" b="0">
+              <a:defRPr sz="900" b="0">
                 <a:solidFill>
                   <a:srgbClr val="5C6672"/>
                 </a:solidFill>
@@ -11239,7 +11239,7 @@
               </a:defRPr>
             </a:pPr>
             <a:r>
-              <a:t>ROS 2 Jazzy · Gazebo Harmonic · M07 · 따라 하기형 AGV 실습</a:t>
+              <a:t>ROS 2 기반 AGV End-to-End 개발 커리큘럼 · M07 · Block B</a:t>
             </a:r>
           </a:p>
         </p:txBody>
@@ -11705,7 +11705,7 @@
               <a:spcAft>
                 <a:spcPts val="0"/>
               </a:spcAft>
-              <a:defRPr sz="1000" b="0">
+              <a:defRPr sz="900" b="0">
                 <a:solidFill>
                   <a:srgbClr val="5C6672"/>
                 </a:solidFill>
@@ -11713,7 +11713,7 @@
               </a:defRPr>
             </a:pPr>
             <a:r>
-              <a:t>ROS 2 Jazzy · Gazebo Harmonic · M07 · 따라 하기형 AGV 실습</a:t>
+              <a:t>ROS 2 기반 AGV End-to-End 개발 커리큘럼 · M07 · Block B</a:t>
             </a:r>
           </a:p>
         </p:txBody>
@@ -12179,7 +12179,7 @@
               <a:spcAft>
                 <a:spcPts val="0"/>
               </a:spcAft>
-              <a:defRPr sz="1000" b="0">
+              <a:defRPr sz="900" b="0">
                 <a:solidFill>
                   <a:srgbClr val="5C6672"/>
                 </a:solidFill>
@@ -12187,7 +12187,7 @@
               </a:defRPr>
             </a:pPr>
             <a:r>
-              <a:t>ROS 2 Jazzy · Gazebo Harmonic · M07 · 따라 하기형 AGV 실습</a:t>
+              <a:t>ROS 2 기반 AGV End-to-End 개발 커리큘럼 · M07 · Block B</a:t>
             </a:r>
           </a:p>
         </p:txBody>
@@ -12653,7 +12653,7 @@
               <a:spcAft>
                 <a:spcPts val="0"/>
               </a:spcAft>
-              <a:defRPr sz="1000" b="0">
+              <a:defRPr sz="900" b="0">
                 <a:solidFill>
                   <a:srgbClr val="5C6672"/>
                 </a:solidFill>
@@ -12661,7 +12661,7 @@
               </a:defRPr>
             </a:pPr>
             <a:r>
-              <a:t>ROS 2 Jazzy · Gazebo Harmonic · M07 · 따라 하기형 AGV 실습</a:t>
+              <a:t>ROS 2 기반 AGV End-to-End 개발 커리큘럼 · M07 · Block B</a:t>
             </a:r>
           </a:p>
         </p:txBody>
@@ -13127,7 +13127,7 @@
               <a:spcAft>
                 <a:spcPts val="0"/>
               </a:spcAft>
-              <a:defRPr sz="1000" b="0">
+              <a:defRPr sz="900" b="0">
                 <a:solidFill>
                   <a:srgbClr val="5C6672"/>
                 </a:solidFill>
@@ -13135,7 +13135,7 @@
               </a:defRPr>
             </a:pPr>
             <a:r>
-              <a:t>ROS 2 Jazzy · Gazebo Harmonic · M07 · 따라 하기형 AGV 실습</a:t>
+              <a:t>ROS 2 기반 AGV End-to-End 개발 커리큘럼 · M07 · Block B</a:t>
             </a:r>
           </a:p>
         </p:txBody>
@@ -13588,7 +13588,7 @@
               <a:spcAft>
                 <a:spcPts val="0"/>
               </a:spcAft>
-              <a:defRPr sz="1000" b="0">
+              <a:defRPr sz="900" b="0">
                 <a:solidFill>
                   <a:srgbClr val="5C6672"/>
                 </a:solidFill>
@@ -13596,7 +13596,7 @@
               </a:defRPr>
             </a:pPr>
             <a:r>
-              <a:t>ROS 2 Jazzy · Gazebo Harmonic · M07 · 따라 하기형 AGV 실습</a:t>
+              <a:t>ROS 2 기반 AGV End-to-End 개발 커리큘럼 · M07 · Block B</a:t>
             </a:r>
           </a:p>
         </p:txBody>
@@ -14062,7 +14062,7 @@
               <a:spcAft>
                 <a:spcPts val="0"/>
               </a:spcAft>
-              <a:defRPr sz="1000" b="0">
+              <a:defRPr sz="900" b="0">
                 <a:solidFill>
                   <a:srgbClr val="5C6672"/>
                 </a:solidFill>
@@ -14070,7 +14070,7 @@
               </a:defRPr>
             </a:pPr>
             <a:r>
-              <a:t>ROS 2 Jazzy · Gazebo Harmonic · M07 · 따라 하기형 AGV 실습</a:t>
+              <a:t>ROS 2 기반 AGV End-to-End 개발 커리큘럼 · M07 · Block B</a:t>
             </a:r>
           </a:p>
         </p:txBody>
@@ -14536,7 +14536,7 @@
               <a:spcAft>
                 <a:spcPts val="0"/>
               </a:spcAft>
-              <a:defRPr sz="1000" b="0">
+              <a:defRPr sz="900" b="0">
                 <a:solidFill>
                   <a:srgbClr val="5C6672"/>
                 </a:solidFill>
@@ -14544,7 +14544,7 @@
               </a:defRPr>
             </a:pPr>
             <a:r>
-              <a:t>ROS 2 Jazzy · Gazebo Harmonic · M07 · 따라 하기형 AGV 실습</a:t>
+              <a:t>ROS 2 기반 AGV End-to-End 개발 커리큘럼 · M07 · Block B</a:t>
             </a:r>
           </a:p>
         </p:txBody>
@@ -15010,7 +15010,7 @@
               <a:spcAft>
                 <a:spcPts val="0"/>
               </a:spcAft>
-              <a:defRPr sz="1000" b="0">
+              <a:defRPr sz="900" b="0">
                 <a:solidFill>
                   <a:srgbClr val="5C6672"/>
                 </a:solidFill>
@@ -15018,7 +15018,7 @@
               </a:defRPr>
             </a:pPr>
             <a:r>
-              <a:t>ROS 2 Jazzy · Gazebo Harmonic · M07 · 따라 하기형 AGV 실습</a:t>
+              <a:t>ROS 2 기반 AGV End-to-End 개발 커리큘럼 · M07 · Block B</a:t>
             </a:r>
           </a:p>
         </p:txBody>
@@ -15484,7 +15484,7 @@
               <a:spcAft>
                 <a:spcPts val="0"/>
               </a:spcAft>
-              <a:defRPr sz="1000" b="0">
+              <a:defRPr sz="900" b="0">
                 <a:solidFill>
                   <a:srgbClr val="5C6672"/>
                 </a:solidFill>
@@ -15492,7 +15492,7 @@
               </a:defRPr>
             </a:pPr>
             <a:r>
-              <a:t>ROS 2 Jazzy · Gazebo Harmonic · M07 · 따라 하기형 AGV 실습</a:t>
+              <a:t>ROS 2 기반 AGV End-to-End 개발 커리큘럼 · M07 · Block B</a:t>
             </a:r>
           </a:p>
         </p:txBody>
@@ -15958,7 +15958,7 @@
               <a:spcAft>
                 <a:spcPts val="0"/>
               </a:spcAft>
-              <a:defRPr sz="1000" b="0">
+              <a:defRPr sz="900" b="0">
                 <a:solidFill>
                   <a:srgbClr val="5C6672"/>
                 </a:solidFill>
@@ -15966,7 +15966,7 @@
               </a:defRPr>
             </a:pPr>
             <a:r>
-              <a:t>ROS 2 Jazzy · Gazebo Harmonic · M07 · 따라 하기형 AGV 실습</a:t>
+              <a:t>ROS 2 기반 AGV End-to-End 개발 커리큘럼 · M07 · Block B</a:t>
             </a:r>
           </a:p>
         </p:txBody>
@@ -16392,7 +16392,7 @@
               <a:spcAft>
                 <a:spcPts val="0"/>
               </a:spcAft>
-              <a:defRPr sz="1000" b="0">
+              <a:defRPr sz="900" b="0">
                 <a:solidFill>
                   <a:srgbClr val="5C6672"/>
                 </a:solidFill>
@@ -16400,7 +16400,7 @@
               </a:defRPr>
             </a:pPr>
             <a:r>
-              <a:t>ROS 2 Jazzy · Gazebo Harmonic · M07 · 따라 하기형 AGV 실습</a:t>
+              <a:t>ROS 2 기반 AGV End-to-End 개발 커리큘럼 · M07 · Block B</a:t>
             </a:r>
           </a:p>
         </p:txBody>
@@ -16842,7 +16842,7 @@
               <a:spcAft>
                 <a:spcPts val="0"/>
               </a:spcAft>
-              <a:defRPr sz="1000" b="0">
+              <a:defRPr sz="900" b="0">
                 <a:solidFill>
                   <a:srgbClr val="5C6672"/>
                 </a:solidFill>
@@ -16850,7 +16850,7 @@
               </a:defRPr>
             </a:pPr>
             <a:r>
-              <a:t>ROS 2 Jazzy · Gazebo Harmonic · M07 · 따라 하기형 AGV 실습</a:t>
+              <a:t>ROS 2 기반 AGV End-to-End 개발 커리큘럼 · M07 · Block B</a:t>
             </a:r>
           </a:p>
         </p:txBody>
@@ -17288,7 +17288,7 @@
               <a:spcAft>
                 <a:spcPts val="0"/>
               </a:spcAft>
-              <a:defRPr sz="1000" b="0">
+              <a:defRPr sz="900" b="0">
                 <a:solidFill>
                   <a:srgbClr val="5C6672"/>
                 </a:solidFill>
@@ -17296,7 +17296,7 @@
               </a:defRPr>
             </a:pPr>
             <a:r>
-              <a:t>ROS 2 Jazzy · Gazebo Harmonic · M07 · 따라 하기형 AGV 실습</a:t>
+              <a:t>ROS 2 기반 AGV End-to-End 개발 커리큘럼 · M07 · Block B</a:t>
             </a:r>
           </a:p>
         </p:txBody>
@@ -17660,7 +17660,7 @@
               <a:spcAft>
                 <a:spcPts val="0"/>
               </a:spcAft>
-              <a:defRPr sz="1000" b="0">
+              <a:defRPr sz="900" b="0">
                 <a:solidFill>
                   <a:srgbClr val="5C6672"/>
                 </a:solidFill>
@@ -17668,7 +17668,7 @@
               </a:defRPr>
             </a:pPr>
             <a:r>
-              <a:t>ROS 2 Jazzy · Gazebo Harmonic · M07 · 따라 하기형 AGV 실습</a:t>
+              <a:t>ROS 2 기반 AGV End-to-End 개발 커리큘럼 · M07 · Block B</a:t>
             </a:r>
           </a:p>
         </p:txBody>
@@ -17897,7 +17897,7 @@
               <a:spcAft>
                 <a:spcPts val="0"/>
               </a:spcAft>
-              <a:defRPr sz="1000" b="0">
+              <a:defRPr sz="900" b="0">
                 <a:solidFill>
                   <a:srgbClr val="5C6672"/>
                 </a:solidFill>
@@ -17905,7 +17905,7 @@
               </a:defRPr>
             </a:pPr>
             <a:r>
-              <a:t>ROS 2 Jazzy · Gazebo Harmonic · M07 · 따라 하기형 AGV 실습</a:t>
+              <a:t>ROS 2 기반 AGV End-to-End 개발 커리큘럼 · M07 · Block B</a:t>
             </a:r>
           </a:p>
         </p:txBody>
@@ -18316,7 +18316,7 @@
               <a:spcAft>
                 <a:spcPts val="0"/>
               </a:spcAft>
-              <a:defRPr sz="1000" b="0">
+              <a:defRPr sz="900" b="0">
                 <a:solidFill>
                   <a:srgbClr val="5C6672"/>
                 </a:solidFill>
@@ -18324,7 +18324,7 @@
               </a:defRPr>
             </a:pPr>
             <a:r>
-              <a:t>ROS 2 Jazzy · Gazebo Harmonic · M07 · 따라 하기형 AGV 실습</a:t>
+              <a:t>ROS 2 기반 AGV End-to-End 개발 커리큘럼 · M07 · Block B</a:t>
             </a:r>
           </a:p>
         </p:txBody>
@@ -18719,7 +18719,7 @@
               <a:spcAft>
                 <a:spcPts val="0"/>
               </a:spcAft>
-              <a:defRPr sz="1000" b="0">
+              <a:defRPr sz="900" b="0">
                 <a:solidFill>
                   <a:srgbClr val="5C6672"/>
                 </a:solidFill>
@@ -18727,7 +18727,7 @@
               </a:defRPr>
             </a:pPr>
             <a:r>
-              <a:t>ROS 2 Jazzy · Gazebo Harmonic · M07 · 따라 하기형 AGV 실습</a:t>
+              <a:t>ROS 2 기반 AGV End-to-End 개발 커리큘럼 · M07 · Block B</a:t>
             </a:r>
           </a:p>
         </p:txBody>
@@ -19244,7 +19244,7 @@
               <a:spcAft>
                 <a:spcPts val="0"/>
               </a:spcAft>
-              <a:defRPr sz="1000" b="0">
+              <a:defRPr sz="900" b="0">
                 <a:solidFill>
                   <a:srgbClr val="5C6672"/>
                 </a:solidFill>
@@ -19252,7 +19252,7 @@
               </a:defRPr>
             </a:pPr>
             <a:r>
-              <a:t>ROS 2 Jazzy · Gazebo Harmonic · M07 · 따라 하기형 AGV 실습</a:t>
+              <a:t>ROS 2 기반 AGV End-to-End 개발 커리큘럼 · M07 · Block B</a:t>
             </a:r>
           </a:p>
         </p:txBody>
@@ -19628,7 +19628,7 @@
               <a:spcAft>
                 <a:spcPts val="0"/>
               </a:spcAft>
-              <a:defRPr sz="1000" b="0">
+              <a:defRPr sz="900" b="0">
                 <a:solidFill>
                   <a:srgbClr val="5C6672"/>
                 </a:solidFill>
@@ -19636,7 +19636,7 @@
               </a:defRPr>
             </a:pPr>
             <a:r>
-              <a:t>ROS 2 Jazzy · Gazebo Harmonic · M07 · 따라 하기형 AGV 실습</a:t>
+              <a:t>ROS 2 기반 AGV End-to-End 개발 커리큘럼 · M07 · Block B</a:t>
             </a:r>
           </a:p>
         </p:txBody>
@@ -19957,7 +19957,7 @@
               <a:spcAft>
                 <a:spcPts val="0"/>
               </a:spcAft>
-              <a:defRPr sz="1000" b="0">
+              <a:defRPr sz="900" b="0">
                 <a:solidFill>
                   <a:srgbClr val="5C6672"/>
                 </a:solidFill>
@@ -19965,7 +19965,7 @@
               </a:defRPr>
             </a:pPr>
             <a:r>
-              <a:t>ROS 2 Jazzy · Gazebo Harmonic · M07 · 따라 하기형 AGV 실습</a:t>
+              <a:t>ROS 2 기반 AGV End-to-End 개발 커리큘럼 · M07 · Block B</a:t>
             </a:r>
           </a:p>
         </p:txBody>
@@ -20376,7 +20376,7 @@
               <a:spcAft>
                 <a:spcPts val="0"/>
               </a:spcAft>
-              <a:defRPr sz="1000" b="0">
+              <a:defRPr sz="900" b="0">
                 <a:solidFill>
                   <a:srgbClr val="5C6672"/>
                 </a:solidFill>
@@ -20384,7 +20384,7 @@
               </a:defRPr>
             </a:pPr>
             <a:r>
-              <a:t>ROS 2 Jazzy · Gazebo Harmonic · M07 · 따라 하기형 AGV 실습</a:t>
+              <a:t>ROS 2 기반 AGV End-to-End 개발 커리큘럼 · M07 · Block B</a:t>
             </a:r>
           </a:p>
         </p:txBody>
@@ -20907,7 +20907,7 @@
               <a:spcAft>
                 <a:spcPts val="0"/>
               </a:spcAft>
-              <a:defRPr sz="1000" b="0">
+              <a:defRPr sz="900" b="0">
                 <a:solidFill>
                   <a:srgbClr val="5C6672"/>
                 </a:solidFill>
@@ -20915,7 +20915,7 @@
               </a:defRPr>
             </a:pPr>
             <a:r>
-              <a:t>ROS 2 Jazzy · Gazebo Harmonic · M07 · 따라 하기형 AGV 실습</a:t>
+              <a:t>ROS 2 기반 AGV End-to-End 개발 커리큘럼 · M07 · Block B</a:t>
             </a:r>
           </a:p>
         </p:txBody>
@@ -21240,7 +21240,7 @@
               <a:spcAft>
                 <a:spcPts val="0"/>
               </a:spcAft>
-              <a:defRPr sz="1000" b="0">
+              <a:defRPr sz="900" b="0">
                 <a:solidFill>
                   <a:srgbClr val="5C6672"/>
                 </a:solidFill>
@@ -21248,7 +21248,7 @@
               </a:defRPr>
             </a:pPr>
             <a:r>
-              <a:t>ROS 2 Jazzy · Gazebo Harmonic · M07 · 따라 하기형 AGV 실습</a:t>
+              <a:t>ROS 2 기반 AGV End-to-End 개발 커리큘럼 · M07 · Block B</a:t>
             </a:r>
           </a:p>
         </p:txBody>
@@ -21880,7 +21880,7 @@
               <a:spcAft>
                 <a:spcPts val="0"/>
               </a:spcAft>
-              <a:defRPr sz="1000" b="0">
+              <a:defRPr sz="900" b="0">
                 <a:solidFill>
                   <a:srgbClr val="5C6672"/>
                 </a:solidFill>
@@ -21888,7 +21888,7 @@
               </a:defRPr>
             </a:pPr>
             <a:r>
-              <a:t>ROS 2 Jazzy · Gazebo Harmonic · M07 · 따라 하기형 AGV 실습</a:t>
+              <a:t>ROS 2 기반 AGV End-to-End 개발 커리큘럼 · M07 · Block B</a:t>
             </a:r>
           </a:p>
         </p:txBody>
@@ -22117,7 +22117,7 @@
               <a:spcAft>
                 <a:spcPts val="0"/>
               </a:spcAft>
-              <a:defRPr sz="1000" b="0">
+              <a:defRPr sz="900" b="0">
                 <a:solidFill>
                   <a:srgbClr val="5C6672"/>
                 </a:solidFill>
@@ -22125,7 +22125,7 @@
               </a:defRPr>
             </a:pPr>
             <a:r>
-              <a:t>ROS 2 Jazzy · Gazebo Harmonic · M07 · 따라 하기형 AGV 실습</a:t>
+              <a:t>ROS 2 기반 AGV End-to-End 개발 커리큘럼 · M07 · Block B</a:t>
             </a:r>
           </a:p>
         </p:txBody>
@@ -22683,7 +22683,7 @@
               <a:spcAft>
                 <a:spcPts val="0"/>
               </a:spcAft>
-              <a:defRPr sz="1000" b="0">
+              <a:defRPr sz="900" b="0">
                 <a:solidFill>
                   <a:srgbClr val="5C6672"/>
                 </a:solidFill>
@@ -22691,7 +22691,7 @@
               </a:defRPr>
             </a:pPr>
             <a:r>
-              <a:t>ROS 2 Jazzy · Gazebo Harmonic · M07 · 따라 하기형 AGV 실습</a:t>
+              <a:t>ROS 2 기반 AGV End-to-End 개발 커리큘럼 · M07 · Block B</a:t>
             </a:r>
           </a:p>
         </p:txBody>
@@ -22958,7 +22958,7 @@
               <a:spcAft>
                 <a:spcPts val="0"/>
               </a:spcAft>
-              <a:defRPr sz="1000" b="0">
+              <a:defRPr sz="900" b="0">
                 <a:solidFill>
                   <a:srgbClr val="5C6672"/>
                 </a:solidFill>
@@ -22966,7 +22966,7 @@
               </a:defRPr>
             </a:pPr>
             <a:r>
-              <a:t>ROS 2 Jazzy · Gazebo Harmonic · M07 · 따라 하기형 AGV 실습</a:t>
+              <a:t>ROS 2 기반 AGV End-to-End 개발 커리큘럼 · M07 · Block B</a:t>
             </a:r>
           </a:p>
         </p:txBody>
